--- a/output/apresentacao_banca2/deck_banca2_curto.pptx
+++ b/output/apresentacao_banca2/deck_banca2_curto.pptx
@@ -21,6 +21,7 @@
     <p:sldId id="411" r:id="rId58"/>
     <p:sldId id="412" r:id="rId59"/>
     <p:sldId id="413" r:id="rId60"/>
+    <p:sldId id="414" r:id="rId61"/>
   </p:sldIdLst>
   <p:sldSz cx="12192000" cy="6858000"/>
   <p:notesSz cx="6858000" cy="9144000"/>
@@ -8801,7 +8802,7 @@
           <a:p>
             <a:r>
               <a:rPr lang="pt-BR" dirty="0"/>
-              <a:t>A H3 é a hipótese central: se a bolsa pesa pouco perto do custo do lugar, ela muda quem escolhe qual vaga (H2) sem mudar quantas vagas preenchem (H1). A H4 pergunta se o médico que chega aumenta a capacidade ou só passa a ser registrado onde já estava. O efeito candidato é o incentivo marginal de R$ 5 mil anunciado, como pacote do corte: em 0,300 e 0,400 mudam também outras regras federais. Não é a participação no PMM-E nem o efeito do Agora Tem Especialistas.</a:t>
+              <a:t>O efeito candidato é o incentivo marginal de R$ 5 mil anunciado, como pacote do corte: em 0,300 e 0,400 mudam também outras regras federais. Não é a participação no PMM-E nem o efeito do Agora Tem Especialistas. Seguimos a cadeia: a regra que permite comparar; o preenchimento (H1); a escolha e o peso da origem (H3, que contém a H2); a oferta (H4).</a:t>
             </a:r>
           </a:p>
         </p:txBody>
@@ -8860,7 +8861,7 @@
           <a:p>
             <a:r>
               <a:rPr lang="pt-BR" dirty="0"/>
-              <a:t>Cada ciclo tem edital, quadro de vagas, escolha dos candidatos e resultado próprios; comparamos sempre dentro do ciclo, perto dos cortes. Célula é estabelecimento × curso. Preenchidas na 1ª chamada: 30,3% das células no ciclo 1, 47,1% no ciclo 2 e 21,7% no ciclo 3 (descritivo). A escolha usa 5.421 candidatos de 1ª opção ligados ao CNES. Cautela: Ciclo 3: só até a 1ª chamada; o CNES depois do início segue congelado.</a:t>
+              <a:t>A ideia da descontinuidade: municípios logo abaixo e logo acima de um corte têm vulnerabilidade quase igual, mas bolsas diferentes; a diferença no corte mede o degrau. O IVS foi medido em 2010, antes do programa, e ninguém muda de faixa. Ciclos: o 1 abriu com o quadro de 24/07/2025, o 2 com o quadro retificado em 19/03/2026 e o 3 com o quadro retificado em 24/07/2026; o seguimento do ciclo 3 no CNES segue congelado. Cautela: Pacote do corte: em 0,300 e 0,400 mudam também outras regras federais.</a:t>
             </a:r>
           </a:p>
         </p:txBody>
@@ -8919,7 +8920,7 @@
           <a:p>
             <a:r>
               <a:rPr lang="pt-BR" dirty="0"/>
-              <a:t>É a evidência de que o desenho existe: o primeiro estágio é a própria regra. Até 0,300, R$ 10 mil; até 0,400, R$ 15 mil; acima, R$ 20 mil. O escore da relação nominal do MS é o IVS 2010 oficial em 404/404 municípios. No ciclo 3, congelado, 747 de 748: o que falta foi criado depois de 2010. O IVS foi medido em 2010, antes do programa. Cautela: Descritivo; outras regras federais mudam nos mesmos cortes: pacote do corte.</a:t>
+              <a:t>É a evidência de que o desenho existe: o primeiro estágio é a própria regra. Até 0,300, R$ 10 mil; até 0,400, R$ 15 mil; acima, R$ 20 mil. O escore da relação nominal do MS é o IVS 2010 oficial em 404/404 municípios. No ciclo 3, congelado, 747 de 748: o que falta foi criado depois de 2010. Cautela: Outras regras federais mudam nos mesmos cortes: pacote do corte.</a:t>
             </a:r>
           </a:p>
         </p:txBody>
@@ -8978,7 +8979,7 @@
           <a:p>
             <a:r>
               <a:rPr lang="pt-BR" dirty="0"/>
-              <a:t>É o gráfico clássico da RDD, sem nenhum controle: cada ponto é a média de uma faixa estreita de IVS, e cada linha é a reta local de um lado. Em 0,400, as vagas oferecidas caem de 7,05 para 3,93 por município na janela; em 0,300, ficam em 10,08 e 9,82. A célula preenchida não sobe em nenhum dos dois cortes. Não há acúmulo de municípios logo abaixo dos cortes: o teste de densidade do ciclo 1 tem p de Holm 0,707 em 0,300 e 0,658 em 0,400. Cautela: Descritivo: médias por faixa, sem controles; o teste é a RDD que vem a seguir.</a:t>
+              <a:t>Hipótese H1: onde a bolsa é maior, mais vagas são preenchidas. Sem controle, o salto é o efeito total: abrir vagas e preenchê-las. Com o controle das vagas oferecidas, é o preenchimento dado o número de vagas. A decomposição é exata: total = via oferta + com controle. Sensibilidades: coeficiente único das vagas, inclinação por lado e IC honesto.</a:t>
             </a:r>
           </a:p>
         </p:txBody>
@@ -9037,7 +9038,7 @@
           <a:p>
             <a:r>
               <a:rPr lang="pt-BR" dirty="0"/>
-              <a:t>H1: kernel triangular, h = 0,050, uma reta de cada lado por ciclo e um salto por corte; erro-padrão agrupado por município. Sem o controle, o salto é o efeito total (abrir vagas e preenchê-las); com o controle das vagas oferecidas, é o preenchimento dado o número de vagas. H2 e H3: a curva do IVS absorve o que muda suave com a vulnerabilidade, e só o salto da bolsa nos cortes identifica o peso dela. H4: compara o médico depois de entrar com os que ainda não entraram, a partir do mês anterior à entrada; horas cadastradas, não presença. Cautela: Nos cortes, o contraste é o pacote do corte, não a participação no PMM-E.</a:t>
+              <a:t>Sem controle, o efeito total de abrir vagas e preenchê-las; com controle, o preenchimento dado o número de vagas. A decomposição é exata (Frisch–Waugh–Lovell): sem controle = via vagas + com controle. Em 0,400: −1,36 = −1,22 + −0,14; do lado de bolsa maior há menos vagas oferecidas, e dado o número de vagas a diferença quase some. Em 0,300: −1,56 = −0,11 + −1,45; a oferta não muda (+0,39) e cai a taxa de preenchimento por vaga oferecida, −16,0 p.p. [−27,9; −4,1], 51% dela no ciclo 2. N1 em 0,300 não é lido como queda: linha por corte, sem correção múltipla, com IC honesto que contém zero. TOST com IC de 90%: o limite de cima é +0,1 p.p. e +9,3 p.p. na célula aberta (margem de 10 p.p.) e −0,42 e +0,43 nas vagas por município (margem de 25% da média); só o teste do aumento rejeita. Uma queda desse tamanho não fica descartada. Cautela: TOST: sem aumento de 10 p.p. ou de 25% da média; não dá para dizer que nada mudou.</a:t>
             </a:r>
           </a:p>
         </p:txBody>
@@ -9096,7 +9097,7 @@
           <a:p>
             <a:r>
               <a:rPr lang="pt-BR" dirty="0"/>
-              <a:t>Cada corte separado, ciclos 1 a 3. Célula aberta preenchida (A3): −8,4 p.p. [−18,5; +1,7] em 0,300 e −1,3 p.p. [−14,0; +11,3] em 0,400. Vagas preenchidas por município (N1), dois gráficos na mesma escala: sem controle, o efeito total de abrir vagas e preenchê-las, −1,56 e −1,36; com controle, o preenchimento dado o número de vagas, −1,45 [−2,67; −0,22] em 0,300 e −0,14 [−0,82; +0,54] em 0,400, sobre médias de 2,32 e 1,96 do lado de bolsa menor. N1 em 0,300 não é lido como queda: é uma linha por corte, sem correção múltipla, e o IC honesto vai de −90,23 a +87,34. IC que contém zero não é efeito zero. Cautela: Pacote do corte, IC convencional; N1 em 0,300 não é queda: IC honesto contém zero.</a:t>
+              <a:t>PRELIMINAR: diagnóstico do protocolo 61, ainda em auditoria; descreve o que acompanha a queda, não a causa, e é pós-resultado. Q1 é N1 com controle; Q2, a taxa por vaga oferecida; Q3, a célula aberta preenchida. Sem reta nem efeitos fixos, 33,3% das células da janela são preenchidas abaixo de 0,300 e 33,5% acima. Acima do corte, a parte das células só de cadastro reserva é +15,4 p.p. maior [+2,1; +28,6], o índice de curso é −4,5 p.p. [−7,1; −2,0], e a chance de a célula ter candidato de 1ª opção muda −10,8 p.p. [−28,2; +6,7], com IC que contém zero. Igualando a composição, Q2 vai a −5,1 p.p., 32% do original; igualando a concorrência, a −4,3 p.p., 27%; igualando quem teve candidato de 1ª opção, Q1 vai a −0,49, 34%. Acaso: com os 3 cortes falsos do protocolo, o p por posto é 0,250, o menor possível; numa grade maior, fora do protocolo, 0,031. O corte junta a bolsa com outras regras federais.</a:t>
             </a:r>
           </a:p>
         </p:txBody>
@@ -9155,7 +9156,7 @@
           <a:p>
             <a:r>
               <a:rPr lang="pt-BR" dirty="0"/>
-              <a:t>A decomposição é exata (Frisch–Waugh–Lovell): sem controle = via vagas + com controle. Em 0,400: −1,36 = −1,22 + −0,14; do lado de bolsa maior há menos vagas oferecidas, e dado o número de vagas a diferença quase some. Em 0,300: −1,56 = −0,11 + −1,45; a oferta não muda (+0,39) e cai a taxa de preenchimento por vaga oferecida, −16,0 p.p. [−27,9; −4,1], 51% dela no ciclo 2. Depende da medida: com só as vagas imediatas no denominador, −19,2 p.p. Se as vagas respondem ao corte, o controle compara municípios diferentes; por isso as duas versões. Nenhuma linha por corte tem correção múltipla. Cautela: pacote do corte.</a:t>
+              <a:t>Hipótese H3, a central: a bolsa pesa pouco perto de trabalhar na UF de origem. É o logit condicional da H2 (McFadden): cada um dos 5.421 candidatos escolhe a vaga de maior utilidade entre as do seu curso e ciclo. A curva do IVS absorve o que muda suave com a vulnerabilidade; só o salto da bolsa nos cortes identifica o peso dela. A origem é onde o médico já trabalhava, não uma condição sorteada.</a:t>
             </a:r>
           </a:p>
         </p:txBody>
@@ -9214,7 +9215,7 @@
           <a:p>
             <a:r>
               <a:rPr lang="pt-BR" dirty="0"/>
-              <a:t>O teste de zero pergunta se o salto é diferente de zero; o TOST pergunta se ele é pequeno. Com IC de 90%: A3 em 0,300, [−16,9; +0,1]; em 0,400, [−11,9; +9,3]; N1 em 0,300, [−2,48; −0,42], com margem de 0,58 vaga; em 0,400, [−0,71; +0,43], com margem de 0,49. Nos quatro, só o teste do aumento rejeita: não houve aumento do tamanho da margem ou mais. Uma queda desse tamanho não fica descartada, então não dá para dizer que nada mudou. A barra que sai pela esquerda não é lida como queda. As margens foram fixadas depois de ver os IC (protocolo 60). Cautela: IC convencional; com o IC honesto, nem o descarte do aumento se sustenta.</a:t>
+              <a:t>Os números da figura são pesos na escolha da vaga, em log-chance, não efeitos no preenchimento. Um degrau da bolsa pesa 0,21 [−0,01; 0,44]: a vaga com +R$ 5 mil tem chance 24% maior de ser a 1ª opção (razão de chances 1,24), sem distinção de zero. Toda a bolsa pesa 0,42; a vaga na mesma UF de origem, fora da região de saúde, pesa 2,40. A diferença, 1,98 [1,56; 2,40], p unilateral &lt; 0,001, é o teste da H3, unilateral e pós-resultado: os coeficientes já eram conhecidos. O peso da bolsa tem identificação nos cortes (com as regras do mesmo corte); o da origem é preferência revelada. Cautela: Pós-resultado; o peso da origem é preferência revelada, não efeito causal.</a:t>
             </a:r>
           </a:p>
         </p:txBody>
@@ -9273,7 +9274,7 @@
           <a:p>
             <a:r>
               <a:rPr lang="pt-BR" dirty="0"/>
-              <a:t>Logit condicional com distância (M5), um resultado por ciclo: compara duas vagas abertas do mesmo curso e ciclo que diferem só no degrau de R$ 5 mil, com o IVS contínuo controlado. Ciclo 2: 1,70 [1,22; 2,37], p 0,002; ciclos 1 e 3: 1,07 e 1,00, com IC que contém 1. A igualdade entre ciclos tem p 0,058. Com os três ciclos juntos (M1, a primária), 1,24 [0,99; 1,55], p 0,065: inconclusivo. O logit não vê quem deixou de se candidatar. Cautela: Escolha não é expansão: o que uma vaga ganha, outra do mesmo curso perde.</a:t>
+              <a:t>Incentivo limitado: a política mexe numa variável, e o custo do lugar continua contra. A H2 vira uma frase: logit com distância, um resultado por ciclo, 1,70 [1,22; 2,37] no ciclo 2, p 0,002; 1,07 [0,69; 1,65] no ciclo 1 e 1,00 [0,72; 1,39] no ciclo 3; a igualdade entre ciclos tem p 0,058. Ponte com a H1 (P1g, leitura de consistência, não teste): se só a bolsa subisse um degrau, o modelo prevê +0,20 [−0,01; +0,41] candidato de 1ª opção por célula (estabelecimento × curso) em 0,300 e +0,24 [−0,03; +0,52] em 0,400; a RDD por célula observa −0,66 [−1,36; +0,05] e −0,19 [−1,09; +0,70]. Os intervalos contêm zero e se sobrepõem: o efeito que a escolha implica é pequeno demais para aparecer no preenchimento. O logit não vê quem deixou de se candidatar. Cautela: Escolha não é expansão: o que uma vaga ganha, outra do mesmo curso perde.</a:t>
             </a:r>
           </a:p>
         </p:txBody>
@@ -9332,7 +9333,7 @@
           <a:p>
             <a:r>
               <a:rPr lang="pt-BR" dirty="0"/>
-              <a:t>Os números da figura são pesos na escolha da vaga, em log-chance, não efeitos no preenchimento. Um degrau da bolsa pesa 0,21 [−0,01; 0,44]: a vaga com +R$ 5 mil tem chance 24% maior de ser a 1ª opção (razão de chances 1,24), sem distinção de zero. Toda a bolsa pesa 0,42 [−0,03; 0,87]; a vaga na mesma UF de origem, fora da região de saúde, pesa 2,40 [2,28; 2,53]. A diferença, 1,98 [1,56; 2,40], é o teste da H3, unilateral e pós-resultado. É causal? O peso da bolsa tem identificação nos cortes (com as regras do mesmo corte); o da origem é preferência revelada, porque a origem não é sorteada.</a:t>
+              <a:t>Hipótese H4: o médico que chega aumenta a oferta de especialistas ou só passa a ser registrado onde já estava? O estudo de evento escalonado compara cada médico, depois de entrar, com os que ainda não entraram. Sensibilidades: Rambachan–Roth e a comparação com quem ficou logo abaixo da nota de corte.</a:t>
             </a:r>
           </a:p>
         </p:txBody>
@@ -9391,7 +9392,7 @@
           <a:p>
             <a:r>
               <a:rPr lang="pt-BR" dirty="0"/>
-              <a:t>O médico soma +6,6 h/sem [+5,4; +7,8] de horas totais cadastradas, sobretudo no município do posto (+8,7, com o pré falhando), e perde −2,1 fora dele. 51,0% já tinham vínculo no município do posto. Na comparação com quem ficou logo abaixo da nota de corte, +7,91 [−0,63; +16,45]: mesma direção, IC que contém zero. Não é a participação no PMM-E nem o efeito da bolsa. Cautela: Associação, não efeito da bolsa; horas cadastradas não são presença.</a:t>
+              <a:t>O médico soma +6,6 h/sem [+5,4; +7,8] de horas totais cadastradas, sobretudo no município do posto (+8,7, com o pré falhando), e perde −2,1 fora dele. Na comparação com quem ficou logo abaixo da nota de corte, +7,91 [−0,63; +16,45]: mesma direção, IC que contém zero. Não é a participação no PMM-E nem o efeito da bolsa. Cautela: Associação, não efeito da bolsa; horas cadastradas não são presença.</a:t>
             </a:r>
           </a:p>
         </p:txBody>
@@ -9405,6 +9406,65 @@
 </file>
 
 <file path=ppt/notesSlides/notesSlide34.xml><?xml version="1.0" encoding="utf-8"?>
+<p:notes xmlns:a="http://schemas.openxmlformats.org/drawingml/2006/main" xmlns:r="http://schemas.openxmlformats.org/officeDocument/2006/relationships" xmlns:p="http://schemas.openxmlformats.org/presentationml/2006/main">
+  <p:cSld>
+    <p:spTree>
+      <p:nvGrpSpPr>
+        <p:cNvPr id="1" name=""/>
+        <p:cNvGrpSpPr/>
+        <p:nvPr/>
+      </p:nvGrpSpPr>
+      <p:grpSpPr>
+        <a:xfrm>
+          <a:off x="0" y="0"/>
+          <a:ext cx="0" cy="0"/>
+          <a:chOff x="0" y="0"/>
+          <a:chExt cx="0" cy="0"/>
+        </a:xfrm>
+      </p:grpSpPr>
+      <p:sp>
+        <p:nvSpPr>
+          <p:cNvPr id="2" name="Slide Image Placeholder 1"/>
+          <p:cNvSpPr>
+            <a:spLocks noGrp="1" noRot="1" noChangeAspect="1"/>
+          </p:cNvSpPr>
+          <p:nvPr>
+            <p:ph type="sldImg"/>
+          </p:nvPr>
+        </p:nvSpPr>
+        <p:spPr/>
+      </p:sp>
+      <p:sp>
+        <p:nvSpPr>
+          <p:cNvPr id="3" name="Notes Placeholder 2"/>
+          <p:cNvSpPr>
+            <a:spLocks noGrp="1"/>
+          </p:cNvSpPr>
+          <p:nvPr>
+            <p:ph type="body" idx="1"/>
+          </p:nvPr>
+        </p:nvSpPr>
+        <p:spPr/>
+        <p:txBody>
+          <a:bodyPr/>
+          <a:lstStyle/>
+          <a:p>
+            <a:r>
+              <a:rPr lang="pt-BR" dirty="0"/>
+              <a:t>51,0% [48,4; 53,7] dos médicos já tinham vínculo no município do posto: parte do ganho é registro novo, não médico novo. O efeito da chegada sobre a oferta de especialistas do município e o deslocamento dos outros médicos estão em análise (protocolo 60, parte B), ainda sem resultado para mostrar. Cautela: Associação sob tendências paralelas; não é a participação no PMM-E.</a:t>
+            </a:r>
+          </a:p>
+        </p:txBody>
+      </p:sp>
+    </p:spTree>
+  </p:cSld>
+  <p:clrMapOvr>
+    <a:masterClrMapping/>
+  </p:clrMapOvr>
+</p:notes>
+</file>
+
+<file path=ppt/notesSlides/notesSlide35.xml><?xml version="1.0" encoding="utf-8"?>
 <p:notes xmlns:a="http://schemas.openxmlformats.org/drawingml/2006/main" xmlns:r="http://schemas.openxmlformats.org/officeDocument/2006/relationships" xmlns:p="http://schemas.openxmlformats.org/presentationml/2006/main">
   <p:cSld>
     <p:spTree>
@@ -15381,7 +15441,7 @@
                 </a:solidFill>
                 <a:latin typeface="Montserrat"/>
               </a:rPr>
-              <a:t>Quatro hipóteses: da bolsa anunciada à oferta de especialistas</a:t>
+              <a:t>O que a bolsa de R$ 5 mil faz</a:t>
             </a:r>
           </a:p>
         </p:txBody>
@@ -15504,18 +15564,18 @@
       </p:sp>
       <p:sp>
         <p:nvSpPr>
-          <p:cNvPr id="101" name="Rótulo"/>
+          <p:cNvPr id="101" name="Capa"/>
           <p:cNvSpPr/>
           <p:nvPr/>
         </p:nvSpPr>
         <p:spPr>
           <a:xfrm>
-            <a:off x="292608" y="896112"/>
-            <a:ext cx="1097280" cy="960120"/>
+            <a:off x="841248" y="2487168"/>
+            <a:ext cx="10497312" cy="2011680"/>
           </a:xfrm>
           <a:prstGeom prst="roundRect">
             <a:avLst>
-              <a:gd name="adj" fmla="val 10000"/>
+              <a:gd name="adj" fmla="val 8000"/>
             </a:avLst>
           </a:prstGeom>
           <a:solidFill>
@@ -15526,7 +15586,7 @@
           </a:ln>
         </p:spPr>
         <p:txBody>
-          <a:bodyPr wrap="square" lIns="73152" tIns="45720" rIns="73152" bIns="45720" rtlCol="0" anchor="ctr">
+          <a:bodyPr wrap="square" lIns="365760" tIns="91440" rIns="365760" bIns="91440" rtlCol="0" anchor="ctr">
             <a:noAutofit/>
           </a:bodyPr>
           <a:lstStyle/>
@@ -15544,399 +15604,20 @@
               <a:buNone/>
             </a:pPr>
             <a:r>
-              <a:rPr lang="pt-BR" sz="2400" b="1" dirty="0">
+              <a:rPr lang="pt-BR" sz="3000" b="0" dirty="0">
                 <a:solidFill>
                   <a:srgbClr val="FFFFFF"/>
                 </a:solidFill>
                 <a:latin typeface="Montserrat"/>
               </a:rPr>
-              <a:t>H1</a:t>
+              <a:t>R$ 5 mil a mais nos cortes do IVS: preenchimento, escolha e oferta de especialistas</a:t>
             </a:r>
           </a:p>
         </p:txBody>
       </p:sp>
       <p:sp>
         <p:nvSpPr>
-          <p:cNvPr id="102" name="Item"/>
-          <p:cNvSpPr/>
-          <p:nvPr/>
-        </p:nvSpPr>
-        <p:spPr>
-          <a:xfrm>
-            <a:off x="1527048" y="896112"/>
-            <a:ext cx="10360152" cy="960120"/>
-          </a:xfrm>
-          <a:prstGeom prst="roundRect">
-            <a:avLst>
-              <a:gd name="adj" fmla="val 6000"/>
-            </a:avLst>
-          </a:prstGeom>
-          <a:solidFill>
-            <a:srgbClr val="F4F8F5"/>
-          </a:solidFill>
-          <a:ln w="12700">
-            <a:solidFill>
-              <a:srgbClr val="056429"/>
-            </a:solidFill>
-          </a:ln>
-        </p:spPr>
-        <p:txBody>
-          <a:bodyPr wrap="square" lIns="228600" tIns="36576" rIns="228600" bIns="36576" rtlCol="0" anchor="ctr">
-            <a:noAutofit/>
-          </a:bodyPr>
-          <a:lstStyle/>
-          <a:p>
-            <a:pPr marL="0" indent="0" algn="l">
-              <a:lnSpc>
-                <a:spcPct val="100000"/>
-              </a:lnSpc>
-              <a:spcBef>
-                <a:spcPts val="0"/>
-              </a:spcBef>
-              <a:spcAft>
-                <a:spcPts val="0"/>
-              </a:spcAft>
-              <a:buNone/>
-            </a:pPr>
-            <a:r>
-              <a:rPr lang="pt-BR" sz="2400" b="0" dirty="0">
-                <a:solidFill>
-                  <a:srgbClr val="3A3A3A"/>
-                </a:solidFill>
-                <a:latin typeface="Montserrat"/>
-              </a:rPr>
-              <a:t>Bolsa maior → mais vagas preenchidas</a:t>
-            </a:r>
-          </a:p>
-        </p:txBody>
-      </p:sp>
-      <p:sp>
-        <p:nvSpPr>
-          <p:cNvPr id="103" name="Rótulo"/>
-          <p:cNvSpPr/>
-          <p:nvPr/>
-        </p:nvSpPr>
-        <p:spPr>
-          <a:xfrm>
-            <a:off x="292608" y="2057400"/>
-            <a:ext cx="1097280" cy="960120"/>
-          </a:xfrm>
-          <a:prstGeom prst="roundRect">
-            <a:avLst>
-              <a:gd name="adj" fmla="val 10000"/>
-            </a:avLst>
-          </a:prstGeom>
-          <a:solidFill>
-            <a:srgbClr val="114719"/>
-          </a:solidFill>
-          <a:ln>
-            <a:noFill/>
-          </a:ln>
-        </p:spPr>
-        <p:txBody>
-          <a:bodyPr wrap="square" lIns="73152" tIns="45720" rIns="73152" bIns="45720" rtlCol="0" anchor="ctr">
-            <a:noAutofit/>
-          </a:bodyPr>
-          <a:lstStyle/>
-          <a:p>
-            <a:pPr marL="0" indent="0" algn="ctr">
-              <a:lnSpc>
-                <a:spcPct val="100000"/>
-              </a:lnSpc>
-              <a:spcBef>
-                <a:spcPts val="0"/>
-              </a:spcBef>
-              <a:spcAft>
-                <a:spcPts val="0"/>
-              </a:spcAft>
-              <a:buNone/>
-            </a:pPr>
-            <a:r>
-              <a:rPr lang="pt-BR" sz="2400" b="1" dirty="0">
-                <a:solidFill>
-                  <a:srgbClr val="FFFFFF"/>
-                </a:solidFill>
-                <a:latin typeface="Montserrat"/>
-              </a:rPr>
-              <a:t>H2</a:t>
-            </a:r>
-          </a:p>
-        </p:txBody>
-      </p:sp>
-      <p:sp>
-        <p:nvSpPr>
-          <p:cNvPr id="104" name="Item"/>
-          <p:cNvSpPr/>
-          <p:nvPr/>
-        </p:nvSpPr>
-        <p:spPr>
-          <a:xfrm>
-            <a:off x="1527048" y="2057400"/>
-            <a:ext cx="10360152" cy="960120"/>
-          </a:xfrm>
-          <a:prstGeom prst="roundRect">
-            <a:avLst>
-              <a:gd name="adj" fmla="val 6000"/>
-            </a:avLst>
-          </a:prstGeom>
-          <a:solidFill>
-            <a:srgbClr val="F4F8F5"/>
-          </a:solidFill>
-          <a:ln w="12700">
-            <a:solidFill>
-              <a:srgbClr val="056429"/>
-            </a:solidFill>
-          </a:ln>
-        </p:spPr>
-        <p:txBody>
-          <a:bodyPr wrap="square" lIns="228600" tIns="36576" rIns="228600" bIns="36576" rtlCol="0" anchor="ctr">
-            <a:noAutofit/>
-          </a:bodyPr>
-          <a:lstStyle/>
-          <a:p>
-            <a:pPr marL="0" indent="0" algn="l">
-              <a:lnSpc>
-                <a:spcPct val="100000"/>
-              </a:lnSpc>
-              <a:spcBef>
-                <a:spcPts val="0"/>
-              </a:spcBef>
-              <a:spcAft>
-                <a:spcPts val="0"/>
-              </a:spcAft>
-              <a:buNone/>
-            </a:pPr>
-            <a:r>
-              <a:rPr lang="pt-BR" sz="2400" b="0" dirty="0">
-                <a:solidFill>
-                  <a:srgbClr val="3A3A3A"/>
-                </a:solidFill>
-                <a:latin typeface="Montserrat"/>
-              </a:rPr>
-              <a:t>Bolsa maior → vaga mais escolhida pelos médicos</a:t>
-            </a:r>
-          </a:p>
-        </p:txBody>
-      </p:sp>
-      <p:sp>
-        <p:nvSpPr>
-          <p:cNvPr id="105" name="Rótulo"/>
-          <p:cNvSpPr/>
-          <p:nvPr/>
-        </p:nvSpPr>
-        <p:spPr>
-          <a:xfrm>
-            <a:off x="292608" y="3218688"/>
-            <a:ext cx="1097280" cy="960120"/>
-          </a:xfrm>
-          <a:prstGeom prst="roundRect">
-            <a:avLst>
-              <a:gd name="adj" fmla="val 10000"/>
-            </a:avLst>
-          </a:prstGeom>
-          <a:solidFill>
-            <a:srgbClr val="114719"/>
-          </a:solidFill>
-          <a:ln>
-            <a:noFill/>
-          </a:ln>
-        </p:spPr>
-        <p:txBody>
-          <a:bodyPr wrap="square" lIns="73152" tIns="45720" rIns="73152" bIns="45720" rtlCol="0" anchor="ctr">
-            <a:noAutofit/>
-          </a:bodyPr>
-          <a:lstStyle/>
-          <a:p>
-            <a:pPr marL="0" indent="0" algn="ctr">
-              <a:lnSpc>
-                <a:spcPct val="100000"/>
-              </a:lnSpc>
-              <a:spcBef>
-                <a:spcPts val="0"/>
-              </a:spcBef>
-              <a:spcAft>
-                <a:spcPts val="0"/>
-              </a:spcAft>
-              <a:buNone/>
-            </a:pPr>
-            <a:r>
-              <a:rPr lang="pt-BR" sz="2400" b="1" dirty="0">
-                <a:solidFill>
-                  <a:srgbClr val="FFFFFF"/>
-                </a:solidFill>
-                <a:latin typeface="Montserrat"/>
-              </a:rPr>
-              <a:t>H3</a:t>
-            </a:r>
-          </a:p>
-        </p:txBody>
-      </p:sp>
-      <p:sp>
-        <p:nvSpPr>
-          <p:cNvPr id="106" name="Item"/>
-          <p:cNvSpPr/>
-          <p:nvPr/>
-        </p:nvSpPr>
-        <p:spPr>
-          <a:xfrm>
-            <a:off x="1527048" y="3218688"/>
-            <a:ext cx="10360152" cy="960120"/>
-          </a:xfrm>
-          <a:prstGeom prst="roundRect">
-            <a:avLst>
-              <a:gd name="adj" fmla="val 6000"/>
-            </a:avLst>
-          </a:prstGeom>
-          <a:solidFill>
-            <a:srgbClr val="F4F8F5"/>
-          </a:solidFill>
-          <a:ln w="12700">
-            <a:solidFill>
-              <a:srgbClr val="056429"/>
-            </a:solidFill>
-          </a:ln>
-        </p:spPr>
-        <p:txBody>
-          <a:bodyPr wrap="square" lIns="228600" tIns="36576" rIns="228600" bIns="36576" rtlCol="0" anchor="ctr">
-            <a:noAutofit/>
-          </a:bodyPr>
-          <a:lstStyle/>
-          <a:p>
-            <a:pPr marL="0" indent="0" algn="l">
-              <a:lnSpc>
-                <a:spcPct val="100000"/>
-              </a:lnSpc>
-              <a:spcBef>
-                <a:spcPts val="0"/>
-              </a:spcBef>
-              <a:spcAft>
-                <a:spcPts val="0"/>
-              </a:spcAft>
-              <a:buNone/>
-            </a:pPr>
-            <a:r>
-              <a:rPr lang="pt-BR" sz="2400" b="0" dirty="0">
-                <a:solidFill>
-                  <a:srgbClr val="3A3A3A"/>
-                </a:solidFill>
-                <a:latin typeface="Montserrat"/>
-              </a:rPr>
-              <a:t>A bolsa pesa pouco perto da origem do médico</a:t>
-            </a:r>
-          </a:p>
-        </p:txBody>
-      </p:sp>
-      <p:sp>
-        <p:nvSpPr>
-          <p:cNvPr id="107" name="Rótulo"/>
-          <p:cNvSpPr/>
-          <p:nvPr/>
-        </p:nvSpPr>
-        <p:spPr>
-          <a:xfrm>
-            <a:off x="292608" y="4379976"/>
-            <a:ext cx="1097280" cy="960120"/>
-          </a:xfrm>
-          <a:prstGeom prst="roundRect">
-            <a:avLst>
-              <a:gd name="adj" fmla="val 10000"/>
-            </a:avLst>
-          </a:prstGeom>
-          <a:solidFill>
-            <a:srgbClr val="114719"/>
-          </a:solidFill>
-          <a:ln>
-            <a:noFill/>
-          </a:ln>
-        </p:spPr>
-        <p:txBody>
-          <a:bodyPr wrap="square" lIns="73152" tIns="45720" rIns="73152" bIns="45720" rtlCol="0" anchor="ctr">
-            <a:noAutofit/>
-          </a:bodyPr>
-          <a:lstStyle/>
-          <a:p>
-            <a:pPr marL="0" indent="0" algn="ctr">
-              <a:lnSpc>
-                <a:spcPct val="100000"/>
-              </a:lnSpc>
-              <a:spcBef>
-                <a:spcPts val="0"/>
-              </a:spcBef>
-              <a:spcAft>
-                <a:spcPts val="0"/>
-              </a:spcAft>
-              <a:buNone/>
-            </a:pPr>
-            <a:r>
-              <a:rPr lang="pt-BR" sz="2400" b="1" dirty="0">
-                <a:solidFill>
-                  <a:srgbClr val="FFFFFF"/>
-                </a:solidFill>
-                <a:latin typeface="Montserrat"/>
-              </a:rPr>
-              <a:t>H4</a:t>
-            </a:r>
-          </a:p>
-        </p:txBody>
-      </p:sp>
-      <p:sp>
-        <p:nvSpPr>
-          <p:cNvPr id="108" name="Item"/>
-          <p:cNvSpPr/>
-          <p:nvPr/>
-        </p:nvSpPr>
-        <p:spPr>
-          <a:xfrm>
-            <a:off x="1527048" y="4379976"/>
-            <a:ext cx="10360152" cy="960120"/>
-          </a:xfrm>
-          <a:prstGeom prst="roundRect">
-            <a:avLst>
-              <a:gd name="adj" fmla="val 6000"/>
-            </a:avLst>
-          </a:prstGeom>
-          <a:solidFill>
-            <a:srgbClr val="F4F8F5"/>
-          </a:solidFill>
-          <a:ln w="12700">
-            <a:solidFill>
-              <a:srgbClr val="056429"/>
-            </a:solidFill>
-          </a:ln>
-        </p:spPr>
-        <p:txBody>
-          <a:bodyPr wrap="square" lIns="228600" tIns="36576" rIns="228600" bIns="36576" rtlCol="0" anchor="ctr">
-            <a:noAutofit/>
-          </a:bodyPr>
-          <a:lstStyle/>
-          <a:p>
-            <a:pPr marL="0" indent="0" algn="l">
-              <a:lnSpc>
-                <a:spcPct val="100000"/>
-              </a:lnSpc>
-              <a:spcBef>
-                <a:spcPts val="0"/>
-              </a:spcBef>
-              <a:spcAft>
-                <a:spcPts val="0"/>
-              </a:spcAft>
-              <a:buNone/>
-            </a:pPr>
-            <a:r>
-              <a:rPr lang="pt-BR" sz="2400" b="0" dirty="0">
-                <a:solidFill>
-                  <a:srgbClr val="3A3A3A"/>
-                </a:solidFill>
-                <a:latin typeface="Montserrat"/>
-              </a:rPr>
-              <a:t>A chegada aumenta a oferta ou só remaneja?</a:t>
-            </a:r>
-          </a:p>
-        </p:txBody>
-      </p:sp>
-      <p:sp>
-        <p:nvSpPr>
-          <p:cNvPr id="109" name="Fontes"/>
+          <p:cNvPr id="102" name="Fontes"/>
           <p:cNvSpPr txBox="1"/>
           <p:nvPr/>
         </p:nvSpPr>
@@ -15987,7 +15668,7 @@
                 </a:solidFill>
                 <a:latin typeface="Montserrat"/>
               </a:rPr>
-              <a:t>plano da banca 2, §3; modelo da banca 1.</a:t>
+              <a:t>plano da banca 2, §3; doc 57.</a:t>
             </a:r>
           </a:p>
         </p:txBody>
@@ -16050,7 +15731,7 @@
                 </a:solidFill>
                 <a:latin typeface="Montserrat"/>
               </a:rPr>
-              <a:t>O PMM-E já rodou três ciclos, e usamos os três</a:t>
+              <a:t>A bolsa sai do IVS de 2010: dá para comparar no corte</a:t>
             </a:r>
           </a:p>
         </p:txBody>
@@ -16142,25 +15823,25 @@
               <a:t>Hipótese  |  </a:t>
             </a:r>
             <a:r>
+              <a:rPr lang="pt-BR" sz="1000" dirty="0">
+                <a:latin typeface="Montserrat"/>
+              </a:rPr>
+              <a:t>Base de Dados  |  </a:t>
+            </a:r>
+            <a:r>
               <a:rPr lang="pt-BR" sz="1000" b="1" dirty="0">
                 <a:solidFill>
                   <a:srgbClr val="114719"/>
                 </a:solidFill>
                 <a:latin typeface="Montserrat"/>
               </a:rPr>
-              <a:t>Base de Dados</a:t>
+              <a:t>Metodologia</a:t>
             </a:r>
             <a:r>
               <a:rPr lang="pt-BR" sz="1000" dirty="0">
                 <a:latin typeface="Montserrat"/>
               </a:rPr>
               <a:t>  |  </a:t>
-            </a:r>
-            <a:r>
-              <a:rPr lang="pt-BR" sz="1000" dirty="0">
-                <a:latin typeface="Montserrat"/>
-              </a:rPr>
-              <a:t>Metodologia  |  </a:t>
             </a:r>
             <a:r>
               <a:rPr lang="pt-BR" sz="1000" dirty="0">
@@ -16179,7 +15860,7 @@
         </p:nvSpPr>
         <p:spPr>
           <a:xfrm>
-            <a:off x="292608" y="5687568"/>
+            <a:off x="292608" y="5669280"/>
             <a:ext cx="11594592" cy="420624"/>
           </a:xfrm>
           <a:prstGeom prst="roundRect">
@@ -16219,1346 +15900,338 @@
                 </a:solidFill>
                 <a:latin typeface="Montserrat"/>
               </a:rPr>
-              <a:t>Ciclo 3: só até a 1ª chamada; o CNES depois do início segue congelado.</a:t>
+              <a:t>Pacote do corte: em 0,300 e 0,400 mudam também outras regras federais.</a:t>
             </a:r>
           </a:p>
         </p:txBody>
       </p:sp>
-      <p:graphicFrame>
-        <p:nvGraphicFramePr>
-          <p:cNvPr id="102" name="Tabela"/>
-          <p:cNvGraphicFramePr>
-            <a:graphicFrameLocks noGrp="1"/>
-          </p:cNvGraphicFramePr>
-          <p:nvPr/>
-        </p:nvGraphicFramePr>
-        <p:xfrm>
-          <a:off x="292608" y="850392"/>
-          <a:ext cx="11594592" cy="4456328"/>
-        </p:xfrm>
-        <a:graphic>
-          <a:graphicData uri="http://schemas.openxmlformats.org/drawingml/2006/table">
-            <a:tbl>
-              <a:tblPr firstRow="1" bandRow="1"/>
-              <a:tblGrid>
-                <a:gridCol w="909828"/>
-                <a:gridCol w="1193292"/>
-                <a:gridCol w="1962374"/>
-                <a:gridCol w="1853733"/>
-                <a:gridCol w="1661077"/>
-                <a:gridCol w="4014288"/>
-              </a:tblGrid>
-              <a:tr h="925830">
-                <a:tc>
-                  <a:txBody>
-                    <a:bodyPr/>
-                    <a:lstStyle/>
-                    <a:p>
-                      <a:pPr marL="0" indent="0" algn="l">
-                        <a:lnSpc>
-                          <a:spcPct val="100000"/>
-                        </a:lnSpc>
-                        <a:spcBef>
-                          <a:spcPts val="0"/>
-                        </a:spcBef>
-                        <a:spcAft>
-                          <a:spcPts val="0"/>
-                        </a:spcAft>
-                        <a:buNone/>
-                      </a:pPr>
-                      <a:r>
-                        <a:rPr lang="pt-BR" sz="1800" b="1" dirty="0">
-                          <a:solidFill>
-                            <a:srgbClr val="FFFFFF"/>
-                          </a:solidFill>
-                          <a:latin typeface="Montserrat"/>
-                        </a:rPr>
-                        <a:t>Ciclo</a:t>
-                      </a:r>
-                    </a:p>
-                  </a:txBody>
-                  <a:tcPr marL="73152" marR="73152" marT="36576" marB="36576" anchor="ctr">
-                    <a:lnL w="6350">
-                      <a:solidFill>
-                        <a:srgbClr val="C9DED1"/>
-                      </a:solidFill>
-                    </a:lnL>
-                    <a:lnR w="6350">
-                      <a:solidFill>
-                        <a:srgbClr val="C9DED1"/>
-                      </a:solidFill>
-                    </a:lnR>
-                    <a:lnT w="6350">
-                      <a:solidFill>
-                        <a:srgbClr val="C9DED1"/>
-                      </a:solidFill>
-                    </a:lnT>
-                    <a:lnB w="6350">
-                      <a:solidFill>
-                        <a:srgbClr val="C9DED1"/>
-                      </a:solidFill>
-                    </a:lnB>
-                    <a:solidFill>
-                      <a:srgbClr val="114719"/>
-                    </a:solidFill>
-                  </a:tcPr>
-                </a:tc>
-                <a:tc>
-                  <a:txBody>
-                    <a:bodyPr/>
-                    <a:lstStyle/>
-                    <a:p>
-                      <a:pPr marL="0" indent="0" algn="l">
-                        <a:lnSpc>
-                          <a:spcPct val="100000"/>
-                        </a:lnSpc>
-                        <a:spcBef>
-                          <a:spcPts val="0"/>
-                        </a:spcBef>
-                        <a:spcAft>
-                          <a:spcPts val="0"/>
-                        </a:spcAft>
-                        <a:buNone/>
-                      </a:pPr>
-                      <a:r>
-                        <a:rPr lang="pt-BR" sz="1800" b="1" dirty="0">
-                          <a:solidFill>
-                            <a:srgbClr val="FFFFFF"/>
-                          </a:solidFill>
-                          <a:latin typeface="Montserrat"/>
-                        </a:rPr>
-                        <a:t>Edital</a:t>
-                      </a:r>
-                    </a:p>
-                  </a:txBody>
-                  <a:tcPr marL="73152" marR="73152" marT="36576" marB="36576" anchor="ctr">
-                    <a:lnL w="6350">
-                      <a:solidFill>
-                        <a:srgbClr val="C9DED1"/>
-                      </a:solidFill>
-                    </a:lnL>
-                    <a:lnR w="6350">
-                      <a:solidFill>
-                        <a:srgbClr val="C9DED1"/>
-                      </a:solidFill>
-                    </a:lnR>
-                    <a:lnT w="6350">
-                      <a:solidFill>
-                        <a:srgbClr val="C9DED1"/>
-                      </a:solidFill>
-                    </a:lnT>
-                    <a:lnB w="6350">
-                      <a:solidFill>
-                        <a:srgbClr val="C9DED1"/>
-                      </a:solidFill>
-                    </a:lnB>
-                    <a:solidFill>
-                      <a:srgbClr val="114719"/>
-                    </a:solidFill>
-                  </a:tcPr>
-                </a:tc>
-                <a:tc>
-                  <a:txBody>
-                    <a:bodyPr/>
-                    <a:lstStyle/>
-                    <a:p>
-                      <a:pPr marL="0" indent="0" algn="l">
-                        <a:lnSpc>
-                          <a:spcPct val="100000"/>
-                        </a:lnSpc>
-                        <a:spcBef>
-                          <a:spcPts val="0"/>
-                        </a:spcBef>
-                        <a:spcAft>
-                          <a:spcPts val="0"/>
-                        </a:spcAft>
-                        <a:buNone/>
-                      </a:pPr>
-                      <a:r>
-                        <a:rPr lang="pt-BR" sz="1800" b="1" dirty="0">
-                          <a:solidFill>
-                            <a:srgbClr val="FFFFFF"/>
-                          </a:solidFill>
-                          <a:latin typeface="Montserrat"/>
-                        </a:rPr>
-                        <a:t>Quadro de vagas</a:t>
-                      </a:r>
-                    </a:p>
-                  </a:txBody>
-                  <a:tcPr marL="73152" marR="73152" marT="36576" marB="36576" anchor="ctr">
-                    <a:lnL w="6350">
-                      <a:solidFill>
-                        <a:srgbClr val="C9DED1"/>
-                      </a:solidFill>
-                    </a:lnL>
-                    <a:lnR w="6350">
-                      <a:solidFill>
-                        <a:srgbClr val="C9DED1"/>
-                      </a:solidFill>
-                    </a:lnR>
-                    <a:lnT w="6350">
-                      <a:solidFill>
-                        <a:srgbClr val="C9DED1"/>
-                      </a:solidFill>
-                    </a:lnT>
-                    <a:lnB w="6350">
-                      <a:solidFill>
-                        <a:srgbClr val="C9DED1"/>
-                      </a:solidFill>
-                    </a:lnB>
-                    <a:solidFill>
-                      <a:srgbClr val="114719"/>
-                    </a:solidFill>
-                  </a:tcPr>
-                </a:tc>
-                <a:tc>
-                  <a:txBody>
-                    <a:bodyPr/>
-                    <a:lstStyle/>
-                    <a:p>
-                      <a:pPr marL="0" indent="0" algn="l">
-                        <a:lnSpc>
-                          <a:spcPct val="100000"/>
-                        </a:lnSpc>
-                        <a:spcBef>
-                          <a:spcPts val="0"/>
-                        </a:spcBef>
-                        <a:spcAft>
-                          <a:spcPts val="0"/>
-                        </a:spcAft>
-                        <a:buNone/>
-                      </a:pPr>
-                      <a:r>
-                        <a:rPr lang="pt-BR" sz="1800" b="1" dirty="0">
-                          <a:solidFill>
-                            <a:srgbClr val="FFFFFF"/>
-                          </a:solidFill>
-                          <a:latin typeface="Montserrat"/>
-                        </a:rPr>
-                        <a:t>Resultado (1ª chamada)</a:t>
-                      </a:r>
-                    </a:p>
-                  </a:txBody>
-                  <a:tcPr marL="73152" marR="73152" marT="36576" marB="36576" anchor="ctr">
-                    <a:lnL w="6350">
-                      <a:solidFill>
-                        <a:srgbClr val="C9DED1"/>
-                      </a:solidFill>
-                    </a:lnL>
-                    <a:lnR w="6350">
-                      <a:solidFill>
-                        <a:srgbClr val="C9DED1"/>
-                      </a:solidFill>
-                    </a:lnR>
-                    <a:lnT w="6350">
-                      <a:solidFill>
-                        <a:srgbClr val="C9DED1"/>
-                      </a:solidFill>
-                    </a:lnT>
-                    <a:lnB w="6350">
-                      <a:solidFill>
-                        <a:srgbClr val="C9DED1"/>
-                      </a:solidFill>
-                    </a:lnB>
-                    <a:solidFill>
-                      <a:srgbClr val="114719"/>
-                    </a:solidFill>
-                  </a:tcPr>
-                </a:tc>
-                <a:tc>
-                  <a:txBody>
-                    <a:bodyPr/>
-                    <a:lstStyle/>
-                    <a:p>
-                      <a:pPr marL="0" indent="0" algn="l">
-                        <a:lnSpc>
-                          <a:spcPct val="100000"/>
-                        </a:lnSpc>
-                        <a:spcBef>
-                          <a:spcPts val="0"/>
-                        </a:spcBef>
-                        <a:spcAft>
-                          <a:spcPts val="0"/>
-                        </a:spcAft>
-                        <a:buNone/>
-                      </a:pPr>
-                      <a:r>
-                        <a:rPr lang="pt-BR" sz="1800" b="1" dirty="0">
-                          <a:solidFill>
-                            <a:srgbClr val="FFFFFF"/>
-                          </a:solidFill>
-                          <a:latin typeface="Montserrat"/>
-                        </a:rPr>
-                        <a:t>Municípios · células</a:t>
-                      </a:r>
-                    </a:p>
-                  </a:txBody>
-                  <a:tcPr marL="73152" marR="73152" marT="36576" marB="36576" anchor="ctr">
-                    <a:lnL w="6350">
-                      <a:solidFill>
-                        <a:srgbClr val="C9DED1"/>
-                      </a:solidFill>
-                    </a:lnL>
-                    <a:lnR w="6350">
-                      <a:solidFill>
-                        <a:srgbClr val="C9DED1"/>
-                      </a:solidFill>
-                    </a:lnR>
-                    <a:lnT w="6350">
-                      <a:solidFill>
-                        <a:srgbClr val="C9DED1"/>
-                      </a:solidFill>
-                    </a:lnT>
-                    <a:lnB w="6350">
-                      <a:solidFill>
-                        <a:srgbClr val="C9DED1"/>
-                      </a:solidFill>
-                    </a:lnB>
-                    <a:solidFill>
-                      <a:srgbClr val="114719"/>
-                    </a:solidFill>
-                  </a:tcPr>
-                </a:tc>
-                <a:tc>
-                  <a:txBody>
-                    <a:bodyPr/>
-                    <a:lstStyle/>
-                    <a:p>
-                      <a:pPr marL="0" indent="0" algn="l">
-                        <a:lnSpc>
-                          <a:spcPct val="100000"/>
-                        </a:lnSpc>
-                        <a:spcBef>
-                          <a:spcPts val="0"/>
-                        </a:spcBef>
-                        <a:spcAft>
-                          <a:spcPts val="0"/>
-                        </a:spcAft>
-                        <a:buNone/>
-                      </a:pPr>
-                      <a:r>
-                        <a:rPr lang="pt-BR" sz="1800" b="1" dirty="0">
-                          <a:solidFill>
-                            <a:srgbClr val="FFFFFF"/>
-                          </a:solidFill>
-                          <a:latin typeface="Montserrat"/>
-                        </a:rPr>
-                        <a:t>O que temos</a:t>
-                      </a:r>
-                    </a:p>
-                  </a:txBody>
-                  <a:tcPr marL="73152" marR="73152" marT="36576" marB="36576" anchor="ctr">
-                    <a:lnL w="6350">
-                      <a:solidFill>
-                        <a:srgbClr val="C9DED1"/>
-                      </a:solidFill>
-                    </a:lnL>
-                    <a:lnR w="6350">
-                      <a:solidFill>
-                        <a:srgbClr val="C9DED1"/>
-                      </a:solidFill>
-                    </a:lnR>
-                    <a:lnT w="6350">
-                      <a:solidFill>
-                        <a:srgbClr val="C9DED1"/>
-                      </a:solidFill>
-                    </a:lnT>
-                    <a:lnB w="6350">
-                      <a:solidFill>
-                        <a:srgbClr val="C9DED1"/>
-                      </a:solidFill>
-                    </a:lnB>
-                    <a:solidFill>
-                      <a:srgbClr val="114719"/>
-                    </a:solidFill>
-                  </a:tcPr>
-                </a:tc>
-              </a:tr>
-              <a:tr h="1302334">
-                <a:tc>
-                  <a:txBody>
-                    <a:bodyPr/>
-                    <a:lstStyle/>
-                    <a:p>
-                      <a:pPr marL="0" indent="0" algn="l">
-                        <a:lnSpc>
-                          <a:spcPct val="100000"/>
-                        </a:lnSpc>
-                        <a:spcBef>
-                          <a:spcPts val="0"/>
-                        </a:spcBef>
-                        <a:spcAft>
-                          <a:spcPts val="0"/>
-                        </a:spcAft>
-                        <a:buNone/>
-                      </a:pPr>
-                      <a:r>
-                        <a:rPr lang="pt-BR" sz="1800" b="1" dirty="0">
-                          <a:solidFill>
-                            <a:srgbClr val="3A3A3A"/>
-                          </a:solidFill>
-                          <a:latin typeface="Montserrat"/>
-                        </a:rPr>
-                        <a:t>1</a:t>
-                      </a:r>
-                    </a:p>
-                  </a:txBody>
-                  <a:tcPr marL="73152" marR="73152" marT="36576" marB="36576" anchor="ctr">
-                    <a:lnL w="6350">
-                      <a:solidFill>
-                        <a:srgbClr val="C9DED1"/>
-                      </a:solidFill>
-                    </a:lnL>
-                    <a:lnR w="6350">
-                      <a:solidFill>
-                        <a:srgbClr val="C9DED1"/>
-                      </a:solidFill>
-                    </a:lnR>
-                    <a:lnT w="6350">
-                      <a:solidFill>
-                        <a:srgbClr val="C9DED1"/>
-                      </a:solidFill>
-                    </a:lnT>
-                    <a:lnB w="6350">
-                      <a:solidFill>
-                        <a:srgbClr val="C9DED1"/>
-                      </a:solidFill>
-                    </a:lnB>
-                    <a:solidFill>
-                      <a:srgbClr val="F3F7F3"/>
-                    </a:solidFill>
-                  </a:tcPr>
-                </a:tc>
-                <a:tc>
-                  <a:txBody>
-                    <a:bodyPr/>
-                    <a:lstStyle/>
-                    <a:p>
-                      <a:pPr marL="0" indent="0" algn="l">
-                        <a:lnSpc>
-                          <a:spcPct val="100000"/>
-                        </a:lnSpc>
-                        <a:spcBef>
-                          <a:spcPts val="0"/>
-                        </a:spcBef>
-                        <a:spcAft>
-                          <a:spcPts val="0"/>
-                        </a:spcAft>
-                        <a:buNone/>
-                      </a:pPr>
-                      <a:r>
-                        <a:rPr lang="pt-BR" sz="1800" b="0" dirty="0">
-                          <a:solidFill>
-                            <a:srgbClr val="3A3A3A"/>
-                          </a:solidFill>
-                          <a:latin typeface="Montserrat"/>
-                        </a:rPr>
-                        <a:t>nº 3/2025</a:t>
-                      </a:r>
-                    </a:p>
-                  </a:txBody>
-                  <a:tcPr marL="73152" marR="73152" marT="36576" marB="36576" anchor="ctr">
-                    <a:lnL w="6350">
-                      <a:solidFill>
-                        <a:srgbClr val="C9DED1"/>
-                      </a:solidFill>
-                    </a:lnL>
-                    <a:lnR w="6350">
-                      <a:solidFill>
-                        <a:srgbClr val="C9DED1"/>
-                      </a:solidFill>
-                    </a:lnR>
-                    <a:lnT w="6350">
-                      <a:solidFill>
-                        <a:srgbClr val="C9DED1"/>
-                      </a:solidFill>
-                    </a:lnT>
-                    <a:lnB w="6350">
-                      <a:solidFill>
-                        <a:srgbClr val="C9DED1"/>
-                      </a:solidFill>
-                    </a:lnB>
-                    <a:solidFill>
-                      <a:srgbClr val="F3F7F3"/>
-                    </a:solidFill>
-                  </a:tcPr>
-                </a:tc>
-                <a:tc>
-                  <a:txBody>
-                    <a:bodyPr/>
-                    <a:lstStyle/>
-                    <a:p>
-                      <a:pPr marL="0" indent="0" algn="l">
-                        <a:lnSpc>
-                          <a:spcPct val="100000"/>
-                        </a:lnSpc>
-                        <a:spcBef>
-                          <a:spcPts val="0"/>
-                        </a:spcBef>
-                        <a:spcAft>
-                          <a:spcPts val="0"/>
-                        </a:spcAft>
-                        <a:buNone/>
-                      </a:pPr>
-                      <a:r>
-                        <a:rPr lang="pt-BR" sz="1800" b="0" dirty="0">
-                          <a:solidFill>
-                            <a:srgbClr val="3A3A3A"/>
-                          </a:solidFill>
-                          <a:latin typeface="Montserrat"/>
-                        </a:rPr>
-                        <a:t>24/07/2025</a:t>
-                      </a:r>
-                    </a:p>
-                  </a:txBody>
-                  <a:tcPr marL="73152" marR="73152" marT="36576" marB="36576" anchor="ctr">
-                    <a:lnL w="6350">
-                      <a:solidFill>
-                        <a:srgbClr val="C9DED1"/>
-                      </a:solidFill>
-                    </a:lnL>
-                    <a:lnR w="6350">
-                      <a:solidFill>
-                        <a:srgbClr val="C9DED1"/>
-                      </a:solidFill>
-                    </a:lnR>
-                    <a:lnT w="6350">
-                      <a:solidFill>
-                        <a:srgbClr val="C9DED1"/>
-                      </a:solidFill>
-                    </a:lnT>
-                    <a:lnB w="6350">
-                      <a:solidFill>
-                        <a:srgbClr val="C9DED1"/>
-                      </a:solidFill>
-                    </a:lnB>
-                    <a:solidFill>
-                      <a:srgbClr val="F3F7F3"/>
-                    </a:solidFill>
-                  </a:tcPr>
-                </a:tc>
-                <a:tc>
-                  <a:txBody>
-                    <a:bodyPr/>
-                    <a:lstStyle/>
-                    <a:p>
-                      <a:pPr marL="0" indent="0" algn="l">
-                        <a:lnSpc>
-                          <a:spcPct val="100000"/>
-                        </a:lnSpc>
-                        <a:spcBef>
-                          <a:spcPts val="0"/>
-                        </a:spcBef>
-                        <a:spcAft>
-                          <a:spcPts val="0"/>
-                        </a:spcAft>
-                        <a:buNone/>
-                      </a:pPr>
-                      <a:r>
-                        <a:rPr lang="pt-BR" sz="1800" b="0" dirty="0">
-                          <a:solidFill>
-                            <a:srgbClr val="3A3A3A"/>
-                          </a:solidFill>
-                          <a:latin typeface="Montserrat"/>
-                        </a:rPr>
-                        <a:t>10/09/2025</a:t>
-                      </a:r>
-                    </a:p>
-                  </a:txBody>
-                  <a:tcPr marL="73152" marR="73152" marT="36576" marB="36576" anchor="ctr">
-                    <a:lnL w="6350">
-                      <a:solidFill>
-                        <a:srgbClr val="C9DED1"/>
-                      </a:solidFill>
-                    </a:lnL>
-                    <a:lnR w="6350">
-                      <a:solidFill>
-                        <a:srgbClr val="C9DED1"/>
-                      </a:solidFill>
-                    </a:lnR>
-                    <a:lnT w="6350">
-                      <a:solidFill>
-                        <a:srgbClr val="C9DED1"/>
-                      </a:solidFill>
-                    </a:lnT>
-                    <a:lnB w="6350">
-                      <a:solidFill>
-                        <a:srgbClr val="C9DED1"/>
-                      </a:solidFill>
-                    </a:lnB>
-                    <a:solidFill>
-                      <a:srgbClr val="F3F7F3"/>
-                    </a:solidFill>
-                  </a:tcPr>
-                </a:tc>
-                <a:tc>
-                  <a:txBody>
-                    <a:bodyPr/>
-                    <a:lstStyle/>
-                    <a:p>
-                      <a:pPr marL="0" indent="0" algn="l">
-                        <a:lnSpc>
-                          <a:spcPct val="100000"/>
-                        </a:lnSpc>
-                        <a:spcBef>
-                          <a:spcPts val="0"/>
-                        </a:spcBef>
-                        <a:spcAft>
-                          <a:spcPts val="0"/>
-                        </a:spcAft>
-                        <a:buNone/>
-                      </a:pPr>
-                      <a:r>
-                        <a:rPr lang="pt-BR" sz="1800" b="0" dirty="0">
-                          <a:solidFill>
-                            <a:srgbClr val="3A3A3A"/>
-                          </a:solidFill>
-                          <a:latin typeface="Montserrat"/>
-                        </a:rPr>
-                        <a:t>368 · 1.295</a:t>
-                      </a:r>
-                    </a:p>
-                  </a:txBody>
-                  <a:tcPr marL="73152" marR="73152" marT="36576" marB="36576" anchor="ctr">
-                    <a:lnL w="6350">
-                      <a:solidFill>
-                        <a:srgbClr val="C9DED1"/>
-                      </a:solidFill>
-                    </a:lnL>
-                    <a:lnR w="6350">
-                      <a:solidFill>
-                        <a:srgbClr val="C9DED1"/>
-                      </a:solidFill>
-                    </a:lnR>
-                    <a:lnT w="6350">
-                      <a:solidFill>
-                        <a:srgbClr val="C9DED1"/>
-                      </a:solidFill>
-                    </a:lnT>
-                    <a:lnB w="6350">
-                      <a:solidFill>
-                        <a:srgbClr val="C9DED1"/>
-                      </a:solidFill>
-                    </a:lnB>
-                    <a:solidFill>
-                      <a:srgbClr val="F3F7F3"/>
-                    </a:solidFill>
-                  </a:tcPr>
-                </a:tc>
-                <a:tc>
-                  <a:txBody>
-                    <a:bodyPr/>
-                    <a:lstStyle/>
-                    <a:p>
-                      <a:pPr marL="0" indent="0" algn="l">
-                        <a:lnSpc>
-                          <a:spcPct val="100000"/>
-                        </a:lnSpc>
-                        <a:spcBef>
-                          <a:spcPts val="0"/>
-                        </a:spcBef>
-                        <a:spcAft>
-                          <a:spcPts val="0"/>
-                        </a:spcAft>
-                        <a:buNone/>
-                      </a:pPr>
-                      <a:r>
-                        <a:rPr lang="pt-BR" sz="1800" b="0" dirty="0">
-                          <a:solidFill>
-                            <a:srgbClr val="3A3A3A"/>
-                          </a:solidFill>
-                          <a:latin typeface="Montserrat"/>
-                        </a:rPr>
-                        <a:t>quadro, escolhas, 1ª e 2ª chamada, CNES depois do início</a:t>
-                      </a:r>
-                    </a:p>
-                  </a:txBody>
-                  <a:tcPr marL="73152" marR="73152" marT="36576" marB="36576" anchor="ctr">
-                    <a:lnL w="6350">
-                      <a:solidFill>
-                        <a:srgbClr val="C9DED1"/>
-                      </a:solidFill>
-                    </a:lnL>
-                    <a:lnR w="6350">
-                      <a:solidFill>
-                        <a:srgbClr val="C9DED1"/>
-                      </a:solidFill>
-                    </a:lnR>
-                    <a:lnT w="6350">
-                      <a:solidFill>
-                        <a:srgbClr val="C9DED1"/>
-                      </a:solidFill>
-                    </a:lnT>
-                    <a:lnB w="6350">
-                      <a:solidFill>
-                        <a:srgbClr val="C9DED1"/>
-                      </a:solidFill>
-                    </a:lnB>
-                    <a:solidFill>
-                      <a:srgbClr val="F3F7F3"/>
-                    </a:solidFill>
-                  </a:tcPr>
-                </a:tc>
-              </a:tr>
-              <a:tr h="1302334">
-                <a:tc>
-                  <a:txBody>
-                    <a:bodyPr/>
-                    <a:lstStyle/>
-                    <a:p>
-                      <a:pPr marL="0" indent="0" algn="l">
-                        <a:lnSpc>
-                          <a:spcPct val="100000"/>
-                        </a:lnSpc>
-                        <a:spcBef>
-                          <a:spcPts val="0"/>
-                        </a:spcBef>
-                        <a:spcAft>
-                          <a:spcPts val="0"/>
-                        </a:spcAft>
-                        <a:buNone/>
-                      </a:pPr>
-                      <a:r>
-                        <a:rPr lang="pt-BR" sz="1800" b="1" dirty="0">
-                          <a:solidFill>
-                            <a:srgbClr val="3A3A3A"/>
-                          </a:solidFill>
-                          <a:latin typeface="Montserrat"/>
-                        </a:rPr>
-                        <a:t>2</a:t>
-                      </a:r>
-                    </a:p>
-                  </a:txBody>
-                  <a:tcPr marL="73152" marR="73152" marT="36576" marB="36576" anchor="ctr">
-                    <a:lnL w="6350">
-                      <a:solidFill>
-                        <a:srgbClr val="C9DED1"/>
-                      </a:solidFill>
-                    </a:lnL>
-                    <a:lnR w="6350">
-                      <a:solidFill>
-                        <a:srgbClr val="C9DED1"/>
-                      </a:solidFill>
-                    </a:lnR>
-                    <a:lnT w="6350">
-                      <a:solidFill>
-                        <a:srgbClr val="C9DED1"/>
-                      </a:solidFill>
-                    </a:lnT>
-                    <a:lnB w="6350">
-                      <a:solidFill>
-                        <a:srgbClr val="C9DED1"/>
-                      </a:solidFill>
-                    </a:lnB>
-                    <a:solidFill>
-                      <a:srgbClr val="FFFFFF"/>
-                    </a:solidFill>
-                  </a:tcPr>
-                </a:tc>
-                <a:tc>
-                  <a:txBody>
-                    <a:bodyPr/>
-                    <a:lstStyle/>
-                    <a:p>
-                      <a:pPr marL="0" indent="0" algn="l">
-                        <a:lnSpc>
-                          <a:spcPct val="100000"/>
-                        </a:lnSpc>
-                        <a:spcBef>
-                          <a:spcPts val="0"/>
-                        </a:spcBef>
-                        <a:spcAft>
-                          <a:spcPts val="0"/>
-                        </a:spcAft>
-                        <a:buNone/>
-                      </a:pPr>
-                      <a:r>
-                        <a:rPr lang="pt-BR" sz="1800" b="0" dirty="0">
-                          <a:solidFill>
-                            <a:srgbClr val="3A3A3A"/>
-                          </a:solidFill>
-                          <a:latin typeface="Montserrat"/>
-                        </a:rPr>
-                        <a:t>nº 1/2026</a:t>
-                      </a:r>
-                    </a:p>
-                  </a:txBody>
-                  <a:tcPr marL="73152" marR="73152" marT="36576" marB="36576" anchor="ctr">
-                    <a:lnL w="6350">
-                      <a:solidFill>
-                        <a:srgbClr val="C9DED1"/>
-                      </a:solidFill>
-                    </a:lnL>
-                    <a:lnR w="6350">
-                      <a:solidFill>
-                        <a:srgbClr val="C9DED1"/>
-                      </a:solidFill>
-                    </a:lnR>
-                    <a:lnT w="6350">
-                      <a:solidFill>
-                        <a:srgbClr val="C9DED1"/>
-                      </a:solidFill>
-                    </a:lnT>
-                    <a:lnB w="6350">
-                      <a:solidFill>
-                        <a:srgbClr val="C9DED1"/>
-                      </a:solidFill>
-                    </a:lnB>
-                    <a:solidFill>
-                      <a:srgbClr val="FFFFFF"/>
-                    </a:solidFill>
-                  </a:tcPr>
-                </a:tc>
-                <a:tc>
-                  <a:txBody>
-                    <a:bodyPr/>
-                    <a:lstStyle/>
-                    <a:p>
-                      <a:pPr marL="0" indent="0" algn="l">
-                        <a:lnSpc>
-                          <a:spcPct val="100000"/>
-                        </a:lnSpc>
-                        <a:spcBef>
-                          <a:spcPts val="0"/>
-                        </a:spcBef>
-                        <a:spcAft>
-                          <a:spcPts val="0"/>
-                        </a:spcAft>
-                        <a:buNone/>
-                      </a:pPr>
-                      <a:r>
-                        <a:rPr lang="pt-BR" sz="1800" b="0" dirty="0">
-                          <a:solidFill>
-                            <a:srgbClr val="3A3A3A"/>
-                          </a:solidFill>
-                          <a:latin typeface="Montserrat"/>
-                        </a:rPr>
-                        <a:t>19/03/2026 (retificado)</a:t>
-                      </a:r>
-                    </a:p>
-                  </a:txBody>
-                  <a:tcPr marL="73152" marR="73152" marT="36576" marB="36576" anchor="ctr">
-                    <a:lnL w="6350">
-                      <a:solidFill>
-                        <a:srgbClr val="C9DED1"/>
-                      </a:solidFill>
-                    </a:lnL>
-                    <a:lnR w="6350">
-                      <a:solidFill>
-                        <a:srgbClr val="C9DED1"/>
-                      </a:solidFill>
-                    </a:lnR>
-                    <a:lnT w="6350">
-                      <a:solidFill>
-                        <a:srgbClr val="C9DED1"/>
-                      </a:solidFill>
-                    </a:lnT>
-                    <a:lnB w="6350">
-                      <a:solidFill>
-                        <a:srgbClr val="C9DED1"/>
-                      </a:solidFill>
-                    </a:lnB>
-                    <a:solidFill>
-                      <a:srgbClr val="FFFFFF"/>
-                    </a:solidFill>
-                  </a:tcPr>
-                </a:tc>
-                <a:tc>
-                  <a:txBody>
-                    <a:bodyPr/>
-                    <a:lstStyle/>
-                    <a:p>
-                      <a:pPr marL="0" indent="0" algn="l">
-                        <a:lnSpc>
-                          <a:spcPct val="100000"/>
-                        </a:lnSpc>
-                        <a:spcBef>
-                          <a:spcPts val="0"/>
-                        </a:spcBef>
-                        <a:spcAft>
-                          <a:spcPts val="0"/>
-                        </a:spcAft>
-                        <a:buNone/>
-                      </a:pPr>
-                      <a:r>
-                        <a:rPr lang="pt-BR" sz="1800" b="0" dirty="0">
-                          <a:solidFill>
-                            <a:srgbClr val="3A3A3A"/>
-                          </a:solidFill>
-                          <a:latin typeface="Montserrat"/>
-                        </a:rPr>
-                        <a:t>05/05/2026</a:t>
-                      </a:r>
-                    </a:p>
-                  </a:txBody>
-                  <a:tcPr marL="73152" marR="73152" marT="36576" marB="36576" anchor="ctr">
-                    <a:lnL w="6350">
-                      <a:solidFill>
-                        <a:srgbClr val="C9DED1"/>
-                      </a:solidFill>
-                    </a:lnL>
-                    <a:lnR w="6350">
-                      <a:solidFill>
-                        <a:srgbClr val="C9DED1"/>
-                      </a:solidFill>
-                    </a:lnR>
-                    <a:lnT w="6350">
-                      <a:solidFill>
-                        <a:srgbClr val="C9DED1"/>
-                      </a:solidFill>
-                    </a:lnT>
-                    <a:lnB w="6350">
-                      <a:solidFill>
-                        <a:srgbClr val="C9DED1"/>
-                      </a:solidFill>
-                    </a:lnB>
-                    <a:solidFill>
-                      <a:srgbClr val="FFFFFF"/>
-                    </a:solidFill>
-                  </a:tcPr>
-                </a:tc>
-                <a:tc>
-                  <a:txBody>
-                    <a:bodyPr/>
-                    <a:lstStyle/>
-                    <a:p>
-                      <a:pPr marL="0" indent="0" algn="l">
-                        <a:lnSpc>
-                          <a:spcPct val="100000"/>
-                        </a:lnSpc>
-                        <a:spcBef>
-                          <a:spcPts val="0"/>
-                        </a:spcBef>
-                        <a:spcAft>
-                          <a:spcPts val="0"/>
-                        </a:spcAft>
-                        <a:buNone/>
-                      </a:pPr>
-                      <a:r>
-                        <a:rPr lang="pt-BR" sz="1800" b="0" dirty="0">
-                          <a:solidFill>
-                            <a:srgbClr val="3A3A3A"/>
-                          </a:solidFill>
-                          <a:latin typeface="Montserrat"/>
-                        </a:rPr>
-                        <a:t>454 · 1.547</a:t>
-                      </a:r>
-                    </a:p>
-                  </a:txBody>
-                  <a:tcPr marL="73152" marR="73152" marT="36576" marB="36576" anchor="ctr">
-                    <a:lnL w="6350">
-                      <a:solidFill>
-                        <a:srgbClr val="C9DED1"/>
-                      </a:solidFill>
-                    </a:lnL>
-                    <a:lnR w="6350">
-                      <a:solidFill>
-                        <a:srgbClr val="C9DED1"/>
-                      </a:solidFill>
-                    </a:lnR>
-                    <a:lnT w="6350">
-                      <a:solidFill>
-                        <a:srgbClr val="C9DED1"/>
-                      </a:solidFill>
-                    </a:lnT>
-                    <a:lnB w="6350">
-                      <a:solidFill>
-                        <a:srgbClr val="C9DED1"/>
-                      </a:solidFill>
-                    </a:lnB>
-                    <a:solidFill>
-                      <a:srgbClr val="FFFFFF"/>
-                    </a:solidFill>
-                  </a:tcPr>
-                </a:tc>
-                <a:tc>
-                  <a:txBody>
-                    <a:bodyPr/>
-                    <a:lstStyle/>
-                    <a:p>
-                      <a:pPr marL="0" indent="0" algn="l">
-                        <a:lnSpc>
-                          <a:spcPct val="100000"/>
-                        </a:lnSpc>
-                        <a:spcBef>
-                          <a:spcPts val="0"/>
-                        </a:spcBef>
-                        <a:spcAft>
-                          <a:spcPts val="0"/>
-                        </a:spcAft>
-                        <a:buNone/>
-                      </a:pPr>
-                      <a:r>
-                        <a:rPr lang="pt-BR" sz="1800" b="0" dirty="0">
-                          <a:solidFill>
-                            <a:srgbClr val="3A3A3A"/>
-                          </a:solidFill>
-                          <a:latin typeface="Montserrat"/>
-                        </a:rPr>
-                        <a:t>quadro, escolhas, 1ª e 2ª chamada, CNES depois do início</a:t>
-                      </a:r>
-                    </a:p>
-                  </a:txBody>
-                  <a:tcPr marL="73152" marR="73152" marT="36576" marB="36576" anchor="ctr">
-                    <a:lnL w="6350">
-                      <a:solidFill>
-                        <a:srgbClr val="C9DED1"/>
-                      </a:solidFill>
-                    </a:lnL>
-                    <a:lnR w="6350">
-                      <a:solidFill>
-                        <a:srgbClr val="C9DED1"/>
-                      </a:solidFill>
-                    </a:lnR>
-                    <a:lnT w="6350">
-                      <a:solidFill>
-                        <a:srgbClr val="C9DED1"/>
-                      </a:solidFill>
-                    </a:lnT>
-                    <a:lnB w="6350">
-                      <a:solidFill>
-                        <a:srgbClr val="C9DED1"/>
-                      </a:solidFill>
-                    </a:lnB>
-                    <a:solidFill>
-                      <a:srgbClr val="FFFFFF"/>
-                    </a:solidFill>
-                  </a:tcPr>
-                </a:tc>
-              </a:tr>
-              <a:tr h="925830">
-                <a:tc>
-                  <a:txBody>
-                    <a:bodyPr/>
-                    <a:lstStyle/>
-                    <a:p>
-                      <a:pPr marL="0" indent="0" algn="l">
-                        <a:lnSpc>
-                          <a:spcPct val="100000"/>
-                        </a:lnSpc>
-                        <a:spcBef>
-                          <a:spcPts val="0"/>
-                        </a:spcBef>
-                        <a:spcAft>
-                          <a:spcPts val="0"/>
-                        </a:spcAft>
-                        <a:buNone/>
-                      </a:pPr>
-                      <a:r>
-                        <a:rPr lang="pt-BR" sz="1800" b="1" dirty="0">
-                          <a:solidFill>
-                            <a:srgbClr val="3A3A3A"/>
-                          </a:solidFill>
-                          <a:latin typeface="Montserrat"/>
-                        </a:rPr>
-                        <a:t>3</a:t>
-                      </a:r>
-                    </a:p>
-                  </a:txBody>
-                  <a:tcPr marL="73152" marR="73152" marT="36576" marB="36576" anchor="ctr">
-                    <a:lnL w="6350">
-                      <a:solidFill>
-                        <a:srgbClr val="C9DED1"/>
-                      </a:solidFill>
-                    </a:lnL>
-                    <a:lnR w="6350">
-                      <a:solidFill>
-                        <a:srgbClr val="C9DED1"/>
-                      </a:solidFill>
-                    </a:lnR>
-                    <a:lnT w="6350">
-                      <a:solidFill>
-                        <a:srgbClr val="C9DED1"/>
-                      </a:solidFill>
-                    </a:lnT>
-                    <a:lnB w="6350">
-                      <a:solidFill>
-                        <a:srgbClr val="C9DED1"/>
-                      </a:solidFill>
-                    </a:lnB>
-                    <a:solidFill>
-                      <a:srgbClr val="F3F7F3"/>
-                    </a:solidFill>
-                  </a:tcPr>
-                </a:tc>
-                <a:tc>
-                  <a:txBody>
-                    <a:bodyPr/>
-                    <a:lstStyle/>
-                    <a:p>
-                      <a:pPr marL="0" indent="0" algn="l">
-                        <a:lnSpc>
-                          <a:spcPct val="100000"/>
-                        </a:lnSpc>
-                        <a:spcBef>
-                          <a:spcPts val="0"/>
-                        </a:spcBef>
-                        <a:spcAft>
-                          <a:spcPts val="0"/>
-                        </a:spcAft>
-                        <a:buNone/>
-                      </a:pPr>
-                      <a:r>
-                        <a:rPr lang="pt-BR" sz="1800" b="0" dirty="0">
-                          <a:solidFill>
-                            <a:srgbClr val="3A3A3A"/>
-                          </a:solidFill>
-                          <a:latin typeface="Montserrat"/>
-                        </a:rPr>
-                        <a:t>nº 28/2026</a:t>
-                      </a:r>
-                    </a:p>
-                  </a:txBody>
-                  <a:tcPr marL="73152" marR="73152" marT="36576" marB="36576" anchor="ctr">
-                    <a:lnL w="6350">
-                      <a:solidFill>
-                        <a:srgbClr val="C9DED1"/>
-                      </a:solidFill>
-                    </a:lnL>
-                    <a:lnR w="6350">
-                      <a:solidFill>
-                        <a:srgbClr val="C9DED1"/>
-                      </a:solidFill>
-                    </a:lnR>
-                    <a:lnT w="6350">
-                      <a:solidFill>
-                        <a:srgbClr val="C9DED1"/>
-                      </a:solidFill>
-                    </a:lnT>
-                    <a:lnB w="6350">
-                      <a:solidFill>
-                        <a:srgbClr val="C9DED1"/>
-                      </a:solidFill>
-                    </a:lnB>
-                    <a:solidFill>
-                      <a:srgbClr val="F3F7F3"/>
-                    </a:solidFill>
-                  </a:tcPr>
-                </a:tc>
-                <a:tc>
-                  <a:txBody>
-                    <a:bodyPr/>
-                    <a:lstStyle/>
-                    <a:p>
-                      <a:pPr marL="0" indent="0" algn="l">
-                        <a:lnSpc>
-                          <a:spcPct val="100000"/>
-                        </a:lnSpc>
-                        <a:spcBef>
-                          <a:spcPts val="0"/>
-                        </a:spcBef>
-                        <a:spcAft>
-                          <a:spcPts val="0"/>
-                        </a:spcAft>
-                        <a:buNone/>
-                      </a:pPr>
-                      <a:r>
-                        <a:rPr lang="pt-BR" sz="1800" b="0" dirty="0">
-                          <a:solidFill>
-                            <a:srgbClr val="3A3A3A"/>
-                          </a:solidFill>
-                          <a:latin typeface="Montserrat"/>
-                        </a:rPr>
-                        <a:t>24/07/2026 (retificado)</a:t>
-                      </a:r>
-                    </a:p>
-                  </a:txBody>
-                  <a:tcPr marL="73152" marR="73152" marT="36576" marB="36576" anchor="ctr">
-                    <a:lnL w="6350">
-                      <a:solidFill>
-                        <a:srgbClr val="C9DED1"/>
-                      </a:solidFill>
-                    </a:lnL>
-                    <a:lnR w="6350">
-                      <a:solidFill>
-                        <a:srgbClr val="C9DED1"/>
-                      </a:solidFill>
-                    </a:lnR>
-                    <a:lnT w="6350">
-                      <a:solidFill>
-                        <a:srgbClr val="C9DED1"/>
-                      </a:solidFill>
-                    </a:lnT>
-                    <a:lnB w="6350">
-                      <a:solidFill>
-                        <a:srgbClr val="C9DED1"/>
-                      </a:solidFill>
-                    </a:lnB>
-                    <a:solidFill>
-                      <a:srgbClr val="F3F7F3"/>
-                    </a:solidFill>
-                  </a:tcPr>
-                </a:tc>
-                <a:tc>
-                  <a:txBody>
-                    <a:bodyPr/>
-                    <a:lstStyle/>
-                    <a:p>
-                      <a:pPr marL="0" indent="0" algn="l">
-                        <a:lnSpc>
-                          <a:spcPct val="100000"/>
-                        </a:lnSpc>
-                        <a:spcBef>
-                          <a:spcPts val="0"/>
-                        </a:spcBef>
-                        <a:spcAft>
-                          <a:spcPts val="0"/>
-                        </a:spcAft>
-                        <a:buNone/>
-                      </a:pPr>
-                      <a:r>
-                        <a:rPr lang="pt-BR" sz="1800" b="0" dirty="0">
-                          <a:solidFill>
-                            <a:srgbClr val="3A3A3A"/>
-                          </a:solidFill>
-                          <a:latin typeface="Montserrat"/>
-                        </a:rPr>
-                        <a:t>25/08/2026, sub judice</a:t>
-                      </a:r>
-                    </a:p>
-                  </a:txBody>
-                  <a:tcPr marL="73152" marR="73152" marT="36576" marB="36576" anchor="ctr">
-                    <a:lnL w="6350">
-                      <a:solidFill>
-                        <a:srgbClr val="C9DED1"/>
-                      </a:solidFill>
-                    </a:lnL>
-                    <a:lnR w="6350">
-                      <a:solidFill>
-                        <a:srgbClr val="C9DED1"/>
-                      </a:solidFill>
-                    </a:lnR>
-                    <a:lnT w="6350">
-                      <a:solidFill>
-                        <a:srgbClr val="C9DED1"/>
-                      </a:solidFill>
-                    </a:lnT>
-                    <a:lnB w="6350">
-                      <a:solidFill>
-                        <a:srgbClr val="C9DED1"/>
-                      </a:solidFill>
-                    </a:lnB>
-                    <a:solidFill>
-                      <a:srgbClr val="F3F7F3"/>
-                    </a:solidFill>
-                  </a:tcPr>
-                </a:tc>
-                <a:tc>
-                  <a:txBody>
-                    <a:bodyPr/>
-                    <a:lstStyle/>
-                    <a:p>
-                      <a:pPr marL="0" indent="0" algn="l">
-                        <a:lnSpc>
-                          <a:spcPct val="100000"/>
-                        </a:lnSpc>
-                        <a:spcBef>
-                          <a:spcPts val="0"/>
-                        </a:spcBef>
-                        <a:spcAft>
-                          <a:spcPts val="0"/>
-                        </a:spcAft>
-                        <a:buNone/>
-                      </a:pPr>
-                      <a:r>
-                        <a:rPr lang="pt-BR" sz="1800" b="0" dirty="0">
-                          <a:solidFill>
-                            <a:srgbClr val="3A3A3A"/>
-                          </a:solidFill>
-                          <a:latin typeface="Montserrat"/>
-                        </a:rPr>
-                        <a:t>748 · 2.293</a:t>
-                      </a:r>
-                    </a:p>
-                  </a:txBody>
-                  <a:tcPr marL="73152" marR="73152" marT="36576" marB="36576" anchor="ctr">
-                    <a:lnL w="6350">
-                      <a:solidFill>
-                        <a:srgbClr val="C9DED1"/>
-                      </a:solidFill>
-                    </a:lnL>
-                    <a:lnR w="6350">
-                      <a:solidFill>
-                        <a:srgbClr val="C9DED1"/>
-                      </a:solidFill>
-                    </a:lnR>
-                    <a:lnT w="6350">
-                      <a:solidFill>
-                        <a:srgbClr val="C9DED1"/>
-                      </a:solidFill>
-                    </a:lnT>
-                    <a:lnB w="6350">
-                      <a:solidFill>
-                        <a:srgbClr val="C9DED1"/>
-                      </a:solidFill>
-                    </a:lnB>
-                    <a:solidFill>
-                      <a:srgbClr val="F3F7F3"/>
-                    </a:solidFill>
-                  </a:tcPr>
-                </a:tc>
-                <a:tc>
-                  <a:txBody>
-                    <a:bodyPr/>
-                    <a:lstStyle/>
-                    <a:p>
-                      <a:pPr marL="0" indent="0" algn="l">
-                        <a:lnSpc>
-                          <a:spcPct val="100000"/>
-                        </a:lnSpc>
-                        <a:spcBef>
-                          <a:spcPts val="0"/>
-                        </a:spcBef>
-                        <a:spcAft>
-                          <a:spcPts val="0"/>
-                        </a:spcAft>
-                        <a:buNone/>
-                      </a:pPr>
-                      <a:r>
-                        <a:rPr lang="pt-BR" sz="1800" b="0" dirty="0">
-                          <a:solidFill>
-                            <a:srgbClr val="3A3A3A"/>
-                          </a:solidFill>
-                          <a:latin typeface="Montserrat"/>
-                        </a:rPr>
-                        <a:t>quadro, escolhas e 1ª chamada</a:t>
-                      </a:r>
-                    </a:p>
-                  </a:txBody>
-                  <a:tcPr marL="73152" marR="73152" marT="36576" marB="36576" anchor="ctr">
-                    <a:lnL w="6350">
-                      <a:solidFill>
-                        <a:srgbClr val="C9DED1"/>
-                      </a:solidFill>
-                    </a:lnL>
-                    <a:lnR w="6350">
-                      <a:solidFill>
-                        <a:srgbClr val="C9DED1"/>
-                      </a:solidFill>
-                    </a:lnR>
-                    <a:lnT w="6350">
-                      <a:solidFill>
-                        <a:srgbClr val="C9DED1"/>
-                      </a:solidFill>
-                    </a:lnT>
-                    <a:lnB w="6350">
-                      <a:solidFill>
-                        <a:srgbClr val="C9DED1"/>
-                      </a:solidFill>
-                    </a:lnB>
-                    <a:solidFill>
-                      <a:srgbClr val="F3F7F3"/>
-                    </a:solidFill>
-                  </a:tcPr>
-                </a:tc>
-              </a:tr>
-            </a:tbl>
-          </a:graphicData>
-        </a:graphic>
-      </p:graphicFrame>
       <p:sp>
         <p:nvSpPr>
-          <p:cNvPr id="103" name="Fontes"/>
+          <p:cNvPr id="102" name="Rótulo"/>
+          <p:cNvSpPr/>
+          <p:nvPr/>
+        </p:nvSpPr>
+        <p:spPr>
+          <a:xfrm>
+            <a:off x="292608" y="896112"/>
+            <a:ext cx="1371600" cy="1380744"/>
+          </a:xfrm>
+          <a:prstGeom prst="roundRect">
+            <a:avLst>
+              <a:gd name="adj" fmla="val 10000"/>
+            </a:avLst>
+          </a:prstGeom>
+          <a:solidFill>
+            <a:srgbClr val="114719"/>
+          </a:solidFill>
+          <a:ln>
+            <a:noFill/>
+          </a:ln>
+        </p:spPr>
+        <p:txBody>
+          <a:bodyPr wrap="square" lIns="73152" tIns="45720" rIns="73152" bIns="45720" rtlCol="0" anchor="ctr">
+            <a:noAutofit/>
+          </a:bodyPr>
+          <a:lstStyle/>
+          <a:p>
+            <a:pPr marL="0" indent="0" algn="ctr">
+              <a:lnSpc>
+                <a:spcPct val="100000"/>
+              </a:lnSpc>
+              <a:spcBef>
+                <a:spcPts val="0"/>
+              </a:spcBef>
+              <a:spcAft>
+                <a:spcPts val="0"/>
+              </a:spcAft>
+              <a:buNone/>
+            </a:pPr>
+            <a:r>
+              <a:rPr lang="pt-BR" sz="2000" b="1" dirty="0">
+                <a:solidFill>
+                  <a:srgbClr val="FFFFFF"/>
+                </a:solidFill>
+                <a:latin typeface="Montserrat"/>
+              </a:rPr>
+              <a:t>Regra</a:t>
+            </a:r>
+          </a:p>
+        </p:txBody>
+      </p:sp>
+      <p:sp>
+        <p:nvSpPr>
+          <p:cNvPr id="103" name="Item"/>
+          <p:cNvSpPr/>
+          <p:nvPr/>
+        </p:nvSpPr>
+        <p:spPr>
+          <a:xfrm>
+            <a:off x="1801368" y="896112"/>
+            <a:ext cx="10085832" cy="1380744"/>
+          </a:xfrm>
+          <a:prstGeom prst="roundRect">
+            <a:avLst>
+              <a:gd name="adj" fmla="val 6000"/>
+            </a:avLst>
+          </a:prstGeom>
+          <a:solidFill>
+            <a:srgbClr val="F4F8F5"/>
+          </a:solidFill>
+          <a:ln w="12700">
+            <a:solidFill>
+              <a:srgbClr val="056429"/>
+            </a:solidFill>
+          </a:ln>
+        </p:spPr>
+        <p:txBody>
+          <a:bodyPr wrap="square" lIns="228600" tIns="36576" rIns="228600" bIns="36576" rtlCol="0" anchor="ctr">
+            <a:noAutofit/>
+          </a:bodyPr>
+          <a:lstStyle/>
+          <a:p>
+            <a:pPr marL="0" indent="0" algn="l">
+              <a:lnSpc>
+                <a:spcPct val="102000"/>
+              </a:lnSpc>
+              <a:spcBef>
+                <a:spcPts val="0"/>
+              </a:spcBef>
+              <a:spcAft>
+                <a:spcPts val="0"/>
+              </a:spcAft>
+              <a:buNone/>
+            </a:pPr>
+            <a:r>
+              <a:rPr lang="pt-BR" sz="2000" b="0" dirty="0">
+                <a:solidFill>
+                  <a:srgbClr val="3A3A3A"/>
+                </a:solidFill>
+                <a:latin typeface="Montserrat"/>
+              </a:rPr>
+              <a:t>o IVS 2010 do município define a faixa: até 0,300, R$ 10 mil; até 0,400, R$ 15 mil; acima, R$ 20 mil</a:t>
+            </a:r>
+          </a:p>
+        </p:txBody>
+      </p:sp>
+      <p:sp>
+        <p:nvSpPr>
+          <p:cNvPr id="104" name="Rótulo"/>
+          <p:cNvSpPr/>
+          <p:nvPr/>
+        </p:nvSpPr>
+        <p:spPr>
+          <a:xfrm>
+            <a:off x="292608" y="2478024"/>
+            <a:ext cx="1371600" cy="1380744"/>
+          </a:xfrm>
+          <a:prstGeom prst="roundRect">
+            <a:avLst>
+              <a:gd name="adj" fmla="val 10000"/>
+            </a:avLst>
+          </a:prstGeom>
+          <a:solidFill>
+            <a:srgbClr val="114719"/>
+          </a:solidFill>
+          <a:ln>
+            <a:noFill/>
+          </a:ln>
+        </p:spPr>
+        <p:txBody>
+          <a:bodyPr wrap="square" lIns="73152" tIns="45720" rIns="73152" bIns="45720" rtlCol="0" anchor="ctr">
+            <a:noAutofit/>
+          </a:bodyPr>
+          <a:lstStyle/>
+          <a:p>
+            <a:pPr marL="0" indent="0" algn="ctr">
+              <a:lnSpc>
+                <a:spcPct val="100000"/>
+              </a:lnSpc>
+              <a:spcBef>
+                <a:spcPts val="0"/>
+              </a:spcBef>
+              <a:spcAft>
+                <a:spcPts val="0"/>
+              </a:spcAft>
+              <a:buNone/>
+            </a:pPr>
+            <a:r>
+              <a:rPr lang="pt-BR" sz="2000" b="1" dirty="0">
+                <a:solidFill>
+                  <a:srgbClr val="FFFFFF"/>
+                </a:solidFill>
+                <a:latin typeface="Montserrat"/>
+              </a:rPr>
+              <a:t>RDD</a:t>
+            </a:r>
+          </a:p>
+        </p:txBody>
+      </p:sp>
+      <p:sp>
+        <p:nvSpPr>
+          <p:cNvPr id="105" name="Item"/>
+          <p:cNvSpPr/>
+          <p:nvPr/>
+        </p:nvSpPr>
+        <p:spPr>
+          <a:xfrm>
+            <a:off x="1801368" y="2478024"/>
+            <a:ext cx="10085832" cy="1380744"/>
+          </a:xfrm>
+          <a:prstGeom prst="roundRect">
+            <a:avLst>
+              <a:gd name="adj" fmla="val 6000"/>
+            </a:avLst>
+          </a:prstGeom>
+          <a:solidFill>
+            <a:srgbClr val="F4F8F5"/>
+          </a:solidFill>
+          <a:ln w="12700">
+            <a:solidFill>
+              <a:srgbClr val="056429"/>
+            </a:solidFill>
+          </a:ln>
+        </p:spPr>
+        <p:txBody>
+          <a:bodyPr wrap="square" lIns="228600" tIns="36576" rIns="228600" bIns="36576" rtlCol="0" anchor="ctr">
+            <a:noAutofit/>
+          </a:bodyPr>
+          <a:lstStyle/>
+          <a:p>
+            <a:pPr marL="0" indent="0" algn="l">
+              <a:lnSpc>
+                <a:spcPct val="102000"/>
+              </a:lnSpc>
+              <a:spcBef>
+                <a:spcPts val="0"/>
+              </a:spcBef>
+              <a:spcAft>
+                <a:spcPts val="0"/>
+              </a:spcAft>
+              <a:buNone/>
+            </a:pPr>
+            <a:r>
+              <a:rPr lang="pt-BR" sz="2000" b="0" dirty="0">
+                <a:solidFill>
+                  <a:srgbClr val="3A3A3A"/>
+                </a:solidFill>
+                <a:latin typeface="Montserrat"/>
+              </a:rPr>
+              <a:t>perto de cada corte os municípios são parecidos; de um lado para o outro, só a bolsa (e as regras do mesmo corte) muda</a:t>
+            </a:r>
+          </a:p>
+        </p:txBody>
+      </p:sp>
+      <p:sp>
+        <p:nvSpPr>
+          <p:cNvPr id="106" name="Rótulo"/>
+          <p:cNvSpPr/>
+          <p:nvPr/>
+        </p:nvSpPr>
+        <p:spPr>
+          <a:xfrm>
+            <a:off x="292608" y="4059936"/>
+            <a:ext cx="1371600" cy="1380744"/>
+          </a:xfrm>
+          <a:prstGeom prst="roundRect">
+            <a:avLst>
+              <a:gd name="adj" fmla="val 10000"/>
+            </a:avLst>
+          </a:prstGeom>
+          <a:solidFill>
+            <a:srgbClr val="114719"/>
+          </a:solidFill>
+          <a:ln>
+            <a:noFill/>
+          </a:ln>
+        </p:spPr>
+        <p:txBody>
+          <a:bodyPr wrap="square" lIns="73152" tIns="45720" rIns="73152" bIns="45720" rtlCol="0" anchor="ctr">
+            <a:noAutofit/>
+          </a:bodyPr>
+          <a:lstStyle/>
+          <a:p>
+            <a:pPr marL="0" indent="0" algn="ctr">
+              <a:lnSpc>
+                <a:spcPct val="100000"/>
+              </a:lnSpc>
+              <a:spcBef>
+                <a:spcPts val="0"/>
+              </a:spcBef>
+              <a:spcAft>
+                <a:spcPts val="0"/>
+              </a:spcAft>
+              <a:buNone/>
+            </a:pPr>
+            <a:r>
+              <a:rPr lang="pt-BR" sz="2000" b="1" dirty="0">
+                <a:solidFill>
+                  <a:srgbClr val="FFFFFF"/>
+                </a:solidFill>
+                <a:latin typeface="Montserrat"/>
+              </a:rPr>
+              <a:t>Ciclos</a:t>
+            </a:r>
+          </a:p>
+        </p:txBody>
+      </p:sp>
+      <p:sp>
+        <p:nvSpPr>
+          <p:cNvPr id="107" name="Item"/>
+          <p:cNvSpPr/>
+          <p:nvPr/>
+        </p:nvSpPr>
+        <p:spPr>
+          <a:xfrm>
+            <a:off x="1801368" y="4059936"/>
+            <a:ext cx="10085832" cy="1380744"/>
+          </a:xfrm>
+          <a:prstGeom prst="roundRect">
+            <a:avLst>
+              <a:gd name="adj" fmla="val 6000"/>
+            </a:avLst>
+          </a:prstGeom>
+          <a:solidFill>
+            <a:srgbClr val="F4F8F5"/>
+          </a:solidFill>
+          <a:ln w="12700">
+            <a:solidFill>
+              <a:srgbClr val="056429"/>
+            </a:solidFill>
+          </a:ln>
+        </p:spPr>
+        <p:txBody>
+          <a:bodyPr wrap="square" lIns="228600" tIns="36576" rIns="228600" bIns="36576" rtlCol="0" anchor="ctr">
+            <a:noAutofit/>
+          </a:bodyPr>
+          <a:lstStyle/>
+          <a:p>
+            <a:pPr marL="0" indent="0" algn="l">
+              <a:lnSpc>
+                <a:spcPct val="102000"/>
+              </a:lnSpc>
+              <a:spcBef>
+                <a:spcPts val="0"/>
+              </a:spcBef>
+              <a:spcAft>
+                <a:spcPts val="0"/>
+              </a:spcAft>
+              <a:buNone/>
+            </a:pPr>
+            <a:r>
+              <a:rPr lang="pt-BR" sz="2000" b="0" dirty="0">
+                <a:solidFill>
+                  <a:srgbClr val="3A3A3A"/>
+                </a:solidFill>
+                <a:latin typeface="Montserrat"/>
+              </a:rPr>
+              <a:t>usamos os três: 368, 454 e 748 municípios com vaga; comparamos sempre dentro do ciclo</a:t>
+            </a:r>
+          </a:p>
+        </p:txBody>
+      </p:sp>
+      <p:sp>
+        <p:nvSpPr>
+          <p:cNvPr id="108" name="Fontes"/>
           <p:cNvSpPr txBox="1"/>
           <p:nvPr/>
         </p:nvSpPr>
@@ -17609,7 +16282,7 @@
                 </a:solidFill>
                 <a:latin typeface="Montserrat"/>
               </a:rPr>
-              <a:t>output/apresentacao_banca2/cronologia_ciclos.csv e tabela_descritiva_ciclos.csv (doc 02).</a:t>
+              <a:t>auditoria 16; protocolo 48; output/apresentacao_banca2/tabela_descritiva_ciclos.csv.</a:t>
             </a:r>
           </a:p>
         </p:txBody>
@@ -17764,25 +16437,25 @@
               <a:t>Hipótese  |  </a:t>
             </a:r>
             <a:r>
+              <a:rPr lang="pt-BR" sz="1000" dirty="0">
+                <a:latin typeface="Montserrat"/>
+              </a:rPr>
+              <a:t>Base de Dados  |  </a:t>
+            </a:r>
+            <a:r>
               <a:rPr lang="pt-BR" sz="1000" b="1" dirty="0">
                 <a:solidFill>
                   <a:srgbClr val="114719"/>
                 </a:solidFill>
                 <a:latin typeface="Montserrat"/>
               </a:rPr>
-              <a:t>Base de Dados</a:t>
+              <a:t>Metodologia</a:t>
             </a:r>
             <a:r>
               <a:rPr lang="pt-BR" sz="1000" dirty="0">
                 <a:latin typeface="Montserrat"/>
               </a:rPr>
               <a:t>  |  </a:t>
-            </a:r>
-            <a:r>
-              <a:rPr lang="pt-BR" sz="1000" dirty="0">
-                <a:latin typeface="Montserrat"/>
-              </a:rPr>
-              <a:t>Metodologia  |  </a:t>
             </a:r>
             <a:r>
               <a:rPr lang="pt-BR" sz="1000" dirty="0">
@@ -17899,7 +16572,7 @@
                 </a:solidFill>
                 <a:latin typeface="Montserrat"/>
               </a:rPr>
-              <a:t>Descritivo; outras regras federais mudam nos mesmos cortes: pacote do corte.</a:t>
+              <a:t>Outras regras federais mudam nos mesmos cortes: pacote do corte.</a:t>
             </a:r>
           </a:p>
         </p:txBody>
@@ -18049,7 +16722,7 @@
                 </a:solidFill>
                 <a:latin typeface="Montserrat"/>
               </a:rPr>
-              <a:t>Nos dados crus, o lado de bolsa maior não preenche mais</a:t>
+              <a:t>H1: bolsa maior → mais vagas preenchidas?</a:t>
             </a:r>
           </a:p>
         </p:txBody>
@@ -18141,13 +16814,19 @@
               <a:t>Hipótese  |  </a:t>
             </a:r>
             <a:r>
+              <a:rPr lang="pt-BR" sz="1000" dirty="0">
+                <a:latin typeface="Montserrat"/>
+              </a:rPr>
+              <a:t>Base de Dados  |  </a:t>
+            </a:r>
+            <a:r>
               <a:rPr lang="pt-BR" sz="1000" b="1" dirty="0">
                 <a:solidFill>
                   <a:srgbClr val="114719"/>
                 </a:solidFill>
                 <a:latin typeface="Montserrat"/>
               </a:rPr>
-              <a:t>Base de Dados</a:t>
+              <a:t>Metodologia</a:t>
             </a:r>
             <a:r>
               <a:rPr lang="pt-BR" sz="1000" dirty="0">
@@ -18159,178 +16838,808 @@
               <a:rPr lang="pt-BR" sz="1000" dirty="0">
                 <a:latin typeface="Montserrat"/>
               </a:rPr>
-              <a:t>Metodologia  |  </a:t>
-            </a:r>
-            <a:r>
-              <a:rPr lang="pt-BR" sz="1000" dirty="0">
-                <a:latin typeface="Montserrat"/>
-              </a:rPr>
               <a:t>Resultados</a:t>
             </a:r>
           </a:p>
         </p:txBody>
       </p:sp>
+      <p:graphicFrame>
+        <p:nvGraphicFramePr>
+          <p:cNvPr id="101" name="Tabela"/>
+          <p:cNvGraphicFramePr>
+            <a:graphicFrameLocks noGrp="1"/>
+          </p:cNvGraphicFramePr>
+          <p:nvPr/>
+        </p:nvGraphicFramePr>
+        <p:xfrm>
+          <a:off x="292608" y="822960"/>
+          <a:ext cx="11594592" cy="5266944"/>
+        </p:xfrm>
+        <a:graphic>
+          <a:graphicData uri="http://schemas.openxmlformats.org/drawingml/2006/table">
+            <a:tbl>
+              <a:tblPr firstRow="1" bandRow="1"/>
+              <a:tblGrid>
+                <a:gridCol w="2480579"/>
+                <a:gridCol w="9114013"/>
+              </a:tblGrid>
+              <a:tr h="446436">
+                <a:tc>
+                  <a:txBody>
+                    <a:bodyPr/>
+                    <a:lstStyle/>
+                    <a:p>
+                      <a:pPr marL="0" indent="0" algn="l">
+                        <a:lnSpc>
+                          <a:spcPct val="100000"/>
+                        </a:lnSpc>
+                        <a:spcBef>
+                          <a:spcPts val="0"/>
+                        </a:spcBef>
+                        <a:spcAft>
+                          <a:spcPts val="0"/>
+                        </a:spcAft>
+                        <a:buNone/>
+                      </a:pPr>
+                      <a:r>
+                        <a:rPr lang="pt-BR" sz="1800" b="1" dirty="0">
+                          <a:solidFill>
+                            <a:srgbClr val="FFFFFF"/>
+                          </a:solidFill>
+                          <a:latin typeface="Montserrat"/>
+                        </a:rPr>
+                        <a:t>Campo</a:t>
+                      </a:r>
+                    </a:p>
+                  </a:txBody>
+                  <a:tcPr marL="73152" marR="73152" marT="36576" marB="36576" anchor="ctr">
+                    <a:lnL w="6350">
+                      <a:solidFill>
+                        <a:srgbClr val="C9DED1"/>
+                      </a:solidFill>
+                    </a:lnL>
+                    <a:lnR w="6350">
+                      <a:solidFill>
+                        <a:srgbClr val="C9DED1"/>
+                      </a:solidFill>
+                    </a:lnR>
+                    <a:lnT w="6350">
+                      <a:solidFill>
+                        <a:srgbClr val="C9DED1"/>
+                      </a:solidFill>
+                    </a:lnT>
+                    <a:lnB w="6350">
+                      <a:solidFill>
+                        <a:srgbClr val="C9DED1"/>
+                      </a:solidFill>
+                    </a:lnB>
+                    <a:solidFill>
+                      <a:srgbClr val="114719"/>
+                    </a:solidFill>
+                  </a:tcPr>
+                </a:tc>
+                <a:tc>
+                  <a:txBody>
+                    <a:bodyPr/>
+                    <a:lstStyle/>
+                    <a:p>
+                      <a:pPr marL="0" indent="0" algn="l">
+                        <a:lnSpc>
+                          <a:spcPct val="100000"/>
+                        </a:lnSpc>
+                        <a:spcBef>
+                          <a:spcPts val="0"/>
+                        </a:spcBef>
+                        <a:spcAft>
+                          <a:spcPts val="0"/>
+                        </a:spcAft>
+                        <a:buNone/>
+                      </a:pPr>
+                      <a:r>
+                        <a:rPr lang="pt-BR" sz="1800" b="1" dirty="0">
+                          <a:solidFill>
+                            <a:srgbClr val="FFFFFF"/>
+                          </a:solidFill>
+                          <a:latin typeface="Montserrat"/>
+                        </a:rPr>
+                        <a:t>Como é feito</a:t>
+                      </a:r>
+                    </a:p>
+                  </a:txBody>
+                  <a:tcPr marL="73152" marR="73152" marT="36576" marB="36576" anchor="ctr">
+                    <a:lnL w="6350">
+                      <a:solidFill>
+                        <a:srgbClr val="C9DED1"/>
+                      </a:solidFill>
+                    </a:lnL>
+                    <a:lnR w="6350">
+                      <a:solidFill>
+                        <a:srgbClr val="C9DED1"/>
+                      </a:solidFill>
+                    </a:lnR>
+                    <a:lnT w="6350">
+                      <a:solidFill>
+                        <a:srgbClr val="C9DED1"/>
+                      </a:solidFill>
+                    </a:lnT>
+                    <a:lnB w="6350">
+                      <a:solidFill>
+                        <a:srgbClr val="C9DED1"/>
+                      </a:solidFill>
+                    </a:lnB>
+                    <a:solidFill>
+                      <a:srgbClr val="114719"/>
+                    </a:solidFill>
+                  </a:tcPr>
+                </a:tc>
+              </a:tr>
+              <a:tr h="1058405">
+                <a:tc>
+                  <a:txBody>
+                    <a:bodyPr/>
+                    <a:lstStyle/>
+                    <a:p>
+                      <a:pPr marL="0" indent="0" algn="l">
+                        <a:lnSpc>
+                          <a:spcPct val="100000"/>
+                        </a:lnSpc>
+                        <a:spcBef>
+                          <a:spcPts val="0"/>
+                        </a:spcBef>
+                        <a:spcAft>
+                          <a:spcPts val="0"/>
+                        </a:spcAft>
+                        <a:buNone/>
+                      </a:pPr>
+                      <a:r>
+                        <a:rPr lang="pt-BR" sz="1800" b="1" dirty="0">
+                          <a:solidFill>
+                            <a:srgbClr val="3A3A3A"/>
+                          </a:solidFill>
+                          <a:latin typeface="Montserrat"/>
+                        </a:rPr>
+                        <a:t>Outcome</a:t>
+                      </a:r>
+                    </a:p>
+                  </a:txBody>
+                  <a:tcPr marL="73152" marR="73152" marT="36576" marB="36576" anchor="ctr">
+                    <a:lnL w="6350">
+                      <a:solidFill>
+                        <a:srgbClr val="C9DED1"/>
+                      </a:solidFill>
+                    </a:lnL>
+                    <a:lnR w="6350">
+                      <a:solidFill>
+                        <a:srgbClr val="C9DED1"/>
+                      </a:solidFill>
+                    </a:lnR>
+                    <a:lnT w="6350">
+                      <a:solidFill>
+                        <a:srgbClr val="C9DED1"/>
+                      </a:solidFill>
+                    </a:lnT>
+                    <a:lnB w="6350">
+                      <a:solidFill>
+                        <a:srgbClr val="C9DED1"/>
+                      </a:solidFill>
+                    </a:lnB>
+                    <a:solidFill>
+                      <a:srgbClr val="F3F7F3"/>
+                    </a:solidFill>
+                  </a:tcPr>
+                </a:tc>
+                <a:tc>
+                  <a:txBody>
+                    <a:bodyPr/>
+                    <a:lstStyle/>
+                    <a:p>
+                      <a:pPr marL="0" indent="0" algn="l">
+                        <a:lnSpc>
+                          <a:spcPct val="100000"/>
+                        </a:lnSpc>
+                        <a:spcBef>
+                          <a:spcPts val="0"/>
+                        </a:spcBef>
+                        <a:spcAft>
+                          <a:spcPts val="0"/>
+                        </a:spcAft>
+                        <a:buNone/>
+                      </a:pPr>
+                      <a:r>
+                        <a:rPr lang="pt-BR" sz="1800" b="0" dirty="0">
+                          <a:solidFill>
+                            <a:srgbClr val="3A3A3A"/>
+                          </a:solidFill>
+                          <a:latin typeface="Montserrat"/>
+                        </a:rPr>
+                        <a:t>vagas preenchidas na 1ª chamada, por município e ciclo (N1); a célula aberta preenchida (A3) usa a mesma RDD, com efeitos fixos de curso × ciclo e de tipo de vaga</a:t>
+                      </a:r>
+                    </a:p>
+                  </a:txBody>
+                  <a:tcPr marL="73152" marR="73152" marT="36576" marB="36576" anchor="ctr">
+                    <a:lnL w="6350">
+                      <a:solidFill>
+                        <a:srgbClr val="C9DED1"/>
+                      </a:solidFill>
+                    </a:lnL>
+                    <a:lnR w="6350">
+                      <a:solidFill>
+                        <a:srgbClr val="C9DED1"/>
+                      </a:solidFill>
+                    </a:lnR>
+                    <a:lnT w="6350">
+                      <a:solidFill>
+                        <a:srgbClr val="C9DED1"/>
+                      </a:solidFill>
+                    </a:lnT>
+                    <a:lnB w="6350">
+                      <a:solidFill>
+                        <a:srgbClr val="C9DED1"/>
+                      </a:solidFill>
+                    </a:lnB>
+                    <a:solidFill>
+                      <a:srgbClr val="F3F7F3"/>
+                    </a:solidFill>
+                  </a:tcPr>
+                </a:tc>
+              </a:tr>
+              <a:tr h="752421">
+                <a:tc>
+                  <a:txBody>
+                    <a:bodyPr/>
+                    <a:lstStyle/>
+                    <a:p>
+                      <a:pPr marL="0" indent="0" algn="l">
+                        <a:lnSpc>
+                          <a:spcPct val="100000"/>
+                        </a:lnSpc>
+                        <a:spcBef>
+                          <a:spcPts val="0"/>
+                        </a:spcBef>
+                        <a:spcAft>
+                          <a:spcPts val="0"/>
+                        </a:spcAft>
+                        <a:buNone/>
+                      </a:pPr>
+                      <a:r>
+                        <a:rPr lang="pt-BR" sz="1800" b="1" dirty="0">
+                          <a:solidFill>
+                            <a:srgbClr val="3A3A3A"/>
+                          </a:solidFill>
+                          <a:latin typeface="Montserrat"/>
+                        </a:rPr>
+                        <a:t>Amostra</a:t>
+                      </a:r>
+                    </a:p>
+                  </a:txBody>
+                  <a:tcPr marL="73152" marR="73152" marT="36576" marB="36576" anchor="ctr">
+                    <a:lnL w="6350">
+                      <a:solidFill>
+                        <a:srgbClr val="C9DED1"/>
+                      </a:solidFill>
+                    </a:lnL>
+                    <a:lnR w="6350">
+                      <a:solidFill>
+                        <a:srgbClr val="C9DED1"/>
+                      </a:solidFill>
+                    </a:lnR>
+                    <a:lnT w="6350">
+                      <a:solidFill>
+                        <a:srgbClr val="C9DED1"/>
+                      </a:solidFill>
+                    </a:lnT>
+                    <a:lnB w="6350">
+                      <a:solidFill>
+                        <a:srgbClr val="C9DED1"/>
+                      </a:solidFill>
+                    </a:lnB>
+                    <a:solidFill>
+                      <a:srgbClr val="FFFFFF"/>
+                    </a:solidFill>
+                  </a:tcPr>
+                </a:tc>
+                <a:tc>
+                  <a:txBody>
+                    <a:bodyPr/>
+                    <a:lstStyle/>
+                    <a:p>
+                      <a:pPr marL="0" indent="0" algn="l">
+                        <a:lnSpc>
+                          <a:spcPct val="100000"/>
+                        </a:lnSpc>
+                        <a:spcBef>
+                          <a:spcPts val="0"/>
+                        </a:spcBef>
+                        <a:spcAft>
+                          <a:spcPts val="0"/>
+                        </a:spcAft>
+                        <a:buNone/>
+                      </a:pPr>
+                      <a:r>
+                        <a:rPr lang="pt-BR" sz="1800" b="0" dirty="0">
+                          <a:solidFill>
+                            <a:srgbClr val="3A3A3A"/>
+                          </a:solidFill>
+                          <a:latin typeface="Montserrat"/>
+                        </a:rPr>
+                        <a:t>só municípios com vaga no quadro, ciclos 1–3; kernel triangular, h = 0,050; cada corte separado</a:t>
+                      </a:r>
+                    </a:p>
+                  </a:txBody>
+                  <a:tcPr marL="73152" marR="73152" marT="36576" marB="36576" anchor="ctr">
+                    <a:lnL w="6350">
+                      <a:solidFill>
+                        <a:srgbClr val="C9DED1"/>
+                      </a:solidFill>
+                    </a:lnL>
+                    <a:lnR w="6350">
+                      <a:solidFill>
+                        <a:srgbClr val="C9DED1"/>
+                      </a:solidFill>
+                    </a:lnR>
+                    <a:lnT w="6350">
+                      <a:solidFill>
+                        <a:srgbClr val="C9DED1"/>
+                      </a:solidFill>
+                    </a:lnT>
+                    <a:lnB w="6350">
+                      <a:solidFill>
+                        <a:srgbClr val="C9DED1"/>
+                      </a:solidFill>
+                    </a:lnB>
+                    <a:solidFill>
+                      <a:srgbClr val="FFFFFF"/>
+                    </a:solidFill>
+                  </a:tcPr>
+                </a:tc>
+              </a:tr>
+              <a:tr h="1058405">
+                <a:tc>
+                  <a:txBody>
+                    <a:bodyPr/>
+                    <a:lstStyle/>
+                    <a:p>
+                      <a:pPr marL="0" indent="0" algn="l">
+                        <a:lnSpc>
+                          <a:spcPct val="100000"/>
+                        </a:lnSpc>
+                        <a:spcBef>
+                          <a:spcPts val="0"/>
+                        </a:spcBef>
+                        <a:spcAft>
+                          <a:spcPts val="0"/>
+                        </a:spcAft>
+                        <a:buNone/>
+                      </a:pPr>
+                      <a:r>
+                        <a:rPr lang="pt-BR" sz="1800" b="1" dirty="0">
+                          <a:solidFill>
+                            <a:srgbClr val="3A3A3A"/>
+                          </a:solidFill>
+                          <a:latin typeface="Montserrat"/>
+                        </a:rPr>
+                        <a:t>Equação em palavras</a:t>
+                      </a:r>
+                    </a:p>
+                  </a:txBody>
+                  <a:tcPr marL="73152" marR="73152" marT="36576" marB="36576" anchor="ctr">
+                    <a:lnL w="6350">
+                      <a:solidFill>
+                        <a:srgbClr val="C9DED1"/>
+                      </a:solidFill>
+                    </a:lnL>
+                    <a:lnR w="6350">
+                      <a:solidFill>
+                        <a:srgbClr val="C9DED1"/>
+                      </a:solidFill>
+                    </a:lnR>
+                    <a:lnT w="6350">
+                      <a:solidFill>
+                        <a:srgbClr val="C9DED1"/>
+                      </a:solidFill>
+                    </a:lnT>
+                    <a:lnB w="6350">
+                      <a:solidFill>
+                        <a:srgbClr val="C9DED1"/>
+                      </a:solidFill>
+                    </a:lnB>
+                    <a:solidFill>
+                      <a:srgbClr val="F3F7F3"/>
+                    </a:solidFill>
+                  </a:tcPr>
+                </a:tc>
+                <a:tc>
+                  <a:txBody>
+                    <a:bodyPr/>
+                    <a:lstStyle/>
+                    <a:p>
+                      <a:pPr marL="0" indent="0" algn="l">
+                        <a:lnSpc>
+                          <a:spcPct val="100000"/>
+                        </a:lnSpc>
+                        <a:spcBef>
+                          <a:spcPts val="0"/>
+                        </a:spcBef>
+                        <a:spcAft>
+                          <a:spcPts val="0"/>
+                        </a:spcAft>
+                        <a:buNone/>
+                      </a:pPr>
+                      <a:r>
+                        <a:rPr lang="pt-BR" sz="1800" b="0" dirty="0">
+                          <a:solidFill>
+                            <a:srgbClr val="3A3A3A"/>
+                          </a:solidFill>
+                          <a:latin typeface="Montserrat"/>
+                        </a:rPr>
+                        <a:t>vagas preenchidas = intercepto do ciclo + salto × (lado de bolsa maior) + reta de cada lado do corte, por ciclo + coeficiente do ciclo × vagas oferecidas; sem controle, sai o último termo</a:t>
+                      </a:r>
+                    </a:p>
+                  </a:txBody>
+                  <a:tcPr marL="73152" marR="73152" marT="36576" marB="36576" anchor="ctr">
+                    <a:lnL w="6350">
+                      <a:solidFill>
+                        <a:srgbClr val="C9DED1"/>
+                      </a:solidFill>
+                    </a:lnL>
+                    <a:lnR w="6350">
+                      <a:solidFill>
+                        <a:srgbClr val="C9DED1"/>
+                      </a:solidFill>
+                    </a:lnR>
+                    <a:lnT w="6350">
+                      <a:solidFill>
+                        <a:srgbClr val="C9DED1"/>
+                      </a:solidFill>
+                    </a:lnT>
+                    <a:lnB w="6350">
+                      <a:solidFill>
+                        <a:srgbClr val="C9DED1"/>
+                      </a:solidFill>
+                    </a:lnB>
+                    <a:solidFill>
+                      <a:srgbClr val="F3F7F3"/>
+                    </a:solidFill>
+                  </a:tcPr>
+                </a:tc>
+              </a:tr>
+              <a:tr h="752421">
+                <a:tc>
+                  <a:txBody>
+                    <a:bodyPr/>
+                    <a:lstStyle/>
+                    <a:p>
+                      <a:pPr marL="0" indent="0" algn="l">
+                        <a:lnSpc>
+                          <a:spcPct val="100000"/>
+                        </a:lnSpc>
+                        <a:spcBef>
+                          <a:spcPts val="0"/>
+                        </a:spcBef>
+                        <a:spcAft>
+                          <a:spcPts val="0"/>
+                        </a:spcAft>
+                        <a:buNone/>
+                      </a:pPr>
+                      <a:r>
+                        <a:rPr lang="pt-BR" sz="1800" b="1" dirty="0">
+                          <a:solidFill>
+                            <a:srgbClr val="3A3A3A"/>
+                          </a:solidFill>
+                          <a:latin typeface="Montserrat"/>
+                        </a:rPr>
+                        <a:t>Comum e por ciclo</a:t>
+                      </a:r>
+                    </a:p>
+                  </a:txBody>
+                  <a:tcPr marL="73152" marR="73152" marT="36576" marB="36576" anchor="ctr">
+                    <a:lnL w="6350">
+                      <a:solidFill>
+                        <a:srgbClr val="C9DED1"/>
+                      </a:solidFill>
+                    </a:lnL>
+                    <a:lnR w="6350">
+                      <a:solidFill>
+                        <a:srgbClr val="C9DED1"/>
+                      </a:solidFill>
+                    </a:lnR>
+                    <a:lnT w="6350">
+                      <a:solidFill>
+                        <a:srgbClr val="C9DED1"/>
+                      </a:solidFill>
+                    </a:lnT>
+                    <a:lnB w="6350">
+                      <a:solidFill>
+                        <a:srgbClr val="C9DED1"/>
+                      </a:solidFill>
+                    </a:lnB>
+                    <a:solidFill>
+                      <a:srgbClr val="FFFFFF"/>
+                    </a:solidFill>
+                  </a:tcPr>
+                </a:tc>
+                <a:tc>
+                  <a:txBody>
+                    <a:bodyPr/>
+                    <a:lstStyle/>
+                    <a:p>
+                      <a:pPr marL="0" indent="0" algn="l">
+                        <a:lnSpc>
+                          <a:spcPct val="100000"/>
+                        </a:lnSpc>
+                        <a:spcBef>
+                          <a:spcPts val="0"/>
+                        </a:spcBef>
+                        <a:spcAft>
+                          <a:spcPts val="0"/>
+                        </a:spcAft>
+                        <a:buNone/>
+                      </a:pPr>
+                      <a:r>
+                        <a:rPr lang="pt-BR" sz="1800" b="0" dirty="0">
+                          <a:solidFill>
+                            <a:srgbClr val="3A3A3A"/>
+                          </a:solidFill>
+                          <a:latin typeface="Montserrat"/>
+                        </a:rPr>
+                        <a:t>salto comum aos ciclos; intercepto, retas e coeficiente das vagas oferecidas, por ciclo</a:t>
+                      </a:r>
+                    </a:p>
+                  </a:txBody>
+                  <a:tcPr marL="73152" marR="73152" marT="36576" marB="36576" anchor="ctr">
+                    <a:lnL w="6350">
+                      <a:solidFill>
+                        <a:srgbClr val="C9DED1"/>
+                      </a:solidFill>
+                    </a:lnL>
+                    <a:lnR w="6350">
+                      <a:solidFill>
+                        <a:srgbClr val="C9DED1"/>
+                      </a:solidFill>
+                    </a:lnR>
+                    <a:lnT w="6350">
+                      <a:solidFill>
+                        <a:srgbClr val="C9DED1"/>
+                      </a:solidFill>
+                    </a:lnT>
+                    <a:lnB w="6350">
+                      <a:solidFill>
+                        <a:srgbClr val="C9DED1"/>
+                      </a:solidFill>
+                    </a:lnB>
+                    <a:solidFill>
+                      <a:srgbClr val="FFFFFF"/>
+                    </a:solidFill>
+                  </a:tcPr>
+                </a:tc>
+              </a:tr>
+              <a:tr h="446436">
+                <a:tc>
+                  <a:txBody>
+                    <a:bodyPr/>
+                    <a:lstStyle/>
+                    <a:p>
+                      <a:pPr marL="0" indent="0" algn="l">
+                        <a:lnSpc>
+                          <a:spcPct val="100000"/>
+                        </a:lnSpc>
+                        <a:spcBef>
+                          <a:spcPts val="0"/>
+                        </a:spcBef>
+                        <a:spcAft>
+                          <a:spcPts val="0"/>
+                        </a:spcAft>
+                        <a:buNone/>
+                      </a:pPr>
+                      <a:r>
+                        <a:rPr lang="pt-BR" sz="1800" b="1" dirty="0">
+                          <a:solidFill>
+                            <a:srgbClr val="3A3A3A"/>
+                          </a:solidFill>
+                          <a:latin typeface="Montserrat"/>
+                        </a:rPr>
+                        <a:t>Erro-padrão</a:t>
+                      </a:r>
+                    </a:p>
+                  </a:txBody>
+                  <a:tcPr marL="73152" marR="73152" marT="36576" marB="36576" anchor="ctr">
+                    <a:lnL w="6350">
+                      <a:solidFill>
+                        <a:srgbClr val="C9DED1"/>
+                      </a:solidFill>
+                    </a:lnL>
+                    <a:lnR w="6350">
+                      <a:solidFill>
+                        <a:srgbClr val="C9DED1"/>
+                      </a:solidFill>
+                    </a:lnR>
+                    <a:lnT w="6350">
+                      <a:solidFill>
+                        <a:srgbClr val="C9DED1"/>
+                      </a:solidFill>
+                    </a:lnT>
+                    <a:lnB w="6350">
+                      <a:solidFill>
+                        <a:srgbClr val="C9DED1"/>
+                      </a:solidFill>
+                    </a:lnB>
+                    <a:solidFill>
+                      <a:srgbClr val="F3F7F3"/>
+                    </a:solidFill>
+                  </a:tcPr>
+                </a:tc>
+                <a:tc>
+                  <a:txBody>
+                    <a:bodyPr/>
+                    <a:lstStyle/>
+                    <a:p>
+                      <a:pPr marL="0" indent="0" algn="l">
+                        <a:lnSpc>
+                          <a:spcPct val="100000"/>
+                        </a:lnSpc>
+                        <a:spcBef>
+                          <a:spcPts val="0"/>
+                        </a:spcBef>
+                        <a:spcAft>
+                          <a:spcPts val="0"/>
+                        </a:spcAft>
+                        <a:buNone/>
+                      </a:pPr>
+                      <a:r>
+                        <a:rPr lang="pt-BR" sz="1800" b="0" dirty="0">
+                          <a:solidFill>
+                            <a:srgbClr val="3A3A3A"/>
+                          </a:solidFill>
+                          <a:latin typeface="Montserrat"/>
+                        </a:rPr>
+                        <a:t>agrupado por município (CR1)</a:t>
+                      </a:r>
+                    </a:p>
+                  </a:txBody>
+                  <a:tcPr marL="73152" marR="73152" marT="36576" marB="36576" anchor="ctr">
+                    <a:lnL w="6350">
+                      <a:solidFill>
+                        <a:srgbClr val="C9DED1"/>
+                      </a:solidFill>
+                    </a:lnL>
+                    <a:lnR w="6350">
+                      <a:solidFill>
+                        <a:srgbClr val="C9DED1"/>
+                      </a:solidFill>
+                    </a:lnR>
+                    <a:lnT w="6350">
+                      <a:solidFill>
+                        <a:srgbClr val="C9DED1"/>
+                      </a:solidFill>
+                    </a:lnT>
+                    <a:lnB w="6350">
+                      <a:solidFill>
+                        <a:srgbClr val="C9DED1"/>
+                      </a:solidFill>
+                    </a:lnB>
+                    <a:solidFill>
+                      <a:srgbClr val="F3F7F3"/>
+                    </a:solidFill>
+                  </a:tcPr>
+                </a:tc>
+              </a:tr>
+              <a:tr h="752421">
+                <a:tc>
+                  <a:txBody>
+                    <a:bodyPr/>
+                    <a:lstStyle/>
+                    <a:p>
+                      <a:pPr marL="0" indent="0" algn="l">
+                        <a:lnSpc>
+                          <a:spcPct val="100000"/>
+                        </a:lnSpc>
+                        <a:spcBef>
+                          <a:spcPts val="0"/>
+                        </a:spcBef>
+                        <a:spcAft>
+                          <a:spcPts val="0"/>
+                        </a:spcAft>
+                        <a:buNone/>
+                      </a:pPr>
+                      <a:r>
+                        <a:rPr lang="pt-BR" sz="1800" b="1" dirty="0">
+                          <a:solidFill>
+                            <a:srgbClr val="3A3A3A"/>
+                          </a:solidFill>
+                          <a:latin typeface="Montserrat"/>
+                        </a:rPr>
+                        <a:t>Cuidado</a:t>
+                      </a:r>
+                    </a:p>
+                  </a:txBody>
+                  <a:tcPr marL="73152" marR="73152" marT="36576" marB="36576" anchor="ctr">
+                    <a:lnL w="6350">
+                      <a:solidFill>
+                        <a:srgbClr val="C9DED1"/>
+                      </a:solidFill>
+                    </a:lnL>
+                    <a:lnR w="6350">
+                      <a:solidFill>
+                        <a:srgbClr val="C9DED1"/>
+                      </a:solidFill>
+                    </a:lnR>
+                    <a:lnT w="6350">
+                      <a:solidFill>
+                        <a:srgbClr val="C9DED1"/>
+                      </a:solidFill>
+                    </a:lnT>
+                    <a:lnB w="6350">
+                      <a:solidFill>
+                        <a:srgbClr val="C9DED1"/>
+                      </a:solidFill>
+                    </a:lnB>
+                    <a:solidFill>
+                      <a:srgbClr val="FFFFFF"/>
+                    </a:solidFill>
+                  </a:tcPr>
+                </a:tc>
+                <a:tc>
+                  <a:txBody>
+                    <a:bodyPr/>
+                    <a:lstStyle/>
+                    <a:p>
+                      <a:pPr marL="0" indent="0" algn="l">
+                        <a:lnSpc>
+                          <a:spcPct val="100000"/>
+                        </a:lnSpc>
+                        <a:spcBef>
+                          <a:spcPts val="0"/>
+                        </a:spcBef>
+                        <a:spcAft>
+                          <a:spcPts val="0"/>
+                        </a:spcAft>
+                        <a:buNone/>
+                      </a:pPr>
+                      <a:r>
+                        <a:rPr lang="pt-BR" sz="1800" b="0" dirty="0">
+                          <a:solidFill>
+                            <a:srgbClr val="3A3A3A"/>
+                          </a:solidFill>
+                          <a:latin typeface="Montserrat"/>
+                        </a:rPr>
+                        <a:t>as vagas oferecidas podem responder ao corte: aí o controle compara municípios diferentes; pacote do corte</a:t>
+                      </a:r>
+                    </a:p>
+                  </a:txBody>
+                  <a:tcPr marL="73152" marR="73152" marT="36576" marB="36576" anchor="ctr">
+                    <a:lnL w="6350">
+                      <a:solidFill>
+                        <a:srgbClr val="C9DED1"/>
+                      </a:solidFill>
+                    </a:lnL>
+                    <a:lnR w="6350">
+                      <a:solidFill>
+                        <a:srgbClr val="C9DED1"/>
+                      </a:solidFill>
+                    </a:lnR>
+                    <a:lnT w="6350">
+                      <a:solidFill>
+                        <a:srgbClr val="C9DED1"/>
+                      </a:solidFill>
+                    </a:lnT>
+                    <a:lnB w="6350">
+                      <a:solidFill>
+                        <a:srgbClr val="C9DED1"/>
+                      </a:solidFill>
+                    </a:lnB>
+                    <a:solidFill>
+                      <a:srgbClr val="FFFFFF"/>
+                    </a:solidFill>
+                  </a:tcPr>
+                </a:tc>
+              </a:tr>
+            </a:tbl>
+          </a:graphicData>
+        </a:graphic>
+      </p:graphicFrame>
       <p:sp>
         <p:nvSpPr>
-          <p:cNvPr id="101" name="Linha"/>
-          <p:cNvSpPr/>
-          <p:nvPr/>
-        </p:nvSpPr>
-        <p:spPr>
-          <a:xfrm>
-            <a:off x="292608" y="5212080"/>
-            <a:ext cx="11594592" cy="420624"/>
-          </a:xfrm>
-          <a:prstGeom prst="rect">
-            <a:avLst/>
-          </a:prstGeom>
-          <a:noFill/>
-          <a:ln>
-            <a:noFill/>
-          </a:ln>
-        </p:spPr>
-        <p:txBody>
-          <a:bodyPr wrap="square" lIns="164592" tIns="18288" rIns="164592" bIns="18288" rtlCol="0" anchor="ctr">
-            <a:noAutofit/>
-          </a:bodyPr>
-          <a:lstStyle/>
-          <a:p>
-            <a:pPr marL="0" indent="0" algn="l">
-              <a:lnSpc>
-                <a:spcPct val="100000"/>
-              </a:lnSpc>
-              <a:spcBef>
-                <a:spcPts val="0"/>
-              </a:spcBef>
-              <a:spcAft>
-                <a:spcPts val="0"/>
-              </a:spcAft>
-              <a:buNone/>
-            </a:pPr>
-            <a:r>
-              <a:rPr lang="pt-BR" sz="1800" b="1" dirty="0">
-                <a:solidFill>
-                  <a:srgbClr val="114719"/>
-                </a:solidFill>
-                <a:latin typeface="Montserrat"/>
-              </a:rPr>
-              <a:t>0,400:</a:t>
-            </a:r>
-            <a:r>
-              <a:rPr lang="pt-BR" sz="1800" b="0" dirty="0">
-                <a:solidFill>
-                  <a:srgbClr val="3A3A3A"/>
-                </a:solidFill>
-                <a:latin typeface="Montserrat"/>
-              </a:rPr>
-              <a:t> menos vagas oferecidas do lado de bolsa maior; </a:t>
-            </a:r>
-            <a:r>
-              <a:rPr lang="pt-BR" sz="1800" b="1" dirty="0">
-                <a:solidFill>
-                  <a:srgbClr val="114719"/>
-                </a:solidFill>
-                <a:latin typeface="Montserrat"/>
-              </a:rPr>
-              <a:t>0,300:</a:t>
-            </a:r>
-            <a:r>
-              <a:rPr lang="pt-BR" sz="1800" b="0" dirty="0">
-                <a:solidFill>
-                  <a:srgbClr val="3A3A3A"/>
-                </a:solidFill>
-                <a:latin typeface="Montserrat"/>
-              </a:rPr>
-              <a:t> a oferta não muda.</a:t>
-            </a:r>
-          </a:p>
-        </p:txBody>
-      </p:sp>
-      <p:sp>
-        <p:nvSpPr>
-          <p:cNvPr id="102" name="Cautela"/>
-          <p:cNvSpPr/>
-          <p:nvPr/>
-        </p:nvSpPr>
-        <p:spPr>
-          <a:xfrm>
-            <a:off x="292608" y="5687568"/>
-            <a:ext cx="11594592" cy="420624"/>
-          </a:xfrm>
-          <a:prstGeom prst="roundRect">
-            <a:avLst>
-              <a:gd name="adj" fmla="val 12000"/>
-            </a:avLst>
-          </a:prstGeom>
-          <a:solidFill>
-            <a:srgbClr val="E7F1EA"/>
-          </a:solidFill>
-          <a:ln>
-            <a:noFill/>
-          </a:ln>
-        </p:spPr>
-        <p:txBody>
-          <a:bodyPr wrap="square" lIns="164592" tIns="18288" rIns="164592" bIns="18288" rtlCol="0" anchor="ctr">
-            <a:noAutofit/>
-          </a:bodyPr>
-          <a:lstStyle/>
-          <a:p>
-            <a:pPr marL="0" indent="0" algn="l">
-              <a:lnSpc>
-                <a:spcPct val="100000"/>
-              </a:lnSpc>
-              <a:spcBef>
-                <a:spcPts val="0"/>
-              </a:spcBef>
-              <a:spcAft>
-                <a:spcPts val="0"/>
-              </a:spcAft>
-              <a:buNone/>
-            </a:pPr>
-            <a:r>
-              <a:rPr lang="pt-BR" sz="1800" b="1" dirty="0">
-                <a:solidFill>
-                  <a:srgbClr val="114719"/>
-                </a:solidFill>
-                <a:latin typeface="Montserrat"/>
-              </a:rPr>
-              <a:t>Descritivo: médias por faixa, sem controles; o teste é a RDD que vem a seguir.</a:t>
-            </a:r>
-          </a:p>
-        </p:txBody>
-      </p:sp>
-      <p:pic>
-        <p:nvPicPr>
-          <p:cNvPr id="103" name="Figura" descr="Gráfico cru da RDD por corte: célula preenchida e vagas oferecidas por faixa estreita de IVS, com a reta local de cada lado"/>
-          <p:cNvPicPr>
-            <a:picLocks noChangeAspect="1"/>
-          </p:cNvPicPr>
-          <p:nvPr/>
-        </p:nvPicPr>
-        <p:blipFill>
-          <a:blip r:embed="rId3"/>
-          <a:stretch>
-            <a:fillRect/>
-          </a:stretch>
-        </p:blipFill>
-        <p:spPr>
-          <a:xfrm>
-            <a:off x="490274" y="804672"/>
-            <a:ext cx="11199260" cy="4279392"/>
-          </a:xfrm>
-          <a:prstGeom prst="rect">
-            <a:avLst/>
-          </a:prstGeom>
-          <a:ln w="6350">
-            <a:solidFill>
-              <a:srgbClr val="DDE7DF"/>
-            </a:solidFill>
-          </a:ln>
-        </p:spPr>
-      </p:pic>
-      <p:sp>
-        <p:nvSpPr>
-          <p:cNvPr id="104" name="Fontes"/>
+          <p:cNvPr id="102" name="Fontes"/>
           <p:cNvSpPr txBox="1"/>
           <p:nvPr/>
         </p:nvSpPr>
@@ -18381,7 +17690,7 @@
                 </a:solidFill>
                 <a:latin typeface="Montserrat"/>
               </a:rPr>
-              <a:t>output/rdd_bolsa/outcomes/outcomes_V_celula.parquet e outcomes_V_municipio.parquet; output/rdd_bolsa/ND_estimativas.csv (doc 49b); E1_densidade_estimativas.csv.</a:t>
+              <a:t>protocolo 48, §1, §3 e §7; doc 49, §2 e §3; ficha completa no deck completo (doc 02).</a:t>
             </a:r>
           </a:p>
         </p:txBody>
@@ -18444,7 +17753,7 @@
                 </a:solidFill>
                 <a:latin typeface="Montserrat"/>
               </a:rPr>
-              <a:t>Um estimador por hipótese</a:t>
+              <a:t>Antes e depois do controle: em 0,400, passa pelas vagas</a:t>
             </a:r>
           </a:p>
         </p:txBody>
@@ -18542,25 +17851,25 @@
               <a:t>Base de Dados  |  </a:t>
             </a:r>
             <a:r>
+              <a:rPr lang="pt-BR" sz="1000" dirty="0">
+                <a:latin typeface="Montserrat"/>
+              </a:rPr>
+              <a:t>Metodologia  |  </a:t>
+            </a:r>
+            <a:r>
               <a:rPr lang="pt-BR" sz="1000" b="1" dirty="0">
                 <a:solidFill>
                   <a:srgbClr val="114719"/>
                 </a:solidFill>
                 <a:latin typeface="Montserrat"/>
               </a:rPr>
-              <a:t>Metodologia</a:t>
+              <a:t>Resultados</a:t>
             </a:r>
             <a:r>
               <a:rPr lang="pt-BR" sz="1000" dirty="0">
                 <a:latin typeface="Montserrat"/>
               </a:rPr>
-              <a:t>  |  </a:t>
-            </a:r>
-            <a:r>
-              <a:rPr lang="pt-BR" sz="1000" dirty="0">
-                <a:latin typeface="Montserrat"/>
-              </a:rPr>
-              <a:t>Resultados</a:t>
+              <a:t/>
             </a:r>
           </a:p>
         </p:txBody>
@@ -18568,6 +17877,64 @@
       <p:sp>
         <p:nvSpPr>
           <p:cNvPr id="101" name="Linha"/>
+          <p:cNvSpPr/>
+          <p:nvPr/>
+        </p:nvSpPr>
+        <p:spPr>
+          <a:xfrm>
+            <a:off x="292608" y="4736592"/>
+            <a:ext cx="11594592" cy="420624"/>
+          </a:xfrm>
+          <a:prstGeom prst="rect">
+            <a:avLst/>
+          </a:prstGeom>
+          <a:noFill/>
+          <a:ln>
+            <a:noFill/>
+          </a:ln>
+        </p:spPr>
+        <p:txBody>
+          <a:bodyPr wrap="square" lIns="164592" tIns="18288" rIns="164592" bIns="18288" rtlCol="0" anchor="ctr">
+            <a:noAutofit/>
+          </a:bodyPr>
+          <a:lstStyle/>
+          <a:p>
+            <a:pPr marL="0" indent="0" algn="l">
+              <a:lnSpc>
+                <a:spcPct val="100000"/>
+              </a:lnSpc>
+              <a:spcBef>
+                <a:spcPts val="0"/>
+              </a:spcBef>
+              <a:spcAft>
+                <a:spcPts val="0"/>
+              </a:spcAft>
+              <a:buNone/>
+            </a:pPr>
+            <a:r>
+              <a:rPr lang="pt-BR" sz="1800" b="1" dirty="0">
+                <a:solidFill>
+                  <a:srgbClr val="114719"/>
+                </a:solidFill>
+                <a:latin typeface="Montserrat"/>
+              </a:rPr>
+              <a:t>0,400:</a:t>
+            </a:r>
+            <a:r>
+              <a:rPr lang="pt-BR" sz="1800" b="0" dirty="0">
+                <a:solidFill>
+                  <a:srgbClr val="3A3A3A"/>
+                </a:solidFill>
+                <a:latin typeface="Montserrat"/>
+              </a:rPr>
+              <a:t> passa pelas vagas: o lado de bolsa maior oferece menos vagas (−3,59).</a:t>
+            </a:r>
+          </a:p>
+        </p:txBody>
+      </p:sp>
+      <p:sp>
+        <p:nvSpPr>
+          <p:cNvPr id="102" name="Linha"/>
           <p:cNvSpPr/>
           <p:nvPr/>
         </p:nvSpPr>
@@ -18609,7 +17976,7 @@
                 </a:solidFill>
                 <a:latin typeface="Montserrat"/>
               </a:rPr>
-              <a:t>H1 com controle:</a:t>
+              <a:t>0,300:</a:t>
             </a:r>
             <a:r>
               <a:rPr lang="pt-BR" sz="1800" b="0" dirty="0">
@@ -18618,14 +17985,14 @@
                 </a:solidFill>
                 <a:latin typeface="Montserrat"/>
               </a:rPr>
-              <a:t> preenchidas = salto no corte + reta de cada lado + vagas oferecidas.</a:t>
+              <a:t> a oferta não muda; cai o preenchimento por vaga (pacote do corte).</a:t>
             </a:r>
           </a:p>
         </p:txBody>
       </p:sp>
       <p:sp>
         <p:nvSpPr>
-          <p:cNvPr id="102" name="Cautela"/>
+          <p:cNvPr id="103" name="Cautela"/>
           <p:cNvSpPr/>
           <p:nvPr/>
         </p:nvSpPr>
@@ -18671,895 +18038,43 @@
                 </a:solidFill>
                 <a:latin typeface="Montserrat"/>
               </a:rPr>
-              <a:t>Nos cortes, o contraste é o pacote do corte, não a participação no PMM-E.</a:t>
+              <a:t>TOST: sem aumento de 10 p.p. ou de 25% da média; não dá para dizer que nada mudou.</a:t>
             </a:r>
           </a:p>
         </p:txBody>
       </p:sp>
-      <p:graphicFrame>
-        <p:nvGraphicFramePr>
-          <p:cNvPr id="103" name="Tabela"/>
-          <p:cNvGraphicFramePr>
-            <a:graphicFrameLocks noGrp="1"/>
-          </p:cNvGraphicFramePr>
+      <p:pic>
+        <p:nvPicPr>
+          <p:cNvPr id="104" name="Figura" descr="Antes e depois do controle das vagas oferecidas, por corte: sem controle e com controle em dois gráficos na mesma escala; ao lado, o salto nas vagas oferecidas"/>
+          <p:cNvPicPr>
+            <a:picLocks noChangeAspect="1"/>
+          </p:cNvPicPr>
           <p:nvPr/>
-        </p:nvGraphicFramePr>
-        <p:xfrm>
-          <a:off x="292608" y="850392"/>
-          <a:ext cx="11594592" cy="4233672"/>
-        </p:xfrm>
-        <a:graphic>
-          <a:graphicData uri="http://schemas.openxmlformats.org/drawingml/2006/table">
-            <a:tbl>
-              <a:tblPr firstRow="1" bandRow="1"/>
-              <a:tblGrid>
-                <a:gridCol w="2043684"/>
-                <a:gridCol w="4512166"/>
-                <a:gridCol w="5038742"/>
-              </a:tblGrid>
-              <a:tr h="546875">
-                <a:tc>
-                  <a:txBody>
-                    <a:bodyPr/>
-                    <a:lstStyle/>
-                    <a:p>
-                      <a:pPr marL="0" indent="0" algn="l">
-                        <a:lnSpc>
-                          <a:spcPct val="100000"/>
-                        </a:lnSpc>
-                        <a:spcBef>
-                          <a:spcPts val="0"/>
-                        </a:spcBef>
-                        <a:spcAft>
-                          <a:spcPts val="0"/>
-                        </a:spcAft>
-                        <a:buNone/>
-                      </a:pPr>
-                      <a:r>
-                        <a:rPr lang="pt-BR" sz="1800" b="1" dirty="0">
-                          <a:solidFill>
-                            <a:srgbClr val="FFFFFF"/>
-                          </a:solidFill>
-                          <a:latin typeface="Montserrat"/>
-                        </a:rPr>
-                        <a:t>Hipótese</a:t>
-                      </a:r>
-                    </a:p>
-                  </a:txBody>
-                  <a:tcPr marL="73152" marR="73152" marT="36576" marB="36576" anchor="ctr">
-                    <a:lnL w="6350">
-                      <a:solidFill>
-                        <a:srgbClr val="C9DED1"/>
-                      </a:solidFill>
-                    </a:lnL>
-                    <a:lnR w="6350">
-                      <a:solidFill>
-                        <a:srgbClr val="C9DED1"/>
-                      </a:solidFill>
-                    </a:lnR>
-                    <a:lnT w="6350">
-                      <a:solidFill>
-                        <a:srgbClr val="C9DED1"/>
-                      </a:solidFill>
-                    </a:lnT>
-                    <a:lnB w="6350">
-                      <a:solidFill>
-                        <a:srgbClr val="C9DED1"/>
-                      </a:solidFill>
-                    </a:lnB>
-                    <a:solidFill>
-                      <a:srgbClr val="114719"/>
-                    </a:solidFill>
-                  </a:tcPr>
-                </a:tc>
-                <a:tc>
-                  <a:txBody>
-                    <a:bodyPr/>
-                    <a:lstStyle/>
-                    <a:p>
-                      <a:pPr marL="0" indent="0" algn="l">
-                        <a:lnSpc>
-                          <a:spcPct val="100000"/>
-                        </a:lnSpc>
-                        <a:spcBef>
-                          <a:spcPts val="0"/>
-                        </a:spcBef>
-                        <a:spcAft>
-                          <a:spcPts val="0"/>
-                        </a:spcAft>
-                        <a:buNone/>
-                      </a:pPr>
-                      <a:r>
-                        <a:rPr lang="pt-BR" sz="1800" b="1" dirty="0">
-                          <a:solidFill>
-                            <a:srgbClr val="FFFFFF"/>
-                          </a:solidFill>
-                          <a:latin typeface="Montserrat"/>
-                        </a:rPr>
-                        <a:t>Estimador</a:t>
-                      </a:r>
-                    </a:p>
-                  </a:txBody>
-                  <a:tcPr marL="73152" marR="73152" marT="36576" marB="36576" anchor="ctr">
-                    <a:lnL w="6350">
-                      <a:solidFill>
-                        <a:srgbClr val="C9DED1"/>
-                      </a:solidFill>
-                    </a:lnL>
-                    <a:lnR w="6350">
-                      <a:solidFill>
-                        <a:srgbClr val="C9DED1"/>
-                      </a:solidFill>
-                    </a:lnR>
-                    <a:lnT w="6350">
-                      <a:solidFill>
-                        <a:srgbClr val="C9DED1"/>
-                      </a:solidFill>
-                    </a:lnT>
-                    <a:lnB w="6350">
-                      <a:solidFill>
-                        <a:srgbClr val="C9DED1"/>
-                      </a:solidFill>
-                    </a:lnB>
-                    <a:solidFill>
-                      <a:srgbClr val="114719"/>
-                    </a:solidFill>
-                  </a:tcPr>
-                </a:tc>
-                <a:tc>
-                  <a:txBody>
-                    <a:bodyPr/>
-                    <a:lstStyle/>
-                    <a:p>
-                      <a:pPr marL="0" indent="0" algn="l">
-                        <a:lnSpc>
-                          <a:spcPct val="100000"/>
-                        </a:lnSpc>
-                        <a:spcBef>
-                          <a:spcPts val="0"/>
-                        </a:spcBef>
-                        <a:spcAft>
-                          <a:spcPts val="0"/>
-                        </a:spcAft>
-                        <a:buNone/>
-                      </a:pPr>
-                      <a:r>
-                        <a:rPr lang="pt-BR" sz="1800" b="1" dirty="0">
-                          <a:solidFill>
-                            <a:srgbClr val="FFFFFF"/>
-                          </a:solidFill>
-                          <a:latin typeface="Montserrat"/>
-                        </a:rPr>
-                        <a:t>Comparação</a:t>
-                      </a:r>
-                    </a:p>
-                  </a:txBody>
-                  <a:tcPr marL="73152" marR="73152" marT="36576" marB="36576" anchor="ctr">
-                    <a:lnL w="6350">
-                      <a:solidFill>
-                        <a:srgbClr val="C9DED1"/>
-                      </a:solidFill>
-                    </a:lnL>
-                    <a:lnR w="6350">
-                      <a:solidFill>
-                        <a:srgbClr val="C9DED1"/>
-                      </a:solidFill>
-                    </a:lnR>
-                    <a:lnT w="6350">
-                      <a:solidFill>
-                        <a:srgbClr val="C9DED1"/>
-                      </a:solidFill>
-                    </a:lnT>
-                    <a:lnB w="6350">
-                      <a:solidFill>
-                        <a:srgbClr val="C9DED1"/>
-                      </a:solidFill>
-                    </a:lnB>
-                    <a:solidFill>
-                      <a:srgbClr val="114719"/>
-                    </a:solidFill>
-                  </a:tcPr>
-                </a:tc>
-              </a:tr>
-              <a:tr h="921699">
-                <a:tc>
-                  <a:txBody>
-                    <a:bodyPr/>
-                    <a:lstStyle/>
-                    <a:p>
-                      <a:pPr marL="0" indent="0" algn="l">
-                        <a:lnSpc>
-                          <a:spcPct val="100000"/>
-                        </a:lnSpc>
-                        <a:spcBef>
-                          <a:spcPts val="0"/>
-                        </a:spcBef>
-                        <a:spcAft>
-                          <a:spcPts val="0"/>
-                        </a:spcAft>
-                        <a:buNone/>
-                      </a:pPr>
-                      <a:r>
-                        <a:rPr lang="pt-BR" sz="1800" b="1" dirty="0">
-                          <a:solidFill>
-                            <a:srgbClr val="114719"/>
-                          </a:solidFill>
-                          <a:latin typeface="Montserrat"/>
-                        </a:rPr>
-                        <a:t>H1</a:t>
-                      </a:r>
-                      <a:r>
-                        <a:rPr lang="pt-BR" sz="1800" b="1" dirty="0">
-                          <a:solidFill>
-                            <a:srgbClr val="3A3A3A"/>
-                          </a:solidFill>
-                          <a:latin typeface="Montserrat"/>
-                        </a:rPr>
-                        <a:t> preenchimento</a:t>
-                      </a:r>
-                    </a:p>
-                  </a:txBody>
-                  <a:tcPr marL="73152" marR="73152" marT="36576" marB="36576" anchor="ctr">
-                    <a:lnL w="6350">
-                      <a:solidFill>
-                        <a:srgbClr val="C9DED1"/>
-                      </a:solidFill>
-                    </a:lnL>
-                    <a:lnR w="6350">
-                      <a:solidFill>
-                        <a:srgbClr val="C9DED1"/>
-                      </a:solidFill>
-                    </a:lnR>
-                    <a:lnT w="6350">
-                      <a:solidFill>
-                        <a:srgbClr val="C9DED1"/>
-                      </a:solidFill>
-                    </a:lnT>
-                    <a:lnB w="6350">
-                      <a:solidFill>
-                        <a:srgbClr val="C9DED1"/>
-                      </a:solidFill>
-                    </a:lnB>
-                    <a:solidFill>
-                      <a:srgbClr val="F3F7F3"/>
-                    </a:solidFill>
-                  </a:tcPr>
-                </a:tc>
-                <a:tc>
-                  <a:txBody>
-                    <a:bodyPr/>
-                    <a:lstStyle/>
-                    <a:p>
-                      <a:pPr marL="0" indent="0" algn="l">
-                        <a:lnSpc>
-                          <a:spcPct val="100000"/>
-                        </a:lnSpc>
-                        <a:spcBef>
-                          <a:spcPts val="0"/>
-                        </a:spcBef>
-                        <a:spcAft>
-                          <a:spcPts val="0"/>
-                        </a:spcAft>
-                        <a:buNone/>
-                      </a:pPr>
-                      <a:r>
-                        <a:rPr lang="pt-BR" sz="1800" b="0" dirty="0">
-                          <a:solidFill>
-                            <a:srgbClr val="3A3A3A"/>
-                          </a:solidFill>
-                          <a:latin typeface="Montserrat"/>
-                        </a:rPr>
-                        <a:t>RDD sharp em cada corte, 0,300 e 0,400</a:t>
-                      </a:r>
-                    </a:p>
-                  </a:txBody>
-                  <a:tcPr marL="73152" marR="73152" marT="36576" marB="36576" anchor="ctr">
-                    <a:lnL w="6350">
-                      <a:solidFill>
-                        <a:srgbClr val="C9DED1"/>
-                      </a:solidFill>
-                    </a:lnL>
-                    <a:lnR w="6350">
-                      <a:solidFill>
-                        <a:srgbClr val="C9DED1"/>
-                      </a:solidFill>
-                    </a:lnR>
-                    <a:lnT w="6350">
-                      <a:solidFill>
-                        <a:srgbClr val="C9DED1"/>
-                      </a:solidFill>
-                    </a:lnT>
-                    <a:lnB w="6350">
-                      <a:solidFill>
-                        <a:srgbClr val="C9DED1"/>
-                      </a:solidFill>
-                    </a:lnB>
-                    <a:solidFill>
-                      <a:srgbClr val="F3F7F3"/>
-                    </a:solidFill>
-                  </a:tcPr>
-                </a:tc>
-                <a:tc>
-                  <a:txBody>
-                    <a:bodyPr/>
-                    <a:lstStyle/>
-                    <a:p>
-                      <a:pPr marL="0" indent="0" algn="l">
-                        <a:lnSpc>
-                          <a:spcPct val="100000"/>
-                        </a:lnSpc>
-                        <a:spcBef>
-                          <a:spcPts val="0"/>
-                        </a:spcBef>
-                        <a:spcAft>
-                          <a:spcPts val="0"/>
-                        </a:spcAft>
-                        <a:buNone/>
-                      </a:pPr>
-                      <a:r>
-                        <a:rPr lang="pt-BR" sz="1800" b="0" dirty="0">
-                          <a:solidFill>
-                            <a:srgbClr val="3A3A3A"/>
-                          </a:solidFill>
-                          <a:latin typeface="Montserrat"/>
-                        </a:rPr>
-                        <a:t>municípios logo acima × logo abaixo do corte</a:t>
-                      </a:r>
-                    </a:p>
-                  </a:txBody>
-                  <a:tcPr marL="73152" marR="73152" marT="36576" marB="36576" anchor="ctr">
-                    <a:lnL w="6350">
-                      <a:solidFill>
-                        <a:srgbClr val="C9DED1"/>
-                      </a:solidFill>
-                    </a:lnL>
-                    <a:lnR w="6350">
-                      <a:solidFill>
-                        <a:srgbClr val="C9DED1"/>
-                      </a:solidFill>
-                    </a:lnR>
-                    <a:lnT w="6350">
-                      <a:solidFill>
-                        <a:srgbClr val="C9DED1"/>
-                      </a:solidFill>
-                    </a:lnT>
-                    <a:lnB w="6350">
-                      <a:solidFill>
-                        <a:srgbClr val="C9DED1"/>
-                      </a:solidFill>
-                    </a:lnB>
-                    <a:solidFill>
-                      <a:srgbClr val="F3F7F3"/>
-                    </a:solidFill>
-                  </a:tcPr>
-                </a:tc>
-              </a:tr>
-              <a:tr h="921699">
-                <a:tc>
-                  <a:txBody>
-                    <a:bodyPr/>
-                    <a:lstStyle/>
-                    <a:p>
-                      <a:pPr marL="0" indent="0" algn="l">
-                        <a:lnSpc>
-                          <a:spcPct val="100000"/>
-                        </a:lnSpc>
-                        <a:spcBef>
-                          <a:spcPts val="0"/>
-                        </a:spcBef>
-                        <a:spcAft>
-                          <a:spcPts val="0"/>
-                        </a:spcAft>
-                        <a:buNone/>
-                      </a:pPr>
-                      <a:r>
-                        <a:rPr lang="pt-BR" sz="1800" b="1" dirty="0">
-                          <a:solidFill>
-                            <a:srgbClr val="114719"/>
-                          </a:solidFill>
-                          <a:latin typeface="Montserrat"/>
-                        </a:rPr>
-                        <a:t>H2</a:t>
-                      </a:r>
-                      <a:r>
-                        <a:rPr lang="pt-BR" sz="1800" b="1" dirty="0">
-                          <a:solidFill>
-                            <a:srgbClr val="3A3A3A"/>
-                          </a:solidFill>
-                          <a:latin typeface="Montserrat"/>
-                        </a:rPr>
-                        <a:t> escolha</a:t>
-                      </a:r>
-                    </a:p>
-                  </a:txBody>
-                  <a:tcPr marL="73152" marR="73152" marT="36576" marB="36576" anchor="ctr">
-                    <a:lnL w="6350">
-                      <a:solidFill>
-                        <a:srgbClr val="C9DED1"/>
-                      </a:solidFill>
-                    </a:lnL>
-                    <a:lnR w="6350">
-                      <a:solidFill>
-                        <a:srgbClr val="C9DED1"/>
-                      </a:solidFill>
-                    </a:lnR>
-                    <a:lnT w="6350">
-                      <a:solidFill>
-                        <a:srgbClr val="C9DED1"/>
-                      </a:solidFill>
-                    </a:lnT>
-                    <a:lnB w="6350">
-                      <a:solidFill>
-                        <a:srgbClr val="C9DED1"/>
-                      </a:solidFill>
-                    </a:lnB>
-                    <a:solidFill>
-                      <a:srgbClr val="FFFFFF"/>
-                    </a:solidFill>
-                  </a:tcPr>
-                </a:tc>
-                <a:tc>
-                  <a:txBody>
-                    <a:bodyPr/>
-                    <a:lstStyle/>
-                    <a:p>
-                      <a:pPr marL="0" indent="0" algn="l">
-                        <a:lnSpc>
-                          <a:spcPct val="100000"/>
-                        </a:lnSpc>
-                        <a:spcBef>
-                          <a:spcPts val="0"/>
-                        </a:spcBef>
-                        <a:spcAft>
-                          <a:spcPts val="0"/>
-                        </a:spcAft>
-                        <a:buNone/>
-                      </a:pPr>
-                      <a:r>
-                        <a:rPr lang="pt-BR" sz="1800" b="0" dirty="0">
-                          <a:solidFill>
-                            <a:srgbClr val="3A3A3A"/>
-                          </a:solidFill>
-                          <a:latin typeface="Montserrat"/>
-                        </a:rPr>
-                        <a:t>logit condicional da 1ª opção</a:t>
-                      </a:r>
-                    </a:p>
-                  </a:txBody>
-                  <a:tcPr marL="73152" marR="73152" marT="36576" marB="36576" anchor="ctr">
-                    <a:lnL w="6350">
-                      <a:solidFill>
-                        <a:srgbClr val="C9DED1"/>
-                      </a:solidFill>
-                    </a:lnL>
-                    <a:lnR w="6350">
-                      <a:solidFill>
-                        <a:srgbClr val="C9DED1"/>
-                      </a:solidFill>
-                    </a:lnR>
-                    <a:lnT w="6350">
-                      <a:solidFill>
-                        <a:srgbClr val="C9DED1"/>
-                      </a:solidFill>
-                    </a:lnT>
-                    <a:lnB w="6350">
-                      <a:solidFill>
-                        <a:srgbClr val="C9DED1"/>
-                      </a:solidFill>
-                    </a:lnB>
-                    <a:solidFill>
-                      <a:srgbClr val="FFFFFF"/>
-                    </a:solidFill>
-                  </a:tcPr>
-                </a:tc>
-                <a:tc>
-                  <a:txBody>
-                    <a:bodyPr/>
-                    <a:lstStyle/>
-                    <a:p>
-                      <a:pPr marL="0" indent="0" algn="l">
-                        <a:lnSpc>
-                          <a:spcPct val="100000"/>
-                        </a:lnSpc>
-                        <a:spcBef>
-                          <a:spcPts val="0"/>
-                        </a:spcBef>
-                        <a:spcAft>
-                          <a:spcPts val="0"/>
-                        </a:spcAft>
-                        <a:buNone/>
-                      </a:pPr>
-                      <a:r>
-                        <a:rPr lang="pt-BR" sz="1800" b="0" dirty="0">
-                          <a:solidFill>
-                            <a:srgbClr val="3A3A3A"/>
-                          </a:solidFill>
-                          <a:latin typeface="Montserrat"/>
-                        </a:rPr>
-                        <a:t>vagas do mesmo curso e ciclo, com bolsa diferente</a:t>
-                      </a:r>
-                    </a:p>
-                  </a:txBody>
-                  <a:tcPr marL="73152" marR="73152" marT="36576" marB="36576" anchor="ctr">
-                    <a:lnL w="6350">
-                      <a:solidFill>
-                        <a:srgbClr val="C9DED1"/>
-                      </a:solidFill>
-                    </a:lnL>
-                    <a:lnR w="6350">
-                      <a:solidFill>
-                        <a:srgbClr val="C9DED1"/>
-                      </a:solidFill>
-                    </a:lnR>
-                    <a:lnT w="6350">
-                      <a:solidFill>
-                        <a:srgbClr val="C9DED1"/>
-                      </a:solidFill>
-                    </a:lnT>
-                    <a:lnB w="6350">
-                      <a:solidFill>
-                        <a:srgbClr val="C9DED1"/>
-                      </a:solidFill>
-                    </a:lnB>
-                    <a:solidFill>
-                      <a:srgbClr val="FFFFFF"/>
-                    </a:solidFill>
-                  </a:tcPr>
-                </a:tc>
-              </a:tr>
-              <a:tr h="921699">
-                <a:tc>
-                  <a:txBody>
-                    <a:bodyPr/>
-                    <a:lstStyle/>
-                    <a:p>
-                      <a:pPr marL="0" indent="0" algn="l">
-                        <a:lnSpc>
-                          <a:spcPct val="100000"/>
-                        </a:lnSpc>
-                        <a:spcBef>
-                          <a:spcPts val="0"/>
-                        </a:spcBef>
-                        <a:spcAft>
-                          <a:spcPts val="0"/>
-                        </a:spcAft>
-                        <a:buNone/>
-                      </a:pPr>
-                      <a:r>
-                        <a:rPr lang="pt-BR" sz="1800" b="1" dirty="0">
-                          <a:solidFill>
-                            <a:srgbClr val="114719"/>
-                          </a:solidFill>
-                          <a:latin typeface="Montserrat"/>
-                        </a:rPr>
-                        <a:t>H3</a:t>
-                      </a:r>
-                      <a:r>
-                        <a:rPr lang="pt-BR" sz="1800" b="1" dirty="0">
-                          <a:solidFill>
-                            <a:srgbClr val="3A3A3A"/>
-                          </a:solidFill>
-                          <a:latin typeface="Montserrat"/>
-                        </a:rPr>
-                        <a:t> bolsa × origem</a:t>
-                      </a:r>
-                    </a:p>
-                  </a:txBody>
-                  <a:tcPr marL="73152" marR="73152" marT="36576" marB="36576" anchor="ctr">
-                    <a:lnL w="6350">
-                      <a:solidFill>
-                        <a:srgbClr val="C9DED1"/>
-                      </a:solidFill>
-                    </a:lnL>
-                    <a:lnR w="6350">
-                      <a:solidFill>
-                        <a:srgbClr val="C9DED1"/>
-                      </a:solidFill>
-                    </a:lnR>
-                    <a:lnT w="6350">
-                      <a:solidFill>
-                        <a:srgbClr val="C9DED1"/>
-                      </a:solidFill>
-                    </a:lnT>
-                    <a:lnB w="6350">
-                      <a:solidFill>
-                        <a:srgbClr val="C9DED1"/>
-                      </a:solidFill>
-                    </a:lnB>
-                    <a:solidFill>
-                      <a:srgbClr val="F3F7F3"/>
-                    </a:solidFill>
-                  </a:tcPr>
-                </a:tc>
-                <a:tc>
-                  <a:txBody>
-                    <a:bodyPr/>
-                    <a:lstStyle/>
-                    <a:p>
-                      <a:pPr marL="0" indent="0" algn="l">
-                        <a:lnSpc>
-                          <a:spcPct val="100000"/>
-                        </a:lnSpc>
-                        <a:spcBef>
-                          <a:spcPts val="0"/>
-                        </a:spcBef>
-                        <a:spcAft>
-                          <a:spcPts val="0"/>
-                        </a:spcAft>
-                        <a:buNone/>
-                      </a:pPr>
-                      <a:r>
-                        <a:rPr lang="pt-BR" sz="1800" b="0" dirty="0">
-                          <a:solidFill>
-                            <a:srgbClr val="3A3A3A"/>
-                          </a:solidFill>
-                          <a:latin typeface="Montserrat"/>
-                        </a:rPr>
-                        <a:t>o mesmo logit, dois pesos na mesma escala</a:t>
-                      </a:r>
-                    </a:p>
-                  </a:txBody>
-                  <a:tcPr marL="73152" marR="73152" marT="36576" marB="36576" anchor="ctr">
-                    <a:lnL w="6350">
-                      <a:solidFill>
-                        <a:srgbClr val="C9DED1"/>
-                      </a:solidFill>
-                    </a:lnL>
-                    <a:lnR w="6350">
-                      <a:solidFill>
-                        <a:srgbClr val="C9DED1"/>
-                      </a:solidFill>
-                    </a:lnR>
-                    <a:lnT w="6350">
-                      <a:solidFill>
-                        <a:srgbClr val="C9DED1"/>
-                      </a:solidFill>
-                    </a:lnT>
-                    <a:lnB w="6350">
-                      <a:solidFill>
-                        <a:srgbClr val="C9DED1"/>
-                      </a:solidFill>
-                    </a:lnB>
-                    <a:solidFill>
-                      <a:srgbClr val="F3F7F3"/>
-                    </a:solidFill>
-                  </a:tcPr>
-                </a:tc>
-                <a:tc>
-                  <a:txBody>
-                    <a:bodyPr/>
-                    <a:lstStyle/>
-                    <a:p>
-                      <a:pPr marL="0" indent="0" algn="l">
-                        <a:lnSpc>
-                          <a:spcPct val="100000"/>
-                        </a:lnSpc>
-                        <a:spcBef>
-                          <a:spcPts val="0"/>
-                        </a:spcBef>
-                        <a:spcAft>
-                          <a:spcPts val="0"/>
-                        </a:spcAft>
-                        <a:buNone/>
-                      </a:pPr>
-                      <a:r>
-                        <a:rPr lang="pt-BR" sz="1800" b="0" dirty="0">
-                          <a:solidFill>
-                            <a:srgbClr val="3A3A3A"/>
-                          </a:solidFill>
-                          <a:latin typeface="Montserrat"/>
-                        </a:rPr>
-                        <a:t>toda a bolsa contra a vaga na UF de origem</a:t>
-                      </a:r>
-                    </a:p>
-                  </a:txBody>
-                  <a:tcPr marL="73152" marR="73152" marT="36576" marB="36576" anchor="ctr">
-                    <a:lnL w="6350">
-                      <a:solidFill>
-                        <a:srgbClr val="C9DED1"/>
-                      </a:solidFill>
-                    </a:lnL>
-                    <a:lnR w="6350">
-                      <a:solidFill>
-                        <a:srgbClr val="C9DED1"/>
-                      </a:solidFill>
-                    </a:lnR>
-                    <a:lnT w="6350">
-                      <a:solidFill>
-                        <a:srgbClr val="C9DED1"/>
-                      </a:solidFill>
-                    </a:lnT>
-                    <a:lnB w="6350">
-                      <a:solidFill>
-                        <a:srgbClr val="C9DED1"/>
-                      </a:solidFill>
-                    </a:lnB>
-                    <a:solidFill>
-                      <a:srgbClr val="F3F7F3"/>
-                    </a:solidFill>
-                  </a:tcPr>
-                </a:tc>
-              </a:tr>
-              <a:tr h="921699">
-                <a:tc>
-                  <a:txBody>
-                    <a:bodyPr/>
-                    <a:lstStyle/>
-                    <a:p>
-                      <a:pPr marL="0" indent="0" algn="l">
-                        <a:lnSpc>
-                          <a:spcPct val="100000"/>
-                        </a:lnSpc>
-                        <a:spcBef>
-                          <a:spcPts val="0"/>
-                        </a:spcBef>
-                        <a:spcAft>
-                          <a:spcPts val="0"/>
-                        </a:spcAft>
-                        <a:buNone/>
-                      </a:pPr>
-                      <a:r>
-                        <a:rPr lang="pt-BR" sz="1800" b="1" dirty="0">
-                          <a:solidFill>
-                            <a:srgbClr val="114719"/>
-                          </a:solidFill>
-                          <a:latin typeface="Montserrat"/>
-                        </a:rPr>
-                        <a:t>H4</a:t>
-                      </a:r>
-                      <a:r>
-                        <a:rPr lang="pt-BR" sz="1800" b="1" dirty="0">
-                          <a:solidFill>
-                            <a:srgbClr val="3A3A3A"/>
-                          </a:solidFill>
-                          <a:latin typeface="Montserrat"/>
-                        </a:rPr>
-                        <a:t> oferta</a:t>
-                      </a:r>
-                    </a:p>
-                  </a:txBody>
-                  <a:tcPr marL="73152" marR="73152" marT="36576" marB="36576" anchor="ctr">
-                    <a:lnL w="6350">
-                      <a:solidFill>
-                        <a:srgbClr val="C9DED1"/>
-                      </a:solidFill>
-                    </a:lnL>
-                    <a:lnR w="6350">
-                      <a:solidFill>
-                        <a:srgbClr val="C9DED1"/>
-                      </a:solidFill>
-                    </a:lnR>
-                    <a:lnT w="6350">
-                      <a:solidFill>
-                        <a:srgbClr val="C9DED1"/>
-                      </a:solidFill>
-                    </a:lnT>
-                    <a:lnB w="6350">
-                      <a:solidFill>
-                        <a:srgbClr val="C9DED1"/>
-                      </a:solidFill>
-                    </a:lnB>
-                    <a:solidFill>
-                      <a:srgbClr val="FFFFFF"/>
-                    </a:solidFill>
-                  </a:tcPr>
-                </a:tc>
-                <a:tc>
-                  <a:txBody>
-                    <a:bodyPr/>
-                    <a:lstStyle/>
-                    <a:p>
-                      <a:pPr marL="0" indent="0" algn="l">
-                        <a:lnSpc>
-                          <a:spcPct val="100000"/>
-                        </a:lnSpc>
-                        <a:spcBef>
-                          <a:spcPts val="0"/>
-                        </a:spcBef>
-                        <a:spcAft>
-                          <a:spcPts val="0"/>
-                        </a:spcAft>
-                        <a:buNone/>
-                      </a:pPr>
-                      <a:r>
-                        <a:rPr lang="pt-BR" sz="1800" b="0" dirty="0">
-                          <a:solidFill>
-                            <a:srgbClr val="3A3A3A"/>
-                          </a:solidFill>
-                          <a:latin typeface="Montserrat"/>
-                        </a:rPr>
-                        <a:t>estudo de evento escalonado (Callaway–Sant'Anna)</a:t>
-                      </a:r>
-                    </a:p>
-                  </a:txBody>
-                  <a:tcPr marL="73152" marR="73152" marT="36576" marB="36576" anchor="ctr">
-                    <a:lnL w="6350">
-                      <a:solidFill>
-                        <a:srgbClr val="C9DED1"/>
-                      </a:solidFill>
-                    </a:lnL>
-                    <a:lnR w="6350">
-                      <a:solidFill>
-                        <a:srgbClr val="C9DED1"/>
-                      </a:solidFill>
-                    </a:lnR>
-                    <a:lnT w="6350">
-                      <a:solidFill>
-                        <a:srgbClr val="C9DED1"/>
-                      </a:solidFill>
-                    </a:lnT>
-                    <a:lnB w="6350">
-                      <a:solidFill>
-                        <a:srgbClr val="C9DED1"/>
-                      </a:solidFill>
-                    </a:lnB>
-                    <a:solidFill>
-                      <a:srgbClr val="FFFFFF"/>
-                    </a:solidFill>
-                  </a:tcPr>
-                </a:tc>
-                <a:tc>
-                  <a:txBody>
-                    <a:bodyPr/>
-                    <a:lstStyle/>
-                    <a:p>
-                      <a:pPr marL="0" indent="0" algn="l">
-                        <a:lnSpc>
-                          <a:spcPct val="100000"/>
-                        </a:lnSpc>
-                        <a:spcBef>
-                          <a:spcPts val="0"/>
-                        </a:spcBef>
-                        <a:spcAft>
-                          <a:spcPts val="0"/>
-                        </a:spcAft>
-                        <a:buNone/>
-                      </a:pPr>
-                      <a:r>
-                        <a:rPr lang="pt-BR" sz="1800" b="0" dirty="0">
-                          <a:solidFill>
-                            <a:srgbClr val="3A3A3A"/>
-                          </a:solidFill>
-                          <a:latin typeface="Montserrat"/>
-                        </a:rPr>
-                        <a:t>o médico antes × depois, contra quem ainda não entrou</a:t>
-                      </a:r>
-                    </a:p>
-                  </a:txBody>
-                  <a:tcPr marL="73152" marR="73152" marT="36576" marB="36576" anchor="ctr">
-                    <a:lnL w="6350">
-                      <a:solidFill>
-                        <a:srgbClr val="C9DED1"/>
-                      </a:solidFill>
-                    </a:lnL>
-                    <a:lnR w="6350">
-                      <a:solidFill>
-                        <a:srgbClr val="C9DED1"/>
-                      </a:solidFill>
-                    </a:lnR>
-                    <a:lnT w="6350">
-                      <a:solidFill>
-                        <a:srgbClr val="C9DED1"/>
-                      </a:solidFill>
-                    </a:lnT>
-                    <a:lnB w="6350">
-                      <a:solidFill>
-                        <a:srgbClr val="C9DED1"/>
-                      </a:solidFill>
-                    </a:lnB>
-                    <a:solidFill>
-                      <a:srgbClr val="FFFFFF"/>
-                    </a:solidFill>
-                  </a:tcPr>
-                </a:tc>
-              </a:tr>
-            </a:tbl>
-          </a:graphicData>
-        </a:graphic>
-      </p:graphicFrame>
+        </p:nvPicPr>
+        <p:blipFill>
+          <a:blip r:embed="rId3"/>
+          <a:stretch>
+            <a:fillRect/>
+          </a:stretch>
+        </p:blipFill>
+        <p:spPr>
+          <a:xfrm>
+            <a:off x="292608" y="1033421"/>
+            <a:ext cx="11594592" cy="3346407"/>
+          </a:xfrm>
+          <a:prstGeom prst="rect">
+            <a:avLst/>
+          </a:prstGeom>
+          <a:ln w="6350">
+            <a:solidFill>
+              <a:srgbClr val="DDE7DF"/>
+            </a:solidFill>
+          </a:ln>
+        </p:spPr>
+      </p:pic>
       <p:sp>
         <p:nvSpPr>
-          <p:cNvPr id="104" name="Fontes"/>
+          <p:cNvPr id="105" name="Fontes"/>
           <p:cNvSpPr txBox="1"/>
           <p:nvPr/>
         </p:nvSpPr>
@@ -19610,7 +18125,7 @@
                 </a:solidFill>
                 <a:latin typeface="Montserrat"/>
               </a:rPr>
-              <a:t>plano da banca 2, §4.1; protocolos 40, 48, 52, 52b, 54, 56 e 59.</a:t>
+              <a:t>output/rdd_bolsa/N_estimativas.csv (decomposição e S-c; doc 49, §3 a §5); ND_estimativas.csv (doc 49b, §3); EQ_estimativas.csv (TOST; doc 57j; auditoria 32).</a:t>
             </a:r>
           </a:p>
         </p:txBody>
@@ -19673,7 +18188,7 @@
                 </a:solidFill>
                 <a:latin typeface="Montserrat"/>
               </a:rPr>
-              <a:t>H1: o preenchimento não aumenta em nenhum dos dois cortes</a:t>
+              <a:t>Por que o preenchimento cai em 0,300</a:t>
             </a:r>
           </a:p>
         </p:txBody>
@@ -19794,27 +18309,115 @@
           </a:p>
         </p:txBody>
       </p:sp>
+      <p:pic>
+        <p:nvPicPr>
+          <p:cNvPr id="101" name="Figura" descr="Diagnóstico do protocolo 61 (preliminar): quanto da queda em 0,300 sobra ao igualar cada fator entre os lados do corte, para Q1, Q2 e Q3, com IC 95%"/>
+          <p:cNvPicPr>
+            <a:picLocks noChangeAspect="1"/>
+          </p:cNvPicPr>
+          <p:nvPr/>
+        </p:nvPicPr>
+        <p:blipFill>
+          <a:blip r:embed="rId3"/>
+          <a:stretch>
+            <a:fillRect/>
+          </a:stretch>
+        </p:blipFill>
+        <p:spPr>
+          <a:xfrm>
+            <a:off x="292608" y="1542593"/>
+            <a:ext cx="6839712" cy="3077870"/>
+          </a:xfrm>
+          <a:prstGeom prst="rect">
+            <a:avLst/>
+          </a:prstGeom>
+          <a:ln w="6350">
+            <a:solidFill>
+              <a:srgbClr val="DDE7DF"/>
+            </a:solidFill>
+          </a:ln>
+        </p:spPr>
+      </p:pic>
       <p:sp>
         <p:nvSpPr>
-          <p:cNvPr id="101" name="Linha"/>
+          <p:cNvPr id="102" name="Selo"/>
           <p:cNvSpPr/>
           <p:nvPr/>
         </p:nvSpPr>
         <p:spPr>
           <a:xfrm>
-            <a:off x="292608" y="5212080"/>
-            <a:ext cx="11594592" cy="420624"/>
+            <a:off x="292608" y="4785055"/>
+            <a:ext cx="6839712" cy="566928"/>
           </a:xfrm>
-          <a:prstGeom prst="rect">
-            <a:avLst/>
+          <a:prstGeom prst="roundRect">
+            <a:avLst>
+              <a:gd name="adj" fmla="val 18000"/>
+            </a:avLst>
           </a:prstGeom>
-          <a:noFill/>
+          <a:solidFill>
+            <a:srgbClr val="B3261E"/>
+          </a:solidFill>
           <a:ln>
             <a:noFill/>
           </a:ln>
         </p:spPr>
         <p:txBody>
-          <a:bodyPr wrap="square" lIns="164592" tIns="18288" rIns="164592" bIns="18288" rtlCol="0" anchor="ctr">
+          <a:bodyPr wrap="square" lIns="137160" tIns="27432" rIns="137160" bIns="27432" rtlCol="0" anchor="ctr">
+            <a:noAutofit/>
+          </a:bodyPr>
+          <a:lstStyle/>
+          <a:p>
+            <a:pPr marL="0" indent="0" algn="ctr">
+              <a:lnSpc>
+                <a:spcPct val="100000"/>
+              </a:lnSpc>
+              <a:spcBef>
+                <a:spcPts val="0"/>
+              </a:spcBef>
+              <a:spcAft>
+                <a:spcPts val="0"/>
+              </a:spcAft>
+              <a:buNone/>
+            </a:pPr>
+            <a:r>
+              <a:rPr lang="pt-BR" sz="2000" b="1" dirty="0">
+                <a:solidFill>
+                  <a:srgbClr val="FFFFFF"/>
+                </a:solidFill>
+                <a:latin typeface="Montserrat"/>
+              </a:rPr>
+              <a:t>PRELIMINAR: diagnóstico em auditoria</a:t>
+            </a:r>
+          </a:p>
+        </p:txBody>
+      </p:sp>
+      <p:sp>
+        <p:nvSpPr>
+          <p:cNvPr id="103" name="Linha"/>
+          <p:cNvSpPr/>
+          <p:nvPr/>
+        </p:nvSpPr>
+        <p:spPr>
+          <a:xfrm>
+            <a:off x="7406640" y="804672"/>
+            <a:ext cx="4480560" cy="1652016"/>
+          </a:xfrm>
+          <a:prstGeom prst="roundRect">
+            <a:avLst>
+              <a:gd name="adj" fmla="val 6000"/>
+            </a:avLst>
+          </a:prstGeom>
+          <a:solidFill>
+            <a:srgbClr val="F4F8F5"/>
+          </a:solidFill>
+          <a:ln w="12700">
+            <a:solidFill>
+              <a:srgbClr val="056429"/>
+            </a:solidFill>
+          </a:ln>
+        </p:spPr>
+        <p:txBody>
+          <a:bodyPr wrap="square" lIns="182880" tIns="54864" rIns="182880" bIns="54864" rtlCol="0" anchor="ctr">
             <a:noAutofit/>
           </a:bodyPr>
           <a:lstStyle/>
@@ -19832,42 +18435,53 @@
               <a:buNone/>
             </a:pPr>
             <a:r>
-              <a:rPr lang="pt-BR" sz="1800" b="0" dirty="0">
+              <a:rPr lang="pt-BR" sz="1600" b="1" dirty="0">
+                <a:solidFill>
+                  <a:srgbClr val="114719"/>
+                </a:solidFill>
+                <a:latin typeface="Montserrat"/>
+              </a:rPr>
+              <a:t>Sem a reta:</a:t>
+            </a:r>
+            <a:r>
+              <a:rPr lang="pt-BR" sz="1600" b="0" dirty="0">
                 <a:solidFill>
                   <a:srgbClr val="3A3A3A"/>
                 </a:solidFill>
                 <a:latin typeface="Montserrat"/>
               </a:rPr>
-              <a:t>Não aumenta em nenhum corte; uma queda do mesmo tamanho não fica descartada.</a:t>
+              <a:t> a fração preenchida é praticamente igual dos dois lados (33,3% e 33,5%); a queda aparece quando a reta é levada até o corte e depende de poucos municípios.</a:t>
             </a:r>
           </a:p>
         </p:txBody>
       </p:sp>
       <p:sp>
         <p:nvSpPr>
-          <p:cNvPr id="102" name="Cautela"/>
+          <p:cNvPr id="104" name="Linha"/>
           <p:cNvSpPr/>
           <p:nvPr/>
         </p:nvSpPr>
         <p:spPr>
           <a:xfrm>
-            <a:off x="292608" y="5687568"/>
-            <a:ext cx="11594592" cy="420624"/>
+            <a:off x="7406640" y="2621280"/>
+            <a:ext cx="4480560" cy="2212035"/>
           </a:xfrm>
           <a:prstGeom prst="roundRect">
             <a:avLst>
-              <a:gd name="adj" fmla="val 12000"/>
+              <a:gd name="adj" fmla="val 6000"/>
             </a:avLst>
           </a:prstGeom>
           <a:solidFill>
-            <a:srgbClr val="E7F1EA"/>
+            <a:srgbClr val="F4F8F5"/>
           </a:solidFill>
-          <a:ln>
-            <a:noFill/>
+          <a:ln w="12700">
+            <a:solidFill>
+              <a:srgbClr val="056429"/>
+            </a:solidFill>
           </a:ln>
         </p:spPr>
         <p:txBody>
-          <a:bodyPr wrap="square" lIns="164592" tIns="18288" rIns="164592" bIns="18288" rtlCol="0" anchor="ctr">
+          <a:bodyPr wrap="square" lIns="182880" tIns="54864" rIns="182880" bIns="54864" rtlCol="0" anchor="ctr">
             <a:noAutofit/>
           </a:bodyPr>
           <a:lstStyle/>
@@ -19885,49 +18499,93 @@
               <a:buNone/>
             </a:pPr>
             <a:r>
-              <a:rPr lang="pt-BR" sz="1800" b="1" dirty="0">
+              <a:rPr lang="pt-BR" sz="1600" b="1" dirty="0">
                 <a:solidFill>
                   <a:srgbClr val="114719"/>
                 </a:solidFill>
                 <a:latin typeface="Montserrat"/>
               </a:rPr>
-              <a:t>Pacote do corte, IC convencional; N1 em 0,300 não é queda: IC honesto contém zero.</a:t>
+              <a:t>O que acompanha a queda:</a:t>
+            </a:r>
+            <a:r>
+              <a:rPr lang="pt-BR" sz="1600" b="0" dirty="0">
+                <a:solidFill>
+                  <a:srgbClr val="3A3A3A"/>
+                </a:solidFill>
+                <a:latin typeface="Montserrat"/>
+              </a:rPr>
+              <a:t> mais células só de cadastro reserva, cursos que preenchem pouco em qualquer lugar, menos células escolhidas em 1º lugar. Igualar esses fatores corta a queda pela metade ou mais em parte das medidas.</a:t>
             </a:r>
           </a:p>
         </p:txBody>
       </p:sp>
-      <p:pic>
-        <p:nvPicPr>
-          <p:cNvPr id="103" name="Figura" descr="H1 por corte: A3 num gráfico; N1 sem controle e com controle em dois gráficos separados, na mesma escala"/>
-          <p:cNvPicPr>
-            <a:picLocks noChangeAspect="1"/>
-          </p:cNvPicPr>
+      <p:sp>
+        <p:nvSpPr>
+          <p:cNvPr id="105" name="Linha"/>
+          <p:cNvSpPr/>
           <p:nvPr/>
-        </p:nvPicPr>
-        <p:blipFill>
-          <a:blip r:embed="rId3"/>
-          <a:stretch>
-            <a:fillRect/>
-          </a:stretch>
-        </p:blipFill>
+        </p:nvSpPr>
         <p:spPr>
           <a:xfrm>
-            <a:off x="2815636" y="804672"/>
-            <a:ext cx="6548536" cy="4279392"/>
+            <a:off x="7406640" y="4997907"/>
+            <a:ext cx="4480560" cy="1091997"/>
           </a:xfrm>
-          <a:prstGeom prst="rect">
-            <a:avLst/>
+          <a:prstGeom prst="roundRect">
+            <a:avLst>
+              <a:gd name="adj" fmla="val 6000"/>
+            </a:avLst>
           </a:prstGeom>
-          <a:ln w="6350">
+          <a:solidFill>
+            <a:srgbClr val="F4F8F5"/>
+          </a:solidFill>
+          <a:ln w="12700">
             <a:solidFill>
-              <a:srgbClr val="DDE7DF"/>
+              <a:srgbClr val="056429"/>
             </a:solidFill>
           </a:ln>
         </p:spPr>
-      </p:pic>
+        <p:txBody>
+          <a:bodyPr wrap="square" lIns="182880" tIns="54864" rIns="182880" bIns="54864" rtlCol="0" anchor="ctr">
+            <a:noAutofit/>
+          </a:bodyPr>
+          <a:lstStyle/>
+          <a:p>
+            <a:pPr marL="0" indent="0" algn="l">
+              <a:lnSpc>
+                <a:spcPct val="100000"/>
+              </a:lnSpc>
+              <a:spcBef>
+                <a:spcPts val="0"/>
+              </a:spcBef>
+              <a:spcAft>
+                <a:spcPts val="0"/>
+              </a:spcAft>
+              <a:buNone/>
+            </a:pPr>
+            <a:r>
+              <a:rPr lang="pt-BR" sz="1600" b="1" dirty="0">
+                <a:solidFill>
+                  <a:srgbClr val="114719"/>
+                </a:solidFill>
+                <a:latin typeface="Montserrat"/>
+              </a:rPr>
+              <a:t>Leitura:</a:t>
+            </a:r>
+            <a:r>
+              <a:rPr lang="pt-BR" sz="1600" b="0" dirty="0">
+                <a:solidFill>
+                  <a:srgbClr val="3A3A3A"/>
+                </a:solidFill>
+                <a:latin typeface="Montserrat"/>
+              </a:rPr>
+              <a:t> acaso não está descartado; nada mostra que a bolsa reduz o preenchimento.</a:t>
+            </a:r>
+          </a:p>
+        </p:txBody>
+      </p:sp>
       <p:sp>
         <p:nvSpPr>
-          <p:cNvPr id="104" name="Fontes"/>
+          <p:cNvPr id="106" name="Fontes"/>
           <p:cNvSpPr txBox="1"/>
           <p:nvPr/>
         </p:nvSpPr>
@@ -19978,7 +18636,7 @@
                 </a:solidFill>
                 <a:latin typeface="Montserrat"/>
               </a:rPr>
-              <a:t>output/rdd_bolsa/N_estimativas.csv (doc 49); S57_resumo.json (A3); EQ_estimativas.csv (doc 57j; auditoria 32).</a:t>
+              <a:t>output/rdd_bolsa/DQ_estimativas.csv, DQ_resumo.json e DQ_figuras/DQ_quanto_da_queda.png (protocolo 61; doc 57l, em auditoria); figura sem redesenho, conferida pelo hash.</a:t>
             </a:r>
           </a:p>
         </p:txBody>
@@ -20041,7 +18699,7 @@
                 </a:solidFill>
                 <a:latin typeface="Montserrat"/>
               </a:rPr>
-              <a:t>Antes e depois do controle: em 0,400 a queda passa pelas vagas</a:t>
+              <a:t>H3: a bolsa pesa pouco perto da origem do médico?</a:t>
             </a:r>
           </a:p>
         </p:txBody>
@@ -20139,177 +18797,936 @@
               <a:t>Base de Dados  |  </a:t>
             </a:r>
             <a:r>
-              <a:rPr lang="pt-BR" sz="1000" dirty="0">
-                <a:latin typeface="Montserrat"/>
-              </a:rPr>
-              <a:t>Metodologia  |  </a:t>
-            </a:r>
-            <a:r>
               <a:rPr lang="pt-BR" sz="1000" b="1" dirty="0">
                 <a:solidFill>
                   <a:srgbClr val="114719"/>
                 </a:solidFill>
                 <a:latin typeface="Montserrat"/>
               </a:rPr>
-              <a:t>Resultados</a:t>
+              <a:t>Metodologia</a:t>
             </a:r>
             <a:r>
               <a:rPr lang="pt-BR" sz="1000" dirty="0">
                 <a:latin typeface="Montserrat"/>
               </a:rPr>
-              <a:t/>
+              <a:t>  |  </a:t>
+            </a:r>
+            <a:r>
+              <a:rPr lang="pt-BR" sz="1000" dirty="0">
+                <a:latin typeface="Montserrat"/>
+              </a:rPr>
+              <a:t>Resultados</a:t>
             </a:r>
           </a:p>
         </p:txBody>
       </p:sp>
+      <p:graphicFrame>
+        <p:nvGraphicFramePr>
+          <p:cNvPr id="101" name="Tabela"/>
+          <p:cNvGraphicFramePr>
+            <a:graphicFrameLocks noGrp="1"/>
+          </p:cNvGraphicFramePr>
+          <p:nvPr/>
+        </p:nvGraphicFramePr>
+        <p:xfrm>
+          <a:off x="292608" y="822960"/>
+          <a:ext cx="11594592" cy="5266944"/>
+        </p:xfrm>
+        <a:graphic>
+          <a:graphicData uri="http://schemas.openxmlformats.org/drawingml/2006/table">
+            <a:tbl>
+              <a:tblPr firstRow="1" bandRow="1"/>
+              <a:tblGrid>
+                <a:gridCol w="2471771"/>
+                <a:gridCol w="9122821"/>
+              </a:tblGrid>
+              <a:tr h="411552">
+                <a:tc>
+                  <a:txBody>
+                    <a:bodyPr/>
+                    <a:lstStyle/>
+                    <a:p>
+                      <a:pPr marL="0" indent="0" algn="l">
+                        <a:lnSpc>
+                          <a:spcPct val="100000"/>
+                        </a:lnSpc>
+                        <a:spcBef>
+                          <a:spcPts val="0"/>
+                        </a:spcBef>
+                        <a:spcAft>
+                          <a:spcPts val="0"/>
+                        </a:spcAft>
+                        <a:buNone/>
+                      </a:pPr>
+                      <a:r>
+                        <a:rPr lang="pt-BR" sz="1800" b="1" dirty="0">
+                          <a:solidFill>
+                            <a:srgbClr val="FFFFFF"/>
+                          </a:solidFill>
+                          <a:latin typeface="Montserrat"/>
+                        </a:rPr>
+                        <a:t>Campo</a:t>
+                      </a:r>
+                    </a:p>
+                  </a:txBody>
+                  <a:tcPr marL="73152" marR="73152" marT="36576" marB="36576" anchor="ctr">
+                    <a:lnL w="6350">
+                      <a:solidFill>
+                        <a:srgbClr val="C9DED1"/>
+                      </a:solidFill>
+                    </a:lnL>
+                    <a:lnR w="6350">
+                      <a:solidFill>
+                        <a:srgbClr val="C9DED1"/>
+                      </a:solidFill>
+                    </a:lnR>
+                    <a:lnT w="6350">
+                      <a:solidFill>
+                        <a:srgbClr val="C9DED1"/>
+                      </a:solidFill>
+                    </a:lnT>
+                    <a:lnB w="6350">
+                      <a:solidFill>
+                        <a:srgbClr val="C9DED1"/>
+                      </a:solidFill>
+                    </a:lnB>
+                    <a:solidFill>
+                      <a:srgbClr val="114719"/>
+                    </a:solidFill>
+                  </a:tcPr>
+                </a:tc>
+                <a:tc>
+                  <a:txBody>
+                    <a:bodyPr/>
+                    <a:lstStyle/>
+                    <a:p>
+                      <a:pPr marL="0" indent="0" algn="l">
+                        <a:lnSpc>
+                          <a:spcPct val="100000"/>
+                        </a:lnSpc>
+                        <a:spcBef>
+                          <a:spcPts val="0"/>
+                        </a:spcBef>
+                        <a:spcAft>
+                          <a:spcPts val="0"/>
+                        </a:spcAft>
+                        <a:buNone/>
+                      </a:pPr>
+                      <a:r>
+                        <a:rPr lang="pt-BR" sz="1800" b="1" dirty="0">
+                          <a:solidFill>
+                            <a:srgbClr val="FFFFFF"/>
+                          </a:solidFill>
+                          <a:latin typeface="Montserrat"/>
+                        </a:rPr>
+                        <a:t>Como é feito</a:t>
+                      </a:r>
+                    </a:p>
+                  </a:txBody>
+                  <a:tcPr marL="73152" marR="73152" marT="36576" marB="36576" anchor="ctr">
+                    <a:lnL w="6350">
+                      <a:solidFill>
+                        <a:srgbClr val="C9DED1"/>
+                      </a:solidFill>
+                    </a:lnL>
+                    <a:lnR w="6350">
+                      <a:solidFill>
+                        <a:srgbClr val="C9DED1"/>
+                      </a:solidFill>
+                    </a:lnR>
+                    <a:lnT w="6350">
+                      <a:solidFill>
+                        <a:srgbClr val="C9DED1"/>
+                      </a:solidFill>
+                    </a:lnT>
+                    <a:lnB w="6350">
+                      <a:solidFill>
+                        <a:srgbClr val="C9DED1"/>
+                      </a:solidFill>
+                    </a:lnB>
+                    <a:solidFill>
+                      <a:srgbClr val="114719"/>
+                    </a:solidFill>
+                  </a:tcPr>
+                </a:tc>
+              </a:tr>
+              <a:tr h="693627">
+                <a:tc>
+                  <a:txBody>
+                    <a:bodyPr/>
+                    <a:lstStyle/>
+                    <a:p>
+                      <a:pPr marL="0" indent="0" algn="l">
+                        <a:lnSpc>
+                          <a:spcPct val="100000"/>
+                        </a:lnSpc>
+                        <a:spcBef>
+                          <a:spcPts val="0"/>
+                        </a:spcBef>
+                        <a:spcAft>
+                          <a:spcPts val="0"/>
+                        </a:spcAft>
+                        <a:buNone/>
+                      </a:pPr>
+                      <a:r>
+                        <a:rPr lang="pt-BR" sz="1800" b="1" dirty="0">
+                          <a:solidFill>
+                            <a:srgbClr val="3A3A3A"/>
+                          </a:solidFill>
+                          <a:latin typeface="Montserrat"/>
+                        </a:rPr>
+                        <a:t>Outcome</a:t>
+                      </a:r>
+                    </a:p>
+                  </a:txBody>
+                  <a:tcPr marL="73152" marR="73152" marT="36576" marB="36576" anchor="ctr">
+                    <a:lnL w="6350">
+                      <a:solidFill>
+                        <a:srgbClr val="C9DED1"/>
+                      </a:solidFill>
+                    </a:lnL>
+                    <a:lnR w="6350">
+                      <a:solidFill>
+                        <a:srgbClr val="C9DED1"/>
+                      </a:solidFill>
+                    </a:lnR>
+                    <a:lnT w="6350">
+                      <a:solidFill>
+                        <a:srgbClr val="C9DED1"/>
+                      </a:solidFill>
+                    </a:lnT>
+                    <a:lnB w="6350">
+                      <a:solidFill>
+                        <a:srgbClr val="C9DED1"/>
+                      </a:solidFill>
+                    </a:lnB>
+                    <a:solidFill>
+                      <a:srgbClr val="F3F7F3"/>
+                    </a:solidFill>
+                  </a:tcPr>
+                </a:tc>
+                <a:tc>
+                  <a:txBody>
+                    <a:bodyPr/>
+                    <a:lstStyle/>
+                    <a:p>
+                      <a:pPr marL="0" indent="0" algn="l">
+                        <a:lnSpc>
+                          <a:spcPct val="100000"/>
+                        </a:lnSpc>
+                        <a:spcBef>
+                          <a:spcPts val="0"/>
+                        </a:spcBef>
+                        <a:spcAft>
+                          <a:spcPts val="0"/>
+                        </a:spcAft>
+                        <a:buNone/>
+                      </a:pPr>
+                      <a:r>
+                        <a:rPr lang="pt-BR" sz="1800" b="0" dirty="0">
+                          <a:solidFill>
+                            <a:srgbClr val="3A3A3A"/>
+                          </a:solidFill>
+                          <a:latin typeface="Montserrat"/>
+                        </a:rPr>
+                        <a:t>a 1ª opção de cada candidato, entre todas as vagas (células) do mesmo curso e ciclo</a:t>
+                      </a:r>
+                    </a:p>
+                  </a:txBody>
+                  <a:tcPr marL="73152" marR="73152" marT="36576" marB="36576" anchor="ctr">
+                    <a:lnL w="6350">
+                      <a:solidFill>
+                        <a:srgbClr val="C9DED1"/>
+                      </a:solidFill>
+                    </a:lnL>
+                    <a:lnR w="6350">
+                      <a:solidFill>
+                        <a:srgbClr val="C9DED1"/>
+                      </a:solidFill>
+                    </a:lnR>
+                    <a:lnT w="6350">
+                      <a:solidFill>
+                        <a:srgbClr val="C9DED1"/>
+                      </a:solidFill>
+                    </a:lnT>
+                    <a:lnB w="6350">
+                      <a:solidFill>
+                        <a:srgbClr val="C9DED1"/>
+                      </a:solidFill>
+                    </a:lnB>
+                    <a:solidFill>
+                      <a:srgbClr val="F3F7F3"/>
+                    </a:solidFill>
+                  </a:tcPr>
+                </a:tc>
+              </a:tr>
+              <a:tr h="693627">
+                <a:tc>
+                  <a:txBody>
+                    <a:bodyPr/>
+                    <a:lstStyle/>
+                    <a:p>
+                      <a:pPr marL="0" indent="0" algn="l">
+                        <a:lnSpc>
+                          <a:spcPct val="100000"/>
+                        </a:lnSpc>
+                        <a:spcBef>
+                          <a:spcPts val="0"/>
+                        </a:spcBef>
+                        <a:spcAft>
+                          <a:spcPts val="0"/>
+                        </a:spcAft>
+                        <a:buNone/>
+                      </a:pPr>
+                      <a:r>
+                        <a:rPr lang="pt-BR" sz="1800" b="1" dirty="0">
+                          <a:solidFill>
+                            <a:srgbClr val="3A3A3A"/>
+                          </a:solidFill>
+                          <a:latin typeface="Montserrat"/>
+                        </a:rPr>
+                        <a:t>Amostra</a:t>
+                      </a:r>
+                    </a:p>
+                  </a:txBody>
+                  <a:tcPr marL="73152" marR="73152" marT="36576" marB="36576" anchor="ctr">
+                    <a:lnL w="6350">
+                      <a:solidFill>
+                        <a:srgbClr val="C9DED1"/>
+                      </a:solidFill>
+                    </a:lnL>
+                    <a:lnR w="6350">
+                      <a:solidFill>
+                        <a:srgbClr val="C9DED1"/>
+                      </a:solidFill>
+                    </a:lnR>
+                    <a:lnT w="6350">
+                      <a:solidFill>
+                        <a:srgbClr val="C9DED1"/>
+                      </a:solidFill>
+                    </a:lnT>
+                    <a:lnB w="6350">
+                      <a:solidFill>
+                        <a:srgbClr val="C9DED1"/>
+                      </a:solidFill>
+                    </a:lnB>
+                    <a:solidFill>
+                      <a:srgbClr val="FFFFFF"/>
+                    </a:solidFill>
+                  </a:tcPr>
+                </a:tc>
+                <a:tc>
+                  <a:txBody>
+                    <a:bodyPr/>
+                    <a:lstStyle/>
+                    <a:p>
+                      <a:pPr marL="0" indent="0" algn="l">
+                        <a:lnSpc>
+                          <a:spcPct val="100000"/>
+                        </a:lnSpc>
+                        <a:spcBef>
+                          <a:spcPts val="0"/>
+                        </a:spcBef>
+                        <a:spcAft>
+                          <a:spcPts val="0"/>
+                        </a:spcAft>
+                        <a:buNone/>
+                      </a:pPr>
+                      <a:r>
+                        <a:rPr lang="pt-BR" sz="1800" b="0" dirty="0">
+                          <a:solidFill>
+                            <a:srgbClr val="3A3A3A"/>
+                          </a:solidFill>
+                          <a:latin typeface="Montserrat"/>
+                        </a:rPr>
+                        <a:t>candidatos de 1ª opção ligados ao CNES e com município de origem, ciclos 1–3</a:t>
+                      </a:r>
+                    </a:p>
+                  </a:txBody>
+                  <a:tcPr marL="73152" marR="73152" marT="36576" marB="36576" anchor="ctr">
+                    <a:lnL w="6350">
+                      <a:solidFill>
+                        <a:srgbClr val="C9DED1"/>
+                      </a:solidFill>
+                    </a:lnL>
+                    <a:lnR w="6350">
+                      <a:solidFill>
+                        <a:srgbClr val="C9DED1"/>
+                      </a:solidFill>
+                    </a:lnR>
+                    <a:lnT w="6350">
+                      <a:solidFill>
+                        <a:srgbClr val="C9DED1"/>
+                      </a:solidFill>
+                    </a:lnT>
+                    <a:lnB w="6350">
+                      <a:solidFill>
+                        <a:srgbClr val="C9DED1"/>
+                      </a:solidFill>
+                    </a:lnB>
+                    <a:solidFill>
+                      <a:srgbClr val="FFFFFF"/>
+                    </a:solidFill>
+                  </a:tcPr>
+                </a:tc>
+              </a:tr>
+              <a:tr h="1257778">
+                <a:tc>
+                  <a:txBody>
+                    <a:bodyPr/>
+                    <a:lstStyle/>
+                    <a:p>
+                      <a:pPr marL="0" indent="0" algn="l">
+                        <a:lnSpc>
+                          <a:spcPct val="100000"/>
+                        </a:lnSpc>
+                        <a:spcBef>
+                          <a:spcPts val="0"/>
+                        </a:spcBef>
+                        <a:spcAft>
+                          <a:spcPts val="0"/>
+                        </a:spcAft>
+                        <a:buNone/>
+                      </a:pPr>
+                      <a:r>
+                        <a:rPr lang="pt-BR" sz="1800" b="1" dirty="0">
+                          <a:solidFill>
+                            <a:srgbClr val="3A3A3A"/>
+                          </a:solidFill>
+                          <a:latin typeface="Montserrat"/>
+                        </a:rPr>
+                        <a:t>Equação em palavras</a:t>
+                      </a:r>
+                    </a:p>
+                  </a:txBody>
+                  <a:tcPr marL="73152" marR="73152" marT="36576" marB="36576" anchor="ctr">
+                    <a:lnL w="6350">
+                      <a:solidFill>
+                        <a:srgbClr val="C9DED1"/>
+                      </a:solidFill>
+                    </a:lnL>
+                    <a:lnR w="6350">
+                      <a:solidFill>
+                        <a:srgbClr val="C9DED1"/>
+                      </a:solidFill>
+                    </a:lnR>
+                    <a:lnT w="6350">
+                      <a:solidFill>
+                        <a:srgbClr val="C9DED1"/>
+                      </a:solidFill>
+                    </a:lnT>
+                    <a:lnB w="6350">
+                      <a:solidFill>
+                        <a:srgbClr val="C9DED1"/>
+                      </a:solidFill>
+                    </a:lnB>
+                    <a:solidFill>
+                      <a:srgbClr val="F3F7F3"/>
+                    </a:solidFill>
+                  </a:tcPr>
+                </a:tc>
+                <a:tc>
+                  <a:txBody>
+                    <a:bodyPr/>
+                    <a:lstStyle/>
+                    <a:p>
+                      <a:pPr marL="0" indent="0" algn="l">
+                        <a:lnSpc>
+                          <a:spcPct val="100000"/>
+                        </a:lnSpc>
+                        <a:spcBef>
+                          <a:spcPts val="0"/>
+                        </a:spcBef>
+                        <a:spcAft>
+                          <a:spcPts val="0"/>
+                        </a:spcAft>
+                        <a:buNone/>
+                      </a:pPr>
+                      <a:r>
+                        <a:rPr lang="pt-BR" sz="1800" b="0" dirty="0">
+                          <a:solidFill>
+                            <a:srgbClr val="3A3A3A"/>
+                          </a:solidFill>
+                          <a:latin typeface="Montserrat"/>
+                        </a:rPr>
+                        <a:t>utilidade da vaga = peso da bolsa × bolsa + curva suave do IVS (nós nos cortes) + peso da distância × distância até a origem + pesos de mesma UF, mesma região e mesmo município + porte, capital e vaga imediata</a:t>
+                      </a:r>
+                    </a:p>
+                  </a:txBody>
+                  <a:tcPr marL="73152" marR="73152" marT="36576" marB="36576" anchor="ctr">
+                    <a:lnL w="6350">
+                      <a:solidFill>
+                        <a:srgbClr val="C9DED1"/>
+                      </a:solidFill>
+                    </a:lnL>
+                    <a:lnR w="6350">
+                      <a:solidFill>
+                        <a:srgbClr val="C9DED1"/>
+                      </a:solidFill>
+                    </a:lnR>
+                    <a:lnT w="6350">
+                      <a:solidFill>
+                        <a:srgbClr val="C9DED1"/>
+                      </a:solidFill>
+                    </a:lnT>
+                    <a:lnB w="6350">
+                      <a:solidFill>
+                        <a:srgbClr val="C9DED1"/>
+                      </a:solidFill>
+                    </a:lnB>
+                    <a:solidFill>
+                      <a:srgbClr val="F3F7F3"/>
+                    </a:solidFill>
+                  </a:tcPr>
+                </a:tc>
+              </a:tr>
+              <a:tr h="693627">
+                <a:tc>
+                  <a:txBody>
+                    <a:bodyPr/>
+                    <a:lstStyle/>
+                    <a:p>
+                      <a:pPr marL="0" indent="0" algn="l">
+                        <a:lnSpc>
+                          <a:spcPct val="100000"/>
+                        </a:lnSpc>
+                        <a:spcBef>
+                          <a:spcPts val="0"/>
+                        </a:spcBef>
+                        <a:spcAft>
+                          <a:spcPts val="0"/>
+                        </a:spcAft>
+                        <a:buNone/>
+                      </a:pPr>
+                      <a:r>
+                        <a:rPr lang="pt-BR" sz="1800" b="1" dirty="0">
+                          <a:solidFill>
+                            <a:srgbClr val="3A3A3A"/>
+                          </a:solidFill>
+                          <a:latin typeface="Montserrat"/>
+                        </a:rPr>
+                        <a:t>Comum e por ciclo</a:t>
+                      </a:r>
+                    </a:p>
+                  </a:txBody>
+                  <a:tcPr marL="73152" marR="73152" marT="36576" marB="36576" anchor="ctr">
+                    <a:lnL w="6350">
+                      <a:solidFill>
+                        <a:srgbClr val="C9DED1"/>
+                      </a:solidFill>
+                    </a:lnL>
+                    <a:lnR w="6350">
+                      <a:solidFill>
+                        <a:srgbClr val="C9DED1"/>
+                      </a:solidFill>
+                    </a:lnR>
+                    <a:lnT w="6350">
+                      <a:solidFill>
+                        <a:srgbClr val="C9DED1"/>
+                      </a:solidFill>
+                    </a:lnT>
+                    <a:lnB w="6350">
+                      <a:solidFill>
+                        <a:srgbClr val="C9DED1"/>
+                      </a:solidFill>
+                    </a:lnB>
+                    <a:solidFill>
+                      <a:srgbClr val="FFFFFF"/>
+                    </a:solidFill>
+                  </a:tcPr>
+                </a:tc>
+                <a:tc>
+                  <a:txBody>
+                    <a:bodyPr/>
+                    <a:lstStyle/>
+                    <a:p>
+                      <a:pPr marL="0" indent="0" algn="l">
+                        <a:lnSpc>
+                          <a:spcPct val="100000"/>
+                        </a:lnSpc>
+                        <a:spcBef>
+                          <a:spcPts val="0"/>
+                        </a:spcBef>
+                        <a:spcAft>
+                          <a:spcPts val="0"/>
+                        </a:spcAft>
+                        <a:buNone/>
+                      </a:pPr>
+                      <a:r>
+                        <a:rPr lang="pt-BR" sz="1800" b="0" dirty="0">
+                          <a:solidFill>
+                            <a:srgbClr val="3A3A3A"/>
+                          </a:solidFill>
+                          <a:latin typeface="Montserrat"/>
+                        </a:rPr>
+                        <a:t>pesos comuns aos ciclos na principal (M1); um peso da bolsa por ciclo no M5, o da H2</a:t>
+                      </a:r>
+                    </a:p>
+                  </a:txBody>
+                  <a:tcPr marL="73152" marR="73152" marT="36576" marB="36576" anchor="ctr">
+                    <a:lnL w="6350">
+                      <a:solidFill>
+                        <a:srgbClr val="C9DED1"/>
+                      </a:solidFill>
+                    </a:lnL>
+                    <a:lnR w="6350">
+                      <a:solidFill>
+                        <a:srgbClr val="C9DED1"/>
+                      </a:solidFill>
+                    </a:lnR>
+                    <a:lnT w="6350">
+                      <a:solidFill>
+                        <a:srgbClr val="C9DED1"/>
+                      </a:solidFill>
+                    </a:lnT>
+                    <a:lnB w="6350">
+                      <a:solidFill>
+                        <a:srgbClr val="C9DED1"/>
+                      </a:solidFill>
+                    </a:lnB>
+                    <a:solidFill>
+                      <a:srgbClr val="FFFFFF"/>
+                    </a:solidFill>
+                  </a:tcPr>
+                </a:tc>
+              </a:tr>
+              <a:tr h="411552">
+                <a:tc>
+                  <a:txBody>
+                    <a:bodyPr/>
+                    <a:lstStyle/>
+                    <a:p>
+                      <a:pPr marL="0" indent="0" algn="l">
+                        <a:lnSpc>
+                          <a:spcPct val="100000"/>
+                        </a:lnSpc>
+                        <a:spcBef>
+                          <a:spcPts val="0"/>
+                        </a:spcBef>
+                        <a:spcAft>
+                          <a:spcPts val="0"/>
+                        </a:spcAft>
+                        <a:buNone/>
+                      </a:pPr>
+                      <a:r>
+                        <a:rPr lang="pt-BR" sz="1800" b="1" dirty="0">
+                          <a:solidFill>
+                            <a:srgbClr val="3A3A3A"/>
+                          </a:solidFill>
+                          <a:latin typeface="Montserrat"/>
+                        </a:rPr>
+                        <a:t>Erro-padrão</a:t>
+                      </a:r>
+                    </a:p>
+                  </a:txBody>
+                  <a:tcPr marL="73152" marR="73152" marT="36576" marB="36576" anchor="ctr">
+                    <a:lnL w="6350">
+                      <a:solidFill>
+                        <a:srgbClr val="C9DED1"/>
+                      </a:solidFill>
+                    </a:lnL>
+                    <a:lnR w="6350">
+                      <a:solidFill>
+                        <a:srgbClr val="C9DED1"/>
+                      </a:solidFill>
+                    </a:lnR>
+                    <a:lnT w="6350">
+                      <a:solidFill>
+                        <a:srgbClr val="C9DED1"/>
+                      </a:solidFill>
+                    </a:lnT>
+                    <a:lnB w="6350">
+                      <a:solidFill>
+                        <a:srgbClr val="C9DED1"/>
+                      </a:solidFill>
+                    </a:lnB>
+                    <a:solidFill>
+                      <a:srgbClr val="F3F7F3"/>
+                    </a:solidFill>
+                  </a:tcPr>
+                </a:tc>
+                <a:tc>
+                  <a:txBody>
+                    <a:bodyPr/>
+                    <a:lstStyle/>
+                    <a:p>
+                      <a:pPr marL="0" indent="0" algn="l">
+                        <a:lnSpc>
+                          <a:spcPct val="100000"/>
+                        </a:lnSpc>
+                        <a:spcBef>
+                          <a:spcPts val="0"/>
+                        </a:spcBef>
+                        <a:spcAft>
+                          <a:spcPts val="0"/>
+                        </a:spcAft>
+                        <a:buNone/>
+                      </a:pPr>
+                      <a:r>
+                        <a:rPr lang="pt-BR" sz="1800" b="0" dirty="0">
+                          <a:solidFill>
+                            <a:srgbClr val="3A3A3A"/>
+                          </a:solidFill>
+                          <a:latin typeface="Montserrat"/>
+                        </a:rPr>
+                        <a:t>agrupado por conjunto de escolha (curso × ciclo)</a:t>
+                      </a:r>
+                    </a:p>
+                  </a:txBody>
+                  <a:tcPr marL="73152" marR="73152" marT="36576" marB="36576" anchor="ctr">
+                    <a:lnL w="6350">
+                      <a:solidFill>
+                        <a:srgbClr val="C9DED1"/>
+                      </a:solidFill>
+                    </a:lnL>
+                    <a:lnR w="6350">
+                      <a:solidFill>
+                        <a:srgbClr val="C9DED1"/>
+                      </a:solidFill>
+                    </a:lnR>
+                    <a:lnT w="6350">
+                      <a:solidFill>
+                        <a:srgbClr val="C9DED1"/>
+                      </a:solidFill>
+                    </a:lnT>
+                    <a:lnB w="6350">
+                      <a:solidFill>
+                        <a:srgbClr val="C9DED1"/>
+                      </a:solidFill>
+                    </a:lnB>
+                    <a:solidFill>
+                      <a:srgbClr val="F3F7F3"/>
+                    </a:solidFill>
+                  </a:tcPr>
+                </a:tc>
+              </a:tr>
+              <a:tr h="693627">
+                <a:tc>
+                  <a:txBody>
+                    <a:bodyPr/>
+                    <a:lstStyle/>
+                    <a:p>
+                      <a:pPr marL="0" indent="0" algn="l">
+                        <a:lnSpc>
+                          <a:spcPct val="100000"/>
+                        </a:lnSpc>
+                        <a:spcBef>
+                          <a:spcPts val="0"/>
+                        </a:spcBef>
+                        <a:spcAft>
+                          <a:spcPts val="0"/>
+                        </a:spcAft>
+                        <a:buNone/>
+                      </a:pPr>
+                      <a:r>
+                        <a:rPr lang="pt-BR" sz="1800" b="1" dirty="0">
+                          <a:solidFill>
+                            <a:srgbClr val="3A3A3A"/>
+                          </a:solidFill>
+                          <a:latin typeface="Montserrat"/>
+                        </a:rPr>
+                        <a:t>É causal?</a:t>
+                      </a:r>
+                    </a:p>
+                  </a:txBody>
+                  <a:tcPr marL="73152" marR="73152" marT="36576" marB="36576" anchor="ctr">
+                    <a:lnL w="6350">
+                      <a:solidFill>
+                        <a:srgbClr val="C9DED1"/>
+                      </a:solidFill>
+                    </a:lnL>
+                    <a:lnR w="6350">
+                      <a:solidFill>
+                        <a:srgbClr val="C9DED1"/>
+                      </a:solidFill>
+                    </a:lnR>
+                    <a:lnT w="6350">
+                      <a:solidFill>
+                        <a:srgbClr val="C9DED1"/>
+                      </a:solidFill>
+                    </a:lnT>
+                    <a:lnB w="6350">
+                      <a:solidFill>
+                        <a:srgbClr val="C9DED1"/>
+                      </a:solidFill>
+                    </a:lnB>
+                    <a:solidFill>
+                      <a:srgbClr val="FFFFFF"/>
+                    </a:solidFill>
+                  </a:tcPr>
+                </a:tc>
+                <a:tc>
+                  <a:txBody>
+                    <a:bodyPr/>
+                    <a:lstStyle/>
+                    <a:p>
+                      <a:pPr marL="0" indent="0" algn="l">
+                        <a:lnSpc>
+                          <a:spcPct val="100000"/>
+                        </a:lnSpc>
+                        <a:spcBef>
+                          <a:spcPts val="0"/>
+                        </a:spcBef>
+                        <a:spcAft>
+                          <a:spcPts val="0"/>
+                        </a:spcAft>
+                        <a:buNone/>
+                      </a:pPr>
+                      <a:r>
+                        <a:rPr lang="pt-BR" sz="1800" b="0" dirty="0">
+                          <a:solidFill>
+                            <a:srgbClr val="3A3A3A"/>
+                          </a:solidFill>
+                          <a:latin typeface="Montserrat"/>
+                        </a:rPr>
+                        <a:t>bolsa: quase-experimental, pelo salto nos cortes (pacote do corte); origem: preferência revelada, não efeito causal</a:t>
+                      </a:r>
+                    </a:p>
+                  </a:txBody>
+                  <a:tcPr marL="73152" marR="73152" marT="36576" marB="36576" anchor="ctr">
+                    <a:lnL w="6350">
+                      <a:solidFill>
+                        <a:srgbClr val="C9DED1"/>
+                      </a:solidFill>
+                    </a:lnL>
+                    <a:lnR w="6350">
+                      <a:solidFill>
+                        <a:srgbClr val="C9DED1"/>
+                      </a:solidFill>
+                    </a:lnR>
+                    <a:lnT w="6350">
+                      <a:solidFill>
+                        <a:srgbClr val="C9DED1"/>
+                      </a:solidFill>
+                    </a:lnT>
+                    <a:lnB w="6350">
+                      <a:solidFill>
+                        <a:srgbClr val="C9DED1"/>
+                      </a:solidFill>
+                    </a:lnB>
+                    <a:solidFill>
+                      <a:srgbClr val="FFFFFF"/>
+                    </a:solidFill>
+                  </a:tcPr>
+                </a:tc>
+              </a:tr>
+              <a:tr h="411552">
+                <a:tc>
+                  <a:txBody>
+                    <a:bodyPr/>
+                    <a:lstStyle/>
+                    <a:p>
+                      <a:pPr marL="0" indent="0" algn="l">
+                        <a:lnSpc>
+                          <a:spcPct val="100000"/>
+                        </a:lnSpc>
+                        <a:spcBef>
+                          <a:spcPts val="0"/>
+                        </a:spcBef>
+                        <a:spcAft>
+                          <a:spcPts val="0"/>
+                        </a:spcAft>
+                        <a:buNone/>
+                      </a:pPr>
+                      <a:r>
+                        <a:rPr lang="pt-BR" sz="1800" b="1" dirty="0">
+                          <a:solidFill>
+                            <a:srgbClr val="3A3A3A"/>
+                          </a:solidFill>
+                          <a:latin typeface="Montserrat"/>
+                        </a:rPr>
+                        <a:t>Cuidado</a:t>
+                      </a:r>
+                    </a:p>
+                  </a:txBody>
+                  <a:tcPr marL="73152" marR="73152" marT="36576" marB="36576" anchor="ctr">
+                    <a:lnL w="6350">
+                      <a:solidFill>
+                        <a:srgbClr val="C9DED1"/>
+                      </a:solidFill>
+                    </a:lnL>
+                    <a:lnR w="6350">
+                      <a:solidFill>
+                        <a:srgbClr val="C9DED1"/>
+                      </a:solidFill>
+                    </a:lnR>
+                    <a:lnT w="6350">
+                      <a:solidFill>
+                        <a:srgbClr val="C9DED1"/>
+                      </a:solidFill>
+                    </a:lnT>
+                    <a:lnB w="6350">
+                      <a:solidFill>
+                        <a:srgbClr val="C9DED1"/>
+                      </a:solidFill>
+                    </a:lnB>
+                    <a:solidFill>
+                      <a:srgbClr val="F3F7F3"/>
+                    </a:solidFill>
+                  </a:tcPr>
+                </a:tc>
+                <a:tc>
+                  <a:txBody>
+                    <a:bodyPr/>
+                    <a:lstStyle/>
+                    <a:p>
+                      <a:pPr marL="0" indent="0" algn="l">
+                        <a:lnSpc>
+                          <a:spcPct val="100000"/>
+                        </a:lnSpc>
+                        <a:spcBef>
+                          <a:spcPts val="0"/>
+                        </a:spcBef>
+                        <a:spcAft>
+                          <a:spcPts val="0"/>
+                        </a:spcAft>
+                        <a:buNone/>
+                      </a:pPr>
+                      <a:r>
+                        <a:rPr lang="pt-BR" sz="1800" b="0" dirty="0">
+                          <a:solidFill>
+                            <a:srgbClr val="3A3A3A"/>
+                          </a:solidFill>
+                          <a:latin typeface="Montserrat"/>
+                        </a:rPr>
+                        <a:t>só quem se candidatou; independência de alternativas irrelevantes</a:t>
+                      </a:r>
+                    </a:p>
+                  </a:txBody>
+                  <a:tcPr marL="73152" marR="73152" marT="36576" marB="36576" anchor="ctr">
+                    <a:lnL w="6350">
+                      <a:solidFill>
+                        <a:srgbClr val="C9DED1"/>
+                      </a:solidFill>
+                    </a:lnL>
+                    <a:lnR w="6350">
+                      <a:solidFill>
+                        <a:srgbClr val="C9DED1"/>
+                      </a:solidFill>
+                    </a:lnR>
+                    <a:lnT w="6350">
+                      <a:solidFill>
+                        <a:srgbClr val="C9DED1"/>
+                      </a:solidFill>
+                    </a:lnT>
+                    <a:lnB w="6350">
+                      <a:solidFill>
+                        <a:srgbClr val="C9DED1"/>
+                      </a:solidFill>
+                    </a:lnB>
+                    <a:solidFill>
+                      <a:srgbClr val="F3F7F3"/>
+                    </a:solidFill>
+                  </a:tcPr>
+                </a:tc>
+              </a:tr>
+            </a:tbl>
+          </a:graphicData>
+        </a:graphic>
+      </p:graphicFrame>
       <p:sp>
         <p:nvSpPr>
-          <p:cNvPr id="101" name="Linha"/>
-          <p:cNvSpPr/>
-          <p:nvPr/>
-        </p:nvSpPr>
-        <p:spPr>
-          <a:xfrm>
-            <a:off x="292608" y="5212080"/>
-            <a:ext cx="11594592" cy="420624"/>
-          </a:xfrm>
-          <a:prstGeom prst="rect">
-            <a:avLst/>
-          </a:prstGeom>
-          <a:noFill/>
-          <a:ln>
-            <a:noFill/>
-          </a:ln>
-        </p:spPr>
-        <p:txBody>
-          <a:bodyPr wrap="square" lIns="164592" tIns="18288" rIns="164592" bIns="18288" rtlCol="0" anchor="ctr">
-            <a:noAutofit/>
-          </a:bodyPr>
-          <a:lstStyle/>
-          <a:p>
-            <a:pPr marL="0" indent="0" algn="l">
-              <a:lnSpc>
-                <a:spcPct val="100000"/>
-              </a:lnSpc>
-              <a:spcBef>
-                <a:spcPts val="0"/>
-              </a:spcBef>
-              <a:spcAft>
-                <a:spcPts val="0"/>
-              </a:spcAft>
-              <a:buNone/>
-            </a:pPr>
-            <a:r>
-              <a:rPr lang="pt-BR" sz="1800" b="1" dirty="0">
-                <a:solidFill>
-                  <a:srgbClr val="114719"/>
-                </a:solidFill>
-                <a:latin typeface="Montserrat"/>
-              </a:rPr>
-              <a:t>0,400:</a:t>
-            </a:r>
-            <a:r>
-              <a:rPr lang="pt-BR" sz="1800" b="0" dirty="0">
-                <a:solidFill>
-                  <a:srgbClr val="3A3A3A"/>
-                </a:solidFill>
-                <a:latin typeface="Montserrat"/>
-              </a:rPr>
-              <a:t> passa pelas vagas: o lado de bolsa maior oferece menos vagas (−3,59).</a:t>
-            </a:r>
-          </a:p>
-        </p:txBody>
-      </p:sp>
-      <p:sp>
-        <p:nvSpPr>
-          <p:cNvPr id="102" name="Linha"/>
-          <p:cNvSpPr/>
-          <p:nvPr/>
-        </p:nvSpPr>
-        <p:spPr>
-          <a:xfrm>
-            <a:off x="292608" y="5687568"/>
-            <a:ext cx="11594592" cy="420624"/>
-          </a:xfrm>
-          <a:prstGeom prst="rect">
-            <a:avLst/>
-          </a:prstGeom>
-          <a:noFill/>
-          <a:ln>
-            <a:noFill/>
-          </a:ln>
-        </p:spPr>
-        <p:txBody>
-          <a:bodyPr wrap="square" lIns="164592" tIns="18288" rIns="164592" bIns="18288" rtlCol="0" anchor="ctr">
-            <a:noAutofit/>
-          </a:bodyPr>
-          <a:lstStyle/>
-          <a:p>
-            <a:pPr marL="0" indent="0" algn="l">
-              <a:lnSpc>
-                <a:spcPct val="100000"/>
-              </a:lnSpc>
-              <a:spcBef>
-                <a:spcPts val="0"/>
-              </a:spcBef>
-              <a:spcAft>
-                <a:spcPts val="0"/>
-              </a:spcAft>
-              <a:buNone/>
-            </a:pPr>
-            <a:r>
-              <a:rPr lang="pt-BR" sz="1800" b="1" dirty="0">
-                <a:solidFill>
-                  <a:srgbClr val="114719"/>
-                </a:solidFill>
-                <a:latin typeface="Montserrat"/>
-              </a:rPr>
-              <a:t>0,300:</a:t>
-            </a:r>
-            <a:r>
-              <a:rPr lang="pt-BR" sz="1800" b="0" dirty="0">
-                <a:solidFill>
-                  <a:srgbClr val="3A3A3A"/>
-                </a:solidFill>
-                <a:latin typeface="Montserrat"/>
-              </a:rPr>
-              <a:t> a oferta não muda; cai o preenchimento por vaga (pacote do corte).</a:t>
-            </a:r>
-          </a:p>
-        </p:txBody>
-      </p:sp>
-      <p:pic>
-        <p:nvPicPr>
-          <p:cNvPr id="103" name="Figura" descr="Antes e depois do controle das vagas oferecidas, por corte: sem controle e com controle em dois gráficos na mesma escala; ao lado, o salto nas vagas oferecidas"/>
-          <p:cNvPicPr>
-            <a:picLocks noChangeAspect="1"/>
-          </p:cNvPicPr>
-          <p:nvPr/>
-        </p:nvPicPr>
-        <p:blipFill>
-          <a:blip r:embed="rId3"/>
-          <a:stretch>
-            <a:fillRect/>
-          </a:stretch>
-        </p:blipFill>
-        <p:spPr>
-          <a:xfrm>
-            <a:off x="292608" y="1271165"/>
-            <a:ext cx="11594592" cy="3346407"/>
-          </a:xfrm>
-          <a:prstGeom prst="rect">
-            <a:avLst/>
-          </a:prstGeom>
-          <a:ln w="6350">
-            <a:solidFill>
-              <a:srgbClr val="DDE7DF"/>
-            </a:solidFill>
-          </a:ln>
-        </p:spPr>
-      </p:pic>
-      <p:sp>
-        <p:nvSpPr>
-          <p:cNvPr id="104" name="Fontes"/>
+          <p:cNvPr id="102" name="Fontes"/>
           <p:cNvSpPr txBox="1"/>
           <p:nvPr/>
         </p:nvSpPr>
@@ -20360,7 +19777,7 @@
                 </a:solidFill>
                 <a:latin typeface="Montserrat"/>
               </a:rPr>
-              <a:t>output/rdd_bolsa/N_estimativas.csv (decomposição e S-c; doc 49, §3 a §5); ND_estimativas.csv (doc 49b, §3).</a:t>
+              <a:t>protocolos 52 e 52b; docs 57a e 57i; ficha completa no deck completo (doc 02).</a:t>
             </a:r>
           </a:p>
         </p:txBody>
@@ -20423,7 +19840,7 @@
                 </a:solidFill>
                 <a:latin typeface="Montserrat"/>
               </a:rPr>
-              <a:t>O que dá para afirmar: não houve aumento do tamanho da margem</a:t>
+              <a:t>H3: a UF de origem pesa mais que toda a bolsa</a:t>
             </a:r>
           </a:p>
         </p:txBody>
@@ -20544,27 +19961,62 @@
           </a:p>
         </p:txBody>
       </p:sp>
+      <p:pic>
+        <p:nvPicPr>
+          <p:cNvPr id="101" name="Figura" descr="H3: pesos na utilidade da escolha da 1ª opção (M1), na mesma escala: bolsa, distância e lugar de origem"/>
+          <p:cNvPicPr>
+            <a:picLocks noChangeAspect="1"/>
+          </p:cNvPicPr>
+          <p:nvPr/>
+        </p:nvPicPr>
+        <p:blipFill>
+          <a:blip r:embed="rId3"/>
+          <a:stretch>
+            <a:fillRect/>
+          </a:stretch>
+        </p:blipFill>
+        <p:spPr>
+          <a:xfrm>
+            <a:off x="292608" y="1190407"/>
+            <a:ext cx="8028432" cy="4513763"/>
+          </a:xfrm>
+          <a:prstGeom prst="rect">
+            <a:avLst/>
+          </a:prstGeom>
+          <a:ln w="6350">
+            <a:solidFill>
+              <a:srgbClr val="DDE7DF"/>
+            </a:solidFill>
+          </a:ln>
+        </p:spPr>
+      </p:pic>
       <p:sp>
         <p:nvSpPr>
-          <p:cNvPr id="101" name="Linha"/>
+          <p:cNvPr id="102" name="Linha"/>
           <p:cNvSpPr/>
           <p:nvPr/>
         </p:nvSpPr>
         <p:spPr>
           <a:xfrm>
-            <a:off x="292608" y="5212080"/>
-            <a:ext cx="11594592" cy="420624"/>
+            <a:off x="8595360" y="804672"/>
+            <a:ext cx="3291840" cy="1745353"/>
           </a:xfrm>
-          <a:prstGeom prst="rect">
-            <a:avLst/>
+          <a:prstGeom prst="roundRect">
+            <a:avLst>
+              <a:gd name="adj" fmla="val 6000"/>
+            </a:avLst>
           </a:prstGeom>
-          <a:noFill/>
-          <a:ln>
-            <a:noFill/>
+          <a:solidFill>
+            <a:srgbClr val="F4F8F5"/>
+          </a:solidFill>
+          <a:ln w="12700">
+            <a:solidFill>
+              <a:srgbClr val="056429"/>
+            </a:solidFill>
           </a:ln>
         </p:spPr>
         <p:txBody>
-          <a:bodyPr wrap="square" lIns="164592" tIns="18288" rIns="164592" bIns="18288" rtlCol="0" anchor="ctr">
+          <a:bodyPr wrap="square" lIns="182880" tIns="54864" rIns="182880" bIns="54864" rtlCol="0" anchor="ctr">
             <a:noAutofit/>
           </a:bodyPr>
           <a:lstStyle/>
@@ -20582,42 +20034,53 @@
               <a:buNone/>
             </a:pPr>
             <a:r>
-              <a:rPr lang="pt-BR" sz="1800" b="0" dirty="0">
+              <a:rPr lang="pt-BR" sz="1600" b="1" dirty="0">
+                <a:solidFill>
+                  <a:srgbClr val="114719"/>
+                </a:solidFill>
+                <a:latin typeface="Montserrat"/>
+              </a:rPr>
+              <a:t>Log-chance:</a:t>
+            </a:r>
+            <a:r>
+              <a:rPr lang="pt-BR" sz="1600" b="0" dirty="0">
                 <a:solidFill>
                   <a:srgbClr val="3A3A3A"/>
                 </a:solidFill>
                 <a:latin typeface="Montserrat"/>
               </a:rPr>
-              <a:t>Sem aumento de 10 p.p. ou de 25% da média; não dá para dizer que nada mudou.</a:t>
+              <a:t> 0,21 ≈ chance cerca de 24% maior de a vaga ser a 1ª opção, sem distinção de zero; não é efeito no preenchimento.</a:t>
             </a:r>
           </a:p>
         </p:txBody>
       </p:sp>
       <p:sp>
         <p:nvSpPr>
-          <p:cNvPr id="102" name="Cautela"/>
+          <p:cNvPr id="103" name="Linha"/>
           <p:cNvSpPr/>
           <p:nvPr/>
         </p:nvSpPr>
         <p:spPr>
           <a:xfrm>
-            <a:off x="292608" y="5687568"/>
-            <a:ext cx="11594592" cy="420624"/>
+            <a:off x="8595360" y="2714617"/>
+            <a:ext cx="3291840" cy="1745353"/>
           </a:xfrm>
           <a:prstGeom prst="roundRect">
             <a:avLst>
-              <a:gd name="adj" fmla="val 12000"/>
+              <a:gd name="adj" fmla="val 6000"/>
             </a:avLst>
           </a:prstGeom>
           <a:solidFill>
-            <a:srgbClr val="E7F1EA"/>
+            <a:srgbClr val="F4F8F5"/>
           </a:solidFill>
-          <a:ln>
-            <a:noFill/>
+          <a:ln w="12700">
+            <a:solidFill>
+              <a:srgbClr val="056429"/>
+            </a:solidFill>
           </a:ln>
         </p:spPr>
         <p:txBody>
-          <a:bodyPr wrap="square" lIns="164592" tIns="18288" rIns="164592" bIns="18288" rtlCol="0" anchor="ctr">
+          <a:bodyPr wrap="square" lIns="182880" tIns="54864" rIns="182880" bIns="54864" rtlCol="0" anchor="ctr">
             <a:noAutofit/>
           </a:bodyPr>
           <a:lstStyle/>
@@ -20635,49 +20098,82 @@
               <a:buNone/>
             </a:pPr>
             <a:r>
-              <a:rPr lang="pt-BR" sz="1800" b="1" dirty="0">
+              <a:rPr lang="pt-BR" sz="1600" b="1" dirty="0">
                 <a:solidFill>
                   <a:srgbClr val="114719"/>
                 </a:solidFill>
                 <a:latin typeface="Montserrat"/>
               </a:rPr>
-              <a:t>IC convencional; com o IC honesto, nem o descarte do aumento se sustenta.</a:t>
+              <a:t>Toda a bolsa:</a:t>
+            </a:r>
+            <a:r>
+              <a:rPr lang="pt-BR" sz="1600" b="0" dirty="0">
+                <a:solidFill>
+                  <a:srgbClr val="3A3A3A"/>
+                </a:solidFill>
+                <a:latin typeface="Montserrat"/>
+              </a:rPr>
+              <a:t> 0,42 [−0,03; 0,87]; a mesma UF de origem, 2,40 [2,28; 2,53]; a diferença, 1,98 [1,56; 2,40].</a:t>
             </a:r>
           </a:p>
         </p:txBody>
       </p:sp>
-      <p:pic>
-        <p:nvPicPr>
-          <p:cNvPr id="103" name="Figura" descr="TOST por corte: IC de 90% do salto contra a faixa de equivalência do protocolo 60, A3 e N1 com controle"/>
-          <p:cNvPicPr>
-            <a:picLocks noChangeAspect="1"/>
-          </p:cNvPicPr>
+      <p:sp>
+        <p:nvSpPr>
+          <p:cNvPr id="104" name="Cautela"/>
+          <p:cNvSpPr/>
           <p:nvPr/>
-        </p:nvPicPr>
-        <p:blipFill>
-          <a:blip r:embed="rId3"/>
-          <a:stretch>
-            <a:fillRect/>
-          </a:stretch>
-        </p:blipFill>
+        </p:nvSpPr>
         <p:spPr>
           <a:xfrm>
-            <a:off x="549218" y="804672"/>
-            <a:ext cx="11081373" cy="4279392"/>
+            <a:off x="8595360" y="4624561"/>
+            <a:ext cx="3291840" cy="1465343"/>
           </a:xfrm>
-          <a:prstGeom prst="rect">
-            <a:avLst/>
+          <a:prstGeom prst="roundRect">
+            <a:avLst>
+              <a:gd name="adj" fmla="val 8000"/>
+            </a:avLst>
           </a:prstGeom>
-          <a:ln w="6350">
-            <a:solidFill>
-              <a:srgbClr val="DDE7DF"/>
-            </a:solidFill>
+          <a:solidFill>
+            <a:srgbClr val="E7F1EA"/>
+          </a:solidFill>
+          <a:ln>
+            <a:noFill/>
           </a:ln>
         </p:spPr>
-      </p:pic>
+        <p:txBody>
+          <a:bodyPr wrap="square" lIns="182880" tIns="54864" rIns="182880" bIns="54864" rtlCol="0" anchor="ctr">
+            <a:noAutofit/>
+          </a:bodyPr>
+          <a:lstStyle/>
+          <a:p>
+            <a:pPr marL="0" indent="0" algn="l">
+              <a:lnSpc>
+                <a:spcPct val="100000"/>
+              </a:lnSpc>
+              <a:spcBef>
+                <a:spcPts val="0"/>
+              </a:spcBef>
+              <a:spcAft>
+                <a:spcPts val="0"/>
+              </a:spcAft>
+              <a:buNone/>
+            </a:pPr>
+            <a:r>
+              <a:rPr lang="pt-BR" sz="1600" b="1" dirty="0">
+                <a:solidFill>
+                  <a:srgbClr val="114719"/>
+                </a:solidFill>
+                <a:latin typeface="Montserrat"/>
+              </a:rPr>
+              <a:t>Pós-resultado; o peso da origem é preferência revelada, não efeito causal.</a:t>
+            </a:r>
+          </a:p>
+        </p:txBody>
+      </p:sp>
       <p:sp>
         <p:nvSpPr>
-          <p:cNvPr id="104" name="Fontes"/>
+          <p:cNvPr id="105" name="Fontes"/>
           <p:cNvSpPr txBox="1"/>
           <p:nvPr/>
         </p:nvSpPr>
@@ -20728,7 +20224,7 @@
                 </a:solidFill>
                 <a:latin typeface="Montserrat"/>
               </a:rPr>
-              <a:t>output/rdd_bolsa/EQ_estimativas.csv e EQ_resumo.json (protocolo 60, parte A; doc 57j; auditoria 32).</a:t>
+              <a:t>output/rdd_bolsa/P1h_magnitudes.csv, P1h_resumo.json e P1h_figuras/P1h_magnitudes.png (doc 57i; protocolo 52b; auditoria 31); P1_estimativas.csv (M1).</a:t>
             </a:r>
           </a:p>
         </p:txBody>
@@ -20791,7 +20287,7 @@
                 </a:solidFill>
                 <a:latin typeface="Montserrat"/>
               </a:rPr>
-              <a:t>H2: a bolsa pesa na escolha da vaga só no ciclo 2</a:t>
+              <a:t>O que isso quer dizer: incentivo limitado</a:t>
             </a:r>
           </a:p>
         </p:txBody>
@@ -20914,62 +20410,13 @@
       </p:sp>
       <p:sp>
         <p:nvSpPr>
-          <p:cNvPr id="101" name="Linha"/>
+          <p:cNvPr id="101" name="Cautela"/>
           <p:cNvSpPr/>
           <p:nvPr/>
         </p:nvSpPr>
         <p:spPr>
           <a:xfrm>
-            <a:off x="292608" y="5212080"/>
-            <a:ext cx="11594592" cy="420624"/>
-          </a:xfrm>
-          <a:prstGeom prst="rect">
-            <a:avLst/>
-          </a:prstGeom>
-          <a:noFill/>
-          <a:ln>
-            <a:noFill/>
-          </a:ln>
-        </p:spPr>
-        <p:txBody>
-          <a:bodyPr wrap="square" lIns="164592" tIns="18288" rIns="164592" bIns="18288" rtlCol="0" anchor="ctr">
-            <a:noAutofit/>
-          </a:bodyPr>
-          <a:lstStyle/>
-          <a:p>
-            <a:pPr marL="0" indent="0" algn="l">
-              <a:lnSpc>
-                <a:spcPct val="100000"/>
-              </a:lnSpc>
-              <a:spcBef>
-                <a:spcPts val="0"/>
-              </a:spcBef>
-              <a:spcAft>
-                <a:spcPts val="0"/>
-              </a:spcAft>
-              <a:buNone/>
-            </a:pPr>
-            <a:r>
-              <a:rPr lang="pt-BR" sz="1800" b="0" dirty="0">
-                <a:solidFill>
-                  <a:srgbClr val="3A3A3A"/>
-                </a:solidFill>
-                <a:latin typeface="Montserrat"/>
-              </a:rPr>
-              <a:t>Só no ciclo 2 a vaga de bolsa maior é mais escolhida: 1,70 por +R$ 5 mil.</a:t>
-            </a:r>
-          </a:p>
-        </p:txBody>
-      </p:sp>
-      <p:sp>
-        <p:nvSpPr>
-          <p:cNvPr id="102" name="Cautela"/>
-          <p:cNvSpPr/>
-          <p:nvPr/>
-        </p:nvSpPr>
-        <p:spPr>
-          <a:xfrm>
-            <a:off x="292608" y="5687568"/>
+            <a:off x="292608" y="5669280"/>
             <a:ext cx="11594592" cy="420624"/>
           </a:xfrm>
           <a:prstGeom prst="roundRect">
@@ -21014,38 +20461,333 @@
           </a:p>
         </p:txBody>
       </p:sp>
-      <p:pic>
-        <p:nvPicPr>
-          <p:cNvPr id="103" name="Figura" descr="H2: razão de chances da 1ª opção por +R$ 5 mil, um resultado por ciclo"/>
-          <p:cNvPicPr>
-            <a:picLocks noChangeAspect="1"/>
-          </p:cNvPicPr>
+      <p:sp>
+        <p:nvSpPr>
+          <p:cNvPr id="102" name="Rótulo"/>
+          <p:cNvSpPr/>
           <p:nvPr/>
-        </p:nvPicPr>
-        <p:blipFill>
-          <a:blip r:embed="rId3"/>
-          <a:stretch>
-            <a:fillRect/>
-          </a:stretch>
-        </p:blipFill>
+        </p:nvSpPr>
         <p:spPr>
           <a:xfrm>
-            <a:off x="2224067" y="804672"/>
-            <a:ext cx="7731675" cy="4279392"/>
+            <a:off x="292608" y="896112"/>
+            <a:ext cx="2438400" cy="1153160"/>
           </a:xfrm>
-          <a:prstGeom prst="rect">
-            <a:avLst/>
+          <a:prstGeom prst="roundRect">
+            <a:avLst>
+              <a:gd name="adj" fmla="val 10000"/>
+            </a:avLst>
           </a:prstGeom>
-          <a:ln w="6350">
+          <a:solidFill>
+            <a:srgbClr val="114719"/>
+          </a:solidFill>
+          <a:ln>
+            <a:noFill/>
+          </a:ln>
+        </p:spPr>
+        <p:txBody>
+          <a:bodyPr wrap="square" lIns="73152" tIns="45720" rIns="73152" bIns="45720" rtlCol="0" anchor="ctr">
+            <a:noAutofit/>
+          </a:bodyPr>
+          <a:lstStyle/>
+          <a:p>
+            <a:pPr marL="0" indent="0" algn="ctr">
+              <a:lnSpc>
+                <a:spcPct val="100000"/>
+              </a:lnSpc>
+              <a:spcBef>
+                <a:spcPts val="0"/>
+              </a:spcBef>
+              <a:spcAft>
+                <a:spcPts val="0"/>
+              </a:spcAft>
+              <a:buNone/>
+            </a:pPr>
+            <a:r>
+              <a:rPr lang="pt-BR" sz="2000" b="1" dirty="0">
+                <a:solidFill>
+                  <a:srgbClr val="FFFFFF"/>
+                </a:solidFill>
+                <a:latin typeface="Montserrat"/>
+              </a:rPr>
+              <a:t>Limitado</a:t>
+            </a:r>
+          </a:p>
+        </p:txBody>
+      </p:sp>
+      <p:sp>
+        <p:nvSpPr>
+          <p:cNvPr id="103" name="Item"/>
+          <p:cNvSpPr/>
+          <p:nvPr/>
+        </p:nvSpPr>
+        <p:spPr>
+          <a:xfrm>
+            <a:off x="2868168" y="896112"/>
+            <a:ext cx="9019032" cy="1153160"/>
+          </a:xfrm>
+          <a:prstGeom prst="roundRect">
+            <a:avLst>
+              <a:gd name="adj" fmla="val 6000"/>
+            </a:avLst>
+          </a:prstGeom>
+          <a:solidFill>
+            <a:srgbClr val="F4F8F5"/>
+          </a:solidFill>
+          <a:ln w="12700">
             <a:solidFill>
-              <a:srgbClr val="DDE7DF"/>
+              <a:srgbClr val="056429"/>
             </a:solidFill>
           </a:ln>
         </p:spPr>
-      </p:pic>
+        <p:txBody>
+          <a:bodyPr wrap="square" lIns="228600" tIns="36576" rIns="228600" bIns="36576" rtlCol="0" anchor="ctr">
+            <a:noAutofit/>
+          </a:bodyPr>
+          <a:lstStyle/>
+          <a:p>
+            <a:pPr marL="0" indent="0" algn="l">
+              <a:lnSpc>
+                <a:spcPct val="102000"/>
+              </a:lnSpc>
+              <a:spcBef>
+                <a:spcPts val="0"/>
+              </a:spcBef>
+              <a:spcAft>
+                <a:spcPts val="0"/>
+              </a:spcAft>
+              <a:buNone/>
+            </a:pPr>
+            <a:r>
+              <a:rPr lang="pt-BR" sz="2000" b="0" dirty="0">
+                <a:solidFill>
+                  <a:srgbClr val="3A3A3A"/>
+                </a:solidFill>
+                <a:latin typeface="Montserrat"/>
+              </a:rPr>
+              <a:t>toda a bolsa pesa menos que trabalhar na UF de origem</a:t>
+            </a:r>
+          </a:p>
+        </p:txBody>
+      </p:sp>
       <p:sp>
         <p:nvSpPr>
-          <p:cNvPr id="104" name="Fontes"/>
+          <p:cNvPr id="104" name="Rótulo"/>
+          <p:cNvSpPr/>
+          <p:nvPr/>
+        </p:nvSpPr>
+        <p:spPr>
+          <a:xfrm>
+            <a:off x="292608" y="2250440"/>
+            <a:ext cx="2438400" cy="1494536"/>
+          </a:xfrm>
+          <a:prstGeom prst="roundRect">
+            <a:avLst>
+              <a:gd name="adj" fmla="val 10000"/>
+            </a:avLst>
+          </a:prstGeom>
+          <a:solidFill>
+            <a:srgbClr val="114719"/>
+          </a:solidFill>
+          <a:ln>
+            <a:noFill/>
+          </a:ln>
+        </p:spPr>
+        <p:txBody>
+          <a:bodyPr wrap="square" lIns="73152" tIns="45720" rIns="73152" bIns="45720" rtlCol="0" anchor="ctr">
+            <a:noAutofit/>
+          </a:bodyPr>
+          <a:lstStyle/>
+          <a:p>
+            <a:pPr marL="0" indent="0" algn="ctr">
+              <a:lnSpc>
+                <a:spcPct val="100000"/>
+              </a:lnSpc>
+              <a:spcBef>
+                <a:spcPts val="0"/>
+              </a:spcBef>
+              <a:spcAft>
+                <a:spcPts val="0"/>
+              </a:spcAft>
+              <a:buNone/>
+            </a:pPr>
+            <a:r>
+              <a:rPr lang="pt-BR" sz="2000" b="1" dirty="0">
+                <a:solidFill>
+                  <a:srgbClr val="FFFFFF"/>
+                </a:solidFill>
+                <a:latin typeface="Montserrat"/>
+              </a:rPr>
+              <a:t>Escolha</a:t>
+            </a:r>
+          </a:p>
+        </p:txBody>
+      </p:sp>
+      <p:sp>
+        <p:nvSpPr>
+          <p:cNvPr id="105" name="Item"/>
+          <p:cNvSpPr/>
+          <p:nvPr/>
+        </p:nvSpPr>
+        <p:spPr>
+          <a:xfrm>
+            <a:off x="2868168" y="2250440"/>
+            <a:ext cx="9019032" cy="1494536"/>
+          </a:xfrm>
+          <a:prstGeom prst="roundRect">
+            <a:avLst>
+              <a:gd name="adj" fmla="val 6000"/>
+            </a:avLst>
+          </a:prstGeom>
+          <a:solidFill>
+            <a:srgbClr val="F4F8F5"/>
+          </a:solidFill>
+          <a:ln w="12700">
+            <a:solidFill>
+              <a:srgbClr val="056429"/>
+            </a:solidFill>
+          </a:ln>
+        </p:spPr>
+        <p:txBody>
+          <a:bodyPr wrap="square" lIns="228600" tIns="36576" rIns="228600" bIns="36576" rtlCol="0" anchor="ctr">
+            <a:noAutofit/>
+          </a:bodyPr>
+          <a:lstStyle/>
+          <a:p>
+            <a:pPr marL="0" indent="0" algn="l">
+              <a:lnSpc>
+                <a:spcPct val="102000"/>
+              </a:lnSpc>
+              <a:spcBef>
+                <a:spcPts val="0"/>
+              </a:spcBef>
+              <a:spcAft>
+                <a:spcPts val="0"/>
+              </a:spcAft>
+              <a:buNone/>
+            </a:pPr>
+            <a:r>
+              <a:rPr lang="pt-BR" sz="2000" b="0" dirty="0">
+                <a:solidFill>
+                  <a:srgbClr val="3A3A3A"/>
+                </a:solidFill>
+                <a:latin typeface="Montserrat"/>
+              </a:rPr>
+              <a:t>a bolsa empurra pouco a escolha: por ciclo, só o ciclo 2 mostra efeito, 1,70 [1,22; 2,37] por +R$ 5 mil; nos ciclos 1 e 3, 1,07 e 1,00</a:t>
+            </a:r>
+          </a:p>
+        </p:txBody>
+      </p:sp>
+      <p:sp>
+        <p:nvSpPr>
+          <p:cNvPr id="106" name="Rótulo"/>
+          <p:cNvSpPr/>
+          <p:nvPr/>
+        </p:nvSpPr>
+        <p:spPr>
+          <a:xfrm>
+            <a:off x="292608" y="3946144"/>
+            <a:ext cx="2438400" cy="1494536"/>
+          </a:xfrm>
+          <a:prstGeom prst="roundRect">
+            <a:avLst>
+              <a:gd name="adj" fmla="val 10000"/>
+            </a:avLst>
+          </a:prstGeom>
+          <a:solidFill>
+            <a:srgbClr val="114719"/>
+          </a:solidFill>
+          <a:ln>
+            <a:noFill/>
+          </a:ln>
+        </p:spPr>
+        <p:txBody>
+          <a:bodyPr wrap="square" lIns="73152" tIns="45720" rIns="73152" bIns="45720" rtlCol="0" anchor="ctr">
+            <a:noAutofit/>
+          </a:bodyPr>
+          <a:lstStyle/>
+          <a:p>
+            <a:pPr marL="0" indent="0" algn="ctr">
+              <a:lnSpc>
+                <a:spcPct val="100000"/>
+              </a:lnSpc>
+              <a:spcBef>
+                <a:spcPts val="0"/>
+              </a:spcBef>
+              <a:spcAft>
+                <a:spcPts val="0"/>
+              </a:spcAft>
+              <a:buNone/>
+            </a:pPr>
+            <a:r>
+              <a:rPr lang="pt-BR" sz="2000" b="1" dirty="0">
+                <a:solidFill>
+                  <a:srgbClr val="FFFFFF"/>
+                </a:solidFill>
+                <a:latin typeface="Montserrat"/>
+              </a:rPr>
+              <a:t>Preenchimento</a:t>
+            </a:r>
+          </a:p>
+        </p:txBody>
+      </p:sp>
+      <p:sp>
+        <p:nvSpPr>
+          <p:cNvPr id="107" name="Item"/>
+          <p:cNvSpPr/>
+          <p:nvPr/>
+        </p:nvSpPr>
+        <p:spPr>
+          <a:xfrm>
+            <a:off x="2868168" y="3946144"/>
+            <a:ext cx="9019032" cy="1494536"/>
+          </a:xfrm>
+          <a:prstGeom prst="roundRect">
+            <a:avLst>
+              <a:gd name="adj" fmla="val 6000"/>
+            </a:avLst>
+          </a:prstGeom>
+          <a:solidFill>
+            <a:srgbClr val="F4F8F5"/>
+          </a:solidFill>
+          <a:ln w="12700">
+            <a:solidFill>
+              <a:srgbClr val="056429"/>
+            </a:solidFill>
+          </a:ln>
+        </p:spPr>
+        <p:txBody>
+          <a:bodyPr wrap="square" lIns="228600" tIns="36576" rIns="228600" bIns="36576" rtlCol="0" anchor="ctr">
+            <a:noAutofit/>
+          </a:bodyPr>
+          <a:lstStyle/>
+          <a:p>
+            <a:pPr marL="0" indent="0" algn="l">
+              <a:lnSpc>
+                <a:spcPct val="102000"/>
+              </a:lnSpc>
+              <a:spcBef>
+                <a:spcPts val="0"/>
+              </a:spcBef>
+              <a:spcAft>
+                <a:spcPts val="0"/>
+              </a:spcAft>
+              <a:buNone/>
+            </a:pPr>
+            <a:r>
+              <a:rPr lang="pt-BR" sz="2000" b="0" dirty="0">
+                <a:solidFill>
+                  <a:srgbClr val="3A3A3A"/>
+                </a:solidFill>
+                <a:latin typeface="Montserrat"/>
+              </a:rPr>
+              <a:t>por isso não aparece nas vagas preenchidas: o modelo prevê só +0,20 e +0,24 candidato de 1ª opção por célula em 0,300 e 0,400</a:t>
+            </a:r>
+          </a:p>
+        </p:txBody>
+      </p:sp>
+      <p:sp>
+        <p:nvSpPr>
+          <p:cNvPr id="108" name="Fontes"/>
           <p:cNvSpPr txBox="1"/>
           <p:nvPr/>
         </p:nvSpPr>
@@ -21096,7 +20838,7 @@
                 </a:solidFill>
                 <a:latin typeface="Montserrat"/>
               </a:rPr>
-              <a:t>output/rdd_bolsa/P1_estimativas.csv (M5; doc 57a).</a:t>
+              <a:t>output/rdd_bolsa/P1h_magnitudes.csv (doc 57i); P1_estimativas.csv (M5 por ciclo e ponte P1g; doc 57a, §4 e §9).</a:t>
             </a:r>
           </a:p>
         </p:txBody>
@@ -21159,7 +20901,7 @@
                 </a:solidFill>
                 <a:latin typeface="Montserrat"/>
               </a:rPr>
-              <a:t>H3: no mesmo logit da H2, a UF de origem pesa mais que toda a bolsa</a:t>
+              <a:t>H4: a chegada aumenta a oferta ou só remaneja?</a:t>
             </a:r>
           </a:p>
         </p:txBody>
@@ -21257,168 +20999,826 @@
               <a:t>Base de Dados  |  </a:t>
             </a:r>
             <a:r>
-              <a:rPr lang="pt-BR" sz="1000" dirty="0">
-                <a:latin typeface="Montserrat"/>
-              </a:rPr>
-              <a:t>Metodologia  |  </a:t>
-            </a:r>
-            <a:r>
               <a:rPr lang="pt-BR" sz="1000" b="1" dirty="0">
                 <a:solidFill>
                   <a:srgbClr val="114719"/>
                 </a:solidFill>
                 <a:latin typeface="Montserrat"/>
               </a:rPr>
-              <a:t>Resultados</a:t>
+              <a:t>Metodologia</a:t>
             </a:r>
             <a:r>
               <a:rPr lang="pt-BR" sz="1000" dirty="0">
                 <a:latin typeface="Montserrat"/>
               </a:rPr>
-              <a:t/>
+              <a:t>  |  </a:t>
+            </a:r>
+            <a:r>
+              <a:rPr lang="pt-BR" sz="1000" dirty="0">
+                <a:latin typeface="Montserrat"/>
+              </a:rPr>
+              <a:t>Resultados</a:t>
             </a:r>
           </a:p>
         </p:txBody>
       </p:sp>
+      <p:graphicFrame>
+        <p:nvGraphicFramePr>
+          <p:cNvPr id="101" name="Tabela"/>
+          <p:cNvGraphicFramePr>
+            <a:graphicFrameLocks noGrp="1"/>
+          </p:cNvGraphicFramePr>
+          <p:nvPr/>
+        </p:nvGraphicFramePr>
+        <p:xfrm>
+          <a:off x="292608" y="822960"/>
+          <a:ext cx="11594592" cy="5266944"/>
+        </p:xfrm>
+        <a:graphic>
+          <a:graphicData uri="http://schemas.openxmlformats.org/drawingml/2006/table">
+            <a:tbl>
+              <a:tblPr firstRow="1" bandRow="1"/>
+              <a:tblGrid>
+                <a:gridCol w="2480579"/>
+                <a:gridCol w="9114013"/>
+              </a:tblGrid>
+              <a:tr h="505127">
+                <a:tc>
+                  <a:txBody>
+                    <a:bodyPr/>
+                    <a:lstStyle/>
+                    <a:p>
+                      <a:pPr marL="0" indent="0" algn="l">
+                        <a:lnSpc>
+                          <a:spcPct val="100000"/>
+                        </a:lnSpc>
+                        <a:spcBef>
+                          <a:spcPts val="0"/>
+                        </a:spcBef>
+                        <a:spcAft>
+                          <a:spcPts val="0"/>
+                        </a:spcAft>
+                        <a:buNone/>
+                      </a:pPr>
+                      <a:r>
+                        <a:rPr lang="pt-BR" sz="1800" b="1" dirty="0">
+                          <a:solidFill>
+                            <a:srgbClr val="FFFFFF"/>
+                          </a:solidFill>
+                          <a:latin typeface="Montserrat"/>
+                        </a:rPr>
+                        <a:t>Campo</a:t>
+                      </a:r>
+                    </a:p>
+                  </a:txBody>
+                  <a:tcPr marL="73152" marR="73152" marT="36576" marB="36576" anchor="ctr">
+                    <a:lnL w="6350">
+                      <a:solidFill>
+                        <a:srgbClr val="C9DED1"/>
+                      </a:solidFill>
+                    </a:lnL>
+                    <a:lnR w="6350">
+                      <a:solidFill>
+                        <a:srgbClr val="C9DED1"/>
+                      </a:solidFill>
+                    </a:lnR>
+                    <a:lnT w="6350">
+                      <a:solidFill>
+                        <a:srgbClr val="C9DED1"/>
+                      </a:solidFill>
+                    </a:lnT>
+                    <a:lnB w="6350">
+                      <a:solidFill>
+                        <a:srgbClr val="C9DED1"/>
+                      </a:solidFill>
+                    </a:lnB>
+                    <a:solidFill>
+                      <a:srgbClr val="114719"/>
+                    </a:solidFill>
+                  </a:tcPr>
+                </a:tc>
+                <a:tc>
+                  <a:txBody>
+                    <a:bodyPr/>
+                    <a:lstStyle/>
+                    <a:p>
+                      <a:pPr marL="0" indent="0" algn="l">
+                        <a:lnSpc>
+                          <a:spcPct val="100000"/>
+                        </a:lnSpc>
+                        <a:spcBef>
+                          <a:spcPts val="0"/>
+                        </a:spcBef>
+                        <a:spcAft>
+                          <a:spcPts val="0"/>
+                        </a:spcAft>
+                        <a:buNone/>
+                      </a:pPr>
+                      <a:r>
+                        <a:rPr lang="pt-BR" sz="1800" b="1" dirty="0">
+                          <a:solidFill>
+                            <a:srgbClr val="FFFFFF"/>
+                          </a:solidFill>
+                          <a:latin typeface="Montserrat"/>
+                        </a:rPr>
+                        <a:t>Como é feito</a:t>
+                      </a:r>
+                    </a:p>
+                  </a:txBody>
+                  <a:tcPr marL="73152" marR="73152" marT="36576" marB="36576" anchor="ctr">
+                    <a:lnL w="6350">
+                      <a:solidFill>
+                        <a:srgbClr val="C9DED1"/>
+                      </a:solidFill>
+                    </a:lnL>
+                    <a:lnR w="6350">
+                      <a:solidFill>
+                        <a:srgbClr val="C9DED1"/>
+                      </a:solidFill>
+                    </a:lnR>
+                    <a:lnT w="6350">
+                      <a:solidFill>
+                        <a:srgbClr val="C9DED1"/>
+                      </a:solidFill>
+                    </a:lnT>
+                    <a:lnB w="6350">
+                      <a:solidFill>
+                        <a:srgbClr val="C9DED1"/>
+                      </a:solidFill>
+                    </a:lnB>
+                    <a:solidFill>
+                      <a:srgbClr val="114719"/>
+                    </a:solidFill>
+                  </a:tcPr>
+                </a:tc>
+              </a:tr>
+              <a:tr h="851338">
+                <a:tc>
+                  <a:txBody>
+                    <a:bodyPr/>
+                    <a:lstStyle/>
+                    <a:p>
+                      <a:pPr marL="0" indent="0" algn="l">
+                        <a:lnSpc>
+                          <a:spcPct val="100000"/>
+                        </a:lnSpc>
+                        <a:spcBef>
+                          <a:spcPts val="0"/>
+                        </a:spcBef>
+                        <a:spcAft>
+                          <a:spcPts val="0"/>
+                        </a:spcAft>
+                        <a:buNone/>
+                      </a:pPr>
+                      <a:r>
+                        <a:rPr lang="pt-BR" sz="1800" b="1" dirty="0">
+                          <a:solidFill>
+                            <a:srgbClr val="3A3A3A"/>
+                          </a:solidFill>
+                          <a:latin typeface="Montserrat"/>
+                        </a:rPr>
+                        <a:t>Outcome</a:t>
+                      </a:r>
+                    </a:p>
+                  </a:txBody>
+                  <a:tcPr marL="73152" marR="73152" marT="36576" marB="36576" anchor="ctr">
+                    <a:lnL w="6350">
+                      <a:solidFill>
+                        <a:srgbClr val="C9DED1"/>
+                      </a:solidFill>
+                    </a:lnL>
+                    <a:lnR w="6350">
+                      <a:solidFill>
+                        <a:srgbClr val="C9DED1"/>
+                      </a:solidFill>
+                    </a:lnR>
+                    <a:lnT w="6350">
+                      <a:solidFill>
+                        <a:srgbClr val="C9DED1"/>
+                      </a:solidFill>
+                    </a:lnT>
+                    <a:lnB w="6350">
+                      <a:solidFill>
+                        <a:srgbClr val="C9DED1"/>
+                      </a:solidFill>
+                    </a:lnB>
+                    <a:solidFill>
+                      <a:srgbClr val="F3F7F3"/>
+                    </a:solidFill>
+                  </a:tcPr>
+                </a:tc>
+                <a:tc>
+                  <a:txBody>
+                    <a:bodyPr/>
+                    <a:lstStyle/>
+                    <a:p>
+                      <a:pPr marL="0" indent="0" algn="l">
+                        <a:lnSpc>
+                          <a:spcPct val="100000"/>
+                        </a:lnSpc>
+                        <a:spcBef>
+                          <a:spcPts val="0"/>
+                        </a:spcBef>
+                        <a:spcAft>
+                          <a:spcPts val="0"/>
+                        </a:spcAft>
+                        <a:buNone/>
+                      </a:pPr>
+                      <a:r>
+                        <a:rPr lang="pt-BR" sz="1800" b="0" dirty="0">
+                          <a:solidFill>
+                            <a:srgbClr val="3A3A3A"/>
+                          </a:solidFill>
+                          <a:latin typeface="Montserrat"/>
+                        </a:rPr>
+                        <a:t>horas semanais cadastradas do médico no CNES: totais, no município do posto e fora dele</a:t>
+                      </a:r>
+                    </a:p>
+                  </a:txBody>
+                  <a:tcPr marL="73152" marR="73152" marT="36576" marB="36576" anchor="ctr">
+                    <a:lnL w="6350">
+                      <a:solidFill>
+                        <a:srgbClr val="C9DED1"/>
+                      </a:solidFill>
+                    </a:lnL>
+                    <a:lnR w="6350">
+                      <a:solidFill>
+                        <a:srgbClr val="C9DED1"/>
+                      </a:solidFill>
+                    </a:lnR>
+                    <a:lnT w="6350">
+                      <a:solidFill>
+                        <a:srgbClr val="C9DED1"/>
+                      </a:solidFill>
+                    </a:lnT>
+                    <a:lnB w="6350">
+                      <a:solidFill>
+                        <a:srgbClr val="C9DED1"/>
+                      </a:solidFill>
+                    </a:lnB>
+                    <a:solidFill>
+                      <a:srgbClr val="F3F7F3"/>
+                    </a:solidFill>
+                  </a:tcPr>
+                </a:tc>
+              </a:tr>
+              <a:tr h="851338">
+                <a:tc>
+                  <a:txBody>
+                    <a:bodyPr/>
+                    <a:lstStyle/>
+                    <a:p>
+                      <a:pPr marL="0" indent="0" algn="l">
+                        <a:lnSpc>
+                          <a:spcPct val="100000"/>
+                        </a:lnSpc>
+                        <a:spcBef>
+                          <a:spcPts val="0"/>
+                        </a:spcBef>
+                        <a:spcAft>
+                          <a:spcPts val="0"/>
+                        </a:spcAft>
+                        <a:buNone/>
+                      </a:pPr>
+                      <a:r>
+                        <a:rPr lang="pt-BR" sz="1800" b="1" dirty="0">
+                          <a:solidFill>
+                            <a:srgbClr val="3A3A3A"/>
+                          </a:solidFill>
+                          <a:latin typeface="Montserrat"/>
+                        </a:rPr>
+                        <a:t>Amostra</a:t>
+                      </a:r>
+                    </a:p>
+                  </a:txBody>
+                  <a:tcPr marL="73152" marR="73152" marT="36576" marB="36576" anchor="ctr">
+                    <a:lnL w="6350">
+                      <a:solidFill>
+                        <a:srgbClr val="C9DED1"/>
+                      </a:solidFill>
+                    </a:lnL>
+                    <a:lnR w="6350">
+                      <a:solidFill>
+                        <a:srgbClr val="C9DED1"/>
+                      </a:solidFill>
+                    </a:lnR>
+                    <a:lnT w="6350">
+                      <a:solidFill>
+                        <a:srgbClr val="C9DED1"/>
+                      </a:solidFill>
+                    </a:lnT>
+                    <a:lnB w="6350">
+                      <a:solidFill>
+                        <a:srgbClr val="C9DED1"/>
+                      </a:solidFill>
+                    </a:lnB>
+                    <a:solidFill>
+                      <a:srgbClr val="FFFFFF"/>
+                    </a:solidFill>
+                  </a:tcPr>
+                </a:tc>
+                <a:tc>
+                  <a:txBody>
+                    <a:bodyPr/>
+                    <a:lstStyle/>
+                    <a:p>
+                      <a:pPr marL="0" indent="0" algn="l">
+                        <a:lnSpc>
+                          <a:spcPct val="100000"/>
+                        </a:lnSpc>
+                        <a:spcBef>
+                          <a:spcPts val="0"/>
+                        </a:spcBef>
+                        <a:spcAft>
+                          <a:spcPts val="0"/>
+                        </a:spcAft>
+                        <a:buNone/>
+                      </a:pPr>
+                      <a:r>
+                        <a:rPr lang="pt-BR" sz="1800" b="0" dirty="0">
+                          <a:solidFill>
+                            <a:srgbClr val="3A3A3A"/>
+                          </a:solidFill>
+                          <a:latin typeface="Montserrat"/>
+                        </a:rPr>
+                        <a:t>médico × mês; médicos dos ciclos 1 e 2 na lista de ativos, ligados ao CNES</a:t>
+                      </a:r>
+                    </a:p>
+                  </a:txBody>
+                  <a:tcPr marL="73152" marR="73152" marT="36576" marB="36576" anchor="ctr">
+                    <a:lnL w="6350">
+                      <a:solidFill>
+                        <a:srgbClr val="C9DED1"/>
+                      </a:solidFill>
+                    </a:lnL>
+                    <a:lnR w="6350">
+                      <a:solidFill>
+                        <a:srgbClr val="C9DED1"/>
+                      </a:solidFill>
+                    </a:lnR>
+                    <a:lnT w="6350">
+                      <a:solidFill>
+                        <a:srgbClr val="C9DED1"/>
+                      </a:solidFill>
+                    </a:lnT>
+                    <a:lnB w="6350">
+                      <a:solidFill>
+                        <a:srgbClr val="C9DED1"/>
+                      </a:solidFill>
+                    </a:lnB>
+                    <a:solidFill>
+                      <a:srgbClr val="FFFFFF"/>
+                    </a:solidFill>
+                  </a:tcPr>
+                </a:tc>
+              </a:tr>
+              <a:tr h="1197549">
+                <a:tc>
+                  <a:txBody>
+                    <a:bodyPr/>
+                    <a:lstStyle/>
+                    <a:p>
+                      <a:pPr marL="0" indent="0" algn="l">
+                        <a:lnSpc>
+                          <a:spcPct val="100000"/>
+                        </a:lnSpc>
+                        <a:spcBef>
+                          <a:spcPts val="0"/>
+                        </a:spcBef>
+                        <a:spcAft>
+                          <a:spcPts val="0"/>
+                        </a:spcAft>
+                        <a:buNone/>
+                      </a:pPr>
+                      <a:r>
+                        <a:rPr lang="pt-BR" sz="1800" b="1" dirty="0">
+                          <a:solidFill>
+                            <a:srgbClr val="3A3A3A"/>
+                          </a:solidFill>
+                          <a:latin typeface="Montserrat"/>
+                        </a:rPr>
+                        <a:t>Equação em palavras</a:t>
+                      </a:r>
+                    </a:p>
+                  </a:txBody>
+                  <a:tcPr marL="73152" marR="73152" marT="36576" marB="36576" anchor="ctr">
+                    <a:lnL w="6350">
+                      <a:solidFill>
+                        <a:srgbClr val="C9DED1"/>
+                      </a:solidFill>
+                    </a:lnL>
+                    <a:lnR w="6350">
+                      <a:solidFill>
+                        <a:srgbClr val="C9DED1"/>
+                      </a:solidFill>
+                    </a:lnR>
+                    <a:lnT w="6350">
+                      <a:solidFill>
+                        <a:srgbClr val="C9DED1"/>
+                      </a:solidFill>
+                    </a:lnT>
+                    <a:lnB w="6350">
+                      <a:solidFill>
+                        <a:srgbClr val="C9DED1"/>
+                      </a:solidFill>
+                    </a:lnB>
+                    <a:solidFill>
+                      <a:srgbClr val="F3F7F3"/>
+                    </a:solidFill>
+                  </a:tcPr>
+                </a:tc>
+                <a:tc>
+                  <a:txBody>
+                    <a:bodyPr/>
+                    <a:lstStyle/>
+                    <a:p>
+                      <a:pPr marL="0" indent="0" algn="l">
+                        <a:lnSpc>
+                          <a:spcPct val="100000"/>
+                        </a:lnSpc>
+                        <a:spcBef>
+                          <a:spcPts val="0"/>
+                        </a:spcBef>
+                        <a:spcAft>
+                          <a:spcPts val="0"/>
+                        </a:spcAft>
+                        <a:buNone/>
+                      </a:pPr>
+                      <a:r>
+                        <a:rPr lang="pt-BR" sz="1800" b="0" dirty="0">
+                          <a:solidFill>
+                            <a:srgbClr val="3A3A3A"/>
+                          </a:solidFill>
+                          <a:latin typeface="Montserrat"/>
+                        </a:rPr>
+                        <a:t>efeito k meses depois de entrar = mudança das horas desde o mês anterior à entrada, nos que entraram, menos a mesma mudança nos que ainda não entraram (Callaway–Sant'Anna)</a:t>
+                      </a:r>
+                    </a:p>
+                  </a:txBody>
+                  <a:tcPr marL="73152" marR="73152" marT="36576" marB="36576" anchor="ctr">
+                    <a:lnL w="6350">
+                      <a:solidFill>
+                        <a:srgbClr val="C9DED1"/>
+                      </a:solidFill>
+                    </a:lnL>
+                    <a:lnR w="6350">
+                      <a:solidFill>
+                        <a:srgbClr val="C9DED1"/>
+                      </a:solidFill>
+                    </a:lnR>
+                    <a:lnT w="6350">
+                      <a:solidFill>
+                        <a:srgbClr val="C9DED1"/>
+                      </a:solidFill>
+                    </a:lnT>
+                    <a:lnB w="6350">
+                      <a:solidFill>
+                        <a:srgbClr val="C9DED1"/>
+                      </a:solidFill>
+                    </a:lnB>
+                    <a:solidFill>
+                      <a:srgbClr val="F3F7F3"/>
+                    </a:solidFill>
+                  </a:tcPr>
+                </a:tc>
+              </a:tr>
+              <a:tr h="851338">
+                <a:tc>
+                  <a:txBody>
+                    <a:bodyPr/>
+                    <a:lstStyle/>
+                    <a:p>
+                      <a:pPr marL="0" indent="0" algn="l">
+                        <a:lnSpc>
+                          <a:spcPct val="100000"/>
+                        </a:lnSpc>
+                        <a:spcBef>
+                          <a:spcPts val="0"/>
+                        </a:spcBef>
+                        <a:spcAft>
+                          <a:spcPts val="0"/>
+                        </a:spcAft>
+                        <a:buNone/>
+                      </a:pPr>
+                      <a:r>
+                        <a:rPr lang="pt-BR" sz="1800" b="1" dirty="0">
+                          <a:solidFill>
+                            <a:srgbClr val="3A3A3A"/>
+                          </a:solidFill>
+                          <a:latin typeface="Montserrat"/>
+                        </a:rPr>
+                        <a:t>Comum e por ciclo</a:t>
+                      </a:r>
+                    </a:p>
+                  </a:txBody>
+                  <a:tcPr marL="73152" marR="73152" marT="36576" marB="36576" anchor="ctr">
+                    <a:lnL w="6350">
+                      <a:solidFill>
+                        <a:srgbClr val="C9DED1"/>
+                      </a:solidFill>
+                    </a:lnL>
+                    <a:lnR w="6350">
+                      <a:solidFill>
+                        <a:srgbClr val="C9DED1"/>
+                      </a:solidFill>
+                    </a:lnR>
+                    <a:lnT w="6350">
+                      <a:solidFill>
+                        <a:srgbClr val="C9DED1"/>
+                      </a:solidFill>
+                    </a:lnT>
+                    <a:lnB w="6350">
+                      <a:solidFill>
+                        <a:srgbClr val="C9DED1"/>
+                      </a:solidFill>
+                    </a:lnB>
+                    <a:solidFill>
+                      <a:srgbClr val="FFFFFF"/>
+                    </a:solidFill>
+                  </a:tcPr>
+                </a:tc>
+                <a:tc>
+                  <a:txBody>
+                    <a:bodyPr/>
+                    <a:lstStyle/>
+                    <a:p>
+                      <a:pPr marL="0" indent="0" algn="l">
+                        <a:lnSpc>
+                          <a:spcPct val="100000"/>
+                        </a:lnSpc>
+                        <a:spcBef>
+                          <a:spcPts val="0"/>
+                        </a:spcBef>
+                        <a:spcAft>
+                          <a:spcPts val="0"/>
+                        </a:spcAft>
+                        <a:buNone/>
+                      </a:pPr>
+                      <a:r>
+                        <a:rPr lang="pt-BR" sz="1800" b="0" dirty="0">
+                          <a:solidFill>
+                            <a:srgbClr val="3A3A3A"/>
+                          </a:solidFill>
+                          <a:latin typeface="Montserrat"/>
+                        </a:rPr>
+                        <a:t>um efeito por coorte de entrada (mês de início) e por mês; o resultado é a média do pós</a:t>
+                      </a:r>
+                    </a:p>
+                  </a:txBody>
+                  <a:tcPr marL="73152" marR="73152" marT="36576" marB="36576" anchor="ctr">
+                    <a:lnL w="6350">
+                      <a:solidFill>
+                        <a:srgbClr val="C9DED1"/>
+                      </a:solidFill>
+                    </a:lnL>
+                    <a:lnR w="6350">
+                      <a:solidFill>
+                        <a:srgbClr val="C9DED1"/>
+                      </a:solidFill>
+                    </a:lnR>
+                    <a:lnT w="6350">
+                      <a:solidFill>
+                        <a:srgbClr val="C9DED1"/>
+                      </a:solidFill>
+                    </a:lnT>
+                    <a:lnB w="6350">
+                      <a:solidFill>
+                        <a:srgbClr val="C9DED1"/>
+                      </a:solidFill>
+                    </a:lnB>
+                    <a:solidFill>
+                      <a:srgbClr val="FFFFFF"/>
+                    </a:solidFill>
+                  </a:tcPr>
+                </a:tc>
+              </a:tr>
+              <a:tr h="505127">
+                <a:tc>
+                  <a:txBody>
+                    <a:bodyPr/>
+                    <a:lstStyle/>
+                    <a:p>
+                      <a:pPr marL="0" indent="0" algn="l">
+                        <a:lnSpc>
+                          <a:spcPct val="100000"/>
+                        </a:lnSpc>
+                        <a:spcBef>
+                          <a:spcPts val="0"/>
+                        </a:spcBef>
+                        <a:spcAft>
+                          <a:spcPts val="0"/>
+                        </a:spcAft>
+                        <a:buNone/>
+                      </a:pPr>
+                      <a:r>
+                        <a:rPr lang="pt-BR" sz="1800" b="1" dirty="0">
+                          <a:solidFill>
+                            <a:srgbClr val="3A3A3A"/>
+                          </a:solidFill>
+                          <a:latin typeface="Montserrat"/>
+                        </a:rPr>
+                        <a:t>Erro-padrão</a:t>
+                      </a:r>
+                    </a:p>
+                  </a:txBody>
+                  <a:tcPr marL="73152" marR="73152" marT="36576" marB="36576" anchor="ctr">
+                    <a:lnL w="6350">
+                      <a:solidFill>
+                        <a:srgbClr val="C9DED1"/>
+                      </a:solidFill>
+                    </a:lnL>
+                    <a:lnR w="6350">
+                      <a:solidFill>
+                        <a:srgbClr val="C9DED1"/>
+                      </a:solidFill>
+                    </a:lnR>
+                    <a:lnT w="6350">
+                      <a:solidFill>
+                        <a:srgbClr val="C9DED1"/>
+                      </a:solidFill>
+                    </a:lnT>
+                    <a:lnB w="6350">
+                      <a:solidFill>
+                        <a:srgbClr val="C9DED1"/>
+                      </a:solidFill>
+                    </a:lnB>
+                    <a:solidFill>
+                      <a:srgbClr val="F3F7F3"/>
+                    </a:solidFill>
+                  </a:tcPr>
+                </a:tc>
+                <a:tc>
+                  <a:txBody>
+                    <a:bodyPr/>
+                    <a:lstStyle/>
+                    <a:p>
+                      <a:pPr marL="0" indent="0" algn="l">
+                        <a:lnSpc>
+                          <a:spcPct val="100000"/>
+                        </a:lnSpc>
+                        <a:spcBef>
+                          <a:spcPts val="0"/>
+                        </a:spcBef>
+                        <a:spcAft>
+                          <a:spcPts val="0"/>
+                        </a:spcAft>
+                        <a:buNone/>
+                      </a:pPr>
+                      <a:r>
+                        <a:rPr lang="pt-BR" sz="1800" b="0" dirty="0">
+                          <a:solidFill>
+                            <a:srgbClr val="3A3A3A"/>
+                          </a:solidFill>
+                          <a:latin typeface="Montserrat"/>
+                        </a:rPr>
+                        <a:t>bootstrap multiplicador agrupado por médico</a:t>
+                      </a:r>
+                    </a:p>
+                  </a:txBody>
+                  <a:tcPr marL="73152" marR="73152" marT="36576" marB="36576" anchor="ctr">
+                    <a:lnL w="6350">
+                      <a:solidFill>
+                        <a:srgbClr val="C9DED1"/>
+                      </a:solidFill>
+                    </a:lnL>
+                    <a:lnR w="6350">
+                      <a:solidFill>
+                        <a:srgbClr val="C9DED1"/>
+                      </a:solidFill>
+                    </a:lnR>
+                    <a:lnT w="6350">
+                      <a:solidFill>
+                        <a:srgbClr val="C9DED1"/>
+                      </a:solidFill>
+                    </a:lnT>
+                    <a:lnB w="6350">
+                      <a:solidFill>
+                        <a:srgbClr val="C9DED1"/>
+                      </a:solidFill>
+                    </a:lnB>
+                    <a:solidFill>
+                      <a:srgbClr val="F3F7F3"/>
+                    </a:solidFill>
+                  </a:tcPr>
+                </a:tc>
+              </a:tr>
+              <a:tr h="505127">
+                <a:tc>
+                  <a:txBody>
+                    <a:bodyPr/>
+                    <a:lstStyle/>
+                    <a:p>
+                      <a:pPr marL="0" indent="0" algn="l">
+                        <a:lnSpc>
+                          <a:spcPct val="100000"/>
+                        </a:lnSpc>
+                        <a:spcBef>
+                          <a:spcPts val="0"/>
+                        </a:spcBef>
+                        <a:spcAft>
+                          <a:spcPts val="0"/>
+                        </a:spcAft>
+                        <a:buNone/>
+                      </a:pPr>
+                      <a:r>
+                        <a:rPr lang="pt-BR" sz="1800" b="1" dirty="0">
+                          <a:solidFill>
+                            <a:srgbClr val="3A3A3A"/>
+                          </a:solidFill>
+                          <a:latin typeface="Montserrat"/>
+                        </a:rPr>
+                        <a:t>Cuidado</a:t>
+                      </a:r>
+                    </a:p>
+                  </a:txBody>
+                  <a:tcPr marL="73152" marR="73152" marT="36576" marB="36576" anchor="ctr">
+                    <a:lnL w="6350">
+                      <a:solidFill>
+                        <a:srgbClr val="C9DED1"/>
+                      </a:solidFill>
+                    </a:lnL>
+                    <a:lnR w="6350">
+                      <a:solidFill>
+                        <a:srgbClr val="C9DED1"/>
+                      </a:solidFill>
+                    </a:lnR>
+                    <a:lnT w="6350">
+                      <a:solidFill>
+                        <a:srgbClr val="C9DED1"/>
+                      </a:solidFill>
+                    </a:lnT>
+                    <a:lnB w="6350">
+                      <a:solidFill>
+                        <a:srgbClr val="C9DED1"/>
+                      </a:solidFill>
+                    </a:lnB>
+                    <a:solidFill>
+                      <a:srgbClr val="FFFFFF"/>
+                    </a:solidFill>
+                  </a:tcPr>
+                </a:tc>
+                <a:tc>
+                  <a:txBody>
+                    <a:bodyPr/>
+                    <a:lstStyle/>
+                    <a:p>
+                      <a:pPr marL="0" indent="0" algn="l">
+                        <a:lnSpc>
+                          <a:spcPct val="100000"/>
+                        </a:lnSpc>
+                        <a:spcBef>
+                          <a:spcPts val="0"/>
+                        </a:spcBef>
+                        <a:spcAft>
+                          <a:spcPts val="0"/>
+                        </a:spcAft>
+                        <a:buNone/>
+                      </a:pPr>
+                      <a:r>
+                        <a:rPr lang="pt-BR" sz="1800" b="0" dirty="0">
+                          <a:solidFill>
+                            <a:srgbClr val="3A3A3A"/>
+                          </a:solidFill>
+                          <a:latin typeface="Montserrat"/>
+                        </a:rPr>
+                        <a:t>o pré falha em parte dos outcomes; horas cadastradas não são presença</a:t>
+                      </a:r>
+                    </a:p>
+                  </a:txBody>
+                  <a:tcPr marL="73152" marR="73152" marT="36576" marB="36576" anchor="ctr">
+                    <a:lnL w="6350">
+                      <a:solidFill>
+                        <a:srgbClr val="C9DED1"/>
+                      </a:solidFill>
+                    </a:lnL>
+                    <a:lnR w="6350">
+                      <a:solidFill>
+                        <a:srgbClr val="C9DED1"/>
+                      </a:solidFill>
+                    </a:lnR>
+                    <a:lnT w="6350">
+                      <a:solidFill>
+                        <a:srgbClr val="C9DED1"/>
+                      </a:solidFill>
+                    </a:lnT>
+                    <a:lnB w="6350">
+                      <a:solidFill>
+                        <a:srgbClr val="C9DED1"/>
+                      </a:solidFill>
+                    </a:lnB>
+                    <a:solidFill>
+                      <a:srgbClr val="FFFFFF"/>
+                    </a:solidFill>
+                  </a:tcPr>
+                </a:tc>
+              </a:tr>
+            </a:tbl>
+          </a:graphicData>
+        </a:graphic>
+      </p:graphicFrame>
       <p:sp>
         <p:nvSpPr>
-          <p:cNvPr id="101" name="Linha"/>
-          <p:cNvSpPr/>
-          <p:nvPr/>
-        </p:nvSpPr>
-        <p:spPr>
-          <a:xfrm>
-            <a:off x="292608" y="5212080"/>
-            <a:ext cx="11594592" cy="420624"/>
-          </a:xfrm>
-          <a:prstGeom prst="rect">
-            <a:avLst/>
-          </a:prstGeom>
-          <a:noFill/>
-          <a:ln>
-            <a:noFill/>
-          </a:ln>
-        </p:spPr>
-        <p:txBody>
-          <a:bodyPr wrap="square" lIns="164592" tIns="18288" rIns="164592" bIns="18288" rtlCol="0" anchor="ctr">
-            <a:noAutofit/>
-          </a:bodyPr>
-          <a:lstStyle/>
-          <a:p>
-            <a:pPr marL="0" indent="0" algn="l">
-              <a:lnSpc>
-                <a:spcPct val="100000"/>
-              </a:lnSpc>
-              <a:spcBef>
-                <a:spcPts val="0"/>
-              </a:spcBef>
-              <a:spcAft>
-                <a:spcPts val="0"/>
-              </a:spcAft>
-              <a:buNone/>
-            </a:pPr>
-            <a:r>
-              <a:rPr lang="pt-BR" sz="1800" b="1" dirty="0">
-                <a:solidFill>
-                  <a:srgbClr val="114719"/>
-                </a:solidFill>
-                <a:latin typeface="Montserrat"/>
-              </a:rPr>
-              <a:t>Log-chance:</a:t>
-            </a:r>
-            <a:r>
-              <a:rPr lang="pt-BR" sz="1800" b="0" dirty="0">
-                <a:solidFill>
-                  <a:srgbClr val="3A3A3A"/>
-                </a:solidFill>
-                <a:latin typeface="Montserrat"/>
-              </a:rPr>
-              <a:t> um degrau, 0,21 ≈ chance 24% maior de ser a 1ª opção; IC contém zero.</a:t>
-            </a:r>
-          </a:p>
-        </p:txBody>
-      </p:sp>
-      <p:sp>
-        <p:nvSpPr>
-          <p:cNvPr id="102" name="Linha"/>
-          <p:cNvSpPr/>
-          <p:nvPr/>
-        </p:nvSpPr>
-        <p:spPr>
-          <a:xfrm>
-            <a:off x="292608" y="5687568"/>
-            <a:ext cx="11594592" cy="420624"/>
-          </a:xfrm>
-          <a:prstGeom prst="rect">
-            <a:avLst/>
-          </a:prstGeom>
-          <a:noFill/>
-          <a:ln>
-            <a:noFill/>
-          </a:ln>
-        </p:spPr>
-        <p:txBody>
-          <a:bodyPr wrap="square" lIns="164592" tIns="18288" rIns="164592" bIns="18288" rtlCol="0" anchor="ctr">
-            <a:noAutofit/>
-          </a:bodyPr>
-          <a:lstStyle/>
-          <a:p>
-            <a:pPr marL="0" indent="0" algn="l">
-              <a:lnSpc>
-                <a:spcPct val="100000"/>
-              </a:lnSpc>
-              <a:spcBef>
-                <a:spcPts val="0"/>
-              </a:spcBef>
-              <a:spcAft>
-                <a:spcPts val="0"/>
-              </a:spcAft>
-              <a:buNone/>
-            </a:pPr>
-            <a:r>
-              <a:rPr lang="pt-BR" sz="1800" b="0" dirty="0">
-                <a:solidFill>
-                  <a:srgbClr val="3A3A3A"/>
-                </a:solidFill>
-                <a:latin typeface="Montserrat"/>
-              </a:rPr>
-              <a:t>Não é efeito no preenchimento; a origem é preferência revelada, não efeito causal.</a:t>
-            </a:r>
-          </a:p>
-        </p:txBody>
-      </p:sp>
-      <p:pic>
-        <p:nvPicPr>
-          <p:cNvPr id="103" name="Figura" descr="H3: pesos na utilidade da escolha da 1ª opção (M1), na mesma escala: bolsa, distância e lugar de origem"/>
-          <p:cNvPicPr>
-            <a:picLocks noChangeAspect="1"/>
-          </p:cNvPicPr>
-          <p:nvPr/>
-        </p:nvPicPr>
-        <p:blipFill>
-          <a:blip r:embed="rId3"/>
-          <a:stretch>
-            <a:fillRect/>
-          </a:stretch>
-        </p:blipFill>
-        <p:spPr>
-          <a:xfrm>
-            <a:off x="2284121" y="804672"/>
-            <a:ext cx="7611567" cy="4279392"/>
-          </a:xfrm>
-          <a:prstGeom prst="rect">
-            <a:avLst/>
-          </a:prstGeom>
-          <a:ln w="6350">
-            <a:solidFill>
-              <a:srgbClr val="DDE7DF"/>
-            </a:solidFill>
-          </a:ln>
-        </p:spPr>
-      </p:pic>
-      <p:sp>
-        <p:nvSpPr>
-          <p:cNvPr id="104" name="Fontes"/>
+          <p:cNvPr id="102" name="Fontes"/>
           <p:cNvSpPr txBox="1"/>
           <p:nvPr/>
         </p:nvSpPr>
@@ -21469,7 +21869,7 @@
                 </a:solidFill>
                 <a:latin typeface="Montserrat"/>
               </a:rPr>
-              <a:t>output/rdd_bolsa/P1h_magnitudes.csv, P1h_resumo.json e P1h_figuras/P1h_magnitudes.png (doc 57i; protocolo 52b; auditoria 31); P1_estimativas.csv (M1).</a:t>
+              <a:t>protocolos 54 e 59; docs 57d e 57h; ficha completa no deck completo (doc 02).</a:t>
             </a:r>
           </a:p>
         </p:txBody>
@@ -21532,7 +21932,7 @@
                 </a:solidFill>
                 <a:latin typeface="Montserrat"/>
               </a:rPr>
-              <a:t>H4: o médico soma horas, mas metade já estava no município</a:t>
+              <a:t>H4: o médico soma horas, mas metade já estava lá</a:t>
             </a:r>
           </a:p>
         </p:txBody>
@@ -21653,27 +22053,62 @@
           </a:p>
         </p:txBody>
       </p:sp>
+      <p:pic>
+        <p:nvPicPr>
+          <p:cNvPr id="101" name="Figura" descr="H4: horas semanais cadastradas do médico depois da entrada (P4) e na nota de corte (P4-CA)"/>
+          <p:cNvPicPr>
+            <a:picLocks noChangeAspect="1"/>
+          </p:cNvPicPr>
+          <p:nvPr/>
+        </p:nvPicPr>
+        <p:blipFill>
+          <a:blip r:embed="rId3"/>
+          <a:stretch>
+            <a:fillRect/>
+          </a:stretch>
+        </p:blipFill>
+        <p:spPr>
+          <a:xfrm>
+            <a:off x="292608" y="1031635"/>
+            <a:ext cx="8211312" cy="4831307"/>
+          </a:xfrm>
+          <a:prstGeom prst="rect">
+            <a:avLst/>
+          </a:prstGeom>
+          <a:ln w="6350">
+            <a:solidFill>
+              <a:srgbClr val="DDE7DF"/>
+            </a:solidFill>
+          </a:ln>
+        </p:spPr>
+      </p:pic>
       <p:sp>
         <p:nvSpPr>
-          <p:cNvPr id="101" name="Linha"/>
+          <p:cNvPr id="102" name="Linha"/>
           <p:cNvSpPr/>
           <p:nvPr/>
         </p:nvSpPr>
         <p:spPr>
           <a:xfrm>
-            <a:off x="292608" y="5212080"/>
-            <a:ext cx="11594592" cy="420624"/>
+            <a:off x="8778240" y="804672"/>
+            <a:ext cx="3108960" cy="1906422"/>
           </a:xfrm>
-          <a:prstGeom prst="rect">
-            <a:avLst/>
+          <a:prstGeom prst="roundRect">
+            <a:avLst>
+              <a:gd name="adj" fmla="val 6000"/>
+            </a:avLst>
           </a:prstGeom>
-          <a:noFill/>
-          <a:ln>
-            <a:noFill/>
+          <a:solidFill>
+            <a:srgbClr val="F4F8F5"/>
+          </a:solidFill>
+          <a:ln w="12700">
+            <a:solidFill>
+              <a:srgbClr val="056429"/>
+            </a:solidFill>
           </a:ln>
         </p:spPr>
         <p:txBody>
-          <a:bodyPr wrap="square" lIns="164592" tIns="18288" rIns="164592" bIns="18288" rtlCol="0" anchor="ctr">
+          <a:bodyPr wrap="square" lIns="182880" tIns="54864" rIns="182880" bIns="54864" rtlCol="0" anchor="ctr">
             <a:noAutofit/>
           </a:bodyPr>
           <a:lstStyle/>
@@ -21691,31 +22126,40 @@
               <a:buNone/>
             </a:pPr>
             <a:r>
-              <a:rPr lang="pt-BR" sz="1800" b="0" dirty="0">
+              <a:rPr lang="pt-BR" sz="1600" b="1" dirty="0">
+                <a:solidFill>
+                  <a:srgbClr val="114719"/>
+                </a:solidFill>
+                <a:latin typeface="Montserrat"/>
+              </a:rPr>
+              <a:t>Horas totais:</a:t>
+            </a:r>
+            <a:r>
+              <a:rPr lang="pt-BR" sz="1600" b="0" dirty="0">
                 <a:solidFill>
                   <a:srgbClr val="3A3A3A"/>
                 </a:solidFill>
                 <a:latin typeface="Montserrat"/>
               </a:rPr>
-              <a:t>Soma horas cadastradas, mas metade já estava lá: parte é registro, não médico novo.</a:t>
+              <a:t> +6,6 h/sem [+5,4; +7,8] depois da entrada, sobretudo no município do posto.</a:t>
             </a:r>
           </a:p>
         </p:txBody>
       </p:sp>
       <p:sp>
         <p:nvSpPr>
-          <p:cNvPr id="102" name="Cautela"/>
+          <p:cNvPr id="103" name="Cautela"/>
           <p:cNvSpPr/>
           <p:nvPr/>
         </p:nvSpPr>
         <p:spPr>
           <a:xfrm>
-            <a:off x="292608" y="5687568"/>
-            <a:ext cx="11594592" cy="420624"/>
+            <a:off x="8778240" y="2875686"/>
+            <a:ext cx="3108960" cy="1906422"/>
           </a:xfrm>
           <a:prstGeom prst="roundRect">
             <a:avLst>
-              <a:gd name="adj" fmla="val 12000"/>
+              <a:gd name="adj" fmla="val 8000"/>
             </a:avLst>
           </a:prstGeom>
           <a:solidFill>
@@ -21726,7 +22170,7 @@
           </a:ln>
         </p:spPr>
         <p:txBody>
-          <a:bodyPr wrap="square" lIns="164592" tIns="18288" rIns="164592" bIns="18288" rtlCol="0" anchor="ctr">
+          <a:bodyPr wrap="square" lIns="182880" tIns="54864" rIns="182880" bIns="54864" rtlCol="0" anchor="ctr">
             <a:noAutofit/>
           </a:bodyPr>
           <a:lstStyle/>
@@ -21744,7 +22188,7 @@
               <a:buNone/>
             </a:pPr>
             <a:r>
-              <a:rPr lang="pt-BR" sz="1800" b="1" dirty="0">
+              <a:rPr lang="pt-BR" sz="1600" b="1" dirty="0">
                 <a:solidFill>
                   <a:srgbClr val="114719"/>
                 </a:solidFill>
@@ -21755,35 +22199,6 @@
           </a:p>
         </p:txBody>
       </p:sp>
-      <p:pic>
-        <p:nvPicPr>
-          <p:cNvPr id="103" name="Figura" descr="H4: horas semanais cadastradas do médico depois da entrada (P4) e na nota de corte (P4-CA)"/>
-          <p:cNvPicPr>
-            <a:picLocks noChangeAspect="1"/>
-          </p:cNvPicPr>
-          <p:nvPr/>
-        </p:nvPicPr>
-        <p:blipFill>
-          <a:blip r:embed="rId3"/>
-          <a:stretch>
-            <a:fillRect/>
-          </a:stretch>
-        </p:blipFill>
-        <p:spPr>
-          <a:xfrm>
-            <a:off x="2453267" y="804672"/>
-            <a:ext cx="7273275" cy="4279392"/>
-          </a:xfrm>
-          <a:prstGeom prst="rect">
-            <a:avLst/>
-          </a:prstGeom>
-          <a:ln w="6350">
-            <a:solidFill>
-              <a:srgbClr val="DDE7DF"/>
-            </a:solidFill>
-          </a:ln>
-        </p:spPr>
-      </p:pic>
       <p:sp>
         <p:nvSpPr>
           <p:cNvPr id="104" name="Fontes"/>
@@ -21900,7 +22315,7 @@
                 </a:solidFill>
                 <a:latin typeface="Montserrat"/>
               </a:rPr>
-              <a:t>A bolsa muda a escolha, não o preenchimento</a:t>
+              <a:t>O que isso quer dizer: soma horas, mas em parte remaneja</a:t>
             </a:r>
           </a:p>
         </p:txBody>
@@ -22069,7 +22484,7 @@
                 </a:solidFill>
                 <a:latin typeface="Montserrat"/>
               </a:rPr>
-              <a:t>Pacote do corte; inconclusivo não é efeito zero; vínculo não é presença.</a:t>
+              <a:t>Associação sob tendências paralelas; não é a participação no PMM-E.</a:t>
             </a:r>
           </a:p>
         </p:txBody>
@@ -22083,7 +22498,7 @@
         <p:spPr>
           <a:xfrm>
             <a:off x="292608" y="896112"/>
-            <a:ext cx="2834640" cy="960120"/>
+            <a:ext cx="2286000" cy="1380744"/>
           </a:xfrm>
           <a:prstGeom prst="roundRect">
             <a:avLst>
@@ -22116,13 +22531,13 @@
               <a:buNone/>
             </a:pPr>
             <a:r>
-              <a:rPr lang="pt-BR" sz="2400" b="1" dirty="0">
+              <a:rPr lang="pt-BR" sz="2000" b="1" dirty="0">
                 <a:solidFill>
                   <a:srgbClr val="FFFFFF"/>
                 </a:solidFill>
                 <a:latin typeface="Montserrat"/>
               </a:rPr>
-              <a:t>Escolha</a:t>
+              <a:t>Substituição</a:t>
             </a:r>
           </a:p>
         </p:txBody>
@@ -22135,8 +22550,8 @@
         </p:nvSpPr>
         <p:spPr>
           <a:xfrm>
-            <a:off x="3264408" y="896112"/>
-            <a:ext cx="8622792" cy="960120"/>
+            <a:off x="2715768" y="896112"/>
+            <a:ext cx="9171432" cy="1380744"/>
           </a:xfrm>
           <a:prstGeom prst="roundRect">
             <a:avLst>
@@ -22160,7 +22575,7 @@
           <a:p>
             <a:pPr marL="0" indent="0" algn="l">
               <a:lnSpc>
-                <a:spcPct val="100000"/>
+                <a:spcPct val="102000"/>
               </a:lnSpc>
               <a:spcBef>
                 <a:spcPts val="0"/>
@@ -22171,13 +22586,13 @@
               <a:buNone/>
             </a:pPr>
             <a:r>
-              <a:rPr lang="pt-BR" sz="2400" b="0" dirty="0">
+              <a:rPr lang="pt-BR" sz="2000" b="0" dirty="0">
                 <a:solidFill>
                   <a:srgbClr val="3A3A3A"/>
                 </a:solidFill>
                 <a:latin typeface="Montserrat"/>
               </a:rPr>
-              <a:t>reordena candidatos entre vagas, só no ciclo 2</a:t>
+              <a:t>metade já estava lá: 51,0% tinham vínculo no município do posto antes de entrar</a:t>
             </a:r>
           </a:p>
         </p:txBody>
@@ -22190,8 +22605,8 @@
         </p:nvSpPr>
         <p:spPr>
           <a:xfrm>
-            <a:off x="292608" y="2057400"/>
-            <a:ext cx="2834640" cy="960120"/>
+            <a:off x="292608" y="2478024"/>
+            <a:ext cx="2286000" cy="1380744"/>
           </a:xfrm>
           <a:prstGeom prst="roundRect">
             <a:avLst>
@@ -22224,13 +22639,13 @@
               <a:buNone/>
             </a:pPr>
             <a:r>
-              <a:rPr lang="pt-BR" sz="2400" b="1" dirty="0">
+              <a:rPr lang="pt-BR" sz="2000" b="1" dirty="0">
                 <a:solidFill>
                   <a:srgbClr val="FFFFFF"/>
                 </a:solidFill>
                 <a:latin typeface="Montserrat"/>
               </a:rPr>
-              <a:t>Preenchimento</a:t>
+              <a:t>Cadastro</a:t>
             </a:r>
           </a:p>
         </p:txBody>
@@ -22243,8 +22658,8 @@
         </p:nvSpPr>
         <p:spPr>
           <a:xfrm>
-            <a:off x="3264408" y="2057400"/>
-            <a:ext cx="8622792" cy="960120"/>
+            <a:off x="2715768" y="2478024"/>
+            <a:ext cx="9171432" cy="1380744"/>
           </a:xfrm>
           <a:prstGeom prst="roundRect">
             <a:avLst>
@@ -22268,7 +22683,7 @@
           <a:p>
             <a:pPr marL="0" indent="0" algn="l">
               <a:lnSpc>
-                <a:spcPct val="100000"/>
+                <a:spcPct val="102000"/>
               </a:lnSpc>
               <a:spcBef>
                 <a:spcPts val="0"/>
@@ -22279,13 +22694,13 @@
               <a:buNone/>
             </a:pPr>
             <a:r>
-              <a:rPr lang="pt-BR" sz="2400" b="0" dirty="0">
+              <a:rPr lang="pt-BR" sz="2000" b="0" dirty="0">
                 <a:solidFill>
                   <a:srgbClr val="3A3A3A"/>
                 </a:solidFill>
                 <a:latin typeface="Montserrat"/>
               </a:rPr>
-              <a:t>não aumenta em nenhum dos dois cortes</a:t>
+              <a:t>horas cadastradas no CNES não são presença nem horas trabalhadas</a:t>
             </a:r>
           </a:p>
         </p:txBody>
@@ -22298,8 +22713,8 @@
         </p:nvSpPr>
         <p:spPr>
           <a:xfrm>
-            <a:off x="292608" y="3218688"/>
-            <a:ext cx="2834640" cy="960120"/>
+            <a:off x="292608" y="4059936"/>
+            <a:ext cx="2286000" cy="1380744"/>
           </a:xfrm>
           <a:prstGeom prst="roundRect">
             <a:avLst>
@@ -22332,13 +22747,13 @@
               <a:buNone/>
             </a:pPr>
             <a:r>
-              <a:rPr lang="pt-BR" sz="2400" b="1" dirty="0">
+              <a:rPr lang="pt-BR" sz="2000" b="1" dirty="0">
                 <a:solidFill>
                   <a:srgbClr val="FFFFFF"/>
                 </a:solidFill>
                 <a:latin typeface="Montserrat"/>
               </a:rPr>
-              <a:t>Oferta</a:t>
+              <a:t>Município</a:t>
             </a:r>
           </a:p>
         </p:txBody>
@@ -22351,8 +22766,8 @@
         </p:nvSpPr>
         <p:spPr>
           <a:xfrm>
-            <a:off x="3264408" y="3218688"/>
-            <a:ext cx="8622792" cy="960120"/>
+            <a:off x="2715768" y="4059936"/>
+            <a:ext cx="9171432" cy="1380744"/>
           </a:xfrm>
           <a:prstGeom prst="roundRect">
             <a:avLst>
@@ -22376,7 +22791,621 @@
           <a:p>
             <a:pPr marL="0" indent="0" algn="l">
               <a:lnSpc>
+                <a:spcPct val="102000"/>
+              </a:lnSpc>
+              <a:spcBef>
+                <a:spcPts val="0"/>
+              </a:spcBef>
+              <a:spcAft>
+                <a:spcPts val="0"/>
+              </a:spcAft>
+              <a:buNone/>
+            </a:pPr>
+            <a:r>
+              <a:rPr lang="pt-BR" sz="2000" b="0" dirty="0">
+                <a:solidFill>
+                  <a:srgbClr val="3A3A3A"/>
+                </a:solidFill>
+                <a:latin typeface="Montserrat"/>
+              </a:rPr>
+              <a:t>o efeito sobre os especialistas do município ainda está em análise</a:t>
+            </a:r>
+          </a:p>
+        </p:txBody>
+      </p:sp>
+      <p:sp>
+        <p:nvSpPr>
+          <p:cNvPr id="108" name="Fontes"/>
+          <p:cNvSpPr txBox="1"/>
+          <p:nvPr/>
+        </p:nvSpPr>
+        <p:spPr>
+          <a:xfrm>
+            <a:off x="292608" y="6181344"/>
+            <a:ext cx="11594592" cy="274320"/>
+          </a:xfrm>
+          <a:prstGeom prst="rect">
+            <a:avLst/>
+          </a:prstGeom>
+          <a:noFill/>
+          <a:ln>
+            <a:noFill/>
+          </a:ln>
+        </p:spPr>
+        <p:txBody>
+          <a:bodyPr wrap="square" lIns="0" tIns="0" rIns="0" bIns="0" rtlCol="0" anchor="b">
+            <a:noAutofit/>
+          </a:bodyPr>
+          <a:lstStyle/>
+          <a:p>
+            <a:pPr marL="0" indent="0" algn="l">
+              <a:lnSpc>
+                <a:spcPct val="95000"/>
+              </a:lnSpc>
+              <a:spcBef>
+                <a:spcPts val="0"/>
+              </a:spcBef>
+              <a:spcAft>
+                <a:spcPts val="0"/>
+              </a:spcAft>
+              <a:buNone/>
+            </a:pPr>
+            <a:r>
+              <a:rPr lang="pt-BR" sz="800" b="1" dirty="0">
+                <a:solidFill>
+                  <a:srgbClr val="6B6B6B"/>
+                </a:solidFill>
+                <a:latin typeface="Montserrat"/>
+              </a:rPr>
+              <a:t>Fontes: </a:t>
+            </a:r>
+            <a:r>
+              <a:rPr lang="pt-BR" sz="800" b="0" dirty="0">
+                <a:solidFill>
+                  <a:srgbClr val="6B6B6B"/>
+                </a:solidFill>
+                <a:latin typeface="Montserrat"/>
+              </a:rPr>
+              <a:t>output/rdd_bolsa/S57_resumo.json (P4, doc 57d).</a:t>
+            </a:r>
+          </a:p>
+        </p:txBody>
+      </p:sp>
+    </p:spTree>
+  </p:cSld>
+  <p:clrMapOvr>
+    <a:masterClrMapping/>
+  </p:clrMapOvr>
+</p:sld>
+</file>
+
+<file path=ppt/slides/slide49.xml><?xml version="1.0" encoding="utf-8"?>
+<p:sld xmlns:a="http://schemas.openxmlformats.org/drawingml/2006/main" xmlns:r="http://schemas.openxmlformats.org/officeDocument/2006/relationships" xmlns:p="http://schemas.openxmlformats.org/presentationml/2006/main">
+  <p:cSld>
+    <p:spTree>
+      <p:nvGrpSpPr>
+        <p:cNvPr id="1" name=""/>
+        <p:cNvGrpSpPr/>
+        <p:nvPr/>
+      </p:nvGrpSpPr>
+      <p:grpSpPr>
+        <a:xfrm>
+          <a:off x="0" y="0"/>
+          <a:ext cx="0" cy="0"/>
+          <a:chOff x="0" y="0"/>
+          <a:chExt cx="0" cy="0"/>
+        </a:xfrm>
+      </p:grpSpPr>
+      <p:sp>
+        <p:nvSpPr>
+          <p:cNvPr id="2" name="Título"/>
+          <p:cNvSpPr>
+            <a:spLocks noGrp="1"/>
+          </p:cNvSpPr>
+          <p:nvPr>
+            <p:ph type="title"/>
+          </p:nvPr>
+        </p:nvSpPr>
+        <p:spPr/>
+        <p:txBody>
+          <a:bodyPr>
+            <a:normAutofit/>
+          </a:bodyPr>
+          <a:lstStyle/>
+          <a:p>
+            <a:pPr marL="0" indent="0" algn="l">
+              <a:lnSpc>
+                <a:spcPct val="104000"/>
+              </a:lnSpc>
+              <a:spcAft>
+                <a:spcPts val="0"/>
+              </a:spcAft>
+              <a:buNone/>
+            </a:pPr>
+            <a:r>
+              <a:rPr lang="pt-BR" sz="2400" b="1" dirty="0">
+                <a:solidFill>
+                  <a:srgbClr val="FFFFFF"/>
+                </a:solidFill>
+                <a:latin typeface="Montserrat"/>
+              </a:rPr>
+              <a:t>A bolsa muda a escolha, não o preenchimento</a:t>
+            </a:r>
+          </a:p>
+        </p:txBody>
+      </p:sp>
+      <p:sp>
+        <p:nvSpPr>
+          <p:cNvPr id="3" name="Número da página"/>
+          <p:cNvSpPr>
+            <a:spLocks noGrp="1"/>
+          </p:cNvSpPr>
+          <p:nvPr>
+            <p:ph type="body" sz="quarter" idx="18"/>
+          </p:nvPr>
+        </p:nvSpPr>
+        <p:spPr>
+          <a:xfrm>
+            <a:off x="11706744" y="6457042"/>
+            <a:ext cx="492080" cy="400640"/>
+          </a:xfrm>
+        </p:spPr>
+        <p:txBody>
+          <a:bodyPr anchor="ctr">
+            <a:normAutofit/>
+          </a:bodyPr>
+          <a:lstStyle/>
+          <a:p>
+            <a:pPr algn="ctr"/>
+            <a:fld id="{B1A5E0C2-5F3A-4C7E-9D11-7A2E6C0F4B01}" type="slidenum">
+              <a:rPr lang="pt-BR" sz="1400" b="1">
+                <a:solidFill>
+                  <a:srgbClr val="BFBFBF"/>
+                </a:solidFill>
+                <a:latin typeface="Montserrat"/>
+              </a:rPr>
+              <a:t>‹#›</a:t>
+            </a:fld>
+            <a:endParaRPr lang="pt-BR" sz="1400" b="1">
+              <a:solidFill>
+                <a:srgbClr val="BFBFBF"/>
+              </a:solidFill>
+            </a:endParaRPr>
+          </a:p>
+        </p:txBody>
+      </p:sp>
+      <p:sp>
+        <p:nvSpPr>
+          <p:cNvPr id="4" name="Navegação do rodapé"/>
+          <p:cNvSpPr txBox="1"/>
+          <p:nvPr/>
+        </p:nvSpPr>
+        <p:spPr>
+          <a:xfrm>
+            <a:off x="196860" y="6639248"/>
+            <a:ext cx="9223026" cy="246221"/>
+          </a:xfrm>
+          <a:prstGeom prst="rect">
+            <a:avLst/>
+          </a:prstGeom>
+          <a:noFill/>
+        </p:spPr>
+        <p:txBody>
+          <a:bodyPr wrap="square" rtlCol="0">
+            <a:spAutoFit/>
+          </a:bodyPr>
+          <a:lstStyle/>
+          <a:p>
+            <a:r>
+              <a:rPr lang="pt-BR" sz="1000" dirty="0">
+                <a:latin typeface="Montserrat"/>
+              </a:rPr>
+              <a:t>Motivação  |  </a:t>
+            </a:r>
+            <a:r>
+              <a:rPr lang="pt-BR" sz="1000" dirty="0">
+                <a:latin typeface="Montserrat"/>
+              </a:rPr>
+              <a:t>Pergunta  |  </a:t>
+            </a:r>
+            <a:r>
+              <a:rPr lang="pt-BR" sz="1000" dirty="0">
+                <a:latin typeface="Montserrat"/>
+              </a:rPr>
+              <a:t>Literatura  |  </a:t>
+            </a:r>
+            <a:r>
+              <a:rPr lang="pt-BR" sz="1000" dirty="0">
+                <a:latin typeface="Montserrat"/>
+              </a:rPr>
+              <a:t>Hipótese  |  </a:t>
+            </a:r>
+            <a:r>
+              <a:rPr lang="pt-BR" sz="1000" dirty="0">
+                <a:latin typeface="Montserrat"/>
+              </a:rPr>
+              <a:t>Base de Dados  |  </a:t>
+            </a:r>
+            <a:r>
+              <a:rPr lang="pt-BR" sz="1000" dirty="0">
+                <a:latin typeface="Montserrat"/>
+              </a:rPr>
+              <a:t>Metodologia  |  </a:t>
+            </a:r>
+            <a:r>
+              <a:rPr lang="pt-BR" sz="1000" b="1" dirty="0">
+                <a:solidFill>
+                  <a:srgbClr val="114719"/>
+                </a:solidFill>
+                <a:latin typeface="Montserrat"/>
+              </a:rPr>
+              <a:t>Resultados</a:t>
+            </a:r>
+            <a:r>
+              <a:rPr lang="pt-BR" sz="1000" dirty="0">
+                <a:latin typeface="Montserrat"/>
+              </a:rPr>
+              <a:t/>
+            </a:r>
+          </a:p>
+        </p:txBody>
+      </p:sp>
+      <p:sp>
+        <p:nvSpPr>
+          <p:cNvPr id="101" name="Cautela"/>
+          <p:cNvSpPr/>
+          <p:nvPr/>
+        </p:nvSpPr>
+        <p:spPr>
+          <a:xfrm>
+            <a:off x="292608" y="5669280"/>
+            <a:ext cx="11594592" cy="420624"/>
+          </a:xfrm>
+          <a:prstGeom prst="roundRect">
+            <a:avLst>
+              <a:gd name="adj" fmla="val 12000"/>
+            </a:avLst>
+          </a:prstGeom>
+          <a:solidFill>
+            <a:srgbClr val="E7F1EA"/>
+          </a:solidFill>
+          <a:ln>
+            <a:noFill/>
+          </a:ln>
+        </p:spPr>
+        <p:txBody>
+          <a:bodyPr wrap="square" lIns="164592" tIns="18288" rIns="164592" bIns="18288" rtlCol="0" anchor="ctr">
+            <a:noAutofit/>
+          </a:bodyPr>
+          <a:lstStyle/>
+          <a:p>
+            <a:pPr marL="0" indent="0" algn="l">
+              <a:lnSpc>
                 <a:spcPct val="100000"/>
+              </a:lnSpc>
+              <a:spcBef>
+                <a:spcPts val="0"/>
+              </a:spcBef>
+              <a:spcAft>
+                <a:spcPts val="0"/>
+              </a:spcAft>
+              <a:buNone/>
+            </a:pPr>
+            <a:r>
+              <a:rPr lang="pt-BR" sz="1800" b="1" dirty="0">
+                <a:solidFill>
+                  <a:srgbClr val="114719"/>
+                </a:solidFill>
+                <a:latin typeface="Montserrat"/>
+              </a:rPr>
+              <a:t>Pacote do corte; inconclusivo não é efeito zero; vínculo não é presença.</a:t>
+            </a:r>
+          </a:p>
+        </p:txBody>
+      </p:sp>
+      <p:sp>
+        <p:nvSpPr>
+          <p:cNvPr id="102" name="Rótulo"/>
+          <p:cNvSpPr/>
+          <p:nvPr/>
+        </p:nvSpPr>
+        <p:spPr>
+          <a:xfrm>
+            <a:off x="292608" y="896112"/>
+            <a:ext cx="2834640" cy="1371600"/>
+          </a:xfrm>
+          <a:prstGeom prst="roundRect">
+            <a:avLst>
+              <a:gd name="adj" fmla="val 10000"/>
+            </a:avLst>
+          </a:prstGeom>
+          <a:solidFill>
+            <a:srgbClr val="114719"/>
+          </a:solidFill>
+          <a:ln>
+            <a:noFill/>
+          </a:ln>
+        </p:spPr>
+        <p:txBody>
+          <a:bodyPr wrap="square" lIns="73152" tIns="45720" rIns="73152" bIns="45720" rtlCol="0" anchor="ctr">
+            <a:noAutofit/>
+          </a:bodyPr>
+          <a:lstStyle/>
+          <a:p>
+            <a:pPr marL="0" indent="0" algn="ctr">
+              <a:lnSpc>
+                <a:spcPct val="100000"/>
+              </a:lnSpc>
+              <a:spcBef>
+                <a:spcPts val="0"/>
+              </a:spcBef>
+              <a:spcAft>
+                <a:spcPts val="0"/>
+              </a:spcAft>
+              <a:buNone/>
+            </a:pPr>
+            <a:r>
+              <a:rPr lang="pt-BR" sz="2400" b="1" dirty="0">
+                <a:solidFill>
+                  <a:srgbClr val="FFFFFF"/>
+                </a:solidFill>
+                <a:latin typeface="Montserrat"/>
+              </a:rPr>
+              <a:t>Escolha</a:t>
+            </a:r>
+          </a:p>
+        </p:txBody>
+      </p:sp>
+      <p:sp>
+        <p:nvSpPr>
+          <p:cNvPr id="103" name="Item"/>
+          <p:cNvSpPr/>
+          <p:nvPr/>
+        </p:nvSpPr>
+        <p:spPr>
+          <a:xfrm>
+            <a:off x="3264408" y="896112"/>
+            <a:ext cx="8622792" cy="1371600"/>
+          </a:xfrm>
+          <a:prstGeom prst="roundRect">
+            <a:avLst>
+              <a:gd name="adj" fmla="val 6000"/>
+            </a:avLst>
+          </a:prstGeom>
+          <a:solidFill>
+            <a:srgbClr val="F4F8F5"/>
+          </a:solidFill>
+          <a:ln w="12700">
+            <a:solidFill>
+              <a:srgbClr val="056429"/>
+            </a:solidFill>
+          </a:ln>
+        </p:spPr>
+        <p:txBody>
+          <a:bodyPr wrap="square" lIns="228600" tIns="36576" rIns="228600" bIns="36576" rtlCol="0" anchor="ctr">
+            <a:noAutofit/>
+          </a:bodyPr>
+          <a:lstStyle/>
+          <a:p>
+            <a:pPr marL="0" indent="0" algn="l">
+              <a:lnSpc>
+                <a:spcPct val="102000"/>
+              </a:lnSpc>
+              <a:spcBef>
+                <a:spcPts val="0"/>
+              </a:spcBef>
+              <a:spcAft>
+                <a:spcPts val="0"/>
+              </a:spcAft>
+              <a:buNone/>
+            </a:pPr>
+            <a:r>
+              <a:rPr lang="pt-BR" sz="2400" b="0" dirty="0">
+                <a:solidFill>
+                  <a:srgbClr val="3A3A3A"/>
+                </a:solidFill>
+                <a:latin typeface="Montserrat"/>
+              </a:rPr>
+              <a:t>reordena candidatos entre vagas, só no ciclo 2</a:t>
+            </a:r>
+          </a:p>
+        </p:txBody>
+      </p:sp>
+      <p:sp>
+        <p:nvSpPr>
+          <p:cNvPr id="104" name="Rótulo"/>
+          <p:cNvSpPr/>
+          <p:nvPr/>
+        </p:nvSpPr>
+        <p:spPr>
+          <a:xfrm>
+            <a:off x="292608" y="2468880"/>
+            <a:ext cx="2834640" cy="1371600"/>
+          </a:xfrm>
+          <a:prstGeom prst="roundRect">
+            <a:avLst>
+              <a:gd name="adj" fmla="val 10000"/>
+            </a:avLst>
+          </a:prstGeom>
+          <a:solidFill>
+            <a:srgbClr val="114719"/>
+          </a:solidFill>
+          <a:ln>
+            <a:noFill/>
+          </a:ln>
+        </p:spPr>
+        <p:txBody>
+          <a:bodyPr wrap="square" lIns="73152" tIns="45720" rIns="73152" bIns="45720" rtlCol="0" anchor="ctr">
+            <a:noAutofit/>
+          </a:bodyPr>
+          <a:lstStyle/>
+          <a:p>
+            <a:pPr marL="0" indent="0" algn="ctr">
+              <a:lnSpc>
+                <a:spcPct val="100000"/>
+              </a:lnSpc>
+              <a:spcBef>
+                <a:spcPts val="0"/>
+              </a:spcBef>
+              <a:spcAft>
+                <a:spcPts val="0"/>
+              </a:spcAft>
+              <a:buNone/>
+            </a:pPr>
+            <a:r>
+              <a:rPr lang="pt-BR" sz="2400" b="1" dirty="0">
+                <a:solidFill>
+                  <a:srgbClr val="FFFFFF"/>
+                </a:solidFill>
+                <a:latin typeface="Montserrat"/>
+              </a:rPr>
+              <a:t>Preenchimento</a:t>
+            </a:r>
+          </a:p>
+        </p:txBody>
+      </p:sp>
+      <p:sp>
+        <p:nvSpPr>
+          <p:cNvPr id="105" name="Item"/>
+          <p:cNvSpPr/>
+          <p:nvPr/>
+        </p:nvSpPr>
+        <p:spPr>
+          <a:xfrm>
+            <a:off x="3264408" y="2468880"/>
+            <a:ext cx="8622792" cy="1371600"/>
+          </a:xfrm>
+          <a:prstGeom prst="roundRect">
+            <a:avLst>
+              <a:gd name="adj" fmla="val 6000"/>
+            </a:avLst>
+          </a:prstGeom>
+          <a:solidFill>
+            <a:srgbClr val="F4F8F5"/>
+          </a:solidFill>
+          <a:ln w="12700">
+            <a:solidFill>
+              <a:srgbClr val="056429"/>
+            </a:solidFill>
+          </a:ln>
+        </p:spPr>
+        <p:txBody>
+          <a:bodyPr wrap="square" lIns="228600" tIns="36576" rIns="228600" bIns="36576" rtlCol="0" anchor="ctr">
+            <a:noAutofit/>
+          </a:bodyPr>
+          <a:lstStyle/>
+          <a:p>
+            <a:pPr marL="0" indent="0" algn="l">
+              <a:lnSpc>
+                <a:spcPct val="102000"/>
+              </a:lnSpc>
+              <a:spcBef>
+                <a:spcPts val="0"/>
+              </a:spcBef>
+              <a:spcAft>
+                <a:spcPts val="0"/>
+              </a:spcAft>
+              <a:buNone/>
+            </a:pPr>
+            <a:r>
+              <a:rPr lang="pt-BR" sz="2400" b="0" dirty="0">
+                <a:solidFill>
+                  <a:srgbClr val="3A3A3A"/>
+                </a:solidFill>
+                <a:latin typeface="Montserrat"/>
+              </a:rPr>
+              <a:t>não aumenta em nenhum dos dois cortes</a:t>
+            </a:r>
+          </a:p>
+        </p:txBody>
+      </p:sp>
+      <p:sp>
+        <p:nvSpPr>
+          <p:cNvPr id="106" name="Rótulo"/>
+          <p:cNvSpPr/>
+          <p:nvPr/>
+        </p:nvSpPr>
+        <p:spPr>
+          <a:xfrm>
+            <a:off x="292608" y="4041648"/>
+            <a:ext cx="2834640" cy="1371600"/>
+          </a:xfrm>
+          <a:prstGeom prst="roundRect">
+            <a:avLst>
+              <a:gd name="adj" fmla="val 10000"/>
+            </a:avLst>
+          </a:prstGeom>
+          <a:solidFill>
+            <a:srgbClr val="114719"/>
+          </a:solidFill>
+          <a:ln>
+            <a:noFill/>
+          </a:ln>
+        </p:spPr>
+        <p:txBody>
+          <a:bodyPr wrap="square" lIns="73152" tIns="45720" rIns="73152" bIns="45720" rtlCol="0" anchor="ctr">
+            <a:noAutofit/>
+          </a:bodyPr>
+          <a:lstStyle/>
+          <a:p>
+            <a:pPr marL="0" indent="0" algn="ctr">
+              <a:lnSpc>
+                <a:spcPct val="100000"/>
+              </a:lnSpc>
+              <a:spcBef>
+                <a:spcPts val="0"/>
+              </a:spcBef>
+              <a:spcAft>
+                <a:spcPts val="0"/>
+              </a:spcAft>
+              <a:buNone/>
+            </a:pPr>
+            <a:r>
+              <a:rPr lang="pt-BR" sz="2400" b="1" dirty="0">
+                <a:solidFill>
+                  <a:srgbClr val="FFFFFF"/>
+                </a:solidFill>
+                <a:latin typeface="Montserrat"/>
+              </a:rPr>
+              <a:t>Oferta</a:t>
+            </a:r>
+          </a:p>
+        </p:txBody>
+      </p:sp>
+      <p:sp>
+        <p:nvSpPr>
+          <p:cNvPr id="107" name="Item"/>
+          <p:cNvSpPr/>
+          <p:nvPr/>
+        </p:nvSpPr>
+        <p:spPr>
+          <a:xfrm>
+            <a:off x="3264408" y="4041648"/>
+            <a:ext cx="8622792" cy="1371600"/>
+          </a:xfrm>
+          <a:prstGeom prst="roundRect">
+            <a:avLst>
+              <a:gd name="adj" fmla="val 6000"/>
+            </a:avLst>
+          </a:prstGeom>
+          <a:solidFill>
+            <a:srgbClr val="F4F8F5"/>
+          </a:solidFill>
+          <a:ln w="12700">
+            <a:solidFill>
+              <a:srgbClr val="056429"/>
+            </a:solidFill>
+          </a:ln>
+        </p:spPr>
+        <p:txBody>
+          <a:bodyPr wrap="square" lIns="228600" tIns="36576" rIns="228600" bIns="36576" rtlCol="0" anchor="ctr">
+            <a:noAutofit/>
+          </a:bodyPr>
+          <a:lstStyle/>
+          <a:p>
+            <a:pPr marL="0" indent="0" algn="l">
+              <a:lnSpc>
+                <a:spcPct val="102000"/>
               </a:lnSpc>
               <a:spcBef>
                 <a:spcPts val="0"/>

--- a/output/apresentacao_banca2/deck_banca2_curto.pptx
+++ b/output/apresentacao_banca2/deck_banca2_curto.pptx
@@ -9097,7 +9097,7 @@
           <a:p>
             <a:r>
               <a:rPr lang="pt-BR" dirty="0"/>
-              <a:t>PRELIMINAR: diagnóstico do protocolo 61, ainda em auditoria; descreve o que acompanha a queda, não a causa, e é pós-resultado. Q1 é N1 com controle; Q2, a taxa por vaga oferecida; Q3, a célula aberta preenchida. Sem reta nem efeitos fixos, 33,3% das células da janela são preenchidas abaixo de 0,300 e 33,5% acima. Acima do corte, a parte das células só de cadastro reserva é +15,4 p.p. maior [+2,1; +28,6], o índice de curso é −4,5 p.p. [−7,1; −2,0], e a chance de a célula ter candidato de 1ª opção muda −10,8 p.p. [−28,2; +6,7], com IC que contém zero. Igualando a composição, Q2 vai a −5,1 p.p., 32% do original; igualando a concorrência, a −4,3 p.p., 27%; igualando quem teve candidato de 1ª opção, Q1 vai a −0,49, 34%. Acaso: com os 3 cortes falsos do protocolo, o p por posto é 0,250, o menor possível; numa grade maior, fora do protocolo, 0,031. O corte junta a bolsa com outras regras federais.</a:t>
+              <a:t>Diagnóstico do protocolo 61 (doc 57l), auditado (auditoria 33, aprovado com correções de texto): descritivo e pós-resultado. Q1 é N1 com controle; Q2, a taxa por vaga oferecida; Q3, a célula aberta preenchida. Nas médias da janela, sem reta nem efeitos fixos, 33,3% das células são preenchidas abaixo de 0,300 e 33,5% acima. Do lado de cima: índice de curso −4,5 p.p. [−7,1; −2,0] (cursos que preenchem pouco em qualquer lugar); +10,6 [+3,5; +17,8] células do mesmo curso na mesma UF; no ciclo 2, +28,4 p.p. [+8,3; +48,4] de células só de reserva. Que menos células tiveram candidato de 1ª opção é estimativa imprecisa: −10,8 p.p. [−28,2; +6,7]. Igualando a composição, Q2 vai a −5,1 p.p., 32% do original; a concorrência, Q2 a −4,3 p.p., 27%; quem teve candidato de 1ª opção, Q1 a −0,49, 34%; nenhum fator reduz a queda à metade nas três medidas. Acaso: com os 3 cortes falsos do protocolo, o p por posto é 0,250, o menor possível; numa grade maior, fora do protocolo, 0,031. Esses fatores se formam depois do anúncio da faixa: descrevem o que acompanha a queda, não a causa. Cautela: Nada disso mostra que a bolsa reduz o preenchimento: o corte junta a bolsa com outras regras.</a:t>
             </a:r>
           </a:p>
         </p:txBody>
@@ -18311,7 +18311,7 @@
       </p:sp>
       <p:pic>
         <p:nvPicPr>
-          <p:cNvPr id="101" name="Figura" descr="Diagnóstico do protocolo 61 (preliminar): quanto da queda em 0,300 sobra ao igualar cada fator entre os lados do corte, para Q1, Q2 e Q3, com IC 95%"/>
+          <p:cNvPr id="101" name="Figura" descr="Diagnóstico do protocolo 61: quanto da queda em 0,300 sobra ao igualar cada fator entre os lados do corte, para Q1, Q2 e Q3, com IC 95%"/>
           <p:cNvPicPr>
             <a:picLocks noChangeAspect="1"/>
           </p:cNvPicPr>
@@ -18325,8 +18325,8 @@
         </p:blipFill>
         <p:spPr>
           <a:xfrm>
-            <a:off x="292608" y="1542593"/>
-            <a:ext cx="6839712" cy="3077870"/>
+            <a:off x="292608" y="1447749"/>
+            <a:ext cx="6748272" cy="3036722"/>
           </a:xfrm>
           <a:prstGeom prst="rect">
             <a:avLst/>
@@ -18340,34 +18340,34 @@
       </p:pic>
       <p:sp>
         <p:nvSpPr>
-          <p:cNvPr id="102" name="Selo"/>
+          <p:cNvPr id="102" name="Cautela"/>
           <p:cNvSpPr/>
           <p:nvPr/>
         </p:nvSpPr>
         <p:spPr>
           <a:xfrm>
-            <a:off x="292608" y="4785055"/>
-            <a:ext cx="6839712" cy="566928"/>
+            <a:off x="292608" y="4649064"/>
+            <a:ext cx="6748272" cy="797763"/>
           </a:xfrm>
           <a:prstGeom prst="roundRect">
             <a:avLst>
-              <a:gd name="adj" fmla="val 18000"/>
+              <a:gd name="adj" fmla="val 8000"/>
             </a:avLst>
           </a:prstGeom>
           <a:solidFill>
-            <a:srgbClr val="B3261E"/>
+            <a:srgbClr val="E7F1EA"/>
           </a:solidFill>
           <a:ln>
             <a:noFill/>
           </a:ln>
         </p:spPr>
         <p:txBody>
-          <a:bodyPr wrap="square" lIns="137160" tIns="27432" rIns="137160" bIns="27432" rtlCol="0" anchor="ctr">
+          <a:bodyPr wrap="square" lIns="182880" tIns="54864" rIns="182880" bIns="54864" rtlCol="0" anchor="ctr">
             <a:noAutofit/>
           </a:bodyPr>
           <a:lstStyle/>
           <a:p>
-            <a:pPr marL="0" indent="0" algn="ctr">
+            <a:pPr marL="0" indent="0" algn="l">
               <a:lnSpc>
                 <a:spcPct val="100000"/>
               </a:lnSpc>
@@ -18380,13 +18380,13 @@
               <a:buNone/>
             </a:pPr>
             <a:r>
-              <a:rPr lang="pt-BR" sz="2000" b="1" dirty="0">
+              <a:rPr lang="pt-BR" sz="1600" b="1" dirty="0">
                 <a:solidFill>
-                  <a:srgbClr val="FFFFFF"/>
+                  <a:srgbClr val="114719"/>
                 </a:solidFill>
                 <a:latin typeface="Montserrat"/>
               </a:rPr>
-              <a:t>PRELIMINAR: diagnóstico em auditoria</a:t>
+              <a:t>Nada disso mostra que a bolsa reduz o preenchimento: o corte junta a bolsa com outras regras.</a:t>
             </a:r>
           </a:p>
         </p:txBody>
@@ -18399,8 +18399,8 @@
         </p:nvSpPr>
         <p:spPr>
           <a:xfrm>
-            <a:off x="7406640" y="804672"/>
-            <a:ext cx="4480560" cy="1652016"/>
+            <a:off x="7315200" y="804672"/>
+            <a:ext cx="4572000" cy="2280310"/>
           </a:xfrm>
           <a:prstGeom prst="roundRect">
             <a:avLst>
@@ -18441,7 +18441,7 @@
                 </a:solidFill>
                 <a:latin typeface="Montserrat"/>
               </a:rPr>
-              <a:t>Sem a reta:</a:t>
+              <a:t>É a estimativa no corte, não os dados:</a:t>
             </a:r>
             <a:r>
               <a:rPr lang="pt-BR" sz="1600" b="0" dirty="0">
@@ -18450,7 +18450,7 @@
                 </a:solidFill>
                 <a:latin typeface="Montserrat"/>
               </a:rPr>
-              <a:t> a fração preenchida é praticamente igual dos dois lados (33,3% e 33,5%); a queda aparece quando a reta é levada até o corte e depende de poucos municípios.</a:t>
+              <a:t> nas médias da janela, 33,3% das células são preenchidas abaixo e 33,5% acima; a queda vem da reta levada até o corte, com poucos municípios. O acaso não está descartado.</a:t>
             </a:r>
           </a:p>
         </p:txBody>
@@ -18463,8 +18463,8 @@
         </p:nvSpPr>
         <p:spPr>
           <a:xfrm>
-            <a:off x="7406640" y="2621280"/>
-            <a:ext cx="4480560" cy="2212035"/>
+            <a:off x="7315200" y="3249574"/>
+            <a:ext cx="4572000" cy="2840330"/>
           </a:xfrm>
           <a:prstGeom prst="roundRect">
             <a:avLst>
@@ -18505,7 +18505,7 @@
                 </a:solidFill>
                 <a:latin typeface="Montserrat"/>
               </a:rPr>
-              <a:t>O que acompanha a queda:</a:t>
+              <a:t>As vagas do lado de cima eram diferentes:</a:t>
             </a:r>
             <a:r>
               <a:rPr lang="pt-BR" sz="1600" b="0" dirty="0">
@@ -18514,78 +18514,14 @@
                 </a:solidFill>
                 <a:latin typeface="Montserrat"/>
               </a:rPr>
-              <a:t> mais células só de cadastro reserva, cursos que preenchem pouco em qualquer lugar, menos células escolhidas em 1º lugar. Igualar esses fatores corta a queda pela metade ou mais em parte das medidas.</a:t>
+              <a:t> cursos que preenchem pouco em qualquer lugar, mais células do mesmo curso na mesma UF disputando candidatos e, no ciclo 2, mais células só de reserva. Igualando esses fatores, a queda diminui pela metade ou mais em parte das medidas, mas nenhum fator faz isso nas três.</a:t>
             </a:r>
           </a:p>
         </p:txBody>
       </p:sp>
       <p:sp>
         <p:nvSpPr>
-          <p:cNvPr id="105" name="Linha"/>
-          <p:cNvSpPr/>
-          <p:nvPr/>
-        </p:nvSpPr>
-        <p:spPr>
-          <a:xfrm>
-            <a:off x="7406640" y="4997907"/>
-            <a:ext cx="4480560" cy="1091997"/>
-          </a:xfrm>
-          <a:prstGeom prst="roundRect">
-            <a:avLst>
-              <a:gd name="adj" fmla="val 6000"/>
-            </a:avLst>
-          </a:prstGeom>
-          <a:solidFill>
-            <a:srgbClr val="F4F8F5"/>
-          </a:solidFill>
-          <a:ln w="12700">
-            <a:solidFill>
-              <a:srgbClr val="056429"/>
-            </a:solidFill>
-          </a:ln>
-        </p:spPr>
-        <p:txBody>
-          <a:bodyPr wrap="square" lIns="182880" tIns="54864" rIns="182880" bIns="54864" rtlCol="0" anchor="ctr">
-            <a:noAutofit/>
-          </a:bodyPr>
-          <a:lstStyle/>
-          <a:p>
-            <a:pPr marL="0" indent="0" algn="l">
-              <a:lnSpc>
-                <a:spcPct val="100000"/>
-              </a:lnSpc>
-              <a:spcBef>
-                <a:spcPts val="0"/>
-              </a:spcBef>
-              <a:spcAft>
-                <a:spcPts val="0"/>
-              </a:spcAft>
-              <a:buNone/>
-            </a:pPr>
-            <a:r>
-              <a:rPr lang="pt-BR" sz="1600" b="1" dirty="0">
-                <a:solidFill>
-                  <a:srgbClr val="114719"/>
-                </a:solidFill>
-                <a:latin typeface="Montserrat"/>
-              </a:rPr>
-              <a:t>Leitura:</a:t>
-            </a:r>
-            <a:r>
-              <a:rPr lang="pt-BR" sz="1600" b="0" dirty="0">
-                <a:solidFill>
-                  <a:srgbClr val="3A3A3A"/>
-                </a:solidFill>
-                <a:latin typeface="Montserrat"/>
-              </a:rPr>
-              <a:t> acaso não está descartado; nada mostra que a bolsa reduz o preenchimento.</a:t>
-            </a:r>
-          </a:p>
-        </p:txBody>
-      </p:sp>
-      <p:sp>
-        <p:nvSpPr>
-          <p:cNvPr id="106" name="Fontes"/>
+          <p:cNvPr id="105" name="Fontes"/>
           <p:cNvSpPr txBox="1"/>
           <p:nvPr/>
         </p:nvSpPr>
@@ -18636,7 +18572,7 @@
                 </a:solidFill>
                 <a:latin typeface="Montserrat"/>
               </a:rPr>
-              <a:t>output/rdd_bolsa/DQ_estimativas.csv, DQ_resumo.json e DQ_figuras/DQ_quanto_da_queda.png (protocolo 61; doc 57l, em auditoria); figura sem redesenho, conferida pelo hash.</a:t>
+              <a:t>output/rdd_bolsa/DQ_estimativas.csv, DQ_resumo.json e DQ_figuras/DQ_quanto_da_queda.png (protocolo 61; doc 57l; auditoria 33, §8); figura usada sem redesenho, conferida pelo hash.</a:t>
             </a:r>
           </a:p>
         </p:txBody>
@@ -19977,8 +19913,8 @@
         </p:blipFill>
         <p:spPr>
           <a:xfrm>
-            <a:off x="292608" y="1190407"/>
-            <a:ext cx="8028432" cy="4513763"/>
+            <a:off x="292608" y="804672"/>
+            <a:ext cx="7688911" cy="4322877"/>
           </a:xfrm>
           <a:prstGeom prst="rect">
             <a:avLst/>
@@ -19992,14 +19928,67 @@
       </p:pic>
       <p:sp>
         <p:nvSpPr>
-          <p:cNvPr id="102" name="Linha"/>
+          <p:cNvPr id="102" name="Cautela"/>
           <p:cNvSpPr/>
           <p:nvPr/>
         </p:nvSpPr>
         <p:spPr>
           <a:xfrm>
-            <a:off x="8595360" y="804672"/>
-            <a:ext cx="3291840" cy="1745353"/>
+            <a:off x="292608" y="5292141"/>
+            <a:ext cx="7688911" cy="797763"/>
+          </a:xfrm>
+          <a:prstGeom prst="roundRect">
+            <a:avLst>
+              <a:gd name="adj" fmla="val 8000"/>
+            </a:avLst>
+          </a:prstGeom>
+          <a:solidFill>
+            <a:srgbClr val="E7F1EA"/>
+          </a:solidFill>
+          <a:ln>
+            <a:noFill/>
+          </a:ln>
+        </p:spPr>
+        <p:txBody>
+          <a:bodyPr wrap="square" lIns="182880" tIns="54864" rIns="182880" bIns="54864" rtlCol="0" anchor="ctr">
+            <a:noAutofit/>
+          </a:bodyPr>
+          <a:lstStyle/>
+          <a:p>
+            <a:pPr marL="0" indent="0" algn="l">
+              <a:lnSpc>
+                <a:spcPct val="100000"/>
+              </a:lnSpc>
+              <a:spcBef>
+                <a:spcPts val="0"/>
+              </a:spcBef>
+              <a:spcAft>
+                <a:spcPts val="0"/>
+              </a:spcAft>
+              <a:buNone/>
+            </a:pPr>
+            <a:r>
+              <a:rPr lang="pt-BR" sz="1600" b="1" dirty="0">
+                <a:solidFill>
+                  <a:srgbClr val="114719"/>
+                </a:solidFill>
+                <a:latin typeface="Montserrat"/>
+              </a:rPr>
+              <a:t>Pós-resultado; o peso da origem é preferência revelada, não efeito causal.</a:t>
+            </a:r>
+          </a:p>
+        </p:txBody>
+      </p:sp>
+      <p:sp>
+        <p:nvSpPr>
+          <p:cNvPr id="103" name="Linha"/>
+          <p:cNvSpPr/>
+          <p:nvPr/>
+        </p:nvSpPr>
+        <p:spPr>
+          <a:xfrm>
+            <a:off x="8255839" y="804672"/>
+            <a:ext cx="3631361" cy="2186432"/>
           </a:xfrm>
           <a:prstGeom prst="roundRect">
             <a:avLst>
@@ -20056,14 +20045,14 @@
       </p:sp>
       <p:sp>
         <p:nvSpPr>
-          <p:cNvPr id="103" name="Linha"/>
+          <p:cNvPr id="104" name="Linha"/>
           <p:cNvSpPr/>
           <p:nvPr/>
         </p:nvSpPr>
         <p:spPr>
           <a:xfrm>
-            <a:off x="8595360" y="2714617"/>
-            <a:ext cx="3291840" cy="1745353"/>
+            <a:off x="8255839" y="3155696"/>
+            <a:ext cx="3631361" cy="2186432"/>
           </a:xfrm>
           <a:prstGeom prst="roundRect">
             <a:avLst>
@@ -20114,59 +20103,6 @@
                 <a:latin typeface="Montserrat"/>
               </a:rPr>
               <a:t> 0,42 [−0,03; 0,87]; a mesma UF de origem, 2,40 [2,28; 2,53]; a diferença, 1,98 [1,56; 2,40].</a:t>
-            </a:r>
-          </a:p>
-        </p:txBody>
-      </p:sp>
-      <p:sp>
-        <p:nvSpPr>
-          <p:cNvPr id="104" name="Cautela"/>
-          <p:cNvSpPr/>
-          <p:nvPr/>
-        </p:nvSpPr>
-        <p:spPr>
-          <a:xfrm>
-            <a:off x="8595360" y="4624561"/>
-            <a:ext cx="3291840" cy="1465343"/>
-          </a:xfrm>
-          <a:prstGeom prst="roundRect">
-            <a:avLst>
-              <a:gd name="adj" fmla="val 8000"/>
-            </a:avLst>
-          </a:prstGeom>
-          <a:solidFill>
-            <a:srgbClr val="E7F1EA"/>
-          </a:solidFill>
-          <a:ln>
-            <a:noFill/>
-          </a:ln>
-        </p:spPr>
-        <p:txBody>
-          <a:bodyPr wrap="square" lIns="182880" tIns="54864" rIns="182880" bIns="54864" rtlCol="0" anchor="ctr">
-            <a:noAutofit/>
-          </a:bodyPr>
-          <a:lstStyle/>
-          <a:p>
-            <a:pPr marL="0" indent="0" algn="l">
-              <a:lnSpc>
-                <a:spcPct val="100000"/>
-              </a:lnSpc>
-              <a:spcBef>
-                <a:spcPts val="0"/>
-              </a:spcBef>
-              <a:spcAft>
-                <a:spcPts val="0"/>
-              </a:spcAft>
-              <a:buNone/>
-            </a:pPr>
-            <a:r>
-              <a:rPr lang="pt-BR" sz="1600" b="1" dirty="0">
-                <a:solidFill>
-                  <a:srgbClr val="114719"/>
-                </a:solidFill>
-                <a:latin typeface="Montserrat"/>
-              </a:rPr>
-              <a:t>Pós-resultado; o peso da origem é preferência revelada, não efeito causal.</a:t>
             </a:r>
           </a:p>
         </p:txBody>
@@ -22069,8 +22005,8 @@
         </p:blipFill>
         <p:spPr>
           <a:xfrm>
-            <a:off x="292608" y="1031635"/>
-            <a:ext cx="8211312" cy="4831307"/>
+            <a:off x="292608" y="804672"/>
+            <a:ext cx="7823088" cy="4602886"/>
           </a:xfrm>
           <a:prstGeom prst="rect">
             <a:avLst/>
@@ -22084,14 +22020,67 @@
       </p:pic>
       <p:sp>
         <p:nvSpPr>
-          <p:cNvPr id="102" name="Linha"/>
+          <p:cNvPr id="102" name="Cautela"/>
           <p:cNvSpPr/>
           <p:nvPr/>
         </p:nvSpPr>
         <p:spPr>
           <a:xfrm>
-            <a:off x="8778240" y="804672"/>
-            <a:ext cx="3108960" cy="1906422"/>
+            <a:off x="292608" y="5572150"/>
+            <a:ext cx="7823088" cy="517754"/>
+          </a:xfrm>
+          <a:prstGeom prst="roundRect">
+            <a:avLst>
+              <a:gd name="adj" fmla="val 8000"/>
+            </a:avLst>
+          </a:prstGeom>
+          <a:solidFill>
+            <a:srgbClr val="E7F1EA"/>
+          </a:solidFill>
+          <a:ln>
+            <a:noFill/>
+          </a:ln>
+        </p:spPr>
+        <p:txBody>
+          <a:bodyPr wrap="square" lIns="182880" tIns="54864" rIns="182880" bIns="54864" rtlCol="0" anchor="ctr">
+            <a:noAutofit/>
+          </a:bodyPr>
+          <a:lstStyle/>
+          <a:p>
+            <a:pPr marL="0" indent="0" algn="l">
+              <a:lnSpc>
+                <a:spcPct val="100000"/>
+              </a:lnSpc>
+              <a:spcBef>
+                <a:spcPts val="0"/>
+              </a:spcBef>
+              <a:spcAft>
+                <a:spcPts val="0"/>
+              </a:spcAft>
+              <a:buNone/>
+            </a:pPr>
+            <a:r>
+              <a:rPr lang="pt-BR" sz="1600" b="1" dirty="0">
+                <a:solidFill>
+                  <a:srgbClr val="114719"/>
+                </a:solidFill>
+                <a:latin typeface="Montserrat"/>
+              </a:rPr>
+              <a:t>Associação, não efeito da bolsa; horas cadastradas não são presença.</a:t>
+            </a:r>
+          </a:p>
+        </p:txBody>
+      </p:sp>
+      <p:sp>
+        <p:nvSpPr>
+          <p:cNvPr id="103" name="Linha"/>
+          <p:cNvSpPr/>
+          <p:nvPr/>
+        </p:nvSpPr>
+        <p:spPr>
+          <a:xfrm>
+            <a:off x="8390016" y="804672"/>
+            <a:ext cx="3497184" cy="1906422"/>
           </a:xfrm>
           <a:prstGeom prst="roundRect">
             <a:avLst>
@@ -22142,59 +22131,6 @@
                 <a:latin typeface="Montserrat"/>
               </a:rPr>
               <a:t> +6,6 h/sem [+5,4; +7,8] depois da entrada, sobretudo no município do posto.</a:t>
-            </a:r>
-          </a:p>
-        </p:txBody>
-      </p:sp>
-      <p:sp>
-        <p:nvSpPr>
-          <p:cNvPr id="103" name="Cautela"/>
-          <p:cNvSpPr/>
-          <p:nvPr/>
-        </p:nvSpPr>
-        <p:spPr>
-          <a:xfrm>
-            <a:off x="8778240" y="2875686"/>
-            <a:ext cx="3108960" cy="1906422"/>
-          </a:xfrm>
-          <a:prstGeom prst="roundRect">
-            <a:avLst>
-              <a:gd name="adj" fmla="val 8000"/>
-            </a:avLst>
-          </a:prstGeom>
-          <a:solidFill>
-            <a:srgbClr val="E7F1EA"/>
-          </a:solidFill>
-          <a:ln>
-            <a:noFill/>
-          </a:ln>
-        </p:spPr>
-        <p:txBody>
-          <a:bodyPr wrap="square" lIns="182880" tIns="54864" rIns="182880" bIns="54864" rtlCol="0" anchor="ctr">
-            <a:noAutofit/>
-          </a:bodyPr>
-          <a:lstStyle/>
-          <a:p>
-            <a:pPr marL="0" indent="0" algn="l">
-              <a:lnSpc>
-                <a:spcPct val="100000"/>
-              </a:lnSpc>
-              <a:spcBef>
-                <a:spcPts val="0"/>
-              </a:spcBef>
-              <a:spcAft>
-                <a:spcPts val="0"/>
-              </a:spcAft>
-              <a:buNone/>
-            </a:pPr>
-            <a:r>
-              <a:rPr lang="pt-BR" sz="1600" b="1" dirty="0">
-                <a:solidFill>
-                  <a:srgbClr val="114719"/>
-                </a:solidFill>
-                <a:latin typeface="Montserrat"/>
-              </a:rPr>
-              <a:t>Associação, não efeito da bolsa; horas cadastradas não são presença.</a:t>
             </a:r>
           </a:p>
         </p:txBody>

--- a/output/apresentacao_banca2/deck_banca2_curto.pptx
+++ b/output/apresentacao_banca2/deck_banca2_curto.pptx
@@ -35,8 +35,6 @@
     <p:sldId id="425" r:id="rId72"/>
     <p:sldId id="426" r:id="rId73"/>
     <p:sldId id="427" r:id="rId74"/>
-    <p:sldId id="428" r:id="rId75"/>
-    <p:sldId id="429" r:id="rId76"/>
   </p:sldIdLst>
   <p:sldSz cx="12192000" cy="6858000"/>
   <p:notesSz cx="6858000" cy="9144000"/>
@@ -8817,7 +8815,7 @@
           <a:p>
             <a:r>
               <a:rPr lang="pt-BR" dirty="0"/>
-              <a:t>O efeito candidato é o incentivo marginal de R$ 5 mil anunciado, como pacote do corte: em 0,300 e 0,400 mudam também outras regras federais. Não é a participação no PMM-E nem o efeito do Agora Tem Especialistas. A ordem segue a estrutura da versão final: hipótese, dados, análise descritiva, metodologia, identificação, resultados, robustez e discussão.</a:t>
+              <a:t>O efeito candidato é o incentivo marginal de R$ 5 mil anunciado, como pacote do corte: em 0,300 e 0,400 mudam também outras regras federais. Não é a participação no PMM-E nem o efeito do Agora Tem Especialistas. A H1 (preenchimento) é a hipótese central; H2 e H3 são plano B. A ordem segue a estrutura da versão final: hipótese, dados, análise descritiva, metodologia, identificação, resultados, robustez e discussão.</a:t>
             </a:r>
           </a:p>
         </p:txBody>
@@ -8876,7 +8874,7 @@
           <a:p>
             <a:r>
               <a:rPr lang="pt-BR" dirty="0"/>
-              <a:t>Numeração desta apresentação a partir de 26/10/2026: H1 preenchimento; H2 bolsa × origem (antes H3); H3 oferta (antes H4). A H2 é o "incentivo limitado" do modelo da banca 1: toda a bolsa pesa menos que trabalhar na UF de origem do médico. Ela foi formulada depois de ver os coeficientes do modelo de escolha, e por isso é pós-resultado. H1 e H3 ficam em cinza, como plano B, até a validação dos professores; a escolha final da hipótese é do autor. Cautela: H2 é pós-resultado.</a:t>
+              <a:t>Numeração desta apresentação a partir de 26/10/2026: H1 preenchimento; H2 bolsa × origem (antes H3); H3 oferta (antes H4). A H1 é a hipótese central (decisão do autor de 26/10/2026): onde a bolsa é maior, mais vagas são preenchidas. H2 e H3 ficam em cinza, como plano B, até a validação dos professores. A H2 é o "incentivo limitado" do modelo da banca 1: toda a bolsa pesa menos que trabalhar na UF de origem do médico; foi formulada depois de ver os coeficientes do modelo de escolha, e por isso é pós-resultado. A H3 pergunta se a chegada do médico soma oferta ou só remaneja. Cautela: H2 é pós-resultado.</a:t>
             </a:r>
           </a:p>
         </p:txBody>
@@ -8994,7 +8992,7 @@
           <a:p>
             <a:r>
               <a:rPr lang="pt-BR" dirty="0"/>
-              <a:t>Composição das vagas: curso, vaga imediata ou de cadastro reserva, tipo de estabelecimento, lidos dos quadros. Concorrência: células do mesmo curso e ciclo na mesma UF ou região de saúde. Região: UF, macrorregião e região de saúde (malha do IBGE); porte: população do Censo 2022. Regras no mesmo corte: portarias do MS com corte no IVS (auditoria 18) e incentivos ligados à vulnerabilidade (auditoria 35). Servem para o diagnóstico da queda e para a leitura do pacote do corte; não entram na especificação principal.</a:t>
+              <a:t>Composição das vagas: curso, vaga imediata ou de cadastro reserva, tipo de estabelecimento, lidos dos quadros; no ciclo 2, o tipo de vaga vem do quadro de 13/02/2026, anterior à alocação (auditoria 36). Capital: as capitais, pelo código IBGE (auditoria 36). Região: UF, macrorregião e região de saúde (malha do IBGE); porte: população do Censo 2022. Regras no mesmo corte: portarias do MS com corte no IVS (auditoria 18) e incentivos ligados à vulnerabilidade (auditoria 35). Servem para o diagnóstico da queda e para a leitura do pacote do corte; não entram na especificação principal.</a:t>
             </a:r>
           </a:p>
         </p:txBody>
@@ -9053,7 +9051,7 @@
           <a:p>
             <a:r>
               <a:rPr lang="pt-BR" dirty="0"/>
-              <a:t>Célula = estabelecimento × curso no quadro da 1ª chamada. "Preenchida" muda de definição entre ciclos: no ciclo 1, alguma confirmação ou homologação; nos ciclos 2 e 3, alocado (a auditoria 36, em curso, refaz a conta com uma definição única). Amostra da escolha: candidatos com 1ª opção numa célula do quadro, ligados ao CNES e com município de origem.</a:t>
+              <a:t>Célula = estabelecimento × curso no quadro da 1ª chamada. Nesta tabela, no ciclo 1, "preenchida" é alguma confirmação ou homologação; nos ciclos 2 e 3, alocado. As estimativas da H1 usam ao menos um alocado nos três ciclos (no ciclo 1, o confirmado), como conferiu a auditoria 36. Amostra da escolha: candidatos com 1ª opção numa célula do quadro, ligados ao CNES e com município de origem.</a:t>
             </a:r>
           </a:p>
         </p:txBody>
@@ -9171,7 +9169,7 @@
           <a:p>
             <a:r>
               <a:rPr lang="pt-BR" dirty="0"/>
-              <a:t>5.425 candidatos com 1ª opção e município de origem. 79% escolhem em 1º lugar uma vaga na UF de origem, 46% na região de saúde de origem e 36% no próprio município; a distância mediana é 51 km. A origem é o município do estabelecimento em que o candidato tinha vínculo médico no CNES antes das inscrições; não é residência nem naturalidade. É a base descritiva da H2. Cautela: Descritivo; origem é onde trabalhava no CNES.</a:t>
+              <a:t>Só células com pelo menos uma vaga imediata (no ciclo 2, pelo quadro de 13/02/2026, anterior à alocação). Cada ponto é a fração de células preenchidas numa faixa de 0,010 de IVS; cada linha, a reta local de um lado. Abaixo de 0,300, 56,1% dessas células são preenchidas. A distância crua entre as retas não é a estimativa: a HI-1 compara células do mesmo curso e ciclo, com uma reta por ciclo, e dá −3,7 p.p. [−21,3; +13,9] em 0,300 e −2,3 em 0,400. Saídas do adendo 48b, em auditoria.</a:t>
             </a:r>
           </a:p>
         </p:txBody>
@@ -9230,7 +9228,7 @@
           <a:p>
             <a:r>
               <a:rPr lang="pt-BR" dirty="0"/>
-              <a:t>Todas as células abertas dos ciclos 1–3, sem controles. Nas médias simples da janela de 0,050, 33,3% das células são preenchidas abaixo de 0,300 e 33,5% acima; em 0,400, 37% e 39%. A reta de cada lado é a local, com kernel triangular; o salto é a distância entre as retas no corte. Quando as saídas do adendo 48b chegarem, este gráfico passa a usar só as células com vaga imediata (figura do script do adendo).</a:t>
+              <a:t>Protocolo 62 (doc 57m), auditado (auditoria 37, aprovado com correções de texto); descritivo e pós-resultado. Na faixa de R$ 10 mil, a fração de células preenchidas sobe +11,9 p.p. a cada 0,100 de IVS [+6,0; +17,7]. Comparando só células da mesma UF, sobram +1,3 p.p. O Nordeste é a região que mais preenche nessa faixa (43% das células) e a de IVS mais alto. Com todos os fatores juntos, sobram +0,5 p.p. Diz com o que a subida anda junto, não por quê. Cautela: Descritivo: dentro da faixa, a bolsa é a mesma.</a:t>
             </a:r>
           </a:p>
         </p:txBody>
@@ -9289,7 +9287,7 @@
           <a:p>
             <a:r>
               <a:rPr lang="pt-BR" dirty="0"/>
-              <a:t>Em auditoria (protocolo 62, doc 57m), descritivo e pós-resultado. Na faixa de R$ 10 mil, a fração de células preenchidas sobe +11,9 p.p. a cada 0,100 de IVS [+6,0; +17,7]. Comparando só células da mesma UF, sobram +1,3 p.p. O Nordeste é a região que mais preenche nessa faixa (43% das células) e a de IVS mais alto. Com todos os fatores juntos, sobram +0,5 p.p. Diz com o que a subida anda junto, não por quê. Cautela: Descritivo: dentro da faixa, a bolsa é a mesma.</a:t>
+              <a:t>Protocolo 62 (doc 57m; auditoria 37). Nos últimos 0,050 antes de 0,300, o preenchimento sobe +36,1 p.p. por 0,100 [+7,4; +64,7]. Nenhum fator sozinho a reduz à metade: comparando dentro da mesma UF, sobram +21,6 p.p.; com todos juntos ainda sobram +26,1 p.p. As células do Norte e do Nordeste da faixa estão quase todas nesse trecho. São as mesmas células que a RDD usa do lado de baixo, mas não a mesma reta: a RDD pondera pelo kernel e tem retas por ciclo. Quanto mais íngreme esse trecho, mais alto fica o ponto de partida do lado de R$ 10 mil no corte. Isso volta na Robustez, no passo a passo da queda.</a:t>
             </a:r>
           </a:p>
         </p:txBody>
@@ -9348,7 +9346,7 @@
           <a:p>
             <a:r>
               <a:rPr lang="pt-BR" dirty="0"/>
-              <a:t>Em auditoria (protocolo 62, doc 57m). Nos últimos 0,050 antes de 0,300, o preenchimento sobe +36,1 p.p. por 0,100 [+7,4; +64,7]. Nenhum fator a reduz à metade; com todos juntos ainda sobram +26,1 p.p. Quanto mais íngreme esse trecho, mais alto fica o ponto de partida do lado de R$ 10 mil no corte. Isso volta na Robustez, no passo a passo da queda.</a:t>
+              <a:t>Especificação principal da H1 desde 26/10/2026 (adendo 48b, pós-resultado). HI-1: célula com vaga imediata preenchida na 1ª chamada, com efeitos fixos de curso × ciclo. HI-2: alocados em vagas imediatas por município, com controle das vagas imediatas e coeficiente por ciclo. Amostra: só células com pelo menos uma vaga imediata, ciclos 1–3; as demais ficam fora e são contadas. RDD sharp local linear, kernel triangular, h = 0,050, cada corte separado, intercepto e retas por ciclo, erro-padrão agrupado por município; Holm entre as quatro linhas primárias. As células de cadastro reserva se preenchem por remanejamento e pela priorização da SGTES, outro mecanismo (doc 57n). No ciclo 2, o tipo de vaga é o do quadro de 13/02/2026, anterior à alocação (auditoria 36). Cuidado: pacote do corte.</a:t>
             </a:r>
           </a:p>
         </p:txBody>
@@ -9407,7 +9405,7 @@
           <a:p>
             <a:r>
               <a:rPr lang="pt-BR" dirty="0"/>
-              <a:t>Especificação principal da H1 desde 26/10/2026 (adendo 48b, pós-resultado). HI-1: célula com vaga imediata preenchida na 1ª chamada, com efeitos fixos de curso × ciclo. HI-2: alocados em vagas imediatas por município, com controle das vagas imediatas e coeficiente por ciclo. Amostra: só células com pelo menos uma vaga imediata, ciclos 1–3; as só de reserva ficam fora e são contadas. RDD sharp local linear, kernel triangular, h = 0,050, cada corte separado, intercepto e retas por ciclo, erro-padrão agrupado por município; Holm entre as quatro linhas primárias. Cuidado: pacote do corte; "preenchida" muda de definição entre ciclos.</a:t>
+              <a:t>H2: logit condicional (McFadden). Cada um dos 5.421 candidatos escolhe a vaga de maior utilidade entre as do seu curso e ciclo; a curva do IVS é um spline com nós nos cortes, e só o salto da bolsa nos cortes identifica o peso dela. Origem: pesos de mesma UF, mesma região e mesmo município. Pesos comuns aos ciclos na principal (M1); erro-padrão agrupado por conjunto de escolha. Teste da H2: o peso da UF de origem menos o de toda a bolsa, unilateral e pós-resultado. Cuidado: só quem se candidatou; independência de alternativas irrelevantes. H3: estudo de evento escalonado (Callaway e Sant'Anna), médicos dos ciclos 1 e 2: a mudança das horas desde o mês anterior à entrada, nos que entraram, menos a mesma mudança nos que ainda não entraram; erro-padrão por bootstrap multiplicador agrupado por médico; sensibilidades: Rambachan–Roth e a comparação na nota de corte. Cautela: Origem não é causal; horas cadastradas não são presença.</a:t>
             </a:r>
           </a:p>
         </p:txBody>
@@ -9466,7 +9464,7 @@
           <a:p>
             <a:r>
               <a:rPr lang="pt-BR" dirty="0"/>
-              <a:t>Logit condicional (McFadden): cada um dos 5.421 candidatos escolhe a vaga de maior utilidade entre as do seu curso e ciclo. A curva do IVS é um spline com nós nos cortes: só o salto da bolsa nos cortes identifica o peso dela. Origem: pesos de mesma UF, mesma região e mesmo município. Pesos comuns aos ciclos na principal (M1); erro-padrão agrupado por conjunto de escolha. A H2 é a diferença entre o peso da UF de origem e o de toda a bolsa, teste unilateral e pós-resultado. Cuidado: independência de alternativas irrelevantes.</a:t>
+              <a:t>Regra sharp: o IVS 2010 oficial reproduz a faixa de todos os municípios dos ciclos 1 e 2. Sem manipulação: o IVS foi medido em 2010, antes do programa, e o teste de densidade não acusa acúmulo no ciclo 1 (p de Holm 0,707 em 0,300 e 0,658 em 0,400). Continuidade: balanço de covariáveis pré e placebos de outcome e de corte. Ressalvas: em 0,400, seleção suspeita no ciclo 1; em 0,300, a parte dos municípios que são capitais cai −17,8 p.p. [−34,1; −1,5] no corte (auditoria 36, diagnóstico). Para a H2, a curva do IVS com nós nos cortes e o spline cúbico.</a:t>
             </a:r>
           </a:p>
         </p:txBody>
@@ -9525,7 +9523,7 @@
           <a:p>
             <a:r>
               <a:rPr lang="pt-BR" dirty="0"/>
-              <a:t>Estudo de evento escalonado (Callaway e Sant'Anna): o efeito k meses depois de entrar é a mudança das horas desde o mês anterior à entrada, nos que entraram, menos a mesma mudança nos que ainda não entraram. Horas totais, no município do posto e fora dele. Um efeito por coorte de entrada e por mês; o resultado é a média do pós. Erro-padrão por bootstrap multiplicador agrupado por médico. Sensibilidades: Rambachan–Roth e a comparação na nota de corte.</a:t>
+              <a:t>Pacote do corte: a única regra federal que muda em 0,300 e não em 0,400 é o acréscimo no teto de emendas e nas parcelas de custeio da APS e da MAC do município (auditoria 18; doc 57l). Nenhum incentivo individual ao especialista além da bolsa muda em 0,300; em 0,400 mudam incentivos de médicos da APS (AgSUS e PMMB) (auditoria 35). Por isso o contraste é o pacote do corte, não a bolsa sozinha. Na H3, o teste conjunto do pré falha nas horas no município do posto; Rambachan–Roth mede quanto a conclusão aguenta. Na H2, a independência de alternativas irrelevantes é violada em parte, e o peso da bolsa muda pouco.</a:t>
             </a:r>
           </a:p>
         </p:txBody>
@@ -9584,7 +9582,7 @@
           <a:p>
             <a:r>
               <a:rPr lang="pt-BR" dirty="0"/>
-              <a:t>Regra sharp: o IVS 2010 oficial reproduz a faixa de todos os municípios dos ciclos 1 e 2. Sem manipulação: o IVS foi medido em 2010, antes do programa, e o teste de densidade não acusa acúmulo no ciclo 1 (p de Holm 0,707 em 0,300 e 0,658 em 0,400). Continuidade: balanço de covariáveis pré e placebos de outcome e de corte. Para a H2, a curva do IVS com nós nos cortes e o spline cúbico.</a:t>
+              <a:t>Especificação principal da H1 (adendo 48b, em auditoria; pós-resultado). HI-1, a chance de uma célula com vaga imediata ser preenchida na 1ª chamada: −3,7 p.p. [−21,3; +13,9] em 0,300 e −2,3 p.p. [−24,0; +19,4] em 0,400, p de Holm 1,000 nos dois. HI-2, médicos alocados nessas vagas por município, comparando municípios com as mesmas vagas imediatas: −1,13 [−2,15; −0,10] em 0,300, p de Holm 0,126 (média abaixo 2,77); −0,16 [−0,99; +0,68] em 0,400, p de Holm 1,000. O IC convencional exclui zero só em HI-2 em 0,300, mas o sinal não sobrevive à correção para quatro testes. IC que contém zero não é efeito zero. Tudo se refere ao pacote do corte, não à bolsa isolada.</a:t>
             </a:r>
           </a:p>
         </p:txBody>
@@ -9643,7 +9641,7 @@
           <a:p>
             <a:r>
               <a:rPr lang="pt-BR" dirty="0"/>
-              <a:t>Pacote do corte: a única regra federal que muda em 0,300 e não em 0,400 é o acréscimo no teto de emendas e nas parcelas de custeio da APS e da MAC do município (auditoria 18; doc 57l). Nenhum incentivo individual ao especialista além da bolsa muda em 0,300; em 0,400 mudam incentivos de médicos da APS (AgSUS e PMMB) (auditoria 35). Por isso o contraste é o pacote do corte, não a bolsa sozinha. Na H3, o teste conjunto do pré falha nas horas no município do posto; Rambachan–Roth mede quanto a conclusão aguenta. Na H2, a independência de alternativas irrelevantes é violada em parte, e o peso da bolsa muda pouco.</a:t>
+              <a:t>Pesos na escolha da vaga, em log-chance, não efeitos no preenchimento. Um degrau da bolsa pesa 0,21 [−0,01; 0,44]: a vaga com +R$ 5 mil tem chance 24% maior de ser a 1ª opção (razão de chances 1,24), sem distinção de zero. Toda a bolsa pesa 0,42 [−0,03; 0,87]; a vaga na mesma UF de origem, fora da região de saúde, 2,40 [2,28; 2,53]. A diferença, 1,98, p unilateral &lt; 0,001, é o teste da H2, pós-resultado. O peso da bolsa tem identificação nos cortes (pacote do corte); o da origem é preferência revelada. Descritivo da origem: 79% das 1ª opções ficam na UF de origem, 46% na região de saúde e 36% no próprio município; mediana de 51 km, entre 5.425 candidatos. Reestimação em curso (52c): o tipo de vaga imediata do ciclo 2 entra no logit com o quadro de 13/02/2026; até lá, valem estes números. Cautela: Pós-resultado; origem é preferência revelada, não efeito causal.</a:t>
             </a:r>
           </a:p>
         </p:txBody>
@@ -9702,7 +9700,7 @@
           <a:p>
             <a:r>
               <a:rPr lang="pt-BR" dirty="0"/>
-              <a:t>A especificação principal da H1 passou a ser a do adendo 48b: compara só vagas do mesmo tipo, as imediatas. O gráfico principal (HI-1 e HI-2 por corte, com Holm) entra aqui quando as saídas estiverem gravadas. Leitura pré-registrada: se as linhas primárias tiverem IC que contém zero nos dois cortes, "comparando vagas do mesmo tipo, não se detecta diferença de preenchimento no corte". As medidas antigas estão na Robustez. Cautela: Pacote do corte; especificação pós-resultado.</a:t>
+              <a:t>Horas totais cadastradas: +6,6 h/sem [+5,4; +7,8] depois da entrada, sobretudo no município do posto (+8,7, com o pré falhando), e −2,1 fora dele. 51,0% [48,4; 53,7] dos médicos já tinham vínculo no município do posto: parte do ganho é registro novo, não médico novo. Associação sob tendências paralelas; não é a participação no PMM-E nem o efeito da bolsa. Cautela: Associação; horas cadastradas não são presença.</a:t>
             </a:r>
           </a:p>
         </p:txBody>
@@ -9761,7 +9759,7 @@
           <a:p>
             <a:r>
               <a:rPr lang="pt-BR" dirty="0"/>
-              <a:t>Pesos na escolha da vaga, em log-chance, não efeitos no preenchimento. Um degrau da bolsa pesa 0,21 [−0,01; 0,44]: a vaga com +R$ 5 mil tem chance 24% maior de ser a 1ª opção (razão de chances 1,24), sem distinção de zero. Toda a bolsa pesa 0,42 [−0,03; 0,87]; a vaga na mesma UF de origem, fora da região de saúde, 2,40 [2,28; 2,53]. A diferença, 1,98, p unilateral &lt; 0,001, é o teste da H2, pós-resultado. O peso da bolsa tem identificação nos cortes (pacote do corte); o da origem é preferência revelada. Cautela: Pós-resultado; origem é preferência revelada, não efeito causal.</a:t>
+              <a:t>Especificações secundárias da H1: as medidas antigas misturam vaga imediata e cadastro reserva. Em 0,300, a célula aberta preenchida (A3) dá −8,4 p.p. [−18,5; +1,7] e, só com vagas imediatas (HI-1), −3,7 p.p.; os alocados por município com controle (N1) dão −1,45 [−2,67; −0,22] e, só com vagas imediatas (HI-2), −1,13. Em 0,400, N1 dá −0,14. Linhas por corte, sem correção múltipla. Cautela: IC que contém zero não é efeito zero.</a:t>
             </a:r>
           </a:p>
         </p:txBody>
@@ -9820,7 +9818,7 @@
           <a:p>
             <a:r>
               <a:rPr lang="pt-BR" dirty="0"/>
-              <a:t>Horas totais cadastradas: +6,6 h/sem [+5,4; +7,8] depois da entrada, sobretudo no município do posto (+8,7, com o pré falhando), e −2,1 fora dele. 51,0% [48,4; 53,7] dos médicos já tinham vínculo no município do posto: parte do ganho é registro novo, não médico novo. Associação sob tendências paralelas; não é a participação no PMM-E nem o efeito da bolsa. Cautela: Associação; horas cadastradas não são presença.</a:t>
+              <a:t>Sem controle, o efeito total de abrir vagas e preenchê-las; com controle, o preenchimento dado o número de vagas. A decomposição é exata: sem controle = via vagas + com controle. Em 0,400: −1,36 = −1,22 + −0,14; do lado de bolsa maior há menos vagas oferecidas (−3,59), sobretudo por alguns municípios grandes logo abaixo do corte. Em 0,300: −1,56 = −0,11 + −1,45; a oferta não muda (+0,39).</a:t>
             </a:r>
           </a:p>
         </p:txBody>
@@ -9879,7 +9877,7 @@
           <a:p>
             <a:r>
               <a:rPr lang="pt-BR" dirty="0"/>
-              <a:t>Especificações secundárias da H1 desde o adendo 48b: medidas que misturam vaga imediata e cadastro reserva. A3 em 0,300: −8,4 p.p. [−18,5; +1,7]. N1 com controle em 0,300: −1,45 [−2,67; −0,22]; em 0,400, −0,14. Linhas por corte, sem correção múltipla; com IC honesto, o intervalo contém zero. Cautela: IC que contém zero não é efeito zero.</a:t>
+              <a:t>Todas as combinações de ciclo, corte e medida estão gravadas; nada foi estimado para este slide. Na taxa por vaga oferecida, o ciclo 2 dá −27,8 p.p. [−49,0; −6,7] em 0,300, contra −16,0 com os ciclos juntos, e responde por 51% do salto conjunto. Na A3, o ciclo 2 dá −10,2 p.p., com IC que contém zero. "Preenchida" é ao menos um alocado nos três ciclos (no ciclo 1, o confirmado), conferido pela auditoria 36. A A3 usa o tipo de vaga do ciclo 2 do quadro retificado de 19/03/2026, refeito depois do resultado preliminar; com o tipo de vaga de antes da alocação, a queda aumenta. A H1 principal (adendo 48b) usa o quadro de 13/02/2026. Cautela: Tipo de vaga do ciclo 2: quadro refeito depois do resultado (auditoria 36).</a:t>
             </a:r>
           </a:p>
         </p:txBody>
@@ -9938,7 +9936,7 @@
           <a:p>
             <a:r>
               <a:rPr lang="pt-BR" dirty="0"/>
-              <a:t>Sem controle, o efeito total de abrir vagas e preenchê-las; com controle, o preenchimento dado o número de vagas. A decomposição é exata: sem controle = via vagas + com controle. Em 0,400: −1,36 = −1,22 + −0,14; do lado de bolsa maior há menos vagas oferecidas (−3,59), sobretudo por alguns municípios grandes logo abaixo do corte. Em 0,300: −1,56 = −0,11 + −1,45; a oferta não muda (+0,39).</a:t>
+              <a:t>(a) Nas médias simples da janela, 33,3% das células são preenchidas abaixo de 0,300 e 33,5% acima. (b) A RDD compara as duas retas no ponto do corte: a de baixo segue a subida forte dos últimos 0,050 e chega alta; a de cima começa baixa. Essa subida é puxada por poucos municípios: na janela há 13 capitais abaixo de 0,300 e 6 acima, e as capitais têm muitas células e preenchem mais (auditoria 36); as células do Norte e do Nordeste da faixa de R$ 10 mil estão quase todas nos últimos 0,050 antes do corte (doc 57m; auditoria 37). Acaso: com os 3 cortes falsos do protocolo, o p por posto é 0,250, o menor possível; numa grade maior, fora do protocolo, 0,031. Acaso não fica descartado nem confirmado.</a:t>
             </a:r>
           </a:p>
         </p:txBody>
@@ -9997,7 +9995,7 @@
           <a:p>
             <a:r>
               <a:rPr lang="pt-BR" dirty="0"/>
-              <a:t>Todas as combinações de ciclo, corte e medida estão gravadas; nada foi estimado para este slide. Na taxa por vaga oferecida, o ciclo 2 dá −27,8 p.p. [−49,0; −6,7] em 0,300, contra −16,0 com os ciclos juntos, e responde por 51% do salto conjunto. Na A3, o ciclo 2 dá −10,2 p.p., com IC que contém zero. No ciclo 2, nenhuma célula só de reserva foi preenchida na 1ª chamada. "Preenchida" muda de definição: no ciclo 1, confirmação ou homologação; nos ciclos 2 e 3, alocado. A auditoria 36, em curso, refaz a conta com uma definição única. Cautela: Preenchida: confirmada no ciclo 1; alocada nos ciclos 2 e 3.</a:t>
+              <a:t>Diagnóstico da auditoria 36, descritivo e pós-resultado, sem estatuto causal. Na janela de 0,050 há 13 capitais abaixo de 0,300 e 6 acima; a menos de 0,010 do corte, São Paulo, Goiânia, Natal e Brasília ficam abaixo e nenhuma capital acima. No corte, a parte dos municípios que são capitais cai −17,8 p.p. [−34,1; −1,5]. Com uma dummy de capital: A3 de −8,4 para −2,6 p.p. [−11,8; +6,6]; taxa por vaga de −16,0 para −10,9 p.p. [−22,6; +0,8]; N1 de −1,45 para −0,92 [−1,98; +0,14]. Só com células de vaga imediata (tipo de vaga de antes da alocação): A3 −3,7 p.p. e taxa −13,2 p.p., com IC que contém zero; nos alocados por município (HI-2, adendo 48b), −1,13, com IC que exclui zero, que não passa no Holm. O adendo 48c vai estimar capitais e UF de forma padronizada; quando sair, a fonte deste slide muda. Cautela: Auditoria 36, diagnóstico pós-resultado.</a:t>
             </a:r>
           </a:p>
         </p:txBody>
@@ -10056,7 +10054,7 @@
           <a:p>
             <a:r>
               <a:rPr lang="pt-BR" dirty="0"/>
-              <a:t>Nas médias da janela, 33,3% das células são preenchidas abaixo de 0,300 e 33,5% acima. A RDD compara as duas retas no ponto do corte: a de baixo segue a subida forte dos últimos 0,050 (doc 57m) e chega alta; a de cima começa baixa. O salto sai negativo mesmo com as médias iguais, e depende de poucos municípios perto do corte. Acaso: com os 3 cortes falsos do protocolo, o p por posto é 0,250, o menor possível; numa grade maior, fora do protocolo, 0,031. Acaso não fica descartado nem confirmado. Cautela: O acaso não está descartado.</a:t>
+              <a:t>TOST da H1 principal (HI-s7), com IC de 90% e as margens do protocolo 60. HI-1: [−18,4; +11,1] em 0,300 e [−20,5; +15,9] em 0,400, contra ±10 p.p.: inconclusivo, nenhum dos dois testes rejeita. HI-2 em 0,300: [−1,99; −0,26] contra ±0,69 médico por município (25% da média abaixo, 2,77): não houve aumento igual ou maior que a margem, mas uma queda desse tamanho não fica descartada. HI-2 em 0,400, contra ±0,50: inconclusivo. No IC convencional, sob a aproximação local linear e para o pacote do corte. Não dá para dizer que nada mudou. Nos atos lidos, nenhum incentivo individual além da bolsa muda em 0,300 (auditoria 35); a única regra federal que muda em 0,300 e não em 0,400 é o teto de emendas e de parcelas de custeio do município (auditoria 18). Nada disso mostra que a bolsa reduz o preenchimento: o corte junta a bolsa com outras regras.</a:t>
             </a:r>
           </a:p>
         </p:txBody>
@@ -10115,7 +10113,7 @@
           <a:p>
             <a:r>
               <a:rPr lang="pt-BR" dirty="0"/>
-              <a:t>Diagnóstico do protocolo 61 (doc 57l), auditado (auditoria 33): descritivo e pós-resultado. No corte, do lado de cima: células de cursos que preenchem pouco em qualquer lugar (índice de curso −4,5 p.p. [−7,1; −2,0]); mais células do mesmo curso na mesma UF disputando candidatos (+10,6 [+3,5; +17,8]); no ciclo 2, mais células só de reserva (+28,4 p.p. [+8,3; +48,4]). Que menos células tiveram candidato de 1ª opção é estimativa imprecisa: −10,8 p.p. [−28,2; +6,7]. Igualando a composição, Q2 vai a −5,1 p.p., 32% do original; a concorrência, Q2 a −4,3 p.p., 27%; quem teve candidato de 1ª opção, Q1 a −0,49, 34%. Esses fatores se formam depois do anúncio da faixa: descrevem o que acompanha a queda, não a causa. Cautela: Igualando: queda pela metade ou mais em algumas medidas; nenhum fator nas três.</a:t>
+              <a:t>Antes era a H2 da escolha; agora é a especificação secundária da H2. Por ciclo (M5), só o ciclo 2 mostra efeito da bolsa: 1,70 [1,22; 2,37] por +R$ 5 mil; nos ciclos 1 e 3, 1,07 e 1,00; a igualdade entre ciclos tem p 0,058. A vantagem da UF de origem sobre toda a bolsa fica entre 1,18 (distância em log) e 2,37 (só o ciclo 3) nas seis variantes. Escolha não é expansão: o que uma vaga ganha, outra do mesmo curso perde. Reestimação em curso (52c): o ciclo 2 será refeito com o tipo de vaga do quadro de 13/02/2026. Cautela: Pós-resultado; escolha não é expansão.</a:t>
             </a:r>
           </a:p>
         </p:txBody>
@@ -10174,7 +10172,7 @@
           <a:p>
             <a:r>
               <a:rPr lang="pt-BR" dirty="0"/>
-              <a:t>TOST com IC de 90%: o limite de cima é +0,1 p.p. e +9,3 p.p. na célula aberta (margem de 10 p.p.) e −0,42 e +0,43 nas vagas por município (margem de 25% da média); só o teste do aumento rejeita. Uma queda desse tamanho não fica descartada: não dá para dizer que nada mudou. Nos atos lidos, nenhum incentivo individual além da bolsa muda em 0,300 (auditoria 35); a única regra federal que muda em 0,300 e não em 0,400 é o teto de emendas e de parcelas de custeio do município (auditoria 18). Nada disso mostra que a bolsa reduz o preenchimento: o corte junta a bolsa com outras regras.</a:t>
+              <a:t>Comparação dos aprovados com quem ficou logo abaixo da nota de corte: +7,91 h/sem nas horas totais, IC que contém zero, pré com p 0,837. Rambachan–Roth: a ruptura de M̄ é 1,30 nas horas totais e 1,90 no município do posto; acima de 1, a conclusão aguenta violações de tendência do tamanho das vistas no pré. Horas cadastradas não são presença.</a:t>
             </a:r>
           </a:p>
         </p:txBody>
@@ -10233,7 +10231,7 @@
           <a:p>
             <a:r>
               <a:rPr lang="pt-BR" dirty="0"/>
-              <a:t>Antes era a H2 da escolha; agora é a especificação secundária da H2. Por ciclo (M5), só o ciclo 2 mostra efeito da bolsa: 1,70 [1,22; 2,37] por +R$ 5 mil; nos ciclos 1 e 3, 1,07 e 1,00; a igualdade entre ciclos tem p 0,058. A vantagem da UF de origem sobre toda a bolsa fica entre 1,18 (distância em log) e 2,37 (só o ciclo 3) nas seis variantes. Escolha não é expansão: o que uma vaga ganha, outra do mesmo curso perde. Cautela: Pós-resultado; escolha não é expansão.</a:t>
+              <a:t>Em linguagem simples: nos dados crus os dois lados preenchem igual; a reta de baixo carrega até o corte uma subida que só existe nos últimos municípios antes de 0,300, com capitais e Nordeste logo abaixo do corte; controlando a condição de capital, ou comparando vagas do mesmo tipo, a queda encolhe e o intervalo passa a conter zero. O corte junta a bolsa com outras regras: pacote do corte. Cautela: Nada disso mostra que a bolsa reduz o preenchimento.</a:t>
             </a:r>
           </a:p>
         </p:txBody>
@@ -10292,125 +10290,7 @@
           <a:p>
             <a:r>
               <a:rPr lang="pt-BR" dirty="0"/>
-              <a:t>Comparação dos aprovados com quem ficou logo abaixo da nota de corte: +7,91 h/sem nas horas totais, IC que contém zero, pré com p 0,837. Rambachan–Roth: a ruptura de M̄ é 1,30 nas horas totais e 1,90 no município do posto; acima de 1, a conclusão aguenta violações de tendência do tamanho das vistas no pré. Horas cadastradas não são presença.</a:t>
-            </a:r>
-          </a:p>
-        </p:txBody>
-      </p:sp>
-    </p:spTree>
-  </p:cSld>
-  <p:clrMapOvr>
-    <a:masterClrMapping/>
-  </p:clrMapOvr>
-</p:notes>
-</file>
-
-<file path=ppt/notesSlides/notesSlide49.xml><?xml version="1.0" encoding="utf-8"?>
-<p:notes xmlns:a="http://schemas.openxmlformats.org/drawingml/2006/main" xmlns:r="http://schemas.openxmlformats.org/officeDocument/2006/relationships" xmlns:p="http://schemas.openxmlformats.org/presentationml/2006/main">
-  <p:cSld>
-    <p:spTree>
-      <p:nvGrpSpPr>
-        <p:cNvPr id="1" name=""/>
-        <p:cNvGrpSpPr/>
-        <p:nvPr/>
-      </p:nvGrpSpPr>
-      <p:grpSpPr>
-        <a:xfrm>
-          <a:off x="0" y="0"/>
-          <a:ext cx="0" cy="0"/>
-          <a:chOff x="0" y="0"/>
-          <a:chExt cx="0" cy="0"/>
-        </a:xfrm>
-      </p:grpSpPr>
-      <p:sp>
-        <p:nvSpPr>
-          <p:cNvPr id="2" name="Slide Image Placeholder 1"/>
-          <p:cNvSpPr>
-            <a:spLocks noGrp="1" noRot="1" noChangeAspect="1"/>
-          </p:cNvSpPr>
-          <p:nvPr>
-            <p:ph type="sldImg"/>
-          </p:nvPr>
-        </p:nvSpPr>
-        <p:spPr/>
-      </p:sp>
-      <p:sp>
-        <p:nvSpPr>
-          <p:cNvPr id="3" name="Notes Placeholder 2"/>
-          <p:cNvSpPr>
-            <a:spLocks noGrp="1"/>
-          </p:cNvSpPr>
-          <p:nvPr>
-            <p:ph type="body" idx="1"/>
-          </p:nvPr>
-        </p:nvSpPr>
-        <p:spPr/>
-        <p:txBody>
-          <a:bodyPr/>
-          <a:lstStyle/>
-          <a:p>
-            <a:r>
-              <a:rPr lang="pt-BR" dirty="0"/>
-              <a:t>Em linguagem simples: nos dados crus os dois lados preenchem igual; a reta de baixo carrega até o corte uma subida que só existe nos últimos municípios antes de 0,300; e do lado de cima as vagas eram de outro tipo (mais reserva, cursos que preenchem pouco, mais concorrência). O corte junta a bolsa com outras regras: pacote do corte. Cautela: Nada disso mostra que a bolsa reduz o preenchimento.</a:t>
-            </a:r>
-          </a:p>
-        </p:txBody>
-      </p:sp>
-    </p:spTree>
-  </p:cSld>
-  <p:clrMapOvr>
-    <a:masterClrMapping/>
-  </p:clrMapOvr>
-</p:notes>
-</file>
-
-<file path=ppt/notesSlides/notesSlide50.xml><?xml version="1.0" encoding="utf-8"?>
-<p:notes xmlns:a="http://schemas.openxmlformats.org/drawingml/2006/main" xmlns:r="http://schemas.openxmlformats.org/officeDocument/2006/relationships" xmlns:p="http://schemas.openxmlformats.org/presentationml/2006/main">
-  <p:cSld>
-    <p:spTree>
-      <p:nvGrpSpPr>
-        <p:cNvPr id="1" name=""/>
-        <p:cNvGrpSpPr/>
-        <p:nvPr/>
-      </p:nvGrpSpPr>
-      <p:grpSpPr>
-        <a:xfrm>
-          <a:off x="0" y="0"/>
-          <a:ext cx="0" cy="0"/>
-          <a:chOff x="0" y="0"/>
-          <a:chExt cx="0" cy="0"/>
-        </a:xfrm>
-      </p:grpSpPr>
-      <p:sp>
-        <p:nvSpPr>
-          <p:cNvPr id="2" name="Slide Image Placeholder 1"/>
-          <p:cNvSpPr>
-            <a:spLocks noGrp="1" noRot="1" noChangeAspect="1"/>
-          </p:cNvSpPr>
-          <p:nvPr>
-            <p:ph type="sldImg"/>
-          </p:nvPr>
-        </p:nvSpPr>
-        <p:spPr/>
-      </p:sp>
-      <p:sp>
-        <p:nvSpPr>
-          <p:cNvPr id="3" name="Notes Placeholder 2"/>
-          <p:cNvSpPr>
-            <a:spLocks noGrp="1"/>
-          </p:cNvSpPr>
-          <p:nvPr>
-            <p:ph type="body" idx="1"/>
-          </p:nvPr>
-        </p:nvSpPr>
-        <p:spPr/>
-        <p:txBody>
-          <a:bodyPr/>
-          <a:lstStyle/>
-          <a:p>
-            <a:r>
-              <a:rPr lang="pt-BR" dirty="0"/>
-              <a:t>No modelo da banca 1, o médico aceita a vaga se a bolsa compensa o custo do lugar. Incentivo limitado: a política mexe numa variável, e o custo do lugar (longe da origem, da família e da rede) continua contra. Escolha não é expansão: a bolsa reordena os candidatos entre as vagas abertas, e o que uma vaga ganha outra do mesmo curso perde; por isso não aparece no preenchimento. Substituição: o médico soma horas cadastradas, mas metade já trabalhava no município do posto. Associação não é efeito; inconclusivo não é efeito zero. Próximos passos: as saídas do adendo 48b, o ciclo 3 com a competência 202703 madura e o universo de inscritos. Cautela: Pacote do corte; vínculo não é presença.</a:t>
+              <a:t>A história parte da H1. No modelo da banca 1, o médico aceita a vaga se a bolsa compensa o custo do lugar. O preenchimento não sobe no corte; o sinal negativo é a estimativa no corte, puxada por poucos municípios. A escolha explica por quê (H2, plano B): a política mexe numa variável, e o custo do lugar (longe da origem, da família e da rede) continua contra; a bolsa reordena os candidatos entre as vagas abertas, e o que uma vaga ganha outra do mesmo curso perde. Na oferta (H3, plano B), o médico soma horas cadastradas, mas metade já trabalhava no município do posto. Associação não é efeito; inconclusivo não é efeito zero. Próximos passos: as saídas do adendo 48b, o ciclo 3 com a competência 202703 madura e o universo de inscritos. Cautela: Pacote do corte; vínculo não é presença.</a:t>
             </a:r>
           </a:p>
         </p:txBody>
@@ -16637,7 +16517,7 @@
                 </a:solidFill>
                 <a:latin typeface="Montserrat"/>
               </a:rPr>
-              <a:t>Hipóteses: a H2 é a candidata central</a:t>
+              <a:t>Hipóteses: a H1 é a candidata central</a:t>
             </a:r>
           </a:p>
         </p:txBody>
@@ -16865,7 +16745,7 @@
                 </a:solidFill>
                 <a:latin typeface="Montserrat"/>
               </a:rPr>
-              <a:t>H2 · central</a:t>
+              <a:t>H1 · central</a:t>
             </a:r>
           </a:p>
         </p:txBody>
@@ -16920,7 +16800,7 @@
                 </a:solidFill>
                 <a:latin typeface="Montserrat"/>
               </a:rPr>
-              <a:t>a bolsa pesa pouco perto da origem</a:t>
+              <a:t>bolsa maior, mais vagas preenchidas</a:t>
             </a:r>
           </a:p>
         </p:txBody>
@@ -16973,7 +16853,7 @@
                 </a:solidFill>
                 <a:latin typeface="Montserrat"/>
               </a:rPr>
-              <a:t>H1 · plano B</a:t>
+              <a:t>H2 · plano B</a:t>
             </a:r>
           </a:p>
         </p:txBody>
@@ -17028,7 +16908,7 @@
                 </a:solidFill>
                 <a:latin typeface="Montserrat"/>
               </a:rPr>
-              <a:t>bolsa maior, mais vagas preenchidas</a:t>
+              <a:t>a bolsa pesa pouco perto da origem</a:t>
             </a:r>
           </a:p>
         </p:txBody>
@@ -17194,7 +17074,7 @@
                 </a:solidFill>
                 <a:latin typeface="Montserrat"/>
               </a:rPr>
-              <a:t>doc 57i (P1h, protocolo 52b, auditoria 31); doc 06 da banca 2.</a:t>
+              <a:t>plano da banca 2, §3; doc 06 da banca 2; doc 57i (P1h, protocolo 52b, auditoria 31).</a:t>
             </a:r>
           </a:p>
         </p:txBody>
@@ -18653,9 +18533,9 @@
             <a:tbl>
               <a:tblPr firstRow="1" bandRow="1"/>
               <a:tblGrid>
-                <a:gridCol w="4649875"/>
-                <a:gridCol w="3545127"/>
-                <a:gridCol w="3399590"/>
+                <a:gridCol w="4615656"/>
+                <a:gridCol w="3532187"/>
+                <a:gridCol w="3446749"/>
               </a:tblGrid>
               <a:tr h="1025957">
                 <a:tc>
@@ -19010,7 +18890,7 @@
                           </a:solidFill>
                           <a:latin typeface="Montserrat"/>
                         </a:rPr>
-                        <a:t>Concorrência</a:t>
+                        <a:t>Capital</a:t>
                       </a:r>
                     </a:p>
                   </a:txBody>
@@ -19064,7 +18944,7 @@
                           </a:solidFill>
                           <a:latin typeface="Montserrat"/>
                         </a:rPr>
-                        <a:t>quadros</a:t>
+                        <a:t>IBGE</a:t>
                       </a:r>
                     </a:p>
                   </a:txBody>
@@ -21277,7 +21157,7 @@
                 </a:solidFill>
                 <a:latin typeface="Montserrat"/>
               </a:rPr>
-              <a:t>A 1ª opção fica perto de onde o médico já trabalhava</a:t>
+              <a:t>H1 · Dados crus, só vagas imediatas</a:t>
             </a:r>
           </a:p>
         </p:txBody>
@@ -21406,7 +21286,7 @@
       </p:sp>
       <p:pic>
         <p:nvPicPr>
-          <p:cNvPr id="101" name="Figura" descr="1ª opção em relação ao município de origem do candidato (mesma UF, mesma região de saúde, mesmo município) e distância origem–1ª opção"/>
+          <p:cNvPr id="101" name="Figura" descr="Só células com vaga imediata: médias por faixa de 0,010 de IVS e reta local de cada lado, nos cortes 0,300 e 0,400"/>
           <p:cNvPicPr>
             <a:picLocks noChangeAspect="1"/>
           </p:cNvPicPr>
@@ -21420,8 +21300,8 @@
         </p:blipFill>
         <p:spPr>
           <a:xfrm>
-            <a:off x="292608" y="910067"/>
-            <a:ext cx="8211312" cy="4392097"/>
+            <a:off x="292608" y="1227563"/>
+            <a:ext cx="8211312" cy="4439449"/>
           </a:xfrm>
           <a:prstGeom prst="rect">
             <a:avLst/>
@@ -21435,60 +21315,7 @@
       </p:pic>
       <p:sp>
         <p:nvSpPr>
-          <p:cNvPr id="102" name="Cautela"/>
-          <p:cNvSpPr/>
-          <p:nvPr/>
-        </p:nvSpPr>
-        <p:spPr>
-          <a:xfrm>
-            <a:off x="292608" y="5466756"/>
-            <a:ext cx="8211312" cy="517754"/>
-          </a:xfrm>
-          <a:prstGeom prst="roundRect">
-            <a:avLst>
-              <a:gd name="adj" fmla="val 8000"/>
-            </a:avLst>
-          </a:prstGeom>
-          <a:solidFill>
-            <a:srgbClr val="E7F1EA"/>
-          </a:solidFill>
-          <a:ln>
-            <a:noFill/>
-          </a:ln>
-        </p:spPr>
-        <p:txBody>
-          <a:bodyPr wrap="square" lIns="182880" tIns="54864" rIns="182880" bIns="54864" rtlCol="0" anchor="ctr">
-            <a:noAutofit/>
-          </a:bodyPr>
-          <a:lstStyle/>
-          <a:p>
-            <a:pPr marL="0" indent="0" algn="l">
-              <a:lnSpc>
-                <a:spcPct val="100000"/>
-              </a:lnSpc>
-              <a:spcBef>
-                <a:spcPts val="0"/>
-              </a:spcBef>
-              <a:spcAft>
-                <a:spcPts val="0"/>
-              </a:spcAft>
-              <a:buNone/>
-            </a:pPr>
-            <a:r>
-              <a:rPr lang="pt-BR" sz="1600" b="1" dirty="0">
-                <a:solidFill>
-                  <a:srgbClr val="114719"/>
-                </a:solidFill>
-                <a:latin typeface="Montserrat"/>
-              </a:rPr>
-              <a:t>Descritivo; origem é onde trabalhava no CNES.</a:t>
-            </a:r>
-          </a:p>
-        </p:txBody>
-      </p:sp>
-      <p:sp>
-        <p:nvSpPr>
-          <p:cNvPr id="103" name="Linha"/>
+          <p:cNvPr id="102" name="Linha"/>
           <p:cNvSpPr/>
           <p:nvPr/>
         </p:nvSpPr>
@@ -21536,7 +21363,7 @@
                 </a:solidFill>
                 <a:latin typeface="Montserrat"/>
               </a:rPr>
-              <a:t>79%</a:t>
+              <a:t>Em 0,300</a:t>
             </a:r>
             <a:r>
               <a:rPr lang="pt-BR" sz="1600" b="0" dirty="0">
@@ -21545,7 +21372,62 @@
                 </a:solidFill>
                 <a:latin typeface="Montserrat"/>
               </a:rPr>
-              <a:t> das 1ª opções ficam na UF de origem; mediana de 51 km.</a:t>
+              <a:t>, a reta de baixo sobe forte até o corte e chega alta.</a:t>
+            </a:r>
+          </a:p>
+        </p:txBody>
+      </p:sp>
+      <p:sp>
+        <p:nvSpPr>
+          <p:cNvPr id="103" name="Linha"/>
+          <p:cNvSpPr/>
+          <p:nvPr/>
+        </p:nvSpPr>
+        <p:spPr>
+          <a:xfrm>
+            <a:off x="8778240" y="2595677"/>
+            <a:ext cx="3108960" cy="1626413"/>
+          </a:xfrm>
+          <a:prstGeom prst="roundRect">
+            <a:avLst>
+              <a:gd name="adj" fmla="val 6000"/>
+            </a:avLst>
+          </a:prstGeom>
+          <a:solidFill>
+            <a:srgbClr val="F4F8F5"/>
+          </a:solidFill>
+          <a:ln w="12700">
+            <a:solidFill>
+              <a:srgbClr val="056429"/>
+            </a:solidFill>
+          </a:ln>
+        </p:spPr>
+        <p:txBody>
+          <a:bodyPr wrap="square" lIns="182880" tIns="54864" rIns="182880" bIns="54864" rtlCol="0" anchor="ctr">
+            <a:noAutofit/>
+          </a:bodyPr>
+          <a:lstStyle/>
+          <a:p>
+            <a:pPr marL="0" indent="0" algn="l">
+              <a:lnSpc>
+                <a:spcPct val="100000"/>
+              </a:lnSpc>
+              <a:spcBef>
+                <a:spcPts val="0"/>
+              </a:spcBef>
+              <a:spcAft>
+                <a:spcPts val="0"/>
+              </a:spcAft>
+              <a:buNone/>
+            </a:pPr>
+            <a:r>
+              <a:rPr lang="pt-BR" sz="1600" b="0" dirty="0">
+                <a:solidFill>
+                  <a:srgbClr val="3A3A3A"/>
+                </a:solidFill>
+                <a:latin typeface="Montserrat"/>
+              </a:rPr>
+              <a:t>Dados crus; com curso e ciclo, a HI-1 fica bem menor.</a:t>
             </a:r>
           </a:p>
         </p:txBody>
@@ -21603,7 +21485,7 @@
                 </a:solidFill>
                 <a:latin typeface="Montserrat"/>
               </a:rPr>
-              <a:t>output/rdd_bolsa/G1_distancias_opcoes.parquet e G1_candidatos_origem.parquet (portão G1).</a:t>
+              <a:t>output/rdd_bolsa/HI_figuras/HI_scatter_imediatas.png, HI_resumo.json e HI_estimativas.csv (adendo 48b; doc 57n; em auditoria); figura usada sem redesenho.</a:t>
             </a:r>
           </a:p>
         </p:txBody>
@@ -21666,395 +21548,7 @@
                 </a:solidFill>
                 <a:latin typeface="Montserrat"/>
               </a:rPr>
-              <a:t>Nos dados crus, os dois lados preenchem igual</a:t>
-            </a:r>
-          </a:p>
-        </p:txBody>
-      </p:sp>
-      <p:sp>
-        <p:nvSpPr>
-          <p:cNvPr id="3" name="Número da página"/>
-          <p:cNvSpPr>
-            <a:spLocks noGrp="1"/>
-          </p:cNvSpPr>
-          <p:nvPr>
-            <p:ph type="body" sz="quarter" idx="18"/>
-          </p:nvPr>
-        </p:nvSpPr>
-        <p:spPr>
-          <a:xfrm>
-            <a:off x="11706744" y="6457042"/>
-            <a:ext cx="492080" cy="400640"/>
-          </a:xfrm>
-        </p:spPr>
-        <p:txBody>
-          <a:bodyPr anchor="ctr">
-            <a:normAutofit/>
-          </a:bodyPr>
-          <a:lstStyle/>
-          <a:p>
-            <a:pPr algn="ctr"/>
-            <a:fld id="{B1A5E0C2-5F3A-4C7E-9D11-7A2E6C0F4B01}" type="slidenum">
-              <a:rPr lang="pt-BR" sz="1400" b="1">
-                <a:solidFill>
-                  <a:srgbClr val="BFBFBF"/>
-                </a:solidFill>
-                <a:latin typeface="Montserrat"/>
-              </a:rPr>
-              <a:t>‹#›</a:t>
-            </a:fld>
-            <a:endParaRPr lang="pt-BR" sz="1400" b="1">
-              <a:solidFill>
-                <a:srgbClr val="BFBFBF"/>
-              </a:solidFill>
-            </a:endParaRPr>
-          </a:p>
-        </p:txBody>
-      </p:sp>
-      <p:sp>
-        <p:nvSpPr>
-          <p:cNvPr id="4" name="Navegação do rodapé"/>
-          <p:cNvSpPr txBox="1"/>
-          <p:nvPr/>
-        </p:nvSpPr>
-        <p:spPr>
-          <a:xfrm>
-            <a:off x="196860" y="6639248"/>
-            <a:ext cx="9223026" cy="246221"/>
-          </a:xfrm>
-          <a:prstGeom prst="rect">
-            <a:avLst/>
-          </a:prstGeom>
-          <a:noFill/>
-        </p:spPr>
-        <p:txBody>
-          <a:bodyPr wrap="square" rtlCol="0">
-            <a:spAutoFit/>
-          </a:bodyPr>
-          <a:lstStyle/>
-          <a:p>
-            <a:r>
-              <a:rPr lang="pt-BR" sz="1000" dirty="0">
-                <a:latin typeface="Montserrat"/>
-              </a:rPr>
-              <a:t xml:space="preserve">Hipótese  |  </a:t>
-            </a:r>
-            <a:r>
-              <a:rPr lang="pt-BR" sz="1000" dirty="0">
-                <a:latin typeface="Montserrat"/>
-              </a:rPr>
-              <a:t xml:space="preserve">Dados  |  </a:t>
-            </a:r>
-            <a:r>
-              <a:rPr lang="pt-BR" sz="1000" b="1" dirty="0">
-                <a:solidFill>
-                  <a:srgbClr val="114719"/>
-                </a:solidFill>
-                <a:latin typeface="Montserrat"/>
-              </a:rPr>
-              <a:t>Análise descritiva</a:t>
-            </a:r>
-            <a:r>
-              <a:rPr lang="pt-BR" sz="1000" dirty="0">
-                <a:latin typeface="Montserrat"/>
-              </a:rPr>
-              <a:t xml:space="preserve">  |  </a:t>
-            </a:r>
-            <a:r>
-              <a:rPr lang="pt-BR" sz="1000" dirty="0">
-                <a:latin typeface="Montserrat"/>
-              </a:rPr>
-              <a:t xml:space="preserve">Metodologia  |  </a:t>
-            </a:r>
-            <a:r>
-              <a:rPr lang="pt-BR" sz="1000" dirty="0">
-                <a:latin typeface="Montserrat"/>
-              </a:rPr>
-              <a:t xml:space="preserve">Identificação  |  </a:t>
-            </a:r>
-            <a:r>
-              <a:rPr lang="pt-BR" sz="1000" dirty="0">
-                <a:latin typeface="Montserrat"/>
-              </a:rPr>
-              <a:t xml:space="preserve">Resultados  |  </a:t>
-            </a:r>
-            <a:r>
-              <a:rPr lang="pt-BR" sz="1000" dirty="0">
-                <a:latin typeface="Montserrat"/>
-              </a:rPr>
-              <a:t xml:space="preserve">Robustez  |  </a:t>
-            </a:r>
-            <a:r>
-              <a:rPr lang="pt-BR" sz="1000" dirty="0">
-                <a:latin typeface="Montserrat"/>
-              </a:rPr>
-              <a:t xml:space="preserve">Discussão</a:t>
-            </a:r>
-          </a:p>
-        </p:txBody>
-      </p:sp>
-      <p:sp>
-        <p:nvSpPr>
-          <p:cNvPr id="101" name="Linha"/>
-          <p:cNvSpPr/>
-          <p:nvPr/>
-        </p:nvSpPr>
-        <p:spPr>
-          <a:xfrm>
-            <a:off x="292608" y="5212080"/>
-            <a:ext cx="11594592" cy="420624"/>
-          </a:xfrm>
-          <a:prstGeom prst="rect">
-            <a:avLst/>
-          </a:prstGeom>
-          <a:noFill/>
-          <a:ln>
-            <a:noFill/>
-          </a:ln>
-        </p:spPr>
-        <p:txBody>
-          <a:bodyPr wrap="square" lIns="164592" tIns="18288" rIns="164592" bIns="18288" rtlCol="0" anchor="ctr">
-            <a:noAutofit/>
-          </a:bodyPr>
-          <a:lstStyle/>
-          <a:p>
-            <a:pPr marL="0" indent="0" algn="l">
-              <a:lnSpc>
-                <a:spcPct val="100000"/>
-              </a:lnSpc>
-              <a:spcBef>
-                <a:spcPts val="0"/>
-              </a:spcBef>
-              <a:spcAft>
-                <a:spcPts val="0"/>
-              </a:spcAft>
-              <a:buNone/>
-            </a:pPr>
-            <a:r>
-              <a:rPr lang="pt-BR" sz="1800" b="1" dirty="0">
-                <a:solidFill>
-                  <a:srgbClr val="114719"/>
-                </a:solidFill>
-                <a:latin typeface="Montserrat"/>
-              </a:rPr>
-              <a:t>Em 0,300:</a:t>
-            </a:r>
-            <a:r>
-              <a:rPr lang="pt-BR" sz="1800" b="0" dirty="0">
-                <a:solidFill>
-                  <a:srgbClr val="3A3A3A"/>
-                </a:solidFill>
-                <a:latin typeface="Montserrat"/>
-              </a:rPr>
-              <a:t> nos dados crus os dois lados preenchem igual (33% e 33%).</a:t>
-            </a:r>
-          </a:p>
-        </p:txBody>
-      </p:sp>
-      <p:sp>
-        <p:nvSpPr>
-          <p:cNvPr id="102" name="Linha"/>
-          <p:cNvSpPr/>
-          <p:nvPr/>
-        </p:nvSpPr>
-        <p:spPr>
-          <a:xfrm>
-            <a:off x="292608" y="5687568"/>
-            <a:ext cx="11594592" cy="420624"/>
-          </a:xfrm>
-          <a:prstGeom prst="rect">
-            <a:avLst/>
-          </a:prstGeom>
-          <a:noFill/>
-          <a:ln>
-            <a:noFill/>
-          </a:ln>
-        </p:spPr>
-        <p:txBody>
-          <a:bodyPr wrap="square" lIns="164592" tIns="18288" rIns="164592" bIns="18288" rtlCol="0" anchor="ctr">
-            <a:noAutofit/>
-          </a:bodyPr>
-          <a:lstStyle/>
-          <a:p>
-            <a:pPr marL="0" indent="0" algn="l">
-              <a:lnSpc>
-                <a:spcPct val="100000"/>
-              </a:lnSpc>
-              <a:spcBef>
-                <a:spcPts val="0"/>
-              </a:spcBef>
-              <a:spcAft>
-                <a:spcPts val="0"/>
-              </a:spcAft>
-              <a:buNone/>
-            </a:pPr>
-            <a:r>
-              <a:rPr lang="pt-BR" sz="1800" b="1" dirty="0">
-                <a:solidFill>
-                  <a:srgbClr val="114719"/>
-                </a:solidFill>
-                <a:latin typeface="Montserrat"/>
-              </a:rPr>
-              <a:t>O negativo</a:t>
-            </a:r>
-            <a:r>
-              <a:rPr lang="pt-BR" sz="1800" b="0" dirty="0">
-                <a:solidFill>
-                  <a:srgbClr val="3A3A3A"/>
-                </a:solidFill>
-                <a:latin typeface="Montserrat"/>
-              </a:rPr>
-              <a:t> vem da reta levada até o corte.</a:t>
-            </a:r>
-          </a:p>
-        </p:txBody>
-      </p:sp>
-      <p:pic>
-        <p:nvPicPr>
-          <p:cNvPr id="103" name="Figura" descr="IVS contra a fração de células abertas preenchidas na 1ª chamada, nos cortes 0,300 e 0,400: médias por faixa de 0,010, municípios em cinza e reta local de cada lado"/>
-          <p:cNvPicPr>
-            <a:picLocks noChangeAspect="1"/>
-          </p:cNvPicPr>
-          <p:nvPr/>
-        </p:nvPicPr>
-        <p:blipFill>
-          <a:blip r:embed="rId3"/>
-          <a:stretch>
-            <a:fillRect/>
-          </a:stretch>
-        </p:blipFill>
-        <p:spPr>
-          <a:xfrm>
-            <a:off x="1390215" y="804672"/>
-            <a:ext cx="9399379" cy="4279392"/>
-          </a:xfrm>
-          <a:prstGeom prst="rect">
-            <a:avLst/>
-          </a:prstGeom>
-          <a:ln w="6350">
-            <a:solidFill>
-              <a:srgbClr val="DDE7DF"/>
-            </a:solidFill>
-          </a:ln>
-        </p:spPr>
-      </p:pic>
-      <p:sp>
-        <p:nvSpPr>
-          <p:cNvPr id="104" name="Fontes"/>
-          <p:cNvSpPr txBox="1"/>
-          <p:nvPr/>
-        </p:nvSpPr>
-        <p:spPr>
-          <a:xfrm>
-            <a:off x="292608" y="6181344"/>
-            <a:ext cx="11594592" cy="274320"/>
-          </a:xfrm>
-          <a:prstGeom prst="rect">
-            <a:avLst/>
-          </a:prstGeom>
-          <a:noFill/>
-          <a:ln>
-            <a:noFill/>
-          </a:ln>
-        </p:spPr>
-        <p:txBody>
-          <a:bodyPr wrap="square" lIns="0" tIns="0" rIns="0" bIns="0" rtlCol="0" anchor="b">
-            <a:noAutofit/>
-          </a:bodyPr>
-          <a:lstStyle/>
-          <a:p>
-            <a:pPr marL="0" indent="0" algn="l">
-              <a:lnSpc>
-                <a:spcPct val="95000"/>
-              </a:lnSpc>
-              <a:spcBef>
-                <a:spcPts val="0"/>
-              </a:spcBef>
-              <a:spcAft>
-                <a:spcPts val="0"/>
-              </a:spcAft>
-              <a:buNone/>
-            </a:pPr>
-            <a:r>
-              <a:rPr lang="pt-BR" sz="800" b="1" dirty="0">
-                <a:solidFill>
-                  <a:srgbClr val="6B6B6B"/>
-                </a:solidFill>
-                <a:latin typeface="Montserrat"/>
-              </a:rPr>
-              <a:t>Fontes: </a:t>
-            </a:r>
-            <a:r>
-              <a:rPr lang="pt-BR" sz="800" b="0" dirty="0">
-                <a:solidFill>
-                  <a:srgbClr val="6B6B6B"/>
-                </a:solidFill>
-                <a:latin typeface="Montserrat"/>
-              </a:rPr>
-              <a:t>output/rdd_bolsa/outcomes/outcomes_V_celula.parquet; output/rdd_bolsa/DQ_estimativas.csv (funil bruto; doc 57l; auditoria 33).</a:t>
-            </a:r>
-          </a:p>
-        </p:txBody>
-      </p:sp>
-    </p:spTree>
-  </p:cSld>
-  <p:clrMapOvr>
-    <a:masterClrMapping/>
-  </p:clrMapOvr>
-</p:sld>
-</file>
-
-<file path=ppt/slides/slide45.xml><?xml version="1.0" encoding="utf-8"?>
-<p:sld xmlns:a="http://schemas.openxmlformats.org/drawingml/2006/main" xmlns:r="http://schemas.openxmlformats.org/officeDocument/2006/relationships" xmlns:p="http://schemas.openxmlformats.org/presentationml/2006/main">
-  <p:cSld>
-    <p:spTree>
-      <p:nvGrpSpPr>
-        <p:cNvPr id="1" name=""/>
-        <p:cNvGrpSpPr/>
-        <p:nvPr/>
-      </p:nvGrpSpPr>
-      <p:grpSpPr>
-        <a:xfrm>
-          <a:off x="0" y="0"/>
-          <a:ext cx="0" cy="0"/>
-          <a:chOff x="0" y="0"/>
-          <a:chExt cx="0" cy="0"/>
-        </a:xfrm>
-      </p:grpSpPr>
-      <p:sp>
-        <p:nvSpPr>
-          <p:cNvPr id="2" name="Título"/>
-          <p:cNvSpPr>
-            <a:spLocks noGrp="1"/>
-          </p:cNvSpPr>
-          <p:nvPr>
-            <p:ph type="title"/>
-          </p:nvPr>
-        </p:nvSpPr>
-        <p:spPr/>
-        <p:txBody>
-          <a:bodyPr>
-            <a:normAutofit/>
-          </a:bodyPr>
-          <a:lstStyle/>
-          <a:p>
-            <a:pPr marL="0" indent="0" algn="l">
-              <a:lnSpc>
-                <a:spcPct val="104000"/>
-              </a:lnSpc>
-              <a:spcAft>
-                <a:spcPts val="0"/>
-              </a:spcAft>
-              <a:buNone/>
-            </a:pPr>
-            <a:r>
-              <a:rPr lang="pt-BR" sz="2400" b="1" dirty="0">
-                <a:solidFill>
-                  <a:srgbClr val="FFFFFF"/>
-                </a:solidFill>
-                <a:latin typeface="Montserrat"/>
-              </a:rPr>
-              <a:t>Dentro da faixa de R$ 10 mil, o preenchimento sobe</a:t>
+              <a:t>H1 · Dentro da faixa de R$ 10 mil, o preenchimento sobe</a:t>
             </a:r>
           </a:p>
         </p:txBody>
@@ -22234,7 +21728,7 @@
                 </a:solidFill>
                 <a:latin typeface="Montserrat"/>
               </a:rPr>
-              <a:t> a subida anda junto com a região (Nordeste); dentro da mesma UF, quase some (em auditoria).</a:t>
+              <a:t> a subida anda junto com a região (Nordeste); dentro da mesma UF, quase some.</a:t>
             </a:r>
           </a:p>
         </p:txBody>
@@ -22374,7 +21868,7 @@
                 </a:solidFill>
                 <a:latin typeface="Montserrat"/>
               </a:rPr>
-              <a:t>output/rdd_bolsa/GF_estimativas.csv, GF_resumo.json e GF_figuras/GF_medias_por_ivs.png (protocolo 62; doc 57m; em auditoria); figura usada sem redesenho.</a:t>
+              <a:t>output/rdd_bolsa/GF_estimativas.csv, GF_resumo.json e GF_figuras/GF_medias_por_ivs.png (protocolo 62; doc 57m; auditoria 37); figura usada sem redesenho.</a:t>
             </a:r>
           </a:p>
         </p:txBody>
@@ -22387,7 +21881,7 @@
 </p:sld>
 </file>
 
-<file path=ppt/slides/slide46.xml><?xml version="1.0" encoding="utf-8"?>
+<file path=ppt/slides/slide45.xml><?xml version="1.0" encoding="utf-8"?>
 <p:sld xmlns:a="http://schemas.openxmlformats.org/drawingml/2006/main" xmlns:r="http://schemas.openxmlformats.org/officeDocument/2006/relationships" xmlns:p="http://schemas.openxmlformats.org/presentationml/2006/main">
   <p:cSld>
     <p:spTree>
@@ -22437,7 +21931,7 @@
                 </a:solidFill>
                 <a:latin typeface="Montserrat"/>
               </a:rPr>
-              <a:t>Perto de 0,300 sobra uma subida forte, sem explicação</a:t>
+              <a:t>H1 · Perto de 0,300 sobra uma subida forte</a:t>
             </a:r>
           </a:p>
         </p:txBody>
@@ -22652,7 +22146,7 @@
                 </a:solidFill>
                 <a:latin typeface="Montserrat"/>
               </a:rPr>
-              <a:t> sobra uma subida forte, sem fator que a acompanhe (em auditoria).</a:t>
+              <a:t> sobra uma subida forte e imprecisa, que nenhum fator sozinho reduz à metade.</a:t>
             </a:r>
           </a:p>
         </p:txBody>
@@ -22666,7 +22160,7 @@
         <p:spPr>
           <a:xfrm>
             <a:off x="8778240" y="3155696"/>
-            <a:ext cx="3108960" cy="1626413"/>
+            <a:ext cx="3108960" cy="1346403"/>
           </a:xfrm>
           <a:prstGeom prst="roundRect">
             <a:avLst>
@@ -22707,7 +22201,7 @@
                 </a:solidFill>
                 <a:latin typeface="Montserrat"/>
               </a:rPr>
-              <a:t>É o trecho que a RDD usa do lado de baixo do corte.</a:t>
+              <a:t>São as células que a RDD usa abaixo do corte.</a:t>
             </a:r>
           </a:p>
         </p:txBody>
@@ -22765,7 +22259,519 @@
                 </a:solidFill>
                 <a:latin typeface="Montserrat"/>
               </a:rPr>
-              <a:t>output/rdd_bolsa/GF_estimativas.csv e GF_figuras/GF_inclinacao_fatores_janela.png (protocolo 62; doc 57m; em auditoria); figura usada sem redesenho.</a:t>
+              <a:t>output/rdd_bolsa/GF_estimativas.csv e GF_figuras/GF_inclinacao_fatores_janela.png (protocolo 62; doc 57m; auditoria 37); figura usada sem redesenho.</a:t>
+            </a:r>
+          </a:p>
+        </p:txBody>
+      </p:sp>
+    </p:spTree>
+  </p:cSld>
+  <p:clrMapOvr>
+    <a:masterClrMapping/>
+  </p:clrMapOvr>
+</p:sld>
+</file>
+
+<file path=ppt/slides/slide46.xml><?xml version="1.0" encoding="utf-8"?>
+<p:sld xmlns:a="http://schemas.openxmlformats.org/drawingml/2006/main" xmlns:r="http://schemas.openxmlformats.org/officeDocument/2006/relationships" xmlns:p="http://schemas.openxmlformats.org/presentationml/2006/main">
+  <p:cSld>
+    <p:spTree>
+      <p:nvGrpSpPr>
+        <p:cNvPr id="1" name=""/>
+        <p:cNvGrpSpPr/>
+        <p:nvPr/>
+      </p:nvGrpSpPr>
+      <p:grpSpPr>
+        <a:xfrm>
+          <a:off x="0" y="0"/>
+          <a:ext cx="0" cy="0"/>
+          <a:chOff x="0" y="0"/>
+          <a:chExt cx="0" cy="0"/>
+        </a:xfrm>
+      </p:grpSpPr>
+      <p:sp>
+        <p:nvSpPr>
+          <p:cNvPr id="2" name="Título"/>
+          <p:cNvSpPr>
+            <a:spLocks noGrp="1"/>
+          </p:cNvSpPr>
+          <p:nvPr>
+            <p:ph type="title"/>
+          </p:nvPr>
+        </p:nvSpPr>
+        <p:spPr/>
+        <p:txBody>
+          <a:bodyPr>
+            <a:normAutofit/>
+          </a:bodyPr>
+          <a:lstStyle/>
+          <a:p>
+            <a:pPr marL="0" indent="0" algn="l">
+              <a:lnSpc>
+                <a:spcPct val="104000"/>
+              </a:lnSpc>
+              <a:spcAft>
+                <a:spcPts val="0"/>
+              </a:spcAft>
+              <a:buNone/>
+            </a:pPr>
+            <a:r>
+              <a:rPr lang="pt-BR" sz="2400" b="1" dirty="0">
+                <a:solidFill>
+                  <a:srgbClr val="FFFFFF"/>
+                </a:solidFill>
+                <a:latin typeface="Montserrat"/>
+              </a:rPr>
+              <a:t>H1 · O salto no corte, só com vagas imediatas</a:t>
+            </a:r>
+          </a:p>
+        </p:txBody>
+      </p:sp>
+      <p:sp>
+        <p:nvSpPr>
+          <p:cNvPr id="3" name="Número da página"/>
+          <p:cNvSpPr>
+            <a:spLocks noGrp="1"/>
+          </p:cNvSpPr>
+          <p:nvPr>
+            <p:ph type="body" sz="quarter" idx="18"/>
+          </p:nvPr>
+        </p:nvSpPr>
+        <p:spPr>
+          <a:xfrm>
+            <a:off x="11706744" y="6457042"/>
+            <a:ext cx="492080" cy="400640"/>
+          </a:xfrm>
+        </p:spPr>
+        <p:txBody>
+          <a:bodyPr anchor="ctr">
+            <a:normAutofit/>
+          </a:bodyPr>
+          <a:lstStyle/>
+          <a:p>
+            <a:pPr algn="ctr"/>
+            <a:fld id="{B1A5E0C2-5F3A-4C7E-9D11-7A2E6C0F4B01}" type="slidenum">
+              <a:rPr lang="pt-BR" sz="1400" b="1">
+                <a:solidFill>
+                  <a:srgbClr val="BFBFBF"/>
+                </a:solidFill>
+                <a:latin typeface="Montserrat"/>
+              </a:rPr>
+              <a:t>‹#›</a:t>
+            </a:fld>
+            <a:endParaRPr lang="pt-BR" sz="1400" b="1">
+              <a:solidFill>
+                <a:srgbClr val="BFBFBF"/>
+              </a:solidFill>
+            </a:endParaRPr>
+          </a:p>
+        </p:txBody>
+      </p:sp>
+      <p:sp>
+        <p:nvSpPr>
+          <p:cNvPr id="4" name="Navegação do rodapé"/>
+          <p:cNvSpPr txBox="1"/>
+          <p:nvPr/>
+        </p:nvSpPr>
+        <p:spPr>
+          <a:xfrm>
+            <a:off x="196860" y="6639248"/>
+            <a:ext cx="9223026" cy="246221"/>
+          </a:xfrm>
+          <a:prstGeom prst="rect">
+            <a:avLst/>
+          </a:prstGeom>
+          <a:noFill/>
+        </p:spPr>
+        <p:txBody>
+          <a:bodyPr wrap="square" rtlCol="0">
+            <a:spAutoFit/>
+          </a:bodyPr>
+          <a:lstStyle/>
+          <a:p>
+            <a:r>
+              <a:rPr lang="pt-BR" sz="1000" dirty="0">
+                <a:latin typeface="Montserrat"/>
+              </a:rPr>
+              <a:t xml:space="preserve">Hipótese  |  </a:t>
+            </a:r>
+            <a:r>
+              <a:rPr lang="pt-BR" sz="1000" dirty="0">
+                <a:latin typeface="Montserrat"/>
+              </a:rPr>
+              <a:t xml:space="preserve">Dados  |  </a:t>
+            </a:r>
+            <a:r>
+              <a:rPr lang="pt-BR" sz="1000" dirty="0">
+                <a:latin typeface="Montserrat"/>
+              </a:rPr>
+              <a:t xml:space="preserve">Análise descritiva  |  </a:t>
+            </a:r>
+            <a:r>
+              <a:rPr lang="pt-BR" sz="1000" b="1" dirty="0">
+                <a:solidFill>
+                  <a:srgbClr val="114719"/>
+                </a:solidFill>
+                <a:latin typeface="Montserrat"/>
+              </a:rPr>
+              <a:t>Metodologia</a:t>
+            </a:r>
+            <a:r>
+              <a:rPr lang="pt-BR" sz="1000" dirty="0">
+                <a:latin typeface="Montserrat"/>
+              </a:rPr>
+              <a:t xml:space="preserve">  |  </a:t>
+            </a:r>
+            <a:r>
+              <a:rPr lang="pt-BR" sz="1000" dirty="0">
+                <a:latin typeface="Montserrat"/>
+              </a:rPr>
+              <a:t xml:space="preserve">Identificação  |  </a:t>
+            </a:r>
+            <a:r>
+              <a:rPr lang="pt-BR" sz="1000" dirty="0">
+                <a:latin typeface="Montserrat"/>
+              </a:rPr>
+              <a:t xml:space="preserve">Resultados  |  </a:t>
+            </a:r>
+            <a:r>
+              <a:rPr lang="pt-BR" sz="1000" dirty="0">
+                <a:latin typeface="Montserrat"/>
+              </a:rPr>
+              <a:t xml:space="preserve">Robustez  |  </a:t>
+            </a:r>
+            <a:r>
+              <a:rPr lang="pt-BR" sz="1000" dirty="0">
+                <a:latin typeface="Montserrat"/>
+              </a:rPr>
+              <a:t xml:space="preserve">Discussão</a:t>
+            </a:r>
+          </a:p>
+        </p:txBody>
+      </p:sp>
+      <p:sp>
+        <p:nvSpPr>
+          <p:cNvPr id="101" name="Equação em palavras"/>
+          <p:cNvSpPr/>
+          <p:nvPr/>
+        </p:nvSpPr>
+        <p:spPr>
+          <a:xfrm>
+            <a:off x="292608" y="850392"/>
+            <a:ext cx="11594592" cy="1600200"/>
+          </a:xfrm>
+          <a:prstGeom prst="roundRect">
+            <a:avLst>
+              <a:gd name="adj" fmla="val 8000"/>
+            </a:avLst>
+          </a:prstGeom>
+          <a:solidFill>
+            <a:srgbClr val="114719"/>
+          </a:solidFill>
+          <a:ln>
+            <a:noFill/>
+          </a:ln>
+        </p:spPr>
+        <p:txBody>
+          <a:bodyPr wrap="square" lIns="365760" tIns="73152" rIns="365760" bIns="73152" rtlCol="0" anchor="ctr">
+            <a:noAutofit/>
+          </a:bodyPr>
+          <a:lstStyle/>
+          <a:p>
+            <a:pPr marL="0" indent="0" algn="ctr">
+              <a:lnSpc>
+                <a:spcPct val="100000"/>
+              </a:lnSpc>
+              <a:spcBef>
+                <a:spcPts val="0"/>
+              </a:spcBef>
+              <a:spcAft>
+                <a:spcPts val="0"/>
+              </a:spcAft>
+              <a:buNone/>
+            </a:pPr>
+            <a:r>
+              <a:rPr lang="pt-BR" sz="2800" b="0" dirty="0">
+                <a:solidFill>
+                  <a:srgbClr val="FFFFFF"/>
+                </a:solidFill>
+                <a:latin typeface="Montserrat"/>
+              </a:rPr>
+              <a:t>preenchida = salto + reta de cada lado</a:t>
+            </a:r>
+          </a:p>
+        </p:txBody>
+      </p:sp>
+      <p:sp>
+        <p:nvSpPr>
+          <p:cNvPr id="102" name="Rótulo"/>
+          <p:cNvSpPr/>
+          <p:nvPr/>
+        </p:nvSpPr>
+        <p:spPr>
+          <a:xfrm>
+            <a:off x="292608" y="2724912"/>
+            <a:ext cx="2194560" cy="1591056"/>
+          </a:xfrm>
+          <a:prstGeom prst="roundRect">
+            <a:avLst>
+              <a:gd name="adj" fmla="val 10000"/>
+            </a:avLst>
+          </a:prstGeom>
+          <a:solidFill>
+            <a:srgbClr val="114719"/>
+          </a:solidFill>
+          <a:ln>
+            <a:noFill/>
+          </a:ln>
+        </p:spPr>
+        <p:txBody>
+          <a:bodyPr wrap="square" lIns="73152" tIns="45720" rIns="73152" bIns="45720" rtlCol="0" anchor="ctr">
+            <a:noAutofit/>
+          </a:bodyPr>
+          <a:lstStyle/>
+          <a:p>
+            <a:pPr marL="0" indent="0" algn="ctr">
+              <a:lnSpc>
+                <a:spcPct val="100000"/>
+              </a:lnSpc>
+              <a:spcBef>
+                <a:spcPts val="0"/>
+              </a:spcBef>
+              <a:spcAft>
+                <a:spcPts val="0"/>
+              </a:spcAft>
+              <a:buNone/>
+            </a:pPr>
+            <a:r>
+              <a:rPr lang="pt-BR" sz="2000" b="1" dirty="0">
+                <a:solidFill>
+                  <a:srgbClr val="FFFFFF"/>
+                </a:solidFill>
+                <a:latin typeface="Montserrat"/>
+              </a:rPr>
+              <a:t>Outcome</a:t>
+            </a:r>
+          </a:p>
+        </p:txBody>
+      </p:sp>
+      <p:sp>
+        <p:nvSpPr>
+          <p:cNvPr id="103" name="Item"/>
+          <p:cNvSpPr/>
+          <p:nvPr/>
+        </p:nvSpPr>
+        <p:spPr>
+          <a:xfrm>
+            <a:off x="2624328" y="2724912"/>
+            <a:ext cx="9262872" cy="1591056"/>
+          </a:xfrm>
+          <a:prstGeom prst="roundRect">
+            <a:avLst>
+              <a:gd name="adj" fmla="val 6000"/>
+            </a:avLst>
+          </a:prstGeom>
+          <a:solidFill>
+            <a:srgbClr val="F4F8F5"/>
+          </a:solidFill>
+          <a:ln w="12700">
+            <a:solidFill>
+              <a:srgbClr val="056429"/>
+            </a:solidFill>
+          </a:ln>
+        </p:spPr>
+        <p:txBody>
+          <a:bodyPr wrap="square" lIns="228600" tIns="36576" rIns="228600" bIns="36576" rtlCol="0" anchor="ctr">
+            <a:noAutofit/>
+          </a:bodyPr>
+          <a:lstStyle/>
+          <a:p>
+            <a:pPr marL="0" indent="0" algn="l">
+              <a:lnSpc>
+                <a:spcPct val="102000"/>
+              </a:lnSpc>
+              <a:spcBef>
+                <a:spcPts val="0"/>
+              </a:spcBef>
+              <a:spcAft>
+                <a:spcPts val="0"/>
+              </a:spcAft>
+              <a:buNone/>
+            </a:pPr>
+            <a:r>
+              <a:rPr lang="pt-BR" sz="2000" b="0" dirty="0">
+                <a:solidFill>
+                  <a:srgbClr val="3A3A3A"/>
+                </a:solidFill>
+                <a:latin typeface="Montserrat"/>
+              </a:rPr>
+              <a:t>vaga imediata preenchida, por célula e município</a:t>
+            </a:r>
+          </a:p>
+        </p:txBody>
+      </p:sp>
+      <p:sp>
+        <p:nvSpPr>
+          <p:cNvPr id="104" name="Rótulo"/>
+          <p:cNvSpPr/>
+          <p:nvPr/>
+        </p:nvSpPr>
+        <p:spPr>
+          <a:xfrm>
+            <a:off x="292608" y="4498848"/>
+            <a:ext cx="2194560" cy="1591056"/>
+          </a:xfrm>
+          <a:prstGeom prst="roundRect">
+            <a:avLst>
+              <a:gd name="adj" fmla="val 10000"/>
+            </a:avLst>
+          </a:prstGeom>
+          <a:solidFill>
+            <a:srgbClr val="114719"/>
+          </a:solidFill>
+          <a:ln>
+            <a:noFill/>
+          </a:ln>
+        </p:spPr>
+        <p:txBody>
+          <a:bodyPr wrap="square" lIns="73152" tIns="45720" rIns="73152" bIns="45720" rtlCol="0" anchor="ctr">
+            <a:noAutofit/>
+          </a:bodyPr>
+          <a:lstStyle/>
+          <a:p>
+            <a:pPr marL="0" indent="0" algn="ctr">
+              <a:lnSpc>
+                <a:spcPct val="100000"/>
+              </a:lnSpc>
+              <a:spcBef>
+                <a:spcPts val="0"/>
+              </a:spcBef>
+              <a:spcAft>
+                <a:spcPts val="0"/>
+              </a:spcAft>
+              <a:buNone/>
+            </a:pPr>
+            <a:r>
+              <a:rPr lang="pt-BR" sz="2000" b="1" dirty="0">
+                <a:solidFill>
+                  <a:srgbClr val="FFFFFF"/>
+                </a:solidFill>
+                <a:latin typeface="Montserrat"/>
+              </a:rPr>
+              <a:t>Razão</a:t>
+            </a:r>
+          </a:p>
+        </p:txBody>
+      </p:sp>
+      <p:sp>
+        <p:nvSpPr>
+          <p:cNvPr id="105" name="Item"/>
+          <p:cNvSpPr/>
+          <p:nvPr/>
+        </p:nvSpPr>
+        <p:spPr>
+          <a:xfrm>
+            <a:off x="2624328" y="4498848"/>
+            <a:ext cx="9262872" cy="1591056"/>
+          </a:xfrm>
+          <a:prstGeom prst="roundRect">
+            <a:avLst>
+              <a:gd name="adj" fmla="val 6000"/>
+            </a:avLst>
+          </a:prstGeom>
+          <a:solidFill>
+            <a:srgbClr val="F4F8F5"/>
+          </a:solidFill>
+          <a:ln w="12700">
+            <a:solidFill>
+              <a:srgbClr val="056429"/>
+            </a:solidFill>
+          </a:ln>
+        </p:spPr>
+        <p:txBody>
+          <a:bodyPr wrap="square" lIns="228600" tIns="36576" rIns="228600" bIns="36576" rtlCol="0" anchor="ctr">
+            <a:noAutofit/>
+          </a:bodyPr>
+          <a:lstStyle/>
+          <a:p>
+            <a:pPr marL="0" indent="0" algn="l">
+              <a:lnSpc>
+                <a:spcPct val="102000"/>
+              </a:lnSpc>
+              <a:spcBef>
+                <a:spcPts val="0"/>
+              </a:spcBef>
+              <a:spcAft>
+                <a:spcPts val="0"/>
+              </a:spcAft>
+              <a:buNone/>
+            </a:pPr>
+            <a:r>
+              <a:rPr lang="pt-BR" sz="2000" b="0" dirty="0">
+                <a:solidFill>
+                  <a:srgbClr val="3A3A3A"/>
+                </a:solidFill>
+                <a:latin typeface="Montserrat"/>
+              </a:rPr>
+              <a:t>comparamos vagas do mesmo tipo; a reserva se preenche por outro caminho</a:t>
+            </a:r>
+          </a:p>
+        </p:txBody>
+      </p:sp>
+      <p:sp>
+        <p:nvSpPr>
+          <p:cNvPr id="106" name="Fontes"/>
+          <p:cNvSpPr txBox="1"/>
+          <p:nvPr/>
+        </p:nvSpPr>
+        <p:spPr>
+          <a:xfrm>
+            <a:off x="292608" y="6181344"/>
+            <a:ext cx="11594592" cy="274320"/>
+          </a:xfrm>
+          <a:prstGeom prst="rect">
+            <a:avLst/>
+          </a:prstGeom>
+          <a:noFill/>
+          <a:ln>
+            <a:noFill/>
+          </a:ln>
+        </p:spPr>
+        <p:txBody>
+          <a:bodyPr wrap="square" lIns="0" tIns="0" rIns="0" bIns="0" rtlCol="0" anchor="b">
+            <a:noAutofit/>
+          </a:bodyPr>
+          <a:lstStyle/>
+          <a:p>
+            <a:pPr marL="0" indent="0" algn="l">
+              <a:lnSpc>
+                <a:spcPct val="95000"/>
+              </a:lnSpc>
+              <a:spcBef>
+                <a:spcPts val="0"/>
+              </a:spcBef>
+              <a:spcAft>
+                <a:spcPts val="0"/>
+              </a:spcAft>
+              <a:buNone/>
+            </a:pPr>
+            <a:r>
+              <a:rPr lang="pt-BR" sz="800" b="1" dirty="0">
+                <a:solidFill>
+                  <a:srgbClr val="6B6B6B"/>
+                </a:solidFill>
+                <a:latin typeface="Montserrat"/>
+              </a:rPr>
+              <a:t>Fontes: </a:t>
+            </a:r>
+            <a:r>
+              <a:rPr lang="pt-BR" sz="800" b="0" dirty="0">
+                <a:solidFill>
+                  <a:srgbClr val="6B6B6B"/>
+                </a:solidFill>
+                <a:latin typeface="Montserrat"/>
+              </a:rPr>
+              <a:t>adendo 48b ao protocolo 48 (docs/06_execucao/48b_adendo_H1_vagas_imediatas.md).</a:t>
             </a:r>
           </a:p>
         </p:txBody>
@@ -22824,11 +22830,11 @@
             <a:r>
               <a:rPr lang="pt-BR" sz="2400" b="1" dirty="0">
                 <a:solidFill>
-                  <a:srgbClr val="FFFFFF"/>
+                  <a:srgbClr val="C4CCC6"/>
                 </a:solidFill>
                 <a:latin typeface="Montserrat"/>
               </a:rPr>
-              <a:t>H1: o salto no corte, só com vagas imediatas</a:t>
+              <a:t>H2 e H3 · plano B: como estimamos</a:t>
             </a:r>
           </a:p>
         </p:txBody>
@@ -22957,29 +22963,82 @@
       </p:sp>
       <p:sp>
         <p:nvSpPr>
-          <p:cNvPr id="101" name="Equação em palavras"/>
+          <p:cNvPr id="101" name="Cautela"/>
           <p:cNvSpPr/>
           <p:nvPr/>
         </p:nvSpPr>
         <p:spPr>
           <a:xfrm>
-            <a:off x="292608" y="850392"/>
-            <a:ext cx="11594592" cy="1600200"/>
+            <a:off x="292608" y="5669280"/>
+            <a:ext cx="11594592" cy="420624"/>
           </a:xfrm>
           <a:prstGeom prst="roundRect">
             <a:avLst>
-              <a:gd name="adj" fmla="val 8000"/>
+              <a:gd name="adj" fmla="val 12000"/>
             </a:avLst>
           </a:prstGeom>
           <a:solidFill>
-            <a:srgbClr val="114719"/>
+            <a:srgbClr val="E7F1EA"/>
           </a:solidFill>
           <a:ln>
             <a:noFill/>
           </a:ln>
         </p:spPr>
         <p:txBody>
-          <a:bodyPr wrap="square" lIns="365760" tIns="73152" rIns="365760" bIns="73152" rtlCol="0" anchor="ctr">
+          <a:bodyPr wrap="square" lIns="164592" tIns="18288" rIns="164592" bIns="18288" rtlCol="0" anchor="ctr">
+            <a:noAutofit/>
+          </a:bodyPr>
+          <a:lstStyle/>
+          <a:p>
+            <a:pPr marL="0" indent="0" algn="l">
+              <a:lnSpc>
+                <a:spcPct val="100000"/>
+              </a:lnSpc>
+              <a:spcBef>
+                <a:spcPts val="0"/>
+              </a:spcBef>
+              <a:spcAft>
+                <a:spcPts val="0"/>
+              </a:spcAft>
+              <a:buNone/>
+            </a:pPr>
+            <a:r>
+              <a:rPr lang="pt-BR" sz="1800" b="1" dirty="0">
+                <a:solidFill>
+                  <a:srgbClr val="114719"/>
+                </a:solidFill>
+                <a:latin typeface="Montserrat"/>
+              </a:rPr>
+              <a:t>Origem não é causal; horas cadastradas não são presença.</a:t>
+            </a:r>
+          </a:p>
+        </p:txBody>
+      </p:sp>
+      <p:sp>
+        <p:nvSpPr>
+          <p:cNvPr id="102" name="Rótulo plano B"/>
+          <p:cNvSpPr/>
+          <p:nvPr/>
+        </p:nvSpPr>
+        <p:spPr>
+          <a:xfrm>
+            <a:off x="292608" y="896112"/>
+            <a:ext cx="2286000" cy="1382776"/>
+          </a:xfrm>
+          <a:prstGeom prst="roundRect">
+            <a:avLst>
+              <a:gd name="adj" fmla="val 10000"/>
+            </a:avLst>
+          </a:prstGeom>
+          <a:solidFill>
+            <a:srgbClr val="A3A39E"/>
+          </a:solidFill>
+          <a:ln>
+            <a:noFill/>
+          </a:ln>
+        </p:spPr>
+        <p:txBody>
+          <a:bodyPr wrap="square" lIns="73152" tIns="45720" rIns="73152" bIns="45720" rtlCol="0" anchor="ctr">
             <a:noAutofit/>
           </a:bodyPr>
           <a:lstStyle/>
@@ -22997,27 +23056,82 @@
               <a:buNone/>
             </a:pPr>
             <a:r>
-              <a:rPr lang="pt-BR" sz="2800" b="0" dirty="0">
+              <a:rPr lang="pt-BR" sz="2000" b="1" dirty="0">
                 <a:solidFill>
                   <a:srgbClr val="FFFFFF"/>
                 </a:solidFill>
                 <a:latin typeface="Montserrat"/>
               </a:rPr>
-              <a:t>preenchida = salto + reta de cada lado</a:t>
+              <a:t>H2 · plano B</a:t>
             </a:r>
           </a:p>
         </p:txBody>
       </p:sp>
       <p:sp>
         <p:nvSpPr>
-          <p:cNvPr id="102" name="Rótulo"/>
+          <p:cNvPr id="103" name="Item plano B"/>
           <p:cNvSpPr/>
           <p:nvPr/>
         </p:nvSpPr>
         <p:spPr>
           <a:xfrm>
-            <a:off x="292608" y="2724912"/>
-            <a:ext cx="2194560" cy="1591056"/>
+            <a:off x="2715768" y="896112"/>
+            <a:ext cx="9171432" cy="1382776"/>
+          </a:xfrm>
+          <a:prstGeom prst="roundRect">
+            <a:avLst>
+              <a:gd name="adj" fmla="val 6000"/>
+            </a:avLst>
+          </a:prstGeom>
+          <a:solidFill>
+            <a:srgbClr val="F2F2F0"/>
+          </a:solidFill>
+          <a:ln w="12700">
+            <a:solidFill>
+              <a:srgbClr val="C9C9C4"/>
+            </a:solidFill>
+          </a:ln>
+        </p:spPr>
+        <p:txBody>
+          <a:bodyPr wrap="square" lIns="228600" tIns="36576" rIns="228600" bIns="36576" rtlCol="0" anchor="ctr">
+            <a:noAutofit/>
+          </a:bodyPr>
+          <a:lstStyle/>
+          <a:p>
+            <a:pPr marL="0" indent="0" algn="l">
+              <a:lnSpc>
+                <a:spcPct val="102000"/>
+              </a:lnSpc>
+              <a:spcBef>
+                <a:spcPts val="0"/>
+              </a:spcBef>
+              <a:spcAft>
+                <a:spcPts val="0"/>
+              </a:spcAft>
+              <a:buNone/>
+            </a:pPr>
+            <a:r>
+              <a:rPr lang="pt-BR" sz="2000" b="0" dirty="0">
+                <a:solidFill>
+                  <a:srgbClr val="8A8A85"/>
+                </a:solidFill>
+                <a:latin typeface="Montserrat"/>
+              </a:rPr>
+              <a:t>logit da 1ª opção: utilidade = bolsa + IVS + distância + origem</a:t>
+            </a:r>
+          </a:p>
+        </p:txBody>
+      </p:sp>
+      <p:sp>
+        <p:nvSpPr>
+          <p:cNvPr id="104" name="Rótulo plano B"/>
+          <p:cNvSpPr/>
+          <p:nvPr/>
+        </p:nvSpPr>
+        <p:spPr>
+          <a:xfrm>
+            <a:off x="292608" y="2480056"/>
+            <a:ext cx="2286000" cy="1371600"/>
           </a:xfrm>
           <a:prstGeom prst="roundRect">
             <a:avLst>
@@ -23025,7 +23139,7 @@
             </a:avLst>
           </a:prstGeom>
           <a:solidFill>
-            <a:srgbClr val="114719"/>
+            <a:srgbClr val="A3A39E"/>
           </a:solidFill>
           <a:ln>
             <a:noFill/>
@@ -23056,21 +23170,21 @@
                 </a:solidFill>
                 <a:latin typeface="Montserrat"/>
               </a:rPr>
-              <a:t>Outcome</a:t>
+              <a:t>H3 · plano B</a:t>
             </a:r>
           </a:p>
         </p:txBody>
       </p:sp>
       <p:sp>
         <p:nvSpPr>
-          <p:cNvPr id="103" name="Item"/>
+          <p:cNvPr id="105" name="Item plano B"/>
           <p:cNvSpPr/>
           <p:nvPr/>
         </p:nvSpPr>
         <p:spPr>
           <a:xfrm>
-            <a:off x="2624328" y="2724912"/>
-            <a:ext cx="9262872" cy="1591056"/>
+            <a:off x="2715768" y="2480056"/>
+            <a:ext cx="9171432" cy="1371600"/>
           </a:xfrm>
           <a:prstGeom prst="roundRect">
             <a:avLst>
@@ -23078,11 +23192,11 @@
             </a:avLst>
           </a:prstGeom>
           <a:solidFill>
-            <a:srgbClr val="F4F8F5"/>
+            <a:srgbClr val="F2F2F0"/>
           </a:solidFill>
           <a:ln w="12700">
             <a:solidFill>
-              <a:srgbClr val="056429"/>
+              <a:srgbClr val="C9C9C4"/>
             </a:solidFill>
           </a:ln>
         </p:spPr>
@@ -23107,119 +23221,11 @@
             <a:r>
               <a:rPr lang="pt-BR" sz="2000" b="0" dirty="0">
                 <a:solidFill>
-                  <a:srgbClr val="3A3A3A"/>
+                  <a:srgbClr val="8A8A85"/>
                 </a:solidFill>
                 <a:latin typeface="Montserrat"/>
               </a:rPr>
-              <a:t>vaga imediata preenchida, por célula e município</a:t>
-            </a:r>
-          </a:p>
-        </p:txBody>
-      </p:sp>
-      <p:sp>
-        <p:nvSpPr>
-          <p:cNvPr id="104" name="Rótulo"/>
-          <p:cNvSpPr/>
-          <p:nvPr/>
-        </p:nvSpPr>
-        <p:spPr>
-          <a:xfrm>
-            <a:off x="292608" y="4498848"/>
-            <a:ext cx="2194560" cy="1591056"/>
-          </a:xfrm>
-          <a:prstGeom prst="roundRect">
-            <a:avLst>
-              <a:gd name="adj" fmla="val 10000"/>
-            </a:avLst>
-          </a:prstGeom>
-          <a:solidFill>
-            <a:srgbClr val="114719"/>
-          </a:solidFill>
-          <a:ln>
-            <a:noFill/>
-          </a:ln>
-        </p:spPr>
-        <p:txBody>
-          <a:bodyPr wrap="square" lIns="73152" tIns="45720" rIns="73152" bIns="45720" rtlCol="0" anchor="ctr">
-            <a:noAutofit/>
-          </a:bodyPr>
-          <a:lstStyle/>
-          <a:p>
-            <a:pPr marL="0" indent="0" algn="ctr">
-              <a:lnSpc>
-                <a:spcPct val="100000"/>
-              </a:lnSpc>
-              <a:spcBef>
-                <a:spcPts val="0"/>
-              </a:spcBef>
-              <a:spcAft>
-                <a:spcPts val="0"/>
-              </a:spcAft>
-              <a:buNone/>
-            </a:pPr>
-            <a:r>
-              <a:rPr lang="pt-BR" sz="2000" b="1" dirty="0">
-                <a:solidFill>
-                  <a:srgbClr val="FFFFFF"/>
-                </a:solidFill>
-                <a:latin typeface="Montserrat"/>
-              </a:rPr>
-              <a:t>Razão</a:t>
-            </a:r>
-          </a:p>
-        </p:txBody>
-      </p:sp>
-      <p:sp>
-        <p:nvSpPr>
-          <p:cNvPr id="105" name="Item"/>
-          <p:cNvSpPr/>
-          <p:nvPr/>
-        </p:nvSpPr>
-        <p:spPr>
-          <a:xfrm>
-            <a:off x="2624328" y="4498848"/>
-            <a:ext cx="9262872" cy="1591056"/>
-          </a:xfrm>
-          <a:prstGeom prst="roundRect">
-            <a:avLst>
-              <a:gd name="adj" fmla="val 6000"/>
-            </a:avLst>
-          </a:prstGeom>
-          <a:solidFill>
-            <a:srgbClr val="F4F8F5"/>
-          </a:solidFill>
-          <a:ln w="12700">
-            <a:solidFill>
-              <a:srgbClr val="056429"/>
-            </a:solidFill>
-          </a:ln>
-        </p:spPr>
-        <p:txBody>
-          <a:bodyPr wrap="square" lIns="228600" tIns="36576" rIns="228600" bIns="36576" rtlCol="0" anchor="ctr">
-            <a:noAutofit/>
-          </a:bodyPr>
-          <a:lstStyle/>
-          <a:p>
-            <a:pPr marL="0" indent="0" algn="l">
-              <a:lnSpc>
-                <a:spcPct val="102000"/>
-              </a:lnSpc>
-              <a:spcBef>
-                <a:spcPts val="0"/>
-              </a:spcBef>
-              <a:spcAft>
-                <a:spcPts val="0"/>
-              </a:spcAft>
-              <a:buNone/>
-            </a:pPr>
-            <a:r>
-              <a:rPr lang="pt-BR" sz="2000" b="0" dirty="0">
-                <a:solidFill>
-                  <a:srgbClr val="3A3A3A"/>
-                </a:solidFill>
-                <a:latin typeface="Montserrat"/>
-              </a:rPr>
-              <a:t>comparamos vagas do mesmo tipo: a de reserva não estava em jogo na 1ª chamada</a:t>
+              <a:t>estudo de evento das horas</a:t>
             </a:r>
           </a:p>
         </p:txBody>
@@ -23277,7 +23283,7 @@
                 </a:solidFill>
                 <a:latin typeface="Montserrat"/>
               </a:rPr>
-              <a:t>adendo 48b ao protocolo 48 (docs/06_execucao/48b_adendo_H1_vagas_imediatas.md).</a:t>
+              <a:t>protocolos 52, 52b, 54 e 59; docs 57a, 57i, 57d e 57h.</a:t>
             </a:r>
           </a:p>
         </p:txBody>
@@ -23340,1247 +23346,7 @@
                 </a:solidFill>
                 <a:latin typeface="Montserrat"/>
               </a:rPr>
-              <a:t>H2: o logit condicional da 1ª opção</a:t>
-            </a:r>
-          </a:p>
-        </p:txBody>
-      </p:sp>
-      <p:sp>
-        <p:nvSpPr>
-          <p:cNvPr id="3" name="Número da página"/>
-          <p:cNvSpPr>
-            <a:spLocks noGrp="1"/>
-          </p:cNvSpPr>
-          <p:nvPr>
-            <p:ph type="body" sz="quarter" idx="18"/>
-          </p:nvPr>
-        </p:nvSpPr>
-        <p:spPr>
-          <a:xfrm>
-            <a:off x="11706744" y="6457042"/>
-            <a:ext cx="492080" cy="400640"/>
-          </a:xfrm>
-        </p:spPr>
-        <p:txBody>
-          <a:bodyPr anchor="ctr">
-            <a:normAutofit/>
-          </a:bodyPr>
-          <a:lstStyle/>
-          <a:p>
-            <a:pPr algn="ctr"/>
-            <a:fld id="{B1A5E0C2-5F3A-4C7E-9D11-7A2E6C0F4B01}" type="slidenum">
-              <a:rPr lang="pt-BR" sz="1400" b="1">
-                <a:solidFill>
-                  <a:srgbClr val="BFBFBF"/>
-                </a:solidFill>
-                <a:latin typeface="Montserrat"/>
-              </a:rPr>
-              <a:t>‹#›</a:t>
-            </a:fld>
-            <a:endParaRPr lang="pt-BR" sz="1400" b="1">
-              <a:solidFill>
-                <a:srgbClr val="BFBFBF"/>
-              </a:solidFill>
-            </a:endParaRPr>
-          </a:p>
-        </p:txBody>
-      </p:sp>
-      <p:sp>
-        <p:nvSpPr>
-          <p:cNvPr id="4" name="Navegação do rodapé"/>
-          <p:cNvSpPr txBox="1"/>
-          <p:nvPr/>
-        </p:nvSpPr>
-        <p:spPr>
-          <a:xfrm>
-            <a:off x="196860" y="6639248"/>
-            <a:ext cx="9223026" cy="246221"/>
-          </a:xfrm>
-          <a:prstGeom prst="rect">
-            <a:avLst/>
-          </a:prstGeom>
-          <a:noFill/>
-        </p:spPr>
-        <p:txBody>
-          <a:bodyPr wrap="square" rtlCol="0">
-            <a:spAutoFit/>
-          </a:bodyPr>
-          <a:lstStyle/>
-          <a:p>
-            <a:r>
-              <a:rPr lang="pt-BR" sz="1000" dirty="0">
-                <a:latin typeface="Montserrat"/>
-              </a:rPr>
-              <a:t xml:space="preserve">Hipótese  |  </a:t>
-            </a:r>
-            <a:r>
-              <a:rPr lang="pt-BR" sz="1000" dirty="0">
-                <a:latin typeface="Montserrat"/>
-              </a:rPr>
-              <a:t xml:space="preserve">Dados  |  </a:t>
-            </a:r>
-            <a:r>
-              <a:rPr lang="pt-BR" sz="1000" dirty="0">
-                <a:latin typeface="Montserrat"/>
-              </a:rPr>
-              <a:t xml:space="preserve">Análise descritiva  |  </a:t>
-            </a:r>
-            <a:r>
-              <a:rPr lang="pt-BR" sz="1000" b="1" dirty="0">
-                <a:solidFill>
-                  <a:srgbClr val="114719"/>
-                </a:solidFill>
-                <a:latin typeface="Montserrat"/>
-              </a:rPr>
-              <a:t>Metodologia</a:t>
-            </a:r>
-            <a:r>
-              <a:rPr lang="pt-BR" sz="1000" dirty="0">
-                <a:latin typeface="Montserrat"/>
-              </a:rPr>
-              <a:t xml:space="preserve">  |  </a:t>
-            </a:r>
-            <a:r>
-              <a:rPr lang="pt-BR" sz="1000" dirty="0">
-                <a:latin typeface="Montserrat"/>
-              </a:rPr>
-              <a:t xml:space="preserve">Identificação  |  </a:t>
-            </a:r>
-            <a:r>
-              <a:rPr lang="pt-BR" sz="1000" dirty="0">
-                <a:latin typeface="Montserrat"/>
-              </a:rPr>
-              <a:t xml:space="preserve">Resultados  |  </a:t>
-            </a:r>
-            <a:r>
-              <a:rPr lang="pt-BR" sz="1000" dirty="0">
-                <a:latin typeface="Montserrat"/>
-              </a:rPr>
-              <a:t xml:space="preserve">Robustez  |  </a:t>
-            </a:r>
-            <a:r>
-              <a:rPr lang="pt-BR" sz="1000" dirty="0">
-                <a:latin typeface="Montserrat"/>
-              </a:rPr>
-              <a:t xml:space="preserve">Discussão</a:t>
-            </a:r>
-          </a:p>
-        </p:txBody>
-      </p:sp>
-      <p:sp>
-        <p:nvSpPr>
-          <p:cNvPr id="101" name="Equação em palavras"/>
-          <p:cNvSpPr/>
-          <p:nvPr/>
-        </p:nvSpPr>
-        <p:spPr>
-          <a:xfrm>
-            <a:off x="292608" y="850392"/>
-            <a:ext cx="11594592" cy="1600200"/>
-          </a:xfrm>
-          <a:prstGeom prst="roundRect">
-            <a:avLst>
-              <a:gd name="adj" fmla="val 8000"/>
-            </a:avLst>
-          </a:prstGeom>
-          <a:solidFill>
-            <a:srgbClr val="114719"/>
-          </a:solidFill>
-          <a:ln>
-            <a:noFill/>
-          </a:ln>
-        </p:spPr>
-        <p:txBody>
-          <a:bodyPr wrap="square" lIns="365760" tIns="73152" rIns="365760" bIns="73152" rtlCol="0" anchor="ctr">
-            <a:noAutofit/>
-          </a:bodyPr>
-          <a:lstStyle/>
-          <a:p>
-            <a:pPr marL="0" indent="0" algn="ctr">
-              <a:lnSpc>
-                <a:spcPct val="100000"/>
-              </a:lnSpc>
-              <a:spcBef>
-                <a:spcPts val="0"/>
-              </a:spcBef>
-              <a:spcAft>
-                <a:spcPts val="0"/>
-              </a:spcAft>
-              <a:buNone/>
-            </a:pPr>
-            <a:r>
-              <a:rPr lang="pt-BR" sz="2800" b="0" dirty="0">
-                <a:solidFill>
-                  <a:srgbClr val="FFFFFF"/>
-                </a:solidFill>
-                <a:latin typeface="Montserrat"/>
-              </a:rPr>
-              <a:t>utilidade = bolsa + curva do IVS + distância + origem</a:t>
-            </a:r>
-          </a:p>
-        </p:txBody>
-      </p:sp>
-      <p:sp>
-        <p:nvSpPr>
-          <p:cNvPr id="102" name="Rótulo"/>
-          <p:cNvSpPr/>
-          <p:nvPr/>
-        </p:nvSpPr>
-        <p:spPr>
-          <a:xfrm>
-            <a:off x="292608" y="2724912"/>
-            <a:ext cx="2194560" cy="999744"/>
-          </a:xfrm>
-          <a:prstGeom prst="roundRect">
-            <a:avLst>
-              <a:gd name="adj" fmla="val 10000"/>
-            </a:avLst>
-          </a:prstGeom>
-          <a:solidFill>
-            <a:srgbClr val="114719"/>
-          </a:solidFill>
-          <a:ln>
-            <a:noFill/>
-          </a:ln>
-        </p:spPr>
-        <p:txBody>
-          <a:bodyPr wrap="square" lIns="73152" tIns="45720" rIns="73152" bIns="45720" rtlCol="0" anchor="ctr">
-            <a:noAutofit/>
-          </a:bodyPr>
-          <a:lstStyle/>
-          <a:p>
-            <a:pPr marL="0" indent="0" algn="ctr">
-              <a:lnSpc>
-                <a:spcPct val="100000"/>
-              </a:lnSpc>
-              <a:spcBef>
-                <a:spcPts val="0"/>
-              </a:spcBef>
-              <a:spcAft>
-                <a:spcPts val="0"/>
-              </a:spcAft>
-              <a:buNone/>
-            </a:pPr>
-            <a:r>
-              <a:rPr lang="pt-BR" sz="2000" b="1" dirty="0">
-                <a:solidFill>
-                  <a:srgbClr val="FFFFFF"/>
-                </a:solidFill>
-                <a:latin typeface="Montserrat"/>
-              </a:rPr>
-              <a:t>Outcome</a:t>
-            </a:r>
-          </a:p>
-        </p:txBody>
-      </p:sp>
-      <p:sp>
-        <p:nvSpPr>
-          <p:cNvPr id="103" name="Item"/>
-          <p:cNvSpPr/>
-          <p:nvPr/>
-        </p:nvSpPr>
-        <p:spPr>
-          <a:xfrm>
-            <a:off x="2624328" y="2724912"/>
-            <a:ext cx="9262872" cy="999744"/>
-          </a:xfrm>
-          <a:prstGeom prst="roundRect">
-            <a:avLst>
-              <a:gd name="adj" fmla="val 6000"/>
-            </a:avLst>
-          </a:prstGeom>
-          <a:solidFill>
-            <a:srgbClr val="F4F8F5"/>
-          </a:solidFill>
-          <a:ln w="12700">
-            <a:solidFill>
-              <a:srgbClr val="056429"/>
-            </a:solidFill>
-          </a:ln>
-        </p:spPr>
-        <p:txBody>
-          <a:bodyPr wrap="square" lIns="228600" tIns="36576" rIns="228600" bIns="36576" rtlCol="0" anchor="ctr">
-            <a:noAutofit/>
-          </a:bodyPr>
-          <a:lstStyle/>
-          <a:p>
-            <a:pPr marL="0" indent="0" algn="l">
-              <a:lnSpc>
-                <a:spcPct val="102000"/>
-              </a:lnSpc>
-              <a:spcBef>
-                <a:spcPts val="0"/>
-              </a:spcBef>
-              <a:spcAft>
-                <a:spcPts val="0"/>
-              </a:spcAft>
-              <a:buNone/>
-            </a:pPr>
-            <a:r>
-              <a:rPr lang="pt-BR" sz="2000" b="0" dirty="0">
-                <a:solidFill>
-                  <a:srgbClr val="3A3A3A"/>
-                </a:solidFill>
-                <a:latin typeface="Montserrat"/>
-              </a:rPr>
-              <a:t>1ª opção de cada candidato</a:t>
-            </a:r>
-          </a:p>
-        </p:txBody>
-      </p:sp>
-      <p:sp>
-        <p:nvSpPr>
-          <p:cNvPr id="104" name="Rótulo"/>
-          <p:cNvSpPr/>
-          <p:nvPr/>
-        </p:nvSpPr>
-        <p:spPr>
-          <a:xfrm>
-            <a:off x="292608" y="3907536"/>
-            <a:ext cx="2194560" cy="999744"/>
-          </a:xfrm>
-          <a:prstGeom prst="roundRect">
-            <a:avLst>
-              <a:gd name="adj" fmla="val 10000"/>
-            </a:avLst>
-          </a:prstGeom>
-          <a:solidFill>
-            <a:srgbClr val="114719"/>
-          </a:solidFill>
-          <a:ln>
-            <a:noFill/>
-          </a:ln>
-        </p:spPr>
-        <p:txBody>
-          <a:bodyPr wrap="square" lIns="73152" tIns="45720" rIns="73152" bIns="45720" rtlCol="0" anchor="ctr">
-            <a:noAutofit/>
-          </a:bodyPr>
-          <a:lstStyle/>
-          <a:p>
-            <a:pPr marL="0" indent="0" algn="ctr">
-              <a:lnSpc>
-                <a:spcPct val="100000"/>
-              </a:lnSpc>
-              <a:spcBef>
-                <a:spcPts val="0"/>
-              </a:spcBef>
-              <a:spcAft>
-                <a:spcPts val="0"/>
-              </a:spcAft>
-              <a:buNone/>
-            </a:pPr>
-            <a:r>
-              <a:rPr lang="pt-BR" sz="2000" b="1" dirty="0">
-                <a:solidFill>
-                  <a:srgbClr val="FFFFFF"/>
-                </a:solidFill>
-                <a:latin typeface="Montserrat"/>
-              </a:rPr>
-              <a:t>Comparação</a:t>
-            </a:r>
-          </a:p>
-        </p:txBody>
-      </p:sp>
-      <p:sp>
-        <p:nvSpPr>
-          <p:cNvPr id="105" name="Item"/>
-          <p:cNvSpPr/>
-          <p:nvPr/>
-        </p:nvSpPr>
-        <p:spPr>
-          <a:xfrm>
-            <a:off x="2624328" y="3907536"/>
-            <a:ext cx="9262872" cy="999744"/>
-          </a:xfrm>
-          <a:prstGeom prst="roundRect">
-            <a:avLst>
-              <a:gd name="adj" fmla="val 6000"/>
-            </a:avLst>
-          </a:prstGeom>
-          <a:solidFill>
-            <a:srgbClr val="F4F8F5"/>
-          </a:solidFill>
-          <a:ln w="12700">
-            <a:solidFill>
-              <a:srgbClr val="056429"/>
-            </a:solidFill>
-          </a:ln>
-        </p:spPr>
-        <p:txBody>
-          <a:bodyPr wrap="square" lIns="228600" tIns="36576" rIns="228600" bIns="36576" rtlCol="0" anchor="ctr">
-            <a:noAutofit/>
-          </a:bodyPr>
-          <a:lstStyle/>
-          <a:p>
-            <a:pPr marL="0" indent="0" algn="l">
-              <a:lnSpc>
-                <a:spcPct val="102000"/>
-              </a:lnSpc>
-              <a:spcBef>
-                <a:spcPts val="0"/>
-              </a:spcBef>
-              <a:spcAft>
-                <a:spcPts val="0"/>
-              </a:spcAft>
-              <a:buNone/>
-            </a:pPr>
-            <a:r>
-              <a:rPr lang="pt-BR" sz="2000" b="0" dirty="0">
-                <a:solidFill>
-                  <a:srgbClr val="3A3A3A"/>
-                </a:solidFill>
-                <a:latin typeface="Montserrat"/>
-              </a:rPr>
-              <a:t>vagas do mesmo curso e ciclo</a:t>
-            </a:r>
-          </a:p>
-        </p:txBody>
-      </p:sp>
-      <p:sp>
-        <p:nvSpPr>
-          <p:cNvPr id="106" name="Rótulo"/>
-          <p:cNvSpPr/>
-          <p:nvPr/>
-        </p:nvSpPr>
-        <p:spPr>
-          <a:xfrm>
-            <a:off x="292608" y="5090160"/>
-            <a:ext cx="2194560" cy="999744"/>
-          </a:xfrm>
-          <a:prstGeom prst="roundRect">
-            <a:avLst>
-              <a:gd name="adj" fmla="val 10000"/>
-            </a:avLst>
-          </a:prstGeom>
-          <a:solidFill>
-            <a:srgbClr val="114719"/>
-          </a:solidFill>
-          <a:ln>
-            <a:noFill/>
-          </a:ln>
-        </p:spPr>
-        <p:txBody>
-          <a:bodyPr wrap="square" lIns="73152" tIns="45720" rIns="73152" bIns="45720" rtlCol="0" anchor="ctr">
-            <a:noAutofit/>
-          </a:bodyPr>
-          <a:lstStyle/>
-          <a:p>
-            <a:pPr marL="0" indent="0" algn="ctr">
-              <a:lnSpc>
-                <a:spcPct val="100000"/>
-              </a:lnSpc>
-              <a:spcBef>
-                <a:spcPts val="0"/>
-              </a:spcBef>
-              <a:spcAft>
-                <a:spcPts val="0"/>
-              </a:spcAft>
-              <a:buNone/>
-            </a:pPr>
-            <a:r>
-              <a:rPr lang="pt-BR" sz="2000" b="1" dirty="0">
-                <a:solidFill>
-                  <a:srgbClr val="FFFFFF"/>
-                </a:solidFill>
-                <a:latin typeface="Montserrat"/>
-              </a:rPr>
-              <a:t>Cuidado</a:t>
-            </a:r>
-          </a:p>
-        </p:txBody>
-      </p:sp>
-      <p:sp>
-        <p:nvSpPr>
-          <p:cNvPr id="107" name="Item"/>
-          <p:cNvSpPr/>
-          <p:nvPr/>
-        </p:nvSpPr>
-        <p:spPr>
-          <a:xfrm>
-            <a:off x="2624328" y="5090160"/>
-            <a:ext cx="9262872" cy="999744"/>
-          </a:xfrm>
-          <a:prstGeom prst="roundRect">
-            <a:avLst>
-              <a:gd name="adj" fmla="val 6000"/>
-            </a:avLst>
-          </a:prstGeom>
-          <a:solidFill>
-            <a:srgbClr val="F4F8F5"/>
-          </a:solidFill>
-          <a:ln w="12700">
-            <a:solidFill>
-              <a:srgbClr val="056429"/>
-            </a:solidFill>
-          </a:ln>
-        </p:spPr>
-        <p:txBody>
-          <a:bodyPr wrap="square" lIns="228600" tIns="36576" rIns="228600" bIns="36576" rtlCol="0" anchor="ctr">
-            <a:noAutofit/>
-          </a:bodyPr>
-          <a:lstStyle/>
-          <a:p>
-            <a:pPr marL="0" indent="0" algn="l">
-              <a:lnSpc>
-                <a:spcPct val="102000"/>
-              </a:lnSpc>
-              <a:spcBef>
-                <a:spcPts val="0"/>
-              </a:spcBef>
-              <a:spcAft>
-                <a:spcPts val="0"/>
-              </a:spcAft>
-              <a:buNone/>
-            </a:pPr>
-            <a:r>
-              <a:rPr lang="pt-BR" sz="2000" b="0" dirty="0">
-                <a:solidFill>
-                  <a:srgbClr val="3A3A3A"/>
-                </a:solidFill>
-                <a:latin typeface="Montserrat"/>
-              </a:rPr>
-              <a:t>só quem se candidatou; origem não é causal</a:t>
-            </a:r>
-          </a:p>
-        </p:txBody>
-      </p:sp>
-      <p:sp>
-        <p:nvSpPr>
-          <p:cNvPr id="108" name="Fontes"/>
-          <p:cNvSpPr txBox="1"/>
-          <p:nvPr/>
-        </p:nvSpPr>
-        <p:spPr>
-          <a:xfrm>
-            <a:off x="292608" y="6181344"/>
-            <a:ext cx="11594592" cy="274320"/>
-          </a:xfrm>
-          <a:prstGeom prst="rect">
-            <a:avLst/>
-          </a:prstGeom>
-          <a:noFill/>
-          <a:ln>
-            <a:noFill/>
-          </a:ln>
-        </p:spPr>
-        <p:txBody>
-          <a:bodyPr wrap="square" lIns="0" tIns="0" rIns="0" bIns="0" rtlCol="0" anchor="b">
-            <a:noAutofit/>
-          </a:bodyPr>
-          <a:lstStyle/>
-          <a:p>
-            <a:pPr marL="0" indent="0" algn="l">
-              <a:lnSpc>
-                <a:spcPct val="95000"/>
-              </a:lnSpc>
-              <a:spcBef>
-                <a:spcPts val="0"/>
-              </a:spcBef>
-              <a:spcAft>
-                <a:spcPts val="0"/>
-              </a:spcAft>
-              <a:buNone/>
-            </a:pPr>
-            <a:r>
-              <a:rPr lang="pt-BR" sz="800" b="1" dirty="0">
-                <a:solidFill>
-                  <a:srgbClr val="6B6B6B"/>
-                </a:solidFill>
-                <a:latin typeface="Montserrat"/>
-              </a:rPr>
-              <a:t>Fontes: </a:t>
-            </a:r>
-            <a:r>
-              <a:rPr lang="pt-BR" sz="800" b="0" dirty="0">
-                <a:solidFill>
-                  <a:srgbClr val="6B6B6B"/>
-                </a:solidFill>
-                <a:latin typeface="Montserrat"/>
-              </a:rPr>
-              <a:t>protocolos 52 e 52b; docs 57a e 57i.</a:t>
-            </a:r>
-          </a:p>
-        </p:txBody>
-      </p:sp>
-    </p:spTree>
-  </p:cSld>
-  <p:clrMapOvr>
-    <a:masterClrMapping/>
-  </p:clrMapOvr>
-</p:sld>
-</file>
-
-<file path=ppt/slides/slide49.xml><?xml version="1.0" encoding="utf-8"?>
-<p:sld xmlns:a="http://schemas.openxmlformats.org/drawingml/2006/main" xmlns:r="http://schemas.openxmlformats.org/officeDocument/2006/relationships" xmlns:p="http://schemas.openxmlformats.org/presentationml/2006/main">
-  <p:cSld>
-    <p:spTree>
-      <p:nvGrpSpPr>
-        <p:cNvPr id="1" name=""/>
-        <p:cNvGrpSpPr/>
-        <p:nvPr/>
-      </p:nvGrpSpPr>
-      <p:grpSpPr>
-        <a:xfrm>
-          <a:off x="0" y="0"/>
-          <a:ext cx="0" cy="0"/>
-          <a:chOff x="0" y="0"/>
-          <a:chExt cx="0" cy="0"/>
-        </a:xfrm>
-      </p:grpSpPr>
-      <p:sp>
-        <p:nvSpPr>
-          <p:cNvPr id="2" name="Título"/>
-          <p:cNvSpPr>
-            <a:spLocks noGrp="1"/>
-          </p:cNvSpPr>
-          <p:nvPr>
-            <p:ph type="title"/>
-          </p:nvPr>
-        </p:nvSpPr>
-        <p:spPr/>
-        <p:txBody>
-          <a:bodyPr>
-            <a:normAutofit/>
-          </a:bodyPr>
-          <a:lstStyle/>
-          <a:p>
-            <a:pPr marL="0" indent="0" algn="l">
-              <a:lnSpc>
-                <a:spcPct val="104000"/>
-              </a:lnSpc>
-              <a:spcAft>
-                <a:spcPts val="0"/>
-              </a:spcAft>
-              <a:buNone/>
-            </a:pPr>
-            <a:r>
-              <a:rPr lang="pt-BR" sz="2400" b="1" dirty="0">
-                <a:solidFill>
-                  <a:srgbClr val="FFFFFF"/>
-                </a:solidFill>
-                <a:latin typeface="Montserrat"/>
-              </a:rPr>
-              <a:t>H3: horas antes e depois de entrar</a:t>
-            </a:r>
-          </a:p>
-        </p:txBody>
-      </p:sp>
-      <p:sp>
-        <p:nvSpPr>
-          <p:cNvPr id="3" name="Número da página"/>
-          <p:cNvSpPr>
-            <a:spLocks noGrp="1"/>
-          </p:cNvSpPr>
-          <p:nvPr>
-            <p:ph type="body" sz="quarter" idx="18"/>
-          </p:nvPr>
-        </p:nvSpPr>
-        <p:spPr>
-          <a:xfrm>
-            <a:off x="11706744" y="6457042"/>
-            <a:ext cx="492080" cy="400640"/>
-          </a:xfrm>
-        </p:spPr>
-        <p:txBody>
-          <a:bodyPr anchor="ctr">
-            <a:normAutofit/>
-          </a:bodyPr>
-          <a:lstStyle/>
-          <a:p>
-            <a:pPr algn="ctr"/>
-            <a:fld id="{B1A5E0C2-5F3A-4C7E-9D11-7A2E6C0F4B01}" type="slidenum">
-              <a:rPr lang="pt-BR" sz="1400" b="1">
-                <a:solidFill>
-                  <a:srgbClr val="BFBFBF"/>
-                </a:solidFill>
-                <a:latin typeface="Montserrat"/>
-              </a:rPr>
-              <a:t>‹#›</a:t>
-            </a:fld>
-            <a:endParaRPr lang="pt-BR" sz="1400" b="1">
-              <a:solidFill>
-                <a:srgbClr val="BFBFBF"/>
-              </a:solidFill>
-            </a:endParaRPr>
-          </a:p>
-        </p:txBody>
-      </p:sp>
-      <p:sp>
-        <p:nvSpPr>
-          <p:cNvPr id="4" name="Navegação do rodapé"/>
-          <p:cNvSpPr txBox="1"/>
-          <p:nvPr/>
-        </p:nvSpPr>
-        <p:spPr>
-          <a:xfrm>
-            <a:off x="196860" y="6639248"/>
-            <a:ext cx="9223026" cy="246221"/>
-          </a:xfrm>
-          <a:prstGeom prst="rect">
-            <a:avLst/>
-          </a:prstGeom>
-          <a:noFill/>
-        </p:spPr>
-        <p:txBody>
-          <a:bodyPr wrap="square" rtlCol="0">
-            <a:spAutoFit/>
-          </a:bodyPr>
-          <a:lstStyle/>
-          <a:p>
-            <a:r>
-              <a:rPr lang="pt-BR" sz="1000" dirty="0">
-                <a:latin typeface="Montserrat"/>
-              </a:rPr>
-              <a:t xml:space="preserve">Hipótese  |  </a:t>
-            </a:r>
-            <a:r>
-              <a:rPr lang="pt-BR" sz="1000" dirty="0">
-                <a:latin typeface="Montserrat"/>
-              </a:rPr>
-              <a:t xml:space="preserve">Dados  |  </a:t>
-            </a:r>
-            <a:r>
-              <a:rPr lang="pt-BR" sz="1000" dirty="0">
-                <a:latin typeface="Montserrat"/>
-              </a:rPr>
-              <a:t xml:space="preserve">Análise descritiva  |  </a:t>
-            </a:r>
-            <a:r>
-              <a:rPr lang="pt-BR" sz="1000" b="1" dirty="0">
-                <a:solidFill>
-                  <a:srgbClr val="114719"/>
-                </a:solidFill>
-                <a:latin typeface="Montserrat"/>
-              </a:rPr>
-              <a:t>Metodologia</a:t>
-            </a:r>
-            <a:r>
-              <a:rPr lang="pt-BR" sz="1000" dirty="0">
-                <a:latin typeface="Montserrat"/>
-              </a:rPr>
-              <a:t xml:space="preserve">  |  </a:t>
-            </a:r>
-            <a:r>
-              <a:rPr lang="pt-BR" sz="1000" dirty="0">
-                <a:latin typeface="Montserrat"/>
-              </a:rPr>
-              <a:t xml:space="preserve">Identificação  |  </a:t>
-            </a:r>
-            <a:r>
-              <a:rPr lang="pt-BR" sz="1000" dirty="0">
-                <a:latin typeface="Montserrat"/>
-              </a:rPr>
-              <a:t xml:space="preserve">Resultados  |  </a:t>
-            </a:r>
-            <a:r>
-              <a:rPr lang="pt-BR" sz="1000" dirty="0">
-                <a:latin typeface="Montserrat"/>
-              </a:rPr>
-              <a:t xml:space="preserve">Robustez  |  </a:t>
-            </a:r>
-            <a:r>
-              <a:rPr lang="pt-BR" sz="1000" dirty="0">
-                <a:latin typeface="Montserrat"/>
-              </a:rPr>
-              <a:t xml:space="preserve">Discussão</a:t>
-            </a:r>
-          </a:p>
-        </p:txBody>
-      </p:sp>
-      <p:sp>
-        <p:nvSpPr>
-          <p:cNvPr id="101" name="Equação em palavras"/>
-          <p:cNvSpPr/>
-          <p:nvPr/>
-        </p:nvSpPr>
-        <p:spPr>
-          <a:xfrm>
-            <a:off x="292608" y="850392"/>
-            <a:ext cx="11594592" cy="1600200"/>
-          </a:xfrm>
-          <a:prstGeom prst="roundRect">
-            <a:avLst>
-              <a:gd name="adj" fmla="val 8000"/>
-            </a:avLst>
-          </a:prstGeom>
-          <a:solidFill>
-            <a:srgbClr val="114719"/>
-          </a:solidFill>
-          <a:ln>
-            <a:noFill/>
-          </a:ln>
-        </p:spPr>
-        <p:txBody>
-          <a:bodyPr wrap="square" lIns="365760" tIns="73152" rIns="365760" bIns="73152" rtlCol="0" anchor="ctr">
-            <a:noAutofit/>
-          </a:bodyPr>
-          <a:lstStyle/>
-          <a:p>
-            <a:pPr marL="0" indent="0" algn="ctr">
-              <a:lnSpc>
-                <a:spcPct val="100000"/>
-              </a:lnSpc>
-              <a:spcBef>
-                <a:spcPts val="0"/>
-              </a:spcBef>
-              <a:spcAft>
-                <a:spcPts val="0"/>
-              </a:spcAft>
-              <a:buNone/>
-            </a:pPr>
-            <a:r>
-              <a:rPr lang="pt-BR" sz="2800" b="0" dirty="0">
-                <a:solidFill>
-                  <a:srgbClr val="FFFFFF"/>
-                </a:solidFill>
-                <a:latin typeface="Montserrat"/>
-              </a:rPr>
-              <a:t>variação das horas = quem entrou − quem ainda não entrou</a:t>
-            </a:r>
-          </a:p>
-        </p:txBody>
-      </p:sp>
-      <p:sp>
-        <p:nvSpPr>
-          <p:cNvPr id="102" name="Rótulo"/>
-          <p:cNvSpPr/>
-          <p:nvPr/>
-        </p:nvSpPr>
-        <p:spPr>
-          <a:xfrm>
-            <a:off x="292608" y="2724912"/>
-            <a:ext cx="2194560" cy="999744"/>
-          </a:xfrm>
-          <a:prstGeom prst="roundRect">
-            <a:avLst>
-              <a:gd name="adj" fmla="val 10000"/>
-            </a:avLst>
-          </a:prstGeom>
-          <a:solidFill>
-            <a:srgbClr val="114719"/>
-          </a:solidFill>
-          <a:ln>
-            <a:noFill/>
-          </a:ln>
-        </p:spPr>
-        <p:txBody>
-          <a:bodyPr wrap="square" lIns="73152" tIns="45720" rIns="73152" bIns="45720" rtlCol="0" anchor="ctr">
-            <a:noAutofit/>
-          </a:bodyPr>
-          <a:lstStyle/>
-          <a:p>
-            <a:pPr marL="0" indent="0" algn="ctr">
-              <a:lnSpc>
-                <a:spcPct val="100000"/>
-              </a:lnSpc>
-              <a:spcBef>
-                <a:spcPts val="0"/>
-              </a:spcBef>
-              <a:spcAft>
-                <a:spcPts val="0"/>
-              </a:spcAft>
-              <a:buNone/>
-            </a:pPr>
-            <a:r>
-              <a:rPr lang="pt-BR" sz="2000" b="1" dirty="0">
-                <a:solidFill>
-                  <a:srgbClr val="FFFFFF"/>
-                </a:solidFill>
-                <a:latin typeface="Montserrat"/>
-              </a:rPr>
-              <a:t>Outcome</a:t>
-            </a:r>
-          </a:p>
-        </p:txBody>
-      </p:sp>
-      <p:sp>
-        <p:nvSpPr>
-          <p:cNvPr id="103" name="Item"/>
-          <p:cNvSpPr/>
-          <p:nvPr/>
-        </p:nvSpPr>
-        <p:spPr>
-          <a:xfrm>
-            <a:off x="2624328" y="2724912"/>
-            <a:ext cx="9262872" cy="999744"/>
-          </a:xfrm>
-          <a:prstGeom prst="roundRect">
-            <a:avLst>
-              <a:gd name="adj" fmla="val 6000"/>
-            </a:avLst>
-          </a:prstGeom>
-          <a:solidFill>
-            <a:srgbClr val="F4F8F5"/>
-          </a:solidFill>
-          <a:ln w="12700">
-            <a:solidFill>
-              <a:srgbClr val="056429"/>
-            </a:solidFill>
-          </a:ln>
-        </p:spPr>
-        <p:txBody>
-          <a:bodyPr wrap="square" lIns="228600" tIns="36576" rIns="228600" bIns="36576" rtlCol="0" anchor="ctr">
-            <a:noAutofit/>
-          </a:bodyPr>
-          <a:lstStyle/>
-          <a:p>
-            <a:pPr marL="0" indent="0" algn="l">
-              <a:lnSpc>
-                <a:spcPct val="102000"/>
-              </a:lnSpc>
-              <a:spcBef>
-                <a:spcPts val="0"/>
-              </a:spcBef>
-              <a:spcAft>
-                <a:spcPts val="0"/>
-              </a:spcAft>
-              <a:buNone/>
-            </a:pPr>
-            <a:r>
-              <a:rPr lang="pt-BR" sz="2000" b="0" dirty="0">
-                <a:solidFill>
-                  <a:srgbClr val="3A3A3A"/>
-                </a:solidFill>
-                <a:latin typeface="Montserrat"/>
-              </a:rPr>
-              <a:t>horas do médico no CNES</a:t>
-            </a:r>
-          </a:p>
-        </p:txBody>
-      </p:sp>
-      <p:sp>
-        <p:nvSpPr>
-          <p:cNvPr id="104" name="Rótulo"/>
-          <p:cNvSpPr/>
-          <p:nvPr/>
-        </p:nvSpPr>
-        <p:spPr>
-          <a:xfrm>
-            <a:off x="292608" y="3907536"/>
-            <a:ext cx="2194560" cy="999744"/>
-          </a:xfrm>
-          <a:prstGeom prst="roundRect">
-            <a:avLst>
-              <a:gd name="adj" fmla="val 10000"/>
-            </a:avLst>
-          </a:prstGeom>
-          <a:solidFill>
-            <a:srgbClr val="114719"/>
-          </a:solidFill>
-          <a:ln>
-            <a:noFill/>
-          </a:ln>
-        </p:spPr>
-        <p:txBody>
-          <a:bodyPr wrap="square" lIns="73152" tIns="45720" rIns="73152" bIns="45720" rtlCol="0" anchor="ctr">
-            <a:noAutofit/>
-          </a:bodyPr>
-          <a:lstStyle/>
-          <a:p>
-            <a:pPr marL="0" indent="0" algn="ctr">
-              <a:lnSpc>
-                <a:spcPct val="100000"/>
-              </a:lnSpc>
-              <a:spcBef>
-                <a:spcPts val="0"/>
-              </a:spcBef>
-              <a:spcAft>
-                <a:spcPts val="0"/>
-              </a:spcAft>
-              <a:buNone/>
-            </a:pPr>
-            <a:r>
-              <a:rPr lang="pt-BR" sz="2000" b="1" dirty="0">
-                <a:solidFill>
-                  <a:srgbClr val="FFFFFF"/>
-                </a:solidFill>
-                <a:latin typeface="Montserrat"/>
-              </a:rPr>
-              <a:t>Amostra</a:t>
-            </a:r>
-          </a:p>
-        </p:txBody>
-      </p:sp>
-      <p:sp>
-        <p:nvSpPr>
-          <p:cNvPr id="105" name="Item"/>
-          <p:cNvSpPr/>
-          <p:nvPr/>
-        </p:nvSpPr>
-        <p:spPr>
-          <a:xfrm>
-            <a:off x="2624328" y="3907536"/>
-            <a:ext cx="9262872" cy="999744"/>
-          </a:xfrm>
-          <a:prstGeom prst="roundRect">
-            <a:avLst>
-              <a:gd name="adj" fmla="val 6000"/>
-            </a:avLst>
-          </a:prstGeom>
-          <a:solidFill>
-            <a:srgbClr val="F4F8F5"/>
-          </a:solidFill>
-          <a:ln w="12700">
-            <a:solidFill>
-              <a:srgbClr val="056429"/>
-            </a:solidFill>
-          </a:ln>
-        </p:spPr>
-        <p:txBody>
-          <a:bodyPr wrap="square" lIns="228600" tIns="36576" rIns="228600" bIns="36576" rtlCol="0" anchor="ctr">
-            <a:noAutofit/>
-          </a:bodyPr>
-          <a:lstStyle/>
-          <a:p>
-            <a:pPr marL="0" indent="0" algn="l">
-              <a:lnSpc>
-                <a:spcPct val="102000"/>
-              </a:lnSpc>
-              <a:spcBef>
-                <a:spcPts val="0"/>
-              </a:spcBef>
-              <a:spcAft>
-                <a:spcPts val="0"/>
-              </a:spcAft>
-              <a:buNone/>
-            </a:pPr>
-            <a:r>
-              <a:rPr lang="pt-BR" sz="2000" b="0" dirty="0">
-                <a:solidFill>
-                  <a:srgbClr val="3A3A3A"/>
-                </a:solidFill>
-                <a:latin typeface="Montserrat"/>
-              </a:rPr>
-              <a:t>médicos dos ciclos 1 e 2</a:t>
-            </a:r>
-          </a:p>
-        </p:txBody>
-      </p:sp>
-      <p:sp>
-        <p:nvSpPr>
-          <p:cNvPr id="106" name="Rótulo"/>
-          <p:cNvSpPr/>
-          <p:nvPr/>
-        </p:nvSpPr>
-        <p:spPr>
-          <a:xfrm>
-            <a:off x="292608" y="5090160"/>
-            <a:ext cx="2194560" cy="999744"/>
-          </a:xfrm>
-          <a:prstGeom prst="roundRect">
-            <a:avLst>
-              <a:gd name="adj" fmla="val 10000"/>
-            </a:avLst>
-          </a:prstGeom>
-          <a:solidFill>
-            <a:srgbClr val="114719"/>
-          </a:solidFill>
-          <a:ln>
-            <a:noFill/>
-          </a:ln>
-        </p:spPr>
-        <p:txBody>
-          <a:bodyPr wrap="square" lIns="73152" tIns="45720" rIns="73152" bIns="45720" rtlCol="0" anchor="ctr">
-            <a:noAutofit/>
-          </a:bodyPr>
-          <a:lstStyle/>
-          <a:p>
-            <a:pPr marL="0" indent="0" algn="ctr">
-              <a:lnSpc>
-                <a:spcPct val="100000"/>
-              </a:lnSpc>
-              <a:spcBef>
-                <a:spcPts val="0"/>
-              </a:spcBef>
-              <a:spcAft>
-                <a:spcPts val="0"/>
-              </a:spcAft>
-              <a:buNone/>
-            </a:pPr>
-            <a:r>
-              <a:rPr lang="pt-BR" sz="2000" b="1" dirty="0">
-                <a:solidFill>
-                  <a:srgbClr val="FFFFFF"/>
-                </a:solidFill>
-                <a:latin typeface="Montserrat"/>
-              </a:rPr>
-              <a:t>Cuidado</a:t>
-            </a:r>
-          </a:p>
-        </p:txBody>
-      </p:sp>
-      <p:sp>
-        <p:nvSpPr>
-          <p:cNvPr id="107" name="Item"/>
-          <p:cNvSpPr/>
-          <p:nvPr/>
-        </p:nvSpPr>
-        <p:spPr>
-          <a:xfrm>
-            <a:off x="2624328" y="5090160"/>
-            <a:ext cx="9262872" cy="999744"/>
-          </a:xfrm>
-          <a:prstGeom prst="roundRect">
-            <a:avLst>
-              <a:gd name="adj" fmla="val 6000"/>
-            </a:avLst>
-          </a:prstGeom>
-          <a:solidFill>
-            <a:srgbClr val="F4F8F5"/>
-          </a:solidFill>
-          <a:ln w="12700">
-            <a:solidFill>
-              <a:srgbClr val="056429"/>
-            </a:solidFill>
-          </a:ln>
-        </p:spPr>
-        <p:txBody>
-          <a:bodyPr wrap="square" lIns="228600" tIns="36576" rIns="228600" bIns="36576" rtlCol="0" anchor="ctr">
-            <a:noAutofit/>
-          </a:bodyPr>
-          <a:lstStyle/>
-          <a:p>
-            <a:pPr marL="0" indent="0" algn="l">
-              <a:lnSpc>
-                <a:spcPct val="102000"/>
-              </a:lnSpc>
-              <a:spcBef>
-                <a:spcPts val="0"/>
-              </a:spcBef>
-              <a:spcAft>
-                <a:spcPts val="0"/>
-              </a:spcAft>
-              <a:buNone/>
-            </a:pPr>
-            <a:r>
-              <a:rPr lang="pt-BR" sz="2000" b="0" dirty="0">
-                <a:solidFill>
-                  <a:srgbClr val="3A3A3A"/>
-                </a:solidFill>
-                <a:latin typeface="Montserrat"/>
-              </a:rPr>
-              <a:t>horas cadastradas não são presença</a:t>
-            </a:r>
-          </a:p>
-        </p:txBody>
-      </p:sp>
-      <p:sp>
-        <p:nvSpPr>
-          <p:cNvPr id="108" name="Fontes"/>
-          <p:cNvSpPr txBox="1"/>
-          <p:nvPr/>
-        </p:nvSpPr>
-        <p:spPr>
-          <a:xfrm>
-            <a:off x="292608" y="6181344"/>
-            <a:ext cx="11594592" cy="274320"/>
-          </a:xfrm>
-          <a:prstGeom prst="rect">
-            <a:avLst/>
-          </a:prstGeom>
-          <a:noFill/>
-          <a:ln>
-            <a:noFill/>
-          </a:ln>
-        </p:spPr>
-        <p:txBody>
-          <a:bodyPr wrap="square" lIns="0" tIns="0" rIns="0" bIns="0" rtlCol="0" anchor="b">
-            <a:noAutofit/>
-          </a:bodyPr>
-          <a:lstStyle/>
-          <a:p>
-            <a:pPr marL="0" indent="0" algn="l">
-              <a:lnSpc>
-                <a:spcPct val="95000"/>
-              </a:lnSpc>
-              <a:spcBef>
-                <a:spcPts val="0"/>
-              </a:spcBef>
-              <a:spcAft>
-                <a:spcPts val="0"/>
-              </a:spcAft>
-              <a:buNone/>
-            </a:pPr>
-            <a:r>
-              <a:rPr lang="pt-BR" sz="800" b="1" dirty="0">
-                <a:solidFill>
-                  <a:srgbClr val="6B6B6B"/>
-                </a:solidFill>
-                <a:latin typeface="Montserrat"/>
-              </a:rPr>
-              <a:t>Fontes: </a:t>
-            </a:r>
-            <a:r>
-              <a:rPr lang="pt-BR" sz="800" b="0" dirty="0">
-                <a:solidFill>
-                  <a:srgbClr val="6B6B6B"/>
-                </a:solidFill>
-                <a:latin typeface="Montserrat"/>
-              </a:rPr>
-              <a:t>protocolos 54 e 59; docs 57d e 57h.</a:t>
-            </a:r>
-          </a:p>
-        </p:txBody>
-      </p:sp>
-    </p:spTree>
-  </p:cSld>
-  <p:clrMapOvr>
-    <a:masterClrMapping/>
-  </p:clrMapOvr>
-</p:sld>
-</file>
-
-<file path=ppt/slides/slide50.xml><?xml version="1.0" encoding="utf-8"?>
-<p:sld xmlns:a="http://schemas.openxmlformats.org/drawingml/2006/main" xmlns:r="http://schemas.openxmlformats.org/officeDocument/2006/relationships" xmlns:p="http://schemas.openxmlformats.org/presentationml/2006/main">
-  <p:cSld>
-    <p:spTree>
-      <p:nvGrpSpPr>
-        <p:cNvPr id="1" name=""/>
-        <p:cNvGrpSpPr/>
-        <p:nvPr/>
-      </p:nvGrpSpPr>
-      <p:grpSpPr>
-        <a:xfrm>
-          <a:off x="0" y="0"/>
-          <a:ext cx="0" cy="0"/>
-          <a:chOff x="0" y="0"/>
-          <a:chExt cx="0" cy="0"/>
-        </a:xfrm>
-      </p:grpSpPr>
-      <p:sp>
-        <p:nvSpPr>
-          <p:cNvPr id="2" name="Título"/>
-          <p:cNvSpPr>
-            <a:spLocks noGrp="1"/>
-          </p:cNvSpPr>
-          <p:nvPr>
-            <p:ph type="title"/>
-          </p:nvPr>
-        </p:nvSpPr>
-        <p:spPr/>
-        <p:txBody>
-          <a:bodyPr>
-            <a:normAutofit/>
-          </a:bodyPr>
-          <a:lstStyle/>
-          <a:p>
-            <a:pPr marL="0" indent="0" algn="l">
-              <a:lnSpc>
-                <a:spcPct val="104000"/>
-              </a:lnSpc>
-              <a:spcAft>
-                <a:spcPts val="0"/>
-              </a:spcAft>
-              <a:buNone/>
-            </a:pPr>
-            <a:r>
-              <a:rPr lang="pt-BR" sz="2400" b="1" dirty="0">
-                <a:solidFill>
-                  <a:srgbClr val="FFFFFF"/>
-                </a:solidFill>
-                <a:latin typeface="Montserrat"/>
-              </a:rPr>
-              <a:t>RDD: as premissas do desenho valem</a:t>
+              <a:t>H1 · RDD: as premissas do desenho valem</a:t>
             </a:r>
           </a:p>
         </p:txBody>
@@ -24760,7 +23526,7 @@
                 </a:solidFill>
                 <a:latin typeface="Montserrat"/>
               </a:rPr>
-              <a:t> seleção suspeita no ciclo 1 em 0,400.</a:t>
+              <a:t> em 0,300, menos capitais acima do corte (auditoria 36).</a:t>
             </a:r>
           </a:p>
         </p:txBody>
@@ -24782,8 +23548,8 @@
             <a:tbl>
               <a:tblPr firstRow="1" bandRow="1"/>
               <a:tblGrid>
-                <a:gridCol w="3783390"/>
-                <a:gridCol w="7811202"/>
+                <a:gridCol w="4614052"/>
+                <a:gridCol w="6980540"/>
               </a:tblGrid>
               <a:tr h="1177290">
                 <a:tc>
@@ -24974,7 +23740,7 @@
                           </a:solidFill>
                           <a:latin typeface="Montserrat"/>
                         </a:rPr>
-                        <a:t>faixa reproduzida: 368/368 e 454/454</a:t>
+                        <a:t>368/368 e 454/454</a:t>
                       </a:r>
                     </a:p>
                   </a:txBody>
@@ -25084,7 +23850,7 @@
                           </a:solidFill>
                           <a:latin typeface="Montserrat"/>
                         </a:rPr>
-                        <a:t>IVS de 2010; densidade sem acúmulo</a:t>
+                        <a:t>densidade sem acúmulo</a:t>
                       </a:r>
                     </a:p>
                   </a:txBody>
@@ -25282,7 +24048,7 @@
                 </a:solidFill>
                 <a:latin typeface="Montserrat"/>
               </a:rPr>
-              <a:t>auditoria 16; docs 37, 41 e 49; output/rdd_bolsa/E1_densidade_estimativas.csv.</a:t>
+              <a:t>auditorias 16 e 36; docs 37, 41 e 49; output/rdd_bolsa/E1_densidade_estimativas.csv; output/auditoria_H1/a36_estimativas.csv.</a:t>
             </a:r>
           </a:p>
         </p:txBody>
@@ -25295,7 +24061,7 @@
 </p:sld>
 </file>
 
-<file path=ppt/slides/slide51.xml><?xml version="1.0" encoding="utf-8"?>
+<file path=ppt/slides/slide49.xml><?xml version="1.0" encoding="utf-8"?>
 <p:sld xmlns:a="http://schemas.openxmlformats.org/drawingml/2006/main" xmlns:r="http://schemas.openxmlformats.org/officeDocument/2006/relationships" xmlns:p="http://schemas.openxmlformats.org/presentationml/2006/main">
   <p:cSld>
     <p:spTree>
@@ -25345,7 +24111,7 @@
                 </a:solidFill>
                 <a:latin typeface="Montserrat"/>
               </a:rPr>
-              <a:t>O corte é um pacote; a H3 pede tendências paralelas</a:t>
+              <a:t>H1 · O corte é um pacote</a:t>
             </a:r>
           </a:p>
         </p:txBody>
@@ -25847,7 +24613,7 @@
                           </a:solidFill>
                           <a:latin typeface="Montserrat"/>
                         </a:rPr>
-                        <a:t>Tendências paralelas (H3)</a:t>
+                        <a:t>Tendências (H3 · plano B)</a:t>
                       </a:r>
                     </a:p>
                   </a:txBody>
@@ -26002,7 +24768,7 @@
 </p:sld>
 </file>
 
-<file path=ppt/slides/slide52.xml><?xml version="1.0" encoding="utf-8"?>
+<file path=ppt/slides/slide50.xml><?xml version="1.0" encoding="utf-8"?>
 <p:sld xmlns:a="http://schemas.openxmlformats.org/drawingml/2006/main" xmlns:r="http://schemas.openxmlformats.org/officeDocument/2006/relationships" xmlns:p="http://schemas.openxmlformats.org/presentationml/2006/main">
   <p:cSld>
     <p:spTree>
@@ -26052,7 +24818,7 @@
                 </a:solidFill>
                 <a:latin typeface="Montserrat"/>
               </a:rPr>
-              <a:t>H1: vagas imediatas, por corte (aguardando 48b)</a:t>
+              <a:t>H1 · Só vagas imediatas: nada passa no Holm</a:t>
             </a:r>
           </a:p>
         </p:txBody>
@@ -26179,31 +24945,62 @@
           </a:p>
         </p:txBody>
       </p:sp>
+      <p:pic>
+        <p:nvPicPr>
+          <p:cNvPr id="101" name="Figura" descr="H1 principal: HI-1 (célula com vaga imediata preenchida) e HI-2 (alocados em vagas imediatas por município), por corte, com IC 95% e p de Holm"/>
+          <p:cNvPicPr>
+            <a:picLocks noChangeAspect="1"/>
+          </p:cNvPicPr>
+          <p:nvPr/>
+        </p:nvPicPr>
+        <p:blipFill>
+          <a:blip r:embed="rId3"/>
+          <a:stretch>
+            <a:fillRect/>
+          </a:stretch>
+        </p:blipFill>
+        <p:spPr>
+          <a:xfrm>
+            <a:off x="292608" y="1451205"/>
+            <a:ext cx="8211312" cy="3992166"/>
+          </a:xfrm>
+          <a:prstGeom prst="rect">
+            <a:avLst/>
+          </a:prstGeom>
+          <a:ln w="6350">
+            <a:solidFill>
+              <a:srgbClr val="DDE7DF"/>
+            </a:solidFill>
+          </a:ln>
+        </p:spPr>
+      </p:pic>
       <p:sp>
         <p:nvSpPr>
-          <p:cNvPr id="101" name="Cautela"/>
+          <p:cNvPr id="102" name="Linha"/>
           <p:cNvSpPr/>
           <p:nvPr/>
         </p:nvSpPr>
         <p:spPr>
           <a:xfrm>
-            <a:off x="292608" y="5669280"/>
-            <a:ext cx="11594592" cy="420624"/>
+            <a:off x="8778240" y="804672"/>
+            <a:ext cx="3108960" cy="2186432"/>
           </a:xfrm>
           <a:prstGeom prst="roundRect">
             <a:avLst>
-              <a:gd name="adj" fmla="val 12000"/>
+              <a:gd name="adj" fmla="val 6000"/>
             </a:avLst>
           </a:prstGeom>
           <a:solidFill>
-            <a:srgbClr val="E7F1EA"/>
+            <a:srgbClr val="F4F8F5"/>
           </a:solidFill>
-          <a:ln>
-            <a:noFill/>
+          <a:ln w="12700">
+            <a:solidFill>
+              <a:srgbClr val="056429"/>
+            </a:solidFill>
           </a:ln>
         </p:spPr>
         <p:txBody>
-          <a:bodyPr wrap="square" lIns="164592" tIns="18288" rIns="164592" bIns="18288" rtlCol="0" anchor="ctr">
+          <a:bodyPr wrap="square" lIns="182880" tIns="54864" rIns="182880" bIns="54864" rtlCol="0" anchor="ctr">
             <a:noAutofit/>
           </a:bodyPr>
           <a:lstStyle/>
@@ -26221,47 +25018,49 @@
               <a:buNone/>
             </a:pPr>
             <a:r>
-              <a:rPr lang="pt-BR" sz="1800" b="1" dirty="0">
+              <a:rPr lang="pt-BR" sz="1600" b="0" dirty="0">
                 <a:solidFill>
-                  <a:srgbClr val="114719"/>
+                  <a:srgbClr val="3A3A3A"/>
                 </a:solidFill>
                 <a:latin typeface="Montserrat"/>
               </a:rPr>
-              <a:t>Pacote do corte; especificação pós-resultado.</a:t>
+              <a:t>Comparando só vagas imediatas, nenhuma linha passa no Holm; a célula não se distingue de zero nos dois cortes.</a:t>
             </a:r>
           </a:p>
         </p:txBody>
       </p:sp>
       <p:sp>
         <p:nvSpPr>
-          <p:cNvPr id="102" name="Frase"/>
+          <p:cNvPr id="103" name="Linha"/>
           <p:cNvSpPr/>
           <p:nvPr/>
         </p:nvSpPr>
         <p:spPr>
           <a:xfrm>
-            <a:off x="658368" y="1911096"/>
-            <a:ext cx="10863072" cy="2377440"/>
+            <a:off x="8778240" y="3155696"/>
+            <a:ext cx="3108960" cy="1626413"/>
           </a:xfrm>
           <a:prstGeom prst="roundRect">
             <a:avLst>
-              <a:gd name="adj" fmla="val 8000"/>
+              <a:gd name="adj" fmla="val 6000"/>
             </a:avLst>
           </a:prstGeom>
           <a:solidFill>
-            <a:srgbClr val="114719"/>
+            <a:srgbClr val="F4F8F5"/>
           </a:solidFill>
-          <a:ln>
-            <a:noFill/>
+          <a:ln w="12700">
+            <a:solidFill>
+              <a:srgbClr val="056429"/>
+            </a:solidFill>
           </a:ln>
         </p:spPr>
         <p:txBody>
-          <a:bodyPr wrap="square" lIns="411480" tIns="91440" rIns="411480" bIns="91440" rtlCol="0" anchor="ctr">
+          <a:bodyPr wrap="square" lIns="182880" tIns="54864" rIns="182880" bIns="54864" rtlCol="0" anchor="ctr">
             <a:noAutofit/>
           </a:bodyPr>
           <a:lstStyle/>
           <a:p>
-            <a:pPr marL="0" indent="0" algn="ctr">
+            <a:pPr marL="0" indent="0" algn="l">
               <a:lnSpc>
                 <a:spcPct val="100000"/>
               </a:lnSpc>
@@ -26274,20 +25073,20 @@
               <a:buNone/>
             </a:pPr>
             <a:r>
-              <a:rPr lang="pt-BR" sz="3000" b="0" dirty="0">
+              <a:rPr lang="pt-BR" sz="1600" b="0" dirty="0">
                 <a:solidFill>
-                  <a:srgbClr val="FFFFFF"/>
+                  <a:srgbClr val="3A3A3A"/>
                 </a:solidFill>
                 <a:latin typeface="Montserrat"/>
               </a:rPr>
-              <a:t>Aguardando 48b: HI-1 e HI-2 por corte, com Holm</a:t>
+              <a:t>HI-2 em 0,300: IC exclui zero; não sobrevive ao Holm.</a:t>
             </a:r>
           </a:p>
         </p:txBody>
       </p:sp>
       <p:sp>
         <p:nvSpPr>
-          <p:cNvPr id="103" name="Fontes"/>
+          <p:cNvPr id="104" name="Fontes"/>
           <p:cNvSpPr txBox="1"/>
           <p:nvPr/>
         </p:nvSpPr>
@@ -26338,7 +25137,7 @@
                 </a:solidFill>
                 <a:latin typeface="Montserrat"/>
               </a:rPr>
-              <a:t>adendo 48b; saídas output/rdd_bolsa/HI_* e doc 57n, ainda não gravados.</a:t>
+              <a:t>output/rdd_bolsa/HI_estimativas.csv, HI_resumo.json e HI_figuras/HI_principal.png (adendo 48b; doc 57n; em auditoria); figura usada sem redesenho.</a:t>
             </a:r>
           </a:p>
         </p:txBody>
@@ -26351,7 +25150,7 @@
 </p:sld>
 </file>
 
-<file path=ppt/slides/slide53.xml><?xml version="1.0" encoding="utf-8"?>
+<file path=ppt/slides/slide51.xml><?xml version="1.0" encoding="utf-8"?>
 <p:sld xmlns:a="http://schemas.openxmlformats.org/drawingml/2006/main" xmlns:r="http://schemas.openxmlformats.org/officeDocument/2006/relationships" xmlns:p="http://schemas.openxmlformats.org/presentationml/2006/main">
   <p:cSld>
     <p:spTree>
@@ -26397,11 +25196,11 @@
             <a:r>
               <a:rPr lang="pt-BR" sz="2400" b="1" dirty="0">
                 <a:solidFill>
-                  <a:srgbClr val="FFFFFF"/>
+                  <a:srgbClr val="C4CCC6"/>
                 </a:solidFill>
                 <a:latin typeface="Montserrat"/>
               </a:rPr>
-              <a:t>H2: a UF de origem pesa mais que toda a bolsa</a:t>
+              <a:t>H2 · plano B: a origem pesa mais que a bolsa</a:t>
             </a:r>
           </a:p>
         </p:txBody>
@@ -26740,7 +25539,7 @@
 </p:sld>
 </file>
 
-<file path=ppt/slides/slide54.xml><?xml version="1.0" encoding="utf-8"?>
+<file path=ppt/slides/slide52.xml><?xml version="1.0" encoding="utf-8"?>
 <p:sld xmlns:a="http://schemas.openxmlformats.org/drawingml/2006/main" xmlns:r="http://schemas.openxmlformats.org/officeDocument/2006/relationships" xmlns:p="http://schemas.openxmlformats.org/presentationml/2006/main">
   <p:cSld>
     <p:spTree>
@@ -26786,11 +25585,11 @@
             <a:r>
               <a:rPr lang="pt-BR" sz="2400" b="1" dirty="0">
                 <a:solidFill>
-                  <a:srgbClr val="FFFFFF"/>
+                  <a:srgbClr val="C4CCC6"/>
                 </a:solidFill>
                 <a:latin typeface="Montserrat"/>
               </a:rPr>
-              <a:t>H3: o médico soma horas, mas metade já estava lá</a:t>
+              <a:t>H3 · plano B: soma horas, mas metade já estava lá</a:t>
             </a:r>
           </a:p>
         </p:txBody>
@@ -27129,7 +25928,7 @@
 </p:sld>
 </file>
 
-<file path=ppt/slides/slide55.xml><?xml version="1.0" encoding="utf-8"?>
+<file path=ppt/slides/slide53.xml><?xml version="1.0" encoding="utf-8"?>
 <p:sld xmlns:a="http://schemas.openxmlformats.org/drawingml/2006/main" xmlns:r="http://schemas.openxmlformats.org/officeDocument/2006/relationships" xmlns:p="http://schemas.openxmlformats.org/presentationml/2006/main">
   <p:cSld>
     <p:spTree>
@@ -27179,7 +25978,7 @@
                 </a:solidFill>
                 <a:latin typeface="Montserrat"/>
               </a:rPr>
-              <a:t>H1, medidas antigas: nenhum corte mostra aumento</a:t>
+              <a:t>H1 · Medida antiga × só vagas imediatas</a:t>
             </a:r>
           </a:p>
         </p:txBody>
@@ -27308,7 +26107,7 @@
       </p:sp>
       <p:pic>
         <p:nvPicPr>
-          <p:cNvPr id="101" name="Figura" descr="H1 nas medidas antigas, por corte: célula aberta preenchida (A3) e vagas preenchidas por município (N1) sem e com controle"/>
+          <p:cNvPr id="101" name="Figura" descr="Medida antiga (com cadastro reserva: A3 e N1) contra só vagas imediatas (HI-1 e HI-2), por corte, com IC 95%"/>
           <p:cNvPicPr>
             <a:picLocks noChangeAspect="1"/>
           </p:cNvPicPr>
@@ -27323,7 +26122,7 @@
         <p:spPr>
           <a:xfrm>
             <a:off x="292608" y="804672"/>
-            <a:ext cx="7043563" cy="4602886"/>
+            <a:ext cx="7239834" cy="4602886"/>
           </a:xfrm>
           <a:prstGeom prst="rect">
             <a:avLst/>
@@ -27344,7 +26143,7 @@
         <p:spPr>
           <a:xfrm>
             <a:off x="292608" y="5572150"/>
-            <a:ext cx="7043563" cy="517754"/>
+            <a:ext cx="7239834" cy="517754"/>
           </a:xfrm>
           <a:prstGeom prst="roundRect">
             <a:avLst>
@@ -27396,8 +26195,8 @@
         </p:nvSpPr>
         <p:spPr>
           <a:xfrm>
-            <a:off x="7610491" y="804672"/>
-            <a:ext cx="4276709" cy="1626413"/>
+            <a:off x="7806762" y="804672"/>
+            <a:ext cx="4080438" cy="1626413"/>
           </a:xfrm>
           <a:prstGeom prst="roundRect">
             <a:avLst>
@@ -27438,7 +26237,7 @@
                 </a:solidFill>
                 <a:latin typeface="Montserrat"/>
               </a:rPr>
-              <a:t>Com a reserva</a:t>
+              <a:t>Só vagas imediatas,</a:t>
             </a:r>
             <a:r>
               <a:rPr lang="pt-BR" sz="1600" b="0" dirty="0">
@@ -27447,7 +26246,7 @@
                 </a:solidFill>
                 <a:latin typeface="Montserrat"/>
               </a:rPr>
-              <a:t> (A3, N1): sem aumento em nenhum corte; em 0,300, sinal negativo.</a:t>
+              <a:t> os saltos em 0,300 encolhem: −8,4 → −3,7 p.p. e −1,45 → −1,13.</a:t>
             </a:r>
           </a:p>
         </p:txBody>
@@ -27505,7 +26304,7 @@
                 </a:solidFill>
                 <a:latin typeface="Montserrat"/>
               </a:rPr>
-              <a:t>output/rdd_bolsa/N_estimativas.csv (doc 49); S57_resumo.json (A3); EQ_estimativas.csv (doc 57j).</a:t>
+              <a:t>output/rdd_bolsa/HI_figuras/HI_antiga_vs_imediatas.png e HI_estimativas.csv (adendo 48b; doc 57n; em auditoria); NA_estimativas.csv e N_estimativas.csv (doc 49).</a:t>
             </a:r>
           </a:p>
         </p:txBody>
@@ -27518,7 +26317,7 @@
 </p:sld>
 </file>
 
-<file path=ppt/slides/slide56.xml><?xml version="1.0" encoding="utf-8"?>
+<file path=ppt/slides/slide54.xml><?xml version="1.0" encoding="utf-8"?>
 <p:sld xmlns:a="http://schemas.openxmlformats.org/drawingml/2006/main" xmlns:r="http://schemas.openxmlformats.org/officeDocument/2006/relationships" xmlns:p="http://schemas.openxmlformats.org/presentationml/2006/main">
   <p:cSld>
     <p:spTree>
@@ -27568,7 +26367,7 @@
                 </a:solidFill>
                 <a:latin typeface="Montserrat"/>
               </a:rPr>
-              <a:t>Antes e depois do controle: em 0,400, passa pelas vagas</a:t>
+              <a:t>H1 · Antes e depois do controle das vagas</a:t>
             </a:r>
           </a:p>
         </p:txBody>
@@ -27906,7 +26705,7 @@
 </p:sld>
 </file>
 
-<file path=ppt/slides/slide57.xml><?xml version="1.0" encoding="utf-8"?>
+<file path=ppt/slides/slide55.xml><?xml version="1.0" encoding="utf-8"?>
 <p:sld xmlns:a="http://schemas.openxmlformats.org/drawingml/2006/main" xmlns:r="http://schemas.openxmlformats.org/officeDocument/2006/relationships" xmlns:p="http://schemas.openxmlformats.org/presentationml/2006/main">
   <p:cSld>
     <p:spTree>
@@ -27956,7 +26755,7 @@
                 </a:solidFill>
                 <a:latin typeface="Montserrat"/>
               </a:rPr>
-              <a:t>H1 por ciclo: a queda em 0,300 vem do ciclo 2</a:t>
+              <a:t>H1 · Por ciclo: a queda em 0,300 vem do ciclo 2</a:t>
             </a:r>
           </a:p>
         </p:txBody>
@@ -28091,8 +26890,8 @@
         </p:nvSpPr>
         <p:spPr>
           <a:xfrm>
-            <a:off x="292608" y="4901184"/>
-            <a:ext cx="11594592" cy="731520"/>
+            <a:off x="292608" y="5212080"/>
+            <a:ext cx="11594592" cy="420624"/>
           </a:xfrm>
           <a:prstGeom prst="rect">
             <a:avLst/>
@@ -28127,7 +26926,7 @@
                 </a:solidFill>
                 <a:latin typeface="Montserrat"/>
               </a:rPr>
-              <a:t>A queda em 0,300 vem sobretudo do ciclo 2 (vagas de reserva); por ciclo, os intervalos são largos.</a:t>
+              <a:t>A queda em 0,300 vem sobretudo do ciclo 2; por ciclo, os intervalos são largos.</a:t>
             </a:r>
           </a:p>
         </p:txBody>
@@ -28180,7 +26979,7 @@
                 </a:solidFill>
                 <a:latin typeface="Montserrat"/>
               </a:rPr>
-              <a:t>Preenchida: confirmada no ciclo 1; alocada nos ciclos 2 e 3.</a:t>
+              <a:t>Tipo de vaga do ciclo 2: quadro refeito depois do resultado (auditoria 36).</a:t>
             </a:r>
           </a:p>
         </p:txBody>
@@ -28201,8 +27000,8 @@
         </p:blipFill>
         <p:spPr>
           <a:xfrm>
-            <a:off x="1845339" y="804672"/>
-            <a:ext cx="8489131" cy="3968496"/>
+            <a:off x="1512815" y="804672"/>
+            <a:ext cx="9154178" cy="4279392"/>
           </a:xfrm>
           <a:prstGeom prst="rect">
             <a:avLst/>
@@ -28267,7 +27066,839 @@
                 </a:solidFill>
                 <a:latin typeface="Montserrat"/>
               </a:rPr>
-              <a:t>output/rdd_bolsa/NA_estimativas.csv (A3 por ciclo); ND_estimativas.csv (taxa por vaga, adendo AD2; doc 49b, §14).</a:t>
+              <a:t>output/rdd_bolsa/NA_estimativas.csv (A3 por ciclo); ND_estimativas.csv (taxa por vaga, adendo AD2; doc 49b); auditoria 36.</a:t>
+            </a:r>
+          </a:p>
+        </p:txBody>
+      </p:sp>
+    </p:spTree>
+  </p:cSld>
+  <p:clrMapOvr>
+    <a:masterClrMapping/>
+  </p:clrMapOvr>
+</p:sld>
+</file>
+
+<file path=ppt/slides/slide56.xml><?xml version="1.0" encoding="utf-8"?>
+<p:sld xmlns:a="http://schemas.openxmlformats.org/drawingml/2006/main" xmlns:r="http://schemas.openxmlformats.org/officeDocument/2006/relationships" xmlns:p="http://schemas.openxmlformats.org/presentationml/2006/main">
+  <p:cSld>
+    <p:spTree>
+      <p:nvGrpSpPr>
+        <p:cNvPr id="1" name=""/>
+        <p:cNvGrpSpPr/>
+        <p:nvPr/>
+      </p:nvGrpSpPr>
+      <p:grpSpPr>
+        <a:xfrm>
+          <a:off x="0" y="0"/>
+          <a:ext cx="0" cy="0"/>
+          <a:chOff x="0" y="0"/>
+          <a:chExt cx="0" cy="0"/>
+        </a:xfrm>
+      </p:grpSpPr>
+      <p:sp>
+        <p:nvSpPr>
+          <p:cNvPr id="2" name="Título"/>
+          <p:cNvSpPr>
+            <a:spLocks noGrp="1"/>
+          </p:cNvSpPr>
+          <p:nvPr>
+            <p:ph type="title"/>
+          </p:nvPr>
+        </p:nvSpPr>
+        <p:spPr/>
+        <p:txBody>
+          <a:bodyPr>
+            <a:normAutofit/>
+          </a:bodyPr>
+          <a:lstStyle/>
+          <a:p>
+            <a:pPr marL="0" indent="0" algn="l">
+              <a:lnSpc>
+                <a:spcPct val="104000"/>
+              </a:lnSpc>
+              <a:spcAft>
+                <a:spcPts val="0"/>
+              </a:spcAft>
+              <a:buNone/>
+            </a:pPr>
+            <a:r>
+              <a:rPr lang="pt-BR" sz="2400" b="1" dirty="0">
+                <a:solidFill>
+                  <a:srgbClr val="FFFFFF"/>
+                </a:solidFill>
+                <a:latin typeface="Montserrat"/>
+              </a:rPr>
+              <a:t>H1 · Em 0,300, o negativo vem da reta</a:t>
+            </a:r>
+          </a:p>
+        </p:txBody>
+      </p:sp>
+      <p:sp>
+        <p:nvSpPr>
+          <p:cNvPr id="3" name="Número da página"/>
+          <p:cNvSpPr>
+            <a:spLocks noGrp="1"/>
+          </p:cNvSpPr>
+          <p:nvPr>
+            <p:ph type="body" sz="quarter" idx="18"/>
+          </p:nvPr>
+        </p:nvSpPr>
+        <p:spPr>
+          <a:xfrm>
+            <a:off x="11706744" y="6457042"/>
+            <a:ext cx="492080" cy="400640"/>
+          </a:xfrm>
+        </p:spPr>
+        <p:txBody>
+          <a:bodyPr anchor="ctr">
+            <a:normAutofit/>
+          </a:bodyPr>
+          <a:lstStyle/>
+          <a:p>
+            <a:pPr algn="ctr"/>
+            <a:fld id="{B1A5E0C2-5F3A-4C7E-9D11-7A2E6C0F4B01}" type="slidenum">
+              <a:rPr lang="pt-BR" sz="1400" b="1">
+                <a:solidFill>
+                  <a:srgbClr val="BFBFBF"/>
+                </a:solidFill>
+                <a:latin typeface="Montserrat"/>
+              </a:rPr>
+              <a:t>‹#›</a:t>
+            </a:fld>
+            <a:endParaRPr lang="pt-BR" sz="1400" b="1">
+              <a:solidFill>
+                <a:srgbClr val="BFBFBF"/>
+              </a:solidFill>
+            </a:endParaRPr>
+          </a:p>
+        </p:txBody>
+      </p:sp>
+      <p:sp>
+        <p:nvSpPr>
+          <p:cNvPr id="4" name="Navegação do rodapé"/>
+          <p:cNvSpPr txBox="1"/>
+          <p:nvPr/>
+        </p:nvSpPr>
+        <p:spPr>
+          <a:xfrm>
+            <a:off x="196860" y="6639248"/>
+            <a:ext cx="9223026" cy="246221"/>
+          </a:xfrm>
+          <a:prstGeom prst="rect">
+            <a:avLst/>
+          </a:prstGeom>
+          <a:noFill/>
+        </p:spPr>
+        <p:txBody>
+          <a:bodyPr wrap="square" rtlCol="0">
+            <a:spAutoFit/>
+          </a:bodyPr>
+          <a:lstStyle/>
+          <a:p>
+            <a:r>
+              <a:rPr lang="pt-BR" sz="1000" dirty="0">
+                <a:latin typeface="Montserrat"/>
+              </a:rPr>
+              <a:t xml:space="preserve">Hipótese  |  </a:t>
+            </a:r>
+            <a:r>
+              <a:rPr lang="pt-BR" sz="1000" dirty="0">
+                <a:latin typeface="Montserrat"/>
+              </a:rPr>
+              <a:t xml:space="preserve">Dados  |  </a:t>
+            </a:r>
+            <a:r>
+              <a:rPr lang="pt-BR" sz="1000" dirty="0">
+                <a:latin typeface="Montserrat"/>
+              </a:rPr>
+              <a:t xml:space="preserve">Análise descritiva  |  </a:t>
+            </a:r>
+            <a:r>
+              <a:rPr lang="pt-BR" sz="1000" dirty="0">
+                <a:latin typeface="Montserrat"/>
+              </a:rPr>
+              <a:t xml:space="preserve">Metodologia  |  </a:t>
+            </a:r>
+            <a:r>
+              <a:rPr lang="pt-BR" sz="1000" dirty="0">
+                <a:latin typeface="Montserrat"/>
+              </a:rPr>
+              <a:t xml:space="preserve">Identificação  |  </a:t>
+            </a:r>
+            <a:r>
+              <a:rPr lang="pt-BR" sz="1000" dirty="0">
+                <a:latin typeface="Montserrat"/>
+              </a:rPr>
+              <a:t xml:space="preserve">Resultados  |  </a:t>
+            </a:r>
+            <a:r>
+              <a:rPr lang="pt-BR" sz="1000" b="1" dirty="0">
+                <a:solidFill>
+                  <a:srgbClr val="114719"/>
+                </a:solidFill>
+                <a:latin typeface="Montserrat"/>
+              </a:rPr>
+              <a:t>Robustez</a:t>
+            </a:r>
+            <a:r>
+              <a:rPr lang="pt-BR" sz="1000" dirty="0">
+                <a:latin typeface="Montserrat"/>
+              </a:rPr>
+              <a:t xml:space="preserve">  |  </a:t>
+            </a:r>
+            <a:r>
+              <a:rPr lang="pt-BR" sz="1000" dirty="0">
+                <a:latin typeface="Montserrat"/>
+              </a:rPr>
+              <a:t xml:space="preserve">Discussão</a:t>
+            </a:r>
+          </a:p>
+        </p:txBody>
+      </p:sp>
+      <p:sp>
+        <p:nvSpPr>
+          <p:cNvPr id="101" name="Linha"/>
+          <p:cNvSpPr/>
+          <p:nvPr/>
+        </p:nvSpPr>
+        <p:spPr>
+          <a:xfrm>
+            <a:off x="292608" y="4901184"/>
+            <a:ext cx="11594592" cy="420624"/>
+          </a:xfrm>
+          <a:prstGeom prst="rect">
+            <a:avLst/>
+          </a:prstGeom>
+          <a:noFill/>
+          <a:ln>
+            <a:noFill/>
+          </a:ln>
+        </p:spPr>
+        <p:txBody>
+          <a:bodyPr wrap="square" lIns="164592" tIns="18288" rIns="164592" bIns="18288" rtlCol="0" anchor="ctr">
+            <a:noAutofit/>
+          </a:bodyPr>
+          <a:lstStyle/>
+          <a:p>
+            <a:pPr marL="0" indent="0" algn="l">
+              <a:lnSpc>
+                <a:spcPct val="100000"/>
+              </a:lnSpc>
+              <a:spcBef>
+                <a:spcPts val="0"/>
+              </a:spcBef>
+              <a:spcAft>
+                <a:spcPts val="0"/>
+              </a:spcAft>
+              <a:buNone/>
+            </a:pPr>
+            <a:r>
+              <a:rPr lang="pt-BR" sz="1800" b="1" dirty="0">
+                <a:solidFill>
+                  <a:srgbClr val="114719"/>
+                </a:solidFill>
+                <a:latin typeface="Montserrat"/>
+              </a:rPr>
+              <a:t>(a)</a:t>
+            </a:r>
+            <a:r>
+              <a:rPr lang="pt-BR" sz="1800" b="0" dirty="0">
+                <a:solidFill>
+                  <a:srgbClr val="3A3A3A"/>
+                </a:solidFill>
+                <a:latin typeface="Montserrat"/>
+              </a:rPr>
+              <a:t> Nos dados crus, os dois lados preenchem igual (33% e 33%).</a:t>
+            </a:r>
+          </a:p>
+        </p:txBody>
+      </p:sp>
+      <p:sp>
+        <p:nvSpPr>
+          <p:cNvPr id="102" name="Linha"/>
+          <p:cNvSpPr/>
+          <p:nvPr/>
+        </p:nvSpPr>
+        <p:spPr>
+          <a:xfrm>
+            <a:off x="292608" y="5376672"/>
+            <a:ext cx="11594592" cy="731520"/>
+          </a:xfrm>
+          <a:prstGeom prst="rect">
+            <a:avLst/>
+          </a:prstGeom>
+          <a:noFill/>
+          <a:ln>
+            <a:noFill/>
+          </a:ln>
+        </p:spPr>
+        <p:txBody>
+          <a:bodyPr wrap="square" lIns="164592" tIns="18288" rIns="164592" bIns="18288" rtlCol="0" anchor="ctr">
+            <a:noAutofit/>
+          </a:bodyPr>
+          <a:lstStyle/>
+          <a:p>
+            <a:pPr marL="0" indent="0" algn="l">
+              <a:lnSpc>
+                <a:spcPct val="100000"/>
+              </a:lnSpc>
+              <a:spcBef>
+                <a:spcPts val="0"/>
+              </a:spcBef>
+              <a:spcAft>
+                <a:spcPts val="0"/>
+              </a:spcAft>
+              <a:buNone/>
+            </a:pPr>
+            <a:r>
+              <a:rPr lang="pt-BR" sz="1800" b="1" dirty="0">
+                <a:solidFill>
+                  <a:srgbClr val="114719"/>
+                </a:solidFill>
+                <a:latin typeface="Montserrat"/>
+              </a:rPr>
+              <a:t>(b)</a:t>
+            </a:r>
+            <a:r>
+              <a:rPr lang="pt-BR" sz="1800" b="0" dirty="0">
+                <a:solidFill>
+                  <a:srgbClr val="3A3A3A"/>
+                </a:solidFill>
+                <a:latin typeface="Montserrat"/>
+              </a:rPr>
+              <a:t> A reta leva até o corte uma subida puxada por poucos municípios: capitais e Nordeste logo abaixo.</a:t>
+            </a:r>
+          </a:p>
+        </p:txBody>
+      </p:sp>
+      <p:pic>
+        <p:nvPicPr>
+          <p:cNvPr id="103" name="Figura" descr="Corte 0,300: médias por faixa de 0,010, reta local de cada lado e médias da janela; a reta de baixo chega alta ao corte e a de cima começa baixa"/>
+          <p:cNvPicPr>
+            <a:picLocks noChangeAspect="1"/>
+          </p:cNvPicPr>
+          <p:nvPr/>
+        </p:nvPicPr>
+        <p:blipFill>
+          <a:blip r:embed="rId3"/>
+          <a:stretch>
+            <a:fillRect/>
+          </a:stretch>
+        </p:blipFill>
+        <p:spPr>
+          <a:xfrm>
+            <a:off x="1109037" y="804672"/>
+            <a:ext cx="9961735" cy="3968496"/>
+          </a:xfrm>
+          <a:prstGeom prst="rect">
+            <a:avLst/>
+          </a:prstGeom>
+          <a:ln w="6350">
+            <a:solidFill>
+              <a:srgbClr val="DDE7DF"/>
+            </a:solidFill>
+          </a:ln>
+        </p:spPr>
+      </p:pic>
+      <p:sp>
+        <p:nvSpPr>
+          <p:cNvPr id="104" name="Fontes"/>
+          <p:cNvSpPr txBox="1"/>
+          <p:nvPr/>
+        </p:nvSpPr>
+        <p:spPr>
+          <a:xfrm>
+            <a:off x="292608" y="6181344"/>
+            <a:ext cx="11594592" cy="274320"/>
+          </a:xfrm>
+          <a:prstGeom prst="rect">
+            <a:avLst/>
+          </a:prstGeom>
+          <a:noFill/>
+          <a:ln>
+            <a:noFill/>
+          </a:ln>
+        </p:spPr>
+        <p:txBody>
+          <a:bodyPr wrap="square" lIns="0" tIns="0" rIns="0" bIns="0" rtlCol="0" anchor="b">
+            <a:noAutofit/>
+          </a:bodyPr>
+          <a:lstStyle/>
+          <a:p>
+            <a:pPr marL="0" indent="0" algn="l">
+              <a:lnSpc>
+                <a:spcPct val="95000"/>
+              </a:lnSpc>
+              <a:spcBef>
+                <a:spcPts val="0"/>
+              </a:spcBef>
+              <a:spcAft>
+                <a:spcPts val="0"/>
+              </a:spcAft>
+              <a:buNone/>
+            </a:pPr>
+            <a:r>
+              <a:rPr lang="pt-BR" sz="800" b="1" dirty="0">
+                <a:solidFill>
+                  <a:srgbClr val="6B6B6B"/>
+                </a:solidFill>
+                <a:latin typeface="Montserrat"/>
+              </a:rPr>
+              <a:t>Fontes: </a:t>
+            </a:r>
+            <a:r>
+              <a:rPr lang="pt-BR" sz="800" b="0" dirty="0">
+                <a:solidFill>
+                  <a:srgbClr val="6B6B6B"/>
+                </a:solidFill>
+                <a:latin typeface="Montserrat"/>
+              </a:rPr>
+              <a:t>output/rdd_bolsa/outcomes/outcomes_V_celula.parquet; DQ_estimativas.csv (doc 57l; auditoria 33); output/auditoria_H1/a36_estimativas.csv (auditoria 36); doc 57m (auditoria 37).</a:t>
+            </a:r>
+          </a:p>
+        </p:txBody>
+      </p:sp>
+    </p:spTree>
+  </p:cSld>
+  <p:clrMapOvr>
+    <a:masterClrMapping/>
+  </p:clrMapOvr>
+</p:sld>
+</file>
+
+<file path=ppt/slides/slide57.xml><?xml version="1.0" encoding="utf-8"?>
+<p:sld xmlns:a="http://schemas.openxmlformats.org/drawingml/2006/main" xmlns:r="http://schemas.openxmlformats.org/officeDocument/2006/relationships" xmlns:p="http://schemas.openxmlformats.org/presentationml/2006/main">
+  <p:cSld>
+    <p:spTree>
+      <p:nvGrpSpPr>
+        <p:cNvPr id="1" name=""/>
+        <p:cNvGrpSpPr/>
+        <p:nvPr/>
+      </p:nvGrpSpPr>
+      <p:grpSpPr>
+        <a:xfrm>
+          <a:off x="0" y="0"/>
+          <a:ext cx="0" cy="0"/>
+          <a:chOff x="0" y="0"/>
+          <a:chExt cx="0" cy="0"/>
+        </a:xfrm>
+      </p:grpSpPr>
+      <p:sp>
+        <p:nvSpPr>
+          <p:cNvPr id="2" name="Título"/>
+          <p:cNvSpPr>
+            <a:spLocks noGrp="1"/>
+          </p:cNvSpPr>
+          <p:nvPr>
+            <p:ph type="title"/>
+          </p:nvPr>
+        </p:nvSpPr>
+        <p:spPr/>
+        <p:txBody>
+          <a:bodyPr>
+            <a:normAutofit/>
+          </a:bodyPr>
+          <a:lstStyle/>
+          <a:p>
+            <a:pPr marL="0" indent="0" algn="l">
+              <a:lnSpc>
+                <a:spcPct val="104000"/>
+              </a:lnSpc>
+              <a:spcAft>
+                <a:spcPts val="0"/>
+              </a:spcAft>
+              <a:buNone/>
+            </a:pPr>
+            <a:r>
+              <a:rPr lang="pt-BR" sz="2400" b="1" dirty="0">
+                <a:solidFill>
+                  <a:srgbClr val="FFFFFF"/>
+                </a:solidFill>
+                <a:latin typeface="Montserrat"/>
+              </a:rPr>
+              <a:t>H1 · Controlando a capital, a queda encolhe</a:t>
+            </a:r>
+          </a:p>
+        </p:txBody>
+      </p:sp>
+      <p:sp>
+        <p:nvSpPr>
+          <p:cNvPr id="3" name="Número da página"/>
+          <p:cNvSpPr>
+            <a:spLocks noGrp="1"/>
+          </p:cNvSpPr>
+          <p:nvPr>
+            <p:ph type="body" sz="quarter" idx="18"/>
+          </p:nvPr>
+        </p:nvSpPr>
+        <p:spPr>
+          <a:xfrm>
+            <a:off x="11706744" y="6457042"/>
+            <a:ext cx="492080" cy="400640"/>
+          </a:xfrm>
+        </p:spPr>
+        <p:txBody>
+          <a:bodyPr anchor="ctr">
+            <a:normAutofit/>
+          </a:bodyPr>
+          <a:lstStyle/>
+          <a:p>
+            <a:pPr algn="ctr"/>
+            <a:fld id="{B1A5E0C2-5F3A-4C7E-9D11-7A2E6C0F4B01}" type="slidenum">
+              <a:rPr lang="pt-BR" sz="1400" b="1">
+                <a:solidFill>
+                  <a:srgbClr val="BFBFBF"/>
+                </a:solidFill>
+                <a:latin typeface="Montserrat"/>
+              </a:rPr>
+              <a:t>‹#›</a:t>
+            </a:fld>
+            <a:endParaRPr lang="pt-BR" sz="1400" b="1">
+              <a:solidFill>
+                <a:srgbClr val="BFBFBF"/>
+              </a:solidFill>
+            </a:endParaRPr>
+          </a:p>
+        </p:txBody>
+      </p:sp>
+      <p:sp>
+        <p:nvSpPr>
+          <p:cNvPr id="4" name="Navegação do rodapé"/>
+          <p:cNvSpPr txBox="1"/>
+          <p:nvPr/>
+        </p:nvSpPr>
+        <p:spPr>
+          <a:xfrm>
+            <a:off x="196860" y="6639248"/>
+            <a:ext cx="9223026" cy="246221"/>
+          </a:xfrm>
+          <a:prstGeom prst="rect">
+            <a:avLst/>
+          </a:prstGeom>
+          <a:noFill/>
+        </p:spPr>
+        <p:txBody>
+          <a:bodyPr wrap="square" rtlCol="0">
+            <a:spAutoFit/>
+          </a:bodyPr>
+          <a:lstStyle/>
+          <a:p>
+            <a:r>
+              <a:rPr lang="pt-BR" sz="1000" dirty="0">
+                <a:latin typeface="Montserrat"/>
+              </a:rPr>
+              <a:t xml:space="preserve">Hipótese  |  </a:t>
+            </a:r>
+            <a:r>
+              <a:rPr lang="pt-BR" sz="1000" dirty="0">
+                <a:latin typeface="Montserrat"/>
+              </a:rPr>
+              <a:t xml:space="preserve">Dados  |  </a:t>
+            </a:r>
+            <a:r>
+              <a:rPr lang="pt-BR" sz="1000" dirty="0">
+                <a:latin typeface="Montserrat"/>
+              </a:rPr>
+              <a:t xml:space="preserve">Análise descritiva  |  </a:t>
+            </a:r>
+            <a:r>
+              <a:rPr lang="pt-BR" sz="1000" dirty="0">
+                <a:latin typeface="Montserrat"/>
+              </a:rPr>
+              <a:t xml:space="preserve">Metodologia  |  </a:t>
+            </a:r>
+            <a:r>
+              <a:rPr lang="pt-BR" sz="1000" dirty="0">
+                <a:latin typeface="Montserrat"/>
+              </a:rPr>
+              <a:t xml:space="preserve">Identificação  |  </a:t>
+            </a:r>
+            <a:r>
+              <a:rPr lang="pt-BR" sz="1000" dirty="0">
+                <a:latin typeface="Montserrat"/>
+              </a:rPr>
+              <a:t xml:space="preserve">Resultados  |  </a:t>
+            </a:r>
+            <a:r>
+              <a:rPr lang="pt-BR" sz="1000" b="1" dirty="0">
+                <a:solidFill>
+                  <a:srgbClr val="114719"/>
+                </a:solidFill>
+                <a:latin typeface="Montserrat"/>
+              </a:rPr>
+              <a:t>Robustez</a:t>
+            </a:r>
+            <a:r>
+              <a:rPr lang="pt-BR" sz="1000" dirty="0">
+                <a:latin typeface="Montserrat"/>
+              </a:rPr>
+              <a:t xml:space="preserve">  |  </a:t>
+            </a:r>
+            <a:r>
+              <a:rPr lang="pt-BR" sz="1000" dirty="0">
+                <a:latin typeface="Montserrat"/>
+              </a:rPr>
+              <a:t xml:space="preserve">Discussão</a:t>
+            </a:r>
+          </a:p>
+        </p:txBody>
+      </p:sp>
+      <p:pic>
+        <p:nvPicPr>
+          <p:cNvPr id="101" name="Figura" descr="Queda em 0,300 nas três medidas: como estimada, com dummy de capital e só com células de vaga imediata, com IC 95% (auditoria 36)"/>
+          <p:cNvPicPr>
+            <a:picLocks noChangeAspect="1"/>
+          </p:cNvPicPr>
+          <p:nvPr/>
+        </p:nvPicPr>
+        <p:blipFill>
+          <a:blip r:embed="rId3"/>
+          <a:stretch>
+            <a:fillRect/>
+          </a:stretch>
+        </p:blipFill>
+        <p:spPr>
+          <a:xfrm>
+            <a:off x="292608" y="1103356"/>
+            <a:ext cx="8211312" cy="4005518"/>
+          </a:xfrm>
+          <a:prstGeom prst="rect">
+            <a:avLst/>
+          </a:prstGeom>
+          <a:ln w="6350">
+            <a:solidFill>
+              <a:srgbClr val="DDE7DF"/>
+            </a:solidFill>
+          </a:ln>
+        </p:spPr>
+      </p:pic>
+      <p:sp>
+        <p:nvSpPr>
+          <p:cNvPr id="102" name="Cautela"/>
+          <p:cNvSpPr/>
+          <p:nvPr/>
+        </p:nvSpPr>
+        <p:spPr>
+          <a:xfrm>
+            <a:off x="292608" y="5273466"/>
+            <a:ext cx="8211312" cy="517754"/>
+          </a:xfrm>
+          <a:prstGeom prst="roundRect">
+            <a:avLst>
+              <a:gd name="adj" fmla="val 8000"/>
+            </a:avLst>
+          </a:prstGeom>
+          <a:solidFill>
+            <a:srgbClr val="E7F1EA"/>
+          </a:solidFill>
+          <a:ln>
+            <a:noFill/>
+          </a:ln>
+        </p:spPr>
+        <p:txBody>
+          <a:bodyPr wrap="square" lIns="182880" tIns="54864" rIns="182880" bIns="54864" rtlCol="0" anchor="ctr">
+            <a:noAutofit/>
+          </a:bodyPr>
+          <a:lstStyle/>
+          <a:p>
+            <a:pPr marL="0" indent="0" algn="l">
+              <a:lnSpc>
+                <a:spcPct val="100000"/>
+              </a:lnSpc>
+              <a:spcBef>
+                <a:spcPts val="0"/>
+              </a:spcBef>
+              <a:spcAft>
+                <a:spcPts val="0"/>
+              </a:spcAft>
+              <a:buNone/>
+            </a:pPr>
+            <a:r>
+              <a:rPr lang="pt-BR" sz="1600" b="1" dirty="0">
+                <a:solidFill>
+                  <a:srgbClr val="114719"/>
+                </a:solidFill>
+                <a:latin typeface="Montserrat"/>
+              </a:rPr>
+              <a:t>Auditoria 36, diagnóstico pós-resultado.</a:t>
+            </a:r>
+          </a:p>
+        </p:txBody>
+      </p:sp>
+      <p:sp>
+        <p:nvSpPr>
+          <p:cNvPr id="103" name="Linha"/>
+          <p:cNvSpPr/>
+          <p:nvPr/>
+        </p:nvSpPr>
+        <p:spPr>
+          <a:xfrm>
+            <a:off x="8778240" y="804672"/>
+            <a:ext cx="3108960" cy="2186432"/>
+          </a:xfrm>
+          <a:prstGeom prst="roundRect">
+            <a:avLst>
+              <a:gd name="adj" fmla="val 6000"/>
+            </a:avLst>
+          </a:prstGeom>
+          <a:solidFill>
+            <a:srgbClr val="F4F8F5"/>
+          </a:solidFill>
+          <a:ln w="12700">
+            <a:solidFill>
+              <a:srgbClr val="056429"/>
+            </a:solidFill>
+          </a:ln>
+        </p:spPr>
+        <p:txBody>
+          <a:bodyPr wrap="square" lIns="182880" tIns="54864" rIns="182880" bIns="54864" rtlCol="0" anchor="ctr">
+            <a:noAutofit/>
+          </a:bodyPr>
+          <a:lstStyle/>
+          <a:p>
+            <a:pPr marL="0" indent="0" algn="l">
+              <a:lnSpc>
+                <a:spcPct val="100000"/>
+              </a:lnSpc>
+              <a:spcBef>
+                <a:spcPts val="0"/>
+              </a:spcBef>
+              <a:spcAft>
+                <a:spcPts val="0"/>
+              </a:spcAft>
+              <a:buNone/>
+            </a:pPr>
+            <a:r>
+              <a:rPr lang="pt-BR" sz="1600" b="1" dirty="0">
+                <a:solidFill>
+                  <a:srgbClr val="114719"/>
+                </a:solidFill>
+                <a:latin typeface="Montserrat"/>
+              </a:rPr>
+              <a:t>(c)</a:t>
+            </a:r>
+            <a:r>
+              <a:rPr lang="pt-BR" sz="1600" b="0" dirty="0">
+                <a:solidFill>
+                  <a:srgbClr val="3A3A3A"/>
+                </a:solidFill>
+                <a:latin typeface="Montserrat"/>
+              </a:rPr>
+              <a:t> Controlando a capital, a queda encolhe e o IC contém zero; só com vagas imediatas, encolhe.</a:t>
+            </a:r>
+          </a:p>
+        </p:txBody>
+      </p:sp>
+      <p:sp>
+        <p:nvSpPr>
+          <p:cNvPr id="104" name="Linha"/>
+          <p:cNvSpPr/>
+          <p:nvPr/>
+        </p:nvSpPr>
+        <p:spPr>
+          <a:xfrm>
+            <a:off x="8778240" y="3155696"/>
+            <a:ext cx="3108960" cy="1346403"/>
+          </a:xfrm>
+          <a:prstGeom prst="roundRect">
+            <a:avLst>
+              <a:gd name="adj" fmla="val 6000"/>
+            </a:avLst>
+          </a:prstGeom>
+          <a:solidFill>
+            <a:srgbClr val="F4F8F5"/>
+          </a:solidFill>
+          <a:ln w="12700">
+            <a:solidFill>
+              <a:srgbClr val="056429"/>
+            </a:solidFill>
+          </a:ln>
+        </p:spPr>
+        <p:txBody>
+          <a:bodyPr wrap="square" lIns="182880" tIns="54864" rIns="182880" bIns="54864" rtlCol="0" anchor="ctr">
+            <a:noAutofit/>
+          </a:bodyPr>
+          <a:lstStyle/>
+          <a:p>
+            <a:pPr marL="0" indent="0" algn="l">
+              <a:lnSpc>
+                <a:spcPct val="100000"/>
+              </a:lnSpc>
+              <a:spcBef>
+                <a:spcPts val="0"/>
+              </a:spcBef>
+              <a:spcAft>
+                <a:spcPts val="0"/>
+              </a:spcAft>
+              <a:buNone/>
+            </a:pPr>
+            <a:r>
+              <a:rPr lang="pt-BR" sz="1600" b="0" dirty="0">
+                <a:solidFill>
+                  <a:srgbClr val="3A3A3A"/>
+                </a:solidFill>
+                <a:latin typeface="Montserrat"/>
+              </a:rPr>
+              <a:t>13 capitais abaixo de 0,300 e 6 acima.</a:t>
+            </a:r>
+          </a:p>
+        </p:txBody>
+      </p:sp>
+      <p:sp>
+        <p:nvSpPr>
+          <p:cNvPr id="105" name="Fontes"/>
+          <p:cNvSpPr txBox="1"/>
+          <p:nvPr/>
+        </p:nvSpPr>
+        <p:spPr>
+          <a:xfrm>
+            <a:off x="292608" y="6181344"/>
+            <a:ext cx="11594592" cy="274320"/>
+          </a:xfrm>
+          <a:prstGeom prst="rect">
+            <a:avLst/>
+          </a:prstGeom>
+          <a:noFill/>
+          <a:ln>
+            <a:noFill/>
+          </a:ln>
+        </p:spPr>
+        <p:txBody>
+          <a:bodyPr wrap="square" lIns="0" tIns="0" rIns="0" bIns="0" rtlCol="0" anchor="b">
+            <a:noAutofit/>
+          </a:bodyPr>
+          <a:lstStyle/>
+          <a:p>
+            <a:pPr marL="0" indent="0" algn="l">
+              <a:lnSpc>
+                <a:spcPct val="95000"/>
+              </a:lnSpc>
+              <a:spcBef>
+                <a:spcPts val="0"/>
+              </a:spcBef>
+              <a:spcAft>
+                <a:spcPts val="0"/>
+              </a:spcAft>
+              <a:buNone/>
+            </a:pPr>
+            <a:r>
+              <a:rPr lang="pt-BR" sz="800" b="1" dirty="0">
+                <a:solidFill>
+                  <a:srgbClr val="6B6B6B"/>
+                </a:solidFill>
+                <a:latin typeface="Montserrat"/>
+              </a:rPr>
+              <a:t>Fontes: </a:t>
+            </a:r>
+            <a:r>
+              <a:rPr lang="pt-BR" sz="800" b="0" dirty="0">
+                <a:solidFill>
+                  <a:srgbClr val="6B6B6B"/>
+                </a:solidFill>
+                <a:latin typeface="Montserrat"/>
+              </a:rPr>
+              <a:t>output/auditoria_H1/a36_estimativas.csv e a36_resumo.json (auditoria 36); o adendo 48c fará a versão padronizada.</a:t>
             </a:r>
           </a:p>
         </p:txBody>
@@ -28330,7 +27961,7 @@
                 </a:solidFill>
                 <a:latin typeface="Montserrat"/>
               </a:rPr>
-              <a:t>Em 0,300 é a estimativa no corte</a:t>
+              <a:t>H1 · O que dá para afirmar sobre a queda</a:t>
             </a:r>
           </a:p>
         </p:txBody>
@@ -28465,7 +28096,65 @@
         </p:nvSpPr>
         <p:spPr>
           <a:xfrm>
-            <a:off x="292608" y="4736592"/>
+            <a:off x="292608" y="4901184"/>
+            <a:ext cx="11594592" cy="731520"/>
+          </a:xfrm>
+          <a:prstGeom prst="rect">
+            <a:avLst/>
+          </a:prstGeom>
+          <a:noFill/>
+          <a:ln>
+            <a:noFill/>
+          </a:ln>
+        </p:spPr>
+        <p:txBody>
+          <a:bodyPr wrap="square" lIns="164592" tIns="18288" rIns="164592" bIns="18288" rtlCol="0" anchor="ctr">
+            <a:noAutofit/>
+          </a:bodyPr>
+          <a:lstStyle/>
+          <a:p>
+            <a:pPr marL="0" indent="0" algn="l">
+              <a:lnSpc>
+                <a:spcPct val="100000"/>
+              </a:lnSpc>
+              <a:spcBef>
+                <a:spcPts val="0"/>
+              </a:spcBef>
+              <a:spcAft>
+                <a:spcPts val="0"/>
+              </a:spcAft>
+              <a:buNone/>
+            </a:pPr>
+            <a:r>
+              <a:rPr lang="pt-BR" sz="1800" b="1" dirty="0">
+                <a:solidFill>
+                  <a:srgbClr val="114719"/>
+                </a:solidFill>
+                <a:latin typeface="Montserrat"/>
+              </a:rPr>
+              <a:t>TOST:</a:t>
+            </a:r>
+            <a:r>
+              <a:rPr lang="pt-BR" sz="1800" b="0" dirty="0">
+                <a:solidFill>
+                  <a:srgbClr val="3A3A3A"/>
+                </a:solidFill>
+                <a:latin typeface="Montserrat"/>
+              </a:rPr>
+              <a:t> HI-1 inconclusivo; HI-2 em 0,300 descarta aumento ≥ 25% da média, não descarta queda.</a:t>
+            </a:r>
+          </a:p>
+        </p:txBody>
+      </p:sp>
+      <p:sp>
+        <p:nvSpPr>
+          <p:cNvPr id="102" name="Linha"/>
+          <p:cNvSpPr/>
+          <p:nvPr/>
+        </p:nvSpPr>
+        <p:spPr>
+          <a:xfrm>
+            <a:off x="292608" y="5687568"/>
             <a:ext cx="11594592" cy="420624"/>
           </a:xfrm>
           <a:prstGeom prst="rect">
@@ -28495,122 +28184,29 @@
               <a:buNone/>
             </a:pPr>
             <a:r>
+              <a:rPr lang="pt-BR" sz="1800" b="1" dirty="0">
+                <a:solidFill>
+                  <a:srgbClr val="114719"/>
+                </a:solidFill>
+                <a:latin typeface="Montserrat"/>
+              </a:rPr>
+              <a:t>Em 0,300:</a:t>
+            </a:r>
+            <a:r>
               <a:rPr lang="pt-BR" sz="1800" b="0" dirty="0">
                 <a:solidFill>
                   <a:srgbClr val="3A3A3A"/>
                 </a:solidFill>
                 <a:latin typeface="Montserrat"/>
               </a:rPr>
-              <a:t>A reta de baixo leva até o corte a subida dos últimos 0,050: a ponta fica alta.</a:t>
-            </a:r>
-          </a:p>
-        </p:txBody>
-      </p:sp>
-      <p:sp>
-        <p:nvSpPr>
-          <p:cNvPr id="102" name="Linha"/>
-          <p:cNvSpPr/>
-          <p:nvPr/>
-        </p:nvSpPr>
-        <p:spPr>
-          <a:xfrm>
-            <a:off x="292608" y="5212080"/>
-            <a:ext cx="11594592" cy="420624"/>
-          </a:xfrm>
-          <a:prstGeom prst="rect">
-            <a:avLst/>
-          </a:prstGeom>
-          <a:noFill/>
-          <a:ln>
-            <a:noFill/>
-          </a:ln>
-        </p:spPr>
-        <p:txBody>
-          <a:bodyPr wrap="square" lIns="164592" tIns="18288" rIns="164592" bIns="18288" rtlCol="0" anchor="ctr">
-            <a:noAutofit/>
-          </a:bodyPr>
-          <a:lstStyle/>
-          <a:p>
-            <a:pPr marL="0" indent="0" algn="l">
-              <a:lnSpc>
-                <a:spcPct val="100000"/>
-              </a:lnSpc>
-              <a:spcBef>
-                <a:spcPts val="0"/>
-              </a:spcBef>
-              <a:spcAft>
-                <a:spcPts val="0"/>
-              </a:spcAft>
-              <a:buNone/>
-            </a:pPr>
-            <a:r>
-              <a:rPr lang="pt-BR" sz="1800" b="0" dirty="0">
-                <a:solidFill>
-                  <a:srgbClr val="3A3A3A"/>
-                </a:solidFill>
-                <a:latin typeface="Montserrat"/>
-              </a:rPr>
-              <a:t>Médias iguais, salto negativo: poucos municípios.</a:t>
-            </a:r>
-          </a:p>
-        </p:txBody>
-      </p:sp>
-      <p:sp>
-        <p:nvSpPr>
-          <p:cNvPr id="103" name="Cautela"/>
-          <p:cNvSpPr/>
-          <p:nvPr/>
-        </p:nvSpPr>
-        <p:spPr>
-          <a:xfrm>
-            <a:off x="292608" y="5687568"/>
-            <a:ext cx="11594592" cy="420624"/>
-          </a:xfrm>
-          <a:prstGeom prst="roundRect">
-            <a:avLst>
-              <a:gd name="adj" fmla="val 12000"/>
-            </a:avLst>
-          </a:prstGeom>
-          <a:solidFill>
-            <a:srgbClr val="E7F1EA"/>
-          </a:solidFill>
-          <a:ln>
-            <a:noFill/>
-          </a:ln>
-        </p:spPr>
-        <p:txBody>
-          <a:bodyPr wrap="square" lIns="164592" tIns="18288" rIns="164592" bIns="18288" rtlCol="0" anchor="ctr">
-            <a:noAutofit/>
-          </a:bodyPr>
-          <a:lstStyle/>
-          <a:p>
-            <a:pPr marL="0" indent="0" algn="l">
-              <a:lnSpc>
-                <a:spcPct val="100000"/>
-              </a:lnSpc>
-              <a:spcBef>
-                <a:spcPts val="0"/>
-              </a:spcBef>
-              <a:spcAft>
-                <a:spcPts val="0"/>
-              </a:spcAft>
-              <a:buNone/>
-            </a:pPr>
-            <a:r>
-              <a:rPr lang="pt-BR" sz="1800" b="1" dirty="0">
-                <a:solidFill>
-                  <a:srgbClr val="114719"/>
-                </a:solidFill>
-                <a:latin typeface="Montserrat"/>
-              </a:rPr>
-              <a:t>O acaso não está descartado.</a:t>
+              <a:t> nenhum incentivo individual muda; muda o teto de emendas do município.</a:t>
             </a:r>
           </a:p>
         </p:txBody>
       </p:sp>
       <p:pic>
         <p:nvPicPr>
-          <p:cNvPr id="104" name="Figura" descr="Corte 0,300: médias por faixa de 0,010, reta local de cada lado e médias da janela; a reta de baixo chega alta ao corte e a de cima começa baixa"/>
+          <p:cNvPr id="103" name="Figura" descr="TOST da H1 principal (adendo 48b, HI-s7): salto no corte com IC 90% contra a margem do protocolo 60, para HI-1 e HI-2"/>
           <p:cNvPicPr>
             <a:picLocks noChangeAspect="1"/>
           </p:cNvPicPr>
@@ -28624,8 +28220,8 @@
         </p:blipFill>
         <p:spPr>
           <a:xfrm>
-            <a:off x="1315616" y="804672"/>
-            <a:ext cx="9548575" cy="3803904"/>
+            <a:off x="951746" y="804672"/>
+            <a:ext cx="10276316" cy="3968496"/>
           </a:xfrm>
           <a:prstGeom prst="rect">
             <a:avLst/>
@@ -28639,7 +28235,7 @@
       </p:pic>
       <p:sp>
         <p:nvSpPr>
-          <p:cNvPr id="105" name="Fontes"/>
+          <p:cNvPr id="104" name="Fontes"/>
           <p:cNvSpPr txBox="1"/>
           <p:nvPr/>
         </p:nvSpPr>
@@ -28690,7 +28286,7 @@
                 </a:solidFill>
                 <a:latin typeface="Montserrat"/>
               </a:rPr>
-              <a:t>output/rdd_bolsa/outcomes/outcomes_V_celula.parquet; DQ_estimativas.csv (protocolo 61; doc 57l; auditoria 33).</a:t>
+              <a:t>output/rdd_bolsa/HI_estimativas.csv (HI-s7; adendo 48b; doc 57n; em auditoria); auditorias 18 e 35; doc 57l.</a:t>
             </a:r>
           </a:p>
         </p:txBody>
@@ -28749,889 +28345,11 @@
             <a:r>
               <a:rPr lang="pt-BR" sz="2400" b="1" dirty="0">
                 <a:solidFill>
-                  <a:srgbClr val="FFFFFF"/>
+                  <a:srgbClr val="C4CCC6"/>
                 </a:solidFill>
                 <a:latin typeface="Montserrat"/>
               </a:rPr>
-              <a:t>As vagas do lado de cima eram diferentes</a:t>
-            </a:r>
-          </a:p>
-        </p:txBody>
-      </p:sp>
-      <p:sp>
-        <p:nvSpPr>
-          <p:cNvPr id="3" name="Número da página"/>
-          <p:cNvSpPr>
-            <a:spLocks noGrp="1"/>
-          </p:cNvSpPr>
-          <p:nvPr>
-            <p:ph type="body" sz="quarter" idx="18"/>
-          </p:nvPr>
-        </p:nvSpPr>
-        <p:spPr>
-          <a:xfrm>
-            <a:off x="11706744" y="6457042"/>
-            <a:ext cx="492080" cy="400640"/>
-          </a:xfrm>
-        </p:spPr>
-        <p:txBody>
-          <a:bodyPr anchor="ctr">
-            <a:normAutofit/>
-          </a:bodyPr>
-          <a:lstStyle/>
-          <a:p>
-            <a:pPr algn="ctr"/>
-            <a:fld id="{B1A5E0C2-5F3A-4C7E-9D11-7A2E6C0F4B01}" type="slidenum">
-              <a:rPr lang="pt-BR" sz="1400" b="1">
-                <a:solidFill>
-                  <a:srgbClr val="BFBFBF"/>
-                </a:solidFill>
-                <a:latin typeface="Montserrat"/>
-              </a:rPr>
-              <a:t>‹#›</a:t>
-            </a:fld>
-            <a:endParaRPr lang="pt-BR" sz="1400" b="1">
-              <a:solidFill>
-                <a:srgbClr val="BFBFBF"/>
-              </a:solidFill>
-            </a:endParaRPr>
-          </a:p>
-        </p:txBody>
-      </p:sp>
-      <p:sp>
-        <p:nvSpPr>
-          <p:cNvPr id="4" name="Navegação do rodapé"/>
-          <p:cNvSpPr txBox="1"/>
-          <p:nvPr/>
-        </p:nvSpPr>
-        <p:spPr>
-          <a:xfrm>
-            <a:off x="196860" y="6639248"/>
-            <a:ext cx="9223026" cy="246221"/>
-          </a:xfrm>
-          <a:prstGeom prst="rect">
-            <a:avLst/>
-          </a:prstGeom>
-          <a:noFill/>
-        </p:spPr>
-        <p:txBody>
-          <a:bodyPr wrap="square" rtlCol="0">
-            <a:spAutoFit/>
-          </a:bodyPr>
-          <a:lstStyle/>
-          <a:p>
-            <a:r>
-              <a:rPr lang="pt-BR" sz="1000" dirty="0">
-                <a:latin typeface="Montserrat"/>
-              </a:rPr>
-              <a:t xml:space="preserve">Hipótese  |  </a:t>
-            </a:r>
-            <a:r>
-              <a:rPr lang="pt-BR" sz="1000" dirty="0">
-                <a:latin typeface="Montserrat"/>
-              </a:rPr>
-              <a:t xml:space="preserve">Dados  |  </a:t>
-            </a:r>
-            <a:r>
-              <a:rPr lang="pt-BR" sz="1000" dirty="0">
-                <a:latin typeface="Montserrat"/>
-              </a:rPr>
-              <a:t xml:space="preserve">Análise descritiva  |  </a:t>
-            </a:r>
-            <a:r>
-              <a:rPr lang="pt-BR" sz="1000" dirty="0">
-                <a:latin typeface="Montserrat"/>
-              </a:rPr>
-              <a:t xml:space="preserve">Metodologia  |  </a:t>
-            </a:r>
-            <a:r>
-              <a:rPr lang="pt-BR" sz="1000" dirty="0">
-                <a:latin typeface="Montserrat"/>
-              </a:rPr>
-              <a:t xml:space="preserve">Identificação  |  </a:t>
-            </a:r>
-            <a:r>
-              <a:rPr lang="pt-BR" sz="1000" dirty="0">
-                <a:latin typeface="Montserrat"/>
-              </a:rPr>
-              <a:t xml:space="preserve">Resultados  |  </a:t>
-            </a:r>
-            <a:r>
-              <a:rPr lang="pt-BR" sz="1000" b="1" dirty="0">
-                <a:solidFill>
-                  <a:srgbClr val="114719"/>
-                </a:solidFill>
-                <a:latin typeface="Montserrat"/>
-              </a:rPr>
-              <a:t>Robustez</a:t>
-            </a:r>
-            <a:r>
-              <a:rPr lang="pt-BR" sz="1000" dirty="0">
-                <a:latin typeface="Montserrat"/>
-              </a:rPr>
-              <a:t xml:space="preserve">  |  </a:t>
-            </a:r>
-            <a:r>
-              <a:rPr lang="pt-BR" sz="1000" dirty="0">
-                <a:latin typeface="Montserrat"/>
-              </a:rPr>
-              <a:t xml:space="preserve">Discussão</a:t>
-            </a:r>
-          </a:p>
-        </p:txBody>
-      </p:sp>
-      <p:pic>
-        <p:nvPicPr>
-          <p:cNvPr id="101" name="Figura" descr="Diagnóstico do protocolo 61: quanto da queda em 0,300 sobra ao igualar cada fator entre os lados do corte, para Q1, Q2 e Q3, com IC 95%"/>
-          <p:cNvPicPr>
-            <a:picLocks noChangeAspect="1"/>
-          </p:cNvPicPr>
-          <p:nvPr/>
-        </p:nvPicPr>
-        <p:blipFill>
-          <a:blip r:embed="rId3"/>
-          <a:stretch>
-            <a:fillRect/>
-          </a:stretch>
-        </p:blipFill>
-        <p:spPr>
-          <a:xfrm>
-            <a:off x="292608" y="1118565"/>
-            <a:ext cx="8211312" cy="3695090"/>
-          </a:xfrm>
-          <a:prstGeom prst="rect">
-            <a:avLst/>
-          </a:prstGeom>
-          <a:ln w="6350">
-            <a:solidFill>
-              <a:srgbClr val="DDE7DF"/>
-            </a:solidFill>
-          </a:ln>
-        </p:spPr>
-      </p:pic>
-      <p:sp>
-        <p:nvSpPr>
-          <p:cNvPr id="102" name="Cautela"/>
-          <p:cNvSpPr/>
-          <p:nvPr/>
-        </p:nvSpPr>
-        <p:spPr>
-          <a:xfrm>
-            <a:off x="292608" y="4978248"/>
-            <a:ext cx="8211312" cy="797763"/>
-          </a:xfrm>
-          <a:prstGeom prst="roundRect">
-            <a:avLst>
-              <a:gd name="adj" fmla="val 8000"/>
-            </a:avLst>
-          </a:prstGeom>
-          <a:solidFill>
-            <a:srgbClr val="E7F1EA"/>
-          </a:solidFill>
-          <a:ln>
-            <a:noFill/>
-          </a:ln>
-        </p:spPr>
-        <p:txBody>
-          <a:bodyPr wrap="square" lIns="182880" tIns="54864" rIns="182880" bIns="54864" rtlCol="0" anchor="ctr">
-            <a:noAutofit/>
-          </a:bodyPr>
-          <a:lstStyle/>
-          <a:p>
-            <a:pPr marL="0" indent="0" algn="l">
-              <a:lnSpc>
-                <a:spcPct val="100000"/>
-              </a:lnSpc>
-              <a:spcBef>
-                <a:spcPts val="0"/>
-              </a:spcBef>
-              <a:spcAft>
-                <a:spcPts val="0"/>
-              </a:spcAft>
-              <a:buNone/>
-            </a:pPr>
-            <a:r>
-              <a:rPr lang="pt-BR" sz="1600" b="1" dirty="0">
-                <a:solidFill>
-                  <a:srgbClr val="114719"/>
-                </a:solidFill>
-                <a:latin typeface="Montserrat"/>
-              </a:rPr>
-              <a:t>Igualando: queda pela metade ou mais em algumas medidas; nenhum fator nas três.</a:t>
-            </a:r>
-          </a:p>
-        </p:txBody>
-      </p:sp>
-      <p:sp>
-        <p:nvSpPr>
-          <p:cNvPr id="103" name="Linha"/>
-          <p:cNvSpPr/>
-          <p:nvPr/>
-        </p:nvSpPr>
-        <p:spPr>
-          <a:xfrm>
-            <a:off x="8778240" y="804672"/>
-            <a:ext cx="3108960" cy="1346403"/>
-          </a:xfrm>
-          <a:prstGeom prst="roundRect">
-            <a:avLst>
-              <a:gd name="adj" fmla="val 6000"/>
-            </a:avLst>
-          </a:prstGeom>
-          <a:solidFill>
-            <a:srgbClr val="F4F8F5"/>
-          </a:solidFill>
-          <a:ln w="12700">
-            <a:solidFill>
-              <a:srgbClr val="056429"/>
-            </a:solidFill>
-          </a:ln>
-        </p:spPr>
-        <p:txBody>
-          <a:bodyPr wrap="square" lIns="182880" tIns="54864" rIns="182880" bIns="54864" rtlCol="0" anchor="ctr">
-            <a:noAutofit/>
-          </a:bodyPr>
-          <a:lstStyle/>
-          <a:p>
-            <a:pPr marL="0" indent="0" algn="l">
-              <a:lnSpc>
-                <a:spcPct val="100000"/>
-              </a:lnSpc>
-              <a:spcBef>
-                <a:spcPts val="0"/>
-              </a:spcBef>
-              <a:spcAft>
-                <a:spcPts val="0"/>
-              </a:spcAft>
-              <a:buNone/>
-            </a:pPr>
-            <a:r>
-              <a:rPr lang="pt-BR" sz="1600" b="0" dirty="0">
-                <a:solidFill>
-                  <a:srgbClr val="3A3A3A"/>
-                </a:solidFill>
-                <a:latin typeface="Montserrat"/>
-              </a:rPr>
-              <a:t>Cursos que preenchem pouco</a:t>
-            </a:r>
-          </a:p>
-        </p:txBody>
-      </p:sp>
-      <p:sp>
-        <p:nvSpPr>
-          <p:cNvPr id="104" name="Linha"/>
-          <p:cNvSpPr/>
-          <p:nvPr/>
-        </p:nvSpPr>
-        <p:spPr>
-          <a:xfrm>
-            <a:off x="8778240" y="2315667"/>
-            <a:ext cx="3108960" cy="1346403"/>
-          </a:xfrm>
-          <a:prstGeom prst="roundRect">
-            <a:avLst>
-              <a:gd name="adj" fmla="val 6000"/>
-            </a:avLst>
-          </a:prstGeom>
-          <a:solidFill>
-            <a:srgbClr val="F4F8F5"/>
-          </a:solidFill>
-          <a:ln w="12700">
-            <a:solidFill>
-              <a:srgbClr val="056429"/>
-            </a:solidFill>
-          </a:ln>
-        </p:spPr>
-        <p:txBody>
-          <a:bodyPr wrap="square" lIns="182880" tIns="54864" rIns="182880" bIns="54864" rtlCol="0" anchor="ctr">
-            <a:noAutofit/>
-          </a:bodyPr>
-          <a:lstStyle/>
-          <a:p>
-            <a:pPr marL="0" indent="0" algn="l">
-              <a:lnSpc>
-                <a:spcPct val="100000"/>
-              </a:lnSpc>
-              <a:spcBef>
-                <a:spcPts val="0"/>
-              </a:spcBef>
-              <a:spcAft>
-                <a:spcPts val="0"/>
-              </a:spcAft>
-              <a:buNone/>
-            </a:pPr>
-            <a:r>
-              <a:rPr lang="pt-BR" sz="1600" b="0" dirty="0">
-                <a:solidFill>
-                  <a:srgbClr val="3A3A3A"/>
-                </a:solidFill>
-                <a:latin typeface="Montserrat"/>
-              </a:rPr>
-              <a:t>Mais células do curso na UF</a:t>
-            </a:r>
-          </a:p>
-        </p:txBody>
-      </p:sp>
-      <p:sp>
-        <p:nvSpPr>
-          <p:cNvPr id="105" name="Linha"/>
-          <p:cNvSpPr/>
-          <p:nvPr/>
-        </p:nvSpPr>
-        <p:spPr>
-          <a:xfrm>
-            <a:off x="8778240" y="3826662"/>
-            <a:ext cx="3108960" cy="1346403"/>
-          </a:xfrm>
-          <a:prstGeom prst="roundRect">
-            <a:avLst>
-              <a:gd name="adj" fmla="val 6000"/>
-            </a:avLst>
-          </a:prstGeom>
-          <a:solidFill>
-            <a:srgbClr val="F4F8F5"/>
-          </a:solidFill>
-          <a:ln w="12700">
-            <a:solidFill>
-              <a:srgbClr val="056429"/>
-            </a:solidFill>
-          </a:ln>
-        </p:spPr>
-        <p:txBody>
-          <a:bodyPr wrap="square" lIns="182880" tIns="54864" rIns="182880" bIns="54864" rtlCol="0" anchor="ctr">
-            <a:noAutofit/>
-          </a:bodyPr>
-          <a:lstStyle/>
-          <a:p>
-            <a:pPr marL="0" indent="0" algn="l">
-              <a:lnSpc>
-                <a:spcPct val="100000"/>
-              </a:lnSpc>
-              <a:spcBef>
-                <a:spcPts val="0"/>
-              </a:spcBef>
-              <a:spcAft>
-                <a:spcPts val="0"/>
-              </a:spcAft>
-              <a:buNone/>
-            </a:pPr>
-            <a:r>
-              <a:rPr lang="pt-BR" sz="1600" b="0" dirty="0">
-                <a:solidFill>
-                  <a:srgbClr val="3A3A3A"/>
-                </a:solidFill>
-                <a:latin typeface="Montserrat"/>
-              </a:rPr>
-              <a:t>Ciclo 2: mais células só de reserva</a:t>
-            </a:r>
-          </a:p>
-        </p:txBody>
-      </p:sp>
-      <p:sp>
-        <p:nvSpPr>
-          <p:cNvPr id="106" name="Fontes"/>
-          <p:cNvSpPr txBox="1"/>
-          <p:nvPr/>
-        </p:nvSpPr>
-        <p:spPr>
-          <a:xfrm>
-            <a:off x="292608" y="6181344"/>
-            <a:ext cx="11594592" cy="274320"/>
-          </a:xfrm>
-          <a:prstGeom prst="rect">
-            <a:avLst/>
-          </a:prstGeom>
-          <a:noFill/>
-          <a:ln>
-            <a:noFill/>
-          </a:ln>
-        </p:spPr>
-        <p:txBody>
-          <a:bodyPr wrap="square" lIns="0" tIns="0" rIns="0" bIns="0" rtlCol="0" anchor="b">
-            <a:noAutofit/>
-          </a:bodyPr>
-          <a:lstStyle/>
-          <a:p>
-            <a:pPr marL="0" indent="0" algn="l">
-              <a:lnSpc>
-                <a:spcPct val="95000"/>
-              </a:lnSpc>
-              <a:spcBef>
-                <a:spcPts val="0"/>
-              </a:spcBef>
-              <a:spcAft>
-                <a:spcPts val="0"/>
-              </a:spcAft>
-              <a:buNone/>
-            </a:pPr>
-            <a:r>
-              <a:rPr lang="pt-BR" sz="800" b="1" dirty="0">
-                <a:solidFill>
-                  <a:srgbClr val="6B6B6B"/>
-                </a:solidFill>
-                <a:latin typeface="Montserrat"/>
-              </a:rPr>
-              <a:t>Fontes: </a:t>
-            </a:r>
-            <a:r>
-              <a:rPr lang="pt-BR" sz="800" b="0" dirty="0">
-                <a:solidFill>
-                  <a:srgbClr val="6B6B6B"/>
-                </a:solidFill>
-                <a:latin typeface="Montserrat"/>
-              </a:rPr>
-              <a:t>output/rdd_bolsa/DQ_estimativas.csv, DQ_resumo.json e DQ_figuras/DQ_quanto_da_queda.png (protocolo 61; doc 57l; auditoria 33, §8); figura usada sem redesenho, conferida pelo hash.</a:t>
-            </a:r>
-          </a:p>
-        </p:txBody>
-      </p:sp>
-    </p:spTree>
-  </p:cSld>
-  <p:clrMapOvr>
-    <a:masterClrMapping/>
-  </p:clrMapOvr>
-</p:sld>
-</file>
-
-<file path=ppt/slides/slide60.xml><?xml version="1.0" encoding="utf-8"?>
-<p:sld xmlns:a="http://schemas.openxmlformats.org/drawingml/2006/main" xmlns:r="http://schemas.openxmlformats.org/officeDocument/2006/relationships" xmlns:p="http://schemas.openxmlformats.org/presentationml/2006/main">
-  <p:cSld>
-    <p:spTree>
-      <p:nvGrpSpPr>
-        <p:cNvPr id="1" name=""/>
-        <p:cNvGrpSpPr/>
-        <p:nvPr/>
-      </p:nvGrpSpPr>
-      <p:grpSpPr>
-        <a:xfrm>
-          <a:off x="0" y="0"/>
-          <a:ext cx="0" cy="0"/>
-          <a:chOff x="0" y="0"/>
-          <a:chExt cx="0" cy="0"/>
-        </a:xfrm>
-      </p:grpSpPr>
-      <p:sp>
-        <p:nvSpPr>
-          <p:cNvPr id="2" name="Título"/>
-          <p:cNvSpPr>
-            <a:spLocks noGrp="1"/>
-          </p:cNvSpPr>
-          <p:nvPr>
-            <p:ph type="title"/>
-          </p:nvPr>
-        </p:nvSpPr>
-        <p:spPr/>
-        <p:txBody>
-          <a:bodyPr>
-            <a:normAutofit/>
-          </a:bodyPr>
-          <a:lstStyle/>
-          <a:p>
-            <a:pPr marL="0" indent="0" algn="l">
-              <a:lnSpc>
-                <a:spcPct val="104000"/>
-              </a:lnSpc>
-              <a:spcAft>
-                <a:spcPts val="0"/>
-              </a:spcAft>
-              <a:buNone/>
-            </a:pPr>
-            <a:r>
-              <a:rPr lang="pt-BR" sz="2400" b="1" dirty="0">
-                <a:solidFill>
-                  <a:srgbClr val="FFFFFF"/>
-                </a:solidFill>
-                <a:latin typeface="Montserrat"/>
-              </a:rPr>
-              <a:t>O que dá para afirmar sobre a queda</a:t>
-            </a:r>
-          </a:p>
-        </p:txBody>
-      </p:sp>
-      <p:sp>
-        <p:nvSpPr>
-          <p:cNvPr id="3" name="Número da página"/>
-          <p:cNvSpPr>
-            <a:spLocks noGrp="1"/>
-          </p:cNvSpPr>
-          <p:nvPr>
-            <p:ph type="body" sz="quarter" idx="18"/>
-          </p:nvPr>
-        </p:nvSpPr>
-        <p:spPr>
-          <a:xfrm>
-            <a:off x="11706744" y="6457042"/>
-            <a:ext cx="492080" cy="400640"/>
-          </a:xfrm>
-        </p:spPr>
-        <p:txBody>
-          <a:bodyPr anchor="ctr">
-            <a:normAutofit/>
-          </a:bodyPr>
-          <a:lstStyle/>
-          <a:p>
-            <a:pPr algn="ctr"/>
-            <a:fld id="{B1A5E0C2-5F3A-4C7E-9D11-7A2E6C0F4B01}" type="slidenum">
-              <a:rPr lang="pt-BR" sz="1400" b="1">
-                <a:solidFill>
-                  <a:srgbClr val="BFBFBF"/>
-                </a:solidFill>
-                <a:latin typeface="Montserrat"/>
-              </a:rPr>
-              <a:t>‹#›</a:t>
-            </a:fld>
-            <a:endParaRPr lang="pt-BR" sz="1400" b="1">
-              <a:solidFill>
-                <a:srgbClr val="BFBFBF"/>
-              </a:solidFill>
-            </a:endParaRPr>
-          </a:p>
-        </p:txBody>
-      </p:sp>
-      <p:sp>
-        <p:nvSpPr>
-          <p:cNvPr id="4" name="Navegação do rodapé"/>
-          <p:cNvSpPr txBox="1"/>
-          <p:nvPr/>
-        </p:nvSpPr>
-        <p:spPr>
-          <a:xfrm>
-            <a:off x="196860" y="6639248"/>
-            <a:ext cx="9223026" cy="246221"/>
-          </a:xfrm>
-          <a:prstGeom prst="rect">
-            <a:avLst/>
-          </a:prstGeom>
-          <a:noFill/>
-        </p:spPr>
-        <p:txBody>
-          <a:bodyPr wrap="square" rtlCol="0">
-            <a:spAutoFit/>
-          </a:bodyPr>
-          <a:lstStyle/>
-          <a:p>
-            <a:r>
-              <a:rPr lang="pt-BR" sz="1000" dirty="0">
-                <a:latin typeface="Montserrat"/>
-              </a:rPr>
-              <a:t xml:space="preserve">Hipótese  |  </a:t>
-            </a:r>
-            <a:r>
-              <a:rPr lang="pt-BR" sz="1000" dirty="0">
-                <a:latin typeface="Montserrat"/>
-              </a:rPr>
-              <a:t xml:space="preserve">Dados  |  </a:t>
-            </a:r>
-            <a:r>
-              <a:rPr lang="pt-BR" sz="1000" dirty="0">
-                <a:latin typeface="Montserrat"/>
-              </a:rPr>
-              <a:t xml:space="preserve">Análise descritiva  |  </a:t>
-            </a:r>
-            <a:r>
-              <a:rPr lang="pt-BR" sz="1000" dirty="0">
-                <a:latin typeface="Montserrat"/>
-              </a:rPr>
-              <a:t xml:space="preserve">Metodologia  |  </a:t>
-            </a:r>
-            <a:r>
-              <a:rPr lang="pt-BR" sz="1000" dirty="0">
-                <a:latin typeface="Montserrat"/>
-              </a:rPr>
-              <a:t xml:space="preserve">Identificação  |  </a:t>
-            </a:r>
-            <a:r>
-              <a:rPr lang="pt-BR" sz="1000" dirty="0">
-                <a:latin typeface="Montserrat"/>
-              </a:rPr>
-              <a:t xml:space="preserve">Resultados  |  </a:t>
-            </a:r>
-            <a:r>
-              <a:rPr lang="pt-BR" sz="1000" b="1" dirty="0">
-                <a:solidFill>
-                  <a:srgbClr val="114719"/>
-                </a:solidFill>
-                <a:latin typeface="Montserrat"/>
-              </a:rPr>
-              <a:t>Robustez</a:t>
-            </a:r>
-            <a:r>
-              <a:rPr lang="pt-BR" sz="1000" dirty="0">
-                <a:latin typeface="Montserrat"/>
-              </a:rPr>
-              <a:t xml:space="preserve">  |  </a:t>
-            </a:r>
-            <a:r>
-              <a:rPr lang="pt-BR" sz="1000" dirty="0">
-                <a:latin typeface="Montserrat"/>
-              </a:rPr>
-              <a:t xml:space="preserve">Discussão</a:t>
-            </a:r>
-          </a:p>
-        </p:txBody>
-      </p:sp>
-      <p:sp>
-        <p:nvSpPr>
-          <p:cNvPr id="101" name="Linha"/>
-          <p:cNvSpPr/>
-          <p:nvPr/>
-        </p:nvSpPr>
-        <p:spPr>
-          <a:xfrm>
-            <a:off x="292608" y="5212080"/>
-            <a:ext cx="11594592" cy="420624"/>
-          </a:xfrm>
-          <a:prstGeom prst="rect">
-            <a:avLst/>
-          </a:prstGeom>
-          <a:noFill/>
-          <a:ln>
-            <a:noFill/>
-          </a:ln>
-        </p:spPr>
-        <p:txBody>
-          <a:bodyPr wrap="square" lIns="164592" tIns="18288" rIns="164592" bIns="18288" rtlCol="0" anchor="ctr">
-            <a:noAutofit/>
-          </a:bodyPr>
-          <a:lstStyle/>
-          <a:p>
-            <a:pPr marL="0" indent="0" algn="l">
-              <a:lnSpc>
-                <a:spcPct val="100000"/>
-              </a:lnSpc>
-              <a:spcBef>
-                <a:spcPts val="0"/>
-              </a:spcBef>
-              <a:spcAft>
-                <a:spcPts val="0"/>
-              </a:spcAft>
-              <a:buNone/>
-            </a:pPr>
-            <a:r>
-              <a:rPr lang="pt-BR" sz="1800" b="1" dirty="0">
-                <a:solidFill>
-                  <a:srgbClr val="114719"/>
-                </a:solidFill>
-                <a:latin typeface="Montserrat"/>
-              </a:rPr>
-              <a:t>TOST:</a:t>
-            </a:r>
-            <a:r>
-              <a:rPr lang="pt-BR" sz="1800" b="0" dirty="0">
-                <a:solidFill>
-                  <a:srgbClr val="3A3A3A"/>
-                </a:solidFill>
-                <a:latin typeface="Montserrat"/>
-              </a:rPr>
-              <a:t> sem aumento de 10 p.p. ou mais; "nada mudou" não se sustenta.</a:t>
-            </a:r>
-          </a:p>
-        </p:txBody>
-      </p:sp>
-      <p:sp>
-        <p:nvSpPr>
-          <p:cNvPr id="102" name="Linha"/>
-          <p:cNvSpPr/>
-          <p:nvPr/>
-        </p:nvSpPr>
-        <p:spPr>
-          <a:xfrm>
-            <a:off x="292608" y="5687568"/>
-            <a:ext cx="11594592" cy="420624"/>
-          </a:xfrm>
-          <a:prstGeom prst="rect">
-            <a:avLst/>
-          </a:prstGeom>
-          <a:noFill/>
-          <a:ln>
-            <a:noFill/>
-          </a:ln>
-        </p:spPr>
-        <p:txBody>
-          <a:bodyPr wrap="square" lIns="164592" tIns="18288" rIns="164592" bIns="18288" rtlCol="0" anchor="ctr">
-            <a:noAutofit/>
-          </a:bodyPr>
-          <a:lstStyle/>
-          <a:p>
-            <a:pPr marL="0" indent="0" algn="l">
-              <a:lnSpc>
-                <a:spcPct val="100000"/>
-              </a:lnSpc>
-              <a:spcBef>
-                <a:spcPts val="0"/>
-              </a:spcBef>
-              <a:spcAft>
-                <a:spcPts val="0"/>
-              </a:spcAft>
-              <a:buNone/>
-            </a:pPr>
-            <a:r>
-              <a:rPr lang="pt-BR" sz="1800" b="1" dirty="0">
-                <a:solidFill>
-                  <a:srgbClr val="114719"/>
-                </a:solidFill>
-                <a:latin typeface="Montserrat"/>
-              </a:rPr>
-              <a:t>Em 0,300:</a:t>
-            </a:r>
-            <a:r>
-              <a:rPr lang="pt-BR" sz="1800" b="0" dirty="0">
-                <a:solidFill>
-                  <a:srgbClr val="3A3A3A"/>
-                </a:solidFill>
-                <a:latin typeface="Montserrat"/>
-              </a:rPr>
-              <a:t> nenhum incentivo individual muda; muda o teto de emendas do município.</a:t>
-            </a:r>
-          </a:p>
-        </p:txBody>
-      </p:sp>
-      <p:pic>
-        <p:nvPicPr>
-          <p:cNvPr id="103" name="Figura" descr="TOST por corte: salto no corte com IC 90% contra a margem do protocolo 60, para A3 e N1"/>
-          <p:cNvPicPr>
-            <a:picLocks noChangeAspect="1"/>
-          </p:cNvPicPr>
-          <p:nvPr/>
-        </p:nvPicPr>
-        <p:blipFill>
-          <a:blip r:embed="rId3"/>
-          <a:stretch>
-            <a:fillRect/>
-          </a:stretch>
-        </p:blipFill>
-        <p:spPr>
-          <a:xfrm>
-            <a:off x="549218" y="804672"/>
-            <a:ext cx="11081373" cy="4279392"/>
-          </a:xfrm>
-          <a:prstGeom prst="rect">
-            <a:avLst/>
-          </a:prstGeom>
-          <a:ln w="6350">
-            <a:solidFill>
-              <a:srgbClr val="DDE7DF"/>
-            </a:solidFill>
-          </a:ln>
-        </p:spPr>
-      </p:pic>
-      <p:sp>
-        <p:nvSpPr>
-          <p:cNvPr id="104" name="Fontes"/>
-          <p:cNvSpPr txBox="1"/>
-          <p:nvPr/>
-        </p:nvSpPr>
-        <p:spPr>
-          <a:xfrm>
-            <a:off x="292608" y="6181344"/>
-            <a:ext cx="11594592" cy="274320"/>
-          </a:xfrm>
-          <a:prstGeom prst="rect">
-            <a:avLst/>
-          </a:prstGeom>
-          <a:noFill/>
-          <a:ln>
-            <a:noFill/>
-          </a:ln>
-        </p:spPr>
-        <p:txBody>
-          <a:bodyPr wrap="square" lIns="0" tIns="0" rIns="0" bIns="0" rtlCol="0" anchor="b">
-            <a:noAutofit/>
-          </a:bodyPr>
-          <a:lstStyle/>
-          <a:p>
-            <a:pPr marL="0" indent="0" algn="l">
-              <a:lnSpc>
-                <a:spcPct val="95000"/>
-              </a:lnSpc>
-              <a:spcBef>
-                <a:spcPts val="0"/>
-              </a:spcBef>
-              <a:spcAft>
-                <a:spcPts val="0"/>
-              </a:spcAft>
-              <a:buNone/>
-            </a:pPr>
-            <a:r>
-              <a:rPr lang="pt-BR" sz="800" b="1" dirty="0">
-                <a:solidFill>
-                  <a:srgbClr val="6B6B6B"/>
-                </a:solidFill>
-                <a:latin typeface="Montserrat"/>
-              </a:rPr>
-              <a:t>Fontes: </a:t>
-            </a:r>
-            <a:r>
-              <a:rPr lang="pt-BR" sz="800" b="0" dirty="0">
-                <a:solidFill>
-                  <a:srgbClr val="6B6B6B"/>
-                </a:solidFill>
-                <a:latin typeface="Montserrat"/>
-              </a:rPr>
-              <a:t>output/rdd_bolsa/EQ_estimativas.csv (TOST; protocolo 60; doc 57j; auditoria 32); auditorias 18 e 35; doc 57l.</a:t>
-            </a:r>
-          </a:p>
-        </p:txBody>
-      </p:sp>
-    </p:spTree>
-  </p:cSld>
-  <p:clrMapOvr>
-    <a:masterClrMapping/>
-  </p:clrMapOvr>
-</p:sld>
-</file>
-
-<file path=ppt/slides/slide61.xml><?xml version="1.0" encoding="utf-8"?>
-<p:sld xmlns:a="http://schemas.openxmlformats.org/drawingml/2006/main" xmlns:r="http://schemas.openxmlformats.org/officeDocument/2006/relationships" xmlns:p="http://schemas.openxmlformats.org/presentationml/2006/main">
-  <p:cSld>
-    <p:spTree>
-      <p:nvGrpSpPr>
-        <p:cNvPr id="1" name=""/>
-        <p:cNvGrpSpPr/>
-        <p:nvPr/>
-      </p:nvGrpSpPr>
-      <p:grpSpPr>
-        <a:xfrm>
-          <a:off x="0" y="0"/>
-          <a:ext cx="0" cy="0"/>
-          <a:chOff x="0" y="0"/>
-          <a:chExt cx="0" cy="0"/>
-        </a:xfrm>
-      </p:grpSpPr>
-      <p:sp>
-        <p:nvSpPr>
-          <p:cNvPr id="2" name="Título"/>
-          <p:cNvSpPr>
-            <a:spLocks noGrp="1"/>
-          </p:cNvSpPr>
-          <p:nvPr>
-            <p:ph type="title"/>
-          </p:nvPr>
-        </p:nvSpPr>
-        <p:spPr/>
-        <p:txBody>
-          <a:bodyPr>
-            <a:normAutofit/>
-          </a:bodyPr>
-          <a:lstStyle/>
-          <a:p>
-            <a:pPr marL="0" indent="0" algn="l">
-              <a:lnSpc>
-                <a:spcPct val="104000"/>
-              </a:lnSpc>
-              <a:spcAft>
-                <a:spcPts val="0"/>
-              </a:spcAft>
-              <a:buNone/>
-            </a:pPr>
-            <a:r>
-              <a:rPr lang="pt-BR" sz="2400" b="1" dirty="0">
-                <a:solidFill>
-                  <a:srgbClr val="FFFFFF"/>
-                </a:solidFill>
-                <a:latin typeface="Montserrat"/>
-              </a:rPr>
-              <a:t>H2: por ciclo, a bolsa pesa só no ciclo 2</a:t>
+              <a:t>H2 · plano B: por ciclo, só o ciclo 2</a:t>
             </a:r>
           </a:p>
         </p:txBody>
@@ -29970,7 +28688,7 @@
 </p:sld>
 </file>
 
-<file path=ppt/slides/slide62.xml><?xml version="1.0" encoding="utf-8"?>
+<file path=ppt/slides/slide60.xml><?xml version="1.0" encoding="utf-8"?>
 <p:sld xmlns:a="http://schemas.openxmlformats.org/drawingml/2006/main" xmlns:r="http://schemas.openxmlformats.org/officeDocument/2006/relationships" xmlns:p="http://schemas.openxmlformats.org/presentationml/2006/main">
   <p:cSld>
     <p:spTree>
@@ -30016,11 +28734,11 @@
             <a:r>
               <a:rPr lang="pt-BR" sz="2400" b="1" dirty="0">
                 <a:solidFill>
-                  <a:srgbClr val="FFFFFF"/>
+                  <a:srgbClr val="C4CCC6"/>
                 </a:solidFill>
                 <a:latin typeface="Montserrat"/>
               </a:rPr>
-              <a:t>H3: na nota de corte, a mesma direção</a:t>
+              <a:t>H3 · plano B: na nota de corte, mesma direção</a:t>
             </a:r>
           </a:p>
         </p:txBody>
@@ -30370,7 +29088,7 @@
 </p:sld>
 </file>
 
-<file path=ppt/slides/slide63.xml><?xml version="1.0" encoding="utf-8"?>
+<file path=ppt/slides/slide61.xml><?xml version="1.0" encoding="utf-8"?>
 <p:sld xmlns:a="http://schemas.openxmlformats.org/drawingml/2006/main" xmlns:r="http://schemas.openxmlformats.org/officeDocument/2006/relationships" xmlns:p="http://schemas.openxmlformats.org/presentationml/2006/main">
   <p:cSld>
     <p:spTree>
@@ -30420,7 +29138,7 @@
                 </a:solidFill>
                 <a:latin typeface="Montserrat"/>
               </a:rPr>
-              <a:t>Discussão: o sinal negativo da H1</a:t>
+              <a:t>H1 · Discussão: o sinal negativo</a:t>
             </a:r>
           </a:p>
         </p:txBody>
@@ -30648,7 +29366,7 @@
                 </a:solidFill>
                 <a:latin typeface="Montserrat"/>
               </a:rPr>
-              <a:t>O sinal negativo não é a bolsa afastando médicos: é a estimativa no corte, com poucos municípios e vagas diferentes.</a:t>
+              <a:t>O sinal negativo não é a bolsa afastando médicos: é a estimativa no corte, puxada por poucos municípios, capitais logo abaixo.</a:t>
             </a:r>
           </a:p>
         </p:txBody>
@@ -30706,7 +29424,7 @@
                 </a:solidFill>
                 <a:latin typeface="Montserrat"/>
               </a:rPr>
-              <a:t>síntese da Robustez; docs 57l e 57m; auditoria 33.</a:t>
+              <a:t>síntese da Robustez; doc 57m; auditorias 36 e 37.</a:t>
             </a:r>
           </a:p>
         </p:txBody>
@@ -30719,7 +29437,7 @@
 </p:sld>
 </file>
 
-<file path=ppt/slides/slide64.xml><?xml version="1.0" encoding="utf-8"?>
+<file path=ppt/slides/slide62.xml><?xml version="1.0" encoding="utf-8"?>
 <p:sld xmlns:a="http://schemas.openxmlformats.org/drawingml/2006/main" xmlns:r="http://schemas.openxmlformats.org/officeDocument/2006/relationships" xmlns:p="http://schemas.openxmlformats.org/presentationml/2006/main">
   <p:cSld>
     <p:spTree>
@@ -30769,7 +29487,7 @@
                 </a:solidFill>
                 <a:latin typeface="Montserrat"/>
               </a:rPr>
-              <a:t>Discussão: um incentivo limitado</a:t>
+              <a:t>Discussão: por que não sobe? Um incentivo limitado</a:t>
             </a:r>
           </a:p>
         </p:txBody>
@@ -30958,7 +29676,7 @@
         <p:spPr>
           <a:xfrm>
             <a:off x="292608" y="896112"/>
-            <a:ext cx="2651760" cy="1371600"/>
+            <a:ext cx="1737360" cy="1371600"/>
           </a:xfrm>
           <a:prstGeom prst="roundRect">
             <a:avLst>
@@ -30997,7 +29715,7 @@
                 </a:solidFill>
                 <a:latin typeface="Montserrat"/>
               </a:rPr>
-              <a:t>Limitado</a:t>
+              <a:t>H1</a:t>
             </a:r>
           </a:p>
         </p:txBody>
@@ -31010,8 +29728,8 @@
         </p:nvSpPr>
         <p:spPr>
           <a:xfrm>
-            <a:off x="3081528" y="896112"/>
-            <a:ext cx="8805672" cy="1371600"/>
+            <a:off x="2167128" y="896112"/>
+            <a:ext cx="9720072" cy="1371600"/>
           </a:xfrm>
           <a:prstGeom prst="roundRect">
             <a:avLst>
@@ -31052,7 +29770,7 @@
                 </a:solidFill>
                 <a:latin typeface="Montserrat"/>
               </a:rPr>
-              <a:t>a origem pesa mais que toda a bolsa</a:t>
+              <a:t>o preenchimento não sobe no corte</a:t>
             </a:r>
           </a:p>
         </p:txBody>
@@ -31066,7 +29784,7 @@
         <p:spPr>
           <a:xfrm>
             <a:off x="292608" y="2468880"/>
-            <a:ext cx="2651760" cy="1371600"/>
+            <a:ext cx="1737360" cy="1371600"/>
           </a:xfrm>
           <a:prstGeom prst="roundRect">
             <a:avLst>
@@ -31105,7 +29823,7 @@
                 </a:solidFill>
                 <a:latin typeface="Montserrat"/>
               </a:rPr>
-              <a:t>Escolha</a:t>
+              <a:t>Por quê</a:t>
             </a:r>
           </a:p>
         </p:txBody>
@@ -31118,8 +29836,8 @@
         </p:nvSpPr>
         <p:spPr>
           <a:xfrm>
-            <a:off x="3081528" y="2468880"/>
-            <a:ext cx="8805672" cy="1371600"/>
+            <a:off x="2167128" y="2468880"/>
+            <a:ext cx="9720072" cy="1371600"/>
           </a:xfrm>
           <a:prstGeom prst="roundRect">
             <a:avLst>
@@ -31160,7 +29878,7 @@
                 </a:solidFill>
                 <a:latin typeface="Montserrat"/>
               </a:rPr>
-              <a:t>reordena candidatos, não enche vagas</a:t>
+              <a:t>a origem pesa mais que toda a bolsa</a:t>
             </a:r>
           </a:p>
         </p:txBody>
@@ -31174,7 +29892,7 @@
         <p:spPr>
           <a:xfrm>
             <a:off x="292608" y="4041648"/>
-            <a:ext cx="2651760" cy="1371600"/>
+            <a:ext cx="1737360" cy="1371600"/>
           </a:xfrm>
           <a:prstGeom prst="roundRect">
             <a:avLst>
@@ -31213,7 +29931,7 @@
                 </a:solidFill>
                 <a:latin typeface="Montserrat"/>
               </a:rPr>
-              <a:t>Substituição</a:t>
+              <a:t>Oferta</a:t>
             </a:r>
           </a:p>
         </p:txBody>
@@ -31226,8 +29944,8 @@
         </p:nvSpPr>
         <p:spPr>
           <a:xfrm>
-            <a:off x="3081528" y="4041648"/>
-            <a:ext cx="8805672" cy="1371600"/>
+            <a:off x="2167128" y="4041648"/>
+            <a:ext cx="9720072" cy="1371600"/>
           </a:xfrm>
           <a:prstGeom prst="roundRect">
             <a:avLst>
@@ -31326,7 +30044,7 @@
                 </a:solidFill>
                 <a:latin typeface="Montserrat"/>
               </a:rPr>
-              <a:t>síntese dos slides anteriores; doc 57.</a:t>
+              <a:t>síntese dos slides anteriores; docs 57, 57d e 57i.</a:t>
             </a:r>
           </a:p>
         </p:txBody>

--- a/output/apresentacao_banca2/deck_banca2_curto.pptx
+++ b/output/apresentacao_banca2/deck_banca2_curto.pptx
@@ -9039,7 +9039,7 @@
           <a:p>
             <a:r>
               <a:rPr lang="pt-BR" dirty="0"/>
-              <a:t>Só células com pelo menos uma vaga imediata (no ciclo 2, pelo quadro de 13/02/2026, anterior à alocação). Cada ponto é a fração de células preenchidas numa faixa de 0,010 de IVS; cada linha, a reta local de um lado. Abaixo de 0,300, 56,1% dessas células são preenchidas. A distância crua entre as retas não é a estimativa: a HI-1 compara células do mesmo curso e ciclo, com uma reta por ciclo, e dá −3,7 p.p. [−21,3; +13,9] em 0,300 e −2,3 em 0,400. Saídas do adendo 48b, em auditoria. Por que a reta de baixo sobe (protocolo 62, doc 57m, auditoria 37; descritivo e pós-resultado): na faixa de R$ 10 mil, a fração de células preenchidas sobe +11,9 p.p. a cada 0,100 de IVS [+6,0; +17,7]; comparando só células da mesma UF, sobram +1,3 p.p. O Nordeste é a região que mais preenche nessa faixa (43% das células) e a de IVS mais alto. Diz com o que a subida anda junto, não por quê.</a:t>
+              <a:t>Só células com pelo menos uma vaga imediata (no ciclo 2, pelo quadro de 13/02/2026, anterior à alocação). Cada ponto é a fração de células preenchidas numa faixa de 0,010 de IVS; cada linha, a reta local de um lado. Abaixo de 0,300, 56,1% dessas células são preenchidas. A distância crua entre as retas não é a estimativa: a HI-1 compara células do mesmo curso e ciclo, com uma reta por ciclo, e dá −3,7 p.p. [−21,3; +13,9] em 0,300 e −2,3 em 0,400. Saídas do adendo 48b (auditoria 38). Por que a reta de baixo sobe (protocolo 62, doc 57m, auditoria 37; descritivo e pós-resultado): na faixa de R$ 10 mil, a fração de células preenchidas sobe +11,9 p.p. a cada 0,100 de IVS [+6,0; +17,7]; comparando só células da mesma UF, sobram +1,3 p.p. O Nordeste é a região que mais preenche nessa faixa (43% das células) e a de IVS mais alto. Diz com o que a subida anda junto, não por quê.</a:t>
             </a:r>
           </a:p>
         </p:txBody>
@@ -9157,7 +9157,7 @@
           <a:p>
             <a:r>
               <a:rPr lang="pt-BR" dirty="0"/>
-              <a:t>Regra sharp: o IVS 2010 oficial reproduz a faixa de todos os municípios dos ciclos 1 e 2. Sem manipulação: o IVS foi medido em 2010, antes do programa, e o teste de densidade não acusa acúmulo no ciclo 1 (p de Holm 0,707 em 0,300 e 0,658 em 0,400). Balanço: covariáveis pré e placebos de outcome e de corte passam; ressalvas: em 0,400, seleção suspeita no ciclo 1; em 0,300, a parte dos municípios que são capitais cai −17,8 p.p. [−34,1; −1,5] no corte (auditoria 36, diagnóstico). Pacote do corte: a única regra federal que muda em 0,300 e não em 0,400 é o acréscimo no teto de emendas e nas parcelas de custeio da APS e da MAC do município (auditoria 18); nenhum incentivo individual ao especialista além da bolsa muda em 0,300; em 0,400 mudam incentivos de médicos da APS (AgSUS e PMMB) (auditoria 35). Por isso o contraste é o pacote do corte, não a bolsa sozinha. Tipo de vaga: a SGTES/MS decide se a vaga é imediata ou de cadastro reserva, por critério que não está nos dados nem nos editais, e a decisão pode responder ao corte; comparar só vagas imediatas pode então comparar grupos selecionados de forma diferente. O teste da seleção (limites de Lee, "ter vaga imediata" como outcome, balanço dentro da amostra imediata) está pendente e precisa de adendo congelado antes de rodar (doc 05, §2.12). Na H3 (plano B), o teste conjunto do pré falha nas horas no município do posto; na H2, a independência de alternativas irrelevantes é violada em parte, e o peso da bolsa muda pouco.</a:t>
+              <a:t>Regra sharp: o IVS 2010 oficial reproduz a faixa de todos os municípios dos ciclos 1 e 2. Sem manipulação: o IVS foi medido em 2010, antes do programa, e o teste de densidade não acusa acúmulo no ciclo 1 (p de Holm 0,707 em 0,300 e 0,658 em 0,400). Balanço: covariáveis pré e placebos de outcome e de corte passam; ressalvas: em 0,400, seleção suspeita no ciclo 1; em 0,300, a parte dos municípios que são capitais cai −17,8 p.p. [−34,1; −1,5] no corte (auditoria 36, diagnóstico); o adendo 48d acha também, do lado de cima, menos Nordeste e mais especialistas no resto da região de saúde (slide 11). Pacote do corte: a única regra federal que muda em 0,300 e não em 0,400 é o acréscimo no teto de emendas e nas parcelas de custeio da APS e da MAC do município (auditoria 18); nenhum incentivo individual ao especialista além da bolsa muda em 0,300; em 0,400 mudam incentivos de médicos da APS (AgSUS e PMMB) (auditoria 35). Por isso o contraste é o pacote do corte, não a bolsa sozinha. Tipo de vaga: a SGTES/MS decide se a vaga é imediata ou de cadastro reserva, por critério que não está nos dados nem nos editais, e a decisão pode responder ao corte; comparar só vagas imediatas pode então comparar grupos selecionados de forma diferente (doc 05, §2.12). Testado no adendo 48f (doc 57t, auditoria 44). Os limites de Lee, que não supõem como o Ministério escolheu o tipo, contêm zero nos dois cortes: em 0,300, [−7,4; +9,6] p.p. na fração preenchida e [−0,05; +0,12] nos alocados por vaga imediata; em 0,400, [−13,0; +16,2] p.p. e [−0,15; +0,16]. A premissa é a monotonicidade dentro de cada ciclo: em cada ciclo, o corte empurra o tipo de vaga num só sentido. Em 0,300, o lado com mais vaga imediata troca entre ciclos, e por isso os limites aparam ciclo a ciclo. Na sensibilidade com a reta, os alocados por vaga imediata em 0,300 ficam inteiramente abaixo de zero, [−0,19; −0,01], mas o IC de Imbens–Manski contém zero [−0,39; +0,19]. Restringir a vagas imediatas piora o balanço em 0,300: 3 covariáveis saltam no corte entre os municípios com vaga imediata (capital, Nordeste, especialistas na região), contra 1 na amostra toda. Na H3 (plano B), o teste conjunto do pré falha nas horas no município do posto; na H2, a independência de alternativas irrelevantes é violada em parte, e o peso da bolsa muda pouco.</a:t>
             </a:r>
           </a:p>
         </p:txBody>
@@ -9216,7 +9216,7 @@
           <a:p>
             <a:r>
               <a:rPr lang="pt-BR" dirty="0"/>
-              <a:t>Especificação principal da H1 (adendo 48b, em auditoria; pós-resultado). HI-1, a chance de uma célula com vaga imediata ser preenchida na 1ª chamada: −3,7 p.p. [−21,3; +13,9] em 0,300 e −2,3 p.p. [−24,0; +19,4] em 0,400, p de Holm 1,000 nos dois. HI-2, médicos alocados nessas vagas por município, comparando municípios com as mesmas vagas imediatas: −1,13 [−2,15; −0,10] em 0,300, p de Holm 0,126 (média abaixo 2,77); −0,16 [−0,99; +0,68] em 0,400, p de Holm 1,000. O IC convencional exclui zero só em HI-2 em 0,300, mas o sinal não sobrevive à correção para quatro testes. IC que contém zero não é efeito zero. TOST (HI-s7), com IC de 90% e as margens do protocolo 60: HI-1 [−18,4; +11,1] em 0,300 e [−20,5; +15,9] em 0,400, contra ±10 p.p.: inconclusivo. HI-2 em 0,300: [−1,99; −0,26] contra ±0,69 médico por município (25% da média abaixo): não houve aumento igual ou maior que a margem, mas uma queda desse tamanho não fica descartada. HI-2 em 0,400, contra ±0,50: inconclusivo. No IC convencional, sob a aproximação local linear e para o pacote do corte. Não dá para dizer que nada mudou. Tudo se refere ao pacote do corte, não à bolsa isolada. Cautela: Em auditoria (adendo 48b); pacote do corte.</a:t>
+              <a:t>Especificação principal da H1 (adendo 48b; auditoria 38, aprovado com correções de texto, nenhum número mudou; pós-resultado). HI-1, a chance de uma célula com vaga imediata ser preenchida na 1ª chamada: −3,7 p.p. [−21,3; +13,9] em 0,300 e −2,3 p.p. [−24,0; +19,4] em 0,400, p de Holm 1,000 nos dois. HI-2, médicos alocados nessas vagas por município, comparando municípios com as mesmas vagas imediatas: −1,13 [−2,15; −0,10] em 0,300, p de Holm 0,126 (média abaixo 2,77); −0,16 [−0,99; +0,68] em 0,400, p de Holm 1,000. O IC convencional exclui zero só em HI-2 em 0,300, mas o sinal não sobrevive à correção para quatro testes: p = 0,032 sem correção e p de Holm = 0,126. O adendo previa só dois casos, as quatro com IC que contém zero ou alguma que rejeita zero depois do Holm; este fica entre os dois. Ler esse caso intermediário como "nem ausência de diferença, nem efeito confirmado" foi decisão de implementação, não leitura pré-registrada (auditoria 38, achado 3). IC que contém zero não é efeito zero. TOST (HI-s7), com IC de 90% e as margens do protocolo 60: HI-1 [−18,4; +11,1] em 0,300 e [−20,5; +15,9] em 0,400, contra ±10 p.p.: inconclusivo. HI-2 em 0,300: [−1,99; −0,26] contra ±0,69 médico por município (25% da média abaixo): não houve aumento igual ou maior que a margem, mas uma queda desse tamanho não fica descartada. HI-2 em 0,400, contra ±0,50: inconclusivo. No IC convencional, sob a aproximação local linear e para o pacote do corte. Não dá para dizer que nada mudou. Tudo se refere ao pacote do corte, não à bolsa isolada. Cautela: Pós-resultado (adendo 48b); pacote do corte.</a:t>
             </a:r>
           </a:p>
         </p:txBody>
@@ -9393,7 +9393,7 @@
           <a:p>
             <a:r>
               <a:rPr lang="pt-BR" dirty="0"/>
-              <a:t>Diagnóstico da auditoria 36, descritivo e pós-resultado, sem estatuto causal. Na janela de 0,050 há 13 capitais abaixo de 0,300 e 6 acima; a menos de 0,010 do corte, São Paulo, Goiânia, Natal e Brasília ficam abaixo e nenhuma capital acima. No corte, a parte dos municípios que são capitais cai −17,8 p.p. [−34,1; −1,5]. Com uma dummy de capital: A3 de −8,4 para −2,6 p.p. [−11,8; +6,6]; taxa por vaga de −16,0 para −10,9 p.p. [−22,6; +0,8]; N1 de −1,45 para −0,92 [−1,98; +0,14]. Só com células de vaga imediata (tipo de vaga de antes da alocação): A3 −3,7 p.p. e taxa −13,2 p.p., com IC que contém zero; nos alocados por município (HI-2, adendo 48b), −1,13, com IC que exclui zero, que não passa no Holm. O adendo 48c vai estimar capitais e UF de forma padronizada; quando sair, a fonte deste slide muda. Cautela: Auditoria 36, diagnóstico pós-resultado.</a:t>
+              <a:t>Especificação secundária da H1: comparar municípios parecidos dos dois lados do corte (adendos 48d e 48e). A figura mostra, em cada corte, a fração das células com vaga imediata preenchidas em quatro versões. RDD sem controle, na amostra com todas as variáveis: −4,1 p.p. [−23,6; +15,4] em 0,300 e +2,8 [−20,3; +25,8] em 0,400; difere da HI-1 do slide 8 (−3,7 e −2,3) porque saem as células sem as variáveis de médicos. Com localização (capital, macrorregião, porte) e médicos na região somados na regressão: +3,6 [−16,8; +23,9] e −1,5 [−23,9; +20,9]. Pareando pela regra literal (PM-1, o principal do 48e), por município × ciclo: +4,7 [−6,5; +16,0] com 92 pares em 0,300 e +5,5 [−9,7; +20,7] com 70 pares em 0,400, p de Holm 1,000. Pareando pela regra do 48d: −0,6 [−13,1; +11,8], 86 pares, só em 0,300; o ponto muda de sinal com a regra de pareamento, então vale ler o intervalo, não o ponto. Nos alocados por município (HI-2) em 0,300, a queda vai de −1,11 [−2,17; −0,05] sem controle a −0,25 [−1,37; +0,87] com localização e médicos; pareando, os alocados por vaga imediata ficam em +0,10 [−0,01; +0,22], p de Holm 0,636. Balanço no corte 0,300, na amostra da HI-2: do lado de bolsa maior, a parte de capitais muda −29,9 p.p., a do Nordeste −47,7 p.p., e há +10,54 especialistas por 10 mil hab. no resto da região de saúde; em 0,400, só os especialistas no resto da região diferem (+6,21). Ressalvas: (a) é robustez pós-resultado, feita depois de ver a H1; (b) o pareamento supõe randomização local condicional às variáveis, não a continuidade da RDD; (c) em 0,400 vale só para municípios que não são capitais, fora do Sul e do Centro-Oeste, porque essas categorias só aparecem abaixo do corte; (d) não separa a bolsa do pacote do corte; (e) a capital sozinha explica pouco: com a dummy de capital, a HI-2 em 0,300 vai de −1,13 a −0,83, e 73% do salto fica (auditoria 42). Capitais (auditoria 36): na janela de 0,050 há 13 capitais abaixo de 0,300 e 6 acima; a menos de 0,010 do corte, São Paulo, Goiânia, Natal e Brasília ficam abaixo e nenhuma capital acima; a parte dos municípios que são capitais cai −17,8 p.p. [−34,1; −1,5] no corte. Nada disso mostra que a localização explica a queda: é limite da RDD em 0,300. Cautela: Robustez pós-resultado; pacote do corte.</a:t>
             </a:r>
           </a:p>
         </p:txBody>
@@ -9452,7 +9452,7 @@
           <a:p>
             <a:r>
               <a:rPr lang="pt-BR" dirty="0"/>
-              <a:t>Uma frase por explicação; todas são diagnósticos pós-resultado e medem o pacote do corte. Reta: nas médias simples da janela, 33,3% das células são preenchidas abaixo de 0,300 e 33,5% acima; a RDD compara as duas retas no ponto do corte, e a de baixo carrega uma subida que só existe nos últimos municípios antes de 0,300, com capitais e Nordeste logo abaixo do corte. Vagas: do lado de cima há mais vagas de cadastro reserva e de cursos que preenchem pouco em qualquer lugar; só com vagas imediatas, a queda encolhe. Porte: em 0,400, municípios grandes logo abaixo abrem e preenchem muitas vagas; com o controle das vagas, o salto quase some. Incentivo: nos atos lidos, nenhum incentivo individual além da bolsa muda em 0,300 (auditoria 35); muda o teto de emendas do município (auditoria 18). Acaso: com os 3 cortes falsos do protocolo, o p por posto é 0,250, o menor possível; numa grade maior, fora do protocolo, 0,031; não fica descartado nem confirmado. Nada disso mostra que a bolsa reduz o preenchimento.</a:t>
+              <a:t>Uma frase por explicação; todas são diagnósticos pós-resultado e medem o pacote do corte. Reta: nas médias simples da janela, 33,3% das células são preenchidas abaixo de 0,300 e 33,5% acima; a RDD compara as duas retas no ponto do corte, e a de baixo carrega uma subida que só existe nos últimos municípios antes de 0,300, com capitais e Nordeste logo abaixo do corte. Pelo adendo 48d (doc 63), em 0,300 os lados diferem em localização (capital, Nordeste) e em especialistas no resto da região de saúde; com essas variáveis na regressão, a HI-2 deixa de excluir zero. É limite da RDD nesse corte, não prova de que a localização explica a queda. Vagas: do lado de cima há mais vagas de cadastro reserva e de cursos que preenchem pouco em qualquer lugar; só com vagas imediatas, a queda encolhe, e os limites de Lee da seleção pelo tipo de vaga contêm zero (adendo 48f). Porte: em 0,400, municípios grandes logo abaixo abrem e preenchem muitas vagas; com o controle das vagas, o salto quase some. Incentivo: nos atos lidos, nenhum incentivo individual além da bolsa muda em 0,300 (auditoria 35); muda o teto de emendas do município (auditoria 18). Acaso: com os 3 cortes falsos do protocolo, o p por posto é 0,250, o menor possível; numa grade maior, fora do protocolo, 0,031; não fica descartado nem confirmado. Nada disso mostra que a bolsa reduz o preenchimento.</a:t>
             </a:r>
           </a:p>
         </p:txBody>
@@ -9511,7 +9511,7 @@
           <a:p>
             <a:r>
               <a:rPr lang="pt-BR" dirty="0"/>
-              <a:t>Planos B, em cinza. H2 (P1h, pós-resultado): diferença, em log-chance, entre o peso de a vaga ficar na mesma UF de origem do médico e o peso de toda a bolsa, no modelo de escolha da 1ª opção, estimado em cada ciclo: 2,34 no ciclo 1, 1,31 no ciclo 2 e 2,37 no ciclo 3. Com os ciclos juntos, toda a bolsa pesa 0,42 e a mesma UF 2,40; diferença 1,98 [1,56; 2,40]. Origem é preferência revelada, não efeito causal; escolha não é expansão: o que uma vaga ganha, outra do mesmo curso perde. Reestimação em curso (52c): o ciclo 2 será refeito com o tipo de vaga do quadro de 13/02/2026; até lá, valem estes números. H3, nível do médico (P4): as horas cadastradas do próprio médico do PMM-E sobem +6,6 h/sem [+5,4; +7,8] depois da entrada (+8,7 no município do posto, −2,1 fora dele), e 51,0% [48,4; 53,7] já tinham vínculo no município do posto; na comparação na nota de corte, +7,91 h/sem [−0,63; +16,45]. Associação; não diz nada sobre os outros médicos do município e não é efeito da bolsa nem da participação no PMM-E. H3, nível do município (protocolo 60, parte B, em auditoria): depois da chegada do 1º médico do programa, vínculos e horas dos especialistas sobem, mas o pré já vinha subindo e a conclusão não aguenta Rambachan–Roth; não dá para afirmar aumento da oferta local; as horas dos outros especialistas não caem. Horas cadastradas não são presença.</a:t>
+              <a:t>Planos B, em cinza. H2 (P1h, pós-resultado): diferença, em log-chance, entre o peso de a vaga ficar na mesma UF de origem do médico e o peso de toda a bolsa, no modelo de escolha da 1ª opção, estimado em cada ciclo: 2,34 no ciclo 1, 1,31 no ciclo 2 e 2,37 no ciclo 3. Com os ciclos juntos, toda a bolsa pesa 0,42 e a mesma UF 2,40; diferença 1,98 [1,56; 2,40]. Origem é preferência revelada, não efeito causal; escolha não é expansão: o que uma vaga ganha, outra do mesmo curso perde. Reestimação em curso (52c): o ciclo 2 será refeito com o tipo de vaga do quadro de 13/02/2026; até lá, valem estes números. H3, nível do médico (P4): as horas cadastradas do próprio médico do PMM-E sobem +6,6 h/sem [+5,4; +7,8] depois da entrada (+8,7 no município do posto, −2,1 fora dele), e 51,0% [48,4; 53,7] já tinham vínculo no município do posto; na comparação na nota de corte, +7,91 h/sem [−0,63; +16,45]. Associação; não diz nada sobre os outros médicos do município e não é efeito da bolsa nem da participação no PMM-E. H3, nível do município, comparando os lados do corte (protocolo 64; doc 57q; auditoria 39): a mudança nos vínculos de especialistas entre o pré e o pós é −0,23 [−1,51; +1,05] por 10 mil hab. em 0,300 e −0,46 [−1,86; +0,94] em 0,400; nas horas SUS também não há diferença; p de Holm 1,000 nas quatro primárias. Os outros especialistas, sem os do programa, não saem: −4,75 [−19,26; +9,76] horas SUS por 10 mil hab. em 0,300 e +0,37 [−12,46; +13,20] em 0,400. O placebo de generalistas não se mexe e o pré é plano. A razão fuzzy (efeito de receber médico) não entra: o corte quase não muda quem recebe médico do programa (F robusto 0,2 e 0,0), o instrumento é fraco e a estimativa fica vazia de propósito. É o pacote do corte; não detectar diferença não é efeito zero. Pela chegada do médico (protocolo 60, parte B; doc 57k; auditoria 34), vínculos e horas sobem, mas o pré já vinha subindo e a conclusão não aguenta Rambachan–Roth. Horas cadastradas não são presença.</a:t>
             </a:r>
           </a:p>
         </p:txBody>
@@ -9570,7 +9570,7 @@
           <a:p>
             <a:r>
               <a:rPr lang="pt-BR" dirty="0"/>
-              <a:t>A história parte da H1. No modelo da banca 1, o médico aceita a vaga se a bolsa compensa o custo do lugar. O preenchimento não sobe no corte; o sinal negativo é a estimativa no corte, puxada por poucos municípios. Incentivo limitado: a política mexe numa variável, e o custo do lugar (longe da origem, da família e da rede) continua contra; a bolsa reordena os candidatos entre as vagas abertas (H2, plano B). Pacote do corte: em 0,300 e 0,400 mudam também outras regras federais, então o contraste não isola a bolsa. Vínculo não é presença: na oferta (H3, plano B), o médico soma horas cadastradas, mas metade já trabalhava no município do posto, e no município não dá para afirmar aumento. Associação não é efeito; inconclusivo não é efeito zero. Próximos passos: a auditoria 38 do adendo 48b, o adendo 48c (capitais e UF), o teste da seleção pelo tipo de vaga, o ciclo 3 com a competência 202703 madura e o universo de inscritos.</a:t>
+              <a:t>A história parte da H1. No modelo da banca 1, o médico aceita a vaga se a bolsa compensa o custo do lugar. O preenchimento não sobe no corte; o sinal negativo é a estimativa no corte, puxada por poucos municípios. Incentivo limitado: a política mexe numa variável, e o custo do lugar (longe da origem, da família e da rede) continua contra; a bolsa reordena os candidatos entre as vagas abertas (H2, plano B). Pacote do corte: em 0,300 e 0,400 mudam também outras regras federais, então o contraste não isola a bolsa. Vínculo não é presença: na oferta (H3, plano B), o médico soma horas cadastradas, mas metade já trabalhava no município do posto, e no município não dá para afirmar aumento. Associação não é efeito; inconclusivo não é efeito zero. Próximos passos: as decisões do autor que seguem abertas (doc 05, §4.1), o ciclo 3 com a competência 202703 madura e o universo de inscritos.</a:t>
             </a:r>
           </a:p>
         </p:txBody>
@@ -19125,7 +19125,7 @@
                 </a:solidFill>
                 <a:latin typeface="Montserrat"/>
               </a:rPr>
-              <a:t>output/rdd_bolsa/HI_figuras/HI_scatter_imediatas.png, HI_resumo.json e HI_estimativas.csv (adendo 48b; doc 57n; em auditoria); doc 57m (auditoria 37); figura usada sem redesenho.</a:t>
+              <a:t>output/rdd_bolsa/HI_figuras/HI_scatter_imediatas.png, HI_resumo.json e HI_estimativas.csv (adendo 48b; doc 57n; auditoria 38); doc 57m (auditoria 37); figura usada sem redesenho.</a:t>
             </a:r>
           </a:p>
         </p:txBody>
@@ -19952,8 +19952,8 @@
             <a:tbl>
               <a:tblPr firstRow="1" bandRow="1"/>
               <a:tblGrid>
-                <a:gridCol w="6886429"/>
-                <a:gridCol w="4708163"/>
+                <a:gridCol w="6534538"/>
+                <a:gridCol w="5060054"/>
               </a:tblGrid>
               <a:tr h="854964">
                 <a:tc>
@@ -20530,7 +20530,7 @@
                           </a:solidFill>
                           <a:latin typeface="Montserrat"/>
                         </a:rPr>
-                        <a:t>Tipo de vaga (MS) exógeno</a:t>
+                        <a:t>Tipo de vaga</a:t>
                       </a:r>
                     </a:p>
                   </a:txBody>
@@ -20584,7 +20584,7 @@
                           </a:solidFill>
                           <a:latin typeface="Montserrat"/>
                         </a:rPr>
-                        <a:t>não testado</a:t>
+                        <a:t>testado: Lee contém zero</a:t>
                       </a:r>
                     </a:p>
                   </a:txBody>
@@ -20672,7 +20672,7 @@
                 </a:solidFill>
                 <a:latin typeface="Montserrat"/>
               </a:rPr>
-              <a:t>auditorias 16, 18, 35 e 36; docs 37, 41, 49 e 05 (§2.12) da banca 2; output/rdd_bolsa/E1_densidade_estimativas.csv; output/auditoria_H1/a36_estimativas.csv.</a:t>
+              <a:t>auditorias 16, 18, 35, 36 e 44; docs 37, 41, 49 e 05 (§2.12) da banca 2; output/rdd_bolsa/E1_densidade_estimativas.csv; output/auditoria_H1/a36_estimativas.csv; output/rdd_bolsa/SV_estimativas.csv e SV_resumo.json (adendo 48f; doc 57t).</a:t>
             </a:r>
           </a:p>
         </p:txBody>
@@ -20939,7 +20939,7 @@
                 </a:solidFill>
                 <a:latin typeface="Montserrat"/>
               </a:rPr>
-              <a:t>Em auditoria (adendo 48b); pacote do corte.</a:t>
+              <a:t>Pós-resultado (adendo 48b); pacote do corte.</a:t>
             </a:r>
           </a:p>
         </p:txBody>
@@ -21116,7 +21116,7 @@
                 </a:solidFill>
                 <a:latin typeface="Montserrat"/>
               </a:rPr>
-              <a:t>output/rdd_bolsa/HI_estimativas.csv, HI_resumo.json e HI_figuras/HI_principal.png (adendo 48b; doc 57n; em auditoria); figura usada sem redesenho.</a:t>
+              <a:t>output/rdd_bolsa/HI_estimativas.csv, HI_resumo.json e HI_figuras/HI_principal.png (adendo 48b; doc 57n; auditoria 38); figura usada sem redesenho.</a:t>
             </a:r>
           </a:p>
         </p:txBody>
@@ -21504,7 +21504,7 @@
                 </a:solidFill>
                 <a:latin typeface="Montserrat"/>
               </a:rPr>
-              <a:t>output/rdd_bolsa/N_estimativas.csv (decomposição e S-c; doc 49, §3 a §5); ND_estimativas.csv (doc 49b, §3); HI_estimativas.csv (adendo 48b; doc 57n; em auditoria).</a:t>
+              <a:t>output/rdd_bolsa/N_estimativas.csv (decomposição e S-c; doc 49, §3 a §5); ND_estimativas.csv (doc 49b, §3); HI_estimativas.csv (adendo 48b; doc 57n; auditoria 38).</a:t>
             </a:r>
           </a:p>
         </p:txBody>
@@ -21941,7 +21941,7 @@
                 </a:solidFill>
                 <a:latin typeface="Montserrat"/>
               </a:rPr>
-              <a:t>H1 · Controlando a capital, a queda encolhe</a:t>
+              <a:t>H1 · Comparando municípios parecidos</a:t>
             </a:r>
           </a:p>
         </p:txBody>
@@ -22068,60 +22068,27 @@
           </a:p>
         </p:txBody>
       </p:sp>
-      <p:pic>
-        <p:nvPicPr>
-          <p:cNvPr id="101" name="Figura" descr="Queda em 0,300 nas três medidas: como estimada, com dummy de capital e só com células de vaga imediata, com IC 95% (auditoria 36)"/>
-          <p:cNvPicPr>
-            <a:picLocks noChangeAspect="1"/>
-          </p:cNvPicPr>
-          <p:nvPr/>
-        </p:nvPicPr>
-        <p:blipFill>
-          <a:blip r:embed="rId3"/>
-          <a:stretch>
-            <a:fillRect/>
-          </a:stretch>
-        </p:blipFill>
-        <p:spPr>
-          <a:xfrm>
-            <a:off x="292608" y="1103356"/>
-            <a:ext cx="8211312" cy="4005518"/>
-          </a:xfrm>
-          <a:prstGeom prst="rect">
-            <a:avLst/>
-          </a:prstGeom>
-          <a:ln w="6350">
-            <a:solidFill>
-              <a:srgbClr val="DDE7DF"/>
-            </a:solidFill>
-          </a:ln>
-        </p:spPr>
-      </p:pic>
       <p:sp>
         <p:nvSpPr>
-          <p:cNvPr id="102" name="Cautela"/>
+          <p:cNvPr id="101" name="Linha"/>
           <p:cNvSpPr/>
           <p:nvPr/>
         </p:nvSpPr>
         <p:spPr>
           <a:xfrm>
-            <a:off x="292608" y="5273466"/>
-            <a:ext cx="8211312" cy="517754"/>
+            <a:off x="292608" y="4736592"/>
+            <a:ext cx="11594592" cy="420624"/>
           </a:xfrm>
-          <a:prstGeom prst="roundRect">
-            <a:avLst>
-              <a:gd name="adj" fmla="val 8000"/>
-            </a:avLst>
+          <a:prstGeom prst="rect">
+            <a:avLst/>
           </a:prstGeom>
-          <a:solidFill>
-            <a:srgbClr val="E7F1EA"/>
-          </a:solidFill>
+          <a:noFill/>
           <a:ln>
             <a:noFill/>
           </a:ln>
         </p:spPr>
         <p:txBody>
-          <a:bodyPr wrap="square" lIns="182880" tIns="54864" rIns="182880" bIns="54864" rtlCol="0" anchor="ctr">
+          <a:bodyPr wrap="square" lIns="164592" tIns="18288" rIns="164592" bIns="18288" rtlCol="0" anchor="ctr">
             <a:noAutofit/>
           </a:bodyPr>
           <a:lstStyle/>
@@ -22139,44 +22106,38 @@
               <a:buNone/>
             </a:pPr>
             <a:r>
-              <a:rPr lang="pt-BR" sz="1600" b="1" dirty="0">
+              <a:rPr lang="pt-BR" sz="1800" b="0" dirty="0">
                 <a:solidFill>
-                  <a:srgbClr val="114719"/>
+                  <a:srgbClr val="3A3A3A"/>
                 </a:solidFill>
                 <a:latin typeface="Montserrat"/>
               </a:rPr>
-              <a:t>Auditoria 36, diagnóstico pós-resultado.</a:t>
+              <a:t>Perto de 0,300, os lados diferem em capital, Nordeste e especialistas na região.</a:t>
             </a:r>
           </a:p>
         </p:txBody>
       </p:sp>
       <p:sp>
         <p:nvSpPr>
-          <p:cNvPr id="103" name="Linha"/>
+          <p:cNvPr id="102" name="Linha"/>
           <p:cNvSpPr/>
           <p:nvPr/>
         </p:nvSpPr>
         <p:spPr>
           <a:xfrm>
-            <a:off x="8778240" y="1103356"/>
-            <a:ext cx="3108960" cy="2681650"/>
+            <a:off x="292608" y="5212080"/>
+            <a:ext cx="11594592" cy="420624"/>
           </a:xfrm>
-          <a:prstGeom prst="roundRect">
-            <a:avLst>
-              <a:gd name="adj" fmla="val 6000"/>
-            </a:avLst>
+          <a:prstGeom prst="rect">
+            <a:avLst/>
           </a:prstGeom>
-          <a:solidFill>
-            <a:srgbClr val="F4F8F5"/>
-          </a:solidFill>
-          <a:ln w="12700">
-            <a:solidFill>
-              <a:srgbClr val="056429"/>
-            </a:solidFill>
+          <a:noFill/>
+          <a:ln>
+            <a:noFill/>
           </a:ln>
         </p:spPr>
         <p:txBody>
-          <a:bodyPr wrap="square" lIns="182880" tIns="54864" rIns="182880" bIns="54864" rtlCol="0" anchor="ctr">
+          <a:bodyPr wrap="square" lIns="164592" tIns="18288" rIns="164592" bIns="18288" rtlCol="0" anchor="ctr">
             <a:noAutofit/>
           </a:bodyPr>
           <a:lstStyle/>
@@ -22194,44 +22155,42 @@
               <a:buNone/>
             </a:pPr>
             <a:r>
-              <a:rPr lang="pt-BR" sz="1600" b="0" dirty="0">
+              <a:rPr lang="pt-BR" sz="1800" b="0" dirty="0">
                 <a:solidFill>
                   <a:srgbClr val="3A3A3A"/>
                 </a:solidFill>
                 <a:latin typeface="Montserrat"/>
               </a:rPr>
-              <a:t>Controlando a capital, a queda encolhe e o IC contém zero; só com vagas imediatas, encolhe.</a:t>
+              <a:t>Comparando municípios parecidos, a diferença não aparece.</a:t>
             </a:r>
           </a:p>
         </p:txBody>
       </p:sp>
       <p:sp>
         <p:nvSpPr>
-          <p:cNvPr id="104" name="Linha"/>
+          <p:cNvPr id="103" name="Cautela"/>
           <p:cNvSpPr/>
           <p:nvPr/>
         </p:nvSpPr>
         <p:spPr>
           <a:xfrm>
-            <a:off x="8778240" y="3949598"/>
-            <a:ext cx="3108960" cy="1841621"/>
+            <a:off x="292608" y="5687568"/>
+            <a:ext cx="11594592" cy="420624"/>
           </a:xfrm>
           <a:prstGeom prst="roundRect">
             <a:avLst>
-              <a:gd name="adj" fmla="val 6000"/>
+              <a:gd name="adj" fmla="val 12000"/>
             </a:avLst>
           </a:prstGeom>
           <a:solidFill>
-            <a:srgbClr val="F4F8F5"/>
+            <a:srgbClr val="E7F1EA"/>
           </a:solidFill>
-          <a:ln w="12700">
-            <a:solidFill>
-              <a:srgbClr val="056429"/>
-            </a:solidFill>
+          <a:ln>
+            <a:noFill/>
           </a:ln>
         </p:spPr>
         <p:txBody>
-          <a:bodyPr wrap="square" lIns="182880" tIns="54864" rIns="182880" bIns="54864" rtlCol="0" anchor="ctr">
+          <a:bodyPr wrap="square" lIns="164592" tIns="18288" rIns="164592" bIns="18288" rtlCol="0" anchor="ctr">
             <a:noAutofit/>
           </a:bodyPr>
           <a:lstStyle/>
@@ -22249,17 +22208,46 @@
               <a:buNone/>
             </a:pPr>
             <a:r>
-              <a:rPr lang="pt-BR" sz="1600" b="0" dirty="0">
+              <a:rPr lang="pt-BR" sz="1800" b="1" dirty="0">
                 <a:solidFill>
-                  <a:srgbClr val="3A3A3A"/>
+                  <a:srgbClr val="114719"/>
                 </a:solidFill>
                 <a:latin typeface="Montserrat"/>
               </a:rPr>
-              <a:t>13 capitais abaixo de 0,300 e 6 acima.</a:t>
+              <a:t>Robustez pós-resultado; pacote do corte.</a:t>
             </a:r>
           </a:p>
         </p:txBody>
       </p:sp>
+      <p:pic>
+        <p:nvPicPr>
+          <p:cNvPr id="104" name="Figura" descr="H1 comparando municípios parecidos, por corte: fração das células com vaga imediata preenchidas sem controle, com localização e médicos na região na regressão e pareada (regra literal e regra do 48d), com IC 95%"/>
+          <p:cNvPicPr>
+            <a:picLocks noChangeAspect="1"/>
+          </p:cNvPicPr>
+          <p:nvPr/>
+        </p:nvPicPr>
+        <p:blipFill>
+          <a:blip r:embed="rId3"/>
+          <a:stretch>
+            <a:fillRect/>
+          </a:stretch>
+        </p:blipFill>
+        <p:spPr>
+          <a:xfrm>
+            <a:off x="674624" y="804672"/>
+            <a:ext cx="10830560" cy="3803904"/>
+          </a:xfrm>
+          <a:prstGeom prst="rect">
+            <a:avLst/>
+          </a:prstGeom>
+          <a:ln w="6350">
+            <a:solidFill>
+              <a:srgbClr val="DDE7DF"/>
+            </a:solidFill>
+          </a:ln>
+        </p:spPr>
+      </p:pic>
       <p:sp>
         <p:nvSpPr>
           <p:cNvPr id="105" name="Fontes"/>
@@ -22313,7 +22301,7 @@
                 </a:solidFill>
                 <a:latin typeface="Montserrat"/>
               </a:rPr>
-              <a:t>output/auditoria_H1/a36_estimativas.csv e a36_resumo.json (auditoria 36); o adendo 48c fará a versão padronizada.</a:t>
+              <a:t>output/rdd_bolsa/CL_estimativas.csv e CL_balanco.csv (adendo 48d; doc 57r; auditoria 40); PM_estimativas.csv (adendo 48e; doc 57s; auditoria 43); HC_estimativas.csv (adendo 48c; auditoria 42); output/auditoria_H1/a36_estimativas.csv (auditoria 36).</a:t>
             </a:r>
           </a:p>
         </p:txBody>
@@ -22512,7 +22500,7 @@
         <p:spPr>
           <a:xfrm>
             <a:off x="292608" y="896112"/>
-            <a:ext cx="2103120" cy="1147572"/>
+            <a:ext cx="1828800" cy="1147572"/>
           </a:xfrm>
           <a:prstGeom prst="roundRect">
             <a:avLst>
@@ -22545,7 +22533,7 @@
               <a:buNone/>
             </a:pPr>
             <a:r>
-              <a:rPr lang="pt-BR" sz="2400" b="1" dirty="0">
+              <a:rPr lang="pt-BR" sz="2000" b="1" dirty="0">
                 <a:solidFill>
                   <a:srgbClr val="FFFFFF"/>
                 </a:solidFill>
@@ -22564,8 +22552,8 @@
         </p:nvSpPr>
         <p:spPr>
           <a:xfrm>
-            <a:off x="2532888" y="896112"/>
-            <a:ext cx="9354312" cy="1147572"/>
+            <a:off x="2258568" y="896112"/>
+            <a:ext cx="9628632" cy="1147572"/>
           </a:xfrm>
           <a:prstGeom prst="roundRect">
             <a:avLst>
@@ -22600,13 +22588,13 @@
               <a:buNone/>
             </a:pPr>
             <a:r>
-              <a:rPr lang="pt-BR" sz="2400" b="0" dirty="0">
+              <a:rPr lang="pt-BR" sz="2000" b="0" dirty="0">
                 <a:solidFill>
                   <a:srgbClr val="3A3A3A"/>
                 </a:solidFill>
                 <a:latin typeface="Montserrat"/>
               </a:rPr>
-              <a:t>puxada por capitais e Nordeste logo abaixo de 0,300</a:t>
+              <a:t>em 0,300, lados diferem em localização e médicos na região</a:t>
             </a:r>
           </a:p>
         </p:txBody>
@@ -22620,7 +22608,7 @@
         <p:spPr>
           <a:xfrm>
             <a:off x="292608" y="2244852"/>
-            <a:ext cx="2103120" cy="1147572"/>
+            <a:ext cx="1828800" cy="1147572"/>
           </a:xfrm>
           <a:prstGeom prst="roundRect">
             <a:avLst>
@@ -22653,7 +22641,7 @@
               <a:buNone/>
             </a:pPr>
             <a:r>
-              <a:rPr lang="pt-BR" sz="2400" b="1" dirty="0">
+              <a:rPr lang="pt-BR" sz="2000" b="1" dirty="0">
                 <a:solidFill>
                   <a:srgbClr val="FFFFFF"/>
                 </a:solidFill>
@@ -22672,8 +22660,8 @@
         </p:nvSpPr>
         <p:spPr>
           <a:xfrm>
-            <a:off x="2532888" y="2244852"/>
-            <a:ext cx="9354312" cy="1147572"/>
+            <a:off x="2258568" y="2244852"/>
+            <a:ext cx="9628632" cy="1147572"/>
           </a:xfrm>
           <a:prstGeom prst="roundRect">
             <a:avLst>
@@ -22708,7 +22696,7 @@
               <a:buNone/>
             </a:pPr>
             <a:r>
-              <a:rPr lang="pt-BR" sz="2400" b="0" dirty="0">
+              <a:rPr lang="pt-BR" sz="2000" b="0" dirty="0">
                 <a:solidFill>
                   <a:srgbClr val="3A3A3A"/>
                 </a:solidFill>
@@ -22728,7 +22716,7 @@
         <p:spPr>
           <a:xfrm>
             <a:off x="292608" y="3593592"/>
-            <a:ext cx="2103120" cy="1147572"/>
+            <a:ext cx="1828800" cy="1147572"/>
           </a:xfrm>
           <a:prstGeom prst="roundRect">
             <a:avLst>
@@ -22761,7 +22749,7 @@
               <a:buNone/>
             </a:pPr>
             <a:r>
-              <a:rPr lang="pt-BR" sz="2400" b="1" dirty="0">
+              <a:rPr lang="pt-BR" sz="2000" b="1" dirty="0">
                 <a:solidFill>
                   <a:srgbClr val="FFFFFF"/>
                 </a:solidFill>
@@ -22780,8 +22768,8 @@
         </p:nvSpPr>
         <p:spPr>
           <a:xfrm>
-            <a:off x="2532888" y="3593592"/>
-            <a:ext cx="9354312" cy="1147572"/>
+            <a:off x="2258568" y="3593592"/>
+            <a:ext cx="9628632" cy="1147572"/>
           </a:xfrm>
           <a:prstGeom prst="roundRect">
             <a:avLst>
@@ -22816,7 +22804,7 @@
               <a:buNone/>
             </a:pPr>
             <a:r>
-              <a:rPr lang="pt-BR" sz="2400" b="0" dirty="0">
+              <a:rPr lang="pt-BR" sz="2000" b="0" dirty="0">
                 <a:solidFill>
                   <a:srgbClr val="3A3A3A"/>
                 </a:solidFill>
@@ -22836,7 +22824,7 @@
         <p:spPr>
           <a:xfrm>
             <a:off x="292608" y="4942332"/>
-            <a:ext cx="2103120" cy="1147572"/>
+            <a:ext cx="1828800" cy="1147572"/>
           </a:xfrm>
           <a:prstGeom prst="roundRect">
             <a:avLst>
@@ -22869,7 +22857,7 @@
               <a:buNone/>
             </a:pPr>
             <a:r>
-              <a:rPr lang="pt-BR" sz="2400" b="1" dirty="0">
+              <a:rPr lang="pt-BR" sz="2000" b="1" dirty="0">
                 <a:solidFill>
                   <a:srgbClr val="FFFFFF"/>
                 </a:solidFill>
@@ -22888,8 +22876,8 @@
         </p:nvSpPr>
         <p:spPr>
           <a:xfrm>
-            <a:off x="2532888" y="4942332"/>
-            <a:ext cx="9354312" cy="1147572"/>
+            <a:off x="2258568" y="4942332"/>
+            <a:ext cx="9628632" cy="1147572"/>
           </a:xfrm>
           <a:prstGeom prst="roundRect">
             <a:avLst>
@@ -22924,7 +22912,7 @@
               <a:buNone/>
             </a:pPr>
             <a:r>
-              <a:rPr lang="pt-BR" sz="2400" b="0" dirty="0">
+              <a:rPr lang="pt-BR" sz="2000" b="0" dirty="0">
                 <a:solidFill>
                   <a:srgbClr val="3A3A3A"/>
                 </a:solidFill>
@@ -22988,7 +22976,7 @@
                 </a:solidFill>
                 <a:latin typeface="Montserrat"/>
               </a:rPr>
-              <a:t>síntese da Robustez; doc 49b; doc 57l (auditoria 33); doc 57m (auditoria 37); auditorias 18, 35 e 36.</a:t>
+              <a:t>síntese da Robustez; doc 49b; doc 57l (auditoria 33); doc 57m (auditoria 37); doc 57r (auditoria 40); doc 57t (auditoria 44); doc 63; auditorias 18, 35 e 36.</a:t>
             </a:r>
           </a:p>
         </p:txBody>
@@ -23497,7 +23485,7 @@
                 </a:solidFill>
                 <a:latin typeface="Montserrat"/>
               </a:rPr>
-              <a:t>aumento não afirmável; outros especialistas não saem</a:t>
+              <a:t>corte: oferta igual, Holm 1,000; outros ficam</a:t>
             </a:r>
           </a:p>
         </p:txBody>
@@ -23555,7 +23543,7 @@
                 </a:solidFill>
                 <a:latin typeface="Montserrat"/>
               </a:rPr>
-              <a:t>output/rdd_bolsa/P1h_magnitudes.csv (doc 57i; auditoria 31); S57_resumo.json (doc 57d); CA_estimativas.csv (doc 57h); OL_resumo.json (doc 57k; em auditoria).</a:t>
+              <a:t>output/rdd_bolsa/P1h_magnitudes.csv (doc 57i; auditoria 31); S57_resumo.json (doc 57d); CA_estimativas.csv (doc 57h); OL_resumo.json (doc 57k; auditoria 34); OC_estimativas.csv (protocolo 64; doc 57q; auditoria 39).</a:t>
             </a:r>
           </a:p>
         </p:txBody>

--- a/output/apresentacao_banca2/deck_banca2_curto.pptx
+++ b/output/apresentacao_banca2/deck_banca2_curto.pptx
@@ -22,7 +22,6 @@
     <p:sldId id="412" r:id="rId59"/>
     <p:sldId id="413" r:id="rId60"/>
     <p:sldId id="414" r:id="rId61"/>
-    <p:sldId id="415" r:id="rId62"/>
   </p:sldIdLst>
   <p:sldSz cx="12192000" cy="6858000"/>
   <p:notesSz cx="6858000" cy="9144000"/>
@@ -8803,7 +8802,7 @@
           <a:p>
             <a:r>
               <a:rPr lang="pt-BR" dirty="0"/>
-              <a:t>O efeito candidato é o incentivo marginal de R$ 5 mil anunciado nos cortes do IVS, como pacote do corte: em 0,300 e 0,400 mudam também outras regras federais. Não é a participação no PMM-E nem o efeito do Agora Tem Especialistas. Numeração desta apresentação a partir de 26/10/2026: H1 preenchimento; H2 bolsa × origem (antes H3); H3 oferta (antes H4). A H1 é a hipótese central (decisão do autor de 26/10/2026): onde a bolsa é maior, mais vagas são preenchidas. H2 e H3 ficam em cinza, como plano B, até a validação dos professores. A H2 é o "incentivo limitado" do modelo da banca 1: toda a bolsa pesa menos que trabalhar na UF de origem do médico; foi formulada depois de ver os coeficientes do modelo de escolha, e por isso é pós-resultado. A H3 pergunta se a chegada do médico soma oferta ou só remaneja. Cautela: H2 é pós-resultado.</a:t>
+              <a:t>Hipótese única desta versão (decisão do autor de 27/10/2026; doc 07 da banca 2): a antiga H2, bolsa × origem. O médico especialista escolhe vagas perto de onde já trabalha; a bolsa maior muda qual vaga ele escolhe dentro da sua região, mas pesa menos que a própria origem. Foi formulada depois de ver os resultados do preenchimento no corte e os coeficientes do modelo de escolha: é pós-resultado, e isso é dito aqui. Motivação: onde a bolsa é R$ 5 mil maior, não detectamos aumento do preenchimento, e o desenho só pegaria saltos grandes (apêndice). Ligar a hipótese a esse fato é interpretação, não teste (auditoria 50). O que se testa: se, na escolha da 1ª opção, a vaga ficar na UF de origem pesa mais que toda a diferença de bolsa. O contraste da bolsa é o pacote do corte (a bolsa e as outras regras federais que mudam nos mesmos cortes de IVS, auditoria 18), não a participação no PMM-E nem o Agora Tem Especialistas. Tudo é condicional a se candidatar. Cautela: Formulada após ver os dados.</a:t>
             </a:r>
           </a:p>
         </p:txBody>
@@ -8862,7 +8861,7 @@
           <a:p>
             <a:r>
               <a:rPr lang="pt-BR" dirty="0"/>
-              <a:t>Principais. Bolsa: a faixa anunciada nos quadros dos editais do PMM-E (SGTES/MS), por município, ciclos 1–3. IVS 2010 oficial: Plataforma IVS do Ipea, Censo 2010, por município; é a variável de corte. Preenchimento e tipo de vaga: quadros de vagas e resultados da 1ª e da 2ª chamada, por célula (estabelecimento × curso), 2025–2026; o tipo (vaga imediata ou cadastro reserva) vem do quadro, e no ciclo 2 do quadro de 13/02/2026, anterior à alocação (auditoria 36). 1ª opção e origem: listas de classificação dos editais, ligadas ao cadastro de profissionais do CNES pelo portão G1; a origem é onde o médico tinha vínculo no CNES antes das inscrições, não residência. Horas: CNES mensal do DATASUS, por médico e mês, de 2022-01 a 2026-08. Secundárias, em cinza: capital pelo código IBGE (auditoria 36); porte pela população do Censo 2022; regras no mesmo corte nas portarias do MS (auditoria 18) e incentivos ligados à vulnerabilidade (auditoria 35). Servem para o diagnóstico da queda e para a leitura do pacote do corte; não entram na especificação principal. Dados pessoais só em memória ou em cache fora do Git.</a:t>
+              <a:t>1ª opção: listas de classificação dos editais do PMM-E (SGTES/MS), ciclos 1–3, uma linha por candidato e opção. Origem: o município do estabelecimento onde o candidato tinha vínculo médico no CNES antes das inscrições, ligado pelo portão G1 (CPF e nome); não é a residência. Vagas e bolsa: quadros de vagas da 1ª chamada, por célula (estabelecimento × curso), com o tipo de vaga e a faixa da bolsa anunciada; no ciclo 2, o tipo de vaga vem do quadro de 13/02/2026, vigente na inscrição (adendo 52c, auditoria 41). IVS 2010 oficial: Plataforma IVS do Ipea, Censo 2010, por município; é a variável dos cortes. Distância entre os centroides dos municípios (malha do IBGE); UF e região de saúde (tabela oficial do TabNet). Secundárias, em cinza: porte (população do Censo 2022) e capital (código IBGE), controles do modelo. Dados pessoais só em memória ou em cache fora do Git.</a:t>
             </a:r>
           </a:p>
         </p:txBody>
@@ -8921,7 +8920,7 @@
           <a:p>
             <a:r>
               <a:rPr lang="pt-BR" dirty="0"/>
-              <a:t>Cada ciclo é um chamamento do PMM-E com quadro de vagas próprio: o ciclo 1 com quadro de 24/07/2025, o ciclo 2 com quadro de 03/02/2026 e o ciclo 3 com quadro de 16/07/2026 (ciclo 3 congelado). Municípios: os que tinham vaga no quadro. Célula = estabelecimento × curso no quadro da 1ª chamada. Nesta tabela, no ciclo 1, "preenchida" é alguma confirmação ou homologação; nos ciclos 2 e 3, alocado. As estimativas da H1 usam ao menos um alocado nos três ciclos (no ciclo 1, o confirmado), como conferiu a auditoria 36. Amostra da escolha (H2, plano B): 915, 2.032 e 2.474 candidatos com 1ª opção numa célula do quadro, ligados ao CNES e com município de origem.</a:t>
+              <a:t>Cada ciclo é um chamamento do PMM-E com quadro de vagas próprio: o ciclo 1 com quadro de 24/07/2025; o ciclo 2 com quadro de 03/02/2026, retificado em 13/02/2026 (o vigente na inscrição, de onde vem o tipo de vaga usado aqui; auditoria 36) e de novo em 19/03/2026; o ciclo 3 com quadro de 16/07/2026. Célula = estabelecimento × curso no quadro da 1ª chamada; é entre as células do seu curso e ciclo que o candidato escolhe. Candidatos, 1ª opção: os que puseram a 1ª opção numa célula do quadro. Com origem: os que também foram ligados ao CNES e têm município de origem; é a amostra do modelo de escolha, 5.421 candidatos nos três ciclos.</a:t>
             </a:r>
           </a:p>
         </p:txBody>
@@ -8980,7 +8979,7 @@
           <a:p>
             <a:r>
               <a:rPr lang="pt-BR" dirty="0"/>
-              <a:t>Até 0,300, R$ 10 mil; até 0,400, R$ 15 mil; acima, R$ 20 mil. O escore da relação nominal do MS é o IVS 2010 oficial em 404/404 municípios. No ciclo 3, congelado, 747 de 748: o que falta foi criado depois de 2010. Em 0,300 e 0,400 mudam também outras regras federais: pacote do corte.</a:t>
+              <a:t>Como ler: cada ponto é um município com vaga no quadro da 1ª chamada do ciclo 1; o eixo horizontal é o IVS 2010 oficial, a cor também; o vertical, a bolsa anunciada. Até 0,300, R$ 10 mil; até 0,400, R$ 15 mil; acima, R$ 20 mil. O escore da relação nominal do MS é o IVS 2010 oficial em 404/404 municípios. No ciclo 3, 747 de 748: o que falta foi criado depois de 2010. É daqui que vem a variação da bolsa no modelo de escolha: vagas parecidas, de lados diferentes de um corte, pagam bolsas diferentes. Em 0,300 e 0,400 mudam também outras regras federais: pacote do corte.</a:t>
             </a:r>
           </a:p>
         </p:txBody>
@@ -9039,7 +9038,7 @@
           <a:p>
             <a:r>
               <a:rPr lang="pt-BR" dirty="0"/>
-              <a:t>Só células com pelo menos uma vaga imediata (no ciclo 2, pelo quadro de 13/02/2026, anterior à alocação). Cada ponto é a fração de células preenchidas numa faixa de 0,010 de IVS; cada linha, a reta local de um lado. Abaixo de 0,300, 56,1% dessas células são preenchidas. A distância crua entre as retas não é a estimativa: a HI-1 compara células do mesmo curso e ciclo, com uma reta por ciclo, e dá −3,7 p.p. [−21,3; +13,9] em 0,300 e −2,3 em 0,400. Saídas do adendo 48b (auditoria 38). Por que a reta de baixo sobe (protocolo 62, doc 57m, auditoria 37; descritivo e pós-resultado): na faixa de R$ 10 mil, a fração de células preenchidas sobe +11,9 p.p. a cada 0,100 de IVS [+6,0; +17,7]; comparando só células da mesma UF, sobram +1,3 p.p. O Nordeste é a região que mais preenche nessa faixa (43% das células) e a de IVS mais alto. Diz com o que a subida anda junto, não por quê.</a:t>
+              <a:t>Descritivo. Dos 5.425 candidatos com 1ª opção e município de origem, 79% põem a 1ª opção na UF onde já trabalhavam, 46% na mesma região de saúde e 36% no próprio município; a distância mediana até a 1ª opção é 51 km, e três em cada quatro ficam a até 189 km. A origem é o município do vínculo médico anterior no CNES, não a residência. É preferência revelada: diz onde escolhem, não por quê. O próximo passo é perguntar quanto a bolsa pesa nessa escolha, comparado com a origem.</a:t>
             </a:r>
           </a:p>
         </p:txBody>
@@ -9098,7 +9097,7 @@
           <a:p>
             <a:r>
               <a:rPr lang="pt-BR" dirty="0"/>
-              <a:t>Especificação principal da H1 desde 26/10/2026 (adendo 48b, pós-resultado), RDD sharp local linear em cada corte separado. A equação da tela é a HI-2: médicos alocados na 1ª chamada em vagas imediatas, por município, com intercepto por ciclo, o salto do lado de bolsa maior, uma reta de cada lado por ciclo e o controle das vagas imediatas com coeficiente por ciclo. A HI-1 é a célula com vaga imediata preenchida na 1ª chamada, com efeitos fixos de curso × ciclo. Amostra: só células com pelo menos uma vaga imediata, ciclos 1–3; as demais ficam fora e são contadas. Kernel triangular, h = 0,050, erro-padrão agrupado por município; Holm entre as quatro linhas primárias. Comparamos vagas do mesmo tipo; a reserva se preenche por remanejamento e pela priorização da SGTES, outro mecanismo (doc 57n). No ciclo 2, o tipo de vaga é o do quadro de 13/02/2026 (auditoria 36). Em cinza, os planos B. H2: logit condicional (McFadden); cada um dos 5.421 candidatos escolhe a vaga de maior utilidade entre as do seu curso e ciclo: utilidade = bolsa + IVS + distância + origem; a curva do IVS é um spline com nós nos cortes, e só o salto da bolsa nos cortes identifica o peso dela; erro-padrão agrupado por conjunto de escolha; o teste é o peso da UF de origem menos o de toda a bolsa, unilateral e pós-resultado. H3: estudo de evento escalonado (Callaway e Sant'Anna) no médico e no município × mês; erro-padrão por bootstrap multiplicador agrupado; sensibilidades: Rambachan–Roth e a comparação na nota de corte. Cuidado: pacote do corte.</a:t>
+              <a:t>Logit condicional (McFadden): cada um dos 5.421 candidatos escolhe, entre as vagas abertas do seu curso e ciclo, a de maior utilidade; o candidato é comparado consigo mesmo entre as vagas que podia escolher. Utilidade = bolsa (linear, por R$ 1 mil) + curva contínua do IVS (spline com dobras nos cortes, sem salto) + distância em km + mesma UF, mesma região de saúde e mesmo município da origem + porte, capital, estrato, macrorregião e vagas imediatas da vaga. Só o salto da bolsa nos cortes de IVS identifica o peso dela. Teste central (P1h-1, protocolo 52b, pós-resultado): D_UF = peso da vaga na UF de origem − peso de toda a bolsa (10 × β), unilateral, com o tipo de vaga do ciclo 2 do quadro de 13/02/2026 (adendo 52c). Erro-padrão agrupado por conjunto de escolha (curso × ciclo). Adendo 52e (pós-resultado): efeito fixo do par (UF de origem, UF da vaga), comparando só vagas da mesma UF vistas por médicos da mesma UF de origem. Por ciclo: o mesmo modelo em cada ciclo.</a:t>
             </a:r>
           </a:p>
         </p:txBody>
@@ -9157,7 +9156,7 @@
           <a:p>
             <a:r>
               <a:rPr lang="pt-BR" dirty="0"/>
-              <a:t>Regra sharp: o IVS 2010 oficial reproduz a faixa de todos os municípios dos ciclos 1 e 2. Sem manipulação: o IVS foi medido em 2010, antes do programa, e o teste de densidade não acusa acúmulo no ciclo 1 (p de Holm 0,707 em 0,300 e 0,658 em 0,400). Balanço: covariáveis pré e placebos de outcome e de corte passam; ressalvas: em 0,400, seleção suspeita no ciclo 1; em 0,300, a parte dos municípios que são capitais cai −17,8 p.p. [−34,1; −1,5] no corte (auditoria 36, diagnóstico); o adendo 48d acha também, do lado de cima, menos Nordeste e mais especialistas no resto da região de saúde (slide 11). Pacote do corte: a única regra federal que muda em 0,300 e não em 0,400 é o acréscimo no teto de emendas e nas parcelas de custeio da APS e da MAC do município (auditoria 18); nenhum incentivo individual ao especialista além da bolsa muda em 0,300; em 0,400 mudam incentivos de médicos da APS (AgSUS e PMMB) (auditoria 35). Por isso o contraste é o pacote do corte, não a bolsa sozinha. Tipo de vaga: a SGTES/MS decide se a vaga é imediata ou de cadastro reserva, por critério que não está nos dados nem nos editais, e a decisão pode responder ao corte; comparar só vagas imediatas pode então comparar grupos selecionados de forma diferente (doc 05, §2.12). Testado no adendo 48f (doc 57t, auditoria 44). Os limites de Lee, que não supõem como o Ministério escolheu o tipo, contêm zero nos dois cortes: em 0,300, [−7,4; +9,6] p.p. na fração preenchida e [−0,05; +0,12] nos alocados por vaga imediata; em 0,400, [−13,0; +16,2] p.p. e [−0,15; +0,16]. A premissa é a monotonicidade dentro de cada ciclo: em cada ciclo, o corte empurra o tipo de vaga num só sentido. Em 0,300, o lado com mais vaga imediata troca entre ciclos, e por isso os limites aparam ciclo a ciclo. Na sensibilidade com a reta, os alocados por vaga imediata em 0,300 ficam inteiramente abaixo de zero, [−0,19; −0,01], mas o IC de Imbens–Manski contém zero [−0,39; +0,19]. Restringir a vagas imediatas piora o balanço em 0,300: 3 covariáveis saltam no corte entre os municípios com vaga imediata (capital, Nordeste, especialistas na região), contra 1 na amostra toda. Na H3 (plano B), o teste conjunto do pré falha nas horas no município do posto; na H2, a independência de alternativas irrelevantes é violada em parte, e o peso da bolsa muda pouco.</a:t>
+              <a:t>Bolsa por regra: o IVS 2010 oficial reproduz a faixa de todos os municípios dos ciclos 1 e 2 (368/368 e 454/454); o município não escolhe a bolsa. Pacote do corte: em 0,300 e 0,400 mudam também outras regras federais (auditoria 18); o peso da bolsa é o do pacote, não o da bolsa sozinha nem o da participação no PMM-E. IIA (independência de alternativas irrelevantes): o logit aninhado por região de saúde a rejeita em parte, e o ponto do peso da bolsa fica perto do mesmo valor (doc 57a). Localização: com o par de UFs fixado, o peso da bolsa não diminui (adendo 52e, auditoria 48); a comparação só com vagas perto do corte é inconclusiva. Conjunto de escolha: supõe que o candidato viu todas as vagas do seu curso. Origem: preferência revelada, medida pelo vínculo anterior no CNES; mistura família, rede e registro; não é efeito causal de mudar alguém de lugar. Pós-resultado: a hipótese e o teste D_UF foram formulados depois de ver os coeficientes; o peso da bolsa pré-registrado (P1a, sem fixar a UF) não passa no Holm (p de Holm 0,072). Tudo é condicional a se candidatar.</a:t>
             </a:r>
           </a:p>
         </p:txBody>
@@ -9216,7 +9215,7 @@
           <a:p>
             <a:r>
               <a:rPr lang="pt-BR" dirty="0"/>
-              <a:t>Especificação principal da H1 (adendo 48b; auditoria 38, aprovado com correções de texto, nenhum número mudou; pós-resultado). HI-1, a chance de uma célula com vaga imediata ser preenchida na 1ª chamada: −3,7 p.p. [−21,3; +13,9] em 0,300 e −2,3 p.p. [−24,0; +19,4] em 0,400, p de Holm 1,000 nos dois. HI-2, médicos alocados nessas vagas por município, comparando municípios com as mesmas vagas imediatas: −1,13 [−2,15; −0,10] em 0,300, p de Holm 0,126 (média abaixo 2,77); −0,16 [−0,99; +0,68] em 0,400, p de Holm 1,000. O IC convencional exclui zero só em HI-2 em 0,300, mas o sinal não sobrevive à correção para quatro testes: p = 0,032 sem correção e p de Holm = 0,126. O adendo previa só dois casos, as quatro com IC que contém zero ou alguma que rejeita zero depois do Holm; este fica entre os dois. Ler esse caso intermediário como "nem ausência de diferença, nem efeito confirmado" foi decisão de implementação, não leitura pré-registrada (auditoria 38, achado 3). IC que contém zero não é efeito zero. TOST (HI-s7), com IC de 90% e as margens do protocolo 60: HI-1 [−18,4; +11,1] em 0,300 e [−20,5; +15,9] em 0,400, contra ±10 p.p.: inconclusivo. HI-2 em 0,300: [−1,99; −0,26] contra ±0,69 médico por município (25% da média abaixo): não houve aumento igual ou maior que a margem, mas uma queda desse tamanho não fica descartada. HI-2 em 0,400, contra ±0,50: inconclusivo. No IC convencional, sob a aproximação local linear e para o pacote do corte. Não dá para dizer que nada mudou. Tudo se refere ao pacote do corte, não à bolsa isolada. Cautela: Pós-resultado (adendo 48b); pacote do corte.</a:t>
+              <a:t>Teste central da hipótese (P1h-1, com o tipo de vaga do ciclo 2 do quadro de 13/02/2026; adendo 52c, auditoria 41). No mesmo modelo e com os mesmos candidatos (ciclos 1–3), a vaga ficar na UF de origem pesa 2,40 [2,27; 2,52] em log-chance: multiplica a chance de ser a 1ª opção por 11,0 [9,7; 12,5]. Toda a diferença de bolsa, de R$ 10 mil para R$ 20 mil, pesa 0,45 [−0,04; 0,95]: multiplica a chance por 1,57 [0,96; 2,58], intervalo que contém 1. A diferença é 1,94 [1,48; 2,40], p unilateral &lt; 0,001 e p de Holm &lt; 0,001 (família de um teste). Por ciclo, a origem pesa mais nos três (Robustez). Escolha condicional a se candidatar; a bolsa é o pacote do corte; a origem é preferência revelada, medida pelo vínculo anterior no CNES, e não causa da escolha. Cautela: Origem é preferência revelada, não causa.</a:t>
             </a:r>
           </a:p>
         </p:txBody>
@@ -9275,7 +9274,7 @@
           <a:p>
             <a:r>
               <a:rPr lang="pt-BR" dirty="0"/>
-              <a:t>Especificação secundária da H1: a medida antiga, alocados por município (N1), que mistura vaga imediata e cadastro reserva. Sem controle, o efeito total de abrir vagas e preenchê-las; com controle, o preenchimento dado o número de vagas. A decomposição é exata: sem controle = via vagas + com controle. Em 0,400: −1,36 = −1,22 + −0,14; do lado de bolsa maior há menos vagas oferecidas (−3,59), sobretudo por alguns municípios grandes logo abaixo do corte. Em 0,300: −1,56 = −0,11 + −1,45 [−2,67; −0,22]; a oferta não muda (+0,39). Só com vagas imediatas, os saltos em 0,300 encolhem: N1 com controle de −1,45 para −1,13 (HI-2); a célula aberta preenchida (A3) de −8,4 p.p. [−18,5; +1,7] para −3,7 p.p. (HI-1). Linhas por corte, sem correção múltipla.</a:t>
+              <a:t>Adendo 52e (doc 57x; auditoria 48; pós-resultado): comparando só vagas da mesma UF, vistas por médicos da mesma UF de origem (efeito fixo do par de UFs), a razão de chances da 1ª opção por +R$ 5 mil é 1,47 [1,15; 1,89] nos ciclos 1–3 (p de Holm 0,005) e 1,90 [1,30; 2,78] no ciclo 2 (p de Holm 0,003). No modelo base, sem fixar a UF: 1,25 [0,98; 1,61] e 1,79 [1,19; 2,68]; a especificação pré-registrada (P1a) não passa no Holm (p de Holm 0,072). Em km: dentro da mesma UF, +R$ 5 mil pesam como 75 km [28; 122] a menos de distância nos ciclos 1–3 e 117 km [56; 178] no ciclo 2; no modelo base, com o quadro corrigido, 119 km [−12; 250] e 302 km [88; 516]. Os km caem dentro da UF porque a distância pesa mais ali, não porque a bolsa pese menos. Mostra que a escolha responde à bolsa; não testa a comparação com a origem. Escolha não é expansão: o que uma vaga ganha, outra do mesmo curso perde. Pacote do corte. Cautela: Adendo pós-resultado; sem fixar a UF, Holm 0,072.</a:t>
             </a:r>
           </a:p>
         </p:txBody>
@@ -9334,7 +9333,7 @@
           <a:p>
             <a:r>
               <a:rPr lang="pt-BR" dirty="0"/>
-              <a:t>Todas as combinações de ciclo, corte e medida estão gravadas; nada foi estimado para este slide. Na taxa por vaga oferecida, o ciclo 2 dá −27,8 p.p. [−49,0; −6,7] em 0,300, contra −16,0 com os ciclos juntos, e responde por 51% do salto conjunto. Na A3, o ciclo 2 dá −10,2 p.p., com IC que contém zero. "Preenchida" é ao menos um alocado nos três ciclos (no ciclo 1, o confirmado), conferido pela auditoria 36. A A3 usa o tipo de vaga do ciclo 2 do quadro retificado de 19/03/2026, refeito depois do resultado preliminar; com o tipo de vaga de antes da alocação, a queda aumenta. A H1 principal (adendo 48b) usa o quadro de 13/02/2026. Cautela: Tipo de vaga do ciclo 2: quadro refeito depois do resultado (auditoria 36).</a:t>
+              <a:t>Por ciclo (modelo base, quadro corrigido): razão de chances 1,07 [0,69; 1,65] no ciclo 1, 1,79 [1,19; 2,68] no ciclo 2 e 1,00 [0,72; 1,39] no ciclo 3. A bolsa desloca a escolha com força só no ciclo 2; nos ciclos 1 e 3, os intervalos são largos, e não sabemos por quê. Quadro do ciclo 2: com o quadro refeito depois do resultado (19/03/2026), 1,70 [1,22; 2,37]; com o de 13/02/2026, vigente na inscrição, 1,79 (adendo 52c, auditoria 41; as demais variantes no adendo 52d, auditoria 46). Comparando vagas da mesma UF: com a distância em log, 1,45 [1,15; 1,83] (ciclo 2: 1,75 [1,23; 2,49]); com a região de saúde de origem no lugar da UF de origem, 1,49 [1,15; 1,92] (ciclo 2: 1,91 [1,33; 2,74]); só com vagas a até 0,050 de um corte, 1,28 [0,95; 1,72], p de Holm 0,103: inconclusivo. À direita, origem − toda a bolsa por ciclo: 2,34 [1,45; 3,24], 1,19 [0,51; 1,86] e 2,37 [1,75; 3,00]: a origem pesa mais nos três ciclos. Tudo pós-resultado e condicional a se candidatar. Cautela: Quadro da inscrição, log e região: mesma leitura.</a:t>
             </a:r>
           </a:p>
         </p:txBody>
@@ -9393,7 +9392,7 @@
           <a:p>
             <a:r>
               <a:rPr lang="pt-BR" dirty="0"/>
-              <a:t>Especificação secundária da H1: comparar municípios parecidos dos dois lados do corte (adendos 48d e 48e). A figura mostra, em cada corte, a fração das células com vaga imediata preenchidas em quatro versões. RDD sem controle, na amostra com todas as variáveis: −4,1 p.p. [−23,6; +15,4] em 0,300 e +2,8 [−20,3; +25,8] em 0,400; difere da HI-1 do slide 8 (−3,7 e −2,3) porque saem as células sem as variáveis de médicos. Com localização (capital, macrorregião, porte) e médicos na região somados na regressão: +3,6 [−16,8; +23,9] e −1,5 [−23,9; +20,9]. Pareando pela regra literal (PM-1, o principal do 48e), por município × ciclo: +4,7 [−6,5; +16,0] com 92 pares em 0,300 e +5,5 [−9,7; +20,7] com 70 pares em 0,400, p de Holm 1,000. Pareando pela regra do 48d: −0,6 [−13,1; +11,8], 86 pares, só em 0,300; o ponto muda de sinal com a regra de pareamento, então vale ler o intervalo, não o ponto. Nos alocados por município (HI-2) em 0,300, a queda vai de −1,11 [−2,17; −0,05] sem controle a −0,25 [−1,37; +0,87] com localização e médicos; pareando, os alocados por vaga imediata ficam em +0,10 [−0,01; +0,22], p de Holm 0,636. Balanço no corte 0,300, na amostra da HI-2: do lado de bolsa maior, a parte de capitais muda −29,9 p.p., a do Nordeste −47,7 p.p., e há +10,54 especialistas por 10 mil hab. no resto da região de saúde; em 0,400, só os especialistas no resto da região diferem (+6,21). Ressalvas: (a) é robustez pós-resultado, feita depois de ver a H1; (b) o pareamento supõe randomização local condicional às variáveis, não a continuidade da RDD; (c) em 0,400 vale só para municípios que não são capitais, fora do Sul e do Centro-Oeste, porque essas categorias só aparecem abaixo do corte; (d) não separa a bolsa do pacote do corte; (e) a capital sozinha explica pouco: com a dummy de capital, a HI-2 em 0,300 vai de −1,13 a −0,83, e 73% do salto fica (auditoria 42). Capitais (auditoria 36): na janela de 0,050 há 13 capitais abaixo de 0,300 e 6 acima; a menos de 0,010 do corte, São Paulo, Goiânia, Natal e Brasília ficam abaixo e nenhuma capital acima; a parte dos municípios que são capitais cai −17,8 p.p. [−34,1; −1,5] no corte. Nada disso mostra que a localização explica a queda: é limite da RDD em 0,300. Cautela: Robustez pós-resultado; pacote do corte.</a:t>
+              <a:t>No modelo da banca 1, o médico aceita a vaga se a bolsa compensa o custo do lugar. Na escolha, o custo que domina não é o do município, que a bolsa compensa, e sim o de sair da própria região: a vaga na UF de origem pesa mais que toda a diferença de bolsa. Um degrau de R$ 5 mil desloca a escolha entre vagas próximas, mas não alcança esse custo: incentivo limitado. É coerente com não termos detectado aumento do preenchimento no corte (apêndice), mas essa ligação é interpretação, não teste (auditoria 50). Dá para afirmar: entre quem se candidatou, a vaga de bolsa maior é preferida a uma vaga parecida da mesma UF; a origem pesa mais que toda a diferença de bolsa. Não dá para afirmar: que a bolsa causa mais médicos no município; que a origem causa a escolha; que o efeito no preenchimento é zero; que a bolsa reduz o preenchimento. O contraste é o pacote do corte, não a participação no PMM-E. Próximos passos: as decisões do autor que seguem abertas (doc 05, §4.1), o ciclo 3 com a competência 202703 madura e o universo de inscritos.</a:t>
             </a:r>
           </a:p>
         </p:txBody>
@@ -9452,7 +9451,7 @@
           <a:p>
             <a:r>
               <a:rPr lang="pt-BR" dirty="0"/>
-              <a:t>Uma frase por explicação; todas são diagnósticos pós-resultado e medem o pacote do corte. Reta: nas médias simples da janela, 33,3% das células são preenchidas abaixo de 0,300 e 33,5% acima; a RDD compara as duas retas no ponto do corte, e a de baixo carrega uma subida que só existe nos últimos municípios antes de 0,300, com capitais e Nordeste logo abaixo do corte. Pelo adendo 48d (doc 63), em 0,300 os lados diferem em localização (capital, Nordeste) e em especialistas no resto da região de saúde; com essas variáveis na regressão, a HI-2 deixa de excluir zero. É limite da RDD nesse corte, não prova de que a localização explica a queda. Vagas: do lado de cima há mais vagas de cadastro reserva e de cursos que preenchem pouco em qualquer lugar; só com vagas imediatas, a queda encolhe, e os limites de Lee da seleção pelo tipo de vaga contêm zero (adendo 48f). Porte: em 0,400, municípios grandes logo abaixo abrem e preenchem muitas vagas; com o controle das vagas, o salto quase some. Incentivo: nos atos lidos, nenhum incentivo individual além da bolsa muda em 0,300 (auditoria 35); muda o teto de emendas do município (auditoria 18). Acaso: com os 3 cortes falsos do protocolo, o p por posto é 0,250, o menor possível; numa grade maior, fora do protocolo, 0,031; não fica descartado nem confirmado. Nada disso mostra que a bolsa reduz o preenchimento.</a:t>
+              <a:t>Antiga H1, só como motivação (adendo 48b, doc 57n, auditoria 38; adendo 48h, doc 57w, auditoria 47). Chance de a célula com vaga imediata ser preenchida na 1ª chamada (HI-1): −3,7 p.p. [−21,3; +13,9] em 0,300 e −2,3 [−24,0; +19,4] em 0,400, p de Holm 1,000; o desenho só detectaria saltos de 25,1 e 31,0 p.p. Com efeito fixo de UF (e os especialistas no entorno): +5,4 [−11,0; +21,8] e −4,2 [−21,1; +12,6]. Pareando municípios da mesma UF e condição de capital: +16,4 [−3,8; +36,6] com 25 pares e −6,0 [−23,2; +11,5] com 29 pares; o ponto não deve ser lido como tamanho de efeito. O sinal negativo era mais forte nos médicos alocados por município em 0,300 (HI-2): −1,13 [−2,15; −0,10], p de Holm 0,126, nunca passou no Holm; com efeito fixo de UF e os especialistas no entorno, −0,62 [−1,67; +0,43]: encolhe e deixa de se distinguir de zero (só com a UF, o ponto cai à metade, auditoria 47). A HI-2 cai em tamanho parecido nos três ciclos: −1,07 [−2,88; +0,74], −0,97 [−2,48; +0,55] e −1,33 [−3,59; +0,93]. Em 0,300, o balanço falha: do lado de bolsa maior, a parte de capitais muda −29,9 p.p., a do Nordeste −47,7 p.p., e há +10,54 especialistas por 10 mil hab. no resto da região de saúde. O sinal anda junto com a UF e a localização; é limite da RDD nesse corte, não prova de mecanismo, e não mostra que a bolsa reduz o preenchimento. Médico de outra UF por vaga imediata: +0,02 [−0,01; +0,06] em 0,300 e +0,16 [+0,00; +0,35] em 0,400, inconclusivo, com poucos pares. Pacote do corte. Cautela: Pacote do corte; só detectaria saltos grandes.</a:t>
             </a:r>
           </a:p>
         </p:txBody>
@@ -9511,66 +9510,7 @@
           <a:p>
             <a:r>
               <a:rPr lang="pt-BR" dirty="0"/>
-              <a:t>Planos B, em cinza. H2 (P1h, pós-resultado): diferença, em log-chance, entre o peso de a vaga ficar na mesma UF de origem do médico e o peso de toda a bolsa, no modelo de escolha da 1ª opção, estimado em cada ciclo: 2,34 no ciclo 1, 1,31 no ciclo 2 e 2,37 no ciclo 3. Com os ciclos juntos, toda a bolsa pesa 0,42 e a mesma UF 2,40; diferença 1,98 [1,56; 2,40]. Origem é preferência revelada, não efeito causal; escolha não é expansão: o que uma vaga ganha, outra do mesmo curso perde. Reestimação em curso (52c): o ciclo 2 será refeito com o tipo de vaga do quadro de 13/02/2026; até lá, valem estes números. H3, nível do médico (P4): as horas cadastradas do próprio médico do PMM-E sobem +6,6 h/sem [+5,4; +7,8] depois da entrada (+8,7 no município do posto, −2,1 fora dele), e 51,0% [48,4; 53,7] já tinham vínculo no município do posto; na comparação na nota de corte, +7,91 h/sem [−0,63; +16,45]. Associação; não diz nada sobre os outros médicos do município e não é efeito da bolsa nem da participação no PMM-E. H3, nível do município, comparando os lados do corte (protocolo 64; doc 57q; auditoria 39): a mudança nos vínculos de especialistas entre o pré e o pós é −0,23 [−1,51; +1,05] por 10 mil hab. em 0,300 e −0,46 [−1,86; +0,94] em 0,400; nas horas SUS também não há diferença; p de Holm 1,000 nas quatro primárias. Os outros especialistas, sem os do programa, não saem: −4,75 [−19,26; +9,76] horas SUS por 10 mil hab. em 0,300 e +0,37 [−12,46; +13,20] em 0,400. O placebo de generalistas não se mexe e o pré é plano. A razão fuzzy (efeito de receber médico) não entra: o corte quase não muda quem recebe médico do programa (F robusto 0,2 e 0,0), o instrumento é fraco e a estimativa fica vazia de propósito. É o pacote do corte; não detectar diferença não é efeito zero. Pela chegada do médico (protocolo 60, parte B; doc 57k; auditoria 34), vínculos e horas sobem, mas o pré já vinha subindo e a conclusão não aguenta Rambachan–Roth. Horas cadastradas não são presença.</a:t>
-            </a:r>
-          </a:p>
-        </p:txBody>
-      </p:sp>
-    </p:spTree>
-  </p:cSld>
-  <p:clrMapOvr>
-    <a:masterClrMapping/>
-  </p:clrMapOvr>
-</p:notes>
-</file>
-
-<file path=ppt/notesSlides/notesSlide36.xml><?xml version="1.0" encoding="utf-8"?>
-<p:notes xmlns:a="http://schemas.openxmlformats.org/drawingml/2006/main" xmlns:r="http://schemas.openxmlformats.org/officeDocument/2006/relationships" xmlns:p="http://schemas.openxmlformats.org/presentationml/2006/main">
-  <p:cSld>
-    <p:spTree>
-      <p:nvGrpSpPr>
-        <p:cNvPr id="1" name=""/>
-        <p:cNvGrpSpPr/>
-        <p:nvPr/>
-      </p:nvGrpSpPr>
-      <p:grpSpPr>
-        <a:xfrm>
-          <a:off x="0" y="0"/>
-          <a:ext cx="0" cy="0"/>
-          <a:chOff x="0" y="0"/>
-          <a:chExt cx="0" cy="0"/>
-        </a:xfrm>
-      </p:grpSpPr>
-      <p:sp>
-        <p:nvSpPr>
-          <p:cNvPr id="2" name="Slide Image Placeholder 1"/>
-          <p:cNvSpPr>
-            <a:spLocks noGrp="1" noRot="1" noChangeAspect="1"/>
-          </p:cNvSpPr>
-          <p:nvPr>
-            <p:ph type="sldImg"/>
-          </p:nvPr>
-        </p:nvSpPr>
-        <p:spPr/>
-      </p:sp>
-      <p:sp>
-        <p:nvSpPr>
-          <p:cNvPr id="3" name="Notes Placeholder 2"/>
-          <p:cNvSpPr>
-            <a:spLocks noGrp="1"/>
-          </p:cNvSpPr>
-          <p:nvPr>
-            <p:ph type="body" idx="1"/>
-          </p:nvPr>
-        </p:nvSpPr>
-        <p:spPr/>
-        <p:txBody>
-          <a:bodyPr/>
-          <a:lstStyle/>
-          <a:p>
-            <a:r>
-              <a:rPr lang="pt-BR" dirty="0"/>
-              <a:t>A história parte da H1. No modelo da banca 1, o médico aceita a vaga se a bolsa compensa o custo do lugar. O preenchimento não sobe no corte; o sinal negativo é a estimativa no corte, puxada por poucos municípios. Incentivo limitado: a política mexe numa variável, e o custo do lugar (longe da origem, da família e da rede) continua contra; a bolsa reordena os candidatos entre as vagas abertas (H2, plano B). Pacote do corte: em 0,300 e 0,400 mudam também outras regras federais, então o contraste não isola a bolsa. Vínculo não é presença: na oferta (H3, plano B), o médico soma horas cadastradas, mas metade já trabalhava no município do posto, e no município não dá para afirmar aumento. Associação não é efeito; inconclusivo não é efeito zero. Próximos passos: as decisões do autor que seguem abertas (doc 05, §4.1), o ciclo 3 com a competência 202703 madura e o universo de inscritos.</a:t>
+              <a:t>Antiga H3, fora do corpo (decisão do autor de 27/10/2026). As horas cadastradas do médico do PMM-E sobem +6,6 h/sem [+5,4; +7,8] depois da entrada, e 51,0% [48,4; 53,7] já tinham vínculo no município do posto. No município, comparando os lados do corte (protocolo 64), não se detecta diferença na oferta de especialistas (p de Holm 1,000 nos dois cortes), o que não quer dizer que ela seja igual. Associação; não é efeito da bolsa nem da participação no PMM-E. Horas cadastradas não são presença. Cautela: Associação; vínculo cadastrado não é presença.</a:t>
             </a:r>
           </a:p>
         </p:txBody>
@@ -15501,7 +15441,7 @@
                 </a:solidFill>
                 <a:latin typeface="Montserrat"/>
               </a:rPr>
-              <a:t>Hipóteses: a H1 é a candidata central</a:t>
+              <a:t>Hipótese: a origem pesa mais que a bolsa na escolha</a:t>
             </a:r>
           </a:p>
         </p:txBody>
@@ -15676,7 +15616,7 @@
                 </a:solidFill>
                 <a:latin typeface="Montserrat"/>
               </a:rPr>
-              <a:t>H2 é pós-resultado.</a:t>
+              <a:t>Formulada após ver os dados.</a:t>
             </a:r>
           </a:p>
         </p:txBody>
@@ -15690,7 +15630,7 @@
         <p:spPr>
           <a:xfrm>
             <a:off x="292608" y="804672"/>
-            <a:ext cx="2651760" cy="2089404"/>
+            <a:ext cx="2651760" cy="2203704"/>
           </a:xfrm>
           <a:prstGeom prst="roundRect">
             <a:avLst>
@@ -15729,7 +15669,7 @@
                 </a:solidFill>
                 <a:latin typeface="Montserrat"/>
               </a:rPr>
-              <a:t>H1 · central</a:t>
+              <a:t>Hipótese</a:t>
             </a:r>
           </a:p>
         </p:txBody>
@@ -15743,7 +15683,7 @@
         <p:spPr>
           <a:xfrm>
             <a:off x="3081528" y="804672"/>
-            <a:ext cx="8805672" cy="2089404"/>
+            <a:ext cx="8805672" cy="2203704"/>
           </a:xfrm>
           <a:prstGeom prst="roundRect">
             <a:avLst>
@@ -15784,7 +15724,7 @@
                 </a:solidFill>
                 <a:latin typeface="Montserrat"/>
               </a:rPr>
-              <a:t>bolsa maior, mais vagas preenchidas</a:t>
+              <a:t>médico escolhe perto de onde trabalha; bolsa muda qual vaga, mas pesa menos que a origem</a:t>
             </a:r>
           </a:p>
         </p:txBody>
@@ -15797,8 +15737,8 @@
         </p:nvSpPr>
         <p:spPr>
           <a:xfrm>
-            <a:off x="292608" y="3122676"/>
-            <a:ext cx="2651760" cy="1044702"/>
+            <a:off x="292608" y="3236976"/>
+            <a:ext cx="2651760" cy="2203704"/>
           </a:xfrm>
           <a:prstGeom prst="roundRect">
             <a:avLst>
@@ -15837,7 +15777,7 @@
                 </a:solidFill>
                 <a:latin typeface="Montserrat"/>
               </a:rPr>
-              <a:t>H2 · plano B</a:t>
+              <a:t>Motivação</a:t>
             </a:r>
           </a:p>
         </p:txBody>
@@ -15850,8 +15790,8 @@
         </p:nvSpPr>
         <p:spPr>
           <a:xfrm>
-            <a:off x="3081528" y="3122676"/>
-            <a:ext cx="8805672" cy="1044702"/>
+            <a:off x="3081528" y="3236976"/>
+            <a:ext cx="8805672" cy="2203704"/>
           </a:xfrm>
           <a:prstGeom prst="roundRect">
             <a:avLst>
@@ -15892,122 +15832,14 @@
                 </a:solidFill>
                 <a:latin typeface="Montserrat"/>
               </a:rPr>
-              <a:t>a bolsa pesa pouco perto da origem</a:t>
+              <a:t>no corte, preenchimento sem aumento detectado</a:t>
             </a:r>
           </a:p>
         </p:txBody>
       </p:sp>
       <p:sp>
         <p:nvSpPr>
-          <p:cNvPr id="106" name="Rótulo plano B"/>
-          <p:cNvSpPr/>
-          <p:nvPr/>
-        </p:nvSpPr>
-        <p:spPr>
-          <a:xfrm>
-            <a:off x="292608" y="4395978"/>
-            <a:ext cx="2651760" cy="1044702"/>
-          </a:xfrm>
-          <a:prstGeom prst="roundRect">
-            <a:avLst>
-              <a:gd name="adj" fmla="val 10000"/>
-            </a:avLst>
-          </a:prstGeom>
-          <a:solidFill>
-            <a:srgbClr val="A3A39E"/>
-          </a:solidFill>
-          <a:ln>
-            <a:noFill/>
-          </a:ln>
-        </p:spPr>
-        <p:txBody>
-          <a:bodyPr wrap="square" lIns="73152" tIns="45720" rIns="73152" bIns="45720" rtlCol="0" anchor="ctr">
-            <a:noAutofit/>
-          </a:bodyPr>
-          <a:lstStyle/>
-          <a:p>
-            <a:pPr marL="0" indent="0" algn="ctr">
-              <a:lnSpc>
-                <a:spcPct val="100000"/>
-              </a:lnSpc>
-              <a:spcBef>
-                <a:spcPts val="0"/>
-              </a:spcBef>
-              <a:spcAft>
-                <a:spcPts val="0"/>
-              </a:spcAft>
-              <a:buNone/>
-            </a:pPr>
-            <a:r>
-              <a:rPr lang="pt-BR" sz="2000" b="1" dirty="0">
-                <a:solidFill>
-                  <a:srgbClr val="FFFFFF"/>
-                </a:solidFill>
-                <a:latin typeface="Montserrat"/>
-              </a:rPr>
-              <a:t>H3 · plano B</a:t>
-            </a:r>
-          </a:p>
-        </p:txBody>
-      </p:sp>
-      <p:sp>
-        <p:nvSpPr>
-          <p:cNvPr id="107" name="Hipótese plano B"/>
-          <p:cNvSpPr/>
-          <p:nvPr/>
-        </p:nvSpPr>
-        <p:spPr>
-          <a:xfrm>
-            <a:off x="3081528" y="4395978"/>
-            <a:ext cx="8805672" cy="1044702"/>
-          </a:xfrm>
-          <a:prstGeom prst="roundRect">
-            <a:avLst>
-              <a:gd name="adj" fmla="val 6000"/>
-            </a:avLst>
-          </a:prstGeom>
-          <a:solidFill>
-            <a:srgbClr val="F2F2F0"/>
-          </a:solidFill>
-          <a:ln w="12700">
-            <a:solidFill>
-              <a:srgbClr val="C9C9C4"/>
-            </a:solidFill>
-          </a:ln>
-        </p:spPr>
-        <p:txBody>
-          <a:bodyPr wrap="square" lIns="274320" tIns="36576" rIns="274320" bIns="36576" rtlCol="0" anchor="ctr">
-            <a:noAutofit/>
-          </a:bodyPr>
-          <a:lstStyle/>
-          <a:p>
-            <a:pPr marL="0" indent="0" algn="l">
-              <a:lnSpc>
-                <a:spcPct val="102000"/>
-              </a:lnSpc>
-              <a:spcBef>
-                <a:spcPts val="0"/>
-              </a:spcBef>
-              <a:spcAft>
-                <a:spcPts val="0"/>
-              </a:spcAft>
-              <a:buNone/>
-            </a:pPr>
-            <a:r>
-              <a:rPr lang="pt-BR" sz="2000" b="0" dirty="0">
-                <a:solidFill>
-                  <a:srgbClr val="8A8A85"/>
-                </a:solidFill>
-                <a:latin typeface="Montserrat"/>
-              </a:rPr>
-              <a:t>a chegada soma oferta ou remaneja?</a:t>
-            </a:r>
-          </a:p>
-        </p:txBody>
-      </p:sp>
-      <p:sp>
-        <p:nvSpPr>
-          <p:cNvPr id="108" name="Fontes"/>
+          <p:cNvPr id="106" name="Fontes"/>
           <p:cNvSpPr txBox="1"/>
           <p:nvPr/>
         </p:nvSpPr>
@@ -16058,7 +15890,7 @@
                 </a:solidFill>
                 <a:latin typeface="Montserrat"/>
               </a:rPr>
-              <a:t>plano da banca 2, §3; doc 06 da banca 2; doc 57i (P1h, protocolo 52b, auditoria 31).</a:t>
+              <a:t>doc 07 da banca 2 (decisão do autor de 27/10/2026); doc 65, §4.6 a §4.8 (auditoria 50); docs 57n e 57w.</a:t>
             </a:r>
           </a:p>
         </p:txBody>
@@ -16265,10 +16097,10 @@
             <a:tbl>
               <a:tblPr firstRow="1" bandRow="1"/>
               <a:tblGrid>
-                <a:gridCol w="7345084"/>
-                <a:gridCol w="4249508"/>
+                <a:gridCol w="7439406"/>
+                <a:gridCol w="4155186"/>
               </a:tblGrid>
-              <a:tr h="641223">
+              <a:tr h="732826">
                 <a:tc>
                   <a:txBody>
                     <a:bodyPr/>
@@ -16387,7 +16219,7 @@
                   </a:tcPr>
                 </a:tc>
               </a:tr>
-              <a:tr h="641223">
+              <a:tr h="732826">
                 <a:tc>
                   <a:txBody>
                     <a:bodyPr/>
@@ -16412,7 +16244,7 @@
                           </a:solidFill>
                           <a:latin typeface="Montserrat"/>
                         </a:rPr>
-                        <a:t>Bolsa</a:t>
+                        <a:t>1ª opção</a:t>
                       </a:r>
                     </a:p>
                   </a:txBody>
@@ -16497,7 +16329,227 @@
                   </a:tcPr>
                 </a:tc>
               </a:tr>
-              <a:tr h="641223">
+              <a:tr h="732826">
+                <a:tc>
+                  <a:txBody>
+                    <a:bodyPr/>
+                    <a:lstStyle/>
+                    <a:p>
+                      <a:pPr marL="0" indent="0" algn="l">
+                        <a:lnSpc>
+                          <a:spcPct val="100000"/>
+                        </a:lnSpc>
+                        <a:spcBef>
+                          <a:spcPts val="0"/>
+                        </a:spcBef>
+                        <a:spcAft>
+                          <a:spcPts val="0"/>
+                        </a:spcAft>
+                        <a:buNone/>
+                      </a:pPr>
+                      <a:r>
+                        <a:rPr lang="pt-BR" sz="2400" b="1" dirty="0">
+                          <a:solidFill>
+                            <a:srgbClr val="3A3A3A"/>
+                          </a:solidFill>
+                          <a:latin typeface="Montserrat"/>
+                        </a:rPr>
+                        <a:t>Origem do médico</a:t>
+                      </a:r>
+                    </a:p>
+                  </a:txBody>
+                  <a:tcPr marL="73152" marR="73152" marT="36576" marB="36576" anchor="ctr">
+                    <a:lnL w="6350">
+                      <a:solidFill>
+                        <a:srgbClr val="C9DED1"/>
+                      </a:solidFill>
+                    </a:lnL>
+                    <a:lnR w="6350">
+                      <a:solidFill>
+                        <a:srgbClr val="C9DED1"/>
+                      </a:solidFill>
+                    </a:lnR>
+                    <a:lnT w="6350">
+                      <a:solidFill>
+                        <a:srgbClr val="C9DED1"/>
+                      </a:solidFill>
+                    </a:lnT>
+                    <a:lnB w="6350">
+                      <a:solidFill>
+                        <a:srgbClr val="C9DED1"/>
+                      </a:solidFill>
+                    </a:lnB>
+                    <a:solidFill>
+                      <a:srgbClr val="FFFFFF"/>
+                    </a:solidFill>
+                  </a:tcPr>
+                </a:tc>
+                <a:tc>
+                  <a:txBody>
+                    <a:bodyPr/>
+                    <a:lstStyle/>
+                    <a:p>
+                      <a:pPr marL="0" indent="0" algn="l">
+                        <a:lnSpc>
+                          <a:spcPct val="100000"/>
+                        </a:lnSpc>
+                        <a:spcBef>
+                          <a:spcPts val="0"/>
+                        </a:spcBef>
+                        <a:spcAft>
+                          <a:spcPts val="0"/>
+                        </a:spcAft>
+                        <a:buNone/>
+                      </a:pPr>
+                      <a:r>
+                        <a:rPr lang="pt-BR" sz="2400" b="0" dirty="0">
+                          <a:solidFill>
+                            <a:srgbClr val="3A3A3A"/>
+                          </a:solidFill>
+                          <a:latin typeface="Montserrat"/>
+                        </a:rPr>
+                        <a:t>CNES</a:t>
+                      </a:r>
+                    </a:p>
+                  </a:txBody>
+                  <a:tcPr marL="73152" marR="73152" marT="36576" marB="36576" anchor="ctr">
+                    <a:lnL w="6350">
+                      <a:solidFill>
+                        <a:srgbClr val="C9DED1"/>
+                      </a:solidFill>
+                    </a:lnL>
+                    <a:lnR w="6350">
+                      <a:solidFill>
+                        <a:srgbClr val="C9DED1"/>
+                      </a:solidFill>
+                    </a:lnR>
+                    <a:lnT w="6350">
+                      <a:solidFill>
+                        <a:srgbClr val="C9DED1"/>
+                      </a:solidFill>
+                    </a:lnT>
+                    <a:lnB w="6350">
+                      <a:solidFill>
+                        <a:srgbClr val="C9DED1"/>
+                      </a:solidFill>
+                    </a:lnB>
+                    <a:solidFill>
+                      <a:srgbClr val="FFFFFF"/>
+                    </a:solidFill>
+                  </a:tcPr>
+                </a:tc>
+              </a:tr>
+              <a:tr h="732826">
+                <a:tc>
+                  <a:txBody>
+                    <a:bodyPr/>
+                    <a:lstStyle/>
+                    <a:p>
+                      <a:pPr marL="0" indent="0" algn="l">
+                        <a:lnSpc>
+                          <a:spcPct val="100000"/>
+                        </a:lnSpc>
+                        <a:spcBef>
+                          <a:spcPts val="0"/>
+                        </a:spcBef>
+                        <a:spcAft>
+                          <a:spcPts val="0"/>
+                        </a:spcAft>
+                        <a:buNone/>
+                      </a:pPr>
+                      <a:r>
+                        <a:rPr lang="pt-BR" sz="2400" b="1" dirty="0">
+                          <a:solidFill>
+                            <a:srgbClr val="3A3A3A"/>
+                          </a:solidFill>
+                          <a:latin typeface="Montserrat"/>
+                        </a:rPr>
+                        <a:t>Vagas, bolsa</a:t>
+                      </a:r>
+                    </a:p>
+                  </a:txBody>
+                  <a:tcPr marL="73152" marR="73152" marT="36576" marB="36576" anchor="ctr">
+                    <a:lnL w="6350">
+                      <a:solidFill>
+                        <a:srgbClr val="C9DED1"/>
+                      </a:solidFill>
+                    </a:lnL>
+                    <a:lnR w="6350">
+                      <a:solidFill>
+                        <a:srgbClr val="C9DED1"/>
+                      </a:solidFill>
+                    </a:lnR>
+                    <a:lnT w="6350">
+                      <a:solidFill>
+                        <a:srgbClr val="C9DED1"/>
+                      </a:solidFill>
+                    </a:lnT>
+                    <a:lnB w="6350">
+                      <a:solidFill>
+                        <a:srgbClr val="C9DED1"/>
+                      </a:solidFill>
+                    </a:lnB>
+                    <a:solidFill>
+                      <a:srgbClr val="F3F7F3"/>
+                    </a:solidFill>
+                  </a:tcPr>
+                </a:tc>
+                <a:tc>
+                  <a:txBody>
+                    <a:bodyPr/>
+                    <a:lstStyle/>
+                    <a:p>
+                      <a:pPr marL="0" indent="0" algn="l">
+                        <a:lnSpc>
+                          <a:spcPct val="100000"/>
+                        </a:lnSpc>
+                        <a:spcBef>
+                          <a:spcPts val="0"/>
+                        </a:spcBef>
+                        <a:spcAft>
+                          <a:spcPts val="0"/>
+                        </a:spcAft>
+                        <a:buNone/>
+                      </a:pPr>
+                      <a:r>
+                        <a:rPr lang="pt-BR" sz="2400" b="0" dirty="0">
+                          <a:solidFill>
+                            <a:srgbClr val="3A3A3A"/>
+                          </a:solidFill>
+                          <a:latin typeface="Montserrat"/>
+                        </a:rPr>
+                        <a:t>quadros SGTES/MS</a:t>
+                      </a:r>
+                    </a:p>
+                  </a:txBody>
+                  <a:tcPr marL="73152" marR="73152" marT="36576" marB="36576" anchor="ctr">
+                    <a:lnL w="6350">
+                      <a:solidFill>
+                        <a:srgbClr val="C9DED1"/>
+                      </a:solidFill>
+                    </a:lnL>
+                    <a:lnR w="6350">
+                      <a:solidFill>
+                        <a:srgbClr val="C9DED1"/>
+                      </a:solidFill>
+                    </a:lnR>
+                    <a:lnT w="6350">
+                      <a:solidFill>
+                        <a:srgbClr val="C9DED1"/>
+                      </a:solidFill>
+                    </a:lnT>
+                    <a:lnB w="6350">
+                      <a:solidFill>
+                        <a:srgbClr val="C9DED1"/>
+                      </a:solidFill>
+                    </a:lnB>
+                    <a:solidFill>
+                      <a:srgbClr val="F3F7F3"/>
+                    </a:solidFill>
+                  </a:tcPr>
+                </a:tc>
+              </a:tr>
+              <a:tr h="732826">
                 <a:tc>
                   <a:txBody>
                     <a:bodyPr/>
@@ -16607,7 +16659,7 @@
                   </a:tcPr>
                 </a:tc>
               </a:tr>
-              <a:tr h="641223">
+              <a:tr h="732826">
                 <a:tc>
                   <a:txBody>
                     <a:bodyPr/>
@@ -16632,7 +16684,7 @@
                           </a:solidFill>
                           <a:latin typeface="Montserrat"/>
                         </a:rPr>
-                        <a:t>Preenchimento, tipo de vaga</a:t>
+                        <a:t>Distância, UF</a:t>
                       </a:r>
                     </a:p>
                   </a:txBody>
@@ -16686,7 +16738,7 @@
                           </a:solidFill>
                           <a:latin typeface="Montserrat"/>
                         </a:rPr>
-                        <a:t>quadros SGTES/MS</a:t>
+                        <a:t>IBGE</a:t>
                       </a:r>
                     </a:p>
                   </a:txBody>
@@ -16717,227 +16769,7 @@
                   </a:tcPr>
                 </a:tc>
               </a:tr>
-              <a:tr h="641223">
-                <a:tc>
-                  <a:txBody>
-                    <a:bodyPr/>
-                    <a:lstStyle/>
-                    <a:p>
-                      <a:pPr marL="0" indent="0" algn="l">
-                        <a:lnSpc>
-                          <a:spcPct val="100000"/>
-                        </a:lnSpc>
-                        <a:spcBef>
-                          <a:spcPts val="0"/>
-                        </a:spcBef>
-                        <a:spcAft>
-                          <a:spcPts val="0"/>
-                        </a:spcAft>
-                        <a:buNone/>
-                      </a:pPr>
-                      <a:r>
-                        <a:rPr lang="pt-BR" sz="2400" b="1" dirty="0">
-                          <a:solidFill>
-                            <a:srgbClr val="3A3A3A"/>
-                          </a:solidFill>
-                          <a:latin typeface="Montserrat"/>
-                        </a:rPr>
-                        <a:t>1ª opção, origem</a:t>
-                      </a:r>
-                    </a:p>
-                  </a:txBody>
-                  <a:tcPr marL="73152" marR="73152" marT="36576" marB="36576" anchor="ctr">
-                    <a:lnL w="6350">
-                      <a:solidFill>
-                        <a:srgbClr val="C9DED1"/>
-                      </a:solidFill>
-                    </a:lnL>
-                    <a:lnR w="6350">
-                      <a:solidFill>
-                        <a:srgbClr val="C9DED1"/>
-                      </a:solidFill>
-                    </a:lnR>
-                    <a:lnT w="6350">
-                      <a:solidFill>
-                        <a:srgbClr val="C9DED1"/>
-                      </a:solidFill>
-                    </a:lnT>
-                    <a:lnB w="6350">
-                      <a:solidFill>
-                        <a:srgbClr val="C9DED1"/>
-                      </a:solidFill>
-                    </a:lnB>
-                    <a:solidFill>
-                      <a:srgbClr val="FFFFFF"/>
-                    </a:solidFill>
-                  </a:tcPr>
-                </a:tc>
-                <a:tc>
-                  <a:txBody>
-                    <a:bodyPr/>
-                    <a:lstStyle/>
-                    <a:p>
-                      <a:pPr marL="0" indent="0" algn="l">
-                        <a:lnSpc>
-                          <a:spcPct val="100000"/>
-                        </a:lnSpc>
-                        <a:spcBef>
-                          <a:spcPts val="0"/>
-                        </a:spcBef>
-                        <a:spcAft>
-                          <a:spcPts val="0"/>
-                        </a:spcAft>
-                        <a:buNone/>
-                      </a:pPr>
-                      <a:r>
-                        <a:rPr lang="pt-BR" sz="2400" b="0" dirty="0">
-                          <a:solidFill>
-                            <a:srgbClr val="3A3A3A"/>
-                          </a:solidFill>
-                          <a:latin typeface="Montserrat"/>
-                        </a:rPr>
-                        <a:t>editais + CNES</a:t>
-                      </a:r>
-                    </a:p>
-                  </a:txBody>
-                  <a:tcPr marL="73152" marR="73152" marT="36576" marB="36576" anchor="ctr">
-                    <a:lnL w="6350">
-                      <a:solidFill>
-                        <a:srgbClr val="C9DED1"/>
-                      </a:solidFill>
-                    </a:lnL>
-                    <a:lnR w="6350">
-                      <a:solidFill>
-                        <a:srgbClr val="C9DED1"/>
-                      </a:solidFill>
-                    </a:lnR>
-                    <a:lnT w="6350">
-                      <a:solidFill>
-                        <a:srgbClr val="C9DED1"/>
-                      </a:solidFill>
-                    </a:lnT>
-                    <a:lnB w="6350">
-                      <a:solidFill>
-                        <a:srgbClr val="C9DED1"/>
-                      </a:solidFill>
-                    </a:lnB>
-                    <a:solidFill>
-                      <a:srgbClr val="FFFFFF"/>
-                    </a:solidFill>
-                  </a:tcPr>
-                </a:tc>
-              </a:tr>
-              <a:tr h="641223">
-                <a:tc>
-                  <a:txBody>
-                    <a:bodyPr/>
-                    <a:lstStyle/>
-                    <a:p>
-                      <a:pPr marL="0" indent="0" algn="l">
-                        <a:lnSpc>
-                          <a:spcPct val="100000"/>
-                        </a:lnSpc>
-                        <a:spcBef>
-                          <a:spcPts val="0"/>
-                        </a:spcBef>
-                        <a:spcAft>
-                          <a:spcPts val="0"/>
-                        </a:spcAft>
-                        <a:buNone/>
-                      </a:pPr>
-                      <a:r>
-                        <a:rPr lang="pt-BR" sz="2400" b="1" dirty="0">
-                          <a:solidFill>
-                            <a:srgbClr val="3A3A3A"/>
-                          </a:solidFill>
-                          <a:latin typeface="Montserrat"/>
-                        </a:rPr>
-                        <a:t>Horas</a:t>
-                      </a:r>
-                    </a:p>
-                  </a:txBody>
-                  <a:tcPr marL="73152" marR="73152" marT="36576" marB="36576" anchor="ctr">
-                    <a:lnL w="6350">
-                      <a:solidFill>
-                        <a:srgbClr val="C9DED1"/>
-                      </a:solidFill>
-                    </a:lnL>
-                    <a:lnR w="6350">
-                      <a:solidFill>
-                        <a:srgbClr val="C9DED1"/>
-                      </a:solidFill>
-                    </a:lnR>
-                    <a:lnT w="6350">
-                      <a:solidFill>
-                        <a:srgbClr val="C9DED1"/>
-                      </a:solidFill>
-                    </a:lnT>
-                    <a:lnB w="6350">
-                      <a:solidFill>
-                        <a:srgbClr val="C9DED1"/>
-                      </a:solidFill>
-                    </a:lnB>
-                    <a:solidFill>
-                      <a:srgbClr val="F3F7F3"/>
-                    </a:solidFill>
-                  </a:tcPr>
-                </a:tc>
-                <a:tc>
-                  <a:txBody>
-                    <a:bodyPr/>
-                    <a:lstStyle/>
-                    <a:p>
-                      <a:pPr marL="0" indent="0" algn="l">
-                        <a:lnSpc>
-                          <a:spcPct val="100000"/>
-                        </a:lnSpc>
-                        <a:spcBef>
-                          <a:spcPts val="0"/>
-                        </a:spcBef>
-                        <a:spcAft>
-                          <a:spcPts val="0"/>
-                        </a:spcAft>
-                        <a:buNone/>
-                      </a:pPr>
-                      <a:r>
-                        <a:rPr lang="pt-BR" sz="2400" b="0" dirty="0">
-                          <a:solidFill>
-                            <a:srgbClr val="3A3A3A"/>
-                          </a:solidFill>
-                          <a:latin typeface="Montserrat"/>
-                        </a:rPr>
-                        <a:t>CNES</a:t>
-                      </a:r>
-                    </a:p>
-                  </a:txBody>
-                  <a:tcPr marL="73152" marR="73152" marT="36576" marB="36576" anchor="ctr">
-                    <a:lnL w="6350">
-                      <a:solidFill>
-                        <a:srgbClr val="C9DED1"/>
-                      </a:solidFill>
-                    </a:lnL>
-                    <a:lnR w="6350">
-                      <a:solidFill>
-                        <a:srgbClr val="C9DED1"/>
-                      </a:solidFill>
-                    </a:lnR>
-                    <a:lnT w="6350">
-                      <a:solidFill>
-                        <a:srgbClr val="C9DED1"/>
-                      </a:solidFill>
-                    </a:lnT>
-                    <a:lnB w="6350">
-                      <a:solidFill>
-                        <a:srgbClr val="C9DED1"/>
-                      </a:solidFill>
-                    </a:lnB>
-                    <a:solidFill>
-                      <a:srgbClr val="F3F7F3"/>
-                    </a:solidFill>
-                  </a:tcPr>
-                </a:tc>
-              </a:tr>
-              <a:tr h="641223">
+              <a:tr h="732826">
                 <a:tc>
                   <a:txBody>
                     <a:bodyPr/>
@@ -16962,7 +16794,7 @@
                           </a:solidFill>
                           <a:latin typeface="Montserrat"/>
                         </a:rPr>
-                        <a:t>Capital, porte</a:t>
+                        <a:t>Porte, capital</a:t>
                       </a:r>
                     </a:p>
                   </a:txBody>
@@ -17047,116 +16879,6 @@
                   </a:tcPr>
                 </a:tc>
               </a:tr>
-              <a:tr h="641223">
-                <a:tc>
-                  <a:txBody>
-                    <a:bodyPr/>
-                    <a:lstStyle/>
-                    <a:p>
-                      <a:pPr marL="0" indent="0" algn="l">
-                        <a:lnSpc>
-                          <a:spcPct val="100000"/>
-                        </a:lnSpc>
-                        <a:spcBef>
-                          <a:spcPts val="0"/>
-                        </a:spcBef>
-                        <a:spcAft>
-                          <a:spcPts val="0"/>
-                        </a:spcAft>
-                        <a:buNone/>
-                      </a:pPr>
-                      <a:r>
-                        <a:rPr lang="pt-BR" sz="2400" b="0" i="1" dirty="0">
-                          <a:solidFill>
-                            <a:srgbClr val="8A8A85"/>
-                          </a:solidFill>
-                          <a:latin typeface="Montserrat"/>
-                        </a:rPr>
-                        <a:t>Regras no corte</a:t>
-                      </a:r>
-                    </a:p>
-                  </a:txBody>
-                  <a:tcPr marL="73152" marR="73152" marT="36576" marB="36576" anchor="ctr">
-                    <a:lnL w="6350">
-                      <a:solidFill>
-                        <a:srgbClr val="C9DED1"/>
-                      </a:solidFill>
-                    </a:lnL>
-                    <a:lnR w="6350">
-                      <a:solidFill>
-                        <a:srgbClr val="C9DED1"/>
-                      </a:solidFill>
-                    </a:lnR>
-                    <a:lnT w="6350">
-                      <a:solidFill>
-                        <a:srgbClr val="C9DED1"/>
-                      </a:solidFill>
-                    </a:lnT>
-                    <a:lnB w="6350">
-                      <a:solidFill>
-                        <a:srgbClr val="C9DED1"/>
-                      </a:solidFill>
-                    </a:lnB>
-                    <a:solidFill>
-                      <a:srgbClr val="F3F7F3"/>
-                    </a:solidFill>
-                  </a:tcPr>
-                </a:tc>
-                <a:tc>
-                  <a:txBody>
-                    <a:bodyPr/>
-                    <a:lstStyle/>
-                    <a:p>
-                      <a:pPr marL="0" indent="0" algn="l">
-                        <a:lnSpc>
-                          <a:spcPct val="100000"/>
-                        </a:lnSpc>
-                        <a:spcBef>
-                          <a:spcPts val="0"/>
-                        </a:spcBef>
-                        <a:spcAft>
-                          <a:spcPts val="0"/>
-                        </a:spcAft>
-                        <a:buNone/>
-                      </a:pPr>
-                      <a:r>
-                        <a:rPr lang="pt-BR" sz="2400" b="0" i="1" dirty="0">
-                          <a:solidFill>
-                            <a:srgbClr val="8A8A85"/>
-                          </a:solidFill>
-                          <a:latin typeface="Montserrat"/>
-                        </a:rPr>
-                        <a:t>portarias</a:t>
-                      </a:r>
-                    </a:p>
-                  </a:txBody>
-                  <a:tcPr marL="73152" marR="73152" marT="36576" marB="36576" anchor="ctr">
-                    <a:lnL w="6350">
-                      <a:solidFill>
-                        <a:srgbClr val="C9DED1"/>
-                      </a:solidFill>
-                    </a:lnL>
-                    <a:lnR w="6350">
-                      <a:solidFill>
-                        <a:srgbClr val="C9DED1"/>
-                      </a:solidFill>
-                    </a:lnR>
-                    <a:lnT w="6350">
-                      <a:solidFill>
-                        <a:srgbClr val="C9DED1"/>
-                      </a:solidFill>
-                    </a:lnT>
-                    <a:lnB w="6350">
-                      <a:solidFill>
-                        <a:srgbClr val="C9DED1"/>
-                      </a:solidFill>
-                    </a:lnB>
-                    <a:solidFill>
-                      <a:srgbClr val="F3F7F3"/>
-                    </a:solidFill>
-                  </a:tcPr>
-                </a:tc>
-              </a:tr>
             </a:tbl>
           </a:graphicData>
         </a:graphic>
@@ -17214,7 +16936,7 @@
                 </a:solidFill>
                 <a:latin typeface="Montserrat"/>
               </a:rPr>
-              <a:t>output/apresentacao_banca2/tabela_fontes.csv; auditorias 16, 18, 35 e 36; portão G1.</a:t>
+              <a:t>output/apresentacao_banca2/tabela_fontes.csv; portão G1; auditorias 16, 36 e 41.</a:t>
             </a:r>
           </a:p>
         </p:txBody>
@@ -17457,7 +17179,7 @@
                 </a:solidFill>
                 <a:latin typeface="Montserrat"/>
               </a:rPr>
-              <a:t> = edital de vagas: 2025, início e meio de 2026</a:t>
+              <a:t> = edital: 2025, início e meio de 2026</a:t>
             </a:r>
           </a:p>
         </p:txBody>
@@ -17479,10 +17201,10 @@
             <a:tbl>
               <a:tblPr firstRow="1" bandRow="1"/>
               <a:tblGrid>
-                <a:gridCol w="5254690"/>
-                <a:gridCol w="2113301"/>
-                <a:gridCol w="2113301"/>
-                <a:gridCol w="2113301"/>
+                <a:gridCol w="4819112"/>
+                <a:gridCol w="2191494"/>
+                <a:gridCol w="2291993"/>
+                <a:gridCol w="2291993"/>
               </a:tblGrid>
               <a:tr h="1177290">
                 <a:tc>
@@ -17718,7 +17440,7 @@
                           </a:solidFill>
                           <a:latin typeface="Montserrat"/>
                         </a:rPr>
-                        <a:t>Municípios</a:t>
+                        <a:t>Células</a:t>
                       </a:r>
                     </a:p>
                   </a:txBody>
@@ -17772,7 +17494,7 @@
                           </a:solidFill>
                           <a:latin typeface="Montserrat"/>
                         </a:rPr>
-                        <a:t>368</a:t>
+                        <a:t>1.295</a:t>
                       </a:r>
                     </a:p>
                   </a:txBody>
@@ -17826,7 +17548,7 @@
                           </a:solidFill>
                           <a:latin typeface="Montserrat"/>
                         </a:rPr>
-                        <a:t>454</a:t>
+                        <a:t>1.547</a:t>
                       </a:r>
                     </a:p>
                   </a:txBody>
@@ -17880,7 +17602,7 @@
                           </a:solidFill>
                           <a:latin typeface="Montserrat"/>
                         </a:rPr>
-                        <a:t>748</a:t>
+                        <a:t>2.293</a:t>
                       </a:r>
                     </a:p>
                   </a:txBody>
@@ -17936,7 +17658,7 @@
                           </a:solidFill>
                           <a:latin typeface="Montserrat"/>
                         </a:rPr>
-                        <a:t>Células</a:t>
+                        <a:t>Candidatos, 1ª opção</a:t>
                       </a:r>
                     </a:p>
                   </a:txBody>
@@ -17990,7 +17712,7 @@
                           </a:solidFill>
                           <a:latin typeface="Montserrat"/>
                         </a:rPr>
-                        <a:t>1.295</a:t>
+                        <a:t>993</a:t>
                       </a:r>
                     </a:p>
                   </a:txBody>
@@ -18044,7 +17766,7 @@
                           </a:solidFill>
                           <a:latin typeface="Montserrat"/>
                         </a:rPr>
-                        <a:t>1.547</a:t>
+                        <a:t>2.140</a:t>
                       </a:r>
                     </a:p>
                   </a:txBody>
@@ -18098,7 +17820,7 @@
                           </a:solidFill>
                           <a:latin typeface="Montserrat"/>
                         </a:rPr>
-                        <a:t>2.293</a:t>
+                        <a:t>2.581</a:t>
                       </a:r>
                     </a:p>
                   </a:txBody>
@@ -18154,7 +17876,7 @@
                           </a:solidFill>
                           <a:latin typeface="Montserrat"/>
                         </a:rPr>
-                        <a:t>Preenchidas (1ª chamada)</a:t>
+                        <a:t>Com origem</a:t>
                       </a:r>
                     </a:p>
                   </a:txBody>
@@ -18208,7 +17930,7 @@
                           </a:solidFill>
                           <a:latin typeface="Montserrat"/>
                         </a:rPr>
-                        <a:t>30,3%</a:t>
+                        <a:t>915</a:t>
                       </a:r>
                     </a:p>
                   </a:txBody>
@@ -18262,7 +17984,7 @@
                           </a:solidFill>
                           <a:latin typeface="Montserrat"/>
                         </a:rPr>
-                        <a:t>47,1%</a:t>
+                        <a:t>2.032</a:t>
                       </a:r>
                     </a:p>
                   </a:txBody>
@@ -18316,7 +18038,7 @@
                           </a:solidFill>
                           <a:latin typeface="Montserrat"/>
                         </a:rPr>
-                        <a:t>21,7%</a:t>
+                        <a:t>2.474</a:t>
                       </a:r>
                     </a:p>
                   </a:txBody>
@@ -18404,7 +18126,7 @@
                 </a:solidFill>
                 <a:latin typeface="Montserrat"/>
               </a:rPr>
-              <a:t>output/apresentacao_banca2/tabela_descritiva_ciclos.csv; cronologia_ciclos.csv.</a:t>
+              <a:t>output/apresentacao_banca2/tabela_descritiva_ciclos.csv; cronologia_ciclos.csv; numeros_banca2.json (amostra P1).</a:t>
             </a:r>
           </a:p>
         </p:txBody>
@@ -18602,6 +18324,64 @@
         </p:nvSpPr>
         <p:spPr>
           <a:xfrm>
+            <a:off x="292608" y="5212080"/>
+            <a:ext cx="11594592" cy="420624"/>
+          </a:xfrm>
+          <a:prstGeom prst="rect">
+            <a:avLst/>
+          </a:prstGeom>
+          <a:noFill/>
+          <a:ln>
+            <a:noFill/>
+          </a:ln>
+        </p:spPr>
+        <p:txBody>
+          <a:bodyPr wrap="square" lIns="164592" tIns="18288" rIns="164592" bIns="18288" rtlCol="0" anchor="ctr">
+            <a:noAutofit/>
+          </a:bodyPr>
+          <a:lstStyle/>
+          <a:p>
+            <a:pPr marL="0" indent="0" algn="l">
+              <a:lnSpc>
+                <a:spcPct val="100000"/>
+              </a:lnSpc>
+              <a:spcBef>
+                <a:spcPts val="0"/>
+              </a:spcBef>
+              <a:spcAft>
+                <a:spcPts val="0"/>
+              </a:spcAft>
+              <a:buNone/>
+            </a:pPr>
+            <a:r>
+              <a:rPr lang="pt-BR" sz="1800" b="1" dirty="0">
+                <a:solidFill>
+                  <a:srgbClr val="114719"/>
+                </a:solidFill>
+                <a:latin typeface="Montserrat"/>
+              </a:rPr>
+              <a:t>Como ler:</a:t>
+            </a:r>
+            <a:r>
+              <a:rPr lang="pt-BR" sz="1800" b="0" dirty="0">
+                <a:solidFill>
+                  <a:srgbClr val="3A3A3A"/>
+                </a:solidFill>
+                <a:latin typeface="Montserrat"/>
+              </a:rPr>
+              <a:t> um ponto por município do ciclo 1; a bolsa salta nos cortes.</a:t>
+            </a:r>
+          </a:p>
+        </p:txBody>
+      </p:sp>
+      <p:sp>
+        <p:nvSpPr>
+          <p:cNvPr id="102" name="Linha"/>
+          <p:cNvSpPr/>
+          <p:nvPr/>
+        </p:nvSpPr>
+        <p:spPr>
+          <a:xfrm>
             <a:off x="292608" y="5687568"/>
             <a:ext cx="11594592" cy="420624"/>
           </a:xfrm>
@@ -18647,14 +18427,14 @@
                 </a:solidFill>
                 <a:latin typeface="Montserrat"/>
               </a:rPr>
-              <a:t> a regra reproduz a faixa de 368 de 368 e de 454 de 454 municípios.</a:t>
+              <a:t> reproduz 368/368 e 454/454 municípios.</a:t>
             </a:r>
           </a:p>
         </p:txBody>
       </p:sp>
       <p:pic>
         <p:nvPicPr>
-          <p:cNvPr id="102" name="Figura" descr="Bolsa anunciada contra o IVS 2010 oficial, ciclo 1, um ponto por município"/>
+          <p:cNvPr id="103" name="Figura" descr="Bolsa anunciada contra o IVS 2010 oficial, ciclo 1, um ponto por município"/>
           <p:cNvPicPr>
             <a:picLocks noChangeAspect="1"/>
           </p:cNvPicPr>
@@ -18668,8 +18448,8 @@
         </p:blipFill>
         <p:spPr>
           <a:xfrm>
-            <a:off x="292608" y="948448"/>
-            <a:ext cx="11594592" cy="4467328"/>
+            <a:off x="536495" y="804672"/>
+            <a:ext cx="11106819" cy="4279392"/>
           </a:xfrm>
           <a:prstGeom prst="rect">
             <a:avLst/>
@@ -18683,7 +18463,7 @@
       </p:pic>
       <p:sp>
         <p:nvSpPr>
-          <p:cNvPr id="103" name="Fontes"/>
+          <p:cNvPr id="104" name="Fontes"/>
           <p:cNvSpPr txBox="1"/>
           <p:nvPr/>
         </p:nvSpPr>
@@ -18797,7 +18577,7 @@
                 </a:solidFill>
                 <a:latin typeface="Montserrat"/>
               </a:rPr>
-              <a:t>H1 · Dados crus, só vagas imediatas</a:t>
+              <a:t>Onde escolhem: perto de onde já trabalham</a:t>
             </a:r>
           </a:p>
         </p:txBody>
@@ -18924,62 +18704,27 @@
           </a:p>
         </p:txBody>
       </p:sp>
-      <p:pic>
-        <p:nvPicPr>
-          <p:cNvPr id="101" name="Figura" descr="Só células com vaga imediata: médias por faixa de 0,010 de IVS e reta local de cada lado, nos cortes 0,300 e 0,400"/>
-          <p:cNvPicPr>
-            <a:picLocks noChangeAspect="1"/>
-          </p:cNvPicPr>
-          <p:nvPr/>
-        </p:nvPicPr>
-        <p:blipFill>
-          <a:blip r:embed="rId3"/>
-          <a:stretch>
-            <a:fillRect/>
-          </a:stretch>
-        </p:blipFill>
-        <p:spPr>
-          <a:xfrm>
-            <a:off x="292608" y="1227563"/>
-            <a:ext cx="8211312" cy="4439449"/>
-          </a:xfrm>
-          <a:prstGeom prst="rect">
-            <a:avLst/>
-          </a:prstGeom>
-          <a:ln w="6350">
-            <a:solidFill>
-              <a:srgbClr val="DDE7DF"/>
-            </a:solidFill>
-          </a:ln>
-        </p:spPr>
-      </p:pic>
       <p:sp>
         <p:nvSpPr>
-          <p:cNvPr id="102" name="Linha"/>
+          <p:cNvPr id="101" name="Linha"/>
           <p:cNvSpPr/>
           <p:nvPr/>
         </p:nvSpPr>
         <p:spPr>
           <a:xfrm>
-            <a:off x="8778240" y="1227563"/>
-            <a:ext cx="3108960" cy="2137429"/>
+            <a:off x="292608" y="5687568"/>
+            <a:ext cx="11594592" cy="420624"/>
           </a:xfrm>
-          <a:prstGeom prst="roundRect">
-            <a:avLst>
-              <a:gd name="adj" fmla="val 6000"/>
-            </a:avLst>
+          <a:prstGeom prst="rect">
+            <a:avLst/>
           </a:prstGeom>
-          <a:solidFill>
-            <a:srgbClr val="F4F8F5"/>
-          </a:solidFill>
-          <a:ln w="12700">
-            <a:solidFill>
-              <a:srgbClr val="056429"/>
-            </a:solidFill>
+          <a:noFill/>
+          <a:ln>
+            <a:noFill/>
           </a:ln>
         </p:spPr>
         <p:txBody>
-          <a:bodyPr wrap="square" lIns="182880" tIns="54864" rIns="182880" bIns="54864" rtlCol="0" anchor="ctr">
+          <a:bodyPr wrap="square" lIns="164592" tIns="18288" rIns="164592" bIns="18288" rtlCol="0" anchor="ctr">
             <a:noAutofit/>
           </a:bodyPr>
           <a:lstStyle/>
@@ -18997,84 +18742,58 @@
               <a:buNone/>
             </a:pPr>
             <a:r>
-              <a:rPr lang="pt-BR" sz="1600" b="1" dirty="0">
+              <a:rPr lang="pt-BR" sz="1800" b="1" dirty="0">
                 <a:solidFill>
                   <a:srgbClr val="114719"/>
                 </a:solidFill>
                 <a:latin typeface="Montserrat"/>
               </a:rPr>
-              <a:t>Em 0,300</a:t>
-            </a:r>
-            <a:r>
-              <a:rPr lang="pt-BR" sz="1600" b="0" dirty="0">
+              <a:t>79%</a:t>
+            </a:r>
+            <a:r>
+              <a:rPr lang="pt-BR" sz="1800" b="0" dirty="0">
                 <a:solidFill>
                   <a:srgbClr val="3A3A3A"/>
                 </a:solidFill>
                 <a:latin typeface="Montserrat"/>
               </a:rPr>
-              <a:t>, a reta de baixo sobe forte até o corte e chega alta.</a:t>
+              <a:t> põem a 1ª opção na UF de origem; mediana: 51 km (descritivo).</a:t>
             </a:r>
           </a:p>
         </p:txBody>
       </p:sp>
-      <p:sp>
-        <p:nvSpPr>
-          <p:cNvPr id="103" name="Linha"/>
-          <p:cNvSpPr/>
+      <p:pic>
+        <p:nvPicPr>
+          <p:cNvPr id="102" name="Figura" descr="1ª opção em relação à origem do candidato (mesma UF, mesma região de saúde, mesmo município) e distância da origem à 1ª opção"/>
+          <p:cNvPicPr>
+            <a:picLocks noChangeAspect="1"/>
+          </p:cNvPicPr>
           <p:nvPr/>
-        </p:nvSpPr>
+        </p:nvPicPr>
+        <p:blipFill>
+          <a:blip r:embed="rId3"/>
+          <a:stretch>
+            <a:fillRect/>
+          </a:stretch>
+        </p:blipFill>
         <p:spPr>
           <a:xfrm>
-            <a:off x="8778240" y="3529584"/>
-            <a:ext cx="3108960" cy="2137429"/>
+            <a:off x="1645125" y="804672"/>
+            <a:ext cx="8889558" cy="4754880"/>
           </a:xfrm>
-          <a:prstGeom prst="roundRect">
-            <a:avLst>
-              <a:gd name="adj" fmla="val 6000"/>
-            </a:avLst>
+          <a:prstGeom prst="rect">
+            <a:avLst/>
           </a:prstGeom>
-          <a:solidFill>
-            <a:srgbClr val="F4F8F5"/>
-          </a:solidFill>
-          <a:ln w="12700">
+          <a:ln w="6350">
             <a:solidFill>
-              <a:srgbClr val="056429"/>
+              <a:srgbClr val="DDE7DF"/>
             </a:solidFill>
           </a:ln>
         </p:spPr>
-        <p:txBody>
-          <a:bodyPr wrap="square" lIns="182880" tIns="54864" rIns="182880" bIns="54864" rtlCol="0" anchor="ctr">
-            <a:noAutofit/>
-          </a:bodyPr>
-          <a:lstStyle/>
-          <a:p>
-            <a:pPr marL="0" indent="0" algn="l">
-              <a:lnSpc>
-                <a:spcPct val="100000"/>
-              </a:lnSpc>
-              <a:spcBef>
-                <a:spcPts val="0"/>
-              </a:spcBef>
-              <a:spcAft>
-                <a:spcPts val="0"/>
-              </a:spcAft>
-              <a:buNone/>
-            </a:pPr>
-            <a:r>
-              <a:rPr lang="pt-BR" sz="1600" b="0" dirty="0">
-                <a:solidFill>
-                  <a:srgbClr val="3A3A3A"/>
-                </a:solidFill>
-                <a:latin typeface="Montserrat"/>
-              </a:rPr>
-              <a:t>Dados crus; com curso e ciclo, a HI-1 fica bem menor.</a:t>
-            </a:r>
-          </a:p>
-        </p:txBody>
-      </p:sp>
+      </p:pic>
       <p:sp>
         <p:nvSpPr>
-          <p:cNvPr id="104" name="Fontes"/>
+          <p:cNvPr id="103" name="Fontes"/>
           <p:cNvSpPr txBox="1"/>
           <p:nvPr/>
         </p:nvSpPr>
@@ -19125,7 +18844,7 @@
                 </a:solidFill>
                 <a:latin typeface="Montserrat"/>
               </a:rPr>
-              <a:t>output/rdd_bolsa/HI_figuras/HI_scatter_imediatas.png, HI_resumo.json e HI_estimativas.csv (adendo 48b; doc 57n; auditoria 38); doc 57m (auditoria 37); figura usada sem redesenho.</a:t>
+              <a:t>output/rdd_bolsa/G1_distancias_opcoes.parquet e G1_candidatos_origem.parquet (portão G1); output/apresentacao_banca2/exp_escolha_origem.png.</a:t>
             </a:r>
           </a:p>
         </p:txBody>
@@ -19188,7 +18907,7 @@
                 </a:solidFill>
                 <a:latin typeface="Montserrat"/>
               </a:rPr>
-              <a:t>H1 · O salto no corte, só com vagas imediatas</a:t>
+              <a:t>Metodologia: logit condicional da 1ª opção</a:t>
             </a:r>
           </a:p>
         </p:txBody>
@@ -19363,7 +19082,7 @@
                 </a:solidFill>
                 <a:latin typeface="Montserrat"/>
               </a:rPr>
-              <a:t>alocados = ciclo + salto × lado de bolsa maior + retas por lado e ciclo + ciclo × vagas imediatas</a:t>
+              <a:t>chance da 1ª opção = bolsa + distância + origem (UF, região, município)</a:t>
             </a:r>
           </a:p>
         </p:txBody>
@@ -19377,7 +19096,7 @@
         <p:spPr>
           <a:xfrm>
             <a:off x="292608" y="2724912"/>
-            <a:ext cx="2194560" cy="999744"/>
+            <a:ext cx="2194560" cy="1591056"/>
           </a:xfrm>
           <a:prstGeom prst="roundRect">
             <a:avLst>
@@ -19416,7 +19135,7 @@
                 </a:solidFill>
                 <a:latin typeface="Montserrat"/>
               </a:rPr>
-              <a:t>h = 0,050</a:t>
+              <a:t>Comparação</a:t>
             </a:r>
           </a:p>
         </p:txBody>
@@ -19430,7 +19149,7 @@
         <p:spPr>
           <a:xfrm>
             <a:off x="2624328" y="2724912"/>
-            <a:ext cx="9262872" cy="999744"/>
+            <a:ext cx="9262872" cy="1591056"/>
           </a:xfrm>
           <a:prstGeom prst="roundRect">
             <a:avLst>
@@ -19471,21 +19190,21 @@
                 </a:solidFill>
                 <a:latin typeface="Montserrat"/>
               </a:rPr>
-              <a:t>triangular; erro-padrão por município</a:t>
+              <a:t>o candidato consigo mesmo, entre vagas do seu curso</a:t>
             </a:r>
           </a:p>
         </p:txBody>
       </p:sp>
       <p:sp>
         <p:nvSpPr>
-          <p:cNvPr id="104" name="Rótulo plano B"/>
+          <p:cNvPr id="104" name="Rótulo"/>
           <p:cNvSpPr/>
           <p:nvPr/>
         </p:nvSpPr>
         <p:spPr>
           <a:xfrm>
-            <a:off x="292608" y="3907536"/>
-            <a:ext cx="2194560" cy="999744"/>
+            <a:off x="292608" y="4498848"/>
+            <a:ext cx="2194560" cy="1591056"/>
           </a:xfrm>
           <a:prstGeom prst="roundRect">
             <a:avLst>
@@ -19493,7 +19212,7 @@
             </a:avLst>
           </a:prstGeom>
           <a:solidFill>
-            <a:srgbClr val="A3A39E"/>
+            <a:srgbClr val="114719"/>
           </a:solidFill>
           <a:ln>
             <a:noFill/>
@@ -19524,21 +19243,21 @@
                 </a:solidFill>
                 <a:latin typeface="Montserrat"/>
               </a:rPr>
-              <a:t>H2</a:t>
+              <a:t>Teste</a:t>
             </a:r>
           </a:p>
         </p:txBody>
       </p:sp>
       <p:sp>
         <p:nvSpPr>
-          <p:cNvPr id="105" name="Item plano B"/>
+          <p:cNvPr id="105" name="Item"/>
           <p:cNvSpPr/>
           <p:nvPr/>
         </p:nvSpPr>
         <p:spPr>
           <a:xfrm>
-            <a:off x="2624328" y="3907536"/>
-            <a:ext cx="9262872" cy="999744"/>
+            <a:off x="2624328" y="4498848"/>
+            <a:ext cx="9262872" cy="1591056"/>
           </a:xfrm>
           <a:prstGeom prst="roundRect">
             <a:avLst>
@@ -19546,11 +19265,11 @@
             </a:avLst>
           </a:prstGeom>
           <a:solidFill>
-            <a:srgbClr val="F2F2F0"/>
+            <a:srgbClr val="F4F8F5"/>
           </a:solidFill>
           <a:ln w="12700">
             <a:solidFill>
-              <a:srgbClr val="C9C9C4"/>
+              <a:srgbClr val="056429"/>
             </a:solidFill>
           </a:ln>
         </p:spPr>
@@ -19575,126 +19294,18 @@
             <a:r>
               <a:rPr lang="pt-BR" sz="2000" b="0" dirty="0">
                 <a:solidFill>
-                  <a:srgbClr val="8A8A85"/>
+                  <a:srgbClr val="3A3A3A"/>
                 </a:solidFill>
                 <a:latin typeface="Montserrat"/>
               </a:rPr>
-              <a:t>logit da 1ª opção</a:t>
+              <a:t>origem pesa mais que toda a bolsa</a:t>
             </a:r>
           </a:p>
         </p:txBody>
       </p:sp>
       <p:sp>
         <p:nvSpPr>
-          <p:cNvPr id="106" name="Rótulo plano B"/>
-          <p:cNvSpPr/>
-          <p:nvPr/>
-        </p:nvSpPr>
-        <p:spPr>
-          <a:xfrm>
-            <a:off x="292608" y="5090160"/>
-            <a:ext cx="2194560" cy="999744"/>
-          </a:xfrm>
-          <a:prstGeom prst="roundRect">
-            <a:avLst>
-              <a:gd name="adj" fmla="val 10000"/>
-            </a:avLst>
-          </a:prstGeom>
-          <a:solidFill>
-            <a:srgbClr val="A3A39E"/>
-          </a:solidFill>
-          <a:ln>
-            <a:noFill/>
-          </a:ln>
-        </p:spPr>
-        <p:txBody>
-          <a:bodyPr wrap="square" lIns="73152" tIns="45720" rIns="73152" bIns="45720" rtlCol="0" anchor="ctr">
-            <a:noAutofit/>
-          </a:bodyPr>
-          <a:lstStyle/>
-          <a:p>
-            <a:pPr marL="0" indent="0" algn="ctr">
-              <a:lnSpc>
-                <a:spcPct val="100000"/>
-              </a:lnSpc>
-              <a:spcBef>
-                <a:spcPts val="0"/>
-              </a:spcBef>
-              <a:spcAft>
-                <a:spcPts val="0"/>
-              </a:spcAft>
-              <a:buNone/>
-            </a:pPr>
-            <a:r>
-              <a:rPr lang="pt-BR" sz="2000" b="1" dirty="0">
-                <a:solidFill>
-                  <a:srgbClr val="FFFFFF"/>
-                </a:solidFill>
-                <a:latin typeface="Montserrat"/>
-              </a:rPr>
-              <a:t>H3</a:t>
-            </a:r>
-          </a:p>
-        </p:txBody>
-      </p:sp>
-      <p:sp>
-        <p:nvSpPr>
-          <p:cNvPr id="107" name="Item plano B"/>
-          <p:cNvSpPr/>
-          <p:nvPr/>
-        </p:nvSpPr>
-        <p:spPr>
-          <a:xfrm>
-            <a:off x="2624328" y="5090160"/>
-            <a:ext cx="9262872" cy="999744"/>
-          </a:xfrm>
-          <a:prstGeom prst="roundRect">
-            <a:avLst>
-              <a:gd name="adj" fmla="val 6000"/>
-            </a:avLst>
-          </a:prstGeom>
-          <a:solidFill>
-            <a:srgbClr val="F2F2F0"/>
-          </a:solidFill>
-          <a:ln w="12700">
-            <a:solidFill>
-              <a:srgbClr val="C9C9C4"/>
-            </a:solidFill>
-          </a:ln>
-        </p:spPr>
-        <p:txBody>
-          <a:bodyPr wrap="square" lIns="228600" tIns="36576" rIns="228600" bIns="36576" rtlCol="0" anchor="ctr">
-            <a:noAutofit/>
-          </a:bodyPr>
-          <a:lstStyle/>
-          <a:p>
-            <a:pPr marL="0" indent="0" algn="l">
-              <a:lnSpc>
-                <a:spcPct val="102000"/>
-              </a:lnSpc>
-              <a:spcBef>
-                <a:spcPts val="0"/>
-              </a:spcBef>
-              <a:spcAft>
-                <a:spcPts val="0"/>
-              </a:spcAft>
-              <a:buNone/>
-            </a:pPr>
-            <a:r>
-              <a:rPr lang="pt-BR" sz="2000" b="0" dirty="0">
-                <a:solidFill>
-                  <a:srgbClr val="8A8A85"/>
-                </a:solidFill>
-                <a:latin typeface="Montserrat"/>
-              </a:rPr>
-              <a:t>estudo de evento</a:t>
-            </a:r>
-          </a:p>
-        </p:txBody>
-      </p:sp>
-      <p:sp>
-        <p:nvSpPr>
-          <p:cNvPr id="108" name="Fontes"/>
+          <p:cNvPr id="106" name="Fontes"/>
           <p:cNvSpPr txBox="1"/>
           <p:nvPr/>
         </p:nvSpPr>
@@ -19745,7 +19356,7 @@
                 </a:solidFill>
                 <a:latin typeface="Montserrat"/>
               </a:rPr>
-              <a:t>adendo 48b ao protocolo 48 (docs/06_execucao/48b_adendo_H1_vagas_imediatas.md); protocolos 52, 52b, 54, 59 e 60.</a:t>
+              <a:t>protocolos 52 e 52b; adendos 52c e 52e (docs/06_execucao/); docs 57a, 57i, 57p e 57x.</a:t>
             </a:r>
           </a:p>
         </p:txBody>
@@ -19808,7 +19419,7 @@
                 </a:solidFill>
                 <a:latin typeface="Montserrat"/>
               </a:rPr>
-              <a:t>H1 · RDD: as premissas e o nosso caso</a:t>
+              <a:t>Identificação: as premissas e o nosso caso</a:t>
             </a:r>
           </a:p>
         </p:txBody>
@@ -19952,10 +19563,10 @@
             <a:tbl>
               <a:tblPr firstRow="1" bandRow="1"/>
               <a:tblGrid>
-                <a:gridCol w="6534538"/>
-                <a:gridCol w="5060054"/>
+                <a:gridCol w="4591324"/>
+                <a:gridCol w="7003268"/>
               </a:tblGrid>
-              <a:tr h="854964">
+              <a:tr h="732826">
                 <a:tc>
                   <a:txBody>
                     <a:bodyPr/>
@@ -20065,7 +19676,7 @@
                   </a:tcPr>
                 </a:tc>
               </a:tr>
-              <a:tr h="854964">
+              <a:tr h="732826">
                 <a:tc>
                   <a:txBody>
                     <a:bodyPr/>
@@ -20090,7 +19701,7 @@
                           </a:solidFill>
                           <a:latin typeface="Montserrat"/>
                         </a:rPr>
-                        <a:t>Regra sharp</a:t>
+                        <a:t>Bolsa por regra</a:t>
                       </a:r>
                     </a:p>
                   </a:txBody>
@@ -20144,7 +19755,7 @@
                           </a:solidFill>
                           <a:latin typeface="Montserrat"/>
                         </a:rPr>
-                        <a:t>368/368, 454/454</a:t>
+                        <a:t>sharp: 368/368, 454/454</a:t>
                       </a:r>
                     </a:p>
                   </a:txBody>
@@ -20175,7 +19786,7 @@
                   </a:tcPr>
                 </a:tc>
               </a:tr>
-              <a:tr h="854964">
+              <a:tr h="732826">
                 <a:tc>
                   <a:txBody>
                     <a:bodyPr/>
@@ -20200,7 +19811,7 @@
                           </a:solidFill>
                           <a:latin typeface="Montserrat"/>
                         </a:rPr>
-                        <a:t>Sem manipulação, balanço</a:t>
+                        <a:t>Só a bolsa?</a:t>
                       </a:r>
                     </a:p>
                   </a:txBody>
@@ -20254,7 +19865,7 @@
                           </a:solidFill>
                           <a:latin typeface="Montserrat"/>
                         </a:rPr>
-                        <a:t>passam, salvo capitais</a:t>
+                        <a:t>não: pacote</a:t>
                       </a:r>
                     </a:p>
                   </a:txBody>
@@ -20285,7 +19896,7 @@
                   </a:tcPr>
                 </a:tc>
               </a:tr>
-              <a:tr h="854964">
+              <a:tr h="732826">
                 <a:tc>
                   <a:txBody>
                     <a:bodyPr/>
@@ -20310,7 +19921,7 @@
                           </a:solidFill>
                           <a:latin typeface="Montserrat"/>
                         </a:rPr>
-                        <a:t>Só a bolsa</a:t>
+                        <a:t>IIA</a:t>
                       </a:r>
                     </a:p>
                   </a:txBody>
@@ -20364,7 +19975,7 @@
                           </a:solidFill>
                           <a:latin typeface="Montserrat"/>
                         </a:rPr>
-                        <a:t>não: pacote</a:t>
+                        <a:t>em parte; bolsa estável</a:t>
                       </a:r>
                     </a:p>
                   </a:txBody>
@@ -20395,7 +20006,7 @@
                   </a:tcPr>
                 </a:tc>
               </a:tr>
-              <a:tr h="854964">
+              <a:tr h="732826">
                 <a:tc>
                   <a:txBody>
                     <a:bodyPr/>
@@ -20420,7 +20031,7 @@
                           </a:solidFill>
                           <a:latin typeface="Montserrat"/>
                         </a:rPr>
-                        <a:t>Outro incentivo individual em 0,300</a:t>
+                        <a:t>Localização</a:t>
                       </a:r>
                     </a:p>
                   </a:txBody>
@@ -20474,7 +20085,7 @@
                           </a:solidFill>
                           <a:latin typeface="Montserrat"/>
                         </a:rPr>
-                        <a:t>nenhum</a:t>
+                        <a:t>par de UFs fixado</a:t>
                       </a:r>
                     </a:p>
                   </a:txBody>
@@ -20505,7 +20116,7 @@
                   </a:tcPr>
                 </a:tc>
               </a:tr>
-              <a:tr h="854964">
+              <a:tr h="732826">
                 <a:tc>
                   <a:txBody>
                     <a:bodyPr/>
@@ -20530,7 +20141,7 @@
                           </a:solidFill>
                           <a:latin typeface="Montserrat"/>
                         </a:rPr>
-                        <a:t>Tipo de vaga</a:t>
+                        <a:t>Origem</a:t>
                       </a:r>
                     </a:p>
                   </a:txBody>
@@ -20584,7 +20195,7 @@
                           </a:solidFill>
                           <a:latin typeface="Montserrat"/>
                         </a:rPr>
-                        <a:t>testado: Lee contém zero</a:t>
+                        <a:t>preferência revelada</a:t>
                       </a:r>
                     </a:p>
                   </a:txBody>
@@ -20611,6 +20222,116 @@
                     </a:lnB>
                     <a:solidFill>
                       <a:srgbClr val="F3F7F3"/>
+                    </a:solidFill>
+                  </a:tcPr>
+                </a:tc>
+              </a:tr>
+              <a:tr h="732826">
+                <a:tc>
+                  <a:txBody>
+                    <a:bodyPr/>
+                    <a:lstStyle/>
+                    <a:p>
+                      <a:pPr marL="0" indent="0" algn="l">
+                        <a:lnSpc>
+                          <a:spcPct val="100000"/>
+                        </a:lnSpc>
+                        <a:spcBef>
+                          <a:spcPts val="0"/>
+                        </a:spcBef>
+                        <a:spcAft>
+                          <a:spcPts val="0"/>
+                        </a:spcAft>
+                        <a:buNone/>
+                      </a:pPr>
+                      <a:r>
+                        <a:rPr lang="pt-BR" sz="2400" b="1" dirty="0">
+                          <a:solidFill>
+                            <a:srgbClr val="3A3A3A"/>
+                          </a:solidFill>
+                          <a:latin typeface="Montserrat"/>
+                        </a:rPr>
+                        <a:t>Hipótese</a:t>
+                      </a:r>
+                    </a:p>
+                  </a:txBody>
+                  <a:tcPr marL="73152" marR="73152" marT="36576" marB="36576" anchor="ctr">
+                    <a:lnL w="6350">
+                      <a:solidFill>
+                        <a:srgbClr val="C9DED1"/>
+                      </a:solidFill>
+                    </a:lnL>
+                    <a:lnR w="6350">
+                      <a:solidFill>
+                        <a:srgbClr val="C9DED1"/>
+                      </a:solidFill>
+                    </a:lnR>
+                    <a:lnT w="6350">
+                      <a:solidFill>
+                        <a:srgbClr val="C9DED1"/>
+                      </a:solidFill>
+                    </a:lnT>
+                    <a:lnB w="6350">
+                      <a:solidFill>
+                        <a:srgbClr val="C9DED1"/>
+                      </a:solidFill>
+                    </a:lnB>
+                    <a:solidFill>
+                      <a:srgbClr val="FFFFFF"/>
+                    </a:solidFill>
+                  </a:tcPr>
+                </a:tc>
+                <a:tc>
+                  <a:txBody>
+                    <a:bodyPr/>
+                    <a:lstStyle/>
+                    <a:p>
+                      <a:pPr marL="0" indent="0" algn="l">
+                        <a:lnSpc>
+                          <a:spcPct val="100000"/>
+                        </a:lnSpc>
+                        <a:spcBef>
+                          <a:spcPts val="0"/>
+                        </a:spcBef>
+                        <a:spcAft>
+                          <a:spcPts val="0"/>
+                        </a:spcAft>
+                        <a:buNone/>
+                      </a:pPr>
+                      <a:r>
+                        <a:rPr lang="pt-BR" sz="2400" b="0" dirty="0">
+                          <a:solidFill>
+                            <a:srgbClr val="3A3A3A"/>
+                          </a:solidFill>
+                          <a:latin typeface="Montserrat"/>
+                        </a:rPr>
+                        <a:t>pós-resultado</a:t>
+                      </a:r>
+                    </a:p>
+                  </a:txBody>
+                  <a:tcPr marL="73152" marR="73152" marT="36576" marB="36576" anchor="ctr">
+                    <a:lnL w="6350">
+                      <a:solidFill>
+                        <a:srgbClr val="C9DED1"/>
+                      </a:solidFill>
+                    </a:lnL>
+                    <a:lnR w="6350">
+                      <a:solidFill>
+                        <a:srgbClr val="C9DED1"/>
+                      </a:solidFill>
+                    </a:lnR>
+                    <a:lnT w="6350">
+                      <a:solidFill>
+                        <a:srgbClr val="C9DED1"/>
+                      </a:solidFill>
+                    </a:lnT>
+                    <a:lnB w="6350">
+                      <a:solidFill>
+                        <a:srgbClr val="C9DED1"/>
+                      </a:solidFill>
+                    </a:lnB>
+                    <a:solidFill>
+                      <a:srgbClr val="FFFFFF"/>
                     </a:solidFill>
                   </a:tcPr>
                 </a:tc>
@@ -20672,7 +20393,7 @@
                 </a:solidFill>
                 <a:latin typeface="Montserrat"/>
               </a:rPr>
-              <a:t>auditorias 16, 18, 35, 36 e 44; docs 37, 41, 49 e 05 (§2.12) da banca 2; output/rdd_bolsa/E1_densidade_estimativas.csv; output/auditoria_H1/a36_estimativas.csv; output/rdd_bolsa/SV_estimativas.csv e SV_resumo.json (adendo 48f; doc 57t).</a:t>
+              <a:t>auditorias 16, 18, 41 e 48; docs 57a (M9), 57i, 57p e 57x; output/rdd_bolsa/portao_r1_ivs_oficial.json; VC_estimativas.csv.</a:t>
             </a:r>
           </a:p>
         </p:txBody>
@@ -20735,7 +20456,7 @@
                 </a:solidFill>
                 <a:latin typeface="Montserrat"/>
               </a:rPr>
-              <a:t>H1 · Só vagas imediatas: nada passa no Holm</a:t>
+              <a:t>Teste central: a origem pesa mais que toda a bolsa</a:t>
             </a:r>
           </a:p>
         </p:txBody>
@@ -20862,60 +20583,27 @@
           </a:p>
         </p:txBody>
       </p:sp>
-      <p:pic>
-        <p:nvPicPr>
-          <p:cNvPr id="101" name="Figura" descr="H1 principal: HI-1 (célula com vaga imediata preenchida) e HI-2 (alocados em vagas imediatas por município), por corte, com IC 95% e p de Holm"/>
-          <p:cNvPicPr>
-            <a:picLocks noChangeAspect="1"/>
-          </p:cNvPicPr>
-          <p:nvPr/>
-        </p:nvPicPr>
-        <p:blipFill>
-          <a:blip r:embed="rId3"/>
-          <a:stretch>
-            <a:fillRect/>
-          </a:stretch>
-        </p:blipFill>
-        <p:spPr>
-          <a:xfrm>
-            <a:off x="292608" y="1110032"/>
-            <a:ext cx="8211312" cy="3992166"/>
-          </a:xfrm>
-          <a:prstGeom prst="rect">
-            <a:avLst/>
-          </a:prstGeom>
-          <a:ln w="6350">
-            <a:solidFill>
-              <a:srgbClr val="DDE7DF"/>
-            </a:solidFill>
-          </a:ln>
-        </p:spPr>
-      </p:pic>
       <p:sp>
         <p:nvSpPr>
-          <p:cNvPr id="102" name="Cautela"/>
+          <p:cNvPr id="101" name="Linha"/>
           <p:cNvSpPr/>
           <p:nvPr/>
         </p:nvSpPr>
         <p:spPr>
           <a:xfrm>
-            <a:off x="292608" y="5266790"/>
-            <a:ext cx="8211312" cy="517754"/>
+            <a:off x="292608" y="5212080"/>
+            <a:ext cx="11594592" cy="420624"/>
           </a:xfrm>
-          <a:prstGeom prst="roundRect">
-            <a:avLst>
-              <a:gd name="adj" fmla="val 8000"/>
-            </a:avLst>
+          <a:prstGeom prst="rect">
+            <a:avLst/>
           </a:prstGeom>
-          <a:solidFill>
-            <a:srgbClr val="E7F1EA"/>
-          </a:solidFill>
+          <a:noFill/>
           <a:ln>
             <a:noFill/>
           </a:ln>
         </p:spPr>
         <p:txBody>
-          <a:bodyPr wrap="square" lIns="182880" tIns="54864" rIns="182880" bIns="54864" rtlCol="0" anchor="ctr">
+          <a:bodyPr wrap="square" lIns="164592" tIns="18288" rIns="164592" bIns="18288" rtlCol="0" anchor="ctr">
             <a:noAutofit/>
           </a:bodyPr>
           <a:lstStyle/>
@@ -20933,44 +20621,51 @@
               <a:buNone/>
             </a:pPr>
             <a:r>
-              <a:rPr lang="pt-BR" sz="1600" b="1" dirty="0">
+              <a:rPr lang="pt-BR" sz="1800" b="1" dirty="0">
                 <a:solidFill>
                   <a:srgbClr val="114719"/>
                 </a:solidFill>
                 <a:latin typeface="Montserrat"/>
               </a:rPr>
-              <a:t>Pós-resultado (adendo 48b); pacote do corte.</a:t>
+              <a:t>Origem − bolsa:</a:t>
+            </a:r>
+            <a:r>
+              <a:rPr lang="pt-BR" sz="1800" b="0" dirty="0">
+                <a:solidFill>
+                  <a:srgbClr val="3A3A3A"/>
+                </a:solidFill>
+                <a:latin typeface="Montserrat"/>
+              </a:rPr>
+              <a:t> 1,94 [1,48; 2,40] em log-chance; p &lt; 0,001.</a:t>
             </a:r>
           </a:p>
         </p:txBody>
       </p:sp>
       <p:sp>
         <p:nvSpPr>
-          <p:cNvPr id="103" name="Linha"/>
+          <p:cNvPr id="102" name="Cautela"/>
           <p:cNvSpPr/>
           <p:nvPr/>
         </p:nvSpPr>
         <p:spPr>
           <a:xfrm>
-            <a:off x="8778240" y="1110032"/>
-            <a:ext cx="3108960" cy="2114955"/>
+            <a:off x="292608" y="5687568"/>
+            <a:ext cx="11594592" cy="420624"/>
           </a:xfrm>
           <a:prstGeom prst="roundRect">
             <a:avLst>
-              <a:gd name="adj" fmla="val 6000"/>
+              <a:gd name="adj" fmla="val 12000"/>
             </a:avLst>
           </a:prstGeom>
           <a:solidFill>
-            <a:srgbClr val="F4F8F5"/>
+            <a:srgbClr val="E7F1EA"/>
           </a:solidFill>
-          <a:ln w="12700">
-            <a:solidFill>
-              <a:srgbClr val="056429"/>
-            </a:solidFill>
+          <a:ln>
+            <a:noFill/>
           </a:ln>
         </p:spPr>
         <p:txBody>
-          <a:bodyPr wrap="square" lIns="182880" tIns="54864" rIns="182880" bIns="54864" rtlCol="0" anchor="ctr">
+          <a:bodyPr wrap="square" lIns="164592" tIns="18288" rIns="164592" bIns="18288" rtlCol="0" anchor="ctr">
             <a:noAutofit/>
           </a:bodyPr>
           <a:lstStyle/>
@@ -20988,84 +20683,49 @@
               <a:buNone/>
             </a:pPr>
             <a:r>
-              <a:rPr lang="pt-BR" sz="1600" b="0" dirty="0">
-                <a:solidFill>
-                  <a:srgbClr val="3A3A3A"/>
-                </a:solidFill>
-                <a:latin typeface="Montserrat"/>
-              </a:rPr>
-              <a:t>Nada passa no Holm; HI-1: IC contém zero nos dois cortes.</a:t>
-            </a:r>
-          </a:p>
-        </p:txBody>
-      </p:sp>
-      <p:sp>
-        <p:nvSpPr>
-          <p:cNvPr id="104" name="Linha"/>
-          <p:cNvSpPr/>
-          <p:nvPr/>
-        </p:nvSpPr>
-        <p:spPr>
-          <a:xfrm>
-            <a:off x="8778240" y="3389579"/>
-            <a:ext cx="3108960" cy="2394965"/>
-          </a:xfrm>
-          <a:prstGeom prst="roundRect">
-            <a:avLst>
-              <a:gd name="adj" fmla="val 6000"/>
-            </a:avLst>
-          </a:prstGeom>
-          <a:solidFill>
-            <a:srgbClr val="F4F8F5"/>
-          </a:solidFill>
-          <a:ln w="12700">
-            <a:solidFill>
-              <a:srgbClr val="056429"/>
-            </a:solidFill>
-          </a:ln>
-        </p:spPr>
-        <p:txBody>
-          <a:bodyPr wrap="square" lIns="182880" tIns="54864" rIns="182880" bIns="54864" rtlCol="0" anchor="ctr">
-            <a:noAutofit/>
-          </a:bodyPr>
-          <a:lstStyle/>
-          <a:p>
-            <a:pPr marL="0" indent="0" algn="l">
-              <a:lnSpc>
-                <a:spcPct val="100000"/>
-              </a:lnSpc>
-              <a:spcBef>
-                <a:spcPts val="0"/>
-              </a:spcBef>
-              <a:spcAft>
-                <a:spcPts val="0"/>
-              </a:spcAft>
-              <a:buNone/>
-            </a:pPr>
-            <a:r>
-              <a:rPr lang="pt-BR" sz="1600" b="1" dirty="0">
+              <a:rPr lang="pt-BR" sz="1800" b="1" dirty="0">
                 <a:solidFill>
                   <a:srgbClr val="114719"/>
                 </a:solidFill>
                 <a:latin typeface="Montserrat"/>
               </a:rPr>
-              <a:t>TOST:</a:t>
-            </a:r>
-            <a:r>
-              <a:rPr lang="pt-BR" sz="1600" b="0" dirty="0">
-                <a:solidFill>
-                  <a:srgbClr val="3A3A3A"/>
-                </a:solidFill>
-                <a:latin typeface="Montserrat"/>
-              </a:rPr>
-              <a:t> HI-2 em 0,300 descarta aumento ≥ 25% da média, não descarta queda.</a:t>
+              <a:t>Origem é preferência revelada, não causa.</a:t>
             </a:r>
           </a:p>
         </p:txBody>
       </p:sp>
+      <p:pic>
+        <p:nvPicPr>
+          <p:cNvPr id="103" name="Figura" descr="Quanto a vaga na UF de origem e toda a diferença de bolsa (R$ 10 → 20 mil) multiplicam a chance de a vaga ser a 1ª opção, com IC 95%"/>
+          <p:cNvPicPr>
+            <a:picLocks noChangeAspect="1"/>
+          </p:cNvPicPr>
+          <p:nvPr/>
+        </p:nvPicPr>
+        <p:blipFill>
+          <a:blip r:embed="rId3"/>
+          <a:stretch>
+            <a:fillRect/>
+          </a:stretch>
+        </p:blipFill>
+        <p:spPr>
+          <a:xfrm>
+            <a:off x="292608" y="1176900"/>
+            <a:ext cx="11594592" cy="3534937"/>
+          </a:xfrm>
+          <a:prstGeom prst="rect">
+            <a:avLst/>
+          </a:prstGeom>
+          <a:ln w="6350">
+            <a:solidFill>
+              <a:srgbClr val="DDE7DF"/>
+            </a:solidFill>
+          </a:ln>
+        </p:spPr>
+      </p:pic>
       <p:sp>
         <p:nvSpPr>
-          <p:cNvPr id="105" name="Fontes"/>
+          <p:cNvPr id="104" name="Fontes"/>
           <p:cNvSpPr txBox="1"/>
           <p:nvPr/>
         </p:nvSpPr>
@@ -21116,7 +20776,7 @@
                 </a:solidFill>
                 <a:latin typeface="Montserrat"/>
               </a:rPr>
-              <a:t>output/rdd_bolsa/HI_estimativas.csv, HI_resumo.json e HI_figuras/HI_principal.png (adendo 48b; doc 57n; auditoria 38); figura usada sem redesenho.</a:t>
+              <a:t>output/rdd_bolsa/VC_estimativas.csv (adendo 52c; doc 57p; auditoria 41); P1h (protocolo 52b; doc 57i; auditoria 31); output/apresentacao_banca2/curto_origem_bolsa.png.</a:t>
             </a:r>
           </a:p>
         </p:txBody>
@@ -21179,7 +20839,7 @@
                 </a:solidFill>
                 <a:latin typeface="Montserrat"/>
               </a:rPr>
-              <a:t>H1 · Antes e depois do controle das vagas</a:t>
+              <a:t>Dentro da mesma UF, a vaga de bolsa maior atrai</a:t>
             </a:r>
           </a:p>
         </p:txBody>
@@ -21277,25 +20937,25 @@
               <a:t xml:space="preserve">Identificação  |  </a:t>
             </a:r>
             <a:r>
-              <a:rPr lang="pt-BR" sz="1000" dirty="0">
-                <a:latin typeface="Montserrat"/>
-              </a:rPr>
-              <a:t xml:space="preserve">Resultados  |  </a:t>
-            </a:r>
-            <a:r>
               <a:rPr lang="pt-BR" sz="1000" b="1" dirty="0">
                 <a:solidFill>
                   <a:srgbClr val="114719"/>
                 </a:solidFill>
                 <a:latin typeface="Montserrat"/>
               </a:rPr>
-              <a:t>Robustez</a:t>
+              <a:t>Resultados</a:t>
             </a:r>
             <a:r>
               <a:rPr lang="pt-BR" sz="1000" dirty="0">
                 <a:latin typeface="Montserrat"/>
               </a:rPr>
               <a:t xml:space="preserve">  |  </a:t>
+            </a:r>
+            <a:r>
+              <a:rPr lang="pt-BR" sz="1000" dirty="0">
+                <a:latin typeface="Montserrat"/>
+              </a:rPr>
+              <a:t xml:space="preserve">Robustez  |  </a:t>
             </a:r>
             <a:r>
               <a:rPr lang="pt-BR" sz="1000" dirty="0">
@@ -21350,7 +21010,7 @@
                 </a:solidFill>
                 <a:latin typeface="Montserrat"/>
               </a:rPr>
-              <a:t>0,400:</a:t>
+              <a:t>+R$ 5 mil</a:t>
             </a:r>
             <a:r>
               <a:rPr lang="pt-BR" sz="1800" b="0" dirty="0">
@@ -21359,14 +21019,14 @@
                 </a:solidFill>
                 <a:latin typeface="Montserrat"/>
               </a:rPr>
-              <a:t> a queda passa pelas vagas: cidades grandes logo abaixo; com o controle, some.</a:t>
+              <a:t> pesam como 75 km a menos de distância.</a:t>
             </a:r>
           </a:p>
         </p:txBody>
       </p:sp>
       <p:sp>
         <p:nvSpPr>
-          <p:cNvPr id="102" name="Linha"/>
+          <p:cNvPr id="102" name="Cautela"/>
           <p:cNvSpPr/>
           <p:nvPr/>
         </p:nvSpPr>
@@ -21375,10 +21035,14 @@
             <a:off x="292608" y="5687568"/>
             <a:ext cx="11594592" cy="420624"/>
           </a:xfrm>
-          <a:prstGeom prst="rect">
-            <a:avLst/>
+          <a:prstGeom prst="roundRect">
+            <a:avLst>
+              <a:gd name="adj" fmla="val 12000"/>
+            </a:avLst>
           </a:prstGeom>
-          <a:noFill/>
+          <a:solidFill>
+            <a:srgbClr val="E7F1EA"/>
+          </a:solidFill>
           <a:ln>
             <a:noFill/>
           </a:ln>
@@ -21408,23 +21072,14 @@
                 </a:solidFill>
                 <a:latin typeface="Montserrat"/>
               </a:rPr>
-              <a:t>0,300:</a:t>
-            </a:r>
-            <a:r>
-              <a:rPr lang="pt-BR" sz="1800" b="0" dirty="0">
-                <a:solidFill>
-                  <a:srgbClr val="3A3A3A"/>
-                </a:solidFill>
-                <a:latin typeface="Montserrat"/>
-              </a:rPr>
-              <a:t> a oferta não muda; cai o preenchimento por vaga.</a:t>
+              <a:t>Adendo pós-resultado; sem fixar a UF, Holm 0,072.</a:t>
             </a:r>
           </a:p>
         </p:txBody>
       </p:sp>
       <p:pic>
         <p:nvPicPr>
-          <p:cNvPr id="103" name="Figura" descr="Antes e depois do controle das vagas oferecidas, por corte: sem controle e com controle em dois gráficos na mesma escala; ao lado, o salto nas vagas oferecidas"/>
+          <p:cNvPr id="103" name="Figura" descr="Razão de chances da 1ª opção por +R$ 5 mil comparando vagas da mesma UF, ciclos 1–3 e ciclo 2, com o modelo base em cinza claro"/>
           <p:cNvPicPr>
             <a:picLocks noChangeAspect="1"/>
           </p:cNvPicPr>
@@ -21438,8 +21093,8 @@
         </p:blipFill>
         <p:spPr>
           <a:xfrm>
-            <a:off x="292608" y="1271165"/>
-            <a:ext cx="11594592" cy="3346407"/>
+            <a:off x="292608" y="1294731"/>
+            <a:ext cx="11594592" cy="3299274"/>
           </a:xfrm>
           <a:prstGeom prst="rect">
             <a:avLst/>
@@ -21504,7 +21159,7 @@
                 </a:solidFill>
                 <a:latin typeface="Montserrat"/>
               </a:rPr>
-              <a:t>output/rdd_bolsa/N_estimativas.csv (decomposição e S-c; doc 49, §3 a §5); ND_estimativas.csv (doc 49b, §3); HI_estimativas.csv (adendo 48b; doc 57n; auditoria 38).</a:t>
+              <a:t>output/rdd_bolsa/VL_estimativas.csv (adendo 52e; doc 57x; auditoria 48); output/apresentacao_banca2/curto_bolsa_mesma_uf.png.</a:t>
             </a:r>
           </a:p>
         </p:txBody>
@@ -21567,7 +21222,7 @@
                 </a:solidFill>
                 <a:latin typeface="Montserrat"/>
               </a:rPr>
-              <a:t>H1 · Por ciclo: a queda em 0,300 vem do ciclo 2</a:t>
+              <a:t>Robustez: a origem pesa mais em todos os ciclos</a:t>
             </a:r>
           </a:p>
         </p:txBody>
@@ -21732,13 +21387,22 @@
               <a:buNone/>
             </a:pPr>
             <a:r>
+              <a:rPr lang="pt-BR" sz="1800" b="1" dirty="0">
+                <a:solidFill>
+                  <a:srgbClr val="114719"/>
+                </a:solidFill>
+                <a:latin typeface="Montserrat"/>
+              </a:rPr>
+              <a:t>Bolsa:</a:t>
+            </a:r>
+            <a:r>
               <a:rPr lang="pt-BR" sz="1800" b="0" dirty="0">
                 <a:solidFill>
                   <a:srgbClr val="3A3A3A"/>
                 </a:solidFill>
                 <a:latin typeface="Montserrat"/>
               </a:rPr>
-              <a:t>A queda em 0,300 vem sobretudo do ciclo 2; por ciclo, os intervalos são largos.</a:t>
+              <a:t> forte só no ciclo 2; perto do corte, inconclusivo.</a:t>
             </a:r>
           </a:p>
         </p:txBody>
@@ -21791,14 +21455,14 @@
                 </a:solidFill>
                 <a:latin typeface="Montserrat"/>
               </a:rPr>
-              <a:t>Tipo de vaga do ciclo 2: quadro refeito depois do resultado (auditoria 36).</a:t>
+              <a:t>Quadro da inscrição, log e região: mesma leitura.</a:t>
             </a:r>
           </a:p>
         </p:txBody>
       </p:sp>
       <p:pic>
         <p:nvPicPr>
-          <p:cNvPr id="103" name="Figura" descr="H1 por ciclo e por corte: célula aberta preenchida (A3) e taxa por vaga oferecida, ciclos 1, 2 e 3 e juntos, com IC 95%"/>
+          <p:cNvPr id="103" name="Figura" descr="Robustez da escolha: razão de chances por +R$ 5 mil por ciclo, com o quadro antigo do ciclo 2, com distância em log, com a região de saúde fixada e só perto do corte; à direita, origem menos toda a bolsa por ciclo"/>
           <p:cNvPicPr>
             <a:picLocks noChangeAspect="1"/>
           </p:cNvPicPr>
@@ -21812,8 +21476,8 @@
         </p:blipFill>
         <p:spPr>
           <a:xfrm>
-            <a:off x="1512815" y="804672"/>
-            <a:ext cx="9154178" cy="4279392"/>
+            <a:off x="663458" y="804672"/>
+            <a:ext cx="10852891" cy="4279392"/>
           </a:xfrm>
           <a:prstGeom prst="rect">
             <a:avLst/>
@@ -21878,7 +21542,7 @@
                 </a:solidFill>
                 <a:latin typeface="Montserrat"/>
               </a:rPr>
-              <a:t>output/rdd_bolsa/NA_estimativas.csv (A3 por ciclo); ND_estimativas.csv (taxa por vaga, adendo AD2; doc 49b); auditoria 36.</a:t>
+              <a:t>output/rdd_bolsa/VC_estimativas.csv (adendo 52c; doc 57p; auditoria 41); VL_estimativas.csv (adendo 52e; doc 57x; auditoria 48); doc 57v (adendo 52d; auditoria 46).</a:t>
             </a:r>
           </a:p>
         </p:txBody>
@@ -21941,7 +21605,7 @@
                 </a:solidFill>
                 <a:latin typeface="Montserrat"/>
               </a:rPr>
-              <a:t>H1 · Comparando municípios parecidos</a:t>
+              <a:t>Discussão: um incentivo limitado</a:t>
             </a:r>
           </a:p>
         </p:txBody>
@@ -22045,55 +21709,59 @@
               <a:t xml:space="preserve">Resultados  |  </a:t>
             </a:r>
             <a:r>
+              <a:rPr lang="pt-BR" sz="1000" dirty="0">
+                <a:latin typeface="Montserrat"/>
+              </a:rPr>
+              <a:t xml:space="preserve">Robustez  |  </a:t>
+            </a:r>
+            <a:r>
               <a:rPr lang="pt-BR" sz="1000" b="1" dirty="0">
                 <a:solidFill>
                   <a:srgbClr val="114719"/>
                 </a:solidFill>
                 <a:latin typeface="Montserrat"/>
               </a:rPr>
-              <a:t>Robustez</a:t>
+              <a:t>Discussão</a:t>
             </a:r>
             <a:r>
               <a:rPr lang="pt-BR" sz="1000" dirty="0">
                 <a:latin typeface="Montserrat"/>
               </a:rPr>
-              <a:t xml:space="preserve">  |  </a:t>
-            </a:r>
-            <a:r>
-              <a:rPr lang="pt-BR" sz="1000" dirty="0">
-                <a:latin typeface="Montserrat"/>
-              </a:rPr>
-              <a:t xml:space="preserve">Discussão</a:t>
+              <a:t xml:space="preserve"/>
             </a:r>
           </a:p>
         </p:txBody>
       </p:sp>
       <p:sp>
         <p:nvSpPr>
-          <p:cNvPr id="101" name="Linha"/>
+          <p:cNvPr id="101" name="Rótulo"/>
           <p:cNvSpPr/>
           <p:nvPr/>
         </p:nvSpPr>
         <p:spPr>
           <a:xfrm>
-            <a:off x="292608" y="4736592"/>
-            <a:ext cx="11594592" cy="420624"/>
+            <a:off x="292608" y="896112"/>
+            <a:ext cx="1737360" cy="1597152"/>
           </a:xfrm>
-          <a:prstGeom prst="rect">
-            <a:avLst/>
+          <a:prstGeom prst="roundRect">
+            <a:avLst>
+              <a:gd name="adj" fmla="val 10000"/>
+            </a:avLst>
           </a:prstGeom>
-          <a:noFill/>
+          <a:solidFill>
+            <a:srgbClr val="114719"/>
+          </a:solidFill>
           <a:ln>
             <a:noFill/>
           </a:ln>
         </p:spPr>
         <p:txBody>
-          <a:bodyPr wrap="square" lIns="164592" tIns="18288" rIns="164592" bIns="18288" rtlCol="0" anchor="ctr">
+          <a:bodyPr wrap="square" lIns="73152" tIns="45720" rIns="73152" bIns="45720" rtlCol="0" anchor="ctr">
             <a:noAutofit/>
           </a:bodyPr>
           <a:lstStyle/>
           <a:p>
-            <a:pPr marL="0" indent="0" algn="l">
+            <a:pPr marL="0" indent="0" algn="ctr">
               <a:lnSpc>
                 <a:spcPct val="100000"/>
               </a:lnSpc>
@@ -22106,43 +21774,102 @@
               <a:buNone/>
             </a:pPr>
             <a:r>
-              <a:rPr lang="pt-BR" sz="1800" b="0" dirty="0">
+              <a:rPr lang="pt-BR" sz="2400" b="1" dirty="0">
+                <a:solidFill>
+                  <a:srgbClr val="FFFFFF"/>
+                </a:solidFill>
+                <a:latin typeface="Montserrat"/>
+              </a:rPr>
+              <a:t>Teoria</a:t>
+            </a:r>
+          </a:p>
+        </p:txBody>
+      </p:sp>
+      <p:sp>
+        <p:nvSpPr>
+          <p:cNvPr id="102" name="Item"/>
+          <p:cNvSpPr/>
+          <p:nvPr/>
+        </p:nvSpPr>
+        <p:spPr>
+          <a:xfrm>
+            <a:off x="2167128" y="896112"/>
+            <a:ext cx="9720072" cy="1597152"/>
+          </a:xfrm>
+          <a:prstGeom prst="roundRect">
+            <a:avLst>
+              <a:gd name="adj" fmla="val 6000"/>
+            </a:avLst>
+          </a:prstGeom>
+          <a:solidFill>
+            <a:srgbClr val="F4F8F5"/>
+          </a:solidFill>
+          <a:ln w="12700">
+            <a:solidFill>
+              <a:srgbClr val="056429"/>
+            </a:solidFill>
+          </a:ln>
+        </p:spPr>
+        <p:txBody>
+          <a:bodyPr wrap="square" lIns="228600" tIns="36576" rIns="228600" bIns="36576" rtlCol="0" anchor="ctr">
+            <a:noAutofit/>
+          </a:bodyPr>
+          <a:lstStyle/>
+          <a:p>
+            <a:pPr marL="0" indent="0" algn="l">
+              <a:lnSpc>
+                <a:spcPct val="102000"/>
+              </a:lnSpc>
+              <a:spcBef>
+                <a:spcPts val="0"/>
+              </a:spcBef>
+              <a:spcAft>
+                <a:spcPts val="0"/>
+              </a:spcAft>
+              <a:buNone/>
+            </a:pPr>
+            <a:r>
+              <a:rPr lang="pt-BR" sz="2400" b="0" dirty="0">
                 <a:solidFill>
                   <a:srgbClr val="3A3A3A"/>
                 </a:solidFill>
                 <a:latin typeface="Montserrat"/>
               </a:rPr>
-              <a:t>Perto de 0,300, os lados diferem em capital, Nordeste e especialistas na região.</a:t>
+              <a:t>aceita a vaga se a bolsa compensa o custo do lugar</a:t>
             </a:r>
           </a:p>
         </p:txBody>
       </p:sp>
       <p:sp>
         <p:nvSpPr>
-          <p:cNvPr id="102" name="Linha"/>
+          <p:cNvPr id="103" name="Rótulo"/>
           <p:cNvSpPr/>
           <p:nvPr/>
         </p:nvSpPr>
         <p:spPr>
           <a:xfrm>
-            <a:off x="292608" y="5212080"/>
-            <a:ext cx="11594592" cy="420624"/>
+            <a:off x="292608" y="2694432"/>
+            <a:ext cx="1737360" cy="1597152"/>
           </a:xfrm>
-          <a:prstGeom prst="rect">
-            <a:avLst/>
+          <a:prstGeom prst="roundRect">
+            <a:avLst>
+              <a:gd name="adj" fmla="val 10000"/>
+            </a:avLst>
           </a:prstGeom>
-          <a:noFill/>
+          <a:solidFill>
+            <a:srgbClr val="114719"/>
+          </a:solidFill>
           <a:ln>
             <a:noFill/>
           </a:ln>
         </p:spPr>
         <p:txBody>
-          <a:bodyPr wrap="square" lIns="164592" tIns="18288" rIns="164592" bIns="18288" rtlCol="0" anchor="ctr">
+          <a:bodyPr wrap="square" lIns="73152" tIns="45720" rIns="73152" bIns="45720" rtlCol="0" anchor="ctr">
             <a:noAutofit/>
           </a:bodyPr>
           <a:lstStyle/>
           <a:p>
-            <a:pPr marL="0" indent="0" algn="l">
+            <a:pPr marL="0" indent="0" algn="ctr">
               <a:lnSpc>
                 <a:spcPct val="100000"/>
               </a:lnSpc>
@@ -22155,47 +21882,102 @@
               <a:buNone/>
             </a:pPr>
             <a:r>
-              <a:rPr lang="pt-BR" sz="1800" b="0" dirty="0">
+              <a:rPr lang="pt-BR" sz="2400" b="1" dirty="0">
+                <a:solidFill>
+                  <a:srgbClr val="FFFFFF"/>
+                </a:solidFill>
+                <a:latin typeface="Montserrat"/>
+              </a:rPr>
+              <a:t>Dados</a:t>
+            </a:r>
+          </a:p>
+        </p:txBody>
+      </p:sp>
+      <p:sp>
+        <p:nvSpPr>
+          <p:cNvPr id="104" name="Item"/>
+          <p:cNvSpPr/>
+          <p:nvPr/>
+        </p:nvSpPr>
+        <p:spPr>
+          <a:xfrm>
+            <a:off x="2167128" y="2694432"/>
+            <a:ext cx="9720072" cy="1597152"/>
+          </a:xfrm>
+          <a:prstGeom prst="roundRect">
+            <a:avLst>
+              <a:gd name="adj" fmla="val 6000"/>
+            </a:avLst>
+          </a:prstGeom>
+          <a:solidFill>
+            <a:srgbClr val="F4F8F5"/>
+          </a:solidFill>
+          <a:ln w="12700">
+            <a:solidFill>
+              <a:srgbClr val="056429"/>
+            </a:solidFill>
+          </a:ln>
+        </p:spPr>
+        <p:txBody>
+          <a:bodyPr wrap="square" lIns="228600" tIns="36576" rIns="228600" bIns="36576" rtlCol="0" anchor="ctr">
+            <a:noAutofit/>
+          </a:bodyPr>
+          <a:lstStyle/>
+          <a:p>
+            <a:pPr marL="0" indent="0" algn="l">
+              <a:lnSpc>
+                <a:spcPct val="102000"/>
+              </a:lnSpc>
+              <a:spcBef>
+                <a:spcPts val="0"/>
+              </a:spcBef>
+              <a:spcAft>
+                <a:spcPts val="0"/>
+              </a:spcAft>
+              <a:buNone/>
+            </a:pPr>
+            <a:r>
+              <a:rPr lang="pt-BR" sz="2400" b="0" dirty="0">
                 <a:solidFill>
                   <a:srgbClr val="3A3A3A"/>
                 </a:solidFill>
                 <a:latin typeface="Montserrat"/>
               </a:rPr>
-              <a:t>Comparando municípios parecidos, a diferença não aparece.</a:t>
+              <a:t>o custo que domina é sair da própria região</a:t>
             </a:r>
           </a:p>
         </p:txBody>
       </p:sp>
       <p:sp>
         <p:nvSpPr>
-          <p:cNvPr id="103" name="Cautela"/>
+          <p:cNvPr id="105" name="Rótulo"/>
           <p:cNvSpPr/>
           <p:nvPr/>
         </p:nvSpPr>
         <p:spPr>
           <a:xfrm>
-            <a:off x="292608" y="5687568"/>
-            <a:ext cx="11594592" cy="420624"/>
+            <a:off x="292608" y="4492752"/>
+            <a:ext cx="1737360" cy="1597152"/>
           </a:xfrm>
           <a:prstGeom prst="roundRect">
             <a:avLst>
-              <a:gd name="adj" fmla="val 12000"/>
+              <a:gd name="adj" fmla="val 10000"/>
             </a:avLst>
           </a:prstGeom>
           <a:solidFill>
-            <a:srgbClr val="E7F1EA"/>
+            <a:srgbClr val="114719"/>
           </a:solidFill>
           <a:ln>
             <a:noFill/>
           </a:ln>
         </p:spPr>
         <p:txBody>
-          <a:bodyPr wrap="square" lIns="164592" tIns="18288" rIns="164592" bIns="18288" rtlCol="0" anchor="ctr">
+          <a:bodyPr wrap="square" lIns="73152" tIns="45720" rIns="73152" bIns="45720" rtlCol="0" anchor="ctr">
             <a:noAutofit/>
           </a:bodyPr>
           <a:lstStyle/>
           <a:p>
-            <a:pPr marL="0" indent="0" algn="l">
+            <a:pPr marL="0" indent="0" algn="ctr">
               <a:lnSpc>
                 <a:spcPct val="100000"/>
               </a:lnSpc>
@@ -22208,49 +21990,75 @@
               <a:buNone/>
             </a:pPr>
             <a:r>
-              <a:rPr lang="pt-BR" sz="1800" b="1" dirty="0">
+              <a:rPr lang="pt-BR" sz="2400" b="1" dirty="0">
                 <a:solidFill>
-                  <a:srgbClr val="114719"/>
+                  <a:srgbClr val="FFFFFF"/>
                 </a:solidFill>
                 <a:latin typeface="Montserrat"/>
               </a:rPr>
-              <a:t>Robustez pós-resultado; pacote do corte.</a:t>
+              <a:t>Leitura</a:t>
             </a:r>
           </a:p>
         </p:txBody>
       </p:sp>
-      <p:pic>
-        <p:nvPicPr>
-          <p:cNvPr id="104" name="Figura" descr="H1 comparando municípios parecidos, por corte: fração das células com vaga imediata preenchidas sem controle, com localização e médicos na região na regressão e pareada (regra literal e regra do 48d), com IC 95%"/>
-          <p:cNvPicPr>
-            <a:picLocks noChangeAspect="1"/>
-          </p:cNvPicPr>
+      <p:sp>
+        <p:nvSpPr>
+          <p:cNvPr id="106" name="Item"/>
+          <p:cNvSpPr/>
           <p:nvPr/>
-        </p:nvPicPr>
-        <p:blipFill>
-          <a:blip r:embed="rId3"/>
-          <a:stretch>
-            <a:fillRect/>
-          </a:stretch>
-        </p:blipFill>
+        </p:nvSpPr>
         <p:spPr>
           <a:xfrm>
-            <a:off x="674624" y="804672"/>
-            <a:ext cx="10830560" cy="3803904"/>
+            <a:off x="2167128" y="4492752"/>
+            <a:ext cx="9720072" cy="1597152"/>
           </a:xfrm>
-          <a:prstGeom prst="rect">
-            <a:avLst/>
+          <a:prstGeom prst="roundRect">
+            <a:avLst>
+              <a:gd name="adj" fmla="val 6000"/>
+            </a:avLst>
           </a:prstGeom>
-          <a:ln w="6350">
+          <a:solidFill>
+            <a:srgbClr val="F4F8F5"/>
+          </a:solidFill>
+          <a:ln w="12700">
             <a:solidFill>
-              <a:srgbClr val="DDE7DF"/>
+              <a:srgbClr val="056429"/>
             </a:solidFill>
           </a:ln>
         </p:spPr>
-      </p:pic>
+        <p:txBody>
+          <a:bodyPr wrap="square" lIns="228600" tIns="36576" rIns="228600" bIns="36576" rtlCol="0" anchor="ctr">
+            <a:noAutofit/>
+          </a:bodyPr>
+          <a:lstStyle/>
+          <a:p>
+            <a:pPr marL="0" indent="0" algn="l">
+              <a:lnSpc>
+                <a:spcPct val="102000"/>
+              </a:lnSpc>
+              <a:spcBef>
+                <a:spcPts val="0"/>
+              </a:spcBef>
+              <a:spcAft>
+                <a:spcPts val="0"/>
+              </a:spcAft>
+              <a:buNone/>
+            </a:pPr>
+            <a:r>
+              <a:rPr lang="pt-BR" sz="2400" b="0" dirty="0">
+                <a:solidFill>
+                  <a:srgbClr val="3A3A3A"/>
+                </a:solidFill>
+                <a:latin typeface="Montserrat"/>
+              </a:rPr>
+              <a:t>a bolsa reordena vagas próximas: incentivo limitado</a:t>
+            </a:r>
+          </a:p>
+        </p:txBody>
+      </p:sp>
       <p:sp>
         <p:nvSpPr>
-          <p:cNvPr id="105" name="Fontes"/>
+          <p:cNvPr id="107" name="Fontes"/>
           <p:cNvSpPr txBox="1"/>
           <p:nvPr/>
         </p:nvSpPr>
@@ -22301,7 +22109,7 @@
                 </a:solidFill>
                 <a:latin typeface="Montserrat"/>
               </a:rPr>
-              <a:t>output/rdd_bolsa/CL_estimativas.csv e CL_balanco.csv (adendo 48d; doc 57r; auditoria 40); PM_estimativas.csv (adendo 48e; doc 57s; auditoria 43); HC_estimativas.csv (adendo 48c; auditoria 42); output/auditoria_H1/a36_estimativas.csv (auditoria 36).</a:t>
+              <a:t>modelo da banca 1; doc 07 da banca 2; docs 57i, 57p e 57x; auditorias 18 e 50.</a:t>
             </a:r>
           </a:p>
         </p:txBody>
@@ -22364,7 +22172,7 @@
                 </a:solidFill>
                 <a:latin typeface="Montserrat"/>
               </a:rPr>
-              <a:t>H1 · Por que o sinal sai negativo</a:t>
+              <a:t>Apêndice · O fato: sem aumento detectado no corte</a:t>
             </a:r>
           </a:p>
         </p:txBody>
@@ -22474,53 +22282,40 @@
               <a:t xml:space="preserve">Robustez  |  </a:t>
             </a:r>
             <a:r>
-              <a:rPr lang="pt-BR" sz="1000" b="1" dirty="0">
-                <a:solidFill>
-                  <a:srgbClr val="114719"/>
-                </a:solidFill>
-                <a:latin typeface="Montserrat"/>
-              </a:rPr>
-              <a:t>Discussão</a:t>
-            </a:r>
-            <a:r>
               <a:rPr lang="pt-BR" sz="1000" dirty="0">
                 <a:latin typeface="Montserrat"/>
               </a:rPr>
-              <a:t xml:space="preserve"/>
+              <a:t xml:space="preserve">Discussão</a:t>
             </a:r>
           </a:p>
         </p:txBody>
       </p:sp>
       <p:sp>
         <p:nvSpPr>
-          <p:cNvPr id="101" name="Rótulo"/>
+          <p:cNvPr id="101" name="Linha"/>
           <p:cNvSpPr/>
           <p:nvPr/>
         </p:nvSpPr>
         <p:spPr>
           <a:xfrm>
-            <a:off x="292608" y="896112"/>
-            <a:ext cx="1828800" cy="1147572"/>
+            <a:off x="292608" y="5212080"/>
+            <a:ext cx="11594592" cy="420624"/>
           </a:xfrm>
-          <a:prstGeom prst="roundRect">
-            <a:avLst>
-              <a:gd name="adj" fmla="val 10000"/>
-            </a:avLst>
+          <a:prstGeom prst="rect">
+            <a:avLst/>
           </a:prstGeom>
-          <a:solidFill>
-            <a:srgbClr val="114719"/>
-          </a:solidFill>
+          <a:noFill/>
           <a:ln>
             <a:noFill/>
           </a:ln>
         </p:spPr>
         <p:txBody>
-          <a:bodyPr wrap="square" lIns="73152" tIns="45720" rIns="73152" bIns="45720" rtlCol="0" anchor="ctr">
+          <a:bodyPr wrap="square" lIns="164592" tIns="18288" rIns="164592" bIns="18288" rtlCol="0" anchor="ctr">
             <a:noAutofit/>
           </a:bodyPr>
           <a:lstStyle/>
           <a:p>
-            <a:pPr marL="0" indent="0" algn="ctr">
+            <a:pPr marL="0" indent="0" algn="l">
               <a:lnSpc>
                 <a:spcPct val="100000"/>
               </a:lnSpc>
@@ -22533,102 +22328,47 @@
               <a:buNone/>
             </a:pPr>
             <a:r>
-              <a:rPr lang="pt-BR" sz="2000" b="1" dirty="0">
+              <a:rPr lang="pt-BR" sz="1800" b="0" dirty="0">
                 <a:solidFill>
-                  <a:srgbClr val="FFFFFF"/>
+                  <a:srgbClr val="3A3A3A"/>
                 </a:solidFill>
                 <a:latin typeface="Montserrat"/>
               </a:rPr>
-              <a:t>Reta</a:t>
+              <a:t>O negativo em 0,300 nunca passou no Holm; anda junto com a UF.</a:t>
             </a:r>
           </a:p>
         </p:txBody>
       </p:sp>
       <p:sp>
         <p:nvSpPr>
-          <p:cNvPr id="102" name="Item"/>
+          <p:cNvPr id="102" name="Cautela"/>
           <p:cNvSpPr/>
           <p:nvPr/>
         </p:nvSpPr>
         <p:spPr>
           <a:xfrm>
-            <a:off x="2258568" y="896112"/>
-            <a:ext cx="9628632" cy="1147572"/>
+            <a:off x="292608" y="5687568"/>
+            <a:ext cx="11594592" cy="420624"/>
           </a:xfrm>
           <a:prstGeom prst="roundRect">
             <a:avLst>
-              <a:gd name="adj" fmla="val 6000"/>
+              <a:gd name="adj" fmla="val 12000"/>
             </a:avLst>
           </a:prstGeom>
           <a:solidFill>
-            <a:srgbClr val="F4F8F5"/>
-          </a:solidFill>
-          <a:ln w="12700">
-            <a:solidFill>
-              <a:srgbClr val="056429"/>
-            </a:solidFill>
-          </a:ln>
-        </p:spPr>
-        <p:txBody>
-          <a:bodyPr wrap="square" lIns="228600" tIns="36576" rIns="228600" bIns="36576" rtlCol="0" anchor="ctr">
-            <a:noAutofit/>
-          </a:bodyPr>
-          <a:lstStyle/>
-          <a:p>
-            <a:pPr marL="0" indent="0" algn="l">
-              <a:lnSpc>
-                <a:spcPct val="102000"/>
-              </a:lnSpc>
-              <a:spcBef>
-                <a:spcPts val="0"/>
-              </a:spcBef>
-              <a:spcAft>
-                <a:spcPts val="0"/>
-              </a:spcAft>
-              <a:buNone/>
-            </a:pPr>
-            <a:r>
-              <a:rPr lang="pt-BR" sz="2000" b="0" dirty="0">
-                <a:solidFill>
-                  <a:srgbClr val="3A3A3A"/>
-                </a:solidFill>
-                <a:latin typeface="Montserrat"/>
-              </a:rPr>
-              <a:t>em 0,300, lados diferem em localização e médicos na região</a:t>
-            </a:r>
-          </a:p>
-        </p:txBody>
-      </p:sp>
-      <p:sp>
-        <p:nvSpPr>
-          <p:cNvPr id="103" name="Rótulo"/>
-          <p:cNvSpPr/>
-          <p:nvPr/>
-        </p:nvSpPr>
-        <p:spPr>
-          <a:xfrm>
-            <a:off x="292608" y="2244852"/>
-            <a:ext cx="1828800" cy="1147572"/>
-          </a:xfrm>
-          <a:prstGeom prst="roundRect">
-            <a:avLst>
-              <a:gd name="adj" fmla="val 10000"/>
-            </a:avLst>
-          </a:prstGeom>
-          <a:solidFill>
-            <a:srgbClr val="114719"/>
+            <a:srgbClr val="E7F1EA"/>
           </a:solidFill>
           <a:ln>
             <a:noFill/>
           </a:ln>
         </p:spPr>
         <p:txBody>
-          <a:bodyPr wrap="square" lIns="73152" tIns="45720" rIns="73152" bIns="45720" rtlCol="0" anchor="ctr">
+          <a:bodyPr wrap="square" lIns="164592" tIns="18288" rIns="164592" bIns="18288" rtlCol="0" anchor="ctr">
             <a:noAutofit/>
           </a:bodyPr>
           <a:lstStyle/>
           <a:p>
-            <a:pPr marL="0" indent="0" algn="ctr">
+            <a:pPr marL="0" indent="0" algn="l">
               <a:lnSpc>
                 <a:spcPct val="100000"/>
               </a:lnSpc>
@@ -22641,291 +22381,49 @@
               <a:buNone/>
             </a:pPr>
             <a:r>
-              <a:rPr lang="pt-BR" sz="2000" b="1" dirty="0">
+              <a:rPr lang="pt-BR" sz="1800" b="1" dirty="0">
                 <a:solidFill>
-                  <a:srgbClr val="FFFFFF"/>
+                  <a:srgbClr val="114719"/>
                 </a:solidFill>
                 <a:latin typeface="Montserrat"/>
               </a:rPr>
-              <a:t>Vagas</a:t>
+              <a:t>Pacote do corte; só detectaria saltos grandes.</a:t>
             </a:r>
           </a:p>
         </p:txBody>
       </p:sp>
-      <p:sp>
-        <p:nvSpPr>
-          <p:cNvPr id="104" name="Item"/>
-          <p:cNvSpPr/>
+      <p:pic>
+        <p:nvPicPr>
+          <p:cNvPr id="103" name="Figura" descr="O fato, por corte: salto do preenchimento das vagas imediatas sem controle, com efeito fixo de UF e pareando municípios da mesma UF, com IC 95%"/>
+          <p:cNvPicPr>
+            <a:picLocks noChangeAspect="1"/>
+          </p:cNvPicPr>
           <p:nvPr/>
-        </p:nvSpPr>
+        </p:nvPicPr>
+        <p:blipFill>
+          <a:blip r:embed="rId3"/>
+          <a:stretch>
+            <a:fillRect/>
+          </a:stretch>
+        </p:blipFill>
         <p:spPr>
           <a:xfrm>
-            <a:off x="2258568" y="2244852"/>
-            <a:ext cx="9628632" cy="1147572"/>
+            <a:off x="292608" y="1082635"/>
+            <a:ext cx="11594592" cy="3723467"/>
           </a:xfrm>
-          <a:prstGeom prst="roundRect">
-            <a:avLst>
-              <a:gd name="adj" fmla="val 6000"/>
-            </a:avLst>
+          <a:prstGeom prst="rect">
+            <a:avLst/>
           </a:prstGeom>
-          <a:solidFill>
-            <a:srgbClr val="F4F8F5"/>
-          </a:solidFill>
-          <a:ln w="12700">
+          <a:ln w="6350">
             <a:solidFill>
-              <a:srgbClr val="056429"/>
+              <a:srgbClr val="DDE7DF"/>
             </a:solidFill>
           </a:ln>
         </p:spPr>
-        <p:txBody>
-          <a:bodyPr wrap="square" lIns="228600" tIns="36576" rIns="228600" bIns="36576" rtlCol="0" anchor="ctr">
-            <a:noAutofit/>
-          </a:bodyPr>
-          <a:lstStyle/>
-          <a:p>
-            <a:pPr marL="0" indent="0" algn="l">
-              <a:lnSpc>
-                <a:spcPct val="102000"/>
-              </a:lnSpc>
-              <a:spcBef>
-                <a:spcPts val="0"/>
-              </a:spcBef>
-              <a:spcAft>
-                <a:spcPts val="0"/>
-              </a:spcAft>
-              <a:buNone/>
-            </a:pPr>
-            <a:r>
-              <a:rPr lang="pt-BR" sz="2000" b="0" dirty="0">
-                <a:solidFill>
-                  <a:srgbClr val="3A3A3A"/>
-                </a:solidFill>
-                <a:latin typeface="Montserrat"/>
-              </a:rPr>
-              <a:t>diferentes do lado de cima</a:t>
-            </a:r>
-          </a:p>
-        </p:txBody>
-      </p:sp>
+      </p:pic>
       <p:sp>
         <p:nvSpPr>
-          <p:cNvPr id="105" name="Rótulo"/>
-          <p:cNvSpPr/>
-          <p:nvPr/>
-        </p:nvSpPr>
-        <p:spPr>
-          <a:xfrm>
-            <a:off x="292608" y="3593592"/>
-            <a:ext cx="1828800" cy="1147572"/>
-          </a:xfrm>
-          <a:prstGeom prst="roundRect">
-            <a:avLst>
-              <a:gd name="adj" fmla="val 10000"/>
-            </a:avLst>
-          </a:prstGeom>
-          <a:solidFill>
-            <a:srgbClr val="114719"/>
-          </a:solidFill>
-          <a:ln>
-            <a:noFill/>
-          </a:ln>
-        </p:spPr>
-        <p:txBody>
-          <a:bodyPr wrap="square" lIns="73152" tIns="45720" rIns="73152" bIns="45720" rtlCol="0" anchor="ctr">
-            <a:noAutofit/>
-          </a:bodyPr>
-          <a:lstStyle/>
-          <a:p>
-            <a:pPr marL="0" indent="0" algn="ctr">
-              <a:lnSpc>
-                <a:spcPct val="100000"/>
-              </a:lnSpc>
-              <a:spcBef>
-                <a:spcPts val="0"/>
-              </a:spcBef>
-              <a:spcAft>
-                <a:spcPts val="0"/>
-              </a:spcAft>
-              <a:buNone/>
-            </a:pPr>
-            <a:r>
-              <a:rPr lang="pt-BR" sz="2000" b="1" dirty="0">
-                <a:solidFill>
-                  <a:srgbClr val="FFFFFF"/>
-                </a:solidFill>
-                <a:latin typeface="Montserrat"/>
-              </a:rPr>
-              <a:t>Porte</a:t>
-            </a:r>
-          </a:p>
-        </p:txBody>
-      </p:sp>
-      <p:sp>
-        <p:nvSpPr>
-          <p:cNvPr id="106" name="Item"/>
-          <p:cNvSpPr/>
-          <p:nvPr/>
-        </p:nvSpPr>
-        <p:spPr>
-          <a:xfrm>
-            <a:off x="2258568" y="3593592"/>
-            <a:ext cx="9628632" cy="1147572"/>
-          </a:xfrm>
-          <a:prstGeom prst="roundRect">
-            <a:avLst>
-              <a:gd name="adj" fmla="val 6000"/>
-            </a:avLst>
-          </a:prstGeom>
-          <a:solidFill>
-            <a:srgbClr val="F4F8F5"/>
-          </a:solidFill>
-          <a:ln w="12700">
-            <a:solidFill>
-              <a:srgbClr val="056429"/>
-            </a:solidFill>
-          </a:ln>
-        </p:spPr>
-        <p:txBody>
-          <a:bodyPr wrap="square" lIns="228600" tIns="36576" rIns="228600" bIns="36576" rtlCol="0" anchor="ctr">
-            <a:noAutofit/>
-          </a:bodyPr>
-          <a:lstStyle/>
-          <a:p>
-            <a:pPr marL="0" indent="0" algn="l">
-              <a:lnSpc>
-                <a:spcPct val="102000"/>
-              </a:lnSpc>
-              <a:spcBef>
-                <a:spcPts val="0"/>
-              </a:spcBef>
-              <a:spcAft>
-                <a:spcPts val="0"/>
-              </a:spcAft>
-              <a:buNone/>
-            </a:pPr>
-            <a:r>
-              <a:rPr lang="pt-BR" sz="2000" b="0" dirty="0">
-                <a:solidFill>
-                  <a:srgbClr val="3A3A3A"/>
-                </a:solidFill>
-                <a:latin typeface="Montserrat"/>
-              </a:rPr>
-              <a:t>municípios grandes logo abaixo de 0,400</a:t>
-            </a:r>
-          </a:p>
-        </p:txBody>
-      </p:sp>
-      <p:sp>
-        <p:nvSpPr>
-          <p:cNvPr id="107" name="Rótulo"/>
-          <p:cNvSpPr/>
-          <p:nvPr/>
-        </p:nvSpPr>
-        <p:spPr>
-          <a:xfrm>
-            <a:off x="292608" y="4942332"/>
-            <a:ext cx="1828800" cy="1147572"/>
-          </a:xfrm>
-          <a:prstGeom prst="roundRect">
-            <a:avLst>
-              <a:gd name="adj" fmla="val 10000"/>
-            </a:avLst>
-          </a:prstGeom>
-          <a:solidFill>
-            <a:srgbClr val="114719"/>
-          </a:solidFill>
-          <a:ln>
-            <a:noFill/>
-          </a:ln>
-        </p:spPr>
-        <p:txBody>
-          <a:bodyPr wrap="square" lIns="73152" tIns="45720" rIns="73152" bIns="45720" rtlCol="0" anchor="ctr">
-            <a:noAutofit/>
-          </a:bodyPr>
-          <a:lstStyle/>
-          <a:p>
-            <a:pPr marL="0" indent="0" algn="ctr">
-              <a:lnSpc>
-                <a:spcPct val="100000"/>
-              </a:lnSpc>
-              <a:spcBef>
-                <a:spcPts val="0"/>
-              </a:spcBef>
-              <a:spcAft>
-                <a:spcPts val="0"/>
-              </a:spcAft>
-              <a:buNone/>
-            </a:pPr>
-            <a:r>
-              <a:rPr lang="pt-BR" sz="2000" b="1" dirty="0">
-                <a:solidFill>
-                  <a:srgbClr val="FFFFFF"/>
-                </a:solidFill>
-                <a:latin typeface="Montserrat"/>
-              </a:rPr>
-              <a:t>Incentivo</a:t>
-            </a:r>
-          </a:p>
-        </p:txBody>
-      </p:sp>
-      <p:sp>
-        <p:nvSpPr>
-          <p:cNvPr id="108" name="Item"/>
-          <p:cNvSpPr/>
-          <p:nvPr/>
-        </p:nvSpPr>
-        <p:spPr>
-          <a:xfrm>
-            <a:off x="2258568" y="4942332"/>
-            <a:ext cx="9628632" cy="1147572"/>
-          </a:xfrm>
-          <a:prstGeom prst="roundRect">
-            <a:avLst>
-              <a:gd name="adj" fmla="val 6000"/>
-            </a:avLst>
-          </a:prstGeom>
-          <a:solidFill>
-            <a:srgbClr val="F4F8F5"/>
-          </a:solidFill>
-          <a:ln w="12700">
-            <a:solidFill>
-              <a:srgbClr val="056429"/>
-            </a:solidFill>
-          </a:ln>
-        </p:spPr>
-        <p:txBody>
-          <a:bodyPr wrap="square" lIns="228600" tIns="36576" rIns="228600" bIns="36576" rtlCol="0" anchor="ctr">
-            <a:noAutofit/>
-          </a:bodyPr>
-          <a:lstStyle/>
-          <a:p>
-            <a:pPr marL="0" indent="0" algn="l">
-              <a:lnSpc>
-                <a:spcPct val="102000"/>
-              </a:lnSpc>
-              <a:spcBef>
-                <a:spcPts val="0"/>
-              </a:spcBef>
-              <a:spcAft>
-                <a:spcPts val="0"/>
-              </a:spcAft>
-              <a:buNone/>
-            </a:pPr>
-            <a:r>
-              <a:rPr lang="pt-BR" sz="2000" b="0" dirty="0">
-                <a:solidFill>
-                  <a:srgbClr val="3A3A3A"/>
-                </a:solidFill>
-                <a:latin typeface="Montserrat"/>
-              </a:rPr>
-              <a:t>nenhum individual muda em 0,300</a:t>
-            </a:r>
-          </a:p>
-        </p:txBody>
-      </p:sp>
-      <p:sp>
-        <p:nvSpPr>
-          <p:cNvPr id="109" name="Fontes"/>
+          <p:cNvPr id="104" name="Fontes"/>
           <p:cNvSpPr txBox="1"/>
           <p:nvPr/>
         </p:nvSpPr>
@@ -22976,7 +22474,7 @@
                 </a:solidFill>
                 <a:latin typeface="Montserrat"/>
               </a:rPr>
-              <a:t>síntese da Robustez; doc 49b; doc 57l (auditoria 33); doc 57m (auditoria 37); doc 57r (auditoria 40); doc 57t (auditoria 44); doc 63; auditorias 18, 35 e 36.</a:t>
+              <a:t>output/rdd_bolsa/HI_estimativas.csv (adendo 48b; doc 57n; auditoria 38); PL_estimativas.csv (adendo 48h; doc 57w; auditoria 47); output/apresentacao_banca2/curto_fato.png.</a:t>
             </a:r>
           </a:p>
         </p:txBody>
@@ -23035,11 +22533,11 @@
             <a:r>
               <a:rPr lang="pt-BR" sz="2400" b="1" dirty="0">
                 <a:solidFill>
-                  <a:srgbClr val="C4CCC6"/>
+                  <a:srgbClr val="FFFFFF"/>
                 </a:solidFill>
                 <a:latin typeface="Montserrat"/>
               </a:rPr>
-              <a:t>H2 e H3 · plano B: origem pesa; oferta incerta</a:t>
+              <a:t>Apêndice · H3: oferta, numa frase</a:t>
             </a:r>
           </a:p>
         </p:txBody>
@@ -23149,48 +22647,92 @@
               <a:t xml:space="preserve">Robustez  |  </a:t>
             </a:r>
             <a:r>
-              <a:rPr lang="pt-BR" sz="1000" b="1" dirty="0">
-                <a:solidFill>
-                  <a:srgbClr val="114719"/>
-                </a:solidFill>
-                <a:latin typeface="Montserrat"/>
-              </a:rPr>
-              <a:t>Discussão</a:t>
-            </a:r>
-            <a:r>
               <a:rPr lang="pt-BR" sz="1000" dirty="0">
                 <a:latin typeface="Montserrat"/>
               </a:rPr>
-              <a:t xml:space="preserve"/>
+              <a:t xml:space="preserve">Discussão</a:t>
             </a:r>
           </a:p>
         </p:txBody>
       </p:sp>
       <p:sp>
         <p:nvSpPr>
-          <p:cNvPr id="101" name="Rótulo plano B"/>
+          <p:cNvPr id="101" name="Cautela"/>
           <p:cNvSpPr/>
           <p:nvPr/>
         </p:nvSpPr>
         <p:spPr>
           <a:xfrm>
-            <a:off x="292608" y="896112"/>
-            <a:ext cx="2590800" cy="1597152"/>
+            <a:off x="292608" y="5669280"/>
+            <a:ext cx="11594592" cy="420624"/>
           </a:xfrm>
           <a:prstGeom prst="roundRect">
             <a:avLst>
-              <a:gd name="adj" fmla="val 10000"/>
+              <a:gd name="adj" fmla="val 12000"/>
             </a:avLst>
           </a:prstGeom>
           <a:solidFill>
-            <a:srgbClr val="A3A39E"/>
+            <a:srgbClr val="E7F1EA"/>
           </a:solidFill>
           <a:ln>
             <a:noFill/>
           </a:ln>
         </p:spPr>
         <p:txBody>
-          <a:bodyPr wrap="square" lIns="73152" tIns="45720" rIns="73152" bIns="45720" rtlCol="0" anchor="ctr">
+          <a:bodyPr wrap="square" lIns="164592" tIns="18288" rIns="164592" bIns="18288" rtlCol="0" anchor="ctr">
+            <a:noAutofit/>
+          </a:bodyPr>
+          <a:lstStyle/>
+          <a:p>
+            <a:pPr marL="0" indent="0" algn="l">
+              <a:lnSpc>
+                <a:spcPct val="100000"/>
+              </a:lnSpc>
+              <a:spcBef>
+                <a:spcPts val="0"/>
+              </a:spcBef>
+              <a:spcAft>
+                <a:spcPts val="0"/>
+              </a:spcAft>
+              <a:buNone/>
+            </a:pPr>
+            <a:r>
+              <a:rPr lang="pt-BR" sz="1800" b="1" dirty="0">
+                <a:solidFill>
+                  <a:srgbClr val="114719"/>
+                </a:solidFill>
+                <a:latin typeface="Montserrat"/>
+              </a:rPr>
+              <a:t>Associação; vínculo cadastrado não é presença.</a:t>
+            </a:r>
+          </a:p>
+        </p:txBody>
+      </p:sp>
+      <p:sp>
+        <p:nvSpPr>
+          <p:cNvPr id="102" name="Frase"/>
+          <p:cNvSpPr/>
+          <p:nvPr/>
+        </p:nvSpPr>
+        <p:spPr>
+          <a:xfrm>
+            <a:off x="658368" y="1911096"/>
+            <a:ext cx="10863072" cy="2377440"/>
+          </a:xfrm>
+          <a:prstGeom prst="roundRect">
+            <a:avLst>
+              <a:gd name="adj" fmla="val 8000"/>
+            </a:avLst>
+          </a:prstGeom>
+          <a:solidFill>
+            <a:srgbClr val="114719"/>
+          </a:solidFill>
+          <a:ln>
+            <a:noFill/>
+          </a:ln>
+        </p:spPr>
+        <p:txBody>
+          <a:bodyPr wrap="square" lIns="411480" tIns="91440" rIns="411480" bIns="91440" rtlCol="0" anchor="ctr">
             <a:noAutofit/>
           </a:bodyPr>
           <a:lstStyle/>
@@ -23208,291 +22750,20 @@
               <a:buNone/>
             </a:pPr>
             <a:r>
-              <a:rPr lang="pt-BR" sz="2000" b="1" dirty="0">
+              <a:rPr lang="pt-BR" sz="3000" b="0" dirty="0">
                 <a:solidFill>
                   <a:srgbClr val="FFFFFF"/>
                 </a:solidFill>
                 <a:latin typeface="Montserrat"/>
               </a:rPr>
-              <a:t>H2</a:t>
+              <a:t>O médico que chega cadastra +6,6 h/sem; metade já estava lá</a:t>
             </a:r>
           </a:p>
         </p:txBody>
       </p:sp>
       <p:sp>
         <p:nvSpPr>
-          <p:cNvPr id="102" name="Item plano B"/>
-          <p:cNvSpPr/>
-          <p:nvPr/>
-        </p:nvSpPr>
-        <p:spPr>
-          <a:xfrm>
-            <a:off x="3020568" y="896112"/>
-            <a:ext cx="8866632" cy="1597152"/>
-          </a:xfrm>
-          <a:prstGeom prst="roundRect">
-            <a:avLst>
-              <a:gd name="adj" fmla="val 6000"/>
-            </a:avLst>
-          </a:prstGeom>
-          <a:solidFill>
-            <a:srgbClr val="F2F2F0"/>
-          </a:solidFill>
-          <a:ln w="12700">
-            <a:solidFill>
-              <a:srgbClr val="C9C9C4"/>
-            </a:solidFill>
-          </a:ln>
-        </p:spPr>
-        <p:txBody>
-          <a:bodyPr wrap="square" lIns="228600" tIns="36576" rIns="228600" bIns="36576" rtlCol="0" anchor="ctr">
-            <a:noAutofit/>
-          </a:bodyPr>
-          <a:lstStyle/>
-          <a:p>
-            <a:pPr marL="0" indent="0" algn="l">
-              <a:lnSpc>
-                <a:spcPct val="102000"/>
-              </a:lnSpc>
-              <a:spcBef>
-                <a:spcPts val="0"/>
-              </a:spcBef>
-              <a:spcAft>
-                <a:spcPts val="0"/>
-              </a:spcAft>
-              <a:buNone/>
-            </a:pPr>
-            <a:r>
-              <a:rPr lang="pt-BR" sz="2000" b="0" dirty="0">
-                <a:solidFill>
-                  <a:srgbClr val="8A8A85"/>
-                </a:solidFill>
-                <a:latin typeface="Montserrat"/>
-              </a:rPr>
-              <a:t>origem supera toda a bolsa: 2,34 · 1,31 · 2,37 (ciclos 1–3)</a:t>
-            </a:r>
-          </a:p>
-        </p:txBody>
-      </p:sp>
-      <p:sp>
-        <p:nvSpPr>
-          <p:cNvPr id="103" name="Rótulo plano B"/>
-          <p:cNvSpPr/>
-          <p:nvPr/>
-        </p:nvSpPr>
-        <p:spPr>
-          <a:xfrm>
-            <a:off x="292608" y="2694432"/>
-            <a:ext cx="2590800" cy="1597152"/>
-          </a:xfrm>
-          <a:prstGeom prst="roundRect">
-            <a:avLst>
-              <a:gd name="adj" fmla="val 10000"/>
-            </a:avLst>
-          </a:prstGeom>
-          <a:solidFill>
-            <a:srgbClr val="A3A39E"/>
-          </a:solidFill>
-          <a:ln>
-            <a:noFill/>
-          </a:ln>
-        </p:spPr>
-        <p:txBody>
-          <a:bodyPr wrap="square" lIns="73152" tIns="45720" rIns="73152" bIns="45720" rtlCol="0" anchor="ctr">
-            <a:noAutofit/>
-          </a:bodyPr>
-          <a:lstStyle/>
-          <a:p>
-            <a:pPr marL="0" indent="0" algn="ctr">
-              <a:lnSpc>
-                <a:spcPct val="100000"/>
-              </a:lnSpc>
-              <a:spcBef>
-                <a:spcPts val="0"/>
-              </a:spcBef>
-              <a:spcAft>
-                <a:spcPts val="0"/>
-              </a:spcAft>
-              <a:buNone/>
-            </a:pPr>
-            <a:r>
-              <a:rPr lang="pt-BR" sz="2000" b="1" dirty="0">
-                <a:solidFill>
-                  <a:srgbClr val="FFFFFF"/>
-                </a:solidFill>
-                <a:latin typeface="Montserrat"/>
-              </a:rPr>
-              <a:t>H3</a:t>
-            </a:r>
-          </a:p>
-        </p:txBody>
-      </p:sp>
-      <p:sp>
-        <p:nvSpPr>
-          <p:cNvPr id="104" name="Item plano B"/>
-          <p:cNvSpPr/>
-          <p:nvPr/>
-        </p:nvSpPr>
-        <p:spPr>
-          <a:xfrm>
-            <a:off x="3020568" y="2694432"/>
-            <a:ext cx="8866632" cy="1597152"/>
-          </a:xfrm>
-          <a:prstGeom prst="roundRect">
-            <a:avLst>
-              <a:gd name="adj" fmla="val 6000"/>
-            </a:avLst>
-          </a:prstGeom>
-          <a:solidFill>
-            <a:srgbClr val="F2F2F0"/>
-          </a:solidFill>
-          <a:ln w="12700">
-            <a:solidFill>
-              <a:srgbClr val="C9C9C4"/>
-            </a:solidFill>
-          </a:ln>
-        </p:spPr>
-        <p:txBody>
-          <a:bodyPr wrap="square" lIns="228600" tIns="36576" rIns="228600" bIns="36576" rtlCol="0" anchor="ctr">
-            <a:noAutofit/>
-          </a:bodyPr>
-          <a:lstStyle/>
-          <a:p>
-            <a:pPr marL="0" indent="0" algn="l">
-              <a:lnSpc>
-                <a:spcPct val="102000"/>
-              </a:lnSpc>
-              <a:spcBef>
-                <a:spcPts val="0"/>
-              </a:spcBef>
-              <a:spcAft>
-                <a:spcPts val="0"/>
-              </a:spcAft>
-              <a:buNone/>
-            </a:pPr>
-            <a:r>
-              <a:rPr lang="pt-BR" sz="2000" b="0" dirty="0">
-                <a:solidFill>
-                  <a:srgbClr val="8A8A85"/>
-                </a:solidFill>
-                <a:latin typeface="Montserrat"/>
-              </a:rPr>
-              <a:t>+6,6 h/sem do próprio médico; metade já estava lá</a:t>
-            </a:r>
-          </a:p>
-        </p:txBody>
-      </p:sp>
-      <p:sp>
-        <p:nvSpPr>
-          <p:cNvPr id="105" name="Rótulo plano B"/>
-          <p:cNvSpPr/>
-          <p:nvPr/>
-        </p:nvSpPr>
-        <p:spPr>
-          <a:xfrm>
-            <a:off x="292608" y="4492752"/>
-            <a:ext cx="2590800" cy="1597152"/>
-          </a:xfrm>
-          <a:prstGeom prst="roundRect">
-            <a:avLst>
-              <a:gd name="adj" fmla="val 10000"/>
-            </a:avLst>
-          </a:prstGeom>
-          <a:solidFill>
-            <a:srgbClr val="A3A39E"/>
-          </a:solidFill>
-          <a:ln>
-            <a:noFill/>
-          </a:ln>
-        </p:spPr>
-        <p:txBody>
-          <a:bodyPr wrap="square" lIns="73152" tIns="45720" rIns="73152" bIns="45720" rtlCol="0" anchor="ctr">
-            <a:noAutofit/>
-          </a:bodyPr>
-          <a:lstStyle/>
-          <a:p>
-            <a:pPr marL="0" indent="0" algn="ctr">
-              <a:lnSpc>
-                <a:spcPct val="100000"/>
-              </a:lnSpc>
-              <a:spcBef>
-                <a:spcPts val="0"/>
-              </a:spcBef>
-              <a:spcAft>
-                <a:spcPts val="0"/>
-              </a:spcAft>
-              <a:buNone/>
-            </a:pPr>
-            <a:r>
-              <a:rPr lang="pt-BR" sz="2000" b="1" dirty="0">
-                <a:solidFill>
-                  <a:srgbClr val="FFFFFF"/>
-                </a:solidFill>
-                <a:latin typeface="Montserrat"/>
-              </a:rPr>
-              <a:t>H3 · município</a:t>
-            </a:r>
-          </a:p>
-        </p:txBody>
-      </p:sp>
-      <p:sp>
-        <p:nvSpPr>
-          <p:cNvPr id="106" name="Item plano B"/>
-          <p:cNvSpPr/>
-          <p:nvPr/>
-        </p:nvSpPr>
-        <p:spPr>
-          <a:xfrm>
-            <a:off x="3020568" y="4492752"/>
-            <a:ext cx="8866632" cy="1597152"/>
-          </a:xfrm>
-          <a:prstGeom prst="roundRect">
-            <a:avLst>
-              <a:gd name="adj" fmla="val 6000"/>
-            </a:avLst>
-          </a:prstGeom>
-          <a:solidFill>
-            <a:srgbClr val="F2F2F0"/>
-          </a:solidFill>
-          <a:ln w="12700">
-            <a:solidFill>
-              <a:srgbClr val="C9C9C4"/>
-            </a:solidFill>
-          </a:ln>
-        </p:spPr>
-        <p:txBody>
-          <a:bodyPr wrap="square" lIns="228600" tIns="36576" rIns="228600" bIns="36576" rtlCol="0" anchor="ctr">
-            <a:noAutofit/>
-          </a:bodyPr>
-          <a:lstStyle/>
-          <a:p>
-            <a:pPr marL="0" indent="0" algn="l">
-              <a:lnSpc>
-                <a:spcPct val="102000"/>
-              </a:lnSpc>
-              <a:spcBef>
-                <a:spcPts val="0"/>
-              </a:spcBef>
-              <a:spcAft>
-                <a:spcPts val="0"/>
-              </a:spcAft>
-              <a:buNone/>
-            </a:pPr>
-            <a:r>
-              <a:rPr lang="pt-BR" sz="2000" b="0" dirty="0">
-                <a:solidFill>
-                  <a:srgbClr val="8A8A85"/>
-                </a:solidFill>
-                <a:latin typeface="Montserrat"/>
-              </a:rPr>
-              <a:t>corte: oferta igual, Holm 1,000; outros ficam</a:t>
-            </a:r>
-          </a:p>
-        </p:txBody>
-      </p:sp>
-      <p:sp>
-        <p:nvSpPr>
-          <p:cNvPr id="107" name="Fontes"/>
+          <p:cNvPr id="103" name="Fontes"/>
           <p:cNvSpPr txBox="1"/>
           <p:nvPr/>
         </p:nvSpPr>
@@ -23543,574 +22814,7 @@
                 </a:solidFill>
                 <a:latin typeface="Montserrat"/>
               </a:rPr>
-              <a:t>output/rdd_bolsa/P1h_magnitudes.csv (doc 57i; auditoria 31); S57_resumo.json (doc 57d); CA_estimativas.csv (doc 57h); OL_resumo.json (doc 57k; auditoria 34); OC_estimativas.csv (protocolo 64; doc 57q; auditoria 39).</a:t>
-            </a:r>
-          </a:p>
-        </p:txBody>
-      </p:sp>
-    </p:spTree>
-  </p:cSld>
-  <p:clrMapOvr>
-    <a:masterClrMapping/>
-  </p:clrMapOvr>
-</p:sld>
-</file>
-
-<file path=ppt/slides/slide50.xml><?xml version="1.0" encoding="utf-8"?>
-<p:sld xmlns:a="http://schemas.openxmlformats.org/drawingml/2006/main" xmlns:r="http://schemas.openxmlformats.org/officeDocument/2006/relationships" xmlns:p="http://schemas.openxmlformats.org/presentationml/2006/main">
-  <p:cSld>
-    <p:spTree>
-      <p:nvGrpSpPr>
-        <p:cNvPr id="1" name=""/>
-        <p:cNvGrpSpPr/>
-        <p:nvPr/>
-      </p:nvGrpSpPr>
-      <p:grpSpPr>
-        <a:xfrm>
-          <a:off x="0" y="0"/>
-          <a:ext cx="0" cy="0"/>
-          <a:chOff x="0" y="0"/>
-          <a:chExt cx="0" cy="0"/>
-        </a:xfrm>
-      </p:grpSpPr>
-      <p:sp>
-        <p:nvSpPr>
-          <p:cNvPr id="2" name="Título"/>
-          <p:cNvSpPr>
-            <a:spLocks noGrp="1"/>
-          </p:cNvSpPr>
-          <p:nvPr>
-            <p:ph type="title"/>
-          </p:nvPr>
-        </p:nvSpPr>
-        <p:spPr/>
-        <p:txBody>
-          <a:bodyPr>
-            <a:normAutofit/>
-          </a:bodyPr>
-          <a:lstStyle/>
-          <a:p>
-            <a:pPr marL="0" indent="0" algn="l">
-              <a:lnSpc>
-                <a:spcPct val="104000"/>
-              </a:lnSpc>
-              <a:spcAft>
-                <a:spcPts val="0"/>
-              </a:spcAft>
-              <a:buNone/>
-            </a:pPr>
-            <a:r>
-              <a:rPr lang="pt-BR" sz="2400" b="1" dirty="0">
-                <a:solidFill>
-                  <a:srgbClr val="FFFFFF"/>
-                </a:solidFill>
-                <a:latin typeface="Montserrat"/>
-              </a:rPr>
-              <a:t>Discussão: por que não sobe? Um incentivo limitado</a:t>
-            </a:r>
-          </a:p>
-        </p:txBody>
-      </p:sp>
-      <p:sp>
-        <p:nvSpPr>
-          <p:cNvPr id="3" name="Número da página"/>
-          <p:cNvSpPr>
-            <a:spLocks noGrp="1"/>
-          </p:cNvSpPr>
-          <p:nvPr>
-            <p:ph type="body" sz="quarter" idx="18"/>
-          </p:nvPr>
-        </p:nvSpPr>
-        <p:spPr>
-          <a:xfrm>
-            <a:off x="11706744" y="6457042"/>
-            <a:ext cx="492080" cy="400640"/>
-          </a:xfrm>
-        </p:spPr>
-        <p:txBody>
-          <a:bodyPr anchor="ctr">
-            <a:normAutofit/>
-          </a:bodyPr>
-          <a:lstStyle/>
-          <a:p>
-            <a:pPr algn="ctr"/>
-            <a:fld id="{B1A5E0C2-5F3A-4C7E-9D11-7A2E6C0F4B01}" type="slidenum">
-              <a:rPr lang="pt-BR" sz="1400" b="1">
-                <a:solidFill>
-                  <a:srgbClr val="BFBFBF"/>
-                </a:solidFill>
-                <a:latin typeface="Montserrat"/>
-              </a:rPr>
-              <a:t>‹#›</a:t>
-            </a:fld>
-            <a:endParaRPr lang="pt-BR" sz="1400" b="1">
-              <a:solidFill>
-                <a:srgbClr val="BFBFBF"/>
-              </a:solidFill>
-            </a:endParaRPr>
-          </a:p>
-        </p:txBody>
-      </p:sp>
-      <p:sp>
-        <p:nvSpPr>
-          <p:cNvPr id="4" name="Navegação do rodapé"/>
-          <p:cNvSpPr txBox="1"/>
-          <p:nvPr/>
-        </p:nvSpPr>
-        <p:spPr>
-          <a:xfrm>
-            <a:off x="196860" y="6639248"/>
-            <a:ext cx="9223026" cy="246221"/>
-          </a:xfrm>
-          <a:prstGeom prst="rect">
-            <a:avLst/>
-          </a:prstGeom>
-          <a:noFill/>
-        </p:spPr>
-        <p:txBody>
-          <a:bodyPr wrap="square" rtlCol="0">
-            <a:spAutoFit/>
-          </a:bodyPr>
-          <a:lstStyle/>
-          <a:p>
-            <a:r>
-              <a:rPr lang="pt-BR" sz="1000" dirty="0">
-                <a:latin typeface="Montserrat"/>
-              </a:rPr>
-              <a:t xml:space="preserve">Hipótese  |  </a:t>
-            </a:r>
-            <a:r>
-              <a:rPr lang="pt-BR" sz="1000" dirty="0">
-                <a:latin typeface="Montserrat"/>
-              </a:rPr>
-              <a:t xml:space="preserve">Dados  |  </a:t>
-            </a:r>
-            <a:r>
-              <a:rPr lang="pt-BR" sz="1000" dirty="0">
-                <a:latin typeface="Montserrat"/>
-              </a:rPr>
-              <a:t xml:space="preserve">Análise descritiva  |  </a:t>
-            </a:r>
-            <a:r>
-              <a:rPr lang="pt-BR" sz="1000" dirty="0">
-                <a:latin typeface="Montserrat"/>
-              </a:rPr>
-              <a:t xml:space="preserve">Metodologia  |  </a:t>
-            </a:r>
-            <a:r>
-              <a:rPr lang="pt-BR" sz="1000" dirty="0">
-                <a:latin typeface="Montserrat"/>
-              </a:rPr>
-              <a:t xml:space="preserve">Identificação  |  </a:t>
-            </a:r>
-            <a:r>
-              <a:rPr lang="pt-BR" sz="1000" dirty="0">
-                <a:latin typeface="Montserrat"/>
-              </a:rPr>
-              <a:t xml:space="preserve">Resultados  |  </a:t>
-            </a:r>
-            <a:r>
-              <a:rPr lang="pt-BR" sz="1000" dirty="0">
-                <a:latin typeface="Montserrat"/>
-              </a:rPr>
-              <a:t xml:space="preserve">Robustez  |  </a:t>
-            </a:r>
-            <a:r>
-              <a:rPr lang="pt-BR" sz="1000" b="1" dirty="0">
-                <a:solidFill>
-                  <a:srgbClr val="114719"/>
-                </a:solidFill>
-                <a:latin typeface="Montserrat"/>
-              </a:rPr>
-              <a:t>Discussão</a:t>
-            </a:r>
-            <a:r>
-              <a:rPr lang="pt-BR" sz="1000" dirty="0">
-                <a:latin typeface="Montserrat"/>
-              </a:rPr>
-              <a:t xml:space="preserve"/>
-            </a:r>
-          </a:p>
-        </p:txBody>
-      </p:sp>
-      <p:sp>
-        <p:nvSpPr>
-          <p:cNvPr id="101" name="Rótulo"/>
-          <p:cNvSpPr/>
-          <p:nvPr/>
-        </p:nvSpPr>
-        <p:spPr>
-          <a:xfrm>
-            <a:off x="292608" y="896112"/>
-            <a:ext cx="3200400" cy="1604603"/>
-          </a:xfrm>
-          <a:prstGeom prst="roundRect">
-            <a:avLst>
-              <a:gd name="adj" fmla="val 10000"/>
-            </a:avLst>
-          </a:prstGeom>
-          <a:solidFill>
-            <a:srgbClr val="114719"/>
-          </a:solidFill>
-          <a:ln>
-            <a:noFill/>
-          </a:ln>
-        </p:spPr>
-        <p:txBody>
-          <a:bodyPr wrap="square" lIns="73152" tIns="45720" rIns="73152" bIns="45720" rtlCol="0" anchor="ctr">
-            <a:noAutofit/>
-          </a:bodyPr>
-          <a:lstStyle/>
-          <a:p>
-            <a:pPr marL="0" indent="0" algn="ctr">
-              <a:lnSpc>
-                <a:spcPct val="100000"/>
-              </a:lnSpc>
-              <a:spcBef>
-                <a:spcPts val="0"/>
-              </a:spcBef>
-              <a:spcAft>
-                <a:spcPts val="0"/>
-              </a:spcAft>
-              <a:buNone/>
-            </a:pPr>
-            <a:r>
-              <a:rPr lang="pt-BR" sz="2000" b="1" dirty="0">
-                <a:solidFill>
-                  <a:srgbClr val="FFFFFF"/>
-                </a:solidFill>
-                <a:latin typeface="Montserrat"/>
-              </a:rPr>
-              <a:t>Incentivo limitado</a:t>
-            </a:r>
-          </a:p>
-        </p:txBody>
-      </p:sp>
-      <p:sp>
-        <p:nvSpPr>
-          <p:cNvPr id="102" name="Item"/>
-          <p:cNvSpPr/>
-          <p:nvPr/>
-        </p:nvSpPr>
-        <p:spPr>
-          <a:xfrm>
-            <a:off x="3630168" y="896112"/>
-            <a:ext cx="8257032" cy="1604603"/>
-          </a:xfrm>
-          <a:prstGeom prst="roundRect">
-            <a:avLst>
-              <a:gd name="adj" fmla="val 6000"/>
-            </a:avLst>
-          </a:prstGeom>
-          <a:solidFill>
-            <a:srgbClr val="F4F8F5"/>
-          </a:solidFill>
-          <a:ln w="12700">
-            <a:solidFill>
-              <a:srgbClr val="056429"/>
-            </a:solidFill>
-          </a:ln>
-        </p:spPr>
-        <p:txBody>
-          <a:bodyPr wrap="square" lIns="228600" tIns="36576" rIns="228600" bIns="36576" rtlCol="0" anchor="ctr">
-            <a:noAutofit/>
-          </a:bodyPr>
-          <a:lstStyle/>
-          <a:p>
-            <a:pPr marL="0" indent="0" algn="l">
-              <a:lnSpc>
-                <a:spcPct val="102000"/>
-              </a:lnSpc>
-              <a:spcBef>
-                <a:spcPts val="0"/>
-              </a:spcBef>
-              <a:spcAft>
-                <a:spcPts val="0"/>
-              </a:spcAft>
-              <a:buNone/>
-            </a:pPr>
-            <a:r>
-              <a:rPr lang="pt-BR" sz="2000" b="0" dirty="0">
-                <a:solidFill>
-                  <a:srgbClr val="3A3A3A"/>
-                </a:solidFill>
-                <a:latin typeface="Montserrat"/>
-              </a:rPr>
-              <a:t>a bolsa mexe numa variável; o custo do lugar continua contra</a:t>
-            </a:r>
-          </a:p>
-        </p:txBody>
-      </p:sp>
-      <p:sp>
-        <p:nvSpPr>
-          <p:cNvPr id="103" name="Rótulo"/>
-          <p:cNvSpPr/>
-          <p:nvPr/>
-        </p:nvSpPr>
-        <p:spPr>
-          <a:xfrm>
-            <a:off x="292608" y="2701883"/>
-            <a:ext cx="3200400" cy="1593427"/>
-          </a:xfrm>
-          <a:prstGeom prst="roundRect">
-            <a:avLst>
-              <a:gd name="adj" fmla="val 10000"/>
-            </a:avLst>
-          </a:prstGeom>
-          <a:solidFill>
-            <a:srgbClr val="114719"/>
-          </a:solidFill>
-          <a:ln>
-            <a:noFill/>
-          </a:ln>
-        </p:spPr>
-        <p:txBody>
-          <a:bodyPr wrap="square" lIns="73152" tIns="45720" rIns="73152" bIns="45720" rtlCol="0" anchor="ctr">
-            <a:noAutofit/>
-          </a:bodyPr>
-          <a:lstStyle/>
-          <a:p>
-            <a:pPr marL="0" indent="0" algn="ctr">
-              <a:lnSpc>
-                <a:spcPct val="100000"/>
-              </a:lnSpc>
-              <a:spcBef>
-                <a:spcPts val="0"/>
-              </a:spcBef>
-              <a:spcAft>
-                <a:spcPts val="0"/>
-              </a:spcAft>
-              <a:buNone/>
-            </a:pPr>
-            <a:r>
-              <a:rPr lang="pt-BR" sz="2000" b="1" dirty="0">
-                <a:solidFill>
-                  <a:srgbClr val="FFFFFF"/>
-                </a:solidFill>
-                <a:latin typeface="Montserrat"/>
-              </a:rPr>
-              <a:t>Pacote do corte</a:t>
-            </a:r>
-          </a:p>
-        </p:txBody>
-      </p:sp>
-      <p:sp>
-        <p:nvSpPr>
-          <p:cNvPr id="104" name="Item"/>
-          <p:cNvSpPr/>
-          <p:nvPr/>
-        </p:nvSpPr>
-        <p:spPr>
-          <a:xfrm>
-            <a:off x="3630168" y="2701883"/>
-            <a:ext cx="8257032" cy="1593427"/>
-          </a:xfrm>
-          <a:prstGeom prst="roundRect">
-            <a:avLst>
-              <a:gd name="adj" fmla="val 6000"/>
-            </a:avLst>
-          </a:prstGeom>
-          <a:solidFill>
-            <a:srgbClr val="F4F8F5"/>
-          </a:solidFill>
-          <a:ln w="12700">
-            <a:solidFill>
-              <a:srgbClr val="056429"/>
-            </a:solidFill>
-          </a:ln>
-        </p:spPr>
-        <p:txBody>
-          <a:bodyPr wrap="square" lIns="228600" tIns="36576" rIns="228600" bIns="36576" rtlCol="0" anchor="ctr">
-            <a:noAutofit/>
-          </a:bodyPr>
-          <a:lstStyle/>
-          <a:p>
-            <a:pPr marL="0" indent="0" algn="l">
-              <a:lnSpc>
-                <a:spcPct val="102000"/>
-              </a:lnSpc>
-              <a:spcBef>
-                <a:spcPts val="0"/>
-              </a:spcBef>
-              <a:spcAft>
-                <a:spcPts val="0"/>
-              </a:spcAft>
-              <a:buNone/>
-            </a:pPr>
-            <a:r>
-              <a:rPr lang="pt-BR" sz="2000" b="0" dirty="0">
-                <a:solidFill>
-                  <a:srgbClr val="3A3A3A"/>
-                </a:solidFill>
-                <a:latin typeface="Montserrat"/>
-              </a:rPr>
-              <a:t>com a bolsa, mudam outras regras</a:t>
-            </a:r>
-          </a:p>
-        </p:txBody>
-      </p:sp>
-      <p:sp>
-        <p:nvSpPr>
-          <p:cNvPr id="105" name="Rótulo"/>
-          <p:cNvSpPr/>
-          <p:nvPr/>
-        </p:nvSpPr>
-        <p:spPr>
-          <a:xfrm>
-            <a:off x="292608" y="4496477"/>
-            <a:ext cx="3200400" cy="1593427"/>
-          </a:xfrm>
-          <a:prstGeom prst="roundRect">
-            <a:avLst>
-              <a:gd name="adj" fmla="val 10000"/>
-            </a:avLst>
-          </a:prstGeom>
-          <a:solidFill>
-            <a:srgbClr val="114719"/>
-          </a:solidFill>
-          <a:ln>
-            <a:noFill/>
-          </a:ln>
-        </p:spPr>
-        <p:txBody>
-          <a:bodyPr wrap="square" lIns="73152" tIns="45720" rIns="73152" bIns="45720" rtlCol="0" anchor="ctr">
-            <a:noAutofit/>
-          </a:bodyPr>
-          <a:lstStyle/>
-          <a:p>
-            <a:pPr marL="0" indent="0" algn="ctr">
-              <a:lnSpc>
-                <a:spcPct val="100000"/>
-              </a:lnSpc>
-              <a:spcBef>
-                <a:spcPts val="0"/>
-              </a:spcBef>
-              <a:spcAft>
-                <a:spcPts val="0"/>
-              </a:spcAft>
-              <a:buNone/>
-            </a:pPr>
-            <a:r>
-              <a:rPr lang="pt-BR" sz="2000" b="1" dirty="0">
-                <a:solidFill>
-                  <a:srgbClr val="FFFFFF"/>
-                </a:solidFill>
-                <a:latin typeface="Montserrat"/>
-              </a:rPr>
-              <a:t>Oferta</a:t>
-            </a:r>
-          </a:p>
-        </p:txBody>
-      </p:sp>
-      <p:sp>
-        <p:nvSpPr>
-          <p:cNvPr id="106" name="Item"/>
-          <p:cNvSpPr/>
-          <p:nvPr/>
-        </p:nvSpPr>
-        <p:spPr>
-          <a:xfrm>
-            <a:off x="3630168" y="4496477"/>
-            <a:ext cx="8257032" cy="1593427"/>
-          </a:xfrm>
-          <a:prstGeom prst="roundRect">
-            <a:avLst>
-              <a:gd name="adj" fmla="val 6000"/>
-            </a:avLst>
-          </a:prstGeom>
-          <a:solidFill>
-            <a:srgbClr val="F4F8F5"/>
-          </a:solidFill>
-          <a:ln w="12700">
-            <a:solidFill>
-              <a:srgbClr val="056429"/>
-            </a:solidFill>
-          </a:ln>
-        </p:spPr>
-        <p:txBody>
-          <a:bodyPr wrap="square" lIns="228600" tIns="36576" rIns="228600" bIns="36576" rtlCol="0" anchor="ctr">
-            <a:noAutofit/>
-          </a:bodyPr>
-          <a:lstStyle/>
-          <a:p>
-            <a:pPr marL="0" indent="0" algn="l">
-              <a:lnSpc>
-                <a:spcPct val="102000"/>
-              </a:lnSpc>
-              <a:spcBef>
-                <a:spcPts val="0"/>
-              </a:spcBef>
-              <a:spcAft>
-                <a:spcPts val="0"/>
-              </a:spcAft>
-              <a:buNone/>
-            </a:pPr>
-            <a:r>
-              <a:rPr lang="pt-BR" sz="2000" b="0" dirty="0">
-                <a:solidFill>
-                  <a:srgbClr val="3A3A3A"/>
-                </a:solidFill>
-                <a:latin typeface="Montserrat"/>
-              </a:rPr>
-              <a:t>vínculo cadastrado não é presença</a:t>
-            </a:r>
-          </a:p>
-        </p:txBody>
-      </p:sp>
-      <p:sp>
-        <p:nvSpPr>
-          <p:cNvPr id="107" name="Fontes"/>
-          <p:cNvSpPr txBox="1"/>
-          <p:nvPr/>
-        </p:nvSpPr>
-        <p:spPr>
-          <a:xfrm>
-            <a:off x="292608" y="6181344"/>
-            <a:ext cx="11594592" cy="274320"/>
-          </a:xfrm>
-          <a:prstGeom prst="rect">
-            <a:avLst/>
-          </a:prstGeom>
-          <a:noFill/>
-          <a:ln>
-            <a:noFill/>
-          </a:ln>
-        </p:spPr>
-        <p:txBody>
-          <a:bodyPr wrap="square" lIns="0" tIns="0" rIns="0" bIns="0" rtlCol="0" anchor="b">
-            <a:noAutofit/>
-          </a:bodyPr>
-          <a:lstStyle/>
-          <a:p>
-            <a:pPr marL="0" indent="0" algn="l">
-              <a:lnSpc>
-                <a:spcPct val="95000"/>
-              </a:lnSpc>
-              <a:spcBef>
-                <a:spcPts val="0"/>
-              </a:spcBef>
-              <a:spcAft>
-                <a:spcPts val="0"/>
-              </a:spcAft>
-              <a:buNone/>
-            </a:pPr>
-            <a:r>
-              <a:rPr lang="pt-BR" sz="800" b="1" dirty="0">
-                <a:solidFill>
-                  <a:srgbClr val="6B6B6B"/>
-                </a:solidFill>
-                <a:latin typeface="Montserrat"/>
-              </a:rPr>
-              <a:t>Fontes: </a:t>
-            </a:r>
-            <a:r>
-              <a:rPr lang="pt-BR" sz="800" b="0" dirty="0">
-                <a:solidFill>
-                  <a:srgbClr val="6B6B6B"/>
-                </a:solidFill>
-                <a:latin typeface="Montserrat"/>
-              </a:rPr>
-              <a:t>síntese dos slides anteriores; modelo da banca 1; docs 57, 57d, 57i e 57k; auditorias 18 e 35.</a:t>
+              <a:t>S57_resumo.json (doc 57d); OC_estimativas.csv (protocolo 64; doc 57q; auditoria 39).</a:t>
             </a:r>
           </a:p>
         </p:txBody>

--- a/output/apresentacao_banca2/deck_banca2_curto.pptx
+++ b/output/apresentacao_banca2/deck_banca2_curto.pptx
@@ -8802,7 +8802,7 @@
           <a:p>
             <a:r>
               <a:rPr lang="pt-BR" dirty="0"/>
-              <a:t>Hipótese única desta versão (decisão do autor de 27/10/2026; doc 07 da banca 2): a antiga H2, bolsa × origem. O médico especialista escolhe vagas perto de onde já trabalha; a bolsa maior muda qual vaga ele escolhe dentro da sua região, mas pesa menos que a própria origem. Foi formulada depois de ver os resultados do preenchimento no corte e os coeficientes do modelo de escolha: é pós-resultado, e isso é dito aqui. Motivação: onde a bolsa é R$ 5 mil maior, não detectamos aumento do preenchimento, e o desenho só pegaria saltos grandes (apêndice). Ligar a hipótese a esse fato é interpretação, não teste (auditoria 50). O que se testa: se, na escolha da 1ª opção, a vaga ficar na UF de origem pesa mais que toda a diferença de bolsa. O contraste da bolsa é o pacote do corte (a bolsa e as outras regras federais que mudam nos mesmos cortes de IVS, auditoria 18), não a participação no PMM-E nem o Agora Tem Especialistas. Tudo é condicional a se candidatar. Cautela: Formulada após ver os dados.</a:t>
+              <a:t>Hipótese única desta versão (decisão do autor de 27/10/2026; doc 07 da banca 2): a antiga H2, bolsa × origem. O médico especialista escolhe vagas perto de onde já trabalha; a bolsa maior muda qual vaga ele escolhe entre vagas da mesma UF, mas pesa menos que a própria origem. Foi formulada depois de ver os resultados do preenchimento no corte e os coeficientes do modelo de escolha: é pós-resultado, e isso é dito aqui. Motivação: onde a bolsa é R$ 5 mil maior, não detectamos aumento do preenchimento, e o desenho só pegaria saltos grandes (apêndice). Ligar a hipótese a esse fato é interpretação, não teste (auditoria 50). O que se testa: se, na escolha da 1ª opção, a vaga ficar na UF de origem pesa mais que toda a diferença de bolsa. O contraste da bolsa é o pacote do corte (a bolsa e as outras regras federais que mudam nos mesmos cortes de IVS, auditoria 18), não a participação no PMM-E nem o Agora Tem Especialistas. Tudo é condicional a se candidatar. Cautela: Formulada após ver os dados.</a:t>
             </a:r>
           </a:p>
         </p:txBody>
@@ -9097,7 +9097,7 @@
           <a:p>
             <a:r>
               <a:rPr lang="pt-BR" dirty="0"/>
-              <a:t>Logit condicional (McFadden): cada um dos 5.421 candidatos escolhe, entre as vagas abertas do seu curso e ciclo, a de maior utilidade; o candidato é comparado consigo mesmo entre as vagas que podia escolher. Utilidade = bolsa (linear, por R$ 1 mil) + curva contínua do IVS (spline com dobras nos cortes, sem salto) + distância em km + mesma UF, mesma região de saúde e mesmo município da origem + porte, capital, estrato, macrorregião e vagas imediatas da vaga. Só o salto da bolsa nos cortes de IVS identifica o peso dela. Teste central (P1h-1, protocolo 52b, pós-resultado): D_UF = peso da vaga na UF de origem − peso de toda a bolsa (10 × β), unilateral, com o tipo de vaga do ciclo 2 do quadro de 13/02/2026 (adendo 52c). Erro-padrão agrupado por conjunto de escolha (curso × ciclo). Adendo 52e (pós-resultado): efeito fixo do par (UF de origem, UF da vaga), comparando só vagas da mesma UF vistas por médicos da mesma UF de origem. Por ciclo: o mesmo modelo em cada ciclo.</a:t>
+              <a:t>Logit condicional (McFadden): cada um dos 5.421 candidatos escolhe, entre as vagas abertas do seu curso e ciclo, a de maior utilidade; o candidato é comparado consigo mesmo entre as vagas que podia escolher. Utilidade = bolsa (linear, por R$ 1 mil) + curva contínua do IVS (spline com dobras nos cortes, sem salto) + distância em km + mesma UF, mesma região de saúde e mesmo município da origem + porte, capital, estrato, macrorregião e vagas imediatas da vaga. Só o salto da bolsa nos cortes de IVS identifica o peso dela. Teste central (P1h-1, protocolo 52b, pós-resultado): D_UF = peso da vaga na UF de origem − peso de toda a bolsa (10 × β), unilateral, com o tipo de vaga do ciclo 2 do quadro de 13/02/2026 (adendo 52c). Erro-padrão agrupado por conjunto de escolha (curso × ciclo). Adendo 52e (pós-resultado): efeito fixo do par (UF de origem, UF da vaga), comparando só vagas da mesma UF (a de origem ou outra) vistas por médicos da mesma UF de origem. Por ciclo: o mesmo modelo em cada ciclo.</a:t>
             </a:r>
           </a:p>
         </p:txBody>
@@ -9156,7 +9156,7 @@
           <a:p>
             <a:r>
               <a:rPr lang="pt-BR" dirty="0"/>
-              <a:t>Bolsa por regra: o IVS 2010 oficial reproduz a faixa de todos os municípios dos ciclos 1 e 2 (368/368 e 454/454); o município não escolhe a bolsa. Pacote do corte: em 0,300 e 0,400 mudam também outras regras federais (auditoria 18); o peso da bolsa é o do pacote, não o da bolsa sozinha nem o da participação no PMM-E. IIA (independência de alternativas irrelevantes): o logit aninhado por região de saúde a rejeita em parte, e o ponto do peso da bolsa fica perto do mesmo valor (doc 57a). Localização: com o par de UFs fixado, o peso da bolsa não diminui (adendo 52e, auditoria 48); a comparação só com vagas perto do corte é inconclusiva. Conjunto de escolha: supõe que o candidato viu todas as vagas do seu curso. Origem: preferência revelada, medida pelo vínculo anterior no CNES; mistura família, rede e registro; não é efeito causal de mudar alguém de lugar. Pós-resultado: a hipótese e o teste D_UF foram formulados depois de ver os coeficientes; o peso da bolsa pré-registrado (P1a, sem fixar a UF) não passa no Holm (p de Holm 0,072). Tudo é condicional a se candidatar.</a:t>
+              <a:t>Bolsa por regra: o IVS 2010 oficial reproduz a faixa de todos os municípios dos ciclos 1 e 2 (368/368 e 454/454); o município não escolhe a bolsa. Pacote do corte: em 0,300 e 0,400 mudam também outras regras federais (auditoria 18); o peso da bolsa é o do pacote, não o da bolsa sozinha nem o da participação no PMM-E. IIA (independência de alternativas irrelevantes): o logit aninhado por região de saúde a rejeita em parte, e o ponto do peso da bolsa fica perto do mesmo valor (doc 57a; com o quadro de 13/02/2026, doc 57v). Localização: com o par de UFs fixado, o peso da bolsa não diminui (adendo 52e, auditoria 48); a comparação só com vagas perto do corte é inconclusiva. Conjunto de escolha: supõe que o candidato viu todas as vagas do seu curso. Origem: preferência revelada, medida pelo vínculo anterior no CNES; mistura família, rede e registro; não é efeito causal de mudar alguém de lugar. Pós-resultado: a hipótese e o teste D_UF foram formulados depois de ver os coeficientes; o peso da bolsa pré-registrado (P1a, sem fixar a UF) não rejeita zero (p 0,072; família de um teste, Holm = p). Tudo é condicional a se candidatar.</a:t>
             </a:r>
           </a:p>
         </p:txBody>
@@ -9274,7 +9274,7 @@
           <a:p>
             <a:r>
               <a:rPr lang="pt-BR" dirty="0"/>
-              <a:t>Adendo 52e (doc 57x; auditoria 48; pós-resultado): comparando só vagas da mesma UF, vistas por médicos da mesma UF de origem (efeito fixo do par de UFs), a razão de chances da 1ª opção por +R$ 5 mil é 1,47 [1,15; 1,89] nos ciclos 1–3 (p de Holm 0,005) e 1,90 [1,30; 2,78] no ciclo 2 (p de Holm 0,003). No modelo base, sem fixar a UF: 1,25 [0,98; 1,61] e 1,79 [1,19; 2,68]; a especificação pré-registrada (P1a) não passa no Holm (p de Holm 0,072). Em km: dentro da mesma UF, +R$ 5 mil pesam como 75 km [28; 122] a menos de distância nos ciclos 1–3 e 117 km [56; 178] no ciclo 2; no modelo base, com o quadro corrigido, 119 km [−12; 250] e 302 km [88; 516]. Os km caem dentro da UF porque a distância pesa mais ali, não porque a bolsa pese menos. Mostra que a escolha responde à bolsa; não testa a comparação com a origem. Escolha não é expansão: o que uma vaga ganha, outra do mesmo curso perde. Pacote do corte. Cautela: Adendo pós-resultado; sem fixar a UF, Holm 0,072.</a:t>
+              <a:t>Adendo 52e (doc 57x; auditoria 48; pós-resultado): comparando só vagas da mesma UF (a de origem ou outra), vistas por médicos da mesma UF de origem (efeito fixo do par de UFs), a razão de chances da 1ª opção por +R$ 5 mil é 1,47 [1,15; 1,89] nos ciclos 1–3 (p de Holm 0,005) e 1,90 [1,30; 2,78] no ciclo 2 (p de Holm 0,003). No modelo base, sem fixar a UF: 1,25 [0,98; 1,61] e 1,79 [1,19; 2,68]; a especificação pré-registrada (P1a) não rejeita zero (p 0,072; família de um teste, Holm = p). Em km: dentro da mesma UF, +R$ 5 mil pesam como 75 km [28; 122] a menos de distância nos ciclos 1–3 e 117 km [56; 178] no ciclo 2; no modelo base, com o quadro corrigido, 119 km [−12; 250] e 302 km [88; 516]. Os km caem dentro da UF porque a distância pesa mais ali, não porque a bolsa pese menos. Mostra que a escolha responde à bolsa; não testa a comparação com a origem. Escolha não é expansão: o que uma vaga ganha, outra do mesmo curso perde. Com o score bootstrap para poucos grupos, o VL-1 se mantém (doc 57x). Pacote do corte. Cautela: Adendo pós-resultado; pré-registrado, sem fixar a UF: p 0,072.</a:t>
             </a:r>
           </a:p>
         </p:txBody>
@@ -9333,7 +9333,7 @@
           <a:p>
             <a:r>
               <a:rPr lang="pt-BR" dirty="0"/>
-              <a:t>Por ciclo (modelo base, quadro corrigido): razão de chances 1,07 [0,69; 1,65] no ciclo 1, 1,79 [1,19; 2,68] no ciclo 2 e 1,00 [0,72; 1,39] no ciclo 3. A bolsa desloca a escolha com força só no ciclo 2; nos ciclos 1 e 3, os intervalos são largos, e não sabemos por quê. Quadro do ciclo 2: com o quadro refeito depois do resultado (19/03/2026), 1,70 [1,22; 2,37]; com o de 13/02/2026, vigente na inscrição, 1,79 (adendo 52c, auditoria 41; as demais variantes no adendo 52d, auditoria 46). Comparando vagas da mesma UF: com a distância em log, 1,45 [1,15; 1,83] (ciclo 2: 1,75 [1,23; 2,49]); com a região de saúde de origem no lugar da UF de origem, 1,49 [1,15; 1,92] (ciclo 2: 1,91 [1,33; 2,74]); só com vagas a até 0,050 de um corte, 1,28 [0,95; 1,72], p de Holm 0,103: inconclusivo. À direita, origem − toda a bolsa por ciclo: 2,34 [1,45; 3,24], 1,19 [0,51; 1,86] e 2,37 [1,75; 3,00]: a origem pesa mais nos três ciclos. Tudo pós-resultado e condicional a se candidatar. Cautela: Quadro da inscrição, log e região: mesma leitura.</a:t>
+              <a:t>Especificação pré-registrada (M1, ciclos 1–3, quadro corrigido): 1,25 [0,98; 1,61], IC que contém 1; é a principal do peso da bolsa, e o VL-1 é adendo. Por ciclo (o mesmo modelo): razão de chances 1,07 [0,69; 1,65] no ciclo 1, 1,79 [1,19; 2,68] no ciclo 2 e 1,00 [0,72; 1,39] no ciclo 3. A bolsa desloca a escolha com força só no ciclo 2; nos ciclos 1 e 3, os intervalos são largos, e não sabemos por quê. Quadro do ciclo 2: com o quadro refeito depois do resultado (19/03/2026), 1,70 [1,22; 2,37]; com o de 13/02/2026, vigente na inscrição, 1,79 (adendo 52c, auditoria 41; as demais variantes no adendo 52d, auditoria 46). Comparando vagas da mesma UF: com a distância em log, 1,45 [1,15; 1,83] (ciclo 2: 1,75 [1,23; 2,49]); com a região de saúde de origem no lugar da UF de origem, 1,49 [1,15; 1,92] (ciclo 2: 1,91 [1,33; 2,74]); só com vagas a até 0,050 de um corte, 1,28 [0,95; 1,72], p de Holm 0,103: inconclusivo. À direita, origem − toda a bolsa por ciclo: 2,34 [1,45; 3,24], 1,19 [0,51; 1,86] e 2,37 [1,75; 3,00]: a origem pesa mais nos três ciclos. O peso da bolsa sozinho depende da especificação: com o logit explodido (doc 57v) e com o spline cúbico do IVS (doc 42), o IC contém 1; origem − bolsa fica acima de zero em todas as variantes. Tudo pós-resultado e condicional a se candidatar. Cautela: Pré-registrado: IC contém 1; variantes do adendo: mesma leitura.</a:t>
             </a:r>
           </a:p>
         </p:txBody>
@@ -9392,7 +9392,7 @@
           <a:p>
             <a:r>
               <a:rPr lang="pt-BR" dirty="0"/>
-              <a:t>No modelo da banca 1, o médico aceita a vaga se a bolsa compensa o custo do lugar. Na escolha, o custo que domina não é o do município, que a bolsa compensa, e sim o de sair da própria região: a vaga na UF de origem pesa mais que toda a diferença de bolsa. Um degrau de R$ 5 mil desloca a escolha entre vagas próximas, mas não alcança esse custo: incentivo limitado. É coerente com não termos detectado aumento do preenchimento no corte (apêndice), mas essa ligação é interpretação, não teste (auditoria 50). Dá para afirmar: entre quem se candidatou, a vaga de bolsa maior é preferida a uma vaga parecida da mesma UF; a origem pesa mais que toda a diferença de bolsa. Não dá para afirmar: que a bolsa causa mais médicos no município; que a origem causa a escolha; que o efeito no preenchimento é zero; que a bolsa reduz o preenchimento. O contraste é o pacote do corte, não a participação no PMM-E. Próximos passos: as decisões do autor que seguem abertas (doc 05, §4.1), o ciclo 3 com a competência 202703 madura e o universo de inscritos.</a:t>
+              <a:t>No modelo da banca 1, o médico aceita a vaga se a bolsa compensa o custo do lugar. O dado: a vaga na UF de origem pesa mais que toda a diferença de bolsa (o pacote do corte); o D_UF positivo diz só isso. A leitura que os dados sugerem, sem teste direto: o custo que domina não é o do município, que a bolsa compensa, e sim o de sair da própria UF; a origem é preferência revelada e pode carregar também família, rede e o emprego atual. Um degrau de R$ 5 mil desloca a escolha entre vagas da mesma UF, e os dados sugerem que não compensa esse custo: incentivo limitado. É coerente com não termos detectado aumento do preenchimento no corte (apêndice), mas essa ligação é interpretação, não teste (auditoria 50). Dá para afirmar: entre quem se candidatou, a vaga de bolsa maior é preferida a uma vaga parecida da mesma UF; a origem pesa mais que toda a diferença de bolsa. Não dá para afirmar: que a bolsa causa mais médicos no município; que a origem causa a escolha; que o efeito no preenchimento é zero; que a bolsa reduz o preenchimento. O contraste é o pacote do corte, não a participação no PMM-E. Próximos passos: as decisões do autor que seguem abertas (doc 05, §4.1), o ciclo 3 com a competência 202703 madura e o universo de inscritos.</a:t>
             </a:r>
           </a:p>
         </p:txBody>
@@ -9451,7 +9451,7 @@
           <a:p>
             <a:r>
               <a:rPr lang="pt-BR" dirty="0"/>
-              <a:t>Antiga H1, só como motivação (adendo 48b, doc 57n, auditoria 38; adendo 48h, doc 57w, auditoria 47). Chance de a célula com vaga imediata ser preenchida na 1ª chamada (HI-1): −3,7 p.p. [−21,3; +13,9] em 0,300 e −2,3 [−24,0; +19,4] em 0,400, p de Holm 1,000; o desenho só detectaria saltos de 25,1 e 31,0 p.p. Com efeito fixo de UF (e os especialistas no entorno): +5,4 [−11,0; +21,8] e −4,2 [−21,1; +12,6]. Pareando municípios da mesma UF e condição de capital: +16,4 [−3,8; +36,6] com 25 pares e −6,0 [−23,2; +11,5] com 29 pares; o ponto não deve ser lido como tamanho de efeito. O sinal negativo era mais forte nos médicos alocados por município em 0,300 (HI-2): −1,13 [−2,15; −0,10], p de Holm 0,126, nunca passou no Holm; com efeito fixo de UF e os especialistas no entorno, −0,62 [−1,67; +0,43]: encolhe e deixa de se distinguir de zero (só com a UF, o ponto cai à metade, auditoria 47). A HI-2 cai em tamanho parecido nos três ciclos: −1,07 [−2,88; +0,74], −0,97 [−2,48; +0,55] e −1,33 [−3,59; +0,93]. Em 0,300, o balanço falha: do lado de bolsa maior, a parte de capitais muda −29,9 p.p., a do Nordeste −47,7 p.p., e há +10,54 especialistas por 10 mil hab. no resto da região de saúde. O sinal anda junto com a UF e a localização; é limite da RDD nesse corte, não prova de mecanismo, e não mostra que a bolsa reduz o preenchimento. Médico de outra UF por vaga imediata: +0,02 [−0,01; +0,06] em 0,300 e +0,16 [+0,00; +0,35] em 0,400, inconclusivo, com poucos pares. Pacote do corte. Cautela: Pacote do corte; só detectaria saltos grandes.</a:t>
+              <a:t>Antiga H1, só como motivação (adendo 48b, doc 57n, auditoria 38; adendo 48h, doc 57w, auditoria 47). Chance de a célula com vaga imediata ser preenchida na 1ª chamada (HI-1): −3,7 p.p. [−21,3; +13,9] em 0,300 e −2,3 [−24,0; +19,4] em 0,400, p de Holm 1,000; o desenho só detectaria saltos de 25,1 e 31,0 p.p. Com efeito fixo de UF e os especialistas no entorno, só nos municípios com essa medida (nessa amostra, sem controle, −0,4 e +1,8): +5,4 [−11,0; +21,8] e −4,2 [−21,1; +12,6]. Pareando municípios da mesma UF e condição de capital: +16,4 [−3,8; +36,6] com 25 pares e −6,0 [−23,2; +11,5] com 29 pares; o ponto não deve ser lido como tamanho de efeito. O sinal negativo era mais forte nos médicos alocados por município em 0,300 (HI-2): −1,13 [−2,15; −0,10], p de Holm 0,126, nunca passou no Holm; na mesma amostra, sem controle, −1,15; com efeito fixo de UF e os especialistas no entorno, −0,62 [−1,67; +0,43]: encolhe e deixa de se distinguir de zero; o que move o ponto é a UF, não o raio (auditoria 47). A HI-2 cai em tamanho parecido nos três ciclos: −1,07 [−2,88; +0,74], −0,97 [−2,48; +0,55] e −1,33 [−3,59; +0,93]. Em 0,300, o balanço falha: do lado de bolsa maior, a parte de capitais muda −29,9 p.p., a do Nordeste −47,7 p.p., e há +10,54 especialistas por 10 mil hab. no resto da região de saúde. O sinal anda junto com a UF e a localização; é limite da RDD nesse corte, não prova de mecanismo, e não mostra que a bolsa reduz o preenchimento. Médico de outra UF por vaga imediata: +0,02 [−0,01; +0,06] em 0,300 e +0,16 [+0,00; +0,35] em 0,400, inconclusivo, com poucos pares. Pacote do corte. Cautela: Pacote do corte; só detectaria saltos grandes.</a:t>
             </a:r>
           </a:p>
         </p:txBody>
@@ -20839,7 +20839,7 @@
                 </a:solidFill>
                 <a:latin typeface="Montserrat"/>
               </a:rPr>
-              <a:t>Dentro da mesma UF, a vaga de bolsa maior atrai</a:t>
+              <a:t>Dentro da mesma UF, a vaga de bolsa maior é preferida</a:t>
             </a:r>
           </a:p>
         </p:txBody>
@@ -21072,14 +21072,14 @@
                 </a:solidFill>
                 <a:latin typeface="Montserrat"/>
               </a:rPr>
-              <a:t>Adendo pós-resultado; sem fixar a UF, Holm 0,072.</a:t>
+              <a:t>Adendo pós-resultado; pré-registrado, sem fixar a UF: p 0,072.</a:t>
             </a:r>
           </a:p>
         </p:txBody>
       </p:sp>
       <p:pic>
         <p:nvPicPr>
-          <p:cNvPr id="103" name="Figura" descr="Razão de chances da 1ª opção por +R$ 5 mil comparando vagas da mesma UF, ciclos 1–3 e ciclo 2, com o modelo base em cinza claro"/>
+          <p:cNvPr id="103" name="Figura" descr="Razão de chances da 1ª opção por +R$ 5 mil comparando vagas da mesma UF, ciclos 1–3 e ciclo 2, com o modelo pré-registrado em cinza claro"/>
           <p:cNvPicPr>
             <a:picLocks noChangeAspect="1"/>
           </p:cNvPicPr>
@@ -21455,14 +21455,14 @@
                 </a:solidFill>
                 <a:latin typeface="Montserrat"/>
               </a:rPr>
-              <a:t>Quadro da inscrição, log e região: mesma leitura.</a:t>
+              <a:t>Pré-registrado: IC contém 1; variantes do adendo: mesma leitura.</a:t>
             </a:r>
           </a:p>
         </p:txBody>
       </p:sp>
       <p:pic>
         <p:nvPicPr>
-          <p:cNvPr id="103" name="Figura" descr="Robustez da escolha: razão de chances por +R$ 5 mil por ciclo, com o quadro antigo do ciclo 2, com distância em log, com a região de saúde fixada e só perto do corte; à direita, origem menos toda a bolsa por ciclo"/>
+          <p:cNvPr id="103" name="Figura" descr="Robustez da escolha: razão de chances por +R$ 5 mil no modelo pré-registrado e por ciclo, com o quadro antigo do ciclo 2, com distância em log, com a região de saúde fixada e só perto do corte; à direita, origem menos toda a bolsa por ciclo"/>
           <p:cNvPicPr>
             <a:picLocks noChangeAspect="1"/>
           </p:cNvPicPr>
@@ -21476,8 +21476,8 @@
         </p:blipFill>
         <p:spPr>
           <a:xfrm>
-            <a:off x="663458" y="804672"/>
-            <a:ext cx="10852891" cy="4279392"/>
+            <a:off x="1076902" y="804672"/>
+            <a:ext cx="10026004" cy="4279392"/>
           </a:xfrm>
           <a:prstGeom prst="rect">
             <a:avLst/>
@@ -21835,7 +21835,7 @@
                 </a:solidFill>
                 <a:latin typeface="Montserrat"/>
               </a:rPr>
-              <a:t>aceita a vaga se a bolsa compensa o custo do lugar</a:t>
+              <a:t>aceita se a bolsa compensa o custo do lugar</a:t>
             </a:r>
           </a:p>
         </p:txBody>
@@ -21943,7 +21943,7 @@
                 </a:solidFill>
                 <a:latin typeface="Montserrat"/>
               </a:rPr>
-              <a:t>o custo que domina é sair da própria região</a:t>
+              <a:t>a origem pesa mais que toda a bolsa</a:t>
             </a:r>
           </a:p>
         </p:txBody>
@@ -22051,7 +22051,7 @@
                 </a:solidFill>
                 <a:latin typeface="Montserrat"/>
               </a:rPr>
-              <a:t>a bolsa reordena vagas próximas: incentivo limitado</a:t>
+              <a:t>os dados sugerem incentivo limitado (pacote do corte)</a:t>
             </a:r>
           </a:p>
         </p:txBody>

--- a/output/apresentacao_banca2/deck_banca2_curto.pptx
+++ b/output/apresentacao_banca2/deck_banca2_curto.pptx
@@ -8802,7 +8802,19 @@
           <a:p>
             <a:r>
               <a:rPr lang="pt-BR" dirty="0"/>
-              <a:t>Hipótese única desta versão (decisão do autor de 27/10/2026; doc 07 da banca 2): a antiga H2, bolsa × origem. O médico especialista escolhe vagas perto de onde já trabalha; a bolsa maior muda qual vaga ele escolhe entre vagas da mesma UF, mas pesa menos que a própria origem. Foi formulada depois de ver os resultados do preenchimento no corte e os coeficientes do modelo de escolha: é pós-resultado, e isso é dito aqui. Motivação: onde a bolsa é R$ 5 mil maior, não detectamos aumento do preenchimento, e o desenho só pegaria saltos grandes (apêndice). Ligar a hipótese a esse fato é interpretação, não teste (auditoria 50). O que se testa: se, na escolha da 1ª opção, a vaga ficar na UF de origem pesa mais que toda a diferença de bolsa. O contraste da bolsa é o pacote do corte (a bolsa e as outras regras federais que mudam nos mesmos cortes de IVS, auditoria 18), não a participação no PMM-E nem o Agora Tem Especialistas. Tudo é condicional a se candidatar. Cautela: Formulada após ver os dados.</a:t>
+              <a:t>FALA (0:35): Nossa pergunta é simples: quando o médico especialista escolhe uma vaga do PMM-E, o que pesa mais, a bolsa ou a origem dele? A hipótese: ele escolhe perto de onde já trabalha; a bolsa maior muda qual vaga ele escolhe, mas pesa menos que a própria origem. A motivação vem do corte de IVS: onde a bolsa é R$ 5 mil maior, não detectamos aumento do preenchimento. Um aviso honesto, que está na tela: formulamos esta hipótese depois de ver os dados.</a:t>
+            </a:r>
+          </a:p>
+          <a:p>
+            <a:r>
+              <a:rPr lang="pt-BR" dirty="0"/>
+              <a:t>DETALHE PARA PERGUNTAS: Hipótese única desta versão (decisão do autor de 27/10/2026; doc 07 da banca 2): a antiga H2, bolsa × origem. O médico especialista escolhe vagas perto de onde já trabalha; a bolsa maior muda qual vaga ele escolhe entre vagas da mesma UF, mas pesa menos que a própria origem. Foi formulada depois de ver os resultados do preenchimento no corte e os coeficientes do modelo de escolha: é pós-resultado, e isso é dito aqui. Motivação: onde a bolsa é R$ 5 mil maior, não detectamos aumento do preenchimento, e o desenho só pegaria saltos grandes (apêndice). Ligar a hipótese a esse fato é interpretação, não teste (auditoria 50). O que se testa: se, na escolha da 1ª opção, a vaga ficar na UF de origem pesa mais que toda a diferença de bolsa. O contraste da bolsa é o pacote do corte (a bolsa e as outras regras federais que mudam nos mesmos cortes de IVS, auditoria 18), não a participação no PMM-E nem o Agora Tem Especialistas. Tudo é condicional a se candidatar.</a:t>
+            </a:r>
+          </a:p>
+          <a:p>
+            <a:r>
+              <a:rPr lang="pt-BR" dirty="0"/>
+              <a:t>Cautela na tela: Formulada após ver os dados.</a:t>
             </a:r>
           </a:p>
         </p:txBody>
@@ -8861,7 +8873,13 @@
           <a:p>
             <a:r>
               <a:rPr lang="pt-BR" dirty="0"/>
-              <a:t>1ª opção: listas de classificação dos editais do PMM-E (SGTES/MS), ciclos 1–3, uma linha por candidato e opção. Origem: o município do estabelecimento onde o candidato tinha vínculo médico no CNES antes das inscrições, ligado pelo portão G1 (CPF e nome); não é a residência. Vagas e bolsa: quadros de vagas da 1ª chamada, por célula (estabelecimento × curso), com o tipo de vaga e a faixa da bolsa anunciada; no ciclo 2, o tipo de vaga vem do quadro de 13/02/2026, vigente na inscrição (adendo 52c, auditoria 41). IVS 2010 oficial: Plataforma IVS do Ipea, Censo 2010, por município; é a variável dos cortes. Distância entre os centroides dos municípios (malha do IBGE); UF e região de saúde (tabela oficial do TabNet). Secundárias, em cinza: porte (população do Censo 2022) e capital (código IBGE), controles do modelo. Dados pessoais só em memória ou em cache fora do Git.</a:t>
+              <a:t>FALA (0:50): A 1ª opção de cada candidato vem dos editais do Ministério da Saúde, ciclos 1 a 3; a origem vem do CNES: o município onde ele tinha vínculo médico antes da inscrição; bolsa e vagas, dos quadros de vagas; o IVS, do Ipea; distância e UF, do IBGE. A unidade de observação é o par candidato × vaga: cada candidato aparece uma vez para cada vaga aberta do seu curso e ciclo, e a variável dependente vale 1 na sua 1ª opção. O funil: dos 5.714 candidatos com 1ª opção, 5.513 se ligam ao CNES, 5.425 têm origem e 5.421 entram no modelo, em 932.577 pares e 56 conjuntos de escolha.</a:t>
+            </a:r>
+          </a:p>
+          <a:p>
+            <a:r>
+              <a:rPr lang="pt-BR" dirty="0"/>
+              <a:t>DETALHE PARA PERGUNTAS: 1ª opção: listas de classificação dos editais do PMM-E (SGTES/MS), ciclos 1–3, uma linha por candidato e opção. Cada ciclo é um chamamento com quadro de vagas próprio: o ciclo 1 com quadro de 24/07/2025; o ciclo 2 com quadro de 03/02/2026, retificado em 13/02/2026 (o vigente na inscrição, de onde vem o tipo de vaga usado aqui; auditoria 36) e de novo em 19/03/2026; o ciclo 3 com quadro de 16/07/2026. Origem: o município do estabelecimento onde o candidato tinha vínculo médico no CNES antes das inscrições, ligado pelo portão G1 (CPF e nome); não é a residência. Vagas e bolsa: quadros de vagas da 1ª chamada, por célula (estabelecimento × curso), com a faixa da bolsa anunciada (adendo 52c, auditoria 41). IVS 2010 oficial: Plataforma IVS do Ipea; é a variável dos cortes. Distância entre os centroides dos municípios (malha do IBGE); UF e região de saúde (tabela oficial do TabNet). Secundárias, em cinza: porte e capital, controles do modelo. Funil (P1_resumo.json, sem recálculo): 5.714 candidatos com 1ª opção numa vaga do quadro; 5.513 ligados ao CNES; 5.425 com município de origem (vínculo médico na competência anterior à inscrição); 5.421 no modelo, depois de tirar quem tem a origem ou a 1ª opção num município sem região de saúde na tabela oficial. Unidade do modelo: 932.577 pares candidato × vaga, em 56 conjuntos de escolha (curso × ciclo), com 5.125 vagas (estabelecimento × curso). A taxa de ligação é parecida entre alocados e não alocados (G1). Dados pessoais só em memória ou em cache fora do Git.</a:t>
             </a:r>
           </a:p>
         </p:txBody>
@@ -8920,7 +8938,13 @@
           <a:p>
             <a:r>
               <a:rPr lang="pt-BR" dirty="0"/>
-              <a:t>Cada ciclo é um chamamento do PMM-E com quadro de vagas próprio: o ciclo 1 com quadro de 24/07/2025; o ciclo 2 com quadro de 03/02/2026, retificado em 13/02/2026 (o vigente na inscrição, de onde vem o tipo de vaga usado aqui; auditoria 36) e de novo em 19/03/2026; o ciclo 3 com quadro de 16/07/2026. Célula = estabelecimento × curso no quadro da 1ª chamada; é entre as células do seu curso e ciclo que o candidato escolhe. Candidatos, 1ª opção: os que puseram a 1ª opção numa célula do quadro. Com origem: os que também foram ligados ao CNES e têm município de origem; é a amostra do modelo de escolha, 5.421 candidatos nos três ciclos.</a:t>
+              <a:t>FALA (0:25): De onde vem a variação da bolsa? De uma regra. Até IVS 0,300, R$ 10 mil; até 0,400, R$ 15 mil; acima, R$ 20 mil. Cada ponto é um município, e a regra reproduz a faixa de 368 de 368 municípios no ciclo 1 e de 454 de 454 no ciclo 2. O município não escolhe a bolsa: é a regra que dá.</a:t>
+            </a:r>
+          </a:p>
+          <a:p>
+            <a:r>
+              <a:rPr lang="pt-BR" dirty="0"/>
+              <a:t>DETALHE PARA PERGUNTAS: Como ler: cada ponto é um município com vaga no quadro da 1ª chamada do ciclo 1; o eixo horizontal é o IVS 2010 oficial, a cor também; o vertical, a bolsa anunciada. Até 0,300, R$ 10 mil; até 0,400, R$ 15 mil; acima, R$ 20 mil. O escore da relação nominal do MS é o IVS 2010 oficial em 404/404 municípios. No ciclo 3, 747 de 748: o que falta foi criado depois de 2010. É daqui que vem a variação da bolsa no modelo de escolha: vagas parecidas, de lados diferentes de um corte, pagam bolsas diferentes. Em 0,300 e 0,400 mudam também outras regras federais: pacote do corte.</a:t>
             </a:r>
           </a:p>
         </p:txBody>
@@ -8979,7 +9003,13 @@
           <a:p>
             <a:r>
               <a:rPr lang="pt-BR" dirty="0"/>
-              <a:t>Como ler: cada ponto é um município com vaga no quadro da 1ª chamada do ciclo 1; o eixo horizontal é o IVS 2010 oficial, a cor também; o vertical, a bolsa anunciada. Até 0,300, R$ 10 mil; até 0,400, R$ 15 mil; acima, R$ 20 mil. O escore da relação nominal do MS é o IVS 2010 oficial em 404/404 municípios. No ciclo 3, 747 de 748: o que falta foi criado depois de 2010. É daqui que vem a variação da bolsa no modelo de escolha: vagas parecidas, de lados diferentes de um corte, pagam bolsas diferentes. Em 0,300 e 0,400 mudam também outras regras federais: pacote do corte.</a:t>
+              <a:t>FALA (0:35): Antes do modelo, os dados crus. Dos 5.425 candidatos com origem, 79% põem a 1ª opção na própria UF, 46% na mesma região de saúde e 36% no próprio município; a distância mediana é de 51 km. Isso é descritivo: mostra onde escolhem, não por quê. Para a nossa pergunta, diz que a origem é uma força grande. O que falta saber é quanto a bolsa pesa diante dela, e é isso que o modelo mede.</a:t>
+            </a:r>
+          </a:p>
+          <a:p>
+            <a:r>
+              <a:rPr lang="pt-BR" dirty="0"/>
+              <a:t>DETALHE PARA PERGUNTAS: Descritivo. Dos 5.425 candidatos com 1ª opção e município de origem, 79% põem a 1ª opção na UF onde já trabalhavam, 46% na mesma região de saúde e 36% no próprio município; a distância mediana até a 1ª opção é 51 km, e três em cada quatro ficam a até 189 km. A origem é o município do vínculo médico anterior no CNES, não a residência. É preferência revelada: diz onde escolhem, não por quê. A comparação crua não isola a bolsa, porque mistura a bolsa com o IVS, a distância e a própria origem (doc 66, §3); quem separa esses pesos é o modelo de escolha.</a:t>
             </a:r>
           </a:p>
         </p:txBody>
@@ -9038,7 +9068,13 @@
           <a:p>
             <a:r>
               <a:rPr lang="pt-BR" dirty="0"/>
-              <a:t>Descritivo. Dos 5.425 candidatos com 1ª opção e município de origem, 79% põem a 1ª opção na UF onde já trabalhavam, 46% na mesma região de saúde e 36% no próprio município; a distância mediana até a 1ª opção é 51 km, e três em cada quatro ficam a até 189 km. A origem é o município do vínculo médico anterior no CNES, não a residência. É preferência revelada: diz onde escolhem, não por quê. O próximo passo é perguntar quanto a bolsa pesa nessa escolha, comparado com a origem.</a:t>
+              <a:t>FALA (0:45): Usamos um logit condicional, por três razões. Primeiro, a escolha é discreta: o candidato escolhe uma entre as vagas abertas do seu curso. Segundo, cada candidato é comparado consigo mesmo: tudo o que é dele, como idade, nota ou família, é igual entre as vagas e sai da conta. Terceiro, a bolsa varia entre vagas por uma regra do IVS, e o IVS entra como curva contínua; então o peso da bolsa vem só dos saltos nos cortes. O teste central é o D_UF: o peso de a vaga estar na UF de origem menos o peso de toda a diferença de bolsa. É unilateral, com erro-padrão agrupado por conjunto de escolha.</a:t>
+            </a:r>
+          </a:p>
+          <a:p>
+            <a:r>
+              <a:rPr lang="pt-BR" dirty="0"/>
+              <a:t>DETALHE PARA PERGUNTAS: Logit condicional (McFadden): cada um dos 5.421 candidatos escolhe, entre as vagas abertas do seu curso e ciclo, a de maior utilidade; o candidato é comparado consigo mesmo entre as vagas que podia escolher, e o que não varia entre vagas (dele) sai da verossimilhança. Utilidade = bolsa (linear, por R$ 1 mil) + curva contínua do IVS (spline com dobras nos cortes, sem salto) + distância em km + mesma UF, mesma região de saúde e mesmo município da origem + porte, capital, estrato, macrorregião e vagas imediatas da vaga. Só o salto da bolsa nos cortes de IVS identifica o peso dela. Teste central (P1h-1, protocolo 52b, pós-resultado): D_UF = peso da vaga na UF de origem − peso de toda a bolsa (10 × β), H0: D_UF ≤ zero, unilateral, com o tipo de vaga do ciclo 2 do quadro de 13/02/2026 (adendo 52c). Erro-padrão agrupado por conjunto de escolha (curso × ciclo). Adendo 52e (pós-resultado): efeito fixo do par (UF de origem, UF da vaga), comparando só vagas da mesma UF (a de origem ou outra) vistas por médicos da mesma UF de origem. Por ciclo: o mesmo modelo em cada ciclo. Por que não um logit multinomial com efeitos de vaga? Porque a pergunta é o peso de atributos da vaga que variam por candidato (distância, origem) contra a bolsa; o condicional é o modelo de escolha discreta feito para isso.</a:t>
             </a:r>
           </a:p>
         </p:txBody>
@@ -9097,7 +9133,13 @@
           <a:p>
             <a:r>
               <a:rPr lang="pt-BR" dirty="0"/>
-              <a:t>Logit condicional (McFadden): cada um dos 5.421 candidatos escolhe, entre as vagas abertas do seu curso e ciclo, a de maior utilidade; o candidato é comparado consigo mesmo entre as vagas que podia escolher. Utilidade = bolsa (linear, por R$ 1 mil) + curva contínua do IVS (spline com dobras nos cortes, sem salto) + distância em km + mesma UF, mesma região de saúde e mesmo município da origem + porte, capital, estrato, macrorregião e vagas imediatas da vaga. Só o salto da bolsa nos cortes de IVS identifica o peso dela. Teste central (P1h-1, protocolo 52b, pós-resultado): D_UF = peso da vaga na UF de origem − peso de toda a bolsa (10 × β), unilateral, com o tipo de vaga do ciclo 2 do quadro de 13/02/2026 (adendo 52c). Erro-padrão agrupado por conjunto de escolha (curso × ciclo). Adendo 52e (pós-resultado): efeito fixo do par (UF de origem, UF da vaga), comparando só vagas da mesma UF (a de origem ou outra) vistas por médicos da mesma UF de origem. Por ciclo: o mesmo modelo em cada ciclo.</a:t>
+              <a:t>FALA (0:30): Cinco premissas. A bolsa segue a regra do IVS, sem exceção nos ciclos 1 e 2. Mas nos mesmos cortes mudam outras regras federais: medimos o pacote do corte. A independência de alternativas irrelevantes vale só em parte, mas no logit aninhado o peso da bolsa fica perto do mesmo valor. Com o par de UFs fixado, ele não diminui. E supomos que o candidato viu todas as vagas do seu curso.</a:t>
+            </a:r>
+          </a:p>
+          <a:p>
+            <a:r>
+              <a:rPr lang="pt-BR" dirty="0"/>
+              <a:t>DETALHE PARA PERGUNTAS: Bolsa por regra: o IVS 2010 oficial reproduz a faixa de todos os municípios dos ciclos 1 e 2 (368/368 e 454/454); o município não escolhe a bolsa. Pacote do corte: em 0,300 e 0,400 mudam também outras regras federais (auditoria 18); o peso da bolsa é o do pacote, não o da bolsa sozinha nem o da participação no PMM-E. IIA (independência de alternativas irrelevantes): o logit aninhado por região de saúde a rejeita em parte, e o ponto do peso da bolsa fica perto do mesmo valor (doc 57a; com o quadro de 13/02/2026, doc 57v). Localização: com o par de UFs fixado, o peso da bolsa não diminui (adendo 52e, auditoria 48); a comparação só com vagas perto do corte é inconclusiva. Conjunto de escolha: supõe que o candidato viu todas as vagas do seu curso e listou sem estratégia (a alocação é por nota). Origem: preferência revelada, medida pelo vínculo anterior no CNES; mistura família, rede e registro; não é efeito causal de mudar alguém de lugar. Pós-resultado: a hipótese e o teste D_UF foram formulados depois de ver os coeficientes; o peso da bolsa pré-registrado (P1a, sem fixar a UF) não rejeita zero (p 0,072; família de um teste, Holm = p). Tudo é condicional a se candidatar.</a:t>
             </a:r>
           </a:p>
         </p:txBody>
@@ -9156,7 +9198,19 @@
           <a:p>
             <a:r>
               <a:rPr lang="pt-BR" dirty="0"/>
-              <a:t>Bolsa por regra: o IVS 2010 oficial reproduz a faixa de todos os municípios dos ciclos 1 e 2 (368/368 e 454/454); o município não escolhe a bolsa. Pacote do corte: em 0,300 e 0,400 mudam também outras regras federais (auditoria 18); o peso da bolsa é o do pacote, não o da bolsa sozinha nem o da participação no PMM-E. IIA (independência de alternativas irrelevantes): o logit aninhado por região de saúde a rejeita em parte, e o ponto do peso da bolsa fica perto do mesmo valor (doc 57a; com o quadro de 13/02/2026, doc 57v). Localização: com o par de UFs fixado, o peso da bolsa não diminui (adendo 52e, auditoria 48); a comparação só com vagas perto do corte é inconclusiva. Conjunto de escolha: supõe que o candidato viu todas as vagas do seu curso. Origem: preferência revelada, medida pelo vínculo anterior no CNES; mistura família, rede e registro; não é efeito causal de mudar alguém de lugar. Pós-resultado: a hipótese e o teste D_UF foram formulados depois de ver os coeficientes; o peso da bolsa pré-registrado (P1a, sem fixar a UF) não rejeita zero (p 0,072; família de um teste, Holm = p). Tudo é condicional a se candidatar.</a:t>
+              <a:t>FALA (0:50): Este é o teste central. No mesmo modelo, com os mesmos 5.421 candidatos, ter a vaga na UF de origem multiplica a chance de ela ser a 1ª opção por 11,0. Toda a diferença de bolsa, de R$ 10 mil para R$ 20 mil, multiplica por 1,57, e esse intervalo contém 1: sozinha, ela não se distingue de zero. A diferença entre os dois pesos, em log-chance, é 1,94, com intervalo de 1,48 a 2,40, e p unilateral menor que 0,001. Em palavras: a origem pesa muito mais que toda a bolsa. Um cuidado: a origem é preferência revelada. Diz quanto ela pesa na escolha, não que mudar o médico de lugar mudaria a escolha.</a:t>
+            </a:r>
+          </a:p>
+          <a:p>
+            <a:r>
+              <a:rPr lang="pt-BR" dirty="0"/>
+              <a:t>DETALHE PARA PERGUNTAS: Teste central da hipótese (P1h-1, com o tipo de vaga do ciclo 2 do quadro de 13/02/2026; adendo 52c, auditoria 41). No mesmo modelo e com os mesmos candidatos (ciclos 1–3), a vaga ficar na UF de origem pesa 2,40 [2,27; 2,52] em log-chance: multiplica a chance de ser a 1ª opção por 11,0 [9,7; 12,5]. Toda a diferença de bolsa, de R$ 10 mil para R$ 20 mil, pesa 0,45 [−0,04; 0,95]: multiplica a chance por 1,57 [0,96; 2,58], intervalo que contém 1. A diferença é 1,94 [1,48; 2,40], p unilateral &lt; 0,001 e p de Holm &lt; 0,001 (família de um teste). Como ler o coeficiente: em log-chance, exp(coeficiente) é a razão de chances; 11,0 quer dizer que, entre duas vagas iguais no resto, a da UF de origem tem chance 11,0 vezes maior de ser a 1ª opção. A conclusão resiste à imprecisão da bolsa: o limite de cima de toda a bolsa fica abaixo do limite de baixo da origem. Por ciclo, a origem pesa mais nos três (Robustez). Escolha condicional a se candidatar; a bolsa é o pacote do corte; a origem é preferência revelada, medida pelo vínculo anterior no CNES, e não causa da escolha.</a:t>
+            </a:r>
+          </a:p>
+          <a:p>
+            <a:r>
+              <a:rPr lang="pt-BR" dirty="0"/>
+              <a:t>Cautela na tela: Origem é preferência revelada, não causa.</a:t>
             </a:r>
           </a:p>
         </p:txBody>
@@ -9215,7 +9269,19 @@
           <a:p>
             <a:r>
               <a:rPr lang="pt-BR" dirty="0"/>
-              <a:t>Teste central da hipótese (P1h-1, com o tipo de vaga do ciclo 2 do quadro de 13/02/2026; adendo 52c, auditoria 41). No mesmo modelo e com os mesmos candidatos (ciclos 1–3), a vaga ficar na UF de origem pesa 2,40 [2,27; 2,52] em log-chance: multiplica a chance de ser a 1ª opção por 11,0 [9,7; 12,5]. Toda a diferença de bolsa, de R$ 10 mil para R$ 20 mil, pesa 0,45 [−0,04; 0,95]: multiplica a chance por 1,57 [0,96; 2,58], intervalo que contém 1. A diferença é 1,94 [1,48; 2,40], p unilateral &lt; 0,001 e p de Holm &lt; 0,001 (família de um teste). Por ciclo, a origem pesa mais nos três (Robustez). Escolha condicional a se candidatar; a bolsa é o pacote do corte; a origem é preferência revelada, medida pelo vínculo anterior no CNES, e não causa da escolha. Cautela: Origem é preferência revelada, não causa.</a:t>
+              <a:t>FALA (0:40): Então a bolsa não pesa? Pesa, quando comparamos vagas parecidas. Fixando o par de UFs, comparamos só vagas da mesma UF, a de origem ou outra, vistas por médicos da mesma UF de origem. Aí, R$ 5 mil a mais multiplicam a chance por 1,47 nos ciclos 1 a 3 juntos e por 1,90 no ciclo 2. Na escolha, isso vale o mesmo que 75 km a menos de distância. Duas ressalvas: é um adendo feito depois do resultado; e, na especificação pré-registrada, sem fixar a UF, o p é 0,072.</a:t>
+            </a:r>
+          </a:p>
+          <a:p>
+            <a:r>
+              <a:rPr lang="pt-BR" dirty="0"/>
+              <a:t>DETALHE PARA PERGUNTAS: Adendo 52e (doc 57x; auditoria 48; pós-resultado): comparando só vagas da mesma UF (a de origem ou outra), vistas por médicos da mesma UF de origem (efeito fixo do par de UFs), a razão de chances da 1ª opção por +R$ 5 mil é 1,47 [1,15; 1,89] nos ciclos 1–3 (p de Holm 0,005) e 1,90 [1,30; 2,78] no ciclo 2 (p de Holm 0,003). Como ler: entre duas vagas parecidas da mesma UF, a de bolsa R$ 5 mil maior tem chance 1,47 vez maior de ser a 1ª opção. No modelo base, sem fixar a UF: 1,25 [0,98; 1,61] e 1,79 [1,19; 2,68]; a especificação pré-registrada (P1a) não rejeita zero (p 0,072; família de um teste, Holm = p). Em km: dentro da mesma UF, +R$ 5 mil pesam como 75 km [28; 122] a menos de distância nos ciclos 1–3 e 117 km [56; 178] no ciclo 2; no modelo base, com o quadro corrigido, 119 km [−12; 250] e 302 km [88; 516]. Os km caem dentro da UF porque a distância pesa mais ali, não porque a bolsa pese menos. Mostra que a escolha responde à bolsa; não testa a comparação com a origem. Escolha não é expansão: o que uma vaga ganha, outra do mesmo curso perde. Com o score bootstrap para poucos grupos, o VL-1 se mantém (doc 57x). Pacote do corte.</a:t>
+            </a:r>
+          </a:p>
+          <a:p>
+            <a:r>
+              <a:rPr lang="pt-BR" dirty="0"/>
+              <a:t>Cautela na tela: Adendo pós-resultado; pré-registrado, sem fixar a UF: p 0,072.</a:t>
             </a:r>
           </a:p>
         </p:txBody>
@@ -9274,7 +9340,19 @@
           <a:p>
             <a:r>
               <a:rPr lang="pt-BR" dirty="0"/>
-              <a:t>Adendo 52e (doc 57x; auditoria 48; pós-resultado): comparando só vagas da mesma UF (a de origem ou outra), vistas por médicos da mesma UF de origem (efeito fixo do par de UFs), a razão de chances da 1ª opção por +R$ 5 mil é 1,47 [1,15; 1,89] nos ciclos 1–3 (p de Holm 0,005) e 1,90 [1,30; 2,78] no ciclo 2 (p de Holm 0,003). No modelo base, sem fixar a UF: 1,25 [0,98; 1,61] e 1,79 [1,19; 2,68]; a especificação pré-registrada (P1a) não rejeita zero (p 0,072; família de um teste, Holm = p). Em km: dentro da mesma UF, +R$ 5 mil pesam como 75 km [28; 122] a menos de distância nos ciclos 1–3 e 117 km [56; 178] no ciclo 2; no modelo base, com o quadro corrigido, 119 km [−12; 250] e 302 km [88; 516]. Os km caem dentro da UF porque a distância pesa mais ali, não porque a bolsa pese menos. Mostra que a escolha responde à bolsa; não testa a comparação com a origem. Escolha não é expansão: o que uma vaga ganha, outra do mesmo curso perde. Com o score bootstrap para poucos grupos, o VL-1 se mantém (doc 57x). Pacote do corte. Cautela: Adendo pós-resultado; pré-registrado, sem fixar a UF: p 0,072.</a:t>
+              <a:t>FALA (0:40): Se mantém, à direita: a origem pesa mais que toda a bolsa em cada ciclo separado; a diferença fica acima de zero nos três, de 1,19 no ciclo 2 a 2,37 no ciclo 3. E, entre vagas da mesma UF, a bolsa continua pesando com a distância em log e com a região de saúde fixada. Não se mantém o peso da bolsa sozinho: no pré-registrado o intervalo contém 1; ele é forte só no ciclo 2, e perto do corte é inconclusivo. Por que o ciclo 2? Não sabemos.</a:t>
+            </a:r>
+          </a:p>
+          <a:p>
+            <a:r>
+              <a:rPr lang="pt-BR" dirty="0"/>
+              <a:t>DETALHE PARA PERGUNTAS: Especificação pré-registrada (M1, ciclos 1–3, quadro corrigido): 1,25 [0,98; 1,61], IC que contém 1; é a principal do peso da bolsa, e o VL-1 é adendo. Por ciclo (o mesmo modelo): razão de chances 1,07 [0,69; 1,65] no ciclo 1, 1,79 [1,19; 2,68] no ciclo 2 e 1,00 [0,72; 1,39] no ciclo 3. A bolsa desloca a escolha com força só no ciclo 2; nos ciclos 1 e 3, os intervalos são largos, e não sabemos por quê (leituras candidatas, sem teste: informação sobre a grade, vagas por curso, parte de vagas imediatas; doc 57a). Quadro do ciclo 2: com o quadro refeito depois do resultado (19/03/2026), 1,70 [1,22; 2,37]; com o de 13/02/2026, vigente na inscrição, 1,79 (adendo 52c, auditoria 41; as demais variantes no adendo 52d, auditoria 46). Comparando vagas da mesma UF: com a distância em log, 1,45 [1,15; 1,83] (ciclo 2: 1,75 [1,23; 2,49]); com a região de saúde de origem no lugar da UF de origem, 1,49 [1,15; 1,92] (ciclo 2: 1,91 [1,33; 2,74]); só com vagas a até 0,050 de um corte, 1,28 [0,95; 1,72], p de Holm 0,103: inconclusivo. À direita, origem − toda a bolsa por ciclo: 2,34 [1,45; 3,24], 1,19 [0,51; 1,86] e 2,37 [1,75; 3,00]: a origem pesa mais nos três ciclos. O peso da bolsa sozinho depende da especificação: com o logit explodido (doc 57v) e com o spline cúbico do IVS (doc 42), o IC contém 1; origem − bolsa fica acima de zero em todas as variantes (doc 66, §7). Tudo pós-resultado e condicional a se candidatar.</a:t>
+            </a:r>
+          </a:p>
+          <a:p>
+            <a:r>
+              <a:rPr lang="pt-BR" dirty="0"/>
+              <a:t>Cautela na tela: Pré-registrado: IC contém 1.</a:t>
             </a:r>
           </a:p>
         </p:txBody>
@@ -9333,7 +9411,13 @@
           <a:p>
             <a:r>
               <a:rPr lang="pt-BR" dirty="0"/>
-              <a:t>Especificação pré-registrada (M1, ciclos 1–3, quadro corrigido): 1,25 [0,98; 1,61], IC que contém 1; é a principal do peso da bolsa, e o VL-1 é adendo. Por ciclo (o mesmo modelo): razão de chances 1,07 [0,69; 1,65] no ciclo 1, 1,79 [1,19; 2,68] no ciclo 2 e 1,00 [0,72; 1,39] no ciclo 3. A bolsa desloca a escolha com força só no ciclo 2; nos ciclos 1 e 3, os intervalos são largos, e não sabemos por quê. Quadro do ciclo 2: com o quadro refeito depois do resultado (19/03/2026), 1,70 [1,22; 2,37]; com o de 13/02/2026, vigente na inscrição, 1,79 (adendo 52c, auditoria 41; as demais variantes no adendo 52d, auditoria 46). Comparando vagas da mesma UF: com a distância em log, 1,45 [1,15; 1,83] (ciclo 2: 1,75 [1,23; 2,49]); com a região de saúde de origem no lugar da UF de origem, 1,49 [1,15; 1,92] (ciclo 2: 1,91 [1,33; 2,74]); só com vagas a até 0,050 de um corte, 1,28 [0,95; 1,72], p de Holm 0,103: inconclusivo. À direita, origem − toda a bolsa por ciclo: 2,34 [1,45; 3,24], 1,19 [0,51; 1,86] e 2,37 [1,75; 3,00]: a origem pesa mais nos três ciclos. O peso da bolsa sozinho depende da especificação: com o logit explodido (doc 57v) e com o spline cúbico do IVS (doc 42), o IC contém 1; origem − bolsa fica acima de zero em todas as variantes. Tudo pós-resultado e condicional a se candidatar. Cautela: Pré-registrado: IC contém 1; variantes do adendo: mesma leitura.</a:t>
+              <a:t>FALA (0:30): Voltando à pergunta: na escolha da vaga, a origem pesa mais que a bolsa? Sim, e em todos os ciclos. Segundo, entre vagas da mesma UF, a bolsa maior é preferida: ela muda qual vaga o médico escolhe. Terceiro, pela teoria da banca 1, o médico aceita a vaga se a bolsa compensa o custo do lugar; os dados sugerem que um degrau de R$ 5 mil não compensa sair da própria UF: incentivo limitado.</a:t>
+            </a:r>
+          </a:p>
+          <a:p>
+            <a:r>
+              <a:rPr lang="pt-BR" dirty="0"/>
+              <a:t>DETALHE PARA PERGUNTAS: No modelo da banca 1, o médico aceita a vaga se a bolsa compensa o custo do lugar. O dado: a vaga na UF de origem pesa mais que toda a diferença de bolsa (o pacote do corte); o D_UF positivo diz só isso. A leitura que os dados sugerem, sem teste direto: o custo que pesa não é o do município, que a bolsa compensa, e sim o de sair da própria UF; a origem é preferência revelada e pode carregar também família, rede e o emprego atual. Um degrau de R$ 5 mil desloca a escolha entre vagas da mesma UF, e os dados sugerem que não compensa esse custo: incentivo limitado. É coerente com não termos detectado aumento do preenchimento no corte (apêndice), mas essa ligação é interpretação, não teste (auditoria 50). Dá para afirmar: entre quem se candidatou, a vaga de bolsa maior é preferida a uma vaga parecida da mesma UF; a origem pesa mais que toda a diferença de bolsa. Não dá para afirmar: que a bolsa causa mais médicos no município; que a origem causa a escolha; que o efeito no preenchimento é zero; que a bolsa reduz o preenchimento. O contraste é o pacote do corte, não a participação no PMM-E. Próximos passos: as decisões do autor que seguem abertas (doc 05, §4.1), o ciclo 3 com a competência 202703 madura e o universo de inscritos.</a:t>
             </a:r>
           </a:p>
         </p:txBody>
@@ -9392,7 +9476,13 @@
           <a:p>
             <a:r>
               <a:rPr lang="pt-BR" dirty="0"/>
-              <a:t>No modelo da banca 1, o médico aceita a vaga se a bolsa compensa o custo do lugar. O dado: a vaga na UF de origem pesa mais que toda a diferença de bolsa (o pacote do corte); o D_UF positivo diz só isso. A leitura que os dados sugerem, sem teste direto: o custo que domina não é o do município, que a bolsa compensa, e sim o de sair da própria UF; a origem é preferência revelada e pode carregar também família, rede e o emprego atual. Um degrau de R$ 5 mil desloca a escolha entre vagas da mesma UF, e os dados sugerem que não compensa esse custo: incentivo limitado. É coerente com não termos detectado aumento do preenchimento no corte (apêndice), mas essa ligação é interpretação, não teste (auditoria 50). Dá para afirmar: entre quem se candidatou, a vaga de bolsa maior é preferida a uma vaga parecida da mesma UF; a origem pesa mais que toda a diferença de bolsa. Não dá para afirmar: que a bolsa causa mais médicos no município; que a origem causa a escolha; que o efeito no preenchimento é zero; que a bolsa reduz o preenchimento. O contraste é o pacote do corte, não a participação no PMM-E. Próximos passos: as decisões do autor que seguem abertas (doc 05, §4.1), o ciclo 3 com a competência 202703 madura e o universo de inscritos.</a:t>
+              <a:t>FALA (0:40): Seis limitações, cada uma com o que ela implica. A hipótese é pós-resultado: o resultado é exploratório e pede confirmação com dados novos. A origem é preferência revelada: não dá para dizer que mudar o médico de lugar mudaria a escolha. Só vemos quem se candidatou: nada diz quantos médicos a bolsa atrairia. O contraste é o pacote do corte: não isolamos a bolsa. O peso forte da bolsa aparece só no ciclo 2: não dá para generalizar. E a origem é o vínculo no CNES, não a residência: laços de família ficam de fora. Obrigado.</a:t>
+            </a:r>
+          </a:p>
+          <a:p>
+            <a:r>
+              <a:rPr lang="pt-BR" dirty="0"/>
+              <a:t>DETALHE PARA PERGUNTAS: Implicações, com mais detalhe. Pós-resultado: a hipótese e o teste D_UF vieram depois dos coeficientes; o resultado é exploratório e só vira confirmatório com um protocolo congelado aplicado a dados novos (o universo de inscritos, novos ciclos). Preferência revelada: θ_UF junta família, rede, registro no conselho regional e, sobretudo, manter o emprego atual (as horas da bolsa são cumuláveis); não mede o efeito causal de mudar a origem de alguém, e a política não pode "mover a origem". Condicional a se candidatar: sem a margem extensiva, nada aqui diz quantos especialistas a mais se inscreveriam com bolsa maior; escolha não é preenchimento. Pacote do corte: nos mesmos cortes mudam outras regras federais (auditoria 18); a implicação de política vale para o pacote, não para os R$ 5 mil sozinhos. Só no ciclo 2: o peso forte da bolsa vem de um ciclo; nos ciclos 1 e 3 os IC são largos; não generalizar para o programa. Origem = vínculo no CNES: quem trabalha longe de casa aparece com a origem do trabalho; a distância "de casa" pode estar subestimada. Perguntas prováveis da banca (doc 66, §8). P1, "Vocês formularam a hipótese depois de ver os resultados?" Sim, e está na tela do slide 1; o D_UF formaliza uma diferença já visível nos IC (protocolo 52b; auditoria 31), e o VL-1 foi congelado antes de rodar (52e; auditoria 48). P2, "Se a bolsa não passa no Holm no pré-registrado, como ela muda qual vaga?" Pelo VL-1, que compara vagas da mesma UF e passa no Holm do adendo: 1,47 [1,15; 1,89], p de Holm 0,005; e pelo ciclo 2. No pré-registrado, p 0,072. O teste central da hipótese continua sendo o D_UF. P3, "Isso é a bolsa ou o pacote?" O pacote do corte: nos mesmos cortes mudam outras regras federais (auditoria 18); em 0,300 nenhum outro incentivo individual ao especialista do PMM-E muda (auditoria 35); em 0,400 fica aberta a ajuda de custo do PMMB; nos dois cortes, o serviço do município pode mudar.</a:t>
             </a:r>
           </a:p>
         </p:txBody>
@@ -9451,7 +9541,13 @@
           <a:p>
             <a:r>
               <a:rPr lang="pt-BR" dirty="0"/>
-              <a:t>Antiga H1, só como motivação (adendo 48b, doc 57n, auditoria 38; adendo 48h, doc 57w, auditoria 47). Chance de a célula com vaga imediata ser preenchida na 1ª chamada (HI-1): −3,7 p.p. [−21,3; +13,9] em 0,300 e −2,3 [−24,0; +19,4] em 0,400, p de Holm 1,000; o desenho só detectaria saltos de 25,1 e 31,0 p.p. Com efeito fixo de UF e os especialistas no entorno, só nos municípios com essa medida (nessa amostra, sem controle, −0,4 e +1,8): +5,4 [−11,0; +21,8] e −4,2 [−21,1; +12,6]. Pareando municípios da mesma UF e condição de capital: +16,4 [−3,8; +36,6] com 25 pares e −6,0 [−23,2; +11,5] com 29 pares; o ponto não deve ser lido como tamanho de efeito. O sinal negativo era mais forte nos médicos alocados por município em 0,300 (HI-2): −1,13 [−2,15; −0,10], p de Holm 0,126, nunca passou no Holm; na mesma amostra, sem controle, −1,15; com efeito fixo de UF e os especialistas no entorno, −0,62 [−1,67; +0,43]: encolhe e deixa de se distinguir de zero; o que move o ponto é a UF, não o raio (auditoria 47). A HI-2 cai em tamanho parecido nos três ciclos: −1,07 [−2,88; +0,74], −0,97 [−2,48; +0,55] e −1,33 [−3,59; +0,93]. Em 0,300, o balanço falha: do lado de bolsa maior, a parte de capitais muda −29,9 p.p., a do Nordeste −47,7 p.p., e há +10,54 especialistas por 10 mil hab. no resto da região de saúde. O sinal anda junto com a UF e a localização; é limite da RDD nesse corte, não prova de mecanismo, e não mostra que a bolsa reduz o preenchimento. Médico de outra UF por vaga imediata: +0,02 [−0,01; +0,06] em 0,300 e +0,16 [+0,00; +0,35] em 0,400, inconclusivo, com poucos pares. Pacote do corte. Cautela: Pacote do corte; só detectaria saltos grandes.</a:t>
+              <a:t>Antiga H1, só como motivação (adendo 48b, doc 57n, auditoria 38; adendo 48h, doc 57w, auditoria 47). Chance de a célula com vaga imediata ser preenchida na 1ª chamada (HI-1): −3,7 p.p. [−21,3; +13,9] em 0,300 e −2,3 [−24,0; +19,4] em 0,400, p de Holm 1,000; o desenho só detectaria saltos de 25,1 e 31,0 p.p. Com efeito fixo de UF e os especialistas no entorno, só nos municípios com essa medida (nessa amostra, sem controle, −0,4 e +1,8): +5,4 [−11,0; +21,8] e −4,2 [−21,1; +12,6]. Pareando municípios da mesma UF e condição de capital: +16,4 [−3,8; +36,6] com 25 pares e −6,0 [−23,2; +11,5] com 29 pares; o ponto não deve ser lido como tamanho de efeito. O sinal negativo era mais forte nos médicos alocados por município em 0,300 (HI-2): −1,13 [−2,15; −0,10], p de Holm 0,126, nunca passou no Holm; na mesma amostra, sem controle, −1,15; com efeito fixo de UF e os especialistas no entorno, −0,62 [−1,67; +0,43]: encolhe e deixa de se distinguir de zero; o que move o ponto é a UF, não o raio (auditoria 47). A HI-2 cai em tamanho parecido nos três ciclos: −1,07 [−2,88; +0,74], −0,97 [−2,48; +0,55] e −1,33 [−3,59; +0,93]. Em 0,300, o balanço falha: do lado de bolsa maior, a parte de capitais muda −29,9 p.p., a do Nordeste −47,7 p.p., e há +10,54 especialistas por 10 mil hab. no resto da região de saúde. O sinal anda junto com a UF e a localização; é limite da RDD nesse corte, não prova de mecanismo, e não mostra que a bolsa reduz o preenchimento. Médico de outra UF por vaga imediata: +0,02 [−0,01; +0,06] em 0,300 e +0,16 [+0,00; +0,35] em 0,400, inconclusivo, com poucos pares. Pacote do corte.</a:t>
+            </a:r>
+          </a:p>
+          <a:p>
+            <a:r>
+              <a:rPr lang="pt-BR" dirty="0"/>
+              <a:t>Cautela na tela: Pacote do corte; só detectaria saltos grandes.</a:t>
             </a:r>
           </a:p>
         </p:txBody>
@@ -9510,7 +9606,13 @@
           <a:p>
             <a:r>
               <a:rPr lang="pt-BR" dirty="0"/>
-              <a:t>Antiga H3, fora do corpo (decisão do autor de 27/10/2026). As horas cadastradas do médico do PMM-E sobem +6,6 h/sem [+5,4; +7,8] depois da entrada, e 51,0% [48,4; 53,7] já tinham vínculo no município do posto. No município, comparando os lados do corte (protocolo 64), não se detecta diferença na oferta de especialistas (p de Holm 1,000 nos dois cortes), o que não quer dizer que ela seja igual. Associação; não é efeito da bolsa nem da participação no PMM-E. Horas cadastradas não são presença. Cautela: Associação; vínculo cadastrado não é presença.</a:t>
+              <a:t>Antiga H3, fora do corpo (decisão do autor de 27/10/2026). As horas cadastradas do médico do PMM-E sobem +6,6 h/sem [+5,4; +7,8] depois da entrada, e 51,0% [48,4; 53,7] já tinham vínculo no município do posto. No município, comparando os lados do corte (protocolo 64), não se detecta diferença na oferta de especialistas (p de Holm 1,000 nos dois cortes), o que não quer dizer que ela seja igual. Associação; não é efeito da bolsa nem da participação no PMM-E. Horas cadastradas não são presença.</a:t>
+            </a:r>
+          </a:p>
+          <a:p>
+            <a:r>
+              <a:rPr lang="pt-BR" dirty="0"/>
+              <a:t>Cautela na tela: Associação; vínculo cadastrado não é presença.</a:t>
             </a:r>
           </a:p>
         </p:txBody>
@@ -15441,7 +15543,7 @@
                 </a:solidFill>
                 <a:latin typeface="Montserrat"/>
               </a:rPr>
-              <a:t>Hipótese: a origem pesa mais que a bolsa na escolha</a:t>
+              <a:t>Pergunta e hipótese: origem ou bolsa na escolha?</a:t>
             </a:r>
           </a:p>
         </p:txBody>
@@ -15953,7 +16055,7 @@
                 </a:solidFill>
                 <a:latin typeface="Montserrat"/>
               </a:rPr>
-              <a:t>Dados: as variáveis e de onde vêm</a:t>
+              <a:t>Dados e amostra: de onde vêm e quem entra no modelo</a:t>
             </a:r>
           </a:p>
         </p:txBody>
@@ -16080,812 +16182,154 @@
           </a:p>
         </p:txBody>
       </p:sp>
-      <p:graphicFrame>
-        <p:nvGraphicFramePr>
-          <p:cNvPr id="101" name="Tabela"/>
-          <p:cNvGraphicFramePr>
-            <a:graphicFrameLocks noGrp="1"/>
-          </p:cNvGraphicFramePr>
-          <p:nvPr/>
-        </p:nvGraphicFramePr>
-        <p:xfrm>
-          <a:off x="292608" y="850392"/>
-          <a:ext cx="11594592" cy="5129784"/>
-        </p:xfrm>
-        <a:graphic>
-          <a:graphicData uri="http://schemas.openxmlformats.org/drawingml/2006/table">
-            <a:tbl>
-              <a:tblPr firstRow="1" bandRow="1"/>
-              <a:tblGrid>
-                <a:gridCol w="7439406"/>
-                <a:gridCol w="4155186"/>
-              </a:tblGrid>
-              <a:tr h="732826">
-                <a:tc>
-                  <a:txBody>
-                    <a:bodyPr/>
-                    <a:lstStyle/>
-                    <a:p>
-                      <a:pPr marL="0" indent="0" algn="l">
-                        <a:lnSpc>
-                          <a:spcPct val="100000"/>
-                        </a:lnSpc>
-                        <a:spcBef>
-                          <a:spcPts val="0"/>
-                        </a:spcBef>
-                        <a:spcAft>
-                          <a:spcPts val="0"/>
-                        </a:spcAft>
-                        <a:buNone/>
-                      </a:pPr>
-                      <a:r>
-                        <a:rPr lang="pt-BR" sz="2400" b="1" dirty="0">
-                          <a:solidFill>
-                            <a:srgbClr val="FFFFFF"/>
-                          </a:solidFill>
-                          <a:latin typeface="Montserrat"/>
-                        </a:rPr>
-                        <a:t>Variável: principal · </a:t>
-                      </a:r>
-                      <a:r>
-                        <a:rPr lang="pt-BR" sz="2400" b="1" i="1" dirty="0">
-                          <a:solidFill>
-                            <a:srgbClr val="FFFFFF"/>
-                          </a:solidFill>
-                          <a:latin typeface="Montserrat"/>
-                        </a:rPr>
-                        <a:t>secundária</a:t>
-                      </a:r>
-                    </a:p>
-                  </a:txBody>
-                  <a:tcPr marL="73152" marR="73152" marT="36576" marB="36576" anchor="ctr">
-                    <a:lnL w="6350">
-                      <a:solidFill>
-                        <a:srgbClr val="C9DED1"/>
-                      </a:solidFill>
-                    </a:lnL>
-                    <a:lnR w="6350">
-                      <a:solidFill>
-                        <a:srgbClr val="C9DED1"/>
-                      </a:solidFill>
-                    </a:lnR>
-                    <a:lnT w="6350">
-                      <a:solidFill>
-                        <a:srgbClr val="C9DED1"/>
-                      </a:solidFill>
-                    </a:lnT>
-                    <a:lnB w="6350">
-                      <a:solidFill>
-                        <a:srgbClr val="C9DED1"/>
-                      </a:solidFill>
-                    </a:lnB>
-                    <a:solidFill>
-                      <a:srgbClr val="114719"/>
-                    </a:solidFill>
-                  </a:tcPr>
-                </a:tc>
-                <a:tc>
-                  <a:txBody>
-                    <a:bodyPr/>
-                    <a:lstStyle/>
-                    <a:p>
-                      <a:pPr marL="0" indent="0" algn="l">
-                        <a:lnSpc>
-                          <a:spcPct val="100000"/>
-                        </a:lnSpc>
-                        <a:spcBef>
-                          <a:spcPts val="0"/>
-                        </a:spcBef>
-                        <a:spcAft>
-                          <a:spcPts val="0"/>
-                        </a:spcAft>
-                        <a:buNone/>
-                      </a:pPr>
-                      <a:r>
-                        <a:rPr lang="pt-BR" sz="2400" b="1" dirty="0">
-                          <a:solidFill>
-                            <a:srgbClr val="FFFFFF"/>
-                          </a:solidFill>
-                          <a:latin typeface="Montserrat"/>
-                        </a:rPr>
-                        <a:t>Fonte</a:t>
-                      </a:r>
-                    </a:p>
-                  </a:txBody>
-                  <a:tcPr marL="73152" marR="73152" marT="36576" marB="36576" anchor="ctr">
-                    <a:lnL w="6350">
-                      <a:solidFill>
-                        <a:srgbClr val="C9DED1"/>
-                      </a:solidFill>
-                    </a:lnL>
-                    <a:lnR w="6350">
-                      <a:solidFill>
-                        <a:srgbClr val="C9DED1"/>
-                      </a:solidFill>
-                    </a:lnR>
-                    <a:lnT w="6350">
-                      <a:solidFill>
-                        <a:srgbClr val="C9DED1"/>
-                      </a:solidFill>
-                    </a:lnT>
-                    <a:lnB w="6350">
-                      <a:solidFill>
-                        <a:srgbClr val="C9DED1"/>
-                      </a:solidFill>
-                    </a:lnB>
-                    <a:solidFill>
-                      <a:srgbClr val="114719"/>
-                    </a:solidFill>
-                  </a:tcPr>
-                </a:tc>
-              </a:tr>
-              <a:tr h="732826">
-                <a:tc>
-                  <a:txBody>
-                    <a:bodyPr/>
-                    <a:lstStyle/>
-                    <a:p>
-                      <a:pPr marL="0" indent="0" algn="l">
-                        <a:lnSpc>
-                          <a:spcPct val="100000"/>
-                        </a:lnSpc>
-                        <a:spcBef>
-                          <a:spcPts val="0"/>
-                        </a:spcBef>
-                        <a:spcAft>
-                          <a:spcPts val="0"/>
-                        </a:spcAft>
-                        <a:buNone/>
-                      </a:pPr>
-                      <a:r>
-                        <a:rPr lang="pt-BR" sz="2400" b="1" dirty="0">
-                          <a:solidFill>
-                            <a:srgbClr val="3A3A3A"/>
-                          </a:solidFill>
-                          <a:latin typeface="Montserrat"/>
-                        </a:rPr>
-                        <a:t>1ª opção</a:t>
-                      </a:r>
-                    </a:p>
-                  </a:txBody>
-                  <a:tcPr marL="73152" marR="73152" marT="36576" marB="36576" anchor="ctr">
-                    <a:lnL w="6350">
-                      <a:solidFill>
-                        <a:srgbClr val="C9DED1"/>
-                      </a:solidFill>
-                    </a:lnL>
-                    <a:lnR w="6350">
-                      <a:solidFill>
-                        <a:srgbClr val="C9DED1"/>
-                      </a:solidFill>
-                    </a:lnR>
-                    <a:lnT w="6350">
-                      <a:solidFill>
-                        <a:srgbClr val="C9DED1"/>
-                      </a:solidFill>
-                    </a:lnT>
-                    <a:lnB w="6350">
-                      <a:solidFill>
-                        <a:srgbClr val="C9DED1"/>
-                      </a:solidFill>
-                    </a:lnB>
-                    <a:solidFill>
-                      <a:srgbClr val="F3F7F3"/>
-                    </a:solidFill>
-                  </a:tcPr>
-                </a:tc>
-                <a:tc>
-                  <a:txBody>
-                    <a:bodyPr/>
-                    <a:lstStyle/>
-                    <a:p>
-                      <a:pPr marL="0" indent="0" algn="l">
-                        <a:lnSpc>
-                          <a:spcPct val="100000"/>
-                        </a:lnSpc>
-                        <a:spcBef>
-                          <a:spcPts val="0"/>
-                        </a:spcBef>
-                        <a:spcAft>
-                          <a:spcPts val="0"/>
-                        </a:spcAft>
-                        <a:buNone/>
-                      </a:pPr>
-                      <a:r>
-                        <a:rPr lang="pt-BR" sz="2400" b="0" dirty="0">
-                          <a:solidFill>
-                            <a:srgbClr val="3A3A3A"/>
-                          </a:solidFill>
-                          <a:latin typeface="Montserrat"/>
-                        </a:rPr>
-                        <a:t>editais SGTES/MS</a:t>
-                      </a:r>
-                    </a:p>
-                  </a:txBody>
-                  <a:tcPr marL="73152" marR="73152" marT="36576" marB="36576" anchor="ctr">
-                    <a:lnL w="6350">
-                      <a:solidFill>
-                        <a:srgbClr val="C9DED1"/>
-                      </a:solidFill>
-                    </a:lnL>
-                    <a:lnR w="6350">
-                      <a:solidFill>
-                        <a:srgbClr val="C9DED1"/>
-                      </a:solidFill>
-                    </a:lnR>
-                    <a:lnT w="6350">
-                      <a:solidFill>
-                        <a:srgbClr val="C9DED1"/>
-                      </a:solidFill>
-                    </a:lnT>
-                    <a:lnB w="6350">
-                      <a:solidFill>
-                        <a:srgbClr val="C9DED1"/>
-                      </a:solidFill>
-                    </a:lnB>
-                    <a:solidFill>
-                      <a:srgbClr val="F3F7F3"/>
-                    </a:solidFill>
-                  </a:tcPr>
-                </a:tc>
-              </a:tr>
-              <a:tr h="732826">
-                <a:tc>
-                  <a:txBody>
-                    <a:bodyPr/>
-                    <a:lstStyle/>
-                    <a:p>
-                      <a:pPr marL="0" indent="0" algn="l">
-                        <a:lnSpc>
-                          <a:spcPct val="100000"/>
-                        </a:lnSpc>
-                        <a:spcBef>
-                          <a:spcPts val="0"/>
-                        </a:spcBef>
-                        <a:spcAft>
-                          <a:spcPts val="0"/>
-                        </a:spcAft>
-                        <a:buNone/>
-                      </a:pPr>
-                      <a:r>
-                        <a:rPr lang="pt-BR" sz="2400" b="1" dirty="0">
-                          <a:solidFill>
-                            <a:srgbClr val="3A3A3A"/>
-                          </a:solidFill>
-                          <a:latin typeface="Montserrat"/>
-                        </a:rPr>
-                        <a:t>Origem do médico</a:t>
-                      </a:r>
-                    </a:p>
-                  </a:txBody>
-                  <a:tcPr marL="73152" marR="73152" marT="36576" marB="36576" anchor="ctr">
-                    <a:lnL w="6350">
-                      <a:solidFill>
-                        <a:srgbClr val="C9DED1"/>
-                      </a:solidFill>
-                    </a:lnL>
-                    <a:lnR w="6350">
-                      <a:solidFill>
-                        <a:srgbClr val="C9DED1"/>
-                      </a:solidFill>
-                    </a:lnR>
-                    <a:lnT w="6350">
-                      <a:solidFill>
-                        <a:srgbClr val="C9DED1"/>
-                      </a:solidFill>
-                    </a:lnT>
-                    <a:lnB w="6350">
-                      <a:solidFill>
-                        <a:srgbClr val="C9DED1"/>
-                      </a:solidFill>
-                    </a:lnB>
-                    <a:solidFill>
-                      <a:srgbClr val="FFFFFF"/>
-                    </a:solidFill>
-                  </a:tcPr>
-                </a:tc>
-                <a:tc>
-                  <a:txBody>
-                    <a:bodyPr/>
-                    <a:lstStyle/>
-                    <a:p>
-                      <a:pPr marL="0" indent="0" algn="l">
-                        <a:lnSpc>
-                          <a:spcPct val="100000"/>
-                        </a:lnSpc>
-                        <a:spcBef>
-                          <a:spcPts val="0"/>
-                        </a:spcBef>
-                        <a:spcAft>
-                          <a:spcPts val="0"/>
-                        </a:spcAft>
-                        <a:buNone/>
-                      </a:pPr>
-                      <a:r>
-                        <a:rPr lang="pt-BR" sz="2400" b="0" dirty="0">
-                          <a:solidFill>
-                            <a:srgbClr val="3A3A3A"/>
-                          </a:solidFill>
-                          <a:latin typeface="Montserrat"/>
-                        </a:rPr>
-                        <a:t>CNES</a:t>
-                      </a:r>
-                    </a:p>
-                  </a:txBody>
-                  <a:tcPr marL="73152" marR="73152" marT="36576" marB="36576" anchor="ctr">
-                    <a:lnL w="6350">
-                      <a:solidFill>
-                        <a:srgbClr val="C9DED1"/>
-                      </a:solidFill>
-                    </a:lnL>
-                    <a:lnR w="6350">
-                      <a:solidFill>
-                        <a:srgbClr val="C9DED1"/>
-                      </a:solidFill>
-                    </a:lnR>
-                    <a:lnT w="6350">
-                      <a:solidFill>
-                        <a:srgbClr val="C9DED1"/>
-                      </a:solidFill>
-                    </a:lnT>
-                    <a:lnB w="6350">
-                      <a:solidFill>
-                        <a:srgbClr val="C9DED1"/>
-                      </a:solidFill>
-                    </a:lnB>
-                    <a:solidFill>
-                      <a:srgbClr val="FFFFFF"/>
-                    </a:solidFill>
-                  </a:tcPr>
-                </a:tc>
-              </a:tr>
-              <a:tr h="732826">
-                <a:tc>
-                  <a:txBody>
-                    <a:bodyPr/>
-                    <a:lstStyle/>
-                    <a:p>
-                      <a:pPr marL="0" indent="0" algn="l">
-                        <a:lnSpc>
-                          <a:spcPct val="100000"/>
-                        </a:lnSpc>
-                        <a:spcBef>
-                          <a:spcPts val="0"/>
-                        </a:spcBef>
-                        <a:spcAft>
-                          <a:spcPts val="0"/>
-                        </a:spcAft>
-                        <a:buNone/>
-                      </a:pPr>
-                      <a:r>
-                        <a:rPr lang="pt-BR" sz="2400" b="1" dirty="0">
-                          <a:solidFill>
-                            <a:srgbClr val="3A3A3A"/>
-                          </a:solidFill>
-                          <a:latin typeface="Montserrat"/>
-                        </a:rPr>
-                        <a:t>Vagas, bolsa</a:t>
-                      </a:r>
-                    </a:p>
-                  </a:txBody>
-                  <a:tcPr marL="73152" marR="73152" marT="36576" marB="36576" anchor="ctr">
-                    <a:lnL w="6350">
-                      <a:solidFill>
-                        <a:srgbClr val="C9DED1"/>
-                      </a:solidFill>
-                    </a:lnL>
-                    <a:lnR w="6350">
-                      <a:solidFill>
-                        <a:srgbClr val="C9DED1"/>
-                      </a:solidFill>
-                    </a:lnR>
-                    <a:lnT w="6350">
-                      <a:solidFill>
-                        <a:srgbClr val="C9DED1"/>
-                      </a:solidFill>
-                    </a:lnT>
-                    <a:lnB w="6350">
-                      <a:solidFill>
-                        <a:srgbClr val="C9DED1"/>
-                      </a:solidFill>
-                    </a:lnB>
-                    <a:solidFill>
-                      <a:srgbClr val="F3F7F3"/>
-                    </a:solidFill>
-                  </a:tcPr>
-                </a:tc>
-                <a:tc>
-                  <a:txBody>
-                    <a:bodyPr/>
-                    <a:lstStyle/>
-                    <a:p>
-                      <a:pPr marL="0" indent="0" algn="l">
-                        <a:lnSpc>
-                          <a:spcPct val="100000"/>
-                        </a:lnSpc>
-                        <a:spcBef>
-                          <a:spcPts val="0"/>
-                        </a:spcBef>
-                        <a:spcAft>
-                          <a:spcPts val="0"/>
-                        </a:spcAft>
-                        <a:buNone/>
-                      </a:pPr>
-                      <a:r>
-                        <a:rPr lang="pt-BR" sz="2400" b="0" dirty="0">
-                          <a:solidFill>
-                            <a:srgbClr val="3A3A3A"/>
-                          </a:solidFill>
-                          <a:latin typeface="Montserrat"/>
-                        </a:rPr>
-                        <a:t>quadros SGTES/MS</a:t>
-                      </a:r>
-                    </a:p>
-                  </a:txBody>
-                  <a:tcPr marL="73152" marR="73152" marT="36576" marB="36576" anchor="ctr">
-                    <a:lnL w="6350">
-                      <a:solidFill>
-                        <a:srgbClr val="C9DED1"/>
-                      </a:solidFill>
-                    </a:lnL>
-                    <a:lnR w="6350">
-                      <a:solidFill>
-                        <a:srgbClr val="C9DED1"/>
-                      </a:solidFill>
-                    </a:lnR>
-                    <a:lnT w="6350">
-                      <a:solidFill>
-                        <a:srgbClr val="C9DED1"/>
-                      </a:solidFill>
-                    </a:lnT>
-                    <a:lnB w="6350">
-                      <a:solidFill>
-                        <a:srgbClr val="C9DED1"/>
-                      </a:solidFill>
-                    </a:lnB>
-                    <a:solidFill>
-                      <a:srgbClr val="F3F7F3"/>
-                    </a:solidFill>
-                  </a:tcPr>
-                </a:tc>
-              </a:tr>
-              <a:tr h="732826">
-                <a:tc>
-                  <a:txBody>
-                    <a:bodyPr/>
-                    <a:lstStyle/>
-                    <a:p>
-                      <a:pPr marL="0" indent="0" algn="l">
-                        <a:lnSpc>
-                          <a:spcPct val="100000"/>
-                        </a:lnSpc>
-                        <a:spcBef>
-                          <a:spcPts val="0"/>
-                        </a:spcBef>
-                        <a:spcAft>
-                          <a:spcPts val="0"/>
-                        </a:spcAft>
-                        <a:buNone/>
-                      </a:pPr>
-                      <a:r>
-                        <a:rPr lang="pt-BR" sz="2400" b="1" dirty="0">
-                          <a:solidFill>
-                            <a:srgbClr val="3A3A3A"/>
-                          </a:solidFill>
-                          <a:latin typeface="Montserrat"/>
-                        </a:rPr>
-                        <a:t>IVS 2010</a:t>
-                      </a:r>
-                    </a:p>
-                  </a:txBody>
-                  <a:tcPr marL="73152" marR="73152" marT="36576" marB="36576" anchor="ctr">
-                    <a:lnL w="6350">
-                      <a:solidFill>
-                        <a:srgbClr val="C9DED1"/>
-                      </a:solidFill>
-                    </a:lnL>
-                    <a:lnR w="6350">
-                      <a:solidFill>
-                        <a:srgbClr val="C9DED1"/>
-                      </a:solidFill>
-                    </a:lnR>
-                    <a:lnT w="6350">
-                      <a:solidFill>
-                        <a:srgbClr val="C9DED1"/>
-                      </a:solidFill>
-                    </a:lnT>
-                    <a:lnB w="6350">
-                      <a:solidFill>
-                        <a:srgbClr val="C9DED1"/>
-                      </a:solidFill>
-                    </a:lnB>
-                    <a:solidFill>
-                      <a:srgbClr val="FFFFFF"/>
-                    </a:solidFill>
-                  </a:tcPr>
-                </a:tc>
-                <a:tc>
-                  <a:txBody>
-                    <a:bodyPr/>
-                    <a:lstStyle/>
-                    <a:p>
-                      <a:pPr marL="0" indent="0" algn="l">
-                        <a:lnSpc>
-                          <a:spcPct val="100000"/>
-                        </a:lnSpc>
-                        <a:spcBef>
-                          <a:spcPts val="0"/>
-                        </a:spcBef>
-                        <a:spcAft>
-                          <a:spcPts val="0"/>
-                        </a:spcAft>
-                        <a:buNone/>
-                      </a:pPr>
-                      <a:r>
-                        <a:rPr lang="pt-BR" sz="2400" b="0" dirty="0">
-                          <a:solidFill>
-                            <a:srgbClr val="3A3A3A"/>
-                          </a:solidFill>
-                          <a:latin typeface="Montserrat"/>
-                        </a:rPr>
-                        <a:t>Ipea</a:t>
-                      </a:r>
-                    </a:p>
-                  </a:txBody>
-                  <a:tcPr marL="73152" marR="73152" marT="36576" marB="36576" anchor="ctr">
-                    <a:lnL w="6350">
-                      <a:solidFill>
-                        <a:srgbClr val="C9DED1"/>
-                      </a:solidFill>
-                    </a:lnL>
-                    <a:lnR w="6350">
-                      <a:solidFill>
-                        <a:srgbClr val="C9DED1"/>
-                      </a:solidFill>
-                    </a:lnR>
-                    <a:lnT w="6350">
-                      <a:solidFill>
-                        <a:srgbClr val="C9DED1"/>
-                      </a:solidFill>
-                    </a:lnT>
-                    <a:lnB w="6350">
-                      <a:solidFill>
-                        <a:srgbClr val="C9DED1"/>
-                      </a:solidFill>
-                    </a:lnB>
-                    <a:solidFill>
-                      <a:srgbClr val="FFFFFF"/>
-                    </a:solidFill>
-                  </a:tcPr>
-                </a:tc>
-              </a:tr>
-              <a:tr h="732826">
-                <a:tc>
-                  <a:txBody>
-                    <a:bodyPr/>
-                    <a:lstStyle/>
-                    <a:p>
-                      <a:pPr marL="0" indent="0" algn="l">
-                        <a:lnSpc>
-                          <a:spcPct val="100000"/>
-                        </a:lnSpc>
-                        <a:spcBef>
-                          <a:spcPts val="0"/>
-                        </a:spcBef>
-                        <a:spcAft>
-                          <a:spcPts val="0"/>
-                        </a:spcAft>
-                        <a:buNone/>
-                      </a:pPr>
-                      <a:r>
-                        <a:rPr lang="pt-BR" sz="2400" b="1" dirty="0">
-                          <a:solidFill>
-                            <a:srgbClr val="3A3A3A"/>
-                          </a:solidFill>
-                          <a:latin typeface="Montserrat"/>
-                        </a:rPr>
-                        <a:t>Distância, UF</a:t>
-                      </a:r>
-                    </a:p>
-                  </a:txBody>
-                  <a:tcPr marL="73152" marR="73152" marT="36576" marB="36576" anchor="ctr">
-                    <a:lnL w="6350">
-                      <a:solidFill>
-                        <a:srgbClr val="C9DED1"/>
-                      </a:solidFill>
-                    </a:lnL>
-                    <a:lnR w="6350">
-                      <a:solidFill>
-                        <a:srgbClr val="C9DED1"/>
-                      </a:solidFill>
-                    </a:lnR>
-                    <a:lnT w="6350">
-                      <a:solidFill>
-                        <a:srgbClr val="C9DED1"/>
-                      </a:solidFill>
-                    </a:lnT>
-                    <a:lnB w="6350">
-                      <a:solidFill>
-                        <a:srgbClr val="C9DED1"/>
-                      </a:solidFill>
-                    </a:lnB>
-                    <a:solidFill>
-                      <a:srgbClr val="F3F7F3"/>
-                    </a:solidFill>
-                  </a:tcPr>
-                </a:tc>
-                <a:tc>
-                  <a:txBody>
-                    <a:bodyPr/>
-                    <a:lstStyle/>
-                    <a:p>
-                      <a:pPr marL="0" indent="0" algn="l">
-                        <a:lnSpc>
-                          <a:spcPct val="100000"/>
-                        </a:lnSpc>
-                        <a:spcBef>
-                          <a:spcPts val="0"/>
-                        </a:spcBef>
-                        <a:spcAft>
-                          <a:spcPts val="0"/>
-                        </a:spcAft>
-                        <a:buNone/>
-                      </a:pPr>
-                      <a:r>
-                        <a:rPr lang="pt-BR" sz="2400" b="0" dirty="0">
-                          <a:solidFill>
-                            <a:srgbClr val="3A3A3A"/>
-                          </a:solidFill>
-                          <a:latin typeface="Montserrat"/>
-                        </a:rPr>
-                        <a:t>IBGE</a:t>
-                      </a:r>
-                    </a:p>
-                  </a:txBody>
-                  <a:tcPr marL="73152" marR="73152" marT="36576" marB="36576" anchor="ctr">
-                    <a:lnL w="6350">
-                      <a:solidFill>
-                        <a:srgbClr val="C9DED1"/>
-                      </a:solidFill>
-                    </a:lnL>
-                    <a:lnR w="6350">
-                      <a:solidFill>
-                        <a:srgbClr val="C9DED1"/>
-                      </a:solidFill>
-                    </a:lnR>
-                    <a:lnT w="6350">
-                      <a:solidFill>
-                        <a:srgbClr val="C9DED1"/>
-                      </a:solidFill>
-                    </a:lnT>
-                    <a:lnB w="6350">
-                      <a:solidFill>
-                        <a:srgbClr val="C9DED1"/>
-                      </a:solidFill>
-                    </a:lnB>
-                    <a:solidFill>
-                      <a:srgbClr val="F3F7F3"/>
-                    </a:solidFill>
-                  </a:tcPr>
-                </a:tc>
-              </a:tr>
-              <a:tr h="732826">
-                <a:tc>
-                  <a:txBody>
-                    <a:bodyPr/>
-                    <a:lstStyle/>
-                    <a:p>
-                      <a:pPr marL="0" indent="0" algn="l">
-                        <a:lnSpc>
-                          <a:spcPct val="100000"/>
-                        </a:lnSpc>
-                        <a:spcBef>
-                          <a:spcPts val="0"/>
-                        </a:spcBef>
-                        <a:spcAft>
-                          <a:spcPts val="0"/>
-                        </a:spcAft>
-                        <a:buNone/>
-                      </a:pPr>
-                      <a:r>
-                        <a:rPr lang="pt-BR" sz="2400" b="0" i="1" dirty="0">
-                          <a:solidFill>
-                            <a:srgbClr val="8A8A85"/>
-                          </a:solidFill>
-                          <a:latin typeface="Montserrat"/>
-                        </a:rPr>
-                        <a:t>Porte, capital</a:t>
-                      </a:r>
-                    </a:p>
-                  </a:txBody>
-                  <a:tcPr marL="73152" marR="73152" marT="36576" marB="36576" anchor="ctr">
-                    <a:lnL w="6350">
-                      <a:solidFill>
-                        <a:srgbClr val="C9DED1"/>
-                      </a:solidFill>
-                    </a:lnL>
-                    <a:lnR w="6350">
-                      <a:solidFill>
-                        <a:srgbClr val="C9DED1"/>
-                      </a:solidFill>
-                    </a:lnR>
-                    <a:lnT w="6350">
-                      <a:solidFill>
-                        <a:srgbClr val="C9DED1"/>
-                      </a:solidFill>
-                    </a:lnT>
-                    <a:lnB w="6350">
-                      <a:solidFill>
-                        <a:srgbClr val="C9DED1"/>
-                      </a:solidFill>
-                    </a:lnB>
-                    <a:solidFill>
-                      <a:srgbClr val="FFFFFF"/>
-                    </a:solidFill>
-                  </a:tcPr>
-                </a:tc>
-                <a:tc>
-                  <a:txBody>
-                    <a:bodyPr/>
-                    <a:lstStyle/>
-                    <a:p>
-                      <a:pPr marL="0" indent="0" algn="l">
-                        <a:lnSpc>
-                          <a:spcPct val="100000"/>
-                        </a:lnSpc>
-                        <a:spcBef>
-                          <a:spcPts val="0"/>
-                        </a:spcBef>
-                        <a:spcAft>
-                          <a:spcPts val="0"/>
-                        </a:spcAft>
-                        <a:buNone/>
-                      </a:pPr>
-                      <a:r>
-                        <a:rPr lang="pt-BR" sz="2400" b="0" i="1" dirty="0">
-                          <a:solidFill>
-                            <a:srgbClr val="8A8A85"/>
-                          </a:solidFill>
-                          <a:latin typeface="Montserrat"/>
-                        </a:rPr>
-                        <a:t>IBGE</a:t>
-                      </a:r>
-                    </a:p>
-                  </a:txBody>
-                  <a:tcPr marL="73152" marR="73152" marT="36576" marB="36576" anchor="ctr">
-                    <a:lnL w="6350">
-                      <a:solidFill>
-                        <a:srgbClr val="C9DED1"/>
-                      </a:solidFill>
-                    </a:lnL>
-                    <a:lnR w="6350">
-                      <a:solidFill>
-                        <a:srgbClr val="C9DED1"/>
-                      </a:solidFill>
-                    </a:lnR>
-                    <a:lnT w="6350">
-                      <a:solidFill>
-                        <a:srgbClr val="C9DED1"/>
-                      </a:solidFill>
-                    </a:lnT>
-                    <a:lnB w="6350">
-                      <a:solidFill>
-                        <a:srgbClr val="C9DED1"/>
-                      </a:solidFill>
-                    </a:lnB>
-                    <a:solidFill>
-                      <a:srgbClr val="FFFFFF"/>
-                    </a:solidFill>
-                  </a:tcPr>
-                </a:tc>
-              </a:tr>
-            </a:tbl>
-          </a:graphicData>
-        </a:graphic>
-      </p:graphicFrame>
       <p:sp>
         <p:nvSpPr>
-          <p:cNvPr id="102" name="Fontes"/>
+          <p:cNvPr id="101" name="Linha"/>
+          <p:cNvSpPr/>
+          <p:nvPr/>
+        </p:nvSpPr>
+        <p:spPr>
+          <a:xfrm>
+            <a:off x="292608" y="5212080"/>
+            <a:ext cx="11594592" cy="420624"/>
+          </a:xfrm>
+          <a:prstGeom prst="rect">
+            <a:avLst/>
+          </a:prstGeom>
+          <a:noFill/>
+          <a:ln>
+            <a:noFill/>
+          </a:ln>
+        </p:spPr>
+        <p:txBody>
+          <a:bodyPr wrap="square" lIns="164592" tIns="18288" rIns="164592" bIns="18288" rtlCol="0" anchor="ctr">
+            <a:noAutofit/>
+          </a:bodyPr>
+          <a:lstStyle/>
+          <a:p>
+            <a:pPr marL="0" indent="0" algn="l">
+              <a:lnSpc>
+                <a:spcPct val="100000"/>
+              </a:lnSpc>
+              <a:spcBef>
+                <a:spcPts val="0"/>
+              </a:spcBef>
+              <a:spcAft>
+                <a:spcPts val="0"/>
+              </a:spcAft>
+              <a:buNone/>
+            </a:pPr>
+            <a:r>
+              <a:rPr lang="pt-BR" sz="1800" b="1" dirty="0">
+                <a:solidFill>
+                  <a:srgbClr val="114719"/>
+                </a:solidFill>
+                <a:latin typeface="Montserrat"/>
+              </a:rPr>
+              <a:t>Unidade:</a:t>
+            </a:r>
+            <a:r>
+              <a:rPr lang="pt-BR" sz="1800" b="0" dirty="0">
+                <a:solidFill>
+                  <a:srgbClr val="3A3A3A"/>
+                </a:solidFill>
+                <a:latin typeface="Montserrat"/>
+              </a:rPr>
+              <a:t> candidato × vaga do seu curso e ciclo; y = 1 na 1ª opção.</a:t>
+            </a:r>
+          </a:p>
+        </p:txBody>
+      </p:sp>
+      <p:sp>
+        <p:nvSpPr>
+          <p:cNvPr id="102" name="Linha"/>
+          <p:cNvSpPr/>
+          <p:nvPr/>
+        </p:nvSpPr>
+        <p:spPr>
+          <a:xfrm>
+            <a:off x="292608" y="5687568"/>
+            <a:ext cx="11594592" cy="420624"/>
+          </a:xfrm>
+          <a:prstGeom prst="rect">
+            <a:avLst/>
+          </a:prstGeom>
+          <a:noFill/>
+          <a:ln>
+            <a:noFill/>
+          </a:ln>
+        </p:spPr>
+        <p:txBody>
+          <a:bodyPr wrap="square" lIns="164592" tIns="18288" rIns="164592" bIns="18288" rtlCol="0" anchor="ctr">
+            <a:noAutofit/>
+          </a:bodyPr>
+          <a:lstStyle/>
+          <a:p>
+            <a:pPr marL="0" indent="0" algn="l">
+              <a:lnSpc>
+                <a:spcPct val="100000"/>
+              </a:lnSpc>
+              <a:spcBef>
+                <a:spcPts val="0"/>
+              </a:spcBef>
+              <a:spcAft>
+                <a:spcPts val="0"/>
+              </a:spcAft>
+              <a:buNone/>
+            </a:pPr>
+            <a:r>
+              <a:rPr lang="pt-BR" sz="1800" b="1" dirty="0">
+                <a:solidFill>
+                  <a:srgbClr val="114719"/>
+                </a:solidFill>
+                <a:latin typeface="Montserrat"/>
+              </a:rPr>
+              <a:t>No modelo:</a:t>
+            </a:r>
+            <a:r>
+              <a:rPr lang="pt-BR" sz="1800" b="0" dirty="0">
+                <a:solidFill>
+                  <a:srgbClr val="3A3A3A"/>
+                </a:solidFill>
+                <a:latin typeface="Montserrat"/>
+              </a:rPr>
+              <a:t> 5.421 candidatos e 932.577 pares candidato × vaga.</a:t>
+            </a:r>
+          </a:p>
+        </p:txBody>
+      </p:sp>
+      <p:pic>
+        <p:nvPicPr>
+          <p:cNvPr id="103" name="Figura" descr="Variáveis e fontes, à esquerda; à direita, o funil da amostra da escolha por ciclo, de quem tem 1ª opção no quadro até quem entra no modelo, com quem sai em cada etapa"/>
+          <p:cNvPicPr>
+            <a:picLocks noChangeAspect="1"/>
+          </p:cNvPicPr>
+          <p:nvPr/>
+        </p:nvPicPr>
+        <p:blipFill>
+          <a:blip r:embed="rId3"/>
+          <a:stretch>
+            <a:fillRect/>
+          </a:stretch>
+        </p:blipFill>
+        <p:spPr>
+          <a:xfrm>
+            <a:off x="826252" y="804672"/>
+            <a:ext cx="10527304" cy="4279392"/>
+          </a:xfrm>
+          <a:prstGeom prst="rect">
+            <a:avLst/>
+          </a:prstGeom>
+          <a:ln w="6350">
+            <a:solidFill>
+              <a:srgbClr val="DDE7DF"/>
+            </a:solidFill>
+          </a:ln>
+        </p:spPr>
+      </p:pic>
+      <p:sp>
+        <p:nvSpPr>
+          <p:cNvPr id="104" name="Fontes"/>
           <p:cNvSpPr txBox="1"/>
           <p:nvPr/>
         </p:nvSpPr>
@@ -16936,7 +16380,7 @@
                 </a:solidFill>
                 <a:latin typeface="Montserrat"/>
               </a:rPr>
-              <a:t>output/apresentacao_banca2/tabela_fontes.csv; portão G1; auditorias 16, 36 e 41.</a:t>
+              <a:t>output/rdd_bolsa/P1_resumo.json (protocolo 52; doc 57a); portão G1; output/apresentacao_banca2/tabela_fontes.csv; curto_dados_amostra.png; auditorias 16, 36 e 41.</a:t>
             </a:r>
           </a:p>
         </p:txBody>
@@ -16950,1196 +16394,6 @@
 </file>
 
 <file path=ppt/slides/slide39.xml><?xml version="1.0" encoding="utf-8"?>
-<p:sld xmlns:a="http://schemas.openxmlformats.org/drawingml/2006/main" xmlns:r="http://schemas.openxmlformats.org/officeDocument/2006/relationships" xmlns:p="http://schemas.openxmlformats.org/presentationml/2006/main">
-  <p:cSld>
-    <p:spTree>
-      <p:nvGrpSpPr>
-        <p:cNvPr id="1" name=""/>
-        <p:cNvGrpSpPr/>
-        <p:nvPr/>
-      </p:nvGrpSpPr>
-      <p:grpSpPr>
-        <a:xfrm>
-          <a:off x="0" y="0"/>
-          <a:ext cx="0" cy="0"/>
-          <a:chOff x="0" y="0"/>
-          <a:chExt cx="0" cy="0"/>
-        </a:xfrm>
-      </p:grpSpPr>
-      <p:sp>
-        <p:nvSpPr>
-          <p:cNvPr id="2" name="Título"/>
-          <p:cNvSpPr>
-            <a:spLocks noGrp="1"/>
-          </p:cNvSpPr>
-          <p:nvPr>
-            <p:ph type="title"/>
-          </p:nvPr>
-        </p:nvSpPr>
-        <p:spPr/>
-        <p:txBody>
-          <a:bodyPr>
-            <a:normAutofit/>
-          </a:bodyPr>
-          <a:lstStyle/>
-          <a:p>
-            <a:pPr marL="0" indent="0" algn="l">
-              <a:lnSpc>
-                <a:spcPct val="104000"/>
-              </a:lnSpc>
-              <a:spcAft>
-                <a:spcPts val="0"/>
-              </a:spcAft>
-              <a:buNone/>
-            </a:pPr>
-            <a:r>
-              <a:rPr lang="pt-BR" sz="2400" b="1" dirty="0">
-                <a:solidFill>
-                  <a:srgbClr val="FFFFFF"/>
-                </a:solidFill>
-                <a:latin typeface="Montserrat"/>
-              </a:rPr>
-              <a:t>Os três ciclos em números</a:t>
-            </a:r>
-          </a:p>
-        </p:txBody>
-      </p:sp>
-      <p:sp>
-        <p:nvSpPr>
-          <p:cNvPr id="3" name="Número da página"/>
-          <p:cNvSpPr>
-            <a:spLocks noGrp="1"/>
-          </p:cNvSpPr>
-          <p:nvPr>
-            <p:ph type="body" sz="quarter" idx="18"/>
-          </p:nvPr>
-        </p:nvSpPr>
-        <p:spPr>
-          <a:xfrm>
-            <a:off x="11706744" y="6457042"/>
-            <a:ext cx="492080" cy="400640"/>
-          </a:xfrm>
-        </p:spPr>
-        <p:txBody>
-          <a:bodyPr anchor="ctr">
-            <a:normAutofit/>
-          </a:bodyPr>
-          <a:lstStyle/>
-          <a:p>
-            <a:pPr algn="ctr"/>
-            <a:fld id="{B1A5E0C2-5F3A-4C7E-9D11-7A2E6C0F4B01}" type="slidenum">
-              <a:rPr lang="pt-BR" sz="1400" b="1">
-                <a:solidFill>
-                  <a:srgbClr val="BFBFBF"/>
-                </a:solidFill>
-                <a:latin typeface="Montserrat"/>
-              </a:rPr>
-              <a:t>‹#›</a:t>
-            </a:fld>
-            <a:endParaRPr lang="pt-BR" sz="1400" b="1">
-              <a:solidFill>
-                <a:srgbClr val="BFBFBF"/>
-              </a:solidFill>
-            </a:endParaRPr>
-          </a:p>
-        </p:txBody>
-      </p:sp>
-      <p:sp>
-        <p:nvSpPr>
-          <p:cNvPr id="4" name="Navegação do rodapé"/>
-          <p:cNvSpPr txBox="1"/>
-          <p:nvPr/>
-        </p:nvSpPr>
-        <p:spPr>
-          <a:xfrm>
-            <a:off x="196860" y="6639248"/>
-            <a:ext cx="9223026" cy="246221"/>
-          </a:xfrm>
-          <a:prstGeom prst="rect">
-            <a:avLst/>
-          </a:prstGeom>
-          <a:noFill/>
-        </p:spPr>
-        <p:txBody>
-          <a:bodyPr wrap="square" rtlCol="0">
-            <a:spAutoFit/>
-          </a:bodyPr>
-          <a:lstStyle/>
-          <a:p>
-            <a:r>
-              <a:rPr lang="pt-BR" sz="1000" dirty="0">
-                <a:latin typeface="Montserrat"/>
-              </a:rPr>
-              <a:t xml:space="preserve">Hipótese  |  </a:t>
-            </a:r>
-            <a:r>
-              <a:rPr lang="pt-BR" sz="1000" dirty="0">
-                <a:latin typeface="Montserrat"/>
-              </a:rPr>
-              <a:t xml:space="preserve">Dados  |  </a:t>
-            </a:r>
-            <a:r>
-              <a:rPr lang="pt-BR" sz="1000" b="1" dirty="0">
-                <a:solidFill>
-                  <a:srgbClr val="114719"/>
-                </a:solidFill>
-                <a:latin typeface="Montserrat"/>
-              </a:rPr>
-              <a:t>Análise descritiva</a:t>
-            </a:r>
-            <a:r>
-              <a:rPr lang="pt-BR" sz="1000" dirty="0">
-                <a:latin typeface="Montserrat"/>
-              </a:rPr>
-              <a:t xml:space="preserve">  |  </a:t>
-            </a:r>
-            <a:r>
-              <a:rPr lang="pt-BR" sz="1000" dirty="0">
-                <a:latin typeface="Montserrat"/>
-              </a:rPr>
-              <a:t xml:space="preserve">Metodologia  |  </a:t>
-            </a:r>
-            <a:r>
-              <a:rPr lang="pt-BR" sz="1000" dirty="0">
-                <a:latin typeface="Montserrat"/>
-              </a:rPr>
-              <a:t xml:space="preserve">Identificação  |  </a:t>
-            </a:r>
-            <a:r>
-              <a:rPr lang="pt-BR" sz="1000" dirty="0">
-                <a:latin typeface="Montserrat"/>
-              </a:rPr>
-              <a:t xml:space="preserve">Resultados  |  </a:t>
-            </a:r>
-            <a:r>
-              <a:rPr lang="pt-BR" sz="1000" dirty="0">
-                <a:latin typeface="Montserrat"/>
-              </a:rPr>
-              <a:t xml:space="preserve">Robustez  |  </a:t>
-            </a:r>
-            <a:r>
-              <a:rPr lang="pt-BR" sz="1000" dirty="0">
-                <a:latin typeface="Montserrat"/>
-              </a:rPr>
-              <a:t xml:space="preserve">Discussão</a:t>
-            </a:r>
-          </a:p>
-        </p:txBody>
-      </p:sp>
-      <p:sp>
-        <p:nvSpPr>
-          <p:cNvPr id="101" name="Linha"/>
-          <p:cNvSpPr/>
-          <p:nvPr/>
-        </p:nvSpPr>
-        <p:spPr>
-          <a:xfrm>
-            <a:off x="292608" y="5687568"/>
-            <a:ext cx="11594592" cy="420624"/>
-          </a:xfrm>
-          <a:prstGeom prst="rect">
-            <a:avLst/>
-          </a:prstGeom>
-          <a:noFill/>
-          <a:ln>
-            <a:noFill/>
-          </a:ln>
-        </p:spPr>
-        <p:txBody>
-          <a:bodyPr wrap="square" lIns="164592" tIns="18288" rIns="164592" bIns="18288" rtlCol="0" anchor="ctr">
-            <a:noAutofit/>
-          </a:bodyPr>
-          <a:lstStyle/>
-          <a:p>
-            <a:pPr marL="0" indent="0" algn="l">
-              <a:lnSpc>
-                <a:spcPct val="100000"/>
-              </a:lnSpc>
-              <a:spcBef>
-                <a:spcPts val="0"/>
-              </a:spcBef>
-              <a:spcAft>
-                <a:spcPts val="0"/>
-              </a:spcAft>
-              <a:buNone/>
-            </a:pPr>
-            <a:r>
-              <a:rPr lang="pt-BR" sz="1800" b="1" dirty="0">
-                <a:solidFill>
-                  <a:srgbClr val="114719"/>
-                </a:solidFill>
-                <a:latin typeface="Montserrat"/>
-              </a:rPr>
-              <a:t>Ciclo</a:t>
-            </a:r>
-            <a:r>
-              <a:rPr lang="pt-BR" sz="1800" b="0" dirty="0">
-                <a:solidFill>
-                  <a:srgbClr val="3A3A3A"/>
-                </a:solidFill>
-                <a:latin typeface="Montserrat"/>
-              </a:rPr>
-              <a:t> = edital: 2025, início e meio de 2026</a:t>
-            </a:r>
-          </a:p>
-        </p:txBody>
-      </p:sp>
-      <p:graphicFrame>
-        <p:nvGraphicFramePr>
-          <p:cNvPr id="102" name="Tabela"/>
-          <p:cNvGraphicFramePr>
-            <a:graphicFrameLocks noGrp="1"/>
-          </p:cNvGraphicFramePr>
-          <p:nvPr/>
-        </p:nvGraphicFramePr>
-        <p:xfrm>
-          <a:off x="292608" y="850392"/>
-          <a:ext cx="11594592" cy="4709160"/>
-        </p:xfrm>
-        <a:graphic>
-          <a:graphicData uri="http://schemas.openxmlformats.org/drawingml/2006/table">
-            <a:tbl>
-              <a:tblPr firstRow="1" bandRow="1"/>
-              <a:tblGrid>
-                <a:gridCol w="4819112"/>
-                <a:gridCol w="2191494"/>
-                <a:gridCol w="2291993"/>
-                <a:gridCol w="2291993"/>
-              </a:tblGrid>
-              <a:tr h="1177290">
-                <a:tc>
-                  <a:txBody>
-                    <a:bodyPr/>
-                    <a:lstStyle/>
-                    <a:p>
-                      <a:pPr marL="0" indent="0" algn="l">
-                        <a:lnSpc>
-                          <a:spcPct val="100000"/>
-                        </a:lnSpc>
-                        <a:spcBef>
-                          <a:spcPts val="0"/>
-                        </a:spcBef>
-                        <a:spcAft>
-                          <a:spcPts val="0"/>
-                        </a:spcAft>
-                        <a:buNone/>
-                      </a:pPr>
-                    </a:p>
-                  </a:txBody>
-                  <a:tcPr marL="73152" marR="73152" marT="36576" marB="36576" anchor="ctr">
-                    <a:lnL w="6350">
-                      <a:solidFill>
-                        <a:srgbClr val="C9DED1"/>
-                      </a:solidFill>
-                    </a:lnL>
-                    <a:lnR w="6350">
-                      <a:solidFill>
-                        <a:srgbClr val="C9DED1"/>
-                      </a:solidFill>
-                    </a:lnR>
-                    <a:lnT w="6350">
-                      <a:solidFill>
-                        <a:srgbClr val="C9DED1"/>
-                      </a:solidFill>
-                    </a:lnT>
-                    <a:lnB w="6350">
-                      <a:solidFill>
-                        <a:srgbClr val="C9DED1"/>
-                      </a:solidFill>
-                    </a:lnB>
-                    <a:solidFill>
-                      <a:srgbClr val="114719"/>
-                    </a:solidFill>
-                  </a:tcPr>
-                </a:tc>
-                <a:tc>
-                  <a:txBody>
-                    <a:bodyPr/>
-                    <a:lstStyle/>
-                    <a:p>
-                      <a:pPr marL="0" indent="0" algn="l">
-                        <a:lnSpc>
-                          <a:spcPct val="100000"/>
-                        </a:lnSpc>
-                        <a:spcBef>
-                          <a:spcPts val="0"/>
-                        </a:spcBef>
-                        <a:spcAft>
-                          <a:spcPts val="0"/>
-                        </a:spcAft>
-                        <a:buNone/>
-                      </a:pPr>
-                      <a:r>
-                        <a:rPr lang="pt-BR" sz="2400" b="1" dirty="0">
-                          <a:solidFill>
-                            <a:srgbClr val="FFFFFF"/>
-                          </a:solidFill>
-                          <a:latin typeface="Montserrat"/>
-                        </a:rPr>
-                        <a:t>Ciclo 1</a:t>
-                      </a:r>
-                    </a:p>
-                  </a:txBody>
-                  <a:tcPr marL="73152" marR="73152" marT="36576" marB="36576" anchor="ctr">
-                    <a:lnL w="6350">
-                      <a:solidFill>
-                        <a:srgbClr val="C9DED1"/>
-                      </a:solidFill>
-                    </a:lnL>
-                    <a:lnR w="6350">
-                      <a:solidFill>
-                        <a:srgbClr val="C9DED1"/>
-                      </a:solidFill>
-                    </a:lnR>
-                    <a:lnT w="6350">
-                      <a:solidFill>
-                        <a:srgbClr val="C9DED1"/>
-                      </a:solidFill>
-                    </a:lnT>
-                    <a:lnB w="6350">
-                      <a:solidFill>
-                        <a:srgbClr val="C9DED1"/>
-                      </a:solidFill>
-                    </a:lnB>
-                    <a:solidFill>
-                      <a:srgbClr val="114719"/>
-                    </a:solidFill>
-                  </a:tcPr>
-                </a:tc>
-                <a:tc>
-                  <a:txBody>
-                    <a:bodyPr/>
-                    <a:lstStyle/>
-                    <a:p>
-                      <a:pPr marL="0" indent="0" algn="l">
-                        <a:lnSpc>
-                          <a:spcPct val="100000"/>
-                        </a:lnSpc>
-                        <a:spcBef>
-                          <a:spcPts val="0"/>
-                        </a:spcBef>
-                        <a:spcAft>
-                          <a:spcPts val="0"/>
-                        </a:spcAft>
-                        <a:buNone/>
-                      </a:pPr>
-                      <a:r>
-                        <a:rPr lang="pt-BR" sz="2400" b="1" dirty="0">
-                          <a:solidFill>
-                            <a:srgbClr val="FFFFFF"/>
-                          </a:solidFill>
-                          <a:latin typeface="Montserrat"/>
-                        </a:rPr>
-                        <a:t>Ciclo 2</a:t>
-                      </a:r>
-                    </a:p>
-                  </a:txBody>
-                  <a:tcPr marL="73152" marR="73152" marT="36576" marB="36576" anchor="ctr">
-                    <a:lnL w="6350">
-                      <a:solidFill>
-                        <a:srgbClr val="C9DED1"/>
-                      </a:solidFill>
-                    </a:lnL>
-                    <a:lnR w="6350">
-                      <a:solidFill>
-                        <a:srgbClr val="C9DED1"/>
-                      </a:solidFill>
-                    </a:lnR>
-                    <a:lnT w="6350">
-                      <a:solidFill>
-                        <a:srgbClr val="C9DED1"/>
-                      </a:solidFill>
-                    </a:lnT>
-                    <a:lnB w="6350">
-                      <a:solidFill>
-                        <a:srgbClr val="C9DED1"/>
-                      </a:solidFill>
-                    </a:lnB>
-                    <a:solidFill>
-                      <a:srgbClr val="114719"/>
-                    </a:solidFill>
-                  </a:tcPr>
-                </a:tc>
-                <a:tc>
-                  <a:txBody>
-                    <a:bodyPr/>
-                    <a:lstStyle/>
-                    <a:p>
-                      <a:pPr marL="0" indent="0" algn="l">
-                        <a:lnSpc>
-                          <a:spcPct val="100000"/>
-                        </a:lnSpc>
-                        <a:spcBef>
-                          <a:spcPts val="0"/>
-                        </a:spcBef>
-                        <a:spcAft>
-                          <a:spcPts val="0"/>
-                        </a:spcAft>
-                        <a:buNone/>
-                      </a:pPr>
-                      <a:r>
-                        <a:rPr lang="pt-BR" sz="2400" b="1" dirty="0">
-                          <a:solidFill>
-                            <a:srgbClr val="FFFFFF"/>
-                          </a:solidFill>
-                          <a:latin typeface="Montserrat"/>
-                        </a:rPr>
-                        <a:t>Ciclo 3</a:t>
-                      </a:r>
-                    </a:p>
-                  </a:txBody>
-                  <a:tcPr marL="73152" marR="73152" marT="36576" marB="36576" anchor="ctr">
-                    <a:lnL w="6350">
-                      <a:solidFill>
-                        <a:srgbClr val="C9DED1"/>
-                      </a:solidFill>
-                    </a:lnL>
-                    <a:lnR w="6350">
-                      <a:solidFill>
-                        <a:srgbClr val="C9DED1"/>
-                      </a:solidFill>
-                    </a:lnR>
-                    <a:lnT w="6350">
-                      <a:solidFill>
-                        <a:srgbClr val="C9DED1"/>
-                      </a:solidFill>
-                    </a:lnT>
-                    <a:lnB w="6350">
-                      <a:solidFill>
-                        <a:srgbClr val="C9DED1"/>
-                      </a:solidFill>
-                    </a:lnB>
-                    <a:solidFill>
-                      <a:srgbClr val="114719"/>
-                    </a:solidFill>
-                  </a:tcPr>
-                </a:tc>
-              </a:tr>
-              <a:tr h="1177290">
-                <a:tc>
-                  <a:txBody>
-                    <a:bodyPr/>
-                    <a:lstStyle/>
-                    <a:p>
-                      <a:pPr marL="0" indent="0" algn="l">
-                        <a:lnSpc>
-                          <a:spcPct val="100000"/>
-                        </a:lnSpc>
-                        <a:spcBef>
-                          <a:spcPts val="0"/>
-                        </a:spcBef>
-                        <a:spcAft>
-                          <a:spcPts val="0"/>
-                        </a:spcAft>
-                        <a:buNone/>
-                      </a:pPr>
-                      <a:r>
-                        <a:rPr lang="pt-BR" sz="2400" b="1" dirty="0">
-                          <a:solidFill>
-                            <a:srgbClr val="3A3A3A"/>
-                          </a:solidFill>
-                          <a:latin typeface="Montserrat"/>
-                        </a:rPr>
-                        <a:t>Células</a:t>
-                      </a:r>
-                    </a:p>
-                  </a:txBody>
-                  <a:tcPr marL="73152" marR="73152" marT="36576" marB="36576" anchor="ctr">
-                    <a:lnL w="6350">
-                      <a:solidFill>
-                        <a:srgbClr val="C9DED1"/>
-                      </a:solidFill>
-                    </a:lnL>
-                    <a:lnR w="6350">
-                      <a:solidFill>
-                        <a:srgbClr val="C9DED1"/>
-                      </a:solidFill>
-                    </a:lnR>
-                    <a:lnT w="6350">
-                      <a:solidFill>
-                        <a:srgbClr val="C9DED1"/>
-                      </a:solidFill>
-                    </a:lnT>
-                    <a:lnB w="6350">
-                      <a:solidFill>
-                        <a:srgbClr val="C9DED1"/>
-                      </a:solidFill>
-                    </a:lnB>
-                    <a:solidFill>
-                      <a:srgbClr val="F3F7F3"/>
-                    </a:solidFill>
-                  </a:tcPr>
-                </a:tc>
-                <a:tc>
-                  <a:txBody>
-                    <a:bodyPr/>
-                    <a:lstStyle/>
-                    <a:p>
-                      <a:pPr marL="0" indent="0" algn="l">
-                        <a:lnSpc>
-                          <a:spcPct val="100000"/>
-                        </a:lnSpc>
-                        <a:spcBef>
-                          <a:spcPts val="0"/>
-                        </a:spcBef>
-                        <a:spcAft>
-                          <a:spcPts val="0"/>
-                        </a:spcAft>
-                        <a:buNone/>
-                      </a:pPr>
-                      <a:r>
-                        <a:rPr lang="pt-BR" sz="2400" b="0" dirty="0">
-                          <a:solidFill>
-                            <a:srgbClr val="3A3A3A"/>
-                          </a:solidFill>
-                          <a:latin typeface="Montserrat"/>
-                        </a:rPr>
-                        <a:t>1.295</a:t>
-                      </a:r>
-                    </a:p>
-                  </a:txBody>
-                  <a:tcPr marL="73152" marR="73152" marT="36576" marB="36576" anchor="ctr">
-                    <a:lnL w="6350">
-                      <a:solidFill>
-                        <a:srgbClr val="C9DED1"/>
-                      </a:solidFill>
-                    </a:lnL>
-                    <a:lnR w="6350">
-                      <a:solidFill>
-                        <a:srgbClr val="C9DED1"/>
-                      </a:solidFill>
-                    </a:lnR>
-                    <a:lnT w="6350">
-                      <a:solidFill>
-                        <a:srgbClr val="C9DED1"/>
-                      </a:solidFill>
-                    </a:lnT>
-                    <a:lnB w="6350">
-                      <a:solidFill>
-                        <a:srgbClr val="C9DED1"/>
-                      </a:solidFill>
-                    </a:lnB>
-                    <a:solidFill>
-                      <a:srgbClr val="F3F7F3"/>
-                    </a:solidFill>
-                  </a:tcPr>
-                </a:tc>
-                <a:tc>
-                  <a:txBody>
-                    <a:bodyPr/>
-                    <a:lstStyle/>
-                    <a:p>
-                      <a:pPr marL="0" indent="0" algn="l">
-                        <a:lnSpc>
-                          <a:spcPct val="100000"/>
-                        </a:lnSpc>
-                        <a:spcBef>
-                          <a:spcPts val="0"/>
-                        </a:spcBef>
-                        <a:spcAft>
-                          <a:spcPts val="0"/>
-                        </a:spcAft>
-                        <a:buNone/>
-                      </a:pPr>
-                      <a:r>
-                        <a:rPr lang="pt-BR" sz="2400" b="0" dirty="0">
-                          <a:solidFill>
-                            <a:srgbClr val="3A3A3A"/>
-                          </a:solidFill>
-                          <a:latin typeface="Montserrat"/>
-                        </a:rPr>
-                        <a:t>1.547</a:t>
-                      </a:r>
-                    </a:p>
-                  </a:txBody>
-                  <a:tcPr marL="73152" marR="73152" marT="36576" marB="36576" anchor="ctr">
-                    <a:lnL w="6350">
-                      <a:solidFill>
-                        <a:srgbClr val="C9DED1"/>
-                      </a:solidFill>
-                    </a:lnL>
-                    <a:lnR w="6350">
-                      <a:solidFill>
-                        <a:srgbClr val="C9DED1"/>
-                      </a:solidFill>
-                    </a:lnR>
-                    <a:lnT w="6350">
-                      <a:solidFill>
-                        <a:srgbClr val="C9DED1"/>
-                      </a:solidFill>
-                    </a:lnT>
-                    <a:lnB w="6350">
-                      <a:solidFill>
-                        <a:srgbClr val="C9DED1"/>
-                      </a:solidFill>
-                    </a:lnB>
-                    <a:solidFill>
-                      <a:srgbClr val="F3F7F3"/>
-                    </a:solidFill>
-                  </a:tcPr>
-                </a:tc>
-                <a:tc>
-                  <a:txBody>
-                    <a:bodyPr/>
-                    <a:lstStyle/>
-                    <a:p>
-                      <a:pPr marL="0" indent="0" algn="l">
-                        <a:lnSpc>
-                          <a:spcPct val="100000"/>
-                        </a:lnSpc>
-                        <a:spcBef>
-                          <a:spcPts val="0"/>
-                        </a:spcBef>
-                        <a:spcAft>
-                          <a:spcPts val="0"/>
-                        </a:spcAft>
-                        <a:buNone/>
-                      </a:pPr>
-                      <a:r>
-                        <a:rPr lang="pt-BR" sz="2400" b="0" dirty="0">
-                          <a:solidFill>
-                            <a:srgbClr val="3A3A3A"/>
-                          </a:solidFill>
-                          <a:latin typeface="Montserrat"/>
-                        </a:rPr>
-                        <a:t>2.293</a:t>
-                      </a:r>
-                    </a:p>
-                  </a:txBody>
-                  <a:tcPr marL="73152" marR="73152" marT="36576" marB="36576" anchor="ctr">
-                    <a:lnL w="6350">
-                      <a:solidFill>
-                        <a:srgbClr val="C9DED1"/>
-                      </a:solidFill>
-                    </a:lnL>
-                    <a:lnR w="6350">
-                      <a:solidFill>
-                        <a:srgbClr val="C9DED1"/>
-                      </a:solidFill>
-                    </a:lnR>
-                    <a:lnT w="6350">
-                      <a:solidFill>
-                        <a:srgbClr val="C9DED1"/>
-                      </a:solidFill>
-                    </a:lnT>
-                    <a:lnB w="6350">
-                      <a:solidFill>
-                        <a:srgbClr val="C9DED1"/>
-                      </a:solidFill>
-                    </a:lnB>
-                    <a:solidFill>
-                      <a:srgbClr val="F3F7F3"/>
-                    </a:solidFill>
-                  </a:tcPr>
-                </a:tc>
-              </a:tr>
-              <a:tr h="1177290">
-                <a:tc>
-                  <a:txBody>
-                    <a:bodyPr/>
-                    <a:lstStyle/>
-                    <a:p>
-                      <a:pPr marL="0" indent="0" algn="l">
-                        <a:lnSpc>
-                          <a:spcPct val="100000"/>
-                        </a:lnSpc>
-                        <a:spcBef>
-                          <a:spcPts val="0"/>
-                        </a:spcBef>
-                        <a:spcAft>
-                          <a:spcPts val="0"/>
-                        </a:spcAft>
-                        <a:buNone/>
-                      </a:pPr>
-                      <a:r>
-                        <a:rPr lang="pt-BR" sz="2400" b="1" dirty="0">
-                          <a:solidFill>
-                            <a:srgbClr val="3A3A3A"/>
-                          </a:solidFill>
-                          <a:latin typeface="Montserrat"/>
-                        </a:rPr>
-                        <a:t>Candidatos, 1ª opção</a:t>
-                      </a:r>
-                    </a:p>
-                  </a:txBody>
-                  <a:tcPr marL="73152" marR="73152" marT="36576" marB="36576" anchor="ctr">
-                    <a:lnL w="6350">
-                      <a:solidFill>
-                        <a:srgbClr val="C9DED1"/>
-                      </a:solidFill>
-                    </a:lnL>
-                    <a:lnR w="6350">
-                      <a:solidFill>
-                        <a:srgbClr val="C9DED1"/>
-                      </a:solidFill>
-                    </a:lnR>
-                    <a:lnT w="6350">
-                      <a:solidFill>
-                        <a:srgbClr val="C9DED1"/>
-                      </a:solidFill>
-                    </a:lnT>
-                    <a:lnB w="6350">
-                      <a:solidFill>
-                        <a:srgbClr val="C9DED1"/>
-                      </a:solidFill>
-                    </a:lnB>
-                    <a:solidFill>
-                      <a:srgbClr val="FFFFFF"/>
-                    </a:solidFill>
-                  </a:tcPr>
-                </a:tc>
-                <a:tc>
-                  <a:txBody>
-                    <a:bodyPr/>
-                    <a:lstStyle/>
-                    <a:p>
-                      <a:pPr marL="0" indent="0" algn="l">
-                        <a:lnSpc>
-                          <a:spcPct val="100000"/>
-                        </a:lnSpc>
-                        <a:spcBef>
-                          <a:spcPts val="0"/>
-                        </a:spcBef>
-                        <a:spcAft>
-                          <a:spcPts val="0"/>
-                        </a:spcAft>
-                        <a:buNone/>
-                      </a:pPr>
-                      <a:r>
-                        <a:rPr lang="pt-BR" sz="2400" b="0" dirty="0">
-                          <a:solidFill>
-                            <a:srgbClr val="3A3A3A"/>
-                          </a:solidFill>
-                          <a:latin typeface="Montserrat"/>
-                        </a:rPr>
-                        <a:t>993</a:t>
-                      </a:r>
-                    </a:p>
-                  </a:txBody>
-                  <a:tcPr marL="73152" marR="73152" marT="36576" marB="36576" anchor="ctr">
-                    <a:lnL w="6350">
-                      <a:solidFill>
-                        <a:srgbClr val="C9DED1"/>
-                      </a:solidFill>
-                    </a:lnL>
-                    <a:lnR w="6350">
-                      <a:solidFill>
-                        <a:srgbClr val="C9DED1"/>
-                      </a:solidFill>
-                    </a:lnR>
-                    <a:lnT w="6350">
-                      <a:solidFill>
-                        <a:srgbClr val="C9DED1"/>
-                      </a:solidFill>
-                    </a:lnT>
-                    <a:lnB w="6350">
-                      <a:solidFill>
-                        <a:srgbClr val="C9DED1"/>
-                      </a:solidFill>
-                    </a:lnB>
-                    <a:solidFill>
-                      <a:srgbClr val="FFFFFF"/>
-                    </a:solidFill>
-                  </a:tcPr>
-                </a:tc>
-                <a:tc>
-                  <a:txBody>
-                    <a:bodyPr/>
-                    <a:lstStyle/>
-                    <a:p>
-                      <a:pPr marL="0" indent="0" algn="l">
-                        <a:lnSpc>
-                          <a:spcPct val="100000"/>
-                        </a:lnSpc>
-                        <a:spcBef>
-                          <a:spcPts val="0"/>
-                        </a:spcBef>
-                        <a:spcAft>
-                          <a:spcPts val="0"/>
-                        </a:spcAft>
-                        <a:buNone/>
-                      </a:pPr>
-                      <a:r>
-                        <a:rPr lang="pt-BR" sz="2400" b="0" dirty="0">
-                          <a:solidFill>
-                            <a:srgbClr val="3A3A3A"/>
-                          </a:solidFill>
-                          <a:latin typeface="Montserrat"/>
-                        </a:rPr>
-                        <a:t>2.140</a:t>
-                      </a:r>
-                    </a:p>
-                  </a:txBody>
-                  <a:tcPr marL="73152" marR="73152" marT="36576" marB="36576" anchor="ctr">
-                    <a:lnL w="6350">
-                      <a:solidFill>
-                        <a:srgbClr val="C9DED1"/>
-                      </a:solidFill>
-                    </a:lnL>
-                    <a:lnR w="6350">
-                      <a:solidFill>
-                        <a:srgbClr val="C9DED1"/>
-                      </a:solidFill>
-                    </a:lnR>
-                    <a:lnT w="6350">
-                      <a:solidFill>
-                        <a:srgbClr val="C9DED1"/>
-                      </a:solidFill>
-                    </a:lnT>
-                    <a:lnB w="6350">
-                      <a:solidFill>
-                        <a:srgbClr val="C9DED1"/>
-                      </a:solidFill>
-                    </a:lnB>
-                    <a:solidFill>
-                      <a:srgbClr val="FFFFFF"/>
-                    </a:solidFill>
-                  </a:tcPr>
-                </a:tc>
-                <a:tc>
-                  <a:txBody>
-                    <a:bodyPr/>
-                    <a:lstStyle/>
-                    <a:p>
-                      <a:pPr marL="0" indent="0" algn="l">
-                        <a:lnSpc>
-                          <a:spcPct val="100000"/>
-                        </a:lnSpc>
-                        <a:spcBef>
-                          <a:spcPts val="0"/>
-                        </a:spcBef>
-                        <a:spcAft>
-                          <a:spcPts val="0"/>
-                        </a:spcAft>
-                        <a:buNone/>
-                      </a:pPr>
-                      <a:r>
-                        <a:rPr lang="pt-BR" sz="2400" b="0" dirty="0">
-                          <a:solidFill>
-                            <a:srgbClr val="3A3A3A"/>
-                          </a:solidFill>
-                          <a:latin typeface="Montserrat"/>
-                        </a:rPr>
-                        <a:t>2.581</a:t>
-                      </a:r>
-                    </a:p>
-                  </a:txBody>
-                  <a:tcPr marL="73152" marR="73152" marT="36576" marB="36576" anchor="ctr">
-                    <a:lnL w="6350">
-                      <a:solidFill>
-                        <a:srgbClr val="C9DED1"/>
-                      </a:solidFill>
-                    </a:lnL>
-                    <a:lnR w="6350">
-                      <a:solidFill>
-                        <a:srgbClr val="C9DED1"/>
-                      </a:solidFill>
-                    </a:lnR>
-                    <a:lnT w="6350">
-                      <a:solidFill>
-                        <a:srgbClr val="C9DED1"/>
-                      </a:solidFill>
-                    </a:lnT>
-                    <a:lnB w="6350">
-                      <a:solidFill>
-                        <a:srgbClr val="C9DED1"/>
-                      </a:solidFill>
-                    </a:lnB>
-                    <a:solidFill>
-                      <a:srgbClr val="FFFFFF"/>
-                    </a:solidFill>
-                  </a:tcPr>
-                </a:tc>
-              </a:tr>
-              <a:tr h="1177290">
-                <a:tc>
-                  <a:txBody>
-                    <a:bodyPr/>
-                    <a:lstStyle/>
-                    <a:p>
-                      <a:pPr marL="0" indent="0" algn="l">
-                        <a:lnSpc>
-                          <a:spcPct val="100000"/>
-                        </a:lnSpc>
-                        <a:spcBef>
-                          <a:spcPts val="0"/>
-                        </a:spcBef>
-                        <a:spcAft>
-                          <a:spcPts val="0"/>
-                        </a:spcAft>
-                        <a:buNone/>
-                      </a:pPr>
-                      <a:r>
-                        <a:rPr lang="pt-BR" sz="2400" b="1" dirty="0">
-                          <a:solidFill>
-                            <a:srgbClr val="3A3A3A"/>
-                          </a:solidFill>
-                          <a:latin typeface="Montserrat"/>
-                        </a:rPr>
-                        <a:t>Com origem</a:t>
-                      </a:r>
-                    </a:p>
-                  </a:txBody>
-                  <a:tcPr marL="73152" marR="73152" marT="36576" marB="36576" anchor="ctr">
-                    <a:lnL w="6350">
-                      <a:solidFill>
-                        <a:srgbClr val="C9DED1"/>
-                      </a:solidFill>
-                    </a:lnL>
-                    <a:lnR w="6350">
-                      <a:solidFill>
-                        <a:srgbClr val="C9DED1"/>
-                      </a:solidFill>
-                    </a:lnR>
-                    <a:lnT w="6350">
-                      <a:solidFill>
-                        <a:srgbClr val="C9DED1"/>
-                      </a:solidFill>
-                    </a:lnT>
-                    <a:lnB w="6350">
-                      <a:solidFill>
-                        <a:srgbClr val="C9DED1"/>
-                      </a:solidFill>
-                    </a:lnB>
-                    <a:solidFill>
-                      <a:srgbClr val="F3F7F3"/>
-                    </a:solidFill>
-                  </a:tcPr>
-                </a:tc>
-                <a:tc>
-                  <a:txBody>
-                    <a:bodyPr/>
-                    <a:lstStyle/>
-                    <a:p>
-                      <a:pPr marL="0" indent="0" algn="l">
-                        <a:lnSpc>
-                          <a:spcPct val="100000"/>
-                        </a:lnSpc>
-                        <a:spcBef>
-                          <a:spcPts val="0"/>
-                        </a:spcBef>
-                        <a:spcAft>
-                          <a:spcPts val="0"/>
-                        </a:spcAft>
-                        <a:buNone/>
-                      </a:pPr>
-                      <a:r>
-                        <a:rPr lang="pt-BR" sz="2400" b="0" dirty="0">
-                          <a:solidFill>
-                            <a:srgbClr val="3A3A3A"/>
-                          </a:solidFill>
-                          <a:latin typeface="Montserrat"/>
-                        </a:rPr>
-                        <a:t>915</a:t>
-                      </a:r>
-                    </a:p>
-                  </a:txBody>
-                  <a:tcPr marL="73152" marR="73152" marT="36576" marB="36576" anchor="ctr">
-                    <a:lnL w="6350">
-                      <a:solidFill>
-                        <a:srgbClr val="C9DED1"/>
-                      </a:solidFill>
-                    </a:lnL>
-                    <a:lnR w="6350">
-                      <a:solidFill>
-                        <a:srgbClr val="C9DED1"/>
-                      </a:solidFill>
-                    </a:lnR>
-                    <a:lnT w="6350">
-                      <a:solidFill>
-                        <a:srgbClr val="C9DED1"/>
-                      </a:solidFill>
-                    </a:lnT>
-                    <a:lnB w="6350">
-                      <a:solidFill>
-                        <a:srgbClr val="C9DED1"/>
-                      </a:solidFill>
-                    </a:lnB>
-                    <a:solidFill>
-                      <a:srgbClr val="F3F7F3"/>
-                    </a:solidFill>
-                  </a:tcPr>
-                </a:tc>
-                <a:tc>
-                  <a:txBody>
-                    <a:bodyPr/>
-                    <a:lstStyle/>
-                    <a:p>
-                      <a:pPr marL="0" indent="0" algn="l">
-                        <a:lnSpc>
-                          <a:spcPct val="100000"/>
-                        </a:lnSpc>
-                        <a:spcBef>
-                          <a:spcPts val="0"/>
-                        </a:spcBef>
-                        <a:spcAft>
-                          <a:spcPts val="0"/>
-                        </a:spcAft>
-                        <a:buNone/>
-                      </a:pPr>
-                      <a:r>
-                        <a:rPr lang="pt-BR" sz="2400" b="0" dirty="0">
-                          <a:solidFill>
-                            <a:srgbClr val="3A3A3A"/>
-                          </a:solidFill>
-                          <a:latin typeface="Montserrat"/>
-                        </a:rPr>
-                        <a:t>2.032</a:t>
-                      </a:r>
-                    </a:p>
-                  </a:txBody>
-                  <a:tcPr marL="73152" marR="73152" marT="36576" marB="36576" anchor="ctr">
-                    <a:lnL w="6350">
-                      <a:solidFill>
-                        <a:srgbClr val="C9DED1"/>
-                      </a:solidFill>
-                    </a:lnL>
-                    <a:lnR w="6350">
-                      <a:solidFill>
-                        <a:srgbClr val="C9DED1"/>
-                      </a:solidFill>
-                    </a:lnR>
-                    <a:lnT w="6350">
-                      <a:solidFill>
-                        <a:srgbClr val="C9DED1"/>
-                      </a:solidFill>
-                    </a:lnT>
-                    <a:lnB w="6350">
-                      <a:solidFill>
-                        <a:srgbClr val="C9DED1"/>
-                      </a:solidFill>
-                    </a:lnB>
-                    <a:solidFill>
-                      <a:srgbClr val="F3F7F3"/>
-                    </a:solidFill>
-                  </a:tcPr>
-                </a:tc>
-                <a:tc>
-                  <a:txBody>
-                    <a:bodyPr/>
-                    <a:lstStyle/>
-                    <a:p>
-                      <a:pPr marL="0" indent="0" algn="l">
-                        <a:lnSpc>
-                          <a:spcPct val="100000"/>
-                        </a:lnSpc>
-                        <a:spcBef>
-                          <a:spcPts val="0"/>
-                        </a:spcBef>
-                        <a:spcAft>
-                          <a:spcPts val="0"/>
-                        </a:spcAft>
-                        <a:buNone/>
-                      </a:pPr>
-                      <a:r>
-                        <a:rPr lang="pt-BR" sz="2400" b="0" dirty="0">
-                          <a:solidFill>
-                            <a:srgbClr val="3A3A3A"/>
-                          </a:solidFill>
-                          <a:latin typeface="Montserrat"/>
-                        </a:rPr>
-                        <a:t>2.474</a:t>
-                      </a:r>
-                    </a:p>
-                  </a:txBody>
-                  <a:tcPr marL="73152" marR="73152" marT="36576" marB="36576" anchor="ctr">
-                    <a:lnL w="6350">
-                      <a:solidFill>
-                        <a:srgbClr val="C9DED1"/>
-                      </a:solidFill>
-                    </a:lnL>
-                    <a:lnR w="6350">
-                      <a:solidFill>
-                        <a:srgbClr val="C9DED1"/>
-                      </a:solidFill>
-                    </a:lnR>
-                    <a:lnT w="6350">
-                      <a:solidFill>
-                        <a:srgbClr val="C9DED1"/>
-                      </a:solidFill>
-                    </a:lnT>
-                    <a:lnB w="6350">
-                      <a:solidFill>
-                        <a:srgbClr val="C9DED1"/>
-                      </a:solidFill>
-                    </a:lnB>
-                    <a:solidFill>
-                      <a:srgbClr val="F3F7F3"/>
-                    </a:solidFill>
-                  </a:tcPr>
-                </a:tc>
-              </a:tr>
-            </a:tbl>
-          </a:graphicData>
-        </a:graphic>
-      </p:graphicFrame>
-      <p:sp>
-        <p:nvSpPr>
-          <p:cNvPr id="103" name="Fontes"/>
-          <p:cNvSpPr txBox="1"/>
-          <p:nvPr/>
-        </p:nvSpPr>
-        <p:spPr>
-          <a:xfrm>
-            <a:off x="292608" y="6181344"/>
-            <a:ext cx="11594592" cy="274320"/>
-          </a:xfrm>
-          <a:prstGeom prst="rect">
-            <a:avLst/>
-          </a:prstGeom>
-          <a:noFill/>
-          <a:ln>
-            <a:noFill/>
-          </a:ln>
-        </p:spPr>
-        <p:txBody>
-          <a:bodyPr wrap="square" lIns="0" tIns="0" rIns="0" bIns="0" rtlCol="0" anchor="b">
-            <a:noAutofit/>
-          </a:bodyPr>
-          <a:lstStyle/>
-          <a:p>
-            <a:pPr marL="0" indent="0" algn="l">
-              <a:lnSpc>
-                <a:spcPct val="95000"/>
-              </a:lnSpc>
-              <a:spcBef>
-                <a:spcPts val="0"/>
-              </a:spcBef>
-              <a:spcAft>
-                <a:spcPts val="0"/>
-              </a:spcAft>
-              <a:buNone/>
-            </a:pPr>
-            <a:r>
-              <a:rPr lang="pt-BR" sz="800" b="1" dirty="0">
-                <a:solidFill>
-                  <a:srgbClr val="6B6B6B"/>
-                </a:solidFill>
-                <a:latin typeface="Montserrat"/>
-              </a:rPr>
-              <a:t>Fontes: </a:t>
-            </a:r>
-            <a:r>
-              <a:rPr lang="pt-BR" sz="800" b="0" dirty="0">
-                <a:solidFill>
-                  <a:srgbClr val="6B6B6B"/>
-                </a:solidFill>
-                <a:latin typeface="Montserrat"/>
-              </a:rPr>
-              <a:t>output/apresentacao_banca2/tabela_descritiva_ciclos.csv; cronologia_ciclos.csv; numeros_banca2.json (amostra P1).</a:t>
-            </a:r>
-          </a:p>
-        </p:txBody>
-      </p:sp>
-    </p:spTree>
-  </p:cSld>
-  <p:clrMapOvr>
-    <a:masterClrMapping/>
-  </p:clrMapOvr>
-</p:sld>
-</file>
-
-<file path=ppt/slides/slide40.xml><?xml version="1.0" encoding="utf-8"?>
 <p:sld xmlns:a="http://schemas.openxmlformats.org/drawingml/2006/main" xmlns:r="http://schemas.openxmlformats.org/officeDocument/2006/relationships" xmlns:p="http://schemas.openxmlformats.org/presentationml/2006/main">
   <p:cSld>
     <p:spTree>
@@ -18527,6 +16781,406 @@
 </p:sld>
 </file>
 
+<file path=ppt/slides/slide40.xml><?xml version="1.0" encoding="utf-8"?>
+<p:sld xmlns:a="http://schemas.openxmlformats.org/drawingml/2006/main" xmlns:r="http://schemas.openxmlformats.org/officeDocument/2006/relationships" xmlns:p="http://schemas.openxmlformats.org/presentationml/2006/main">
+  <p:cSld>
+    <p:spTree>
+      <p:nvGrpSpPr>
+        <p:cNvPr id="1" name=""/>
+        <p:cNvGrpSpPr/>
+        <p:nvPr/>
+      </p:nvGrpSpPr>
+      <p:grpSpPr>
+        <a:xfrm>
+          <a:off x="0" y="0"/>
+          <a:ext cx="0" cy="0"/>
+          <a:chOff x="0" y="0"/>
+          <a:chExt cx="0" cy="0"/>
+        </a:xfrm>
+      </p:grpSpPr>
+      <p:sp>
+        <p:nvSpPr>
+          <p:cNvPr id="2" name="Título"/>
+          <p:cNvSpPr>
+            <a:spLocks noGrp="1"/>
+          </p:cNvSpPr>
+          <p:nvPr>
+            <p:ph type="title"/>
+          </p:nvPr>
+        </p:nvSpPr>
+        <p:spPr/>
+        <p:txBody>
+          <a:bodyPr>
+            <a:normAutofit/>
+          </a:bodyPr>
+          <a:lstStyle/>
+          <a:p>
+            <a:pPr marL="0" indent="0" algn="l">
+              <a:lnSpc>
+                <a:spcPct val="104000"/>
+              </a:lnSpc>
+              <a:spcAft>
+                <a:spcPts val="0"/>
+              </a:spcAft>
+              <a:buNone/>
+            </a:pPr>
+            <a:r>
+              <a:rPr lang="pt-BR" sz="2400" b="1" dirty="0">
+                <a:solidFill>
+                  <a:srgbClr val="FFFFFF"/>
+                </a:solidFill>
+                <a:latin typeface="Montserrat"/>
+              </a:rPr>
+              <a:t>Onde escolhem: perto de onde já trabalham</a:t>
+            </a:r>
+          </a:p>
+        </p:txBody>
+      </p:sp>
+      <p:sp>
+        <p:nvSpPr>
+          <p:cNvPr id="3" name="Número da página"/>
+          <p:cNvSpPr>
+            <a:spLocks noGrp="1"/>
+          </p:cNvSpPr>
+          <p:nvPr>
+            <p:ph type="body" sz="quarter" idx="18"/>
+          </p:nvPr>
+        </p:nvSpPr>
+        <p:spPr>
+          <a:xfrm>
+            <a:off x="11706744" y="6457042"/>
+            <a:ext cx="492080" cy="400640"/>
+          </a:xfrm>
+        </p:spPr>
+        <p:txBody>
+          <a:bodyPr anchor="ctr">
+            <a:normAutofit/>
+          </a:bodyPr>
+          <a:lstStyle/>
+          <a:p>
+            <a:pPr algn="ctr"/>
+            <a:fld id="{B1A5E0C2-5F3A-4C7E-9D11-7A2E6C0F4B01}" type="slidenum">
+              <a:rPr lang="pt-BR" sz="1400" b="1">
+                <a:solidFill>
+                  <a:srgbClr val="BFBFBF"/>
+                </a:solidFill>
+                <a:latin typeface="Montserrat"/>
+              </a:rPr>
+              <a:t>‹#›</a:t>
+            </a:fld>
+            <a:endParaRPr lang="pt-BR" sz="1400" b="1">
+              <a:solidFill>
+                <a:srgbClr val="BFBFBF"/>
+              </a:solidFill>
+            </a:endParaRPr>
+          </a:p>
+        </p:txBody>
+      </p:sp>
+      <p:sp>
+        <p:nvSpPr>
+          <p:cNvPr id="4" name="Navegação do rodapé"/>
+          <p:cNvSpPr txBox="1"/>
+          <p:nvPr/>
+        </p:nvSpPr>
+        <p:spPr>
+          <a:xfrm>
+            <a:off x="196860" y="6639248"/>
+            <a:ext cx="9223026" cy="246221"/>
+          </a:xfrm>
+          <a:prstGeom prst="rect">
+            <a:avLst/>
+          </a:prstGeom>
+          <a:noFill/>
+        </p:spPr>
+        <p:txBody>
+          <a:bodyPr wrap="square" rtlCol="0">
+            <a:spAutoFit/>
+          </a:bodyPr>
+          <a:lstStyle/>
+          <a:p>
+            <a:r>
+              <a:rPr lang="pt-BR" sz="1000" dirty="0">
+                <a:latin typeface="Montserrat"/>
+              </a:rPr>
+              <a:t xml:space="preserve">Hipótese  |  </a:t>
+            </a:r>
+            <a:r>
+              <a:rPr lang="pt-BR" sz="1000" dirty="0">
+                <a:latin typeface="Montserrat"/>
+              </a:rPr>
+              <a:t xml:space="preserve">Dados  |  </a:t>
+            </a:r>
+            <a:r>
+              <a:rPr lang="pt-BR" sz="1000" b="1" dirty="0">
+                <a:solidFill>
+                  <a:srgbClr val="114719"/>
+                </a:solidFill>
+                <a:latin typeface="Montserrat"/>
+              </a:rPr>
+              <a:t>Análise descritiva</a:t>
+            </a:r>
+            <a:r>
+              <a:rPr lang="pt-BR" sz="1000" dirty="0">
+                <a:latin typeface="Montserrat"/>
+              </a:rPr>
+              <a:t xml:space="preserve">  |  </a:t>
+            </a:r>
+            <a:r>
+              <a:rPr lang="pt-BR" sz="1000" dirty="0">
+                <a:latin typeface="Montserrat"/>
+              </a:rPr>
+              <a:t xml:space="preserve">Metodologia  |  </a:t>
+            </a:r>
+            <a:r>
+              <a:rPr lang="pt-BR" sz="1000" dirty="0">
+                <a:latin typeface="Montserrat"/>
+              </a:rPr>
+              <a:t xml:space="preserve">Identificação  |  </a:t>
+            </a:r>
+            <a:r>
+              <a:rPr lang="pt-BR" sz="1000" dirty="0">
+                <a:latin typeface="Montserrat"/>
+              </a:rPr>
+              <a:t xml:space="preserve">Resultados  |  </a:t>
+            </a:r>
+            <a:r>
+              <a:rPr lang="pt-BR" sz="1000" dirty="0">
+                <a:latin typeface="Montserrat"/>
+              </a:rPr>
+              <a:t xml:space="preserve">Robustez  |  </a:t>
+            </a:r>
+            <a:r>
+              <a:rPr lang="pt-BR" sz="1000" dirty="0">
+                <a:latin typeface="Montserrat"/>
+              </a:rPr>
+              <a:t xml:space="preserve">Discussão</a:t>
+            </a:r>
+          </a:p>
+        </p:txBody>
+      </p:sp>
+      <p:pic>
+        <p:nvPicPr>
+          <p:cNvPr id="101" name="Figura" descr="1ª opção em relação à origem do candidato (mesma UF, mesma região de saúde, mesmo município) e distância da origem à 1ª opção"/>
+          <p:cNvPicPr>
+            <a:picLocks noChangeAspect="1"/>
+          </p:cNvPicPr>
+          <p:nvPr/>
+        </p:nvPicPr>
+        <p:blipFill>
+          <a:blip r:embed="rId3"/>
+          <a:stretch>
+            <a:fillRect/>
+          </a:stretch>
+        </p:blipFill>
+        <p:spPr>
+          <a:xfrm>
+            <a:off x="292608" y="1251239"/>
+            <a:ext cx="8211312" cy="4392097"/>
+          </a:xfrm>
+          <a:prstGeom prst="rect">
+            <a:avLst/>
+          </a:prstGeom>
+          <a:ln w="6350">
+            <a:solidFill>
+              <a:srgbClr val="DDE7DF"/>
+            </a:solidFill>
+          </a:ln>
+        </p:spPr>
+      </p:pic>
+      <p:sp>
+        <p:nvSpPr>
+          <p:cNvPr id="102" name="Linha"/>
+          <p:cNvSpPr/>
+          <p:nvPr/>
+        </p:nvSpPr>
+        <p:spPr>
+          <a:xfrm>
+            <a:off x="8778240" y="1251239"/>
+            <a:ext cx="3108960" cy="2113753"/>
+          </a:xfrm>
+          <a:prstGeom prst="roundRect">
+            <a:avLst>
+              <a:gd name="adj" fmla="val 6000"/>
+            </a:avLst>
+          </a:prstGeom>
+          <a:solidFill>
+            <a:srgbClr val="F4F8F5"/>
+          </a:solidFill>
+          <a:ln w="12700">
+            <a:solidFill>
+              <a:srgbClr val="056429"/>
+            </a:solidFill>
+          </a:ln>
+        </p:spPr>
+        <p:txBody>
+          <a:bodyPr wrap="square" lIns="182880" tIns="54864" rIns="182880" bIns="54864" rtlCol="0" anchor="ctr">
+            <a:noAutofit/>
+          </a:bodyPr>
+          <a:lstStyle/>
+          <a:p>
+            <a:pPr marL="0" indent="0" algn="l">
+              <a:lnSpc>
+                <a:spcPct val="100000"/>
+              </a:lnSpc>
+              <a:spcBef>
+                <a:spcPts val="0"/>
+              </a:spcBef>
+              <a:spcAft>
+                <a:spcPts val="0"/>
+              </a:spcAft>
+              <a:buNone/>
+            </a:pPr>
+            <a:r>
+              <a:rPr lang="pt-BR" sz="1600" b="1" dirty="0">
+                <a:solidFill>
+                  <a:srgbClr val="114719"/>
+                </a:solidFill>
+                <a:latin typeface="Montserrat"/>
+              </a:rPr>
+              <a:t>79%</a:t>
+            </a:r>
+            <a:r>
+              <a:rPr lang="pt-BR" sz="1600" b="0" dirty="0">
+                <a:solidFill>
+                  <a:srgbClr val="3A3A3A"/>
+                </a:solidFill>
+                <a:latin typeface="Montserrat"/>
+              </a:rPr>
+              <a:t> põem a 1ª opção na UF de origem; mediana: 51 km (descritivo).</a:t>
+            </a:r>
+          </a:p>
+        </p:txBody>
+      </p:sp>
+      <p:sp>
+        <p:nvSpPr>
+          <p:cNvPr id="103" name="Linha"/>
+          <p:cNvSpPr/>
+          <p:nvPr/>
+        </p:nvSpPr>
+        <p:spPr>
+          <a:xfrm>
+            <a:off x="8778240" y="3529584"/>
+            <a:ext cx="3108960" cy="2113753"/>
+          </a:xfrm>
+          <a:prstGeom prst="roundRect">
+            <a:avLst>
+              <a:gd name="adj" fmla="val 6000"/>
+            </a:avLst>
+          </a:prstGeom>
+          <a:solidFill>
+            <a:srgbClr val="F4F8F5"/>
+          </a:solidFill>
+          <a:ln w="12700">
+            <a:solidFill>
+              <a:srgbClr val="056429"/>
+            </a:solidFill>
+          </a:ln>
+        </p:spPr>
+        <p:txBody>
+          <a:bodyPr wrap="square" lIns="182880" tIns="54864" rIns="182880" bIns="54864" rtlCol="0" anchor="ctr">
+            <a:noAutofit/>
+          </a:bodyPr>
+          <a:lstStyle/>
+          <a:p>
+            <a:pPr marL="0" indent="0" algn="l">
+              <a:lnSpc>
+                <a:spcPct val="100000"/>
+              </a:lnSpc>
+              <a:spcBef>
+                <a:spcPts val="0"/>
+              </a:spcBef>
+              <a:spcAft>
+                <a:spcPts val="0"/>
+              </a:spcAft>
+              <a:buNone/>
+            </a:pPr>
+            <a:r>
+              <a:rPr lang="pt-BR" sz="1600" b="1" dirty="0">
+                <a:solidFill>
+                  <a:srgbClr val="114719"/>
+                </a:solidFill>
+                <a:latin typeface="Montserrat"/>
+              </a:rPr>
+              <a:t>Para a pergunta:</a:t>
+            </a:r>
+            <a:r>
+              <a:rPr lang="pt-BR" sz="1600" b="0" dirty="0">
+                <a:solidFill>
+                  <a:srgbClr val="3A3A3A"/>
+                </a:solidFill>
+                <a:latin typeface="Montserrat"/>
+              </a:rPr>
+              <a:t> a maioria fica perto; quanto pesa a bolsa?</a:t>
+            </a:r>
+          </a:p>
+        </p:txBody>
+      </p:sp>
+      <p:sp>
+        <p:nvSpPr>
+          <p:cNvPr id="104" name="Fontes"/>
+          <p:cNvSpPr txBox="1"/>
+          <p:nvPr/>
+        </p:nvSpPr>
+        <p:spPr>
+          <a:xfrm>
+            <a:off x="292608" y="6181344"/>
+            <a:ext cx="11594592" cy="274320"/>
+          </a:xfrm>
+          <a:prstGeom prst="rect">
+            <a:avLst/>
+          </a:prstGeom>
+          <a:noFill/>
+          <a:ln>
+            <a:noFill/>
+          </a:ln>
+        </p:spPr>
+        <p:txBody>
+          <a:bodyPr wrap="square" lIns="0" tIns="0" rIns="0" bIns="0" rtlCol="0" anchor="b">
+            <a:noAutofit/>
+          </a:bodyPr>
+          <a:lstStyle/>
+          <a:p>
+            <a:pPr marL="0" indent="0" algn="l">
+              <a:lnSpc>
+                <a:spcPct val="95000"/>
+              </a:lnSpc>
+              <a:spcBef>
+                <a:spcPts val="0"/>
+              </a:spcBef>
+              <a:spcAft>
+                <a:spcPts val="0"/>
+              </a:spcAft>
+              <a:buNone/>
+            </a:pPr>
+            <a:r>
+              <a:rPr lang="pt-BR" sz="800" b="1" dirty="0">
+                <a:solidFill>
+                  <a:srgbClr val="6B6B6B"/>
+                </a:solidFill>
+                <a:latin typeface="Montserrat"/>
+              </a:rPr>
+              <a:t>Fontes: </a:t>
+            </a:r>
+            <a:r>
+              <a:rPr lang="pt-BR" sz="800" b="0" dirty="0">
+                <a:solidFill>
+                  <a:srgbClr val="6B6B6B"/>
+                </a:solidFill>
+                <a:latin typeface="Montserrat"/>
+              </a:rPr>
+              <a:t>output/rdd_bolsa/G1_distancias_opcoes.parquet e G1_candidatos_origem.parquet (portão G1); output/apresentacao_banca2/exp_escolha_origem.png.</a:t>
+            </a:r>
+          </a:p>
+        </p:txBody>
+      </p:sp>
+    </p:spTree>
+  </p:cSld>
+  <p:clrMapOvr>
+    <a:masterClrMapping/>
+  </p:clrMapOvr>
+</p:sld>
+</file>
+
 <file path=ppt/slides/slide41.xml><?xml version="1.0" encoding="utf-8"?>
 <p:sld xmlns:a="http://schemas.openxmlformats.org/drawingml/2006/main" xmlns:r="http://schemas.openxmlformats.org/officeDocument/2006/relationships" xmlns:p="http://schemas.openxmlformats.org/presentationml/2006/main">
   <p:cSld>
@@ -18577,7 +17231,7 @@
                 </a:solidFill>
                 <a:latin typeface="Montserrat"/>
               </a:rPr>
-              <a:t>Onde escolhem: perto de onde já trabalham</a:t>
+              <a:t>Modelo: logit condicional da 1ª opção</a:t>
             </a:r>
           </a:p>
         </p:txBody>
@@ -18657,13 +17311,19 @@
               <a:t xml:space="preserve">Dados  |  </a:t>
             </a:r>
             <a:r>
+              <a:rPr lang="pt-BR" sz="1000" dirty="0">
+                <a:latin typeface="Montserrat"/>
+              </a:rPr>
+              <a:t xml:space="preserve">Análise descritiva  |  </a:t>
+            </a:r>
+            <a:r>
               <a:rPr lang="pt-BR" sz="1000" b="1" dirty="0">
                 <a:solidFill>
                   <a:srgbClr val="114719"/>
                 </a:solidFill>
                 <a:latin typeface="Montserrat"/>
               </a:rPr>
-              <a:t>Análise descritiva</a:t>
+              <a:t>Metodologia</a:t>
             </a:r>
             <a:r>
               <a:rPr lang="pt-BR" sz="1000" dirty="0">
@@ -18675,12 +17335,6 @@
               <a:rPr lang="pt-BR" sz="1000" dirty="0">
                 <a:latin typeface="Montserrat"/>
               </a:rPr>
-              <a:t xml:space="preserve">Metodologia  |  </a:t>
-            </a:r>
-            <a:r>
-              <a:rPr lang="pt-BR" sz="1000" dirty="0">
-                <a:latin typeface="Montserrat"/>
-              </a:rPr>
               <a:t xml:space="preserve">Identificação  |  </a:t>
             </a:r>
             <a:r>
@@ -18706,30 +17360,34 @@
       </p:sp>
       <p:sp>
         <p:nvSpPr>
-          <p:cNvPr id="101" name="Linha"/>
+          <p:cNvPr id="101" name="Equação em palavras"/>
           <p:cNvSpPr/>
           <p:nvPr/>
         </p:nvSpPr>
         <p:spPr>
           <a:xfrm>
-            <a:off x="292608" y="5687568"/>
-            <a:ext cx="11594592" cy="420624"/>
+            <a:off x="292608" y="850392"/>
+            <a:ext cx="11594592" cy="1600200"/>
           </a:xfrm>
-          <a:prstGeom prst="rect">
-            <a:avLst/>
+          <a:prstGeom prst="roundRect">
+            <a:avLst>
+              <a:gd name="adj" fmla="val 8000"/>
+            </a:avLst>
           </a:prstGeom>
-          <a:noFill/>
+          <a:solidFill>
+            <a:srgbClr val="114719"/>
+          </a:solidFill>
           <a:ln>
             <a:noFill/>
           </a:ln>
         </p:spPr>
         <p:txBody>
-          <a:bodyPr wrap="square" lIns="164592" tIns="18288" rIns="164592" bIns="18288" rtlCol="0" anchor="ctr">
+          <a:bodyPr wrap="square" lIns="365760" tIns="73152" rIns="365760" bIns="73152" rtlCol="0" anchor="ctr">
             <a:noAutofit/>
           </a:bodyPr>
           <a:lstStyle/>
           <a:p>
-            <a:pPr marL="0" indent="0" algn="l">
+            <a:pPr marL="0" indent="0" algn="ctr">
               <a:lnSpc>
                 <a:spcPct val="100000"/>
               </a:lnSpc>
@@ -18742,58 +17400,344 @@
               <a:buNone/>
             </a:pPr>
             <a:r>
-              <a:rPr lang="pt-BR" sz="1800" b="1" dirty="0">
+              <a:rPr lang="pt-BR" sz="2800" b="0" dirty="0">
                 <a:solidFill>
-                  <a:srgbClr val="114719"/>
+                  <a:srgbClr val="FFFFFF"/>
                 </a:solidFill>
                 <a:latin typeface="Montserrat"/>
               </a:rPr>
-              <a:t>79%</a:t>
-            </a:r>
-            <a:r>
-              <a:rPr lang="pt-BR" sz="1800" b="0" dirty="0">
+              <a:t>chance da 1ª opção = bolsa + distância + origem</a:t>
+            </a:r>
+          </a:p>
+        </p:txBody>
+      </p:sp>
+      <p:sp>
+        <p:nvSpPr>
+          <p:cNvPr id="102" name="Rótulo"/>
+          <p:cNvSpPr/>
+          <p:nvPr/>
+        </p:nvSpPr>
+        <p:spPr>
+          <a:xfrm>
+            <a:off x="292608" y="2724912"/>
+            <a:ext cx="2194560" cy="999744"/>
+          </a:xfrm>
+          <a:prstGeom prst="roundRect">
+            <a:avLst>
+              <a:gd name="adj" fmla="val 10000"/>
+            </a:avLst>
+          </a:prstGeom>
+          <a:solidFill>
+            <a:srgbClr val="114719"/>
+          </a:solidFill>
+          <a:ln>
+            <a:noFill/>
+          </a:ln>
+        </p:spPr>
+        <p:txBody>
+          <a:bodyPr wrap="square" lIns="73152" tIns="45720" rIns="73152" bIns="45720" rtlCol="0" anchor="ctr">
+            <a:noAutofit/>
+          </a:bodyPr>
+          <a:lstStyle/>
+          <a:p>
+            <a:pPr marL="0" indent="0" algn="ctr">
+              <a:lnSpc>
+                <a:spcPct val="100000"/>
+              </a:lnSpc>
+              <a:spcBef>
+                <a:spcPts val="0"/>
+              </a:spcBef>
+              <a:spcAft>
+                <a:spcPts val="0"/>
+              </a:spcAft>
+              <a:buNone/>
+            </a:pPr>
+            <a:r>
+              <a:rPr lang="pt-BR" sz="2000" b="1" dirty="0">
+                <a:solidFill>
+                  <a:srgbClr val="FFFFFF"/>
+                </a:solidFill>
+                <a:latin typeface="Montserrat"/>
+              </a:rPr>
+              <a:t>Por quê</a:t>
+            </a:r>
+          </a:p>
+        </p:txBody>
+      </p:sp>
+      <p:sp>
+        <p:nvSpPr>
+          <p:cNvPr id="103" name="Item"/>
+          <p:cNvSpPr/>
+          <p:nvPr/>
+        </p:nvSpPr>
+        <p:spPr>
+          <a:xfrm>
+            <a:off x="2624328" y="2724912"/>
+            <a:ext cx="9262872" cy="999744"/>
+          </a:xfrm>
+          <a:prstGeom prst="roundRect">
+            <a:avLst>
+              <a:gd name="adj" fmla="val 6000"/>
+            </a:avLst>
+          </a:prstGeom>
+          <a:solidFill>
+            <a:srgbClr val="F4F8F5"/>
+          </a:solidFill>
+          <a:ln w="12700">
+            <a:solidFill>
+              <a:srgbClr val="056429"/>
+            </a:solidFill>
+          </a:ln>
+        </p:spPr>
+        <p:txBody>
+          <a:bodyPr wrap="square" lIns="228600" tIns="36576" rIns="228600" bIns="36576" rtlCol="0" anchor="ctr">
+            <a:noAutofit/>
+          </a:bodyPr>
+          <a:lstStyle/>
+          <a:p>
+            <a:pPr marL="0" indent="0" algn="l">
+              <a:lnSpc>
+                <a:spcPct val="102000"/>
+              </a:lnSpc>
+              <a:spcBef>
+                <a:spcPts val="0"/>
+              </a:spcBef>
+              <a:spcAft>
+                <a:spcPts val="0"/>
+              </a:spcAft>
+              <a:buNone/>
+            </a:pPr>
+            <a:r>
+              <a:rPr lang="pt-BR" sz="2000" b="0" dirty="0">
                 <a:solidFill>
                   <a:srgbClr val="3A3A3A"/>
                 </a:solidFill>
                 <a:latin typeface="Montserrat"/>
               </a:rPr>
-              <a:t> põem a 1ª opção na UF de origem; mediana: 51 km (descritivo).</a:t>
+              <a:t>escolha entre vagas; candidato comparado consigo mesmo</a:t>
             </a:r>
           </a:p>
         </p:txBody>
       </p:sp>
-      <p:pic>
-        <p:nvPicPr>
-          <p:cNvPr id="102" name="Figura" descr="1ª opção em relação à origem do candidato (mesma UF, mesma região de saúde, mesmo município) e distância da origem à 1ª opção"/>
-          <p:cNvPicPr>
-            <a:picLocks noChangeAspect="1"/>
-          </p:cNvPicPr>
+      <p:sp>
+        <p:nvSpPr>
+          <p:cNvPr id="104" name="Rótulo"/>
+          <p:cNvSpPr/>
           <p:nvPr/>
-        </p:nvPicPr>
-        <p:blipFill>
-          <a:blip r:embed="rId3"/>
-          <a:stretch>
-            <a:fillRect/>
-          </a:stretch>
-        </p:blipFill>
+        </p:nvSpPr>
         <p:spPr>
           <a:xfrm>
-            <a:off x="1645125" y="804672"/>
-            <a:ext cx="8889558" cy="4754880"/>
+            <a:off x="292608" y="3907536"/>
+            <a:ext cx="2194560" cy="999744"/>
           </a:xfrm>
-          <a:prstGeom prst="rect">
-            <a:avLst/>
+          <a:prstGeom prst="roundRect">
+            <a:avLst>
+              <a:gd name="adj" fmla="val 10000"/>
+            </a:avLst>
           </a:prstGeom>
-          <a:ln w="6350">
+          <a:solidFill>
+            <a:srgbClr val="114719"/>
+          </a:solidFill>
+          <a:ln>
+            <a:noFill/>
+          </a:ln>
+        </p:spPr>
+        <p:txBody>
+          <a:bodyPr wrap="square" lIns="73152" tIns="45720" rIns="73152" bIns="45720" rtlCol="0" anchor="ctr">
+            <a:noAutofit/>
+          </a:bodyPr>
+          <a:lstStyle/>
+          <a:p>
+            <a:pPr marL="0" indent="0" algn="ctr">
+              <a:lnSpc>
+                <a:spcPct val="100000"/>
+              </a:lnSpc>
+              <a:spcBef>
+                <a:spcPts val="0"/>
+              </a:spcBef>
+              <a:spcAft>
+                <a:spcPts val="0"/>
+              </a:spcAft>
+              <a:buNone/>
+            </a:pPr>
+            <a:r>
+              <a:rPr lang="pt-BR" sz="2000" b="1" dirty="0">
+                <a:solidFill>
+                  <a:srgbClr val="FFFFFF"/>
+                </a:solidFill>
+                <a:latin typeface="Montserrat"/>
+              </a:rPr>
+              <a:t>Bolsa</a:t>
+            </a:r>
+          </a:p>
+        </p:txBody>
+      </p:sp>
+      <p:sp>
+        <p:nvSpPr>
+          <p:cNvPr id="105" name="Item"/>
+          <p:cNvSpPr/>
+          <p:nvPr/>
+        </p:nvSpPr>
+        <p:spPr>
+          <a:xfrm>
+            <a:off x="2624328" y="3907536"/>
+            <a:ext cx="9262872" cy="999744"/>
+          </a:xfrm>
+          <a:prstGeom prst="roundRect">
+            <a:avLst>
+              <a:gd name="adj" fmla="val 6000"/>
+            </a:avLst>
+          </a:prstGeom>
+          <a:solidFill>
+            <a:srgbClr val="F4F8F5"/>
+          </a:solidFill>
+          <a:ln w="12700">
             <a:solidFill>
-              <a:srgbClr val="DDE7DF"/>
+              <a:srgbClr val="056429"/>
             </a:solidFill>
           </a:ln>
         </p:spPr>
-      </p:pic>
+        <p:txBody>
+          <a:bodyPr wrap="square" lIns="228600" tIns="36576" rIns="228600" bIns="36576" rtlCol="0" anchor="ctr">
+            <a:noAutofit/>
+          </a:bodyPr>
+          <a:lstStyle/>
+          <a:p>
+            <a:pPr marL="0" indent="0" algn="l">
+              <a:lnSpc>
+                <a:spcPct val="102000"/>
+              </a:lnSpc>
+              <a:spcBef>
+                <a:spcPts val="0"/>
+              </a:spcBef>
+              <a:spcAft>
+                <a:spcPts val="0"/>
+              </a:spcAft>
+              <a:buNone/>
+            </a:pPr>
+            <a:r>
+              <a:rPr lang="pt-BR" sz="2000" b="0" dirty="0">
+                <a:solidFill>
+                  <a:srgbClr val="3A3A3A"/>
+                </a:solidFill>
+                <a:latin typeface="Montserrat"/>
+              </a:rPr>
+              <a:t>muda pela regra do IVS</a:t>
+            </a:r>
+          </a:p>
+        </p:txBody>
+      </p:sp>
       <p:sp>
         <p:nvSpPr>
-          <p:cNvPr id="103" name="Fontes"/>
+          <p:cNvPr id="106" name="Rótulo"/>
+          <p:cNvSpPr/>
+          <p:nvPr/>
+        </p:nvSpPr>
+        <p:spPr>
+          <a:xfrm>
+            <a:off x="292608" y="5090160"/>
+            <a:ext cx="2194560" cy="999744"/>
+          </a:xfrm>
+          <a:prstGeom prst="roundRect">
+            <a:avLst>
+              <a:gd name="adj" fmla="val 10000"/>
+            </a:avLst>
+          </a:prstGeom>
+          <a:solidFill>
+            <a:srgbClr val="114719"/>
+          </a:solidFill>
+          <a:ln>
+            <a:noFill/>
+          </a:ln>
+        </p:spPr>
+        <p:txBody>
+          <a:bodyPr wrap="square" lIns="73152" tIns="45720" rIns="73152" bIns="45720" rtlCol="0" anchor="ctr">
+            <a:noAutofit/>
+          </a:bodyPr>
+          <a:lstStyle/>
+          <a:p>
+            <a:pPr marL="0" indent="0" algn="ctr">
+              <a:lnSpc>
+                <a:spcPct val="100000"/>
+              </a:lnSpc>
+              <a:spcBef>
+                <a:spcPts val="0"/>
+              </a:spcBef>
+              <a:spcAft>
+                <a:spcPts val="0"/>
+              </a:spcAft>
+              <a:buNone/>
+            </a:pPr>
+            <a:r>
+              <a:rPr lang="pt-BR" sz="2000" b="1" dirty="0">
+                <a:solidFill>
+                  <a:srgbClr val="FFFFFF"/>
+                </a:solidFill>
+                <a:latin typeface="Montserrat"/>
+              </a:rPr>
+              <a:t>Teste</a:t>
+            </a:r>
+          </a:p>
+        </p:txBody>
+      </p:sp>
+      <p:sp>
+        <p:nvSpPr>
+          <p:cNvPr id="107" name="Item"/>
+          <p:cNvSpPr/>
+          <p:nvPr/>
+        </p:nvSpPr>
+        <p:spPr>
+          <a:xfrm>
+            <a:off x="2624328" y="5090160"/>
+            <a:ext cx="9262872" cy="999744"/>
+          </a:xfrm>
+          <a:prstGeom prst="roundRect">
+            <a:avLst>
+              <a:gd name="adj" fmla="val 6000"/>
+            </a:avLst>
+          </a:prstGeom>
+          <a:solidFill>
+            <a:srgbClr val="F4F8F5"/>
+          </a:solidFill>
+          <a:ln w="12700">
+            <a:solidFill>
+              <a:srgbClr val="056429"/>
+            </a:solidFill>
+          </a:ln>
+        </p:spPr>
+        <p:txBody>
+          <a:bodyPr wrap="square" lIns="228600" tIns="36576" rIns="228600" bIns="36576" rtlCol="0" anchor="ctr">
+            <a:noAutofit/>
+          </a:bodyPr>
+          <a:lstStyle/>
+          <a:p>
+            <a:pPr marL="0" indent="0" algn="l">
+              <a:lnSpc>
+                <a:spcPct val="102000"/>
+              </a:lnSpc>
+              <a:spcBef>
+                <a:spcPts val="0"/>
+              </a:spcBef>
+              <a:spcAft>
+                <a:spcPts val="0"/>
+              </a:spcAft>
+              <a:buNone/>
+            </a:pPr>
+            <a:r>
+              <a:rPr lang="pt-BR" sz="2000" b="0" dirty="0">
+                <a:solidFill>
+                  <a:srgbClr val="3A3A3A"/>
+                </a:solidFill>
+                <a:latin typeface="Montserrat"/>
+              </a:rPr>
+              <a:t>D_UF = origem − bolsa &gt; zero; cluster por conjunto</a:t>
+            </a:r>
+          </a:p>
+        </p:txBody>
+      </p:sp>
+      <p:sp>
+        <p:nvSpPr>
+          <p:cNvPr id="108" name="Fontes"/>
           <p:cNvSpPr txBox="1"/>
           <p:nvPr/>
         </p:nvSpPr>
@@ -18844,7 +17788,7 @@
                 </a:solidFill>
                 <a:latin typeface="Montserrat"/>
               </a:rPr>
-              <a:t>output/rdd_bolsa/G1_distancias_opcoes.parquet e G1_candidatos_origem.parquet (portão G1); output/apresentacao_banca2/exp_escolha_origem.png.</a:t>
+              <a:t>protocolos 52 e 52b; adendos 52c e 52e (docs/06_execucao/); docs 57a, 57i, 57p, 57x e 66 (§4).</a:t>
             </a:r>
           </a:p>
         </p:txBody>
@@ -18907,7 +17851,7 @@
                 </a:solidFill>
                 <a:latin typeface="Montserrat"/>
               </a:rPr>
-              <a:t>Metodologia: logit condicional da 1ª opção</a:t>
+              <a:t>Identificação: as premissas e o nosso caso</a:t>
             </a:r>
           </a:p>
         </p:txBody>
@@ -18993,518 +17937,6 @@
               <a:t xml:space="preserve">Análise descritiva  |  </a:t>
             </a:r>
             <a:r>
-              <a:rPr lang="pt-BR" sz="1000" b="1" dirty="0">
-                <a:solidFill>
-                  <a:srgbClr val="114719"/>
-                </a:solidFill>
-                <a:latin typeface="Montserrat"/>
-              </a:rPr>
-              <a:t>Metodologia</a:t>
-            </a:r>
-            <a:r>
-              <a:rPr lang="pt-BR" sz="1000" dirty="0">
-                <a:latin typeface="Montserrat"/>
-              </a:rPr>
-              <a:t xml:space="preserve">  |  </a:t>
-            </a:r>
-            <a:r>
-              <a:rPr lang="pt-BR" sz="1000" dirty="0">
-                <a:latin typeface="Montserrat"/>
-              </a:rPr>
-              <a:t xml:space="preserve">Identificação  |  </a:t>
-            </a:r>
-            <a:r>
-              <a:rPr lang="pt-BR" sz="1000" dirty="0">
-                <a:latin typeface="Montserrat"/>
-              </a:rPr>
-              <a:t xml:space="preserve">Resultados  |  </a:t>
-            </a:r>
-            <a:r>
-              <a:rPr lang="pt-BR" sz="1000" dirty="0">
-                <a:latin typeface="Montserrat"/>
-              </a:rPr>
-              <a:t xml:space="preserve">Robustez  |  </a:t>
-            </a:r>
-            <a:r>
-              <a:rPr lang="pt-BR" sz="1000" dirty="0">
-                <a:latin typeface="Montserrat"/>
-              </a:rPr>
-              <a:t xml:space="preserve">Discussão</a:t>
-            </a:r>
-          </a:p>
-        </p:txBody>
-      </p:sp>
-      <p:sp>
-        <p:nvSpPr>
-          <p:cNvPr id="101" name="Equação em palavras"/>
-          <p:cNvSpPr/>
-          <p:nvPr/>
-        </p:nvSpPr>
-        <p:spPr>
-          <a:xfrm>
-            <a:off x="292608" y="850392"/>
-            <a:ext cx="11594592" cy="1600200"/>
-          </a:xfrm>
-          <a:prstGeom prst="roundRect">
-            <a:avLst>
-              <a:gd name="adj" fmla="val 8000"/>
-            </a:avLst>
-          </a:prstGeom>
-          <a:solidFill>
-            <a:srgbClr val="114719"/>
-          </a:solidFill>
-          <a:ln>
-            <a:noFill/>
-          </a:ln>
-        </p:spPr>
-        <p:txBody>
-          <a:bodyPr wrap="square" lIns="365760" tIns="73152" rIns="365760" bIns="73152" rtlCol="0" anchor="ctr">
-            <a:noAutofit/>
-          </a:bodyPr>
-          <a:lstStyle/>
-          <a:p>
-            <a:pPr marL="0" indent="0" algn="ctr">
-              <a:lnSpc>
-                <a:spcPct val="100000"/>
-              </a:lnSpc>
-              <a:spcBef>
-                <a:spcPts val="0"/>
-              </a:spcBef>
-              <a:spcAft>
-                <a:spcPts val="0"/>
-              </a:spcAft>
-              <a:buNone/>
-            </a:pPr>
-            <a:r>
-              <a:rPr lang="pt-BR" sz="2800" b="0" dirty="0">
-                <a:solidFill>
-                  <a:srgbClr val="FFFFFF"/>
-                </a:solidFill>
-                <a:latin typeface="Montserrat"/>
-              </a:rPr>
-              <a:t>chance da 1ª opção = bolsa + distância + origem (UF, região, município)</a:t>
-            </a:r>
-          </a:p>
-        </p:txBody>
-      </p:sp>
-      <p:sp>
-        <p:nvSpPr>
-          <p:cNvPr id="102" name="Rótulo"/>
-          <p:cNvSpPr/>
-          <p:nvPr/>
-        </p:nvSpPr>
-        <p:spPr>
-          <a:xfrm>
-            <a:off x="292608" y="2724912"/>
-            <a:ext cx="2194560" cy="1591056"/>
-          </a:xfrm>
-          <a:prstGeom prst="roundRect">
-            <a:avLst>
-              <a:gd name="adj" fmla="val 10000"/>
-            </a:avLst>
-          </a:prstGeom>
-          <a:solidFill>
-            <a:srgbClr val="114719"/>
-          </a:solidFill>
-          <a:ln>
-            <a:noFill/>
-          </a:ln>
-        </p:spPr>
-        <p:txBody>
-          <a:bodyPr wrap="square" lIns="73152" tIns="45720" rIns="73152" bIns="45720" rtlCol="0" anchor="ctr">
-            <a:noAutofit/>
-          </a:bodyPr>
-          <a:lstStyle/>
-          <a:p>
-            <a:pPr marL="0" indent="0" algn="ctr">
-              <a:lnSpc>
-                <a:spcPct val="100000"/>
-              </a:lnSpc>
-              <a:spcBef>
-                <a:spcPts val="0"/>
-              </a:spcBef>
-              <a:spcAft>
-                <a:spcPts val="0"/>
-              </a:spcAft>
-              <a:buNone/>
-            </a:pPr>
-            <a:r>
-              <a:rPr lang="pt-BR" sz="2000" b="1" dirty="0">
-                <a:solidFill>
-                  <a:srgbClr val="FFFFFF"/>
-                </a:solidFill>
-                <a:latin typeface="Montserrat"/>
-              </a:rPr>
-              <a:t>Comparação</a:t>
-            </a:r>
-          </a:p>
-        </p:txBody>
-      </p:sp>
-      <p:sp>
-        <p:nvSpPr>
-          <p:cNvPr id="103" name="Item"/>
-          <p:cNvSpPr/>
-          <p:nvPr/>
-        </p:nvSpPr>
-        <p:spPr>
-          <a:xfrm>
-            <a:off x="2624328" y="2724912"/>
-            <a:ext cx="9262872" cy="1591056"/>
-          </a:xfrm>
-          <a:prstGeom prst="roundRect">
-            <a:avLst>
-              <a:gd name="adj" fmla="val 6000"/>
-            </a:avLst>
-          </a:prstGeom>
-          <a:solidFill>
-            <a:srgbClr val="F4F8F5"/>
-          </a:solidFill>
-          <a:ln w="12700">
-            <a:solidFill>
-              <a:srgbClr val="056429"/>
-            </a:solidFill>
-          </a:ln>
-        </p:spPr>
-        <p:txBody>
-          <a:bodyPr wrap="square" lIns="228600" tIns="36576" rIns="228600" bIns="36576" rtlCol="0" anchor="ctr">
-            <a:noAutofit/>
-          </a:bodyPr>
-          <a:lstStyle/>
-          <a:p>
-            <a:pPr marL="0" indent="0" algn="l">
-              <a:lnSpc>
-                <a:spcPct val="102000"/>
-              </a:lnSpc>
-              <a:spcBef>
-                <a:spcPts val="0"/>
-              </a:spcBef>
-              <a:spcAft>
-                <a:spcPts val="0"/>
-              </a:spcAft>
-              <a:buNone/>
-            </a:pPr>
-            <a:r>
-              <a:rPr lang="pt-BR" sz="2000" b="0" dirty="0">
-                <a:solidFill>
-                  <a:srgbClr val="3A3A3A"/>
-                </a:solidFill>
-                <a:latin typeface="Montserrat"/>
-              </a:rPr>
-              <a:t>o candidato consigo mesmo, entre vagas do seu curso</a:t>
-            </a:r>
-          </a:p>
-        </p:txBody>
-      </p:sp>
-      <p:sp>
-        <p:nvSpPr>
-          <p:cNvPr id="104" name="Rótulo"/>
-          <p:cNvSpPr/>
-          <p:nvPr/>
-        </p:nvSpPr>
-        <p:spPr>
-          <a:xfrm>
-            <a:off x="292608" y="4498848"/>
-            <a:ext cx="2194560" cy="1591056"/>
-          </a:xfrm>
-          <a:prstGeom prst="roundRect">
-            <a:avLst>
-              <a:gd name="adj" fmla="val 10000"/>
-            </a:avLst>
-          </a:prstGeom>
-          <a:solidFill>
-            <a:srgbClr val="114719"/>
-          </a:solidFill>
-          <a:ln>
-            <a:noFill/>
-          </a:ln>
-        </p:spPr>
-        <p:txBody>
-          <a:bodyPr wrap="square" lIns="73152" tIns="45720" rIns="73152" bIns="45720" rtlCol="0" anchor="ctr">
-            <a:noAutofit/>
-          </a:bodyPr>
-          <a:lstStyle/>
-          <a:p>
-            <a:pPr marL="0" indent="0" algn="ctr">
-              <a:lnSpc>
-                <a:spcPct val="100000"/>
-              </a:lnSpc>
-              <a:spcBef>
-                <a:spcPts val="0"/>
-              </a:spcBef>
-              <a:spcAft>
-                <a:spcPts val="0"/>
-              </a:spcAft>
-              <a:buNone/>
-            </a:pPr>
-            <a:r>
-              <a:rPr lang="pt-BR" sz="2000" b="1" dirty="0">
-                <a:solidFill>
-                  <a:srgbClr val="FFFFFF"/>
-                </a:solidFill>
-                <a:latin typeface="Montserrat"/>
-              </a:rPr>
-              <a:t>Teste</a:t>
-            </a:r>
-          </a:p>
-        </p:txBody>
-      </p:sp>
-      <p:sp>
-        <p:nvSpPr>
-          <p:cNvPr id="105" name="Item"/>
-          <p:cNvSpPr/>
-          <p:nvPr/>
-        </p:nvSpPr>
-        <p:spPr>
-          <a:xfrm>
-            <a:off x="2624328" y="4498848"/>
-            <a:ext cx="9262872" cy="1591056"/>
-          </a:xfrm>
-          <a:prstGeom prst="roundRect">
-            <a:avLst>
-              <a:gd name="adj" fmla="val 6000"/>
-            </a:avLst>
-          </a:prstGeom>
-          <a:solidFill>
-            <a:srgbClr val="F4F8F5"/>
-          </a:solidFill>
-          <a:ln w="12700">
-            <a:solidFill>
-              <a:srgbClr val="056429"/>
-            </a:solidFill>
-          </a:ln>
-        </p:spPr>
-        <p:txBody>
-          <a:bodyPr wrap="square" lIns="228600" tIns="36576" rIns="228600" bIns="36576" rtlCol="0" anchor="ctr">
-            <a:noAutofit/>
-          </a:bodyPr>
-          <a:lstStyle/>
-          <a:p>
-            <a:pPr marL="0" indent="0" algn="l">
-              <a:lnSpc>
-                <a:spcPct val="102000"/>
-              </a:lnSpc>
-              <a:spcBef>
-                <a:spcPts val="0"/>
-              </a:spcBef>
-              <a:spcAft>
-                <a:spcPts val="0"/>
-              </a:spcAft>
-              <a:buNone/>
-            </a:pPr>
-            <a:r>
-              <a:rPr lang="pt-BR" sz="2000" b="0" dirty="0">
-                <a:solidFill>
-                  <a:srgbClr val="3A3A3A"/>
-                </a:solidFill>
-                <a:latin typeface="Montserrat"/>
-              </a:rPr>
-              <a:t>origem pesa mais que toda a bolsa</a:t>
-            </a:r>
-          </a:p>
-        </p:txBody>
-      </p:sp>
-      <p:sp>
-        <p:nvSpPr>
-          <p:cNvPr id="106" name="Fontes"/>
-          <p:cNvSpPr txBox="1"/>
-          <p:nvPr/>
-        </p:nvSpPr>
-        <p:spPr>
-          <a:xfrm>
-            <a:off x="292608" y="6181344"/>
-            <a:ext cx="11594592" cy="274320"/>
-          </a:xfrm>
-          <a:prstGeom prst="rect">
-            <a:avLst/>
-          </a:prstGeom>
-          <a:noFill/>
-          <a:ln>
-            <a:noFill/>
-          </a:ln>
-        </p:spPr>
-        <p:txBody>
-          <a:bodyPr wrap="square" lIns="0" tIns="0" rIns="0" bIns="0" rtlCol="0" anchor="b">
-            <a:noAutofit/>
-          </a:bodyPr>
-          <a:lstStyle/>
-          <a:p>
-            <a:pPr marL="0" indent="0" algn="l">
-              <a:lnSpc>
-                <a:spcPct val="95000"/>
-              </a:lnSpc>
-              <a:spcBef>
-                <a:spcPts val="0"/>
-              </a:spcBef>
-              <a:spcAft>
-                <a:spcPts val="0"/>
-              </a:spcAft>
-              <a:buNone/>
-            </a:pPr>
-            <a:r>
-              <a:rPr lang="pt-BR" sz="800" b="1" dirty="0">
-                <a:solidFill>
-                  <a:srgbClr val="6B6B6B"/>
-                </a:solidFill>
-                <a:latin typeface="Montserrat"/>
-              </a:rPr>
-              <a:t>Fontes: </a:t>
-            </a:r>
-            <a:r>
-              <a:rPr lang="pt-BR" sz="800" b="0" dirty="0">
-                <a:solidFill>
-                  <a:srgbClr val="6B6B6B"/>
-                </a:solidFill>
-                <a:latin typeface="Montserrat"/>
-              </a:rPr>
-              <a:t>protocolos 52 e 52b; adendos 52c e 52e (docs/06_execucao/); docs 57a, 57i, 57p e 57x.</a:t>
-            </a:r>
-          </a:p>
-        </p:txBody>
-      </p:sp>
-    </p:spTree>
-  </p:cSld>
-  <p:clrMapOvr>
-    <a:masterClrMapping/>
-  </p:clrMapOvr>
-</p:sld>
-</file>
-
-<file path=ppt/slides/slide43.xml><?xml version="1.0" encoding="utf-8"?>
-<p:sld xmlns:a="http://schemas.openxmlformats.org/drawingml/2006/main" xmlns:r="http://schemas.openxmlformats.org/officeDocument/2006/relationships" xmlns:p="http://schemas.openxmlformats.org/presentationml/2006/main">
-  <p:cSld>
-    <p:spTree>
-      <p:nvGrpSpPr>
-        <p:cNvPr id="1" name=""/>
-        <p:cNvGrpSpPr/>
-        <p:nvPr/>
-      </p:nvGrpSpPr>
-      <p:grpSpPr>
-        <a:xfrm>
-          <a:off x="0" y="0"/>
-          <a:ext cx="0" cy="0"/>
-          <a:chOff x="0" y="0"/>
-          <a:chExt cx="0" cy="0"/>
-        </a:xfrm>
-      </p:grpSpPr>
-      <p:sp>
-        <p:nvSpPr>
-          <p:cNvPr id="2" name="Título"/>
-          <p:cNvSpPr>
-            <a:spLocks noGrp="1"/>
-          </p:cNvSpPr>
-          <p:nvPr>
-            <p:ph type="title"/>
-          </p:nvPr>
-        </p:nvSpPr>
-        <p:spPr/>
-        <p:txBody>
-          <a:bodyPr>
-            <a:normAutofit/>
-          </a:bodyPr>
-          <a:lstStyle/>
-          <a:p>
-            <a:pPr marL="0" indent="0" algn="l">
-              <a:lnSpc>
-                <a:spcPct val="104000"/>
-              </a:lnSpc>
-              <a:spcAft>
-                <a:spcPts val="0"/>
-              </a:spcAft>
-              <a:buNone/>
-            </a:pPr>
-            <a:r>
-              <a:rPr lang="pt-BR" sz="2400" b="1" dirty="0">
-                <a:solidFill>
-                  <a:srgbClr val="FFFFFF"/>
-                </a:solidFill>
-                <a:latin typeface="Montserrat"/>
-              </a:rPr>
-              <a:t>Identificação: as premissas e o nosso caso</a:t>
-            </a:r>
-          </a:p>
-        </p:txBody>
-      </p:sp>
-      <p:sp>
-        <p:nvSpPr>
-          <p:cNvPr id="3" name="Número da página"/>
-          <p:cNvSpPr>
-            <a:spLocks noGrp="1"/>
-          </p:cNvSpPr>
-          <p:nvPr>
-            <p:ph type="body" sz="quarter" idx="18"/>
-          </p:nvPr>
-        </p:nvSpPr>
-        <p:spPr>
-          <a:xfrm>
-            <a:off x="11706744" y="6457042"/>
-            <a:ext cx="492080" cy="400640"/>
-          </a:xfrm>
-        </p:spPr>
-        <p:txBody>
-          <a:bodyPr anchor="ctr">
-            <a:normAutofit/>
-          </a:bodyPr>
-          <a:lstStyle/>
-          <a:p>
-            <a:pPr algn="ctr"/>
-            <a:fld id="{B1A5E0C2-5F3A-4C7E-9D11-7A2E6C0F4B01}" type="slidenum">
-              <a:rPr lang="pt-BR" sz="1400" b="1">
-                <a:solidFill>
-                  <a:srgbClr val="BFBFBF"/>
-                </a:solidFill>
-                <a:latin typeface="Montserrat"/>
-              </a:rPr>
-              <a:t>‹#›</a:t>
-            </a:fld>
-            <a:endParaRPr lang="pt-BR" sz="1400" b="1">
-              <a:solidFill>
-                <a:srgbClr val="BFBFBF"/>
-              </a:solidFill>
-            </a:endParaRPr>
-          </a:p>
-        </p:txBody>
-      </p:sp>
-      <p:sp>
-        <p:nvSpPr>
-          <p:cNvPr id="4" name="Navegação do rodapé"/>
-          <p:cNvSpPr txBox="1"/>
-          <p:nvPr/>
-        </p:nvSpPr>
-        <p:spPr>
-          <a:xfrm>
-            <a:off x="196860" y="6639248"/>
-            <a:ext cx="9223026" cy="246221"/>
-          </a:xfrm>
-          <a:prstGeom prst="rect">
-            <a:avLst/>
-          </a:prstGeom>
-          <a:noFill/>
-        </p:spPr>
-        <p:txBody>
-          <a:bodyPr wrap="square" rtlCol="0">
-            <a:spAutoFit/>
-          </a:bodyPr>
-          <a:lstStyle/>
-          <a:p>
-            <a:r>
-              <a:rPr lang="pt-BR" sz="1000" dirty="0">
-                <a:latin typeface="Montserrat"/>
-              </a:rPr>
-              <a:t xml:space="preserve">Hipótese  |  </a:t>
-            </a:r>
-            <a:r>
-              <a:rPr lang="pt-BR" sz="1000" dirty="0">
-                <a:latin typeface="Montserrat"/>
-              </a:rPr>
-              <a:t xml:space="preserve">Dados  |  </a:t>
-            </a:r>
-            <a:r>
-              <a:rPr lang="pt-BR" sz="1000" dirty="0">
-                <a:latin typeface="Montserrat"/>
-              </a:rPr>
-              <a:t xml:space="preserve">Análise descritiva  |  </a:t>
-            </a:r>
-            <a:r>
               <a:rPr lang="pt-BR" sz="1000" dirty="0">
                 <a:latin typeface="Montserrat"/>
               </a:rPr>
@@ -19563,10 +17995,10 @@
             <a:tbl>
               <a:tblPr firstRow="1" bandRow="1"/>
               <a:tblGrid>
-                <a:gridCol w="4591324"/>
-                <a:gridCol w="7003268"/>
+                <a:gridCol w="4516061"/>
+                <a:gridCol w="7078531"/>
               </a:tblGrid>
-              <a:tr h="732826">
+              <a:tr h="854964">
                 <a:tc>
                   <a:txBody>
                     <a:bodyPr/>
@@ -19676,7 +18108,7 @@
                   </a:tcPr>
                 </a:tc>
               </a:tr>
-              <a:tr h="732826">
+              <a:tr h="854964">
                 <a:tc>
                   <a:txBody>
                     <a:bodyPr/>
@@ -19786,7 +18218,7 @@
                   </a:tcPr>
                 </a:tc>
               </a:tr>
-              <a:tr h="732826">
+              <a:tr h="854964">
                 <a:tc>
                   <a:txBody>
                     <a:bodyPr/>
@@ -19865,7 +18297,7 @@
                           </a:solidFill>
                           <a:latin typeface="Montserrat"/>
                         </a:rPr>
-                        <a:t>não: pacote</a:t>
+                        <a:t>não: pacote do corte</a:t>
                       </a:r>
                     </a:p>
                   </a:txBody>
@@ -19896,7 +18328,7 @@
                   </a:tcPr>
                 </a:tc>
               </a:tr>
-              <a:tr h="732826">
+              <a:tr h="854964">
                 <a:tc>
                   <a:txBody>
                     <a:bodyPr/>
@@ -20006,7 +18438,7 @@
                   </a:tcPr>
                 </a:tc>
               </a:tr>
-              <a:tr h="732826">
+              <a:tr h="854964">
                 <a:tc>
                   <a:txBody>
                     <a:bodyPr/>
@@ -20116,7 +18548,7 @@
                   </a:tcPr>
                 </a:tc>
               </a:tr>
-              <a:tr h="732826">
+              <a:tr h="854964">
                 <a:tc>
                   <a:txBody>
                     <a:bodyPr/>
@@ -20141,7 +18573,7 @@
                           </a:solidFill>
                           <a:latin typeface="Montserrat"/>
                         </a:rPr>
-                        <a:t>Origem</a:t>
+                        <a:t>Conjunto</a:t>
                       </a:r>
                     </a:p>
                   </a:txBody>
@@ -20195,7 +18627,2308 @@
                           </a:solidFill>
                           <a:latin typeface="Montserrat"/>
                         </a:rPr>
-                        <a:t>preferência revelada</a:t>
+                        <a:t>todas as vagas vistas</a:t>
+                      </a:r>
+                    </a:p>
+                  </a:txBody>
+                  <a:tcPr marL="73152" marR="73152" marT="36576" marB="36576" anchor="ctr">
+                    <a:lnL w="6350">
+                      <a:solidFill>
+                        <a:srgbClr val="C9DED1"/>
+                      </a:solidFill>
+                    </a:lnL>
+                    <a:lnR w="6350">
+                      <a:solidFill>
+                        <a:srgbClr val="C9DED1"/>
+                      </a:solidFill>
+                    </a:lnR>
+                    <a:lnT w="6350">
+                      <a:solidFill>
+                        <a:srgbClr val="C9DED1"/>
+                      </a:solidFill>
+                    </a:lnT>
+                    <a:lnB w="6350">
+                      <a:solidFill>
+                        <a:srgbClr val="C9DED1"/>
+                      </a:solidFill>
+                    </a:lnB>
+                    <a:solidFill>
+                      <a:srgbClr val="F3F7F3"/>
+                    </a:solidFill>
+                  </a:tcPr>
+                </a:tc>
+              </a:tr>
+            </a:tbl>
+          </a:graphicData>
+        </a:graphic>
+      </p:graphicFrame>
+      <p:sp>
+        <p:nvSpPr>
+          <p:cNvPr id="102" name="Fontes"/>
+          <p:cNvSpPr txBox="1"/>
+          <p:nvPr/>
+        </p:nvSpPr>
+        <p:spPr>
+          <a:xfrm>
+            <a:off x="292608" y="6181344"/>
+            <a:ext cx="11594592" cy="274320"/>
+          </a:xfrm>
+          <a:prstGeom prst="rect">
+            <a:avLst/>
+          </a:prstGeom>
+          <a:noFill/>
+          <a:ln>
+            <a:noFill/>
+          </a:ln>
+        </p:spPr>
+        <p:txBody>
+          <a:bodyPr wrap="square" lIns="0" tIns="0" rIns="0" bIns="0" rtlCol="0" anchor="b">
+            <a:noAutofit/>
+          </a:bodyPr>
+          <a:lstStyle/>
+          <a:p>
+            <a:pPr marL="0" indent="0" algn="l">
+              <a:lnSpc>
+                <a:spcPct val="95000"/>
+              </a:lnSpc>
+              <a:spcBef>
+                <a:spcPts val="0"/>
+              </a:spcBef>
+              <a:spcAft>
+                <a:spcPts val="0"/>
+              </a:spcAft>
+              <a:buNone/>
+            </a:pPr>
+            <a:r>
+              <a:rPr lang="pt-BR" sz="800" b="1" dirty="0">
+                <a:solidFill>
+                  <a:srgbClr val="6B6B6B"/>
+                </a:solidFill>
+                <a:latin typeface="Montserrat"/>
+              </a:rPr>
+              <a:t>Fontes: </a:t>
+            </a:r>
+            <a:r>
+              <a:rPr lang="pt-BR" sz="800" b="0" dirty="0">
+                <a:solidFill>
+                  <a:srgbClr val="6B6B6B"/>
+                </a:solidFill>
+                <a:latin typeface="Montserrat"/>
+              </a:rPr>
+              <a:t>auditorias 16, 18, 41 e 48; docs 57a (M9), 57i, 57p e 57x; output/rdd_bolsa/portao_r1_ivs_oficial.json; VC_estimativas.csv.</a:t>
+            </a:r>
+          </a:p>
+        </p:txBody>
+      </p:sp>
+    </p:spTree>
+  </p:cSld>
+  <p:clrMapOvr>
+    <a:masterClrMapping/>
+  </p:clrMapOvr>
+</p:sld>
+</file>
+
+<file path=ppt/slides/slide43.xml><?xml version="1.0" encoding="utf-8"?>
+<p:sld xmlns:a="http://schemas.openxmlformats.org/drawingml/2006/main" xmlns:r="http://schemas.openxmlformats.org/officeDocument/2006/relationships" xmlns:p="http://schemas.openxmlformats.org/presentationml/2006/main">
+  <p:cSld>
+    <p:spTree>
+      <p:nvGrpSpPr>
+        <p:cNvPr id="1" name=""/>
+        <p:cNvGrpSpPr/>
+        <p:nvPr/>
+      </p:nvGrpSpPr>
+      <p:grpSpPr>
+        <a:xfrm>
+          <a:off x="0" y="0"/>
+          <a:ext cx="0" cy="0"/>
+          <a:chOff x="0" y="0"/>
+          <a:chExt cx="0" cy="0"/>
+        </a:xfrm>
+      </p:grpSpPr>
+      <p:sp>
+        <p:nvSpPr>
+          <p:cNvPr id="2" name="Título"/>
+          <p:cNvSpPr>
+            <a:spLocks noGrp="1"/>
+          </p:cNvSpPr>
+          <p:nvPr>
+            <p:ph type="title"/>
+          </p:nvPr>
+        </p:nvSpPr>
+        <p:spPr/>
+        <p:txBody>
+          <a:bodyPr>
+            <a:normAutofit/>
+          </a:bodyPr>
+          <a:lstStyle/>
+          <a:p>
+            <a:pPr marL="0" indent="0" algn="l">
+              <a:lnSpc>
+                <a:spcPct val="104000"/>
+              </a:lnSpc>
+              <a:spcAft>
+                <a:spcPts val="0"/>
+              </a:spcAft>
+              <a:buNone/>
+            </a:pPr>
+            <a:r>
+              <a:rPr lang="pt-BR" sz="2400" b="1" dirty="0">
+                <a:solidFill>
+                  <a:srgbClr val="FFFFFF"/>
+                </a:solidFill>
+                <a:latin typeface="Montserrat"/>
+              </a:rPr>
+              <a:t>Teste central: a origem pesa mais que toda a bolsa</a:t>
+            </a:r>
+          </a:p>
+        </p:txBody>
+      </p:sp>
+      <p:sp>
+        <p:nvSpPr>
+          <p:cNvPr id="3" name="Número da página"/>
+          <p:cNvSpPr>
+            <a:spLocks noGrp="1"/>
+          </p:cNvSpPr>
+          <p:nvPr>
+            <p:ph type="body" sz="quarter" idx="18"/>
+          </p:nvPr>
+        </p:nvSpPr>
+        <p:spPr>
+          <a:xfrm>
+            <a:off x="11706744" y="6457042"/>
+            <a:ext cx="492080" cy="400640"/>
+          </a:xfrm>
+        </p:spPr>
+        <p:txBody>
+          <a:bodyPr anchor="ctr">
+            <a:normAutofit/>
+          </a:bodyPr>
+          <a:lstStyle/>
+          <a:p>
+            <a:pPr algn="ctr"/>
+            <a:fld id="{B1A5E0C2-5F3A-4C7E-9D11-7A2E6C0F4B01}" type="slidenum">
+              <a:rPr lang="pt-BR" sz="1400" b="1">
+                <a:solidFill>
+                  <a:srgbClr val="BFBFBF"/>
+                </a:solidFill>
+                <a:latin typeface="Montserrat"/>
+              </a:rPr>
+              <a:t>‹#›</a:t>
+            </a:fld>
+            <a:endParaRPr lang="pt-BR" sz="1400" b="1">
+              <a:solidFill>
+                <a:srgbClr val="BFBFBF"/>
+              </a:solidFill>
+            </a:endParaRPr>
+          </a:p>
+        </p:txBody>
+      </p:sp>
+      <p:sp>
+        <p:nvSpPr>
+          <p:cNvPr id="4" name="Navegação do rodapé"/>
+          <p:cNvSpPr txBox="1"/>
+          <p:nvPr/>
+        </p:nvSpPr>
+        <p:spPr>
+          <a:xfrm>
+            <a:off x="196860" y="6639248"/>
+            <a:ext cx="9223026" cy="246221"/>
+          </a:xfrm>
+          <a:prstGeom prst="rect">
+            <a:avLst/>
+          </a:prstGeom>
+          <a:noFill/>
+        </p:spPr>
+        <p:txBody>
+          <a:bodyPr wrap="square" rtlCol="0">
+            <a:spAutoFit/>
+          </a:bodyPr>
+          <a:lstStyle/>
+          <a:p>
+            <a:r>
+              <a:rPr lang="pt-BR" sz="1000" dirty="0">
+                <a:latin typeface="Montserrat"/>
+              </a:rPr>
+              <a:t xml:space="preserve">Hipótese  |  </a:t>
+            </a:r>
+            <a:r>
+              <a:rPr lang="pt-BR" sz="1000" dirty="0">
+                <a:latin typeface="Montserrat"/>
+              </a:rPr>
+              <a:t xml:space="preserve">Dados  |  </a:t>
+            </a:r>
+            <a:r>
+              <a:rPr lang="pt-BR" sz="1000" dirty="0">
+                <a:latin typeface="Montserrat"/>
+              </a:rPr>
+              <a:t xml:space="preserve">Análise descritiva  |  </a:t>
+            </a:r>
+            <a:r>
+              <a:rPr lang="pt-BR" sz="1000" dirty="0">
+                <a:latin typeface="Montserrat"/>
+              </a:rPr>
+              <a:t xml:space="preserve">Metodologia  |  </a:t>
+            </a:r>
+            <a:r>
+              <a:rPr lang="pt-BR" sz="1000" dirty="0">
+                <a:latin typeface="Montserrat"/>
+              </a:rPr>
+              <a:t xml:space="preserve">Identificação  |  </a:t>
+            </a:r>
+            <a:r>
+              <a:rPr lang="pt-BR" sz="1000" b="1" dirty="0">
+                <a:solidFill>
+                  <a:srgbClr val="114719"/>
+                </a:solidFill>
+                <a:latin typeface="Montserrat"/>
+              </a:rPr>
+              <a:t>Resultados</a:t>
+            </a:r>
+            <a:r>
+              <a:rPr lang="pt-BR" sz="1000" dirty="0">
+                <a:latin typeface="Montserrat"/>
+              </a:rPr>
+              <a:t xml:space="preserve">  |  </a:t>
+            </a:r>
+            <a:r>
+              <a:rPr lang="pt-BR" sz="1000" dirty="0">
+                <a:latin typeface="Montserrat"/>
+              </a:rPr>
+              <a:t xml:space="preserve">Robustez  |  </a:t>
+            </a:r>
+            <a:r>
+              <a:rPr lang="pt-BR" sz="1000" dirty="0">
+                <a:latin typeface="Montserrat"/>
+              </a:rPr>
+              <a:t xml:space="preserve">Discussão</a:t>
+            </a:r>
+          </a:p>
+        </p:txBody>
+      </p:sp>
+      <p:sp>
+        <p:nvSpPr>
+          <p:cNvPr id="101" name="Linha"/>
+          <p:cNvSpPr/>
+          <p:nvPr/>
+        </p:nvSpPr>
+        <p:spPr>
+          <a:xfrm>
+            <a:off x="292608" y="4736592"/>
+            <a:ext cx="11594592" cy="420624"/>
+          </a:xfrm>
+          <a:prstGeom prst="rect">
+            <a:avLst/>
+          </a:prstGeom>
+          <a:noFill/>
+          <a:ln>
+            <a:noFill/>
+          </a:ln>
+        </p:spPr>
+        <p:txBody>
+          <a:bodyPr wrap="square" lIns="164592" tIns="18288" rIns="164592" bIns="18288" rtlCol="0" anchor="ctr">
+            <a:noAutofit/>
+          </a:bodyPr>
+          <a:lstStyle/>
+          <a:p>
+            <a:pPr marL="0" indent="0" algn="l">
+              <a:lnSpc>
+                <a:spcPct val="100000"/>
+              </a:lnSpc>
+              <a:spcBef>
+                <a:spcPts val="0"/>
+              </a:spcBef>
+              <a:spcAft>
+                <a:spcPts val="0"/>
+              </a:spcAft>
+              <a:buNone/>
+            </a:pPr>
+            <a:r>
+              <a:rPr lang="pt-BR" sz="1800" b="1" dirty="0">
+                <a:solidFill>
+                  <a:srgbClr val="114719"/>
+                </a:solidFill>
+                <a:latin typeface="Montserrat"/>
+              </a:rPr>
+              <a:t>Origem − bolsa:</a:t>
+            </a:r>
+            <a:r>
+              <a:rPr lang="pt-BR" sz="1800" b="0" dirty="0">
+                <a:solidFill>
+                  <a:srgbClr val="3A3A3A"/>
+                </a:solidFill>
+                <a:latin typeface="Montserrat"/>
+              </a:rPr>
+              <a:t> 1,94 [1,48; 2,40] em log-chance; p &lt; 0,001.</a:t>
+            </a:r>
+          </a:p>
+        </p:txBody>
+      </p:sp>
+      <p:sp>
+        <p:nvSpPr>
+          <p:cNvPr id="102" name="Linha"/>
+          <p:cNvSpPr/>
+          <p:nvPr/>
+        </p:nvSpPr>
+        <p:spPr>
+          <a:xfrm>
+            <a:off x="292608" y="5212080"/>
+            <a:ext cx="11594592" cy="420624"/>
+          </a:xfrm>
+          <a:prstGeom prst="rect">
+            <a:avLst/>
+          </a:prstGeom>
+          <a:noFill/>
+          <a:ln>
+            <a:noFill/>
+          </a:ln>
+        </p:spPr>
+        <p:txBody>
+          <a:bodyPr wrap="square" lIns="164592" tIns="18288" rIns="164592" bIns="18288" rtlCol="0" anchor="ctr">
+            <a:noAutofit/>
+          </a:bodyPr>
+          <a:lstStyle/>
+          <a:p>
+            <a:pPr marL="0" indent="0" algn="l">
+              <a:lnSpc>
+                <a:spcPct val="100000"/>
+              </a:lnSpc>
+              <a:spcBef>
+                <a:spcPts val="0"/>
+              </a:spcBef>
+              <a:spcAft>
+                <a:spcPts val="0"/>
+              </a:spcAft>
+              <a:buNone/>
+            </a:pPr>
+            <a:r>
+              <a:rPr lang="pt-BR" sz="1800" b="0" dirty="0">
+                <a:solidFill>
+                  <a:srgbClr val="3A3A3A"/>
+                </a:solidFill>
+                <a:latin typeface="Montserrat"/>
+              </a:rPr>
+              <a:t>Na UF de origem, chance 11,0 vezes maior; toda a bolsa: 1,57 (IC contém 1).</a:t>
+            </a:r>
+          </a:p>
+        </p:txBody>
+      </p:sp>
+      <p:sp>
+        <p:nvSpPr>
+          <p:cNvPr id="103" name="Cautela"/>
+          <p:cNvSpPr/>
+          <p:nvPr/>
+        </p:nvSpPr>
+        <p:spPr>
+          <a:xfrm>
+            <a:off x="292608" y="5687568"/>
+            <a:ext cx="11594592" cy="420624"/>
+          </a:xfrm>
+          <a:prstGeom prst="roundRect">
+            <a:avLst>
+              <a:gd name="adj" fmla="val 12000"/>
+            </a:avLst>
+          </a:prstGeom>
+          <a:solidFill>
+            <a:srgbClr val="E7F1EA"/>
+          </a:solidFill>
+          <a:ln>
+            <a:noFill/>
+          </a:ln>
+        </p:spPr>
+        <p:txBody>
+          <a:bodyPr wrap="square" lIns="164592" tIns="18288" rIns="164592" bIns="18288" rtlCol="0" anchor="ctr">
+            <a:noAutofit/>
+          </a:bodyPr>
+          <a:lstStyle/>
+          <a:p>
+            <a:pPr marL="0" indent="0" algn="l">
+              <a:lnSpc>
+                <a:spcPct val="100000"/>
+              </a:lnSpc>
+              <a:spcBef>
+                <a:spcPts val="0"/>
+              </a:spcBef>
+              <a:spcAft>
+                <a:spcPts val="0"/>
+              </a:spcAft>
+              <a:buNone/>
+            </a:pPr>
+            <a:r>
+              <a:rPr lang="pt-BR" sz="1800" b="1" dirty="0">
+                <a:solidFill>
+                  <a:srgbClr val="114719"/>
+                </a:solidFill>
+                <a:latin typeface="Montserrat"/>
+              </a:rPr>
+              <a:t>Origem é preferência revelada, não causa.</a:t>
+            </a:r>
+          </a:p>
+        </p:txBody>
+      </p:sp>
+      <p:pic>
+        <p:nvPicPr>
+          <p:cNvPr id="104" name="Figura" descr="Quanto a vaga na UF de origem e toda a diferença de bolsa (R$ 10 → 20 mil) multiplicam a chance de a vaga ser a 1ª opção, com IC 95%"/>
+          <p:cNvPicPr>
+            <a:picLocks noChangeAspect="1"/>
+          </p:cNvPicPr>
+          <p:nvPr/>
+        </p:nvPicPr>
+        <p:blipFill>
+          <a:blip r:embed="rId3"/>
+          <a:stretch>
+            <a:fillRect/>
+          </a:stretch>
+        </p:blipFill>
+        <p:spPr>
+          <a:xfrm>
+            <a:off x="292608" y="939156"/>
+            <a:ext cx="11594592" cy="3534937"/>
+          </a:xfrm>
+          <a:prstGeom prst="rect">
+            <a:avLst/>
+          </a:prstGeom>
+          <a:ln w="6350">
+            <a:solidFill>
+              <a:srgbClr val="DDE7DF"/>
+            </a:solidFill>
+          </a:ln>
+        </p:spPr>
+      </p:pic>
+      <p:sp>
+        <p:nvSpPr>
+          <p:cNvPr id="105" name="Fontes"/>
+          <p:cNvSpPr txBox="1"/>
+          <p:nvPr/>
+        </p:nvSpPr>
+        <p:spPr>
+          <a:xfrm>
+            <a:off x="292608" y="6181344"/>
+            <a:ext cx="11594592" cy="274320"/>
+          </a:xfrm>
+          <a:prstGeom prst="rect">
+            <a:avLst/>
+          </a:prstGeom>
+          <a:noFill/>
+          <a:ln>
+            <a:noFill/>
+          </a:ln>
+        </p:spPr>
+        <p:txBody>
+          <a:bodyPr wrap="square" lIns="0" tIns="0" rIns="0" bIns="0" rtlCol="0" anchor="b">
+            <a:noAutofit/>
+          </a:bodyPr>
+          <a:lstStyle/>
+          <a:p>
+            <a:pPr marL="0" indent="0" algn="l">
+              <a:lnSpc>
+                <a:spcPct val="95000"/>
+              </a:lnSpc>
+              <a:spcBef>
+                <a:spcPts val="0"/>
+              </a:spcBef>
+              <a:spcAft>
+                <a:spcPts val="0"/>
+              </a:spcAft>
+              <a:buNone/>
+            </a:pPr>
+            <a:r>
+              <a:rPr lang="pt-BR" sz="800" b="1" dirty="0">
+                <a:solidFill>
+                  <a:srgbClr val="6B6B6B"/>
+                </a:solidFill>
+                <a:latin typeface="Montserrat"/>
+              </a:rPr>
+              <a:t>Fontes: </a:t>
+            </a:r>
+            <a:r>
+              <a:rPr lang="pt-BR" sz="800" b="0" dirty="0">
+                <a:solidFill>
+                  <a:srgbClr val="6B6B6B"/>
+                </a:solidFill>
+                <a:latin typeface="Montserrat"/>
+              </a:rPr>
+              <a:t>output/rdd_bolsa/VC_estimativas.csv (adendo 52c; doc 57p; auditoria 41); P1h (protocolo 52b; doc 57i; auditoria 31); output/apresentacao_banca2/curto_origem_bolsa.png.</a:t>
+            </a:r>
+          </a:p>
+        </p:txBody>
+      </p:sp>
+    </p:spTree>
+  </p:cSld>
+  <p:clrMapOvr>
+    <a:masterClrMapping/>
+  </p:clrMapOvr>
+</p:sld>
+</file>
+
+<file path=ppt/slides/slide44.xml><?xml version="1.0" encoding="utf-8"?>
+<p:sld xmlns:a="http://schemas.openxmlformats.org/drawingml/2006/main" xmlns:r="http://schemas.openxmlformats.org/officeDocument/2006/relationships" xmlns:p="http://schemas.openxmlformats.org/presentationml/2006/main">
+  <p:cSld>
+    <p:spTree>
+      <p:nvGrpSpPr>
+        <p:cNvPr id="1" name=""/>
+        <p:cNvGrpSpPr/>
+        <p:nvPr/>
+      </p:nvGrpSpPr>
+      <p:grpSpPr>
+        <a:xfrm>
+          <a:off x="0" y="0"/>
+          <a:ext cx="0" cy="0"/>
+          <a:chOff x="0" y="0"/>
+          <a:chExt cx="0" cy="0"/>
+        </a:xfrm>
+      </p:grpSpPr>
+      <p:sp>
+        <p:nvSpPr>
+          <p:cNvPr id="2" name="Título"/>
+          <p:cNvSpPr>
+            <a:spLocks noGrp="1"/>
+          </p:cNvSpPr>
+          <p:nvPr>
+            <p:ph type="title"/>
+          </p:nvPr>
+        </p:nvSpPr>
+        <p:spPr/>
+        <p:txBody>
+          <a:bodyPr>
+            <a:normAutofit/>
+          </a:bodyPr>
+          <a:lstStyle/>
+          <a:p>
+            <a:pPr marL="0" indent="0" algn="l">
+              <a:lnSpc>
+                <a:spcPct val="104000"/>
+              </a:lnSpc>
+              <a:spcAft>
+                <a:spcPts val="0"/>
+              </a:spcAft>
+              <a:buNone/>
+            </a:pPr>
+            <a:r>
+              <a:rPr lang="pt-BR" sz="2400" b="1" dirty="0">
+                <a:solidFill>
+                  <a:srgbClr val="FFFFFF"/>
+                </a:solidFill>
+                <a:latin typeface="Montserrat"/>
+              </a:rPr>
+              <a:t>Dentro da mesma UF, a vaga de bolsa maior é preferida</a:t>
+            </a:r>
+          </a:p>
+        </p:txBody>
+      </p:sp>
+      <p:sp>
+        <p:nvSpPr>
+          <p:cNvPr id="3" name="Número da página"/>
+          <p:cNvSpPr>
+            <a:spLocks noGrp="1"/>
+          </p:cNvSpPr>
+          <p:nvPr>
+            <p:ph type="body" sz="quarter" idx="18"/>
+          </p:nvPr>
+        </p:nvSpPr>
+        <p:spPr>
+          <a:xfrm>
+            <a:off x="11706744" y="6457042"/>
+            <a:ext cx="492080" cy="400640"/>
+          </a:xfrm>
+        </p:spPr>
+        <p:txBody>
+          <a:bodyPr anchor="ctr">
+            <a:normAutofit/>
+          </a:bodyPr>
+          <a:lstStyle/>
+          <a:p>
+            <a:pPr algn="ctr"/>
+            <a:fld id="{B1A5E0C2-5F3A-4C7E-9D11-7A2E6C0F4B01}" type="slidenum">
+              <a:rPr lang="pt-BR" sz="1400" b="1">
+                <a:solidFill>
+                  <a:srgbClr val="BFBFBF"/>
+                </a:solidFill>
+                <a:latin typeface="Montserrat"/>
+              </a:rPr>
+              <a:t>‹#›</a:t>
+            </a:fld>
+            <a:endParaRPr lang="pt-BR" sz="1400" b="1">
+              <a:solidFill>
+                <a:srgbClr val="BFBFBF"/>
+              </a:solidFill>
+            </a:endParaRPr>
+          </a:p>
+        </p:txBody>
+      </p:sp>
+      <p:sp>
+        <p:nvSpPr>
+          <p:cNvPr id="4" name="Navegação do rodapé"/>
+          <p:cNvSpPr txBox="1"/>
+          <p:nvPr/>
+        </p:nvSpPr>
+        <p:spPr>
+          <a:xfrm>
+            <a:off x="196860" y="6639248"/>
+            <a:ext cx="9223026" cy="246221"/>
+          </a:xfrm>
+          <a:prstGeom prst="rect">
+            <a:avLst/>
+          </a:prstGeom>
+          <a:noFill/>
+        </p:spPr>
+        <p:txBody>
+          <a:bodyPr wrap="square" rtlCol="0">
+            <a:spAutoFit/>
+          </a:bodyPr>
+          <a:lstStyle/>
+          <a:p>
+            <a:r>
+              <a:rPr lang="pt-BR" sz="1000" dirty="0">
+                <a:latin typeface="Montserrat"/>
+              </a:rPr>
+              <a:t xml:space="preserve">Hipótese  |  </a:t>
+            </a:r>
+            <a:r>
+              <a:rPr lang="pt-BR" sz="1000" dirty="0">
+                <a:latin typeface="Montserrat"/>
+              </a:rPr>
+              <a:t xml:space="preserve">Dados  |  </a:t>
+            </a:r>
+            <a:r>
+              <a:rPr lang="pt-BR" sz="1000" dirty="0">
+                <a:latin typeface="Montserrat"/>
+              </a:rPr>
+              <a:t xml:space="preserve">Análise descritiva  |  </a:t>
+            </a:r>
+            <a:r>
+              <a:rPr lang="pt-BR" sz="1000" dirty="0">
+                <a:latin typeface="Montserrat"/>
+              </a:rPr>
+              <a:t xml:space="preserve">Metodologia  |  </a:t>
+            </a:r>
+            <a:r>
+              <a:rPr lang="pt-BR" sz="1000" dirty="0">
+                <a:latin typeface="Montserrat"/>
+              </a:rPr>
+              <a:t xml:space="preserve">Identificação  |  </a:t>
+            </a:r>
+            <a:r>
+              <a:rPr lang="pt-BR" sz="1000" b="1" dirty="0">
+                <a:solidFill>
+                  <a:srgbClr val="114719"/>
+                </a:solidFill>
+                <a:latin typeface="Montserrat"/>
+              </a:rPr>
+              <a:t>Resultados</a:t>
+            </a:r>
+            <a:r>
+              <a:rPr lang="pt-BR" sz="1000" dirty="0">
+                <a:latin typeface="Montserrat"/>
+              </a:rPr>
+              <a:t xml:space="preserve">  |  </a:t>
+            </a:r>
+            <a:r>
+              <a:rPr lang="pt-BR" sz="1000" dirty="0">
+                <a:latin typeface="Montserrat"/>
+              </a:rPr>
+              <a:t xml:space="preserve">Robustez  |  </a:t>
+            </a:r>
+            <a:r>
+              <a:rPr lang="pt-BR" sz="1000" dirty="0">
+                <a:latin typeface="Montserrat"/>
+              </a:rPr>
+              <a:t xml:space="preserve">Discussão</a:t>
+            </a:r>
+          </a:p>
+        </p:txBody>
+      </p:sp>
+      <p:sp>
+        <p:nvSpPr>
+          <p:cNvPr id="101" name="Linha"/>
+          <p:cNvSpPr/>
+          <p:nvPr/>
+        </p:nvSpPr>
+        <p:spPr>
+          <a:xfrm>
+            <a:off x="292608" y="5212080"/>
+            <a:ext cx="11594592" cy="420624"/>
+          </a:xfrm>
+          <a:prstGeom prst="rect">
+            <a:avLst/>
+          </a:prstGeom>
+          <a:noFill/>
+          <a:ln>
+            <a:noFill/>
+          </a:ln>
+        </p:spPr>
+        <p:txBody>
+          <a:bodyPr wrap="square" lIns="164592" tIns="18288" rIns="164592" bIns="18288" rtlCol="0" anchor="ctr">
+            <a:noAutofit/>
+          </a:bodyPr>
+          <a:lstStyle/>
+          <a:p>
+            <a:pPr marL="0" indent="0" algn="l">
+              <a:lnSpc>
+                <a:spcPct val="100000"/>
+              </a:lnSpc>
+              <a:spcBef>
+                <a:spcPts val="0"/>
+              </a:spcBef>
+              <a:spcAft>
+                <a:spcPts val="0"/>
+              </a:spcAft>
+              <a:buNone/>
+            </a:pPr>
+            <a:r>
+              <a:rPr lang="pt-BR" sz="1800" b="0" dirty="0">
+                <a:solidFill>
+                  <a:srgbClr val="3A3A3A"/>
+                </a:solidFill>
+                <a:latin typeface="Montserrat"/>
+              </a:rPr>
+              <a:t>Na mesma UF, +R$ 5 mil: chance 1,47 vez maior; vale 75 km a menos.</a:t>
+            </a:r>
+          </a:p>
+        </p:txBody>
+      </p:sp>
+      <p:sp>
+        <p:nvSpPr>
+          <p:cNvPr id="102" name="Cautela"/>
+          <p:cNvSpPr/>
+          <p:nvPr/>
+        </p:nvSpPr>
+        <p:spPr>
+          <a:xfrm>
+            <a:off x="292608" y="5687568"/>
+            <a:ext cx="11594592" cy="420624"/>
+          </a:xfrm>
+          <a:prstGeom prst="roundRect">
+            <a:avLst>
+              <a:gd name="adj" fmla="val 12000"/>
+            </a:avLst>
+          </a:prstGeom>
+          <a:solidFill>
+            <a:srgbClr val="E7F1EA"/>
+          </a:solidFill>
+          <a:ln>
+            <a:noFill/>
+          </a:ln>
+        </p:spPr>
+        <p:txBody>
+          <a:bodyPr wrap="square" lIns="164592" tIns="18288" rIns="164592" bIns="18288" rtlCol="0" anchor="ctr">
+            <a:noAutofit/>
+          </a:bodyPr>
+          <a:lstStyle/>
+          <a:p>
+            <a:pPr marL="0" indent="0" algn="l">
+              <a:lnSpc>
+                <a:spcPct val="100000"/>
+              </a:lnSpc>
+              <a:spcBef>
+                <a:spcPts val="0"/>
+              </a:spcBef>
+              <a:spcAft>
+                <a:spcPts val="0"/>
+              </a:spcAft>
+              <a:buNone/>
+            </a:pPr>
+            <a:r>
+              <a:rPr lang="pt-BR" sz="1800" b="1" dirty="0">
+                <a:solidFill>
+                  <a:srgbClr val="114719"/>
+                </a:solidFill>
+                <a:latin typeface="Montserrat"/>
+              </a:rPr>
+              <a:t>Adendo pós-resultado; pré-registrado, sem fixar a UF: p 0,072.</a:t>
+            </a:r>
+          </a:p>
+        </p:txBody>
+      </p:sp>
+      <p:pic>
+        <p:nvPicPr>
+          <p:cNvPr id="103" name="Figura" descr="Razão de chances da 1ª opção por +R$ 5 mil comparando vagas da mesma UF, ciclos 1–3 e ciclo 2, com o modelo pré-registrado em cinza claro"/>
+          <p:cNvPicPr>
+            <a:picLocks noChangeAspect="1"/>
+          </p:cNvPicPr>
+          <p:nvPr/>
+        </p:nvPicPr>
+        <p:blipFill>
+          <a:blip r:embed="rId3"/>
+          <a:stretch>
+            <a:fillRect/>
+          </a:stretch>
+        </p:blipFill>
+        <p:spPr>
+          <a:xfrm>
+            <a:off x="292608" y="1294731"/>
+            <a:ext cx="11594592" cy="3299274"/>
+          </a:xfrm>
+          <a:prstGeom prst="rect">
+            <a:avLst/>
+          </a:prstGeom>
+          <a:ln w="6350">
+            <a:solidFill>
+              <a:srgbClr val="DDE7DF"/>
+            </a:solidFill>
+          </a:ln>
+        </p:spPr>
+      </p:pic>
+      <p:sp>
+        <p:nvSpPr>
+          <p:cNvPr id="104" name="Fontes"/>
+          <p:cNvSpPr txBox="1"/>
+          <p:nvPr/>
+        </p:nvSpPr>
+        <p:spPr>
+          <a:xfrm>
+            <a:off x="292608" y="6181344"/>
+            <a:ext cx="11594592" cy="274320"/>
+          </a:xfrm>
+          <a:prstGeom prst="rect">
+            <a:avLst/>
+          </a:prstGeom>
+          <a:noFill/>
+          <a:ln>
+            <a:noFill/>
+          </a:ln>
+        </p:spPr>
+        <p:txBody>
+          <a:bodyPr wrap="square" lIns="0" tIns="0" rIns="0" bIns="0" rtlCol="0" anchor="b">
+            <a:noAutofit/>
+          </a:bodyPr>
+          <a:lstStyle/>
+          <a:p>
+            <a:pPr marL="0" indent="0" algn="l">
+              <a:lnSpc>
+                <a:spcPct val="95000"/>
+              </a:lnSpc>
+              <a:spcBef>
+                <a:spcPts val="0"/>
+              </a:spcBef>
+              <a:spcAft>
+                <a:spcPts val="0"/>
+              </a:spcAft>
+              <a:buNone/>
+            </a:pPr>
+            <a:r>
+              <a:rPr lang="pt-BR" sz="800" b="1" dirty="0">
+                <a:solidFill>
+                  <a:srgbClr val="6B6B6B"/>
+                </a:solidFill>
+                <a:latin typeface="Montserrat"/>
+              </a:rPr>
+              <a:t>Fontes: </a:t>
+            </a:r>
+            <a:r>
+              <a:rPr lang="pt-BR" sz="800" b="0" dirty="0">
+                <a:solidFill>
+                  <a:srgbClr val="6B6B6B"/>
+                </a:solidFill>
+                <a:latin typeface="Montserrat"/>
+              </a:rPr>
+              <a:t>output/rdd_bolsa/VL_estimativas.csv (adendo 52e; doc 57x; auditoria 48); output/apresentacao_banca2/curto_bolsa_mesma_uf.png.</a:t>
+            </a:r>
+          </a:p>
+        </p:txBody>
+      </p:sp>
+    </p:spTree>
+  </p:cSld>
+  <p:clrMapOvr>
+    <a:masterClrMapping/>
+  </p:clrMapOvr>
+</p:sld>
+</file>
+
+<file path=ppt/slides/slide45.xml><?xml version="1.0" encoding="utf-8"?>
+<p:sld xmlns:a="http://schemas.openxmlformats.org/drawingml/2006/main" xmlns:r="http://schemas.openxmlformats.org/officeDocument/2006/relationships" xmlns:p="http://schemas.openxmlformats.org/presentationml/2006/main">
+  <p:cSld>
+    <p:spTree>
+      <p:nvGrpSpPr>
+        <p:cNvPr id="1" name=""/>
+        <p:cNvGrpSpPr/>
+        <p:nvPr/>
+      </p:nvGrpSpPr>
+      <p:grpSpPr>
+        <a:xfrm>
+          <a:off x="0" y="0"/>
+          <a:ext cx="0" cy="0"/>
+          <a:chOff x="0" y="0"/>
+          <a:chExt cx="0" cy="0"/>
+        </a:xfrm>
+      </p:grpSpPr>
+      <p:sp>
+        <p:nvSpPr>
+          <p:cNvPr id="2" name="Título"/>
+          <p:cNvSpPr>
+            <a:spLocks noGrp="1"/>
+          </p:cNvSpPr>
+          <p:nvPr>
+            <p:ph type="title"/>
+          </p:nvPr>
+        </p:nvSpPr>
+        <p:spPr/>
+        <p:txBody>
+          <a:bodyPr>
+            <a:normAutofit/>
+          </a:bodyPr>
+          <a:lstStyle/>
+          <a:p>
+            <a:pPr marL="0" indent="0" algn="l">
+              <a:lnSpc>
+                <a:spcPct val="104000"/>
+              </a:lnSpc>
+              <a:spcAft>
+                <a:spcPts val="0"/>
+              </a:spcAft>
+              <a:buNone/>
+            </a:pPr>
+            <a:r>
+              <a:rPr lang="pt-BR" sz="2400" b="1" dirty="0">
+                <a:solidFill>
+                  <a:srgbClr val="FFFFFF"/>
+                </a:solidFill>
+                <a:latin typeface="Montserrat"/>
+              </a:rPr>
+              <a:t>Robustez: o que se mantém e o que não se mantém</a:t>
+            </a:r>
+          </a:p>
+        </p:txBody>
+      </p:sp>
+      <p:sp>
+        <p:nvSpPr>
+          <p:cNvPr id="3" name="Número da página"/>
+          <p:cNvSpPr>
+            <a:spLocks noGrp="1"/>
+          </p:cNvSpPr>
+          <p:nvPr>
+            <p:ph type="body" sz="quarter" idx="18"/>
+          </p:nvPr>
+        </p:nvSpPr>
+        <p:spPr>
+          <a:xfrm>
+            <a:off x="11706744" y="6457042"/>
+            <a:ext cx="492080" cy="400640"/>
+          </a:xfrm>
+        </p:spPr>
+        <p:txBody>
+          <a:bodyPr anchor="ctr">
+            <a:normAutofit/>
+          </a:bodyPr>
+          <a:lstStyle/>
+          <a:p>
+            <a:pPr algn="ctr"/>
+            <a:fld id="{B1A5E0C2-5F3A-4C7E-9D11-7A2E6C0F4B01}" type="slidenum">
+              <a:rPr lang="pt-BR" sz="1400" b="1">
+                <a:solidFill>
+                  <a:srgbClr val="BFBFBF"/>
+                </a:solidFill>
+                <a:latin typeface="Montserrat"/>
+              </a:rPr>
+              <a:t>‹#›</a:t>
+            </a:fld>
+            <a:endParaRPr lang="pt-BR" sz="1400" b="1">
+              <a:solidFill>
+                <a:srgbClr val="BFBFBF"/>
+              </a:solidFill>
+            </a:endParaRPr>
+          </a:p>
+        </p:txBody>
+      </p:sp>
+      <p:sp>
+        <p:nvSpPr>
+          <p:cNvPr id="4" name="Navegação do rodapé"/>
+          <p:cNvSpPr txBox="1"/>
+          <p:nvPr/>
+        </p:nvSpPr>
+        <p:spPr>
+          <a:xfrm>
+            <a:off x="196860" y="6639248"/>
+            <a:ext cx="9223026" cy="246221"/>
+          </a:xfrm>
+          <a:prstGeom prst="rect">
+            <a:avLst/>
+          </a:prstGeom>
+          <a:noFill/>
+        </p:spPr>
+        <p:txBody>
+          <a:bodyPr wrap="square" rtlCol="0">
+            <a:spAutoFit/>
+          </a:bodyPr>
+          <a:lstStyle/>
+          <a:p>
+            <a:r>
+              <a:rPr lang="pt-BR" sz="1000" dirty="0">
+                <a:latin typeface="Montserrat"/>
+              </a:rPr>
+              <a:t xml:space="preserve">Hipótese  |  </a:t>
+            </a:r>
+            <a:r>
+              <a:rPr lang="pt-BR" sz="1000" dirty="0">
+                <a:latin typeface="Montserrat"/>
+              </a:rPr>
+              <a:t xml:space="preserve">Dados  |  </a:t>
+            </a:r>
+            <a:r>
+              <a:rPr lang="pt-BR" sz="1000" dirty="0">
+                <a:latin typeface="Montserrat"/>
+              </a:rPr>
+              <a:t xml:space="preserve">Análise descritiva  |  </a:t>
+            </a:r>
+            <a:r>
+              <a:rPr lang="pt-BR" sz="1000" dirty="0">
+                <a:latin typeface="Montserrat"/>
+              </a:rPr>
+              <a:t xml:space="preserve">Metodologia  |  </a:t>
+            </a:r>
+            <a:r>
+              <a:rPr lang="pt-BR" sz="1000" dirty="0">
+                <a:latin typeface="Montserrat"/>
+              </a:rPr>
+              <a:t xml:space="preserve">Identificação  |  </a:t>
+            </a:r>
+            <a:r>
+              <a:rPr lang="pt-BR" sz="1000" dirty="0">
+                <a:latin typeface="Montserrat"/>
+              </a:rPr>
+              <a:t xml:space="preserve">Resultados  |  </a:t>
+            </a:r>
+            <a:r>
+              <a:rPr lang="pt-BR" sz="1000" b="1" dirty="0">
+                <a:solidFill>
+                  <a:srgbClr val="114719"/>
+                </a:solidFill>
+                <a:latin typeface="Montserrat"/>
+              </a:rPr>
+              <a:t>Robustez</a:t>
+            </a:r>
+            <a:r>
+              <a:rPr lang="pt-BR" sz="1000" dirty="0">
+                <a:latin typeface="Montserrat"/>
+              </a:rPr>
+              <a:t xml:space="preserve">  |  </a:t>
+            </a:r>
+            <a:r>
+              <a:rPr lang="pt-BR" sz="1000" dirty="0">
+                <a:latin typeface="Montserrat"/>
+              </a:rPr>
+              <a:t xml:space="preserve">Discussão</a:t>
+            </a:r>
+          </a:p>
+        </p:txBody>
+      </p:sp>
+      <p:sp>
+        <p:nvSpPr>
+          <p:cNvPr id="101" name="Linha"/>
+          <p:cNvSpPr/>
+          <p:nvPr/>
+        </p:nvSpPr>
+        <p:spPr>
+          <a:xfrm>
+            <a:off x="292608" y="4736592"/>
+            <a:ext cx="11594592" cy="420624"/>
+          </a:xfrm>
+          <a:prstGeom prst="rect">
+            <a:avLst/>
+          </a:prstGeom>
+          <a:noFill/>
+          <a:ln>
+            <a:noFill/>
+          </a:ln>
+        </p:spPr>
+        <p:txBody>
+          <a:bodyPr wrap="square" lIns="164592" tIns="18288" rIns="164592" bIns="18288" rtlCol="0" anchor="ctr">
+            <a:noAutofit/>
+          </a:bodyPr>
+          <a:lstStyle/>
+          <a:p>
+            <a:pPr marL="0" indent="0" algn="l">
+              <a:lnSpc>
+                <a:spcPct val="100000"/>
+              </a:lnSpc>
+              <a:spcBef>
+                <a:spcPts val="0"/>
+              </a:spcBef>
+              <a:spcAft>
+                <a:spcPts val="0"/>
+              </a:spcAft>
+              <a:buNone/>
+            </a:pPr>
+            <a:r>
+              <a:rPr lang="pt-BR" sz="1800" b="1" dirty="0">
+                <a:solidFill>
+                  <a:srgbClr val="114719"/>
+                </a:solidFill>
+                <a:latin typeface="Montserrat"/>
+              </a:rPr>
+              <a:t>Mantém:</a:t>
+            </a:r>
+            <a:r>
+              <a:rPr lang="pt-BR" sz="1800" b="0" dirty="0">
+                <a:solidFill>
+                  <a:srgbClr val="3A3A3A"/>
+                </a:solidFill>
+                <a:latin typeface="Montserrat"/>
+              </a:rPr>
+              <a:t> a origem pesa mais que a bolsa nos três ciclos.</a:t>
+            </a:r>
+          </a:p>
+        </p:txBody>
+      </p:sp>
+      <p:sp>
+        <p:nvSpPr>
+          <p:cNvPr id="102" name="Linha"/>
+          <p:cNvSpPr/>
+          <p:nvPr/>
+        </p:nvSpPr>
+        <p:spPr>
+          <a:xfrm>
+            <a:off x="292608" y="5212080"/>
+            <a:ext cx="11594592" cy="420624"/>
+          </a:xfrm>
+          <a:prstGeom prst="rect">
+            <a:avLst/>
+          </a:prstGeom>
+          <a:noFill/>
+          <a:ln>
+            <a:noFill/>
+          </a:ln>
+        </p:spPr>
+        <p:txBody>
+          <a:bodyPr wrap="square" lIns="164592" tIns="18288" rIns="164592" bIns="18288" rtlCol="0" anchor="ctr">
+            <a:noAutofit/>
+          </a:bodyPr>
+          <a:lstStyle/>
+          <a:p>
+            <a:pPr marL="0" indent="0" algn="l">
+              <a:lnSpc>
+                <a:spcPct val="100000"/>
+              </a:lnSpc>
+              <a:spcBef>
+                <a:spcPts val="0"/>
+              </a:spcBef>
+              <a:spcAft>
+                <a:spcPts val="0"/>
+              </a:spcAft>
+              <a:buNone/>
+            </a:pPr>
+            <a:r>
+              <a:rPr lang="pt-BR" sz="1800" b="1" dirty="0">
+                <a:solidFill>
+                  <a:srgbClr val="114719"/>
+                </a:solidFill>
+                <a:latin typeface="Montserrat"/>
+              </a:rPr>
+              <a:t>Não se mantém:</a:t>
+            </a:r>
+            <a:r>
+              <a:rPr lang="pt-BR" sz="1800" b="0" dirty="0">
+                <a:solidFill>
+                  <a:srgbClr val="3A3A3A"/>
+                </a:solidFill>
+                <a:latin typeface="Montserrat"/>
+              </a:rPr>
+              <a:t> peso da bolsa: forte só no ciclo 2; perto do corte, inconclusivo.</a:t>
+            </a:r>
+          </a:p>
+        </p:txBody>
+      </p:sp>
+      <p:sp>
+        <p:nvSpPr>
+          <p:cNvPr id="103" name="Cautela"/>
+          <p:cNvSpPr/>
+          <p:nvPr/>
+        </p:nvSpPr>
+        <p:spPr>
+          <a:xfrm>
+            <a:off x="292608" y="5687568"/>
+            <a:ext cx="11594592" cy="420624"/>
+          </a:xfrm>
+          <a:prstGeom prst="roundRect">
+            <a:avLst>
+              <a:gd name="adj" fmla="val 12000"/>
+            </a:avLst>
+          </a:prstGeom>
+          <a:solidFill>
+            <a:srgbClr val="E7F1EA"/>
+          </a:solidFill>
+          <a:ln>
+            <a:noFill/>
+          </a:ln>
+        </p:spPr>
+        <p:txBody>
+          <a:bodyPr wrap="square" lIns="164592" tIns="18288" rIns="164592" bIns="18288" rtlCol="0" anchor="ctr">
+            <a:noAutofit/>
+          </a:bodyPr>
+          <a:lstStyle/>
+          <a:p>
+            <a:pPr marL="0" indent="0" algn="l">
+              <a:lnSpc>
+                <a:spcPct val="100000"/>
+              </a:lnSpc>
+              <a:spcBef>
+                <a:spcPts val="0"/>
+              </a:spcBef>
+              <a:spcAft>
+                <a:spcPts val="0"/>
+              </a:spcAft>
+              <a:buNone/>
+            </a:pPr>
+            <a:r>
+              <a:rPr lang="pt-BR" sz="1800" b="1" dirty="0">
+                <a:solidFill>
+                  <a:srgbClr val="114719"/>
+                </a:solidFill>
+                <a:latin typeface="Montserrat"/>
+              </a:rPr>
+              <a:t>Pré-registrado: IC contém 1.</a:t>
+            </a:r>
+          </a:p>
+        </p:txBody>
+      </p:sp>
+      <p:pic>
+        <p:nvPicPr>
+          <p:cNvPr id="104" name="Figura" descr="Robustez da escolha: razão de chances por +R$ 5 mil no modelo pré-registrado e por ciclo, com o quadro antigo do ciclo 2, com distância em log, com a região de saúde fixada e só perto do corte; à direita, origem menos toda a bolsa por ciclo"/>
+          <p:cNvPicPr>
+            <a:picLocks noChangeAspect="1"/>
+          </p:cNvPicPr>
+          <p:nvPr/>
+        </p:nvPicPr>
+        <p:blipFill>
+          <a:blip r:embed="rId3"/>
+          <a:stretch>
+            <a:fillRect/>
+          </a:stretch>
+        </p:blipFill>
+        <p:spPr>
+          <a:xfrm>
+            <a:off x="1633902" y="804672"/>
+            <a:ext cx="8912004" cy="3803904"/>
+          </a:xfrm>
+          <a:prstGeom prst="rect">
+            <a:avLst/>
+          </a:prstGeom>
+          <a:ln w="6350">
+            <a:solidFill>
+              <a:srgbClr val="DDE7DF"/>
+            </a:solidFill>
+          </a:ln>
+        </p:spPr>
+      </p:pic>
+      <p:sp>
+        <p:nvSpPr>
+          <p:cNvPr id="105" name="Fontes"/>
+          <p:cNvSpPr txBox="1"/>
+          <p:nvPr/>
+        </p:nvSpPr>
+        <p:spPr>
+          <a:xfrm>
+            <a:off x="292608" y="6181344"/>
+            <a:ext cx="11594592" cy="274320"/>
+          </a:xfrm>
+          <a:prstGeom prst="rect">
+            <a:avLst/>
+          </a:prstGeom>
+          <a:noFill/>
+          <a:ln>
+            <a:noFill/>
+          </a:ln>
+        </p:spPr>
+        <p:txBody>
+          <a:bodyPr wrap="square" lIns="0" tIns="0" rIns="0" bIns="0" rtlCol="0" anchor="b">
+            <a:noAutofit/>
+          </a:bodyPr>
+          <a:lstStyle/>
+          <a:p>
+            <a:pPr marL="0" indent="0" algn="l">
+              <a:lnSpc>
+                <a:spcPct val="95000"/>
+              </a:lnSpc>
+              <a:spcBef>
+                <a:spcPts val="0"/>
+              </a:spcBef>
+              <a:spcAft>
+                <a:spcPts val="0"/>
+              </a:spcAft>
+              <a:buNone/>
+            </a:pPr>
+            <a:r>
+              <a:rPr lang="pt-BR" sz="800" b="1" dirty="0">
+                <a:solidFill>
+                  <a:srgbClr val="6B6B6B"/>
+                </a:solidFill>
+                <a:latin typeface="Montserrat"/>
+              </a:rPr>
+              <a:t>Fontes: </a:t>
+            </a:r>
+            <a:r>
+              <a:rPr lang="pt-BR" sz="800" b="0" dirty="0">
+                <a:solidFill>
+                  <a:srgbClr val="6B6B6B"/>
+                </a:solidFill>
+                <a:latin typeface="Montserrat"/>
+              </a:rPr>
+              <a:t>output/rdd_bolsa/VC_estimativas.csv (adendo 52c; doc 57p; auditoria 41); VL_estimativas.csv (adendo 52e; doc 57x; auditoria 48); doc 57v (adendo 52d; auditoria 46).</a:t>
+            </a:r>
+          </a:p>
+        </p:txBody>
+      </p:sp>
+    </p:spTree>
+  </p:cSld>
+  <p:clrMapOvr>
+    <a:masterClrMapping/>
+  </p:clrMapOvr>
+</p:sld>
+</file>
+
+<file path=ppt/slides/slide46.xml><?xml version="1.0" encoding="utf-8"?>
+<p:sld xmlns:a="http://schemas.openxmlformats.org/drawingml/2006/main" xmlns:r="http://schemas.openxmlformats.org/officeDocument/2006/relationships" xmlns:p="http://schemas.openxmlformats.org/presentationml/2006/main">
+  <p:cSld>
+    <p:spTree>
+      <p:nvGrpSpPr>
+        <p:cNvPr id="1" name=""/>
+        <p:cNvGrpSpPr/>
+        <p:nvPr/>
+      </p:nvGrpSpPr>
+      <p:grpSpPr>
+        <a:xfrm>
+          <a:off x="0" y="0"/>
+          <a:ext cx="0" cy="0"/>
+          <a:chOff x="0" y="0"/>
+          <a:chExt cx="0" cy="0"/>
+        </a:xfrm>
+      </p:grpSpPr>
+      <p:sp>
+        <p:nvSpPr>
+          <p:cNvPr id="2" name="Título"/>
+          <p:cNvSpPr>
+            <a:spLocks noGrp="1"/>
+          </p:cNvSpPr>
+          <p:nvPr>
+            <p:ph type="title"/>
+          </p:nvPr>
+        </p:nvSpPr>
+        <p:spPr/>
+        <p:txBody>
+          <a:bodyPr>
+            <a:normAutofit/>
+          </a:bodyPr>
+          <a:lstStyle/>
+          <a:p>
+            <a:pPr marL="0" indent="0" algn="l">
+              <a:lnSpc>
+                <a:spcPct val="104000"/>
+              </a:lnSpc>
+              <a:spcAft>
+                <a:spcPts val="0"/>
+              </a:spcAft>
+              <a:buNone/>
+            </a:pPr>
+            <a:r>
+              <a:rPr lang="pt-BR" sz="2400" b="1" dirty="0">
+                <a:solidFill>
+                  <a:srgbClr val="FFFFFF"/>
+                </a:solidFill>
+                <a:latin typeface="Montserrat"/>
+              </a:rPr>
+              <a:t>Conclusão: a origem pesa mais que a bolsa? Sim</a:t>
+            </a:r>
+          </a:p>
+        </p:txBody>
+      </p:sp>
+      <p:sp>
+        <p:nvSpPr>
+          <p:cNvPr id="3" name="Número da página"/>
+          <p:cNvSpPr>
+            <a:spLocks noGrp="1"/>
+          </p:cNvSpPr>
+          <p:nvPr>
+            <p:ph type="body" sz="quarter" idx="18"/>
+          </p:nvPr>
+        </p:nvSpPr>
+        <p:spPr>
+          <a:xfrm>
+            <a:off x="11706744" y="6457042"/>
+            <a:ext cx="492080" cy="400640"/>
+          </a:xfrm>
+        </p:spPr>
+        <p:txBody>
+          <a:bodyPr anchor="ctr">
+            <a:normAutofit/>
+          </a:bodyPr>
+          <a:lstStyle/>
+          <a:p>
+            <a:pPr algn="ctr"/>
+            <a:fld id="{B1A5E0C2-5F3A-4C7E-9D11-7A2E6C0F4B01}" type="slidenum">
+              <a:rPr lang="pt-BR" sz="1400" b="1">
+                <a:solidFill>
+                  <a:srgbClr val="BFBFBF"/>
+                </a:solidFill>
+                <a:latin typeface="Montserrat"/>
+              </a:rPr>
+              <a:t>‹#›</a:t>
+            </a:fld>
+            <a:endParaRPr lang="pt-BR" sz="1400" b="1">
+              <a:solidFill>
+                <a:srgbClr val="BFBFBF"/>
+              </a:solidFill>
+            </a:endParaRPr>
+          </a:p>
+        </p:txBody>
+      </p:sp>
+      <p:sp>
+        <p:nvSpPr>
+          <p:cNvPr id="4" name="Navegação do rodapé"/>
+          <p:cNvSpPr txBox="1"/>
+          <p:nvPr/>
+        </p:nvSpPr>
+        <p:spPr>
+          <a:xfrm>
+            <a:off x="196860" y="6639248"/>
+            <a:ext cx="9223026" cy="246221"/>
+          </a:xfrm>
+          <a:prstGeom prst="rect">
+            <a:avLst/>
+          </a:prstGeom>
+          <a:noFill/>
+        </p:spPr>
+        <p:txBody>
+          <a:bodyPr wrap="square" rtlCol="0">
+            <a:spAutoFit/>
+          </a:bodyPr>
+          <a:lstStyle/>
+          <a:p>
+            <a:r>
+              <a:rPr lang="pt-BR" sz="1000" dirty="0">
+                <a:latin typeface="Montserrat"/>
+              </a:rPr>
+              <a:t xml:space="preserve">Hipótese  |  </a:t>
+            </a:r>
+            <a:r>
+              <a:rPr lang="pt-BR" sz="1000" dirty="0">
+                <a:latin typeface="Montserrat"/>
+              </a:rPr>
+              <a:t xml:space="preserve">Dados  |  </a:t>
+            </a:r>
+            <a:r>
+              <a:rPr lang="pt-BR" sz="1000" dirty="0">
+                <a:latin typeface="Montserrat"/>
+              </a:rPr>
+              <a:t xml:space="preserve">Análise descritiva  |  </a:t>
+            </a:r>
+            <a:r>
+              <a:rPr lang="pt-BR" sz="1000" dirty="0">
+                <a:latin typeface="Montserrat"/>
+              </a:rPr>
+              <a:t xml:space="preserve">Metodologia  |  </a:t>
+            </a:r>
+            <a:r>
+              <a:rPr lang="pt-BR" sz="1000" dirty="0">
+                <a:latin typeface="Montserrat"/>
+              </a:rPr>
+              <a:t xml:space="preserve">Identificação  |  </a:t>
+            </a:r>
+            <a:r>
+              <a:rPr lang="pt-BR" sz="1000" dirty="0">
+                <a:latin typeface="Montserrat"/>
+              </a:rPr>
+              <a:t xml:space="preserve">Resultados  |  </a:t>
+            </a:r>
+            <a:r>
+              <a:rPr lang="pt-BR" sz="1000" dirty="0">
+                <a:latin typeface="Montserrat"/>
+              </a:rPr>
+              <a:t xml:space="preserve">Robustez  |  </a:t>
+            </a:r>
+            <a:r>
+              <a:rPr lang="pt-BR" sz="1000" b="1" dirty="0">
+                <a:solidFill>
+                  <a:srgbClr val="114719"/>
+                </a:solidFill>
+                <a:latin typeface="Montserrat"/>
+              </a:rPr>
+              <a:t>Discussão</a:t>
+            </a:r>
+            <a:r>
+              <a:rPr lang="pt-BR" sz="1000" dirty="0">
+                <a:latin typeface="Montserrat"/>
+              </a:rPr>
+              <a:t xml:space="preserve"/>
+            </a:r>
+          </a:p>
+        </p:txBody>
+      </p:sp>
+      <p:sp>
+        <p:nvSpPr>
+          <p:cNvPr id="101" name="Rótulo"/>
+          <p:cNvSpPr/>
+          <p:nvPr/>
+        </p:nvSpPr>
+        <p:spPr>
+          <a:xfrm>
+            <a:off x="292608" y="896112"/>
+            <a:ext cx="1554480" cy="1597152"/>
+          </a:xfrm>
+          <a:prstGeom prst="roundRect">
+            <a:avLst>
+              <a:gd name="adj" fmla="val 10000"/>
+            </a:avLst>
+          </a:prstGeom>
+          <a:solidFill>
+            <a:srgbClr val="114719"/>
+          </a:solidFill>
+          <a:ln>
+            <a:noFill/>
+          </a:ln>
+        </p:spPr>
+        <p:txBody>
+          <a:bodyPr wrap="square" lIns="73152" tIns="45720" rIns="73152" bIns="45720" rtlCol="0" anchor="ctr">
+            <a:noAutofit/>
+          </a:bodyPr>
+          <a:lstStyle/>
+          <a:p>
+            <a:pPr marL="0" indent="0" algn="ctr">
+              <a:lnSpc>
+                <a:spcPct val="100000"/>
+              </a:lnSpc>
+              <a:spcBef>
+                <a:spcPts val="0"/>
+              </a:spcBef>
+              <a:spcAft>
+                <a:spcPts val="0"/>
+              </a:spcAft>
+              <a:buNone/>
+            </a:pPr>
+            <a:r>
+              <a:rPr lang="pt-BR" sz="2400" b="1" dirty="0">
+                <a:solidFill>
+                  <a:srgbClr val="FFFFFF"/>
+                </a:solidFill>
+                <a:latin typeface="Montserrat"/>
+              </a:rPr>
+              <a:t>Origem</a:t>
+            </a:r>
+          </a:p>
+        </p:txBody>
+      </p:sp>
+      <p:sp>
+        <p:nvSpPr>
+          <p:cNvPr id="102" name="Item"/>
+          <p:cNvSpPr/>
+          <p:nvPr/>
+        </p:nvSpPr>
+        <p:spPr>
+          <a:xfrm>
+            <a:off x="1984248" y="896112"/>
+            <a:ext cx="9902952" cy="1597152"/>
+          </a:xfrm>
+          <a:prstGeom prst="roundRect">
+            <a:avLst>
+              <a:gd name="adj" fmla="val 6000"/>
+            </a:avLst>
+          </a:prstGeom>
+          <a:solidFill>
+            <a:srgbClr val="F4F8F5"/>
+          </a:solidFill>
+          <a:ln w="12700">
+            <a:solidFill>
+              <a:srgbClr val="056429"/>
+            </a:solidFill>
+          </a:ln>
+        </p:spPr>
+        <p:txBody>
+          <a:bodyPr wrap="square" lIns="228600" tIns="36576" rIns="228600" bIns="36576" rtlCol="0" anchor="ctr">
+            <a:noAutofit/>
+          </a:bodyPr>
+          <a:lstStyle/>
+          <a:p>
+            <a:pPr marL="0" indent="0" algn="l">
+              <a:lnSpc>
+                <a:spcPct val="102000"/>
+              </a:lnSpc>
+              <a:spcBef>
+                <a:spcPts val="0"/>
+              </a:spcBef>
+              <a:spcAft>
+                <a:spcPts val="0"/>
+              </a:spcAft>
+              <a:buNone/>
+            </a:pPr>
+            <a:r>
+              <a:rPr lang="pt-BR" sz="2400" b="0" dirty="0">
+                <a:solidFill>
+                  <a:srgbClr val="3A3A3A"/>
+                </a:solidFill>
+                <a:latin typeface="Montserrat"/>
+              </a:rPr>
+              <a:t>pesa mais que toda a bolsa, nos três ciclos</a:t>
+            </a:r>
+          </a:p>
+        </p:txBody>
+      </p:sp>
+      <p:sp>
+        <p:nvSpPr>
+          <p:cNvPr id="103" name="Rótulo"/>
+          <p:cNvSpPr/>
+          <p:nvPr/>
+        </p:nvSpPr>
+        <p:spPr>
+          <a:xfrm>
+            <a:off x="292608" y="2694432"/>
+            <a:ext cx="1554480" cy="1597152"/>
+          </a:xfrm>
+          <a:prstGeom prst="roundRect">
+            <a:avLst>
+              <a:gd name="adj" fmla="val 10000"/>
+            </a:avLst>
+          </a:prstGeom>
+          <a:solidFill>
+            <a:srgbClr val="114719"/>
+          </a:solidFill>
+          <a:ln>
+            <a:noFill/>
+          </a:ln>
+        </p:spPr>
+        <p:txBody>
+          <a:bodyPr wrap="square" lIns="73152" tIns="45720" rIns="73152" bIns="45720" rtlCol="0" anchor="ctr">
+            <a:noAutofit/>
+          </a:bodyPr>
+          <a:lstStyle/>
+          <a:p>
+            <a:pPr marL="0" indent="0" algn="ctr">
+              <a:lnSpc>
+                <a:spcPct val="100000"/>
+              </a:lnSpc>
+              <a:spcBef>
+                <a:spcPts val="0"/>
+              </a:spcBef>
+              <a:spcAft>
+                <a:spcPts val="0"/>
+              </a:spcAft>
+              <a:buNone/>
+            </a:pPr>
+            <a:r>
+              <a:rPr lang="pt-BR" sz="2400" b="1" dirty="0">
+                <a:solidFill>
+                  <a:srgbClr val="FFFFFF"/>
+                </a:solidFill>
+                <a:latin typeface="Montserrat"/>
+              </a:rPr>
+              <a:t>Bolsa</a:t>
+            </a:r>
+          </a:p>
+        </p:txBody>
+      </p:sp>
+      <p:sp>
+        <p:nvSpPr>
+          <p:cNvPr id="104" name="Item"/>
+          <p:cNvSpPr/>
+          <p:nvPr/>
+        </p:nvSpPr>
+        <p:spPr>
+          <a:xfrm>
+            <a:off x="1984248" y="2694432"/>
+            <a:ext cx="9902952" cy="1597152"/>
+          </a:xfrm>
+          <a:prstGeom prst="roundRect">
+            <a:avLst>
+              <a:gd name="adj" fmla="val 6000"/>
+            </a:avLst>
+          </a:prstGeom>
+          <a:solidFill>
+            <a:srgbClr val="F4F8F5"/>
+          </a:solidFill>
+          <a:ln w="12700">
+            <a:solidFill>
+              <a:srgbClr val="056429"/>
+            </a:solidFill>
+          </a:ln>
+        </p:spPr>
+        <p:txBody>
+          <a:bodyPr wrap="square" lIns="228600" tIns="36576" rIns="228600" bIns="36576" rtlCol="0" anchor="ctr">
+            <a:noAutofit/>
+          </a:bodyPr>
+          <a:lstStyle/>
+          <a:p>
+            <a:pPr marL="0" indent="0" algn="l">
+              <a:lnSpc>
+                <a:spcPct val="102000"/>
+              </a:lnSpc>
+              <a:spcBef>
+                <a:spcPts val="0"/>
+              </a:spcBef>
+              <a:spcAft>
+                <a:spcPts val="0"/>
+              </a:spcAft>
+              <a:buNone/>
+            </a:pPr>
+            <a:r>
+              <a:rPr lang="pt-BR" sz="2400" b="0" dirty="0">
+                <a:solidFill>
+                  <a:srgbClr val="3A3A3A"/>
+                </a:solidFill>
+                <a:latin typeface="Montserrat"/>
+              </a:rPr>
+              <a:t>muda qual vaga, na mesma UF (adendo)</a:t>
+            </a:r>
+          </a:p>
+        </p:txBody>
+      </p:sp>
+      <p:sp>
+        <p:nvSpPr>
+          <p:cNvPr id="105" name="Rótulo"/>
+          <p:cNvSpPr/>
+          <p:nvPr/>
+        </p:nvSpPr>
+        <p:spPr>
+          <a:xfrm>
+            <a:off x="292608" y="4492752"/>
+            <a:ext cx="1554480" cy="1597152"/>
+          </a:xfrm>
+          <a:prstGeom prst="roundRect">
+            <a:avLst>
+              <a:gd name="adj" fmla="val 10000"/>
+            </a:avLst>
+          </a:prstGeom>
+          <a:solidFill>
+            <a:srgbClr val="114719"/>
+          </a:solidFill>
+          <a:ln>
+            <a:noFill/>
+          </a:ln>
+        </p:spPr>
+        <p:txBody>
+          <a:bodyPr wrap="square" lIns="73152" tIns="45720" rIns="73152" bIns="45720" rtlCol="0" anchor="ctr">
+            <a:noAutofit/>
+          </a:bodyPr>
+          <a:lstStyle/>
+          <a:p>
+            <a:pPr marL="0" indent="0" algn="ctr">
+              <a:lnSpc>
+                <a:spcPct val="100000"/>
+              </a:lnSpc>
+              <a:spcBef>
+                <a:spcPts val="0"/>
+              </a:spcBef>
+              <a:spcAft>
+                <a:spcPts val="0"/>
+              </a:spcAft>
+              <a:buNone/>
+            </a:pPr>
+            <a:r>
+              <a:rPr lang="pt-BR" sz="2400" b="1" dirty="0">
+                <a:solidFill>
+                  <a:srgbClr val="FFFFFF"/>
+                </a:solidFill>
+                <a:latin typeface="Montserrat"/>
+              </a:rPr>
+              <a:t>Teoria</a:t>
+            </a:r>
+          </a:p>
+        </p:txBody>
+      </p:sp>
+      <p:sp>
+        <p:nvSpPr>
+          <p:cNvPr id="106" name="Item"/>
+          <p:cNvSpPr/>
+          <p:nvPr/>
+        </p:nvSpPr>
+        <p:spPr>
+          <a:xfrm>
+            <a:off x="1984248" y="4492752"/>
+            <a:ext cx="9902952" cy="1597152"/>
+          </a:xfrm>
+          <a:prstGeom prst="roundRect">
+            <a:avLst>
+              <a:gd name="adj" fmla="val 6000"/>
+            </a:avLst>
+          </a:prstGeom>
+          <a:solidFill>
+            <a:srgbClr val="F4F8F5"/>
+          </a:solidFill>
+          <a:ln w="12700">
+            <a:solidFill>
+              <a:srgbClr val="056429"/>
+            </a:solidFill>
+          </a:ln>
+        </p:spPr>
+        <p:txBody>
+          <a:bodyPr wrap="square" lIns="228600" tIns="36576" rIns="228600" bIns="36576" rtlCol="0" anchor="ctr">
+            <a:noAutofit/>
+          </a:bodyPr>
+          <a:lstStyle/>
+          <a:p>
+            <a:pPr marL="0" indent="0" algn="l">
+              <a:lnSpc>
+                <a:spcPct val="102000"/>
+              </a:lnSpc>
+              <a:spcBef>
+                <a:spcPts val="0"/>
+              </a:spcBef>
+              <a:spcAft>
+                <a:spcPts val="0"/>
+              </a:spcAft>
+              <a:buNone/>
+            </a:pPr>
+            <a:r>
+              <a:rPr lang="pt-BR" sz="2400" b="0" dirty="0">
+                <a:solidFill>
+                  <a:srgbClr val="3A3A3A"/>
+                </a:solidFill>
+                <a:latin typeface="Montserrat"/>
+              </a:rPr>
+              <a:t>os dados sugerem incentivo limitado (pacote do corte)</a:t>
+            </a:r>
+          </a:p>
+        </p:txBody>
+      </p:sp>
+      <p:sp>
+        <p:nvSpPr>
+          <p:cNvPr id="107" name="Fontes"/>
+          <p:cNvSpPr txBox="1"/>
+          <p:nvPr/>
+        </p:nvSpPr>
+        <p:spPr>
+          <a:xfrm>
+            <a:off x="292608" y="6181344"/>
+            <a:ext cx="11594592" cy="274320"/>
+          </a:xfrm>
+          <a:prstGeom prst="rect">
+            <a:avLst/>
+          </a:prstGeom>
+          <a:noFill/>
+          <a:ln>
+            <a:noFill/>
+          </a:ln>
+        </p:spPr>
+        <p:txBody>
+          <a:bodyPr wrap="square" lIns="0" tIns="0" rIns="0" bIns="0" rtlCol="0" anchor="b">
+            <a:noAutofit/>
+          </a:bodyPr>
+          <a:lstStyle/>
+          <a:p>
+            <a:pPr marL="0" indent="0" algn="l">
+              <a:lnSpc>
+                <a:spcPct val="95000"/>
+              </a:lnSpc>
+              <a:spcBef>
+                <a:spcPts val="0"/>
+              </a:spcBef>
+              <a:spcAft>
+                <a:spcPts val="0"/>
+              </a:spcAft>
+              <a:buNone/>
+            </a:pPr>
+            <a:r>
+              <a:rPr lang="pt-BR" sz="800" b="1" dirty="0">
+                <a:solidFill>
+                  <a:srgbClr val="6B6B6B"/>
+                </a:solidFill>
+                <a:latin typeface="Montserrat"/>
+              </a:rPr>
+              <a:t>Fontes: </a:t>
+            </a:r>
+            <a:r>
+              <a:rPr lang="pt-BR" sz="800" b="0" dirty="0">
+                <a:solidFill>
+                  <a:srgbClr val="6B6B6B"/>
+                </a:solidFill>
+                <a:latin typeface="Montserrat"/>
+              </a:rPr>
+              <a:t>modelo da banca 1; doc 07 da banca 2; docs 57i, 57p, 57x e 66 (§9 e §10); auditorias 18, 50 e 53.</a:t>
+            </a:r>
+          </a:p>
+        </p:txBody>
+      </p:sp>
+    </p:spTree>
+  </p:cSld>
+  <p:clrMapOvr>
+    <a:masterClrMapping/>
+  </p:clrMapOvr>
+</p:sld>
+</file>
+
+<file path=ppt/slides/slide47.xml><?xml version="1.0" encoding="utf-8"?>
+<p:sld xmlns:a="http://schemas.openxmlformats.org/drawingml/2006/main" xmlns:r="http://schemas.openxmlformats.org/officeDocument/2006/relationships" xmlns:p="http://schemas.openxmlformats.org/presentationml/2006/main">
+  <p:cSld>
+    <p:spTree>
+      <p:nvGrpSpPr>
+        <p:cNvPr id="1" name=""/>
+        <p:cNvGrpSpPr/>
+        <p:nvPr/>
+      </p:nvGrpSpPr>
+      <p:grpSpPr>
+        <a:xfrm>
+          <a:off x="0" y="0"/>
+          <a:ext cx="0" cy="0"/>
+          <a:chOff x="0" y="0"/>
+          <a:chExt cx="0" cy="0"/>
+        </a:xfrm>
+      </p:grpSpPr>
+      <p:sp>
+        <p:nvSpPr>
+          <p:cNvPr id="2" name="Título"/>
+          <p:cNvSpPr>
+            <a:spLocks noGrp="1"/>
+          </p:cNvSpPr>
+          <p:nvPr>
+            <p:ph type="title"/>
+          </p:nvPr>
+        </p:nvSpPr>
+        <p:spPr/>
+        <p:txBody>
+          <a:bodyPr>
+            <a:normAutofit/>
+          </a:bodyPr>
+          <a:lstStyle/>
+          <a:p>
+            <a:pPr marL="0" indent="0" algn="l">
+              <a:lnSpc>
+                <a:spcPct val="104000"/>
+              </a:lnSpc>
+              <a:spcAft>
+                <a:spcPts val="0"/>
+              </a:spcAft>
+              <a:buNone/>
+            </a:pPr>
+            <a:r>
+              <a:rPr lang="pt-BR" sz="2400" b="1" dirty="0">
+                <a:solidFill>
+                  <a:srgbClr val="FFFFFF"/>
+                </a:solidFill>
+                <a:latin typeface="Montserrat"/>
+              </a:rPr>
+              <a:t>Limitações e o que cada uma implica</a:t>
+            </a:r>
+          </a:p>
+        </p:txBody>
+      </p:sp>
+      <p:sp>
+        <p:nvSpPr>
+          <p:cNvPr id="3" name="Número da página"/>
+          <p:cNvSpPr>
+            <a:spLocks noGrp="1"/>
+          </p:cNvSpPr>
+          <p:nvPr>
+            <p:ph type="body" sz="quarter" idx="18"/>
+          </p:nvPr>
+        </p:nvSpPr>
+        <p:spPr>
+          <a:xfrm>
+            <a:off x="11706744" y="6457042"/>
+            <a:ext cx="492080" cy="400640"/>
+          </a:xfrm>
+        </p:spPr>
+        <p:txBody>
+          <a:bodyPr anchor="ctr">
+            <a:normAutofit/>
+          </a:bodyPr>
+          <a:lstStyle/>
+          <a:p>
+            <a:pPr algn="ctr"/>
+            <a:fld id="{B1A5E0C2-5F3A-4C7E-9D11-7A2E6C0F4B01}" type="slidenum">
+              <a:rPr lang="pt-BR" sz="1400" b="1">
+                <a:solidFill>
+                  <a:srgbClr val="BFBFBF"/>
+                </a:solidFill>
+                <a:latin typeface="Montserrat"/>
+              </a:rPr>
+              <a:t>‹#›</a:t>
+            </a:fld>
+            <a:endParaRPr lang="pt-BR" sz="1400" b="1">
+              <a:solidFill>
+                <a:srgbClr val="BFBFBF"/>
+              </a:solidFill>
+            </a:endParaRPr>
+          </a:p>
+        </p:txBody>
+      </p:sp>
+      <p:sp>
+        <p:nvSpPr>
+          <p:cNvPr id="4" name="Navegação do rodapé"/>
+          <p:cNvSpPr txBox="1"/>
+          <p:nvPr/>
+        </p:nvSpPr>
+        <p:spPr>
+          <a:xfrm>
+            <a:off x="196860" y="6639248"/>
+            <a:ext cx="9223026" cy="246221"/>
+          </a:xfrm>
+          <a:prstGeom prst="rect">
+            <a:avLst/>
+          </a:prstGeom>
+          <a:noFill/>
+        </p:spPr>
+        <p:txBody>
+          <a:bodyPr wrap="square" rtlCol="0">
+            <a:spAutoFit/>
+          </a:bodyPr>
+          <a:lstStyle/>
+          <a:p>
+            <a:r>
+              <a:rPr lang="pt-BR" sz="1000" dirty="0">
+                <a:latin typeface="Montserrat"/>
+              </a:rPr>
+              <a:t xml:space="preserve">Hipótese  |  </a:t>
+            </a:r>
+            <a:r>
+              <a:rPr lang="pt-BR" sz="1000" dirty="0">
+                <a:latin typeface="Montserrat"/>
+              </a:rPr>
+              <a:t xml:space="preserve">Dados  |  </a:t>
+            </a:r>
+            <a:r>
+              <a:rPr lang="pt-BR" sz="1000" dirty="0">
+                <a:latin typeface="Montserrat"/>
+              </a:rPr>
+              <a:t xml:space="preserve">Análise descritiva  |  </a:t>
+            </a:r>
+            <a:r>
+              <a:rPr lang="pt-BR" sz="1000" dirty="0">
+                <a:latin typeface="Montserrat"/>
+              </a:rPr>
+              <a:t xml:space="preserve">Metodologia  |  </a:t>
+            </a:r>
+            <a:r>
+              <a:rPr lang="pt-BR" sz="1000" dirty="0">
+                <a:latin typeface="Montserrat"/>
+              </a:rPr>
+              <a:t xml:space="preserve">Identificação  |  </a:t>
+            </a:r>
+            <a:r>
+              <a:rPr lang="pt-BR" sz="1000" dirty="0">
+                <a:latin typeface="Montserrat"/>
+              </a:rPr>
+              <a:t xml:space="preserve">Resultados  |  </a:t>
+            </a:r>
+            <a:r>
+              <a:rPr lang="pt-BR" sz="1000" dirty="0">
+                <a:latin typeface="Montserrat"/>
+              </a:rPr>
+              <a:t xml:space="preserve">Robustez  |  </a:t>
+            </a:r>
+            <a:r>
+              <a:rPr lang="pt-BR" sz="1000" b="1" dirty="0">
+                <a:solidFill>
+                  <a:srgbClr val="114719"/>
+                </a:solidFill>
+                <a:latin typeface="Montserrat"/>
+              </a:rPr>
+              <a:t>Discussão</a:t>
+            </a:r>
+            <a:r>
+              <a:rPr lang="pt-BR" sz="1000" dirty="0">
+                <a:latin typeface="Montserrat"/>
+              </a:rPr>
+              <a:t xml:space="preserve"/>
+            </a:r>
+          </a:p>
+        </p:txBody>
+      </p:sp>
+      <p:graphicFrame>
+        <p:nvGraphicFramePr>
+          <p:cNvPr id="101" name="Tabela"/>
+          <p:cNvGraphicFramePr>
+            <a:graphicFrameLocks noGrp="1"/>
+          </p:cNvGraphicFramePr>
+          <p:nvPr/>
+        </p:nvGraphicFramePr>
+        <p:xfrm>
+          <a:off x="292608" y="850392"/>
+          <a:ext cx="11594592" cy="5129784"/>
+        </p:xfrm>
+        <a:graphic>
+          <a:graphicData uri="http://schemas.openxmlformats.org/drawingml/2006/table">
+            <a:tbl>
+              <a:tblPr firstRow="1" bandRow="1"/>
+              <a:tblGrid>
+                <a:gridCol w="5732847"/>
+                <a:gridCol w="5861745"/>
+              </a:tblGrid>
+              <a:tr h="732826">
+                <a:tc>
+                  <a:txBody>
+                    <a:bodyPr/>
+                    <a:lstStyle/>
+                    <a:p>
+                      <a:pPr marL="0" indent="0" algn="l">
+                        <a:lnSpc>
+                          <a:spcPct val="100000"/>
+                        </a:lnSpc>
+                        <a:spcBef>
+                          <a:spcPts val="0"/>
+                        </a:spcBef>
+                        <a:spcAft>
+                          <a:spcPts val="0"/>
+                        </a:spcAft>
+                        <a:buNone/>
+                      </a:pPr>
+                      <a:r>
+                        <a:rPr lang="pt-BR" sz="2400" b="1" dirty="0">
+                          <a:solidFill>
+                            <a:srgbClr val="FFFFFF"/>
+                          </a:solidFill>
+                          <a:latin typeface="Montserrat"/>
+                        </a:rPr>
+                        <a:t>Limitação</a:t>
+                      </a:r>
+                    </a:p>
+                  </a:txBody>
+                  <a:tcPr marL="73152" marR="73152" marT="36576" marB="36576" anchor="ctr">
+                    <a:lnL w="6350">
+                      <a:solidFill>
+                        <a:srgbClr val="C9DED1"/>
+                      </a:solidFill>
+                    </a:lnL>
+                    <a:lnR w="6350">
+                      <a:solidFill>
+                        <a:srgbClr val="C9DED1"/>
+                      </a:solidFill>
+                    </a:lnR>
+                    <a:lnT w="6350">
+                      <a:solidFill>
+                        <a:srgbClr val="C9DED1"/>
+                      </a:solidFill>
+                    </a:lnT>
+                    <a:lnB w="6350">
+                      <a:solidFill>
+                        <a:srgbClr val="C9DED1"/>
+                      </a:solidFill>
+                    </a:lnB>
+                    <a:solidFill>
+                      <a:srgbClr val="114719"/>
+                    </a:solidFill>
+                  </a:tcPr>
+                </a:tc>
+                <a:tc>
+                  <a:txBody>
+                    <a:bodyPr/>
+                    <a:lstStyle/>
+                    <a:p>
+                      <a:pPr marL="0" indent="0" algn="l">
+                        <a:lnSpc>
+                          <a:spcPct val="100000"/>
+                        </a:lnSpc>
+                        <a:spcBef>
+                          <a:spcPts val="0"/>
+                        </a:spcBef>
+                        <a:spcAft>
+                          <a:spcPts val="0"/>
+                        </a:spcAft>
+                        <a:buNone/>
+                      </a:pPr>
+                      <a:r>
+                        <a:rPr lang="pt-BR" sz="2400" b="1" dirty="0">
+                          <a:solidFill>
+                            <a:srgbClr val="FFFFFF"/>
+                          </a:solidFill>
+                          <a:latin typeface="Montserrat"/>
+                        </a:rPr>
+                        <a:t>Implicação</a:t>
+                      </a:r>
+                    </a:p>
+                  </a:txBody>
+                  <a:tcPr marL="73152" marR="73152" marT="36576" marB="36576" anchor="ctr">
+                    <a:lnL w="6350">
+                      <a:solidFill>
+                        <a:srgbClr val="C9DED1"/>
+                      </a:solidFill>
+                    </a:lnL>
+                    <a:lnR w="6350">
+                      <a:solidFill>
+                        <a:srgbClr val="C9DED1"/>
+                      </a:solidFill>
+                    </a:lnR>
+                    <a:lnT w="6350">
+                      <a:solidFill>
+                        <a:srgbClr val="C9DED1"/>
+                      </a:solidFill>
+                    </a:lnT>
+                    <a:lnB w="6350">
+                      <a:solidFill>
+                        <a:srgbClr val="C9DED1"/>
+                      </a:solidFill>
+                    </a:lnB>
+                    <a:solidFill>
+                      <a:srgbClr val="114719"/>
+                    </a:solidFill>
+                  </a:tcPr>
+                </a:tc>
+              </a:tr>
+              <a:tr h="732826">
+                <a:tc>
+                  <a:txBody>
+                    <a:bodyPr/>
+                    <a:lstStyle/>
+                    <a:p>
+                      <a:pPr marL="0" indent="0" algn="l">
+                        <a:lnSpc>
+                          <a:spcPct val="100000"/>
+                        </a:lnSpc>
+                        <a:spcBef>
+                          <a:spcPts val="0"/>
+                        </a:spcBef>
+                        <a:spcAft>
+                          <a:spcPts val="0"/>
+                        </a:spcAft>
+                        <a:buNone/>
+                      </a:pPr>
+                      <a:r>
+                        <a:rPr lang="pt-BR" sz="2400" b="1" dirty="0">
+                          <a:solidFill>
+                            <a:srgbClr val="3A3A3A"/>
+                          </a:solidFill>
+                          <a:latin typeface="Montserrat"/>
+                        </a:rPr>
+                        <a:t>Pós-resultado</a:t>
+                      </a:r>
+                    </a:p>
+                  </a:txBody>
+                  <a:tcPr marL="73152" marR="73152" marT="36576" marB="36576" anchor="ctr">
+                    <a:lnL w="6350">
+                      <a:solidFill>
+                        <a:srgbClr val="C9DED1"/>
+                      </a:solidFill>
+                    </a:lnL>
+                    <a:lnR w="6350">
+                      <a:solidFill>
+                        <a:srgbClr val="C9DED1"/>
+                      </a:solidFill>
+                    </a:lnR>
+                    <a:lnT w="6350">
+                      <a:solidFill>
+                        <a:srgbClr val="C9DED1"/>
+                      </a:solidFill>
+                    </a:lnT>
+                    <a:lnB w="6350">
+                      <a:solidFill>
+                        <a:srgbClr val="C9DED1"/>
+                      </a:solidFill>
+                    </a:lnB>
+                    <a:solidFill>
+                      <a:srgbClr val="F3F7F3"/>
+                    </a:solidFill>
+                  </a:tcPr>
+                </a:tc>
+                <a:tc>
+                  <a:txBody>
+                    <a:bodyPr/>
+                    <a:lstStyle/>
+                    <a:p>
+                      <a:pPr marL="0" indent="0" algn="l">
+                        <a:lnSpc>
+                          <a:spcPct val="100000"/>
+                        </a:lnSpc>
+                        <a:spcBef>
+                          <a:spcPts val="0"/>
+                        </a:spcBef>
+                        <a:spcAft>
+                          <a:spcPts val="0"/>
+                        </a:spcAft>
+                        <a:buNone/>
+                      </a:pPr>
+                      <a:r>
+                        <a:rPr lang="pt-BR" sz="2400" b="0" dirty="0">
+                          <a:solidFill>
+                            <a:srgbClr val="3A3A3A"/>
+                          </a:solidFill>
+                          <a:latin typeface="Montserrat"/>
+                        </a:rPr>
+                        <a:t>exploratório</a:t>
                       </a:r>
                     </a:p>
                   </a:txBody>
@@ -20251,7 +20984,7 @@
                           </a:solidFill>
                           <a:latin typeface="Montserrat"/>
                         </a:rPr>
-                        <a:t>Hipótese</a:t>
+                        <a:t>Preferência revelada</a:t>
                       </a:r>
                     </a:p>
                   </a:txBody>
@@ -20305,7 +21038,447 @@
                           </a:solidFill>
                           <a:latin typeface="Montserrat"/>
                         </a:rPr>
-                        <a:t>pós-resultado</a:t>
+                        <a:t>não é causa</a:t>
+                      </a:r>
+                    </a:p>
+                  </a:txBody>
+                  <a:tcPr marL="73152" marR="73152" marT="36576" marB="36576" anchor="ctr">
+                    <a:lnL w="6350">
+                      <a:solidFill>
+                        <a:srgbClr val="C9DED1"/>
+                      </a:solidFill>
+                    </a:lnL>
+                    <a:lnR w="6350">
+                      <a:solidFill>
+                        <a:srgbClr val="C9DED1"/>
+                      </a:solidFill>
+                    </a:lnR>
+                    <a:lnT w="6350">
+                      <a:solidFill>
+                        <a:srgbClr val="C9DED1"/>
+                      </a:solidFill>
+                    </a:lnT>
+                    <a:lnB w="6350">
+                      <a:solidFill>
+                        <a:srgbClr val="C9DED1"/>
+                      </a:solidFill>
+                    </a:lnB>
+                    <a:solidFill>
+                      <a:srgbClr val="FFFFFF"/>
+                    </a:solidFill>
+                  </a:tcPr>
+                </a:tc>
+              </a:tr>
+              <a:tr h="732826">
+                <a:tc>
+                  <a:txBody>
+                    <a:bodyPr/>
+                    <a:lstStyle/>
+                    <a:p>
+                      <a:pPr marL="0" indent="0" algn="l">
+                        <a:lnSpc>
+                          <a:spcPct val="100000"/>
+                        </a:lnSpc>
+                        <a:spcBef>
+                          <a:spcPts val="0"/>
+                        </a:spcBef>
+                        <a:spcAft>
+                          <a:spcPts val="0"/>
+                        </a:spcAft>
+                        <a:buNone/>
+                      </a:pPr>
+                      <a:r>
+                        <a:rPr lang="pt-BR" sz="2400" b="1" dirty="0">
+                          <a:solidFill>
+                            <a:srgbClr val="3A3A3A"/>
+                          </a:solidFill>
+                          <a:latin typeface="Montserrat"/>
+                        </a:rPr>
+                        <a:t>Só candidatos</a:t>
+                      </a:r>
+                    </a:p>
+                  </a:txBody>
+                  <a:tcPr marL="73152" marR="73152" marT="36576" marB="36576" anchor="ctr">
+                    <a:lnL w="6350">
+                      <a:solidFill>
+                        <a:srgbClr val="C9DED1"/>
+                      </a:solidFill>
+                    </a:lnL>
+                    <a:lnR w="6350">
+                      <a:solidFill>
+                        <a:srgbClr val="C9DED1"/>
+                      </a:solidFill>
+                    </a:lnR>
+                    <a:lnT w="6350">
+                      <a:solidFill>
+                        <a:srgbClr val="C9DED1"/>
+                      </a:solidFill>
+                    </a:lnT>
+                    <a:lnB w="6350">
+                      <a:solidFill>
+                        <a:srgbClr val="C9DED1"/>
+                      </a:solidFill>
+                    </a:lnB>
+                    <a:solidFill>
+                      <a:srgbClr val="F3F7F3"/>
+                    </a:solidFill>
+                  </a:tcPr>
+                </a:tc>
+                <a:tc>
+                  <a:txBody>
+                    <a:bodyPr/>
+                    <a:lstStyle/>
+                    <a:p>
+                      <a:pPr marL="0" indent="0" algn="l">
+                        <a:lnSpc>
+                          <a:spcPct val="100000"/>
+                        </a:lnSpc>
+                        <a:spcBef>
+                          <a:spcPts val="0"/>
+                        </a:spcBef>
+                        <a:spcAft>
+                          <a:spcPts val="0"/>
+                        </a:spcAft>
+                        <a:buNone/>
+                      </a:pPr>
+                      <a:r>
+                        <a:rPr lang="pt-BR" sz="2400" b="0" dirty="0">
+                          <a:solidFill>
+                            <a:srgbClr val="3A3A3A"/>
+                          </a:solidFill>
+                          <a:latin typeface="Montserrat"/>
+                        </a:rPr>
+                        <a:t>sem margem extensiva</a:t>
+                      </a:r>
+                    </a:p>
+                  </a:txBody>
+                  <a:tcPr marL="73152" marR="73152" marT="36576" marB="36576" anchor="ctr">
+                    <a:lnL w="6350">
+                      <a:solidFill>
+                        <a:srgbClr val="C9DED1"/>
+                      </a:solidFill>
+                    </a:lnL>
+                    <a:lnR w="6350">
+                      <a:solidFill>
+                        <a:srgbClr val="C9DED1"/>
+                      </a:solidFill>
+                    </a:lnR>
+                    <a:lnT w="6350">
+                      <a:solidFill>
+                        <a:srgbClr val="C9DED1"/>
+                      </a:solidFill>
+                    </a:lnT>
+                    <a:lnB w="6350">
+                      <a:solidFill>
+                        <a:srgbClr val="C9DED1"/>
+                      </a:solidFill>
+                    </a:lnB>
+                    <a:solidFill>
+                      <a:srgbClr val="F3F7F3"/>
+                    </a:solidFill>
+                  </a:tcPr>
+                </a:tc>
+              </a:tr>
+              <a:tr h="732826">
+                <a:tc>
+                  <a:txBody>
+                    <a:bodyPr/>
+                    <a:lstStyle/>
+                    <a:p>
+                      <a:pPr marL="0" indent="0" algn="l">
+                        <a:lnSpc>
+                          <a:spcPct val="100000"/>
+                        </a:lnSpc>
+                        <a:spcBef>
+                          <a:spcPts val="0"/>
+                        </a:spcBef>
+                        <a:spcAft>
+                          <a:spcPts val="0"/>
+                        </a:spcAft>
+                        <a:buNone/>
+                      </a:pPr>
+                      <a:r>
+                        <a:rPr lang="pt-BR" sz="2400" b="1" dirty="0">
+                          <a:solidFill>
+                            <a:srgbClr val="3A3A3A"/>
+                          </a:solidFill>
+                          <a:latin typeface="Montserrat"/>
+                        </a:rPr>
+                        <a:t>Pacote do corte</a:t>
+                      </a:r>
+                    </a:p>
+                  </a:txBody>
+                  <a:tcPr marL="73152" marR="73152" marT="36576" marB="36576" anchor="ctr">
+                    <a:lnL w="6350">
+                      <a:solidFill>
+                        <a:srgbClr val="C9DED1"/>
+                      </a:solidFill>
+                    </a:lnL>
+                    <a:lnR w="6350">
+                      <a:solidFill>
+                        <a:srgbClr val="C9DED1"/>
+                      </a:solidFill>
+                    </a:lnR>
+                    <a:lnT w="6350">
+                      <a:solidFill>
+                        <a:srgbClr val="C9DED1"/>
+                      </a:solidFill>
+                    </a:lnT>
+                    <a:lnB w="6350">
+                      <a:solidFill>
+                        <a:srgbClr val="C9DED1"/>
+                      </a:solidFill>
+                    </a:lnB>
+                    <a:solidFill>
+                      <a:srgbClr val="FFFFFF"/>
+                    </a:solidFill>
+                  </a:tcPr>
+                </a:tc>
+                <a:tc>
+                  <a:txBody>
+                    <a:bodyPr/>
+                    <a:lstStyle/>
+                    <a:p>
+                      <a:pPr marL="0" indent="0" algn="l">
+                        <a:lnSpc>
+                          <a:spcPct val="100000"/>
+                        </a:lnSpc>
+                        <a:spcBef>
+                          <a:spcPts val="0"/>
+                        </a:spcBef>
+                        <a:spcAft>
+                          <a:spcPts val="0"/>
+                        </a:spcAft>
+                        <a:buNone/>
+                      </a:pPr>
+                      <a:r>
+                        <a:rPr lang="pt-BR" sz="2400" b="0" dirty="0">
+                          <a:solidFill>
+                            <a:srgbClr val="3A3A3A"/>
+                          </a:solidFill>
+                          <a:latin typeface="Montserrat"/>
+                        </a:rPr>
+                        <a:t>bolsa não isolada</a:t>
+                      </a:r>
+                    </a:p>
+                  </a:txBody>
+                  <a:tcPr marL="73152" marR="73152" marT="36576" marB="36576" anchor="ctr">
+                    <a:lnL w="6350">
+                      <a:solidFill>
+                        <a:srgbClr val="C9DED1"/>
+                      </a:solidFill>
+                    </a:lnL>
+                    <a:lnR w="6350">
+                      <a:solidFill>
+                        <a:srgbClr val="C9DED1"/>
+                      </a:solidFill>
+                    </a:lnR>
+                    <a:lnT w="6350">
+                      <a:solidFill>
+                        <a:srgbClr val="C9DED1"/>
+                      </a:solidFill>
+                    </a:lnT>
+                    <a:lnB w="6350">
+                      <a:solidFill>
+                        <a:srgbClr val="C9DED1"/>
+                      </a:solidFill>
+                    </a:lnB>
+                    <a:solidFill>
+                      <a:srgbClr val="FFFFFF"/>
+                    </a:solidFill>
+                  </a:tcPr>
+                </a:tc>
+              </a:tr>
+              <a:tr h="732826">
+                <a:tc>
+                  <a:txBody>
+                    <a:bodyPr/>
+                    <a:lstStyle/>
+                    <a:p>
+                      <a:pPr marL="0" indent="0" algn="l">
+                        <a:lnSpc>
+                          <a:spcPct val="100000"/>
+                        </a:lnSpc>
+                        <a:spcBef>
+                          <a:spcPts val="0"/>
+                        </a:spcBef>
+                        <a:spcAft>
+                          <a:spcPts val="0"/>
+                        </a:spcAft>
+                        <a:buNone/>
+                      </a:pPr>
+                      <a:r>
+                        <a:rPr lang="pt-BR" sz="2400" b="1" dirty="0">
+                          <a:solidFill>
+                            <a:srgbClr val="3A3A3A"/>
+                          </a:solidFill>
+                          <a:latin typeface="Montserrat"/>
+                        </a:rPr>
+                        <a:t>Só ciclo 2</a:t>
+                      </a:r>
+                    </a:p>
+                  </a:txBody>
+                  <a:tcPr marL="73152" marR="73152" marT="36576" marB="36576" anchor="ctr">
+                    <a:lnL w="6350">
+                      <a:solidFill>
+                        <a:srgbClr val="C9DED1"/>
+                      </a:solidFill>
+                    </a:lnL>
+                    <a:lnR w="6350">
+                      <a:solidFill>
+                        <a:srgbClr val="C9DED1"/>
+                      </a:solidFill>
+                    </a:lnR>
+                    <a:lnT w="6350">
+                      <a:solidFill>
+                        <a:srgbClr val="C9DED1"/>
+                      </a:solidFill>
+                    </a:lnT>
+                    <a:lnB w="6350">
+                      <a:solidFill>
+                        <a:srgbClr val="C9DED1"/>
+                      </a:solidFill>
+                    </a:lnB>
+                    <a:solidFill>
+                      <a:srgbClr val="F3F7F3"/>
+                    </a:solidFill>
+                  </a:tcPr>
+                </a:tc>
+                <a:tc>
+                  <a:txBody>
+                    <a:bodyPr/>
+                    <a:lstStyle/>
+                    <a:p>
+                      <a:pPr marL="0" indent="0" algn="l">
+                        <a:lnSpc>
+                          <a:spcPct val="100000"/>
+                        </a:lnSpc>
+                        <a:spcBef>
+                          <a:spcPts val="0"/>
+                        </a:spcBef>
+                        <a:spcAft>
+                          <a:spcPts val="0"/>
+                        </a:spcAft>
+                        <a:buNone/>
+                      </a:pPr>
+                      <a:r>
+                        <a:rPr lang="pt-BR" sz="2400" b="0" dirty="0">
+                          <a:solidFill>
+                            <a:srgbClr val="3A3A3A"/>
+                          </a:solidFill>
+                          <a:latin typeface="Montserrat"/>
+                        </a:rPr>
+                        <a:t>bolsa instável</a:t>
+                      </a:r>
+                    </a:p>
+                  </a:txBody>
+                  <a:tcPr marL="73152" marR="73152" marT="36576" marB="36576" anchor="ctr">
+                    <a:lnL w="6350">
+                      <a:solidFill>
+                        <a:srgbClr val="C9DED1"/>
+                      </a:solidFill>
+                    </a:lnL>
+                    <a:lnR w="6350">
+                      <a:solidFill>
+                        <a:srgbClr val="C9DED1"/>
+                      </a:solidFill>
+                    </a:lnR>
+                    <a:lnT w="6350">
+                      <a:solidFill>
+                        <a:srgbClr val="C9DED1"/>
+                      </a:solidFill>
+                    </a:lnT>
+                    <a:lnB w="6350">
+                      <a:solidFill>
+                        <a:srgbClr val="C9DED1"/>
+                      </a:solidFill>
+                    </a:lnB>
+                    <a:solidFill>
+                      <a:srgbClr val="F3F7F3"/>
+                    </a:solidFill>
+                  </a:tcPr>
+                </a:tc>
+              </a:tr>
+              <a:tr h="732826">
+                <a:tc>
+                  <a:txBody>
+                    <a:bodyPr/>
+                    <a:lstStyle/>
+                    <a:p>
+                      <a:pPr marL="0" indent="0" algn="l">
+                        <a:lnSpc>
+                          <a:spcPct val="100000"/>
+                        </a:lnSpc>
+                        <a:spcBef>
+                          <a:spcPts val="0"/>
+                        </a:spcBef>
+                        <a:spcAft>
+                          <a:spcPts val="0"/>
+                        </a:spcAft>
+                        <a:buNone/>
+                      </a:pPr>
+                      <a:r>
+                        <a:rPr lang="pt-BR" sz="2400" b="1" dirty="0">
+                          <a:solidFill>
+                            <a:srgbClr val="3A3A3A"/>
+                          </a:solidFill>
+                          <a:latin typeface="Montserrat"/>
+                        </a:rPr>
+                        <a:t>Origem = CNES</a:t>
+                      </a:r>
+                    </a:p>
+                  </a:txBody>
+                  <a:tcPr marL="73152" marR="73152" marT="36576" marB="36576" anchor="ctr">
+                    <a:lnL w="6350">
+                      <a:solidFill>
+                        <a:srgbClr val="C9DED1"/>
+                      </a:solidFill>
+                    </a:lnL>
+                    <a:lnR w="6350">
+                      <a:solidFill>
+                        <a:srgbClr val="C9DED1"/>
+                      </a:solidFill>
+                    </a:lnR>
+                    <a:lnT w="6350">
+                      <a:solidFill>
+                        <a:srgbClr val="C9DED1"/>
+                      </a:solidFill>
+                    </a:lnT>
+                    <a:lnB w="6350">
+                      <a:solidFill>
+                        <a:srgbClr val="C9DED1"/>
+                      </a:solidFill>
+                    </a:lnB>
+                    <a:solidFill>
+                      <a:srgbClr val="FFFFFF"/>
+                    </a:solidFill>
+                  </a:tcPr>
+                </a:tc>
+                <a:tc>
+                  <a:txBody>
+                    <a:bodyPr/>
+                    <a:lstStyle/>
+                    <a:p>
+                      <a:pPr marL="0" indent="0" algn="l">
+                        <a:lnSpc>
+                          <a:spcPct val="100000"/>
+                        </a:lnSpc>
+                        <a:spcBef>
+                          <a:spcPts val="0"/>
+                        </a:spcBef>
+                        <a:spcAft>
+                          <a:spcPts val="0"/>
+                        </a:spcAft>
+                        <a:buNone/>
+                      </a:pPr>
+                      <a:r>
+                        <a:rPr lang="pt-BR" sz="2400" b="0" dirty="0">
+                          <a:solidFill>
+                            <a:srgbClr val="3A3A3A"/>
+                          </a:solidFill>
+                          <a:latin typeface="Montserrat"/>
+                        </a:rPr>
+                        <a:t>não é residência</a:t>
                       </a:r>
                     </a:p>
                   </a:txBody>
@@ -20393,1723 +21566,7 @@
                 </a:solidFill>
                 <a:latin typeface="Montserrat"/>
               </a:rPr>
-              <a:t>auditorias 16, 18, 41 e 48; docs 57a (M9), 57i, 57p e 57x; output/rdd_bolsa/portao_r1_ivs_oficial.json; VC_estimativas.csv.</a:t>
-            </a:r>
-          </a:p>
-        </p:txBody>
-      </p:sp>
-    </p:spTree>
-  </p:cSld>
-  <p:clrMapOvr>
-    <a:masterClrMapping/>
-  </p:clrMapOvr>
-</p:sld>
-</file>
-
-<file path=ppt/slides/slide44.xml><?xml version="1.0" encoding="utf-8"?>
-<p:sld xmlns:a="http://schemas.openxmlformats.org/drawingml/2006/main" xmlns:r="http://schemas.openxmlformats.org/officeDocument/2006/relationships" xmlns:p="http://schemas.openxmlformats.org/presentationml/2006/main">
-  <p:cSld>
-    <p:spTree>
-      <p:nvGrpSpPr>
-        <p:cNvPr id="1" name=""/>
-        <p:cNvGrpSpPr/>
-        <p:nvPr/>
-      </p:nvGrpSpPr>
-      <p:grpSpPr>
-        <a:xfrm>
-          <a:off x="0" y="0"/>
-          <a:ext cx="0" cy="0"/>
-          <a:chOff x="0" y="0"/>
-          <a:chExt cx="0" cy="0"/>
-        </a:xfrm>
-      </p:grpSpPr>
-      <p:sp>
-        <p:nvSpPr>
-          <p:cNvPr id="2" name="Título"/>
-          <p:cNvSpPr>
-            <a:spLocks noGrp="1"/>
-          </p:cNvSpPr>
-          <p:nvPr>
-            <p:ph type="title"/>
-          </p:nvPr>
-        </p:nvSpPr>
-        <p:spPr/>
-        <p:txBody>
-          <a:bodyPr>
-            <a:normAutofit/>
-          </a:bodyPr>
-          <a:lstStyle/>
-          <a:p>
-            <a:pPr marL="0" indent="0" algn="l">
-              <a:lnSpc>
-                <a:spcPct val="104000"/>
-              </a:lnSpc>
-              <a:spcAft>
-                <a:spcPts val="0"/>
-              </a:spcAft>
-              <a:buNone/>
-            </a:pPr>
-            <a:r>
-              <a:rPr lang="pt-BR" sz="2400" b="1" dirty="0">
-                <a:solidFill>
-                  <a:srgbClr val="FFFFFF"/>
-                </a:solidFill>
-                <a:latin typeface="Montserrat"/>
-              </a:rPr>
-              <a:t>Teste central: a origem pesa mais que toda a bolsa</a:t>
-            </a:r>
-          </a:p>
-        </p:txBody>
-      </p:sp>
-      <p:sp>
-        <p:nvSpPr>
-          <p:cNvPr id="3" name="Número da página"/>
-          <p:cNvSpPr>
-            <a:spLocks noGrp="1"/>
-          </p:cNvSpPr>
-          <p:nvPr>
-            <p:ph type="body" sz="quarter" idx="18"/>
-          </p:nvPr>
-        </p:nvSpPr>
-        <p:spPr>
-          <a:xfrm>
-            <a:off x="11706744" y="6457042"/>
-            <a:ext cx="492080" cy="400640"/>
-          </a:xfrm>
-        </p:spPr>
-        <p:txBody>
-          <a:bodyPr anchor="ctr">
-            <a:normAutofit/>
-          </a:bodyPr>
-          <a:lstStyle/>
-          <a:p>
-            <a:pPr algn="ctr"/>
-            <a:fld id="{B1A5E0C2-5F3A-4C7E-9D11-7A2E6C0F4B01}" type="slidenum">
-              <a:rPr lang="pt-BR" sz="1400" b="1">
-                <a:solidFill>
-                  <a:srgbClr val="BFBFBF"/>
-                </a:solidFill>
-                <a:latin typeface="Montserrat"/>
-              </a:rPr>
-              <a:t>‹#›</a:t>
-            </a:fld>
-            <a:endParaRPr lang="pt-BR" sz="1400" b="1">
-              <a:solidFill>
-                <a:srgbClr val="BFBFBF"/>
-              </a:solidFill>
-            </a:endParaRPr>
-          </a:p>
-        </p:txBody>
-      </p:sp>
-      <p:sp>
-        <p:nvSpPr>
-          <p:cNvPr id="4" name="Navegação do rodapé"/>
-          <p:cNvSpPr txBox="1"/>
-          <p:nvPr/>
-        </p:nvSpPr>
-        <p:spPr>
-          <a:xfrm>
-            <a:off x="196860" y="6639248"/>
-            <a:ext cx="9223026" cy="246221"/>
-          </a:xfrm>
-          <a:prstGeom prst="rect">
-            <a:avLst/>
-          </a:prstGeom>
-          <a:noFill/>
-        </p:spPr>
-        <p:txBody>
-          <a:bodyPr wrap="square" rtlCol="0">
-            <a:spAutoFit/>
-          </a:bodyPr>
-          <a:lstStyle/>
-          <a:p>
-            <a:r>
-              <a:rPr lang="pt-BR" sz="1000" dirty="0">
-                <a:latin typeface="Montserrat"/>
-              </a:rPr>
-              <a:t xml:space="preserve">Hipótese  |  </a:t>
-            </a:r>
-            <a:r>
-              <a:rPr lang="pt-BR" sz="1000" dirty="0">
-                <a:latin typeface="Montserrat"/>
-              </a:rPr>
-              <a:t xml:space="preserve">Dados  |  </a:t>
-            </a:r>
-            <a:r>
-              <a:rPr lang="pt-BR" sz="1000" dirty="0">
-                <a:latin typeface="Montserrat"/>
-              </a:rPr>
-              <a:t xml:space="preserve">Análise descritiva  |  </a:t>
-            </a:r>
-            <a:r>
-              <a:rPr lang="pt-BR" sz="1000" dirty="0">
-                <a:latin typeface="Montserrat"/>
-              </a:rPr>
-              <a:t xml:space="preserve">Metodologia  |  </a:t>
-            </a:r>
-            <a:r>
-              <a:rPr lang="pt-BR" sz="1000" dirty="0">
-                <a:latin typeface="Montserrat"/>
-              </a:rPr>
-              <a:t xml:space="preserve">Identificação  |  </a:t>
-            </a:r>
-            <a:r>
-              <a:rPr lang="pt-BR" sz="1000" b="1" dirty="0">
-                <a:solidFill>
-                  <a:srgbClr val="114719"/>
-                </a:solidFill>
-                <a:latin typeface="Montserrat"/>
-              </a:rPr>
-              <a:t>Resultados</a:t>
-            </a:r>
-            <a:r>
-              <a:rPr lang="pt-BR" sz="1000" dirty="0">
-                <a:latin typeface="Montserrat"/>
-              </a:rPr>
-              <a:t xml:space="preserve">  |  </a:t>
-            </a:r>
-            <a:r>
-              <a:rPr lang="pt-BR" sz="1000" dirty="0">
-                <a:latin typeface="Montserrat"/>
-              </a:rPr>
-              <a:t xml:space="preserve">Robustez  |  </a:t>
-            </a:r>
-            <a:r>
-              <a:rPr lang="pt-BR" sz="1000" dirty="0">
-                <a:latin typeface="Montserrat"/>
-              </a:rPr>
-              <a:t xml:space="preserve">Discussão</a:t>
-            </a:r>
-          </a:p>
-        </p:txBody>
-      </p:sp>
-      <p:sp>
-        <p:nvSpPr>
-          <p:cNvPr id="101" name="Linha"/>
-          <p:cNvSpPr/>
-          <p:nvPr/>
-        </p:nvSpPr>
-        <p:spPr>
-          <a:xfrm>
-            <a:off x="292608" y="5212080"/>
-            <a:ext cx="11594592" cy="420624"/>
-          </a:xfrm>
-          <a:prstGeom prst="rect">
-            <a:avLst/>
-          </a:prstGeom>
-          <a:noFill/>
-          <a:ln>
-            <a:noFill/>
-          </a:ln>
-        </p:spPr>
-        <p:txBody>
-          <a:bodyPr wrap="square" lIns="164592" tIns="18288" rIns="164592" bIns="18288" rtlCol="0" anchor="ctr">
-            <a:noAutofit/>
-          </a:bodyPr>
-          <a:lstStyle/>
-          <a:p>
-            <a:pPr marL="0" indent="0" algn="l">
-              <a:lnSpc>
-                <a:spcPct val="100000"/>
-              </a:lnSpc>
-              <a:spcBef>
-                <a:spcPts val="0"/>
-              </a:spcBef>
-              <a:spcAft>
-                <a:spcPts val="0"/>
-              </a:spcAft>
-              <a:buNone/>
-            </a:pPr>
-            <a:r>
-              <a:rPr lang="pt-BR" sz="1800" b="1" dirty="0">
-                <a:solidFill>
-                  <a:srgbClr val="114719"/>
-                </a:solidFill>
-                <a:latin typeface="Montserrat"/>
-              </a:rPr>
-              <a:t>Origem − bolsa:</a:t>
-            </a:r>
-            <a:r>
-              <a:rPr lang="pt-BR" sz="1800" b="0" dirty="0">
-                <a:solidFill>
-                  <a:srgbClr val="3A3A3A"/>
-                </a:solidFill>
-                <a:latin typeface="Montserrat"/>
-              </a:rPr>
-              <a:t> 1,94 [1,48; 2,40] em log-chance; p &lt; 0,001.</a:t>
-            </a:r>
-          </a:p>
-        </p:txBody>
-      </p:sp>
-      <p:sp>
-        <p:nvSpPr>
-          <p:cNvPr id="102" name="Cautela"/>
-          <p:cNvSpPr/>
-          <p:nvPr/>
-        </p:nvSpPr>
-        <p:spPr>
-          <a:xfrm>
-            <a:off x="292608" y="5687568"/>
-            <a:ext cx="11594592" cy="420624"/>
-          </a:xfrm>
-          <a:prstGeom prst="roundRect">
-            <a:avLst>
-              <a:gd name="adj" fmla="val 12000"/>
-            </a:avLst>
-          </a:prstGeom>
-          <a:solidFill>
-            <a:srgbClr val="E7F1EA"/>
-          </a:solidFill>
-          <a:ln>
-            <a:noFill/>
-          </a:ln>
-        </p:spPr>
-        <p:txBody>
-          <a:bodyPr wrap="square" lIns="164592" tIns="18288" rIns="164592" bIns="18288" rtlCol="0" anchor="ctr">
-            <a:noAutofit/>
-          </a:bodyPr>
-          <a:lstStyle/>
-          <a:p>
-            <a:pPr marL="0" indent="0" algn="l">
-              <a:lnSpc>
-                <a:spcPct val="100000"/>
-              </a:lnSpc>
-              <a:spcBef>
-                <a:spcPts val="0"/>
-              </a:spcBef>
-              <a:spcAft>
-                <a:spcPts val="0"/>
-              </a:spcAft>
-              <a:buNone/>
-            </a:pPr>
-            <a:r>
-              <a:rPr lang="pt-BR" sz="1800" b="1" dirty="0">
-                <a:solidFill>
-                  <a:srgbClr val="114719"/>
-                </a:solidFill>
-                <a:latin typeface="Montserrat"/>
-              </a:rPr>
-              <a:t>Origem é preferência revelada, não causa.</a:t>
-            </a:r>
-          </a:p>
-        </p:txBody>
-      </p:sp>
-      <p:pic>
-        <p:nvPicPr>
-          <p:cNvPr id="103" name="Figura" descr="Quanto a vaga na UF de origem e toda a diferença de bolsa (R$ 10 → 20 mil) multiplicam a chance de a vaga ser a 1ª opção, com IC 95%"/>
-          <p:cNvPicPr>
-            <a:picLocks noChangeAspect="1"/>
-          </p:cNvPicPr>
-          <p:nvPr/>
-        </p:nvPicPr>
-        <p:blipFill>
-          <a:blip r:embed="rId3"/>
-          <a:stretch>
-            <a:fillRect/>
-          </a:stretch>
-        </p:blipFill>
-        <p:spPr>
-          <a:xfrm>
-            <a:off x="292608" y="1176900"/>
-            <a:ext cx="11594592" cy="3534937"/>
-          </a:xfrm>
-          <a:prstGeom prst="rect">
-            <a:avLst/>
-          </a:prstGeom>
-          <a:ln w="6350">
-            <a:solidFill>
-              <a:srgbClr val="DDE7DF"/>
-            </a:solidFill>
-          </a:ln>
-        </p:spPr>
-      </p:pic>
-      <p:sp>
-        <p:nvSpPr>
-          <p:cNvPr id="104" name="Fontes"/>
-          <p:cNvSpPr txBox="1"/>
-          <p:nvPr/>
-        </p:nvSpPr>
-        <p:spPr>
-          <a:xfrm>
-            <a:off x="292608" y="6181344"/>
-            <a:ext cx="11594592" cy="274320"/>
-          </a:xfrm>
-          <a:prstGeom prst="rect">
-            <a:avLst/>
-          </a:prstGeom>
-          <a:noFill/>
-          <a:ln>
-            <a:noFill/>
-          </a:ln>
-        </p:spPr>
-        <p:txBody>
-          <a:bodyPr wrap="square" lIns="0" tIns="0" rIns="0" bIns="0" rtlCol="0" anchor="b">
-            <a:noAutofit/>
-          </a:bodyPr>
-          <a:lstStyle/>
-          <a:p>
-            <a:pPr marL="0" indent="0" algn="l">
-              <a:lnSpc>
-                <a:spcPct val="95000"/>
-              </a:lnSpc>
-              <a:spcBef>
-                <a:spcPts val="0"/>
-              </a:spcBef>
-              <a:spcAft>
-                <a:spcPts val="0"/>
-              </a:spcAft>
-              <a:buNone/>
-            </a:pPr>
-            <a:r>
-              <a:rPr lang="pt-BR" sz="800" b="1" dirty="0">
-                <a:solidFill>
-                  <a:srgbClr val="6B6B6B"/>
-                </a:solidFill>
-                <a:latin typeface="Montserrat"/>
-              </a:rPr>
-              <a:t>Fontes: </a:t>
-            </a:r>
-            <a:r>
-              <a:rPr lang="pt-BR" sz="800" b="0" dirty="0">
-                <a:solidFill>
-                  <a:srgbClr val="6B6B6B"/>
-                </a:solidFill>
-                <a:latin typeface="Montserrat"/>
-              </a:rPr>
-              <a:t>output/rdd_bolsa/VC_estimativas.csv (adendo 52c; doc 57p; auditoria 41); P1h (protocolo 52b; doc 57i; auditoria 31); output/apresentacao_banca2/curto_origem_bolsa.png.</a:t>
-            </a:r>
-          </a:p>
-        </p:txBody>
-      </p:sp>
-    </p:spTree>
-  </p:cSld>
-  <p:clrMapOvr>
-    <a:masterClrMapping/>
-  </p:clrMapOvr>
-</p:sld>
-</file>
-
-<file path=ppt/slides/slide45.xml><?xml version="1.0" encoding="utf-8"?>
-<p:sld xmlns:a="http://schemas.openxmlformats.org/drawingml/2006/main" xmlns:r="http://schemas.openxmlformats.org/officeDocument/2006/relationships" xmlns:p="http://schemas.openxmlformats.org/presentationml/2006/main">
-  <p:cSld>
-    <p:spTree>
-      <p:nvGrpSpPr>
-        <p:cNvPr id="1" name=""/>
-        <p:cNvGrpSpPr/>
-        <p:nvPr/>
-      </p:nvGrpSpPr>
-      <p:grpSpPr>
-        <a:xfrm>
-          <a:off x="0" y="0"/>
-          <a:ext cx="0" cy="0"/>
-          <a:chOff x="0" y="0"/>
-          <a:chExt cx="0" cy="0"/>
-        </a:xfrm>
-      </p:grpSpPr>
-      <p:sp>
-        <p:nvSpPr>
-          <p:cNvPr id="2" name="Título"/>
-          <p:cNvSpPr>
-            <a:spLocks noGrp="1"/>
-          </p:cNvSpPr>
-          <p:nvPr>
-            <p:ph type="title"/>
-          </p:nvPr>
-        </p:nvSpPr>
-        <p:spPr/>
-        <p:txBody>
-          <a:bodyPr>
-            <a:normAutofit/>
-          </a:bodyPr>
-          <a:lstStyle/>
-          <a:p>
-            <a:pPr marL="0" indent="0" algn="l">
-              <a:lnSpc>
-                <a:spcPct val="104000"/>
-              </a:lnSpc>
-              <a:spcAft>
-                <a:spcPts val="0"/>
-              </a:spcAft>
-              <a:buNone/>
-            </a:pPr>
-            <a:r>
-              <a:rPr lang="pt-BR" sz="2400" b="1" dirty="0">
-                <a:solidFill>
-                  <a:srgbClr val="FFFFFF"/>
-                </a:solidFill>
-                <a:latin typeface="Montserrat"/>
-              </a:rPr>
-              <a:t>Dentro da mesma UF, a vaga de bolsa maior é preferida</a:t>
-            </a:r>
-          </a:p>
-        </p:txBody>
-      </p:sp>
-      <p:sp>
-        <p:nvSpPr>
-          <p:cNvPr id="3" name="Número da página"/>
-          <p:cNvSpPr>
-            <a:spLocks noGrp="1"/>
-          </p:cNvSpPr>
-          <p:nvPr>
-            <p:ph type="body" sz="quarter" idx="18"/>
-          </p:nvPr>
-        </p:nvSpPr>
-        <p:spPr>
-          <a:xfrm>
-            <a:off x="11706744" y="6457042"/>
-            <a:ext cx="492080" cy="400640"/>
-          </a:xfrm>
-        </p:spPr>
-        <p:txBody>
-          <a:bodyPr anchor="ctr">
-            <a:normAutofit/>
-          </a:bodyPr>
-          <a:lstStyle/>
-          <a:p>
-            <a:pPr algn="ctr"/>
-            <a:fld id="{B1A5E0C2-5F3A-4C7E-9D11-7A2E6C0F4B01}" type="slidenum">
-              <a:rPr lang="pt-BR" sz="1400" b="1">
-                <a:solidFill>
-                  <a:srgbClr val="BFBFBF"/>
-                </a:solidFill>
-                <a:latin typeface="Montserrat"/>
-              </a:rPr>
-              <a:t>‹#›</a:t>
-            </a:fld>
-            <a:endParaRPr lang="pt-BR" sz="1400" b="1">
-              <a:solidFill>
-                <a:srgbClr val="BFBFBF"/>
-              </a:solidFill>
-            </a:endParaRPr>
-          </a:p>
-        </p:txBody>
-      </p:sp>
-      <p:sp>
-        <p:nvSpPr>
-          <p:cNvPr id="4" name="Navegação do rodapé"/>
-          <p:cNvSpPr txBox="1"/>
-          <p:nvPr/>
-        </p:nvSpPr>
-        <p:spPr>
-          <a:xfrm>
-            <a:off x="196860" y="6639248"/>
-            <a:ext cx="9223026" cy="246221"/>
-          </a:xfrm>
-          <a:prstGeom prst="rect">
-            <a:avLst/>
-          </a:prstGeom>
-          <a:noFill/>
-        </p:spPr>
-        <p:txBody>
-          <a:bodyPr wrap="square" rtlCol="0">
-            <a:spAutoFit/>
-          </a:bodyPr>
-          <a:lstStyle/>
-          <a:p>
-            <a:r>
-              <a:rPr lang="pt-BR" sz="1000" dirty="0">
-                <a:latin typeface="Montserrat"/>
-              </a:rPr>
-              <a:t xml:space="preserve">Hipótese  |  </a:t>
-            </a:r>
-            <a:r>
-              <a:rPr lang="pt-BR" sz="1000" dirty="0">
-                <a:latin typeface="Montserrat"/>
-              </a:rPr>
-              <a:t xml:space="preserve">Dados  |  </a:t>
-            </a:r>
-            <a:r>
-              <a:rPr lang="pt-BR" sz="1000" dirty="0">
-                <a:latin typeface="Montserrat"/>
-              </a:rPr>
-              <a:t xml:space="preserve">Análise descritiva  |  </a:t>
-            </a:r>
-            <a:r>
-              <a:rPr lang="pt-BR" sz="1000" dirty="0">
-                <a:latin typeface="Montserrat"/>
-              </a:rPr>
-              <a:t xml:space="preserve">Metodologia  |  </a:t>
-            </a:r>
-            <a:r>
-              <a:rPr lang="pt-BR" sz="1000" dirty="0">
-                <a:latin typeface="Montserrat"/>
-              </a:rPr>
-              <a:t xml:space="preserve">Identificação  |  </a:t>
-            </a:r>
-            <a:r>
-              <a:rPr lang="pt-BR" sz="1000" b="1" dirty="0">
-                <a:solidFill>
-                  <a:srgbClr val="114719"/>
-                </a:solidFill>
-                <a:latin typeface="Montserrat"/>
-              </a:rPr>
-              <a:t>Resultados</a:t>
-            </a:r>
-            <a:r>
-              <a:rPr lang="pt-BR" sz="1000" dirty="0">
-                <a:latin typeface="Montserrat"/>
-              </a:rPr>
-              <a:t xml:space="preserve">  |  </a:t>
-            </a:r>
-            <a:r>
-              <a:rPr lang="pt-BR" sz="1000" dirty="0">
-                <a:latin typeface="Montserrat"/>
-              </a:rPr>
-              <a:t xml:space="preserve">Robustez  |  </a:t>
-            </a:r>
-            <a:r>
-              <a:rPr lang="pt-BR" sz="1000" dirty="0">
-                <a:latin typeface="Montserrat"/>
-              </a:rPr>
-              <a:t xml:space="preserve">Discussão</a:t>
-            </a:r>
-          </a:p>
-        </p:txBody>
-      </p:sp>
-      <p:sp>
-        <p:nvSpPr>
-          <p:cNvPr id="101" name="Linha"/>
-          <p:cNvSpPr/>
-          <p:nvPr/>
-        </p:nvSpPr>
-        <p:spPr>
-          <a:xfrm>
-            <a:off x="292608" y="5212080"/>
-            <a:ext cx="11594592" cy="420624"/>
-          </a:xfrm>
-          <a:prstGeom prst="rect">
-            <a:avLst/>
-          </a:prstGeom>
-          <a:noFill/>
-          <a:ln>
-            <a:noFill/>
-          </a:ln>
-        </p:spPr>
-        <p:txBody>
-          <a:bodyPr wrap="square" lIns="164592" tIns="18288" rIns="164592" bIns="18288" rtlCol="0" anchor="ctr">
-            <a:noAutofit/>
-          </a:bodyPr>
-          <a:lstStyle/>
-          <a:p>
-            <a:pPr marL="0" indent="0" algn="l">
-              <a:lnSpc>
-                <a:spcPct val="100000"/>
-              </a:lnSpc>
-              <a:spcBef>
-                <a:spcPts val="0"/>
-              </a:spcBef>
-              <a:spcAft>
-                <a:spcPts val="0"/>
-              </a:spcAft>
-              <a:buNone/>
-            </a:pPr>
-            <a:r>
-              <a:rPr lang="pt-BR" sz="1800" b="1" dirty="0">
-                <a:solidFill>
-                  <a:srgbClr val="114719"/>
-                </a:solidFill>
-                <a:latin typeface="Montserrat"/>
-              </a:rPr>
-              <a:t>+R$ 5 mil</a:t>
-            </a:r>
-            <a:r>
-              <a:rPr lang="pt-BR" sz="1800" b="0" dirty="0">
-                <a:solidFill>
-                  <a:srgbClr val="3A3A3A"/>
-                </a:solidFill>
-                <a:latin typeface="Montserrat"/>
-              </a:rPr>
-              <a:t> pesam como 75 km a menos de distância.</a:t>
-            </a:r>
-          </a:p>
-        </p:txBody>
-      </p:sp>
-      <p:sp>
-        <p:nvSpPr>
-          <p:cNvPr id="102" name="Cautela"/>
-          <p:cNvSpPr/>
-          <p:nvPr/>
-        </p:nvSpPr>
-        <p:spPr>
-          <a:xfrm>
-            <a:off x="292608" y="5687568"/>
-            <a:ext cx="11594592" cy="420624"/>
-          </a:xfrm>
-          <a:prstGeom prst="roundRect">
-            <a:avLst>
-              <a:gd name="adj" fmla="val 12000"/>
-            </a:avLst>
-          </a:prstGeom>
-          <a:solidFill>
-            <a:srgbClr val="E7F1EA"/>
-          </a:solidFill>
-          <a:ln>
-            <a:noFill/>
-          </a:ln>
-        </p:spPr>
-        <p:txBody>
-          <a:bodyPr wrap="square" lIns="164592" tIns="18288" rIns="164592" bIns="18288" rtlCol="0" anchor="ctr">
-            <a:noAutofit/>
-          </a:bodyPr>
-          <a:lstStyle/>
-          <a:p>
-            <a:pPr marL="0" indent="0" algn="l">
-              <a:lnSpc>
-                <a:spcPct val="100000"/>
-              </a:lnSpc>
-              <a:spcBef>
-                <a:spcPts val="0"/>
-              </a:spcBef>
-              <a:spcAft>
-                <a:spcPts val="0"/>
-              </a:spcAft>
-              <a:buNone/>
-            </a:pPr>
-            <a:r>
-              <a:rPr lang="pt-BR" sz="1800" b="1" dirty="0">
-                <a:solidFill>
-                  <a:srgbClr val="114719"/>
-                </a:solidFill>
-                <a:latin typeface="Montserrat"/>
-              </a:rPr>
-              <a:t>Adendo pós-resultado; pré-registrado, sem fixar a UF: p 0,072.</a:t>
-            </a:r>
-          </a:p>
-        </p:txBody>
-      </p:sp>
-      <p:pic>
-        <p:nvPicPr>
-          <p:cNvPr id="103" name="Figura" descr="Razão de chances da 1ª opção por +R$ 5 mil comparando vagas da mesma UF, ciclos 1–3 e ciclo 2, com o modelo pré-registrado em cinza claro"/>
-          <p:cNvPicPr>
-            <a:picLocks noChangeAspect="1"/>
-          </p:cNvPicPr>
-          <p:nvPr/>
-        </p:nvPicPr>
-        <p:blipFill>
-          <a:blip r:embed="rId3"/>
-          <a:stretch>
-            <a:fillRect/>
-          </a:stretch>
-        </p:blipFill>
-        <p:spPr>
-          <a:xfrm>
-            <a:off x="292608" y="1294731"/>
-            <a:ext cx="11594592" cy="3299274"/>
-          </a:xfrm>
-          <a:prstGeom prst="rect">
-            <a:avLst/>
-          </a:prstGeom>
-          <a:ln w="6350">
-            <a:solidFill>
-              <a:srgbClr val="DDE7DF"/>
-            </a:solidFill>
-          </a:ln>
-        </p:spPr>
-      </p:pic>
-      <p:sp>
-        <p:nvSpPr>
-          <p:cNvPr id="104" name="Fontes"/>
-          <p:cNvSpPr txBox="1"/>
-          <p:nvPr/>
-        </p:nvSpPr>
-        <p:spPr>
-          <a:xfrm>
-            <a:off x="292608" y="6181344"/>
-            <a:ext cx="11594592" cy="274320"/>
-          </a:xfrm>
-          <a:prstGeom prst="rect">
-            <a:avLst/>
-          </a:prstGeom>
-          <a:noFill/>
-          <a:ln>
-            <a:noFill/>
-          </a:ln>
-        </p:spPr>
-        <p:txBody>
-          <a:bodyPr wrap="square" lIns="0" tIns="0" rIns="0" bIns="0" rtlCol="0" anchor="b">
-            <a:noAutofit/>
-          </a:bodyPr>
-          <a:lstStyle/>
-          <a:p>
-            <a:pPr marL="0" indent="0" algn="l">
-              <a:lnSpc>
-                <a:spcPct val="95000"/>
-              </a:lnSpc>
-              <a:spcBef>
-                <a:spcPts val="0"/>
-              </a:spcBef>
-              <a:spcAft>
-                <a:spcPts val="0"/>
-              </a:spcAft>
-              <a:buNone/>
-            </a:pPr>
-            <a:r>
-              <a:rPr lang="pt-BR" sz="800" b="1" dirty="0">
-                <a:solidFill>
-                  <a:srgbClr val="6B6B6B"/>
-                </a:solidFill>
-                <a:latin typeface="Montserrat"/>
-              </a:rPr>
-              <a:t>Fontes: </a:t>
-            </a:r>
-            <a:r>
-              <a:rPr lang="pt-BR" sz="800" b="0" dirty="0">
-                <a:solidFill>
-                  <a:srgbClr val="6B6B6B"/>
-                </a:solidFill>
-                <a:latin typeface="Montserrat"/>
-              </a:rPr>
-              <a:t>output/rdd_bolsa/VL_estimativas.csv (adendo 52e; doc 57x; auditoria 48); output/apresentacao_banca2/curto_bolsa_mesma_uf.png.</a:t>
-            </a:r>
-          </a:p>
-        </p:txBody>
-      </p:sp>
-    </p:spTree>
-  </p:cSld>
-  <p:clrMapOvr>
-    <a:masterClrMapping/>
-  </p:clrMapOvr>
-</p:sld>
-</file>
-
-<file path=ppt/slides/slide46.xml><?xml version="1.0" encoding="utf-8"?>
-<p:sld xmlns:a="http://schemas.openxmlformats.org/drawingml/2006/main" xmlns:r="http://schemas.openxmlformats.org/officeDocument/2006/relationships" xmlns:p="http://schemas.openxmlformats.org/presentationml/2006/main">
-  <p:cSld>
-    <p:spTree>
-      <p:nvGrpSpPr>
-        <p:cNvPr id="1" name=""/>
-        <p:cNvGrpSpPr/>
-        <p:nvPr/>
-      </p:nvGrpSpPr>
-      <p:grpSpPr>
-        <a:xfrm>
-          <a:off x="0" y="0"/>
-          <a:ext cx="0" cy="0"/>
-          <a:chOff x="0" y="0"/>
-          <a:chExt cx="0" cy="0"/>
-        </a:xfrm>
-      </p:grpSpPr>
-      <p:sp>
-        <p:nvSpPr>
-          <p:cNvPr id="2" name="Título"/>
-          <p:cNvSpPr>
-            <a:spLocks noGrp="1"/>
-          </p:cNvSpPr>
-          <p:nvPr>
-            <p:ph type="title"/>
-          </p:nvPr>
-        </p:nvSpPr>
-        <p:spPr/>
-        <p:txBody>
-          <a:bodyPr>
-            <a:normAutofit/>
-          </a:bodyPr>
-          <a:lstStyle/>
-          <a:p>
-            <a:pPr marL="0" indent="0" algn="l">
-              <a:lnSpc>
-                <a:spcPct val="104000"/>
-              </a:lnSpc>
-              <a:spcAft>
-                <a:spcPts val="0"/>
-              </a:spcAft>
-              <a:buNone/>
-            </a:pPr>
-            <a:r>
-              <a:rPr lang="pt-BR" sz="2400" b="1" dirty="0">
-                <a:solidFill>
-                  <a:srgbClr val="FFFFFF"/>
-                </a:solidFill>
-                <a:latin typeface="Montserrat"/>
-              </a:rPr>
-              <a:t>Robustez: a origem pesa mais em todos os ciclos</a:t>
-            </a:r>
-          </a:p>
-        </p:txBody>
-      </p:sp>
-      <p:sp>
-        <p:nvSpPr>
-          <p:cNvPr id="3" name="Número da página"/>
-          <p:cNvSpPr>
-            <a:spLocks noGrp="1"/>
-          </p:cNvSpPr>
-          <p:nvPr>
-            <p:ph type="body" sz="quarter" idx="18"/>
-          </p:nvPr>
-        </p:nvSpPr>
-        <p:spPr>
-          <a:xfrm>
-            <a:off x="11706744" y="6457042"/>
-            <a:ext cx="492080" cy="400640"/>
-          </a:xfrm>
-        </p:spPr>
-        <p:txBody>
-          <a:bodyPr anchor="ctr">
-            <a:normAutofit/>
-          </a:bodyPr>
-          <a:lstStyle/>
-          <a:p>
-            <a:pPr algn="ctr"/>
-            <a:fld id="{B1A5E0C2-5F3A-4C7E-9D11-7A2E6C0F4B01}" type="slidenum">
-              <a:rPr lang="pt-BR" sz="1400" b="1">
-                <a:solidFill>
-                  <a:srgbClr val="BFBFBF"/>
-                </a:solidFill>
-                <a:latin typeface="Montserrat"/>
-              </a:rPr>
-              <a:t>‹#›</a:t>
-            </a:fld>
-            <a:endParaRPr lang="pt-BR" sz="1400" b="1">
-              <a:solidFill>
-                <a:srgbClr val="BFBFBF"/>
-              </a:solidFill>
-            </a:endParaRPr>
-          </a:p>
-        </p:txBody>
-      </p:sp>
-      <p:sp>
-        <p:nvSpPr>
-          <p:cNvPr id="4" name="Navegação do rodapé"/>
-          <p:cNvSpPr txBox="1"/>
-          <p:nvPr/>
-        </p:nvSpPr>
-        <p:spPr>
-          <a:xfrm>
-            <a:off x="196860" y="6639248"/>
-            <a:ext cx="9223026" cy="246221"/>
-          </a:xfrm>
-          <a:prstGeom prst="rect">
-            <a:avLst/>
-          </a:prstGeom>
-          <a:noFill/>
-        </p:spPr>
-        <p:txBody>
-          <a:bodyPr wrap="square" rtlCol="0">
-            <a:spAutoFit/>
-          </a:bodyPr>
-          <a:lstStyle/>
-          <a:p>
-            <a:r>
-              <a:rPr lang="pt-BR" sz="1000" dirty="0">
-                <a:latin typeface="Montserrat"/>
-              </a:rPr>
-              <a:t xml:space="preserve">Hipótese  |  </a:t>
-            </a:r>
-            <a:r>
-              <a:rPr lang="pt-BR" sz="1000" dirty="0">
-                <a:latin typeface="Montserrat"/>
-              </a:rPr>
-              <a:t xml:space="preserve">Dados  |  </a:t>
-            </a:r>
-            <a:r>
-              <a:rPr lang="pt-BR" sz="1000" dirty="0">
-                <a:latin typeface="Montserrat"/>
-              </a:rPr>
-              <a:t xml:space="preserve">Análise descritiva  |  </a:t>
-            </a:r>
-            <a:r>
-              <a:rPr lang="pt-BR" sz="1000" dirty="0">
-                <a:latin typeface="Montserrat"/>
-              </a:rPr>
-              <a:t xml:space="preserve">Metodologia  |  </a:t>
-            </a:r>
-            <a:r>
-              <a:rPr lang="pt-BR" sz="1000" dirty="0">
-                <a:latin typeface="Montserrat"/>
-              </a:rPr>
-              <a:t xml:space="preserve">Identificação  |  </a:t>
-            </a:r>
-            <a:r>
-              <a:rPr lang="pt-BR" sz="1000" dirty="0">
-                <a:latin typeface="Montserrat"/>
-              </a:rPr>
-              <a:t xml:space="preserve">Resultados  |  </a:t>
-            </a:r>
-            <a:r>
-              <a:rPr lang="pt-BR" sz="1000" b="1" dirty="0">
-                <a:solidFill>
-                  <a:srgbClr val="114719"/>
-                </a:solidFill>
-                <a:latin typeface="Montserrat"/>
-              </a:rPr>
-              <a:t>Robustez</a:t>
-            </a:r>
-            <a:r>
-              <a:rPr lang="pt-BR" sz="1000" dirty="0">
-                <a:latin typeface="Montserrat"/>
-              </a:rPr>
-              <a:t xml:space="preserve">  |  </a:t>
-            </a:r>
-            <a:r>
-              <a:rPr lang="pt-BR" sz="1000" dirty="0">
-                <a:latin typeface="Montserrat"/>
-              </a:rPr>
-              <a:t xml:space="preserve">Discussão</a:t>
-            </a:r>
-          </a:p>
-        </p:txBody>
-      </p:sp>
-      <p:sp>
-        <p:nvSpPr>
-          <p:cNvPr id="101" name="Linha"/>
-          <p:cNvSpPr/>
-          <p:nvPr/>
-        </p:nvSpPr>
-        <p:spPr>
-          <a:xfrm>
-            <a:off x="292608" y="5212080"/>
-            <a:ext cx="11594592" cy="420624"/>
-          </a:xfrm>
-          <a:prstGeom prst="rect">
-            <a:avLst/>
-          </a:prstGeom>
-          <a:noFill/>
-          <a:ln>
-            <a:noFill/>
-          </a:ln>
-        </p:spPr>
-        <p:txBody>
-          <a:bodyPr wrap="square" lIns="164592" tIns="18288" rIns="164592" bIns="18288" rtlCol="0" anchor="ctr">
-            <a:noAutofit/>
-          </a:bodyPr>
-          <a:lstStyle/>
-          <a:p>
-            <a:pPr marL="0" indent="0" algn="l">
-              <a:lnSpc>
-                <a:spcPct val="100000"/>
-              </a:lnSpc>
-              <a:spcBef>
-                <a:spcPts val="0"/>
-              </a:spcBef>
-              <a:spcAft>
-                <a:spcPts val="0"/>
-              </a:spcAft>
-              <a:buNone/>
-            </a:pPr>
-            <a:r>
-              <a:rPr lang="pt-BR" sz="1800" b="1" dirty="0">
-                <a:solidFill>
-                  <a:srgbClr val="114719"/>
-                </a:solidFill>
-                <a:latin typeface="Montserrat"/>
-              </a:rPr>
-              <a:t>Bolsa:</a:t>
-            </a:r>
-            <a:r>
-              <a:rPr lang="pt-BR" sz="1800" b="0" dirty="0">
-                <a:solidFill>
-                  <a:srgbClr val="3A3A3A"/>
-                </a:solidFill>
-                <a:latin typeface="Montserrat"/>
-              </a:rPr>
-              <a:t> forte só no ciclo 2; perto do corte, inconclusivo.</a:t>
-            </a:r>
-          </a:p>
-        </p:txBody>
-      </p:sp>
-      <p:sp>
-        <p:nvSpPr>
-          <p:cNvPr id="102" name="Cautela"/>
-          <p:cNvSpPr/>
-          <p:nvPr/>
-        </p:nvSpPr>
-        <p:spPr>
-          <a:xfrm>
-            <a:off x="292608" y="5687568"/>
-            <a:ext cx="11594592" cy="420624"/>
-          </a:xfrm>
-          <a:prstGeom prst="roundRect">
-            <a:avLst>
-              <a:gd name="adj" fmla="val 12000"/>
-            </a:avLst>
-          </a:prstGeom>
-          <a:solidFill>
-            <a:srgbClr val="E7F1EA"/>
-          </a:solidFill>
-          <a:ln>
-            <a:noFill/>
-          </a:ln>
-        </p:spPr>
-        <p:txBody>
-          <a:bodyPr wrap="square" lIns="164592" tIns="18288" rIns="164592" bIns="18288" rtlCol="0" anchor="ctr">
-            <a:noAutofit/>
-          </a:bodyPr>
-          <a:lstStyle/>
-          <a:p>
-            <a:pPr marL="0" indent="0" algn="l">
-              <a:lnSpc>
-                <a:spcPct val="100000"/>
-              </a:lnSpc>
-              <a:spcBef>
-                <a:spcPts val="0"/>
-              </a:spcBef>
-              <a:spcAft>
-                <a:spcPts val="0"/>
-              </a:spcAft>
-              <a:buNone/>
-            </a:pPr>
-            <a:r>
-              <a:rPr lang="pt-BR" sz="1800" b="1" dirty="0">
-                <a:solidFill>
-                  <a:srgbClr val="114719"/>
-                </a:solidFill>
-                <a:latin typeface="Montserrat"/>
-              </a:rPr>
-              <a:t>Pré-registrado: IC contém 1; variantes do adendo: mesma leitura.</a:t>
-            </a:r>
-          </a:p>
-        </p:txBody>
-      </p:sp>
-      <p:pic>
-        <p:nvPicPr>
-          <p:cNvPr id="103" name="Figura" descr="Robustez da escolha: razão de chances por +R$ 5 mil no modelo pré-registrado e por ciclo, com o quadro antigo do ciclo 2, com distância em log, com a região de saúde fixada e só perto do corte; à direita, origem menos toda a bolsa por ciclo"/>
-          <p:cNvPicPr>
-            <a:picLocks noChangeAspect="1"/>
-          </p:cNvPicPr>
-          <p:nvPr/>
-        </p:nvPicPr>
-        <p:blipFill>
-          <a:blip r:embed="rId3"/>
-          <a:stretch>
-            <a:fillRect/>
-          </a:stretch>
-        </p:blipFill>
-        <p:spPr>
-          <a:xfrm>
-            <a:off x="1076902" y="804672"/>
-            <a:ext cx="10026004" cy="4279392"/>
-          </a:xfrm>
-          <a:prstGeom prst="rect">
-            <a:avLst/>
-          </a:prstGeom>
-          <a:ln w="6350">
-            <a:solidFill>
-              <a:srgbClr val="DDE7DF"/>
-            </a:solidFill>
-          </a:ln>
-        </p:spPr>
-      </p:pic>
-      <p:sp>
-        <p:nvSpPr>
-          <p:cNvPr id="104" name="Fontes"/>
-          <p:cNvSpPr txBox="1"/>
-          <p:nvPr/>
-        </p:nvSpPr>
-        <p:spPr>
-          <a:xfrm>
-            <a:off x="292608" y="6181344"/>
-            <a:ext cx="11594592" cy="274320"/>
-          </a:xfrm>
-          <a:prstGeom prst="rect">
-            <a:avLst/>
-          </a:prstGeom>
-          <a:noFill/>
-          <a:ln>
-            <a:noFill/>
-          </a:ln>
-        </p:spPr>
-        <p:txBody>
-          <a:bodyPr wrap="square" lIns="0" tIns="0" rIns="0" bIns="0" rtlCol="0" anchor="b">
-            <a:noAutofit/>
-          </a:bodyPr>
-          <a:lstStyle/>
-          <a:p>
-            <a:pPr marL="0" indent="0" algn="l">
-              <a:lnSpc>
-                <a:spcPct val="95000"/>
-              </a:lnSpc>
-              <a:spcBef>
-                <a:spcPts val="0"/>
-              </a:spcBef>
-              <a:spcAft>
-                <a:spcPts val="0"/>
-              </a:spcAft>
-              <a:buNone/>
-            </a:pPr>
-            <a:r>
-              <a:rPr lang="pt-BR" sz="800" b="1" dirty="0">
-                <a:solidFill>
-                  <a:srgbClr val="6B6B6B"/>
-                </a:solidFill>
-                <a:latin typeface="Montserrat"/>
-              </a:rPr>
-              <a:t>Fontes: </a:t>
-            </a:r>
-            <a:r>
-              <a:rPr lang="pt-BR" sz="800" b="0" dirty="0">
-                <a:solidFill>
-                  <a:srgbClr val="6B6B6B"/>
-                </a:solidFill>
-                <a:latin typeface="Montserrat"/>
-              </a:rPr>
-              <a:t>output/rdd_bolsa/VC_estimativas.csv (adendo 52c; doc 57p; auditoria 41); VL_estimativas.csv (adendo 52e; doc 57x; auditoria 48); doc 57v (adendo 52d; auditoria 46).</a:t>
-            </a:r>
-          </a:p>
-        </p:txBody>
-      </p:sp>
-    </p:spTree>
-  </p:cSld>
-  <p:clrMapOvr>
-    <a:masterClrMapping/>
-  </p:clrMapOvr>
-</p:sld>
-</file>
-
-<file path=ppt/slides/slide47.xml><?xml version="1.0" encoding="utf-8"?>
-<p:sld xmlns:a="http://schemas.openxmlformats.org/drawingml/2006/main" xmlns:r="http://schemas.openxmlformats.org/officeDocument/2006/relationships" xmlns:p="http://schemas.openxmlformats.org/presentationml/2006/main">
-  <p:cSld>
-    <p:spTree>
-      <p:nvGrpSpPr>
-        <p:cNvPr id="1" name=""/>
-        <p:cNvGrpSpPr/>
-        <p:nvPr/>
-      </p:nvGrpSpPr>
-      <p:grpSpPr>
-        <a:xfrm>
-          <a:off x="0" y="0"/>
-          <a:ext cx="0" cy="0"/>
-          <a:chOff x="0" y="0"/>
-          <a:chExt cx="0" cy="0"/>
-        </a:xfrm>
-      </p:grpSpPr>
-      <p:sp>
-        <p:nvSpPr>
-          <p:cNvPr id="2" name="Título"/>
-          <p:cNvSpPr>
-            <a:spLocks noGrp="1"/>
-          </p:cNvSpPr>
-          <p:nvPr>
-            <p:ph type="title"/>
-          </p:nvPr>
-        </p:nvSpPr>
-        <p:spPr/>
-        <p:txBody>
-          <a:bodyPr>
-            <a:normAutofit/>
-          </a:bodyPr>
-          <a:lstStyle/>
-          <a:p>
-            <a:pPr marL="0" indent="0" algn="l">
-              <a:lnSpc>
-                <a:spcPct val="104000"/>
-              </a:lnSpc>
-              <a:spcAft>
-                <a:spcPts val="0"/>
-              </a:spcAft>
-              <a:buNone/>
-            </a:pPr>
-            <a:r>
-              <a:rPr lang="pt-BR" sz="2400" b="1" dirty="0">
-                <a:solidFill>
-                  <a:srgbClr val="FFFFFF"/>
-                </a:solidFill>
-                <a:latin typeface="Montserrat"/>
-              </a:rPr>
-              <a:t>Discussão: um incentivo limitado</a:t>
-            </a:r>
-          </a:p>
-        </p:txBody>
-      </p:sp>
-      <p:sp>
-        <p:nvSpPr>
-          <p:cNvPr id="3" name="Número da página"/>
-          <p:cNvSpPr>
-            <a:spLocks noGrp="1"/>
-          </p:cNvSpPr>
-          <p:nvPr>
-            <p:ph type="body" sz="quarter" idx="18"/>
-          </p:nvPr>
-        </p:nvSpPr>
-        <p:spPr>
-          <a:xfrm>
-            <a:off x="11706744" y="6457042"/>
-            <a:ext cx="492080" cy="400640"/>
-          </a:xfrm>
-        </p:spPr>
-        <p:txBody>
-          <a:bodyPr anchor="ctr">
-            <a:normAutofit/>
-          </a:bodyPr>
-          <a:lstStyle/>
-          <a:p>
-            <a:pPr algn="ctr"/>
-            <a:fld id="{B1A5E0C2-5F3A-4C7E-9D11-7A2E6C0F4B01}" type="slidenum">
-              <a:rPr lang="pt-BR" sz="1400" b="1">
-                <a:solidFill>
-                  <a:srgbClr val="BFBFBF"/>
-                </a:solidFill>
-                <a:latin typeface="Montserrat"/>
-              </a:rPr>
-              <a:t>‹#›</a:t>
-            </a:fld>
-            <a:endParaRPr lang="pt-BR" sz="1400" b="1">
-              <a:solidFill>
-                <a:srgbClr val="BFBFBF"/>
-              </a:solidFill>
-            </a:endParaRPr>
-          </a:p>
-        </p:txBody>
-      </p:sp>
-      <p:sp>
-        <p:nvSpPr>
-          <p:cNvPr id="4" name="Navegação do rodapé"/>
-          <p:cNvSpPr txBox="1"/>
-          <p:nvPr/>
-        </p:nvSpPr>
-        <p:spPr>
-          <a:xfrm>
-            <a:off x="196860" y="6639248"/>
-            <a:ext cx="9223026" cy="246221"/>
-          </a:xfrm>
-          <a:prstGeom prst="rect">
-            <a:avLst/>
-          </a:prstGeom>
-          <a:noFill/>
-        </p:spPr>
-        <p:txBody>
-          <a:bodyPr wrap="square" rtlCol="0">
-            <a:spAutoFit/>
-          </a:bodyPr>
-          <a:lstStyle/>
-          <a:p>
-            <a:r>
-              <a:rPr lang="pt-BR" sz="1000" dirty="0">
-                <a:latin typeface="Montserrat"/>
-              </a:rPr>
-              <a:t xml:space="preserve">Hipótese  |  </a:t>
-            </a:r>
-            <a:r>
-              <a:rPr lang="pt-BR" sz="1000" dirty="0">
-                <a:latin typeface="Montserrat"/>
-              </a:rPr>
-              <a:t xml:space="preserve">Dados  |  </a:t>
-            </a:r>
-            <a:r>
-              <a:rPr lang="pt-BR" sz="1000" dirty="0">
-                <a:latin typeface="Montserrat"/>
-              </a:rPr>
-              <a:t xml:space="preserve">Análise descritiva  |  </a:t>
-            </a:r>
-            <a:r>
-              <a:rPr lang="pt-BR" sz="1000" dirty="0">
-                <a:latin typeface="Montserrat"/>
-              </a:rPr>
-              <a:t xml:space="preserve">Metodologia  |  </a:t>
-            </a:r>
-            <a:r>
-              <a:rPr lang="pt-BR" sz="1000" dirty="0">
-                <a:latin typeface="Montserrat"/>
-              </a:rPr>
-              <a:t xml:space="preserve">Identificação  |  </a:t>
-            </a:r>
-            <a:r>
-              <a:rPr lang="pt-BR" sz="1000" dirty="0">
-                <a:latin typeface="Montserrat"/>
-              </a:rPr>
-              <a:t xml:space="preserve">Resultados  |  </a:t>
-            </a:r>
-            <a:r>
-              <a:rPr lang="pt-BR" sz="1000" dirty="0">
-                <a:latin typeface="Montserrat"/>
-              </a:rPr>
-              <a:t xml:space="preserve">Robustez  |  </a:t>
-            </a:r>
-            <a:r>
-              <a:rPr lang="pt-BR" sz="1000" b="1" dirty="0">
-                <a:solidFill>
-                  <a:srgbClr val="114719"/>
-                </a:solidFill>
-                <a:latin typeface="Montserrat"/>
-              </a:rPr>
-              <a:t>Discussão</a:t>
-            </a:r>
-            <a:r>
-              <a:rPr lang="pt-BR" sz="1000" dirty="0">
-                <a:latin typeface="Montserrat"/>
-              </a:rPr>
-              <a:t xml:space="preserve"/>
-            </a:r>
-          </a:p>
-        </p:txBody>
-      </p:sp>
-      <p:sp>
-        <p:nvSpPr>
-          <p:cNvPr id="101" name="Rótulo"/>
-          <p:cNvSpPr/>
-          <p:nvPr/>
-        </p:nvSpPr>
-        <p:spPr>
-          <a:xfrm>
-            <a:off x="292608" y="896112"/>
-            <a:ext cx="1737360" cy="1597152"/>
-          </a:xfrm>
-          <a:prstGeom prst="roundRect">
-            <a:avLst>
-              <a:gd name="adj" fmla="val 10000"/>
-            </a:avLst>
-          </a:prstGeom>
-          <a:solidFill>
-            <a:srgbClr val="114719"/>
-          </a:solidFill>
-          <a:ln>
-            <a:noFill/>
-          </a:ln>
-        </p:spPr>
-        <p:txBody>
-          <a:bodyPr wrap="square" lIns="73152" tIns="45720" rIns="73152" bIns="45720" rtlCol="0" anchor="ctr">
-            <a:noAutofit/>
-          </a:bodyPr>
-          <a:lstStyle/>
-          <a:p>
-            <a:pPr marL="0" indent="0" algn="ctr">
-              <a:lnSpc>
-                <a:spcPct val="100000"/>
-              </a:lnSpc>
-              <a:spcBef>
-                <a:spcPts val="0"/>
-              </a:spcBef>
-              <a:spcAft>
-                <a:spcPts val="0"/>
-              </a:spcAft>
-              <a:buNone/>
-            </a:pPr>
-            <a:r>
-              <a:rPr lang="pt-BR" sz="2400" b="1" dirty="0">
-                <a:solidFill>
-                  <a:srgbClr val="FFFFFF"/>
-                </a:solidFill>
-                <a:latin typeface="Montserrat"/>
-              </a:rPr>
-              <a:t>Teoria</a:t>
-            </a:r>
-          </a:p>
-        </p:txBody>
-      </p:sp>
-      <p:sp>
-        <p:nvSpPr>
-          <p:cNvPr id="102" name="Item"/>
-          <p:cNvSpPr/>
-          <p:nvPr/>
-        </p:nvSpPr>
-        <p:spPr>
-          <a:xfrm>
-            <a:off x="2167128" y="896112"/>
-            <a:ext cx="9720072" cy="1597152"/>
-          </a:xfrm>
-          <a:prstGeom prst="roundRect">
-            <a:avLst>
-              <a:gd name="adj" fmla="val 6000"/>
-            </a:avLst>
-          </a:prstGeom>
-          <a:solidFill>
-            <a:srgbClr val="F4F8F5"/>
-          </a:solidFill>
-          <a:ln w="12700">
-            <a:solidFill>
-              <a:srgbClr val="056429"/>
-            </a:solidFill>
-          </a:ln>
-        </p:spPr>
-        <p:txBody>
-          <a:bodyPr wrap="square" lIns="228600" tIns="36576" rIns="228600" bIns="36576" rtlCol="0" anchor="ctr">
-            <a:noAutofit/>
-          </a:bodyPr>
-          <a:lstStyle/>
-          <a:p>
-            <a:pPr marL="0" indent="0" algn="l">
-              <a:lnSpc>
-                <a:spcPct val="102000"/>
-              </a:lnSpc>
-              <a:spcBef>
-                <a:spcPts val="0"/>
-              </a:spcBef>
-              <a:spcAft>
-                <a:spcPts val="0"/>
-              </a:spcAft>
-              <a:buNone/>
-            </a:pPr>
-            <a:r>
-              <a:rPr lang="pt-BR" sz="2400" b="0" dirty="0">
-                <a:solidFill>
-                  <a:srgbClr val="3A3A3A"/>
-                </a:solidFill>
-                <a:latin typeface="Montserrat"/>
-              </a:rPr>
-              <a:t>aceita se a bolsa compensa o custo do lugar</a:t>
-            </a:r>
-          </a:p>
-        </p:txBody>
-      </p:sp>
-      <p:sp>
-        <p:nvSpPr>
-          <p:cNvPr id="103" name="Rótulo"/>
-          <p:cNvSpPr/>
-          <p:nvPr/>
-        </p:nvSpPr>
-        <p:spPr>
-          <a:xfrm>
-            <a:off x="292608" y="2694432"/>
-            <a:ext cx="1737360" cy="1597152"/>
-          </a:xfrm>
-          <a:prstGeom prst="roundRect">
-            <a:avLst>
-              <a:gd name="adj" fmla="val 10000"/>
-            </a:avLst>
-          </a:prstGeom>
-          <a:solidFill>
-            <a:srgbClr val="114719"/>
-          </a:solidFill>
-          <a:ln>
-            <a:noFill/>
-          </a:ln>
-        </p:spPr>
-        <p:txBody>
-          <a:bodyPr wrap="square" lIns="73152" tIns="45720" rIns="73152" bIns="45720" rtlCol="0" anchor="ctr">
-            <a:noAutofit/>
-          </a:bodyPr>
-          <a:lstStyle/>
-          <a:p>
-            <a:pPr marL="0" indent="0" algn="ctr">
-              <a:lnSpc>
-                <a:spcPct val="100000"/>
-              </a:lnSpc>
-              <a:spcBef>
-                <a:spcPts val="0"/>
-              </a:spcBef>
-              <a:spcAft>
-                <a:spcPts val="0"/>
-              </a:spcAft>
-              <a:buNone/>
-            </a:pPr>
-            <a:r>
-              <a:rPr lang="pt-BR" sz="2400" b="1" dirty="0">
-                <a:solidFill>
-                  <a:srgbClr val="FFFFFF"/>
-                </a:solidFill>
-                <a:latin typeface="Montserrat"/>
-              </a:rPr>
-              <a:t>Dados</a:t>
-            </a:r>
-          </a:p>
-        </p:txBody>
-      </p:sp>
-      <p:sp>
-        <p:nvSpPr>
-          <p:cNvPr id="104" name="Item"/>
-          <p:cNvSpPr/>
-          <p:nvPr/>
-        </p:nvSpPr>
-        <p:spPr>
-          <a:xfrm>
-            <a:off x="2167128" y="2694432"/>
-            <a:ext cx="9720072" cy="1597152"/>
-          </a:xfrm>
-          <a:prstGeom prst="roundRect">
-            <a:avLst>
-              <a:gd name="adj" fmla="val 6000"/>
-            </a:avLst>
-          </a:prstGeom>
-          <a:solidFill>
-            <a:srgbClr val="F4F8F5"/>
-          </a:solidFill>
-          <a:ln w="12700">
-            <a:solidFill>
-              <a:srgbClr val="056429"/>
-            </a:solidFill>
-          </a:ln>
-        </p:spPr>
-        <p:txBody>
-          <a:bodyPr wrap="square" lIns="228600" tIns="36576" rIns="228600" bIns="36576" rtlCol="0" anchor="ctr">
-            <a:noAutofit/>
-          </a:bodyPr>
-          <a:lstStyle/>
-          <a:p>
-            <a:pPr marL="0" indent="0" algn="l">
-              <a:lnSpc>
-                <a:spcPct val="102000"/>
-              </a:lnSpc>
-              <a:spcBef>
-                <a:spcPts val="0"/>
-              </a:spcBef>
-              <a:spcAft>
-                <a:spcPts val="0"/>
-              </a:spcAft>
-              <a:buNone/>
-            </a:pPr>
-            <a:r>
-              <a:rPr lang="pt-BR" sz="2400" b="0" dirty="0">
-                <a:solidFill>
-                  <a:srgbClr val="3A3A3A"/>
-                </a:solidFill>
-                <a:latin typeface="Montserrat"/>
-              </a:rPr>
-              <a:t>a origem pesa mais que toda a bolsa</a:t>
-            </a:r>
-          </a:p>
-        </p:txBody>
-      </p:sp>
-      <p:sp>
-        <p:nvSpPr>
-          <p:cNvPr id="105" name="Rótulo"/>
-          <p:cNvSpPr/>
-          <p:nvPr/>
-        </p:nvSpPr>
-        <p:spPr>
-          <a:xfrm>
-            <a:off x="292608" y="4492752"/>
-            <a:ext cx="1737360" cy="1597152"/>
-          </a:xfrm>
-          <a:prstGeom prst="roundRect">
-            <a:avLst>
-              <a:gd name="adj" fmla="val 10000"/>
-            </a:avLst>
-          </a:prstGeom>
-          <a:solidFill>
-            <a:srgbClr val="114719"/>
-          </a:solidFill>
-          <a:ln>
-            <a:noFill/>
-          </a:ln>
-        </p:spPr>
-        <p:txBody>
-          <a:bodyPr wrap="square" lIns="73152" tIns="45720" rIns="73152" bIns="45720" rtlCol="0" anchor="ctr">
-            <a:noAutofit/>
-          </a:bodyPr>
-          <a:lstStyle/>
-          <a:p>
-            <a:pPr marL="0" indent="0" algn="ctr">
-              <a:lnSpc>
-                <a:spcPct val="100000"/>
-              </a:lnSpc>
-              <a:spcBef>
-                <a:spcPts val="0"/>
-              </a:spcBef>
-              <a:spcAft>
-                <a:spcPts val="0"/>
-              </a:spcAft>
-              <a:buNone/>
-            </a:pPr>
-            <a:r>
-              <a:rPr lang="pt-BR" sz="2400" b="1" dirty="0">
-                <a:solidFill>
-                  <a:srgbClr val="FFFFFF"/>
-                </a:solidFill>
-                <a:latin typeface="Montserrat"/>
-              </a:rPr>
-              <a:t>Leitura</a:t>
-            </a:r>
-          </a:p>
-        </p:txBody>
-      </p:sp>
-      <p:sp>
-        <p:nvSpPr>
-          <p:cNvPr id="106" name="Item"/>
-          <p:cNvSpPr/>
-          <p:nvPr/>
-        </p:nvSpPr>
-        <p:spPr>
-          <a:xfrm>
-            <a:off x="2167128" y="4492752"/>
-            <a:ext cx="9720072" cy="1597152"/>
-          </a:xfrm>
-          <a:prstGeom prst="roundRect">
-            <a:avLst>
-              <a:gd name="adj" fmla="val 6000"/>
-            </a:avLst>
-          </a:prstGeom>
-          <a:solidFill>
-            <a:srgbClr val="F4F8F5"/>
-          </a:solidFill>
-          <a:ln w="12700">
-            <a:solidFill>
-              <a:srgbClr val="056429"/>
-            </a:solidFill>
-          </a:ln>
-        </p:spPr>
-        <p:txBody>
-          <a:bodyPr wrap="square" lIns="228600" tIns="36576" rIns="228600" bIns="36576" rtlCol="0" anchor="ctr">
-            <a:noAutofit/>
-          </a:bodyPr>
-          <a:lstStyle/>
-          <a:p>
-            <a:pPr marL="0" indent="0" algn="l">
-              <a:lnSpc>
-                <a:spcPct val="102000"/>
-              </a:lnSpc>
-              <a:spcBef>
-                <a:spcPts val="0"/>
-              </a:spcBef>
-              <a:spcAft>
-                <a:spcPts val="0"/>
-              </a:spcAft>
-              <a:buNone/>
-            </a:pPr>
-            <a:r>
-              <a:rPr lang="pt-BR" sz="2400" b="0" dirty="0">
-                <a:solidFill>
-                  <a:srgbClr val="3A3A3A"/>
-                </a:solidFill>
-                <a:latin typeface="Montserrat"/>
-              </a:rPr>
-              <a:t>os dados sugerem incentivo limitado (pacote do corte)</a:t>
-            </a:r>
-          </a:p>
-        </p:txBody>
-      </p:sp>
-      <p:sp>
-        <p:nvSpPr>
-          <p:cNvPr id="107" name="Fontes"/>
-          <p:cNvSpPr txBox="1"/>
-          <p:nvPr/>
-        </p:nvSpPr>
-        <p:spPr>
-          <a:xfrm>
-            <a:off x="292608" y="6181344"/>
-            <a:ext cx="11594592" cy="274320"/>
-          </a:xfrm>
-          <a:prstGeom prst="rect">
-            <a:avLst/>
-          </a:prstGeom>
-          <a:noFill/>
-          <a:ln>
-            <a:noFill/>
-          </a:ln>
-        </p:spPr>
-        <p:txBody>
-          <a:bodyPr wrap="square" lIns="0" tIns="0" rIns="0" bIns="0" rtlCol="0" anchor="b">
-            <a:noAutofit/>
-          </a:bodyPr>
-          <a:lstStyle/>
-          <a:p>
-            <a:pPr marL="0" indent="0" algn="l">
-              <a:lnSpc>
-                <a:spcPct val="95000"/>
-              </a:lnSpc>
-              <a:spcBef>
-                <a:spcPts val="0"/>
-              </a:spcBef>
-              <a:spcAft>
-                <a:spcPts val="0"/>
-              </a:spcAft>
-              <a:buNone/>
-            </a:pPr>
-            <a:r>
-              <a:rPr lang="pt-BR" sz="800" b="1" dirty="0">
-                <a:solidFill>
-                  <a:srgbClr val="6B6B6B"/>
-                </a:solidFill>
-                <a:latin typeface="Montserrat"/>
-              </a:rPr>
-              <a:t>Fontes: </a:t>
-            </a:r>
-            <a:r>
-              <a:rPr lang="pt-BR" sz="800" b="0" dirty="0">
-                <a:solidFill>
-                  <a:srgbClr val="6B6B6B"/>
-                </a:solidFill>
-                <a:latin typeface="Montserrat"/>
-              </a:rPr>
-              <a:t>modelo da banca 1; doc 07 da banca 2; docs 57i, 57p e 57x; auditorias 18 e 50.</a:t>
+              <a:t>doc 66 (§0, §5 e §8); doc 07 da banca 2 (§3 e §4); auditorias 18, 50, 52 e 53.</a:t>
             </a:r>
           </a:p>
         </p:txBody>

--- a/output/apresentacao_banca2/deck_banca2_curto.pptx
+++ b/output/apresentacao_banca2/deck_banca2_curto.pptx
@@ -8873,7 +8873,7 @@
           <a:p>
             <a:r>
               <a:rPr lang="pt-BR" dirty="0"/>
-              <a:t>FALA (0:50): A 1ª opção de cada candidato vem dos editais do Ministério da Saúde, ciclos 1 a 3; a origem vem do CNES: o município onde ele tinha vínculo médico antes da inscrição; bolsa e vagas, dos quadros de vagas; o IVS, do Ipea; distância e UF, do IBGE. A unidade de observação é o par candidato × vaga: cada candidato aparece uma vez para cada vaga aberta do seu curso e ciclo, e a variável dependente vale 1 na sua 1ª opção. O funil: dos 5.714 candidatos com 1ª opção, 5.513 se ligam ao CNES, 5.425 têm origem e 5.421 entram no modelo, em 932.577 pares e 56 conjuntos de escolha.</a:t>
+              <a:t>FALA (0:50): A 1ª opção de cada candidato vem dos editais do Ministério da Saúde, ciclos 1 a 3; a origem vem do CNES: o município onde ele tinha vínculo médico antes da inscrição; bolsa e vagas, dos quadros de vagas; o IVS, do Ipea; distância e UF, do IBGE. A unidade de observação é o par candidato × vaga: cada candidato aparece uma vez para cada vaga aberta do seu curso e ciclo, e a variável dependente vale 1 na sua 1ª opção. O funil, à direita, mostra quem sai em cada etapa: dos 5.714 candidatos com 1ª opção, 5.421 entram no modelo.</a:t>
             </a:r>
           </a:p>
           <a:p>
@@ -8938,7 +8938,7 @@
           <a:p>
             <a:r>
               <a:rPr lang="pt-BR" dirty="0"/>
-              <a:t>FALA (0:25): De onde vem a variação da bolsa? De uma regra. Até IVS 0,300, R$ 10 mil; até 0,400, R$ 15 mil; acima, R$ 20 mil. Cada ponto é um município, e a regra reproduz a faixa de 368 de 368 municípios no ciclo 1 e de 454 de 454 no ciclo 2. O município não escolhe a bolsa: é a regra que dá.</a:t>
+              <a:t>FALA (0:25): De onde vem a variação da bolsa? De uma regra. Até IVS 0,300, R$ 10 mil; até 0,400, R$ 15 mil; acima, R$ 20 mil. Cada ponto é um município, e a regra reproduz a faixa de todos os municípios dos ciclos 1 e 2. O município não escolhe a bolsa: é a regra que dá.</a:t>
             </a:r>
           </a:p>
           <a:p>
@@ -9003,7 +9003,7 @@
           <a:p>
             <a:r>
               <a:rPr lang="pt-BR" dirty="0"/>
-              <a:t>FALA (0:35): Antes do modelo, os dados crus. Dos 5.425 candidatos com origem, 79% põem a 1ª opção na própria UF, 46% na mesma região de saúde e 36% no próprio município; a distância mediana é de 51 km. Isso é descritivo: mostra onde escolhem, não por quê. Para a nossa pergunta, diz que a origem é uma força grande. O que falta saber é quanto a bolsa pesa diante dela, e é isso que o modelo mede.</a:t>
+              <a:t>FALA (0:35): Antes do modelo, os dados crus. Dos 5.425 candidatos com origem, 79% põem a 1ª opção na própria UF, 46% na mesma região de saúde e 36% no próprio município; a distância mediana é de 51 km. Isso é descritivo: mostra onde escolhem, não por quê. Para a pergunta: a origem é uma força grande; falta saber quanto a bolsa pesa diante dela, e é isso que o modelo mede.</a:t>
             </a:r>
           </a:p>
           <a:p>
@@ -9068,7 +9068,7 @@
           <a:p>
             <a:r>
               <a:rPr lang="pt-BR" dirty="0"/>
-              <a:t>FALA (0:45): Usamos um logit condicional, por três razões. Primeiro, a escolha é discreta: o candidato escolhe uma entre as vagas abertas do seu curso. Segundo, cada candidato é comparado consigo mesmo: tudo o que é dele, como idade, nota ou família, é igual entre as vagas e sai da conta. Terceiro, a bolsa varia entre vagas por uma regra do IVS, e o IVS entra como curva contínua; então o peso da bolsa vem só dos saltos nos cortes. O teste central é o D_UF: o peso de a vaga estar na UF de origem menos o peso de toda a diferença de bolsa. É unilateral, com erro-padrão agrupado por conjunto de escolha.</a:t>
+              <a:t>FALA (0:45): Usamos um logit condicional, por três razões. Primeiro, a escolha é discreta: o candidato escolhe uma entre as vagas abertas do seu curso. Segundo, cada candidato é comparado consigo mesmo: tudo o que é dele, como idade ou nota, é igual entre as vagas e sai da conta. Terceiro, a bolsa varia entre vagas por uma regra do IVS, e o IVS entra como curva contínua; então o peso da bolsa vem só dos saltos nos cortes. O teste central é o D_UF: o peso de a vaga estar na UF de origem menos o peso de toda a diferença de bolsa. É unilateral, com erro-padrão agrupado por conjunto de escolha.</a:t>
             </a:r>
           </a:p>
           <a:p>
@@ -9198,13 +9198,13 @@
           <a:p>
             <a:r>
               <a:rPr lang="pt-BR" dirty="0"/>
-              <a:t>FALA (0:50): Este é o teste central. No mesmo modelo, com os mesmos 5.421 candidatos, ter a vaga na UF de origem multiplica a chance de ela ser a 1ª opção por 11,0. Toda a diferença de bolsa, de R$ 10 mil para R$ 20 mil, multiplica por 1,57, e esse intervalo contém 1: sozinha, ela não se distingue de zero. A diferença entre os dois pesos, em log-chance, é 1,94, com intervalo de 1,48 a 2,40, e p unilateral menor que 0,001. Em palavras: a origem pesa muito mais que toda a bolsa. Um cuidado: a origem é preferência revelada. Diz quanto ela pesa na escolha, não que mudar o médico de lugar mudaria a escolha.</a:t>
+              <a:t>FALA (0:50): Este é o teste central. No mesmo modelo, entre duas vagas iguais no resto, inclusive na distância, a da UF de origem tem 11,0 vezes a chance de ser a 1ª opção. Toda a diferença de bolsa, de R$ 10 mil para R$ 20 mil, multiplica a chance por 1,57, e esse intervalo contém 1: sozinho, o peso da bolsa não se distingue de zero. A diferença entre os dois pesos, em log-chance, é 1,94, com p unilateral menor que 0,001. Em palavras: a origem pesa muito mais que toda a bolsa. Um cuidado: a origem é preferência revelada, não causa.</a:t>
             </a:r>
           </a:p>
           <a:p>
             <a:r>
               <a:rPr lang="pt-BR" dirty="0"/>
-              <a:t>DETALHE PARA PERGUNTAS: Teste central da hipótese (P1h-1, com o tipo de vaga do ciclo 2 do quadro de 13/02/2026; adendo 52c, auditoria 41). No mesmo modelo e com os mesmos candidatos (ciclos 1–3), a vaga ficar na UF de origem pesa 2,40 [2,27; 2,52] em log-chance: multiplica a chance de ser a 1ª opção por 11,0 [9,7; 12,5]. Toda a diferença de bolsa, de R$ 10 mil para R$ 20 mil, pesa 0,45 [−0,04; 0,95]: multiplica a chance por 1,57 [0,96; 2,58], intervalo que contém 1. A diferença é 1,94 [1,48; 2,40], p unilateral &lt; 0,001 e p de Holm &lt; 0,001 (família de um teste). Como ler o coeficiente: em log-chance, exp(coeficiente) é a razão de chances; 11,0 quer dizer que, entre duas vagas iguais no resto, a da UF de origem tem chance 11,0 vezes maior de ser a 1ª opção. A conclusão resiste à imprecisão da bolsa: o limite de cima de toda a bolsa fica abaixo do limite de baixo da origem. Por ciclo, a origem pesa mais nos três (Robustez). Escolha condicional a se candidatar; a bolsa é o pacote do corte; a origem é preferência revelada, medida pelo vínculo anterior no CNES, e não causa da escolha.</a:t>
+              <a:t>DETALHE PARA PERGUNTAS: Teste central da hipótese (P1h-1, com o tipo de vaga do ciclo 2 do quadro de 13/02/2026; adendo 52c, auditoria 41). No mesmo modelo e com os mesmos 5.421 candidatos (ciclos 1–3), a vaga ficar na UF de origem pesa 2,40 [2,27; 2,52] em log-chance: multiplica a chance de ser a 1ª opção por 11,0 [9,7; 12,5]. Toda a diferença de bolsa, de R$ 10 mil para R$ 20 mil, pesa 0,45 [−0,04; 0,95]: multiplica a chance por 1,57 [0,96; 2,58], intervalo que contém 1. A diferença é 1,94 [1,48; 2,40], p unilateral &lt; 0,001 e p de Holm &lt; 0,001 (família de um teste). Como ler o coeficiente: em log-chance, exp(coeficiente) é a razão de chances; 11,0 quer dizer que, entre duas vagas iguais no resto (inclusive a distância), a da UF de origem tem 11,0 vezes a chance de ser a 1ª opção que a de outra UF; no logit condicional, é a razão entre as probabilidades de escolher uma e a outra. A conclusão resiste à imprecisão da bolsa: o limite de cima de toda a bolsa fica abaixo do limite de baixo da origem. Por ciclo, a origem pesa mais nos três (Robustez). Escolha condicional a se candidatar; a bolsa é o pacote do corte; a origem é preferência revelada, medida pelo vínculo anterior no CNES, e não causa da escolha.</a:t>
             </a:r>
           </a:p>
           <a:p>
@@ -9275,7 +9275,7 @@
           <a:p>
             <a:r>
               <a:rPr lang="pt-BR" dirty="0"/>
-              <a:t>DETALHE PARA PERGUNTAS: Adendo 52e (doc 57x; auditoria 48; pós-resultado): comparando só vagas da mesma UF (a de origem ou outra), vistas por médicos da mesma UF de origem (efeito fixo do par de UFs), a razão de chances da 1ª opção por +R$ 5 mil é 1,47 [1,15; 1,89] nos ciclos 1–3 (p de Holm 0,005) e 1,90 [1,30; 2,78] no ciclo 2 (p de Holm 0,003). Como ler: entre duas vagas parecidas da mesma UF, a de bolsa R$ 5 mil maior tem chance 1,47 vez maior de ser a 1ª opção. No modelo base, sem fixar a UF: 1,25 [0,98; 1,61] e 1,79 [1,19; 2,68]; a especificação pré-registrada (P1a) não rejeita zero (p 0,072; família de um teste, Holm = p). Em km: dentro da mesma UF, +R$ 5 mil pesam como 75 km [28; 122] a menos de distância nos ciclos 1–3 e 117 km [56; 178] no ciclo 2; no modelo base, com o quadro corrigido, 119 km [−12; 250] e 302 km [88; 516]. Os km caem dentro da UF porque a distância pesa mais ali, não porque a bolsa pese menos. Mostra que a escolha responde à bolsa; não testa a comparação com a origem. Escolha não é expansão: o que uma vaga ganha, outra do mesmo curso perde. Com o score bootstrap para poucos grupos, o VL-1 se mantém (doc 57x). Pacote do corte.</a:t>
+              <a:t>DETALHE PARA PERGUNTAS: Adendo 52e (doc 57x; auditoria 48; pós-resultado): comparando só vagas da mesma UF (a de origem ou outra), vistas por médicos da mesma UF de origem (efeito fixo do par de UFs), a razão de chances da 1ª opção por +R$ 5 mil é 1,47 [1,15; 1,89] nos ciclos 1–3 (p de Holm 0,005) e 1,90 [1,30; 2,78] no ciclo 2 (p de Holm 0,003). Como ler: entre duas vagas parecidas da mesma UF, a de bolsa R$ 5 mil maior tem 1,47 vez a chance de ser a 1ª opção. No modelo base, sem fixar a UF: 1,25 [0,98; 1,61] e 1,79 [1,19; 2,68]; a especificação pré-registrada (P1a) não rejeita zero (p 0,072; família de um teste, Holm = p). Em km: dentro da mesma UF, +R$ 5 mil pesam como 75 km [28; 122] a menos de distância nos ciclos 1–3 e 117 km [56; 178] no ciclo 2; no modelo base, com o quadro corrigido, 119 km [−12; 250] e 302 km [88; 516]. Os km caem dentro da UF porque a distância pesa mais ali, não porque a bolsa pese menos. Mostra que a escolha responde à bolsa; não testa a comparação com a origem. Escolha não é expansão: o que uma vaga ganha, outra do mesmo curso perde. Com o score bootstrap para poucos grupos, o VL-1 se mantém (doc 57x). Pacote do corte.</a:t>
             </a:r>
           </a:p>
           <a:p>
@@ -9411,7 +9411,7 @@
           <a:p>
             <a:r>
               <a:rPr lang="pt-BR" dirty="0"/>
-              <a:t>FALA (0:30): Voltando à pergunta: na escolha da vaga, a origem pesa mais que a bolsa? Sim, e em todos os ciclos. Segundo, entre vagas da mesma UF, a bolsa maior é preferida: ela muda qual vaga o médico escolhe. Terceiro, pela teoria da banca 1, o médico aceita a vaga se a bolsa compensa o custo do lugar; os dados sugerem que um degrau de R$ 5 mil não compensa sair da própria UF: incentivo limitado.</a:t>
+              <a:t>FALA (0:30): Voltando à pergunta: na escolha da vaga, a origem pesa mais que toda a bolsa? Sim, e em todos os ciclos. Segundo, entre vagas da mesma UF, a bolsa maior é preferida: ela muda qual vaga o médico escolhe. Terceiro, pela teoria da banca 1, o médico aceita a vaga se a bolsa compensa o custo do lugar; os dados sugerem que um degrau de R$ 5 mil não compensa sair da própria UF: incentivo limitado.</a:t>
             </a:r>
           </a:p>
           <a:p>
@@ -9476,7 +9476,7 @@
           <a:p>
             <a:r>
               <a:rPr lang="pt-BR" dirty="0"/>
-              <a:t>FALA (0:40): Seis limitações, cada uma com o que ela implica. A hipótese é pós-resultado: o resultado é exploratório e pede confirmação com dados novos. A origem é preferência revelada: não dá para dizer que mudar o médico de lugar mudaria a escolha. Só vemos quem se candidatou: nada diz quantos médicos a bolsa atrairia. O contraste é o pacote do corte: não isolamos a bolsa. O peso forte da bolsa aparece só no ciclo 2: não dá para generalizar. E a origem é o vínculo no CNES, não a residência: laços de família ficam de fora. Obrigado.</a:t>
+              <a:t>FALA (0:40): Seis limitações e o que cada uma implica. A hipótese é pós-resultado: o resultado é exploratório e pede dados novos. A origem é preferência revelada: não é causa da escolha. Só vemos quem se candidatou: nada diz quantos médicos a bolsa atrairia. O contraste é o pacote do corte: vale para o pacote, não para os R$ 5 mil sozinhos. A bolsa pesa forte só no ciclo 2: não dá para generalizar. E a origem é o vínculo no CNES, não a residência: para quem trabalha longe de casa, é a do trabalho. Obrigado.</a:t>
             </a:r>
           </a:p>
           <a:p>
@@ -18627,7 +18627,7 @@
                           </a:solidFill>
                           <a:latin typeface="Montserrat"/>
                         </a:rPr>
-                        <a:t>todas as vagas vistas</a:t>
+                        <a:t>suposto: todas vistas</a:t>
                       </a:r>
                     </a:p>
                   </a:txBody>
@@ -19007,7 +19007,7 @@
                 </a:solidFill>
                 <a:latin typeface="Montserrat"/>
               </a:rPr>
-              <a:t>Na UF de origem, chance 11,0 vezes maior; toda a bolsa: 1,57 (IC contém 1).</a:t>
+              <a:t>UF de origem vs. outra UF: chance ×11,0; toda a bolsa: ×1,57 (IC contém 1).</a:t>
             </a:r>
           </a:p>
         </p:txBody>
@@ -19381,7 +19381,7 @@
                 </a:solidFill>
                 <a:latin typeface="Montserrat"/>
               </a:rPr>
-              <a:t>Na mesma UF, +R$ 5 mil: chance 1,47 vez maior; vale 75 km a menos.</a:t>
+              <a:t>Na mesma UF, +R$ 5 mil: chance ×1,47; vale 75 km a menos.</a:t>
             </a:r>
           </a:p>
         </p:txBody>
@@ -19764,7 +19764,7 @@
                 </a:solidFill>
                 <a:latin typeface="Montserrat"/>
               </a:rPr>
-              <a:t> a origem pesa mais que a bolsa nos três ciclos.</a:t>
+              <a:t> origem pesa mais que toda a bolsa nos três ciclos.</a:t>
             </a:r>
           </a:p>
         </p:txBody>
@@ -19822,7 +19822,7 @@
                 </a:solidFill>
                 <a:latin typeface="Montserrat"/>
               </a:rPr>
-              <a:t> peso da bolsa: forte só no ciclo 2; perto do corte, inconclusivo.</a:t>
+              <a:t> peso da bolsa, forte só no ciclo 2; perto do corte, inconclusivo.</a:t>
             </a:r>
           </a:p>
         </p:txBody>
@@ -20025,7 +20025,7 @@
                 </a:solidFill>
                 <a:latin typeface="Montserrat"/>
               </a:rPr>
-              <a:t>Conclusão: a origem pesa mais que a bolsa? Sim</a:t>
+              <a:t>Conclusão: a origem pesa mais que toda a bolsa? Sim</a:t>
             </a:r>
           </a:p>
         </p:txBody>
@@ -20736,8 +20736,8 @@
             <a:tbl>
               <a:tblPr firstRow="1" bandRow="1"/>
               <a:tblGrid>
-                <a:gridCol w="5732847"/>
-                <a:gridCol w="5861745"/>
+                <a:gridCol w="5723777"/>
+                <a:gridCol w="5870815"/>
               </a:tblGrid>
               <a:tr h="732826">
                 <a:tc>
@@ -21368,7 +21368,7 @@
                           </a:solidFill>
                           <a:latin typeface="Montserrat"/>
                         </a:rPr>
-                        <a:t>bolsa instável</a:t>
+                        <a:t>não generalizar</a:t>
                       </a:r>
                     </a:p>
                   </a:txBody>

--- a/output/apresentacao_banca2/deck_banca2_curto.pptx
+++ b/output/apresentacao_banca2/deck_banca2_curto.pptx
@@ -17406,7 +17406,7 @@
                 </a:solidFill>
                 <a:latin typeface="Montserrat"/>
               </a:rPr>
-              <a:t>chance da 1ª opção = bolsa + distância + origem</a:t>
+              <a:t>U = β·bolsa + γ·distância + θ·origem; P(j) = e^Uj/Σe^U</a:t>
             </a:r>
           </a:p>
         </p:txBody>
@@ -17730,7 +17730,7 @@
                 </a:solidFill>
                 <a:latin typeface="Montserrat"/>
               </a:rPr>
-              <a:t>D_UF = origem − bolsa &gt; zero; cluster por conjunto</a:t>
+              <a:t>D_UF = θ − 10β &gt; zero; cluster por conjunto</a:t>
             </a:r>
           </a:p>
         </p:txBody>

--- a/output/apresentacao_banca2/deck_banca2_curto.pptx
+++ b/output/apresentacao_banca2/deck_banca2_curto.pptx
@@ -21,7 +21,6 @@
     <p:sldId id="411" r:id="rId58"/>
     <p:sldId id="412" r:id="rId59"/>
     <p:sldId id="413" r:id="rId60"/>
-    <p:sldId id="414" r:id="rId61"/>
   </p:sldIdLst>
   <p:sldSz cx="12192000" cy="6858000"/>
   <p:notesSz cx="6858000" cy="9144000"/>
@@ -8802,13 +8801,13 @@
           <a:p>
             <a:r>
               <a:rPr lang="pt-BR" dirty="0"/>
-              <a:t>FALA (0:35): Nossa pergunta é simples: quando o médico especialista escolhe uma vaga do PMM-E, o que pesa mais, a bolsa ou a origem dele? A hipótese: ele escolhe perto de onde já trabalha; a bolsa maior muda qual vaga ele escolhe, mas pesa menos que a própria origem. A motivação vem do corte de IVS: onde a bolsa é R$ 5 mil maior, não detectamos aumento do preenchimento. Um aviso honesto, que está na tela: formulamos esta hipótese depois de ver os dados.</a:t>
+              <a:t>FALA (0:35): Nossa pergunta é simples: quando o médico especialista escolhe uma vaga do PMM-E, a bolsa maior muda qual vaga ele põe em 1ª opção? A hipótese: comparando vagas da mesma UF, a vaga de bolsa maior tem mais chance de ser a 1ª opção. A motivação vem do corte de IVS: onde a bolsa é R$ 5 mil maior, não detectamos aumento do preenchimento; então olhamos um passo antes, a escolha. Um aviso honesto, que está na tela: formulamos esta hipótese depois de ver os dados.</a:t>
             </a:r>
           </a:p>
           <a:p>
             <a:r>
               <a:rPr lang="pt-BR" dirty="0"/>
-              <a:t>DETALHE PARA PERGUNTAS: Hipótese única desta versão (decisão do autor de 27/10/2026; doc 07 da banca 2): a antiga H2, bolsa × origem. O médico especialista escolhe vagas perto de onde já trabalha; a bolsa maior muda qual vaga ele escolhe entre vagas da mesma UF, mas pesa menos que a própria origem. Foi formulada depois de ver os resultados do preenchimento no corte e os coeficientes do modelo de escolha: é pós-resultado, e isso é dito aqui. Motivação: onde a bolsa é R$ 5 mil maior, não detectamos aumento do preenchimento, e o desenho só pegaria saltos grandes (apêndice). Ligar a hipótese a esse fato é interpretação, não teste (auditoria 50). O que se testa: se, na escolha da 1ª opção, a vaga ficar na UF de origem pesa mais que toda a diferença de bolsa. O contraste da bolsa é o pacote do corte (a bolsa e as outras regras federais que mudam nos mesmos cortes de IVS, auditoria 18), não a participação no PMM-E nem o Agora Tem Especialistas. Tudo é condicional a se candidatar.</a:t>
+              <a:t>DETALHE PARA PERGUNTAS: Hipótese única desta versão (decisão do autor de 28/10/2026; doc 07 da banca 2): "a hipótese é simplesmente sobre o efeito bolsa → 1ª opção", com "só comparação entre municípios da mesma UF". A UF de origem, a UF da vaga, a região de saúde, o município e a distância entram só como controle e pareamento, nunca como resultado. Foi formulada depois de ver os resultados do preenchimento no corte e os coeficientes do modelo de escolha: é pós-resultado, e isso é dito aqui. Motivação: onde a bolsa é R$ 5 mil maior, não detectamos aumento do preenchimento comparando municípios pareados na mesma UF (apêndice). Ligar a hipótese a esse fato é interpretação, não teste (auditoria 50). O contraste da bolsa é o pacote do corte (a bolsa e as outras regras federais que mudam nos mesmos cortes de IVS, auditoria 18), não a participação no PMM-E nem o Agora Tem Especialistas. Tudo é condicional a se candidatar.</a:t>
             </a:r>
           </a:p>
           <a:p>
@@ -8873,7 +8872,7 @@
           <a:p>
             <a:r>
               <a:rPr lang="pt-BR" dirty="0"/>
-              <a:t>FALA (0:50): A 1ª opção de cada candidato vem dos editais do Ministério da Saúde, ciclos 1 a 3; a origem vem do CNES: o município onde ele tinha vínculo médico antes da inscrição; bolsa e vagas, dos quadros de vagas; o IVS, do Ipea; distância e UF, do IBGE. A unidade de observação é o par candidato × vaga: cada candidato aparece uma vez para cada vaga aberta do seu curso e ciclo, e a variável dependente vale 1 na sua 1ª opção. O funil, à direita, mostra quem sai em cada etapa: dos 5.714 candidatos com 1ª opção, 5.421 entram no modelo.</a:t>
+              <a:t>FALA (0:45): A 1ª opção de cada candidato vem dos editais do Ministério da Saúde, ciclos 1 a 3; a origem vem do CNES: o município onde ele tinha vínculo médico antes da inscrição; bolsa e vagas, dos quadros de vagas; o IVS, do Ipea; distância e UF, do IBGE. A unidade de observação é o par candidato × vaga: cada candidato aparece uma vez para cada vaga aberta do seu curso e ciclo, e a variável dependente vale 1 na sua 1ª opção. O funil, à direita, mostra quem sai em cada etapa: dos 5.714 candidatos com 1ª opção, 5.421 entram no modelo.</a:t>
             </a:r>
           </a:p>
           <a:p>
@@ -9003,13 +9002,13 @@
           <a:p>
             <a:r>
               <a:rPr lang="pt-BR" dirty="0"/>
-              <a:t>FALA (0:35): Antes do modelo, os dados crus. Dos 5.425 candidatos com origem, 79% põem a 1ª opção na própria UF, 46% na mesma região de saúde e 36% no próprio município; a distância mediana é de 51 km. Isso é descritivo: mostra onde escolhem, não por quê. Para a pergunta: a origem é uma força grande; falta saber quanto a bolsa pesa diante dela, e é isso que o modelo mede.</a:t>
+              <a:t>FALA (0:30): Antes do modelo, os dados crus. Dos 5.425 candidatos com origem, 79% põem a 1ª opção na própria UF, e a distância mediana é de 51 km. Isso é descritivo, e não é o nosso resultado: é o motivo do desenho. Como a maioria escolhe dentro da própria UF, comparamos só vagas da mesma UF, e a UF entra como controle.</a:t>
             </a:r>
           </a:p>
           <a:p>
             <a:r>
               <a:rPr lang="pt-BR" dirty="0"/>
-              <a:t>DETALHE PARA PERGUNTAS: Descritivo. Dos 5.425 candidatos com 1ª opção e município de origem, 79% põem a 1ª opção na UF onde já trabalhavam, 46% na mesma região de saúde e 36% no próprio município; a distância mediana até a 1ª opção é 51 km, e três em cada quatro ficam a até 189 km. A origem é o município do vínculo médico anterior no CNES, não a residência. É preferência revelada: diz onde escolhem, não por quê. A comparação crua não isola a bolsa, porque mistura a bolsa com o IVS, a distância e a própria origem (doc 66, §3); quem separa esses pesos é o modelo de escolha.</a:t>
+              <a:t>DETALHE PARA PERGUNTAS: Descritivo. Dos 5.425 candidatos com 1ª opção e município de origem, 79% põem a 1ª opção na UF onde já trabalhavam, 46% na mesma região de saúde e 36% no próprio município; a distância mediana até a 1ª opção é 51 km, e três em cada quatro ficam a até 189 km. A origem é o município do vínculo médico anterior no CNES, não a residência. É preferência revelada: diz onde escolhem, não por quê. Aqui ela não é resultado: é a razão para controlar e parear pela UF (decisão do autor de 28/10/2026). Como a comparação crua mistura a bolsa com o IVS, a distância e a UF (doc 66, §3), o modelo compara cada candidato consigo mesmo, só entre vagas da mesma UF.</a:t>
             </a:r>
           </a:p>
         </p:txBody>
@@ -9068,13 +9067,19 @@
           <a:p>
             <a:r>
               <a:rPr lang="pt-BR" dirty="0"/>
-              <a:t>FALA (0:45): Usamos um logit condicional, por três razões. Primeiro, a escolha é discreta: o candidato escolhe uma entre as vagas abertas do seu curso. Segundo, cada candidato é comparado consigo mesmo: tudo o que é dele, como idade ou nota, é igual entre as vagas e sai da conta. Terceiro, a bolsa varia entre vagas por uma regra do IVS, e o IVS entra como curva contínua; então o peso da bolsa vem só dos saltos nos cortes. O teste central é o D_UF: o peso de a vaga estar na UF de origem menos o peso de toda a diferença de bolsa. É unilateral, com erro-padrão agrupado por conjunto de escolha.</a:t>
+              <a:t>FALA (0:35): Agora, a descritiva da hipótese. Pegamos só as 1ªs opções na UF de origem, a até 0,050 de um corte de IVS, onde as vagas dos dois lados são parecidas. O lado de bolsa maior tem 52,5% das vagas, mas recebe 60,8% das 1ªs opções: é mais escolhido do que oferecido, e nos três ciclos. Cuidado: é descritivo, sem teste e sem controlar a distância; quem testa é o modelo.</a:t>
             </a:r>
           </a:p>
           <a:p>
             <a:r>
               <a:rPr lang="pt-BR" dirty="0"/>
-              <a:t>DETALHE PARA PERGUNTAS: Logit condicional (McFadden): cada um dos 5.421 candidatos escolhe, entre as vagas abertas do seu curso e ciclo, a de maior utilidade; o candidato é comparado consigo mesmo entre as vagas que podia escolher, e o que não varia entre vagas (dele) sai da verossimilhança. Utilidade = bolsa (linear, por R$ 1 mil) + curva contínua do IVS (spline com dobras nos cortes, sem salto) + distância em km + mesma UF, mesma região de saúde e mesmo município da origem + porte, capital, estrato, macrorregião e vagas imediatas da vaga. Só o salto da bolsa nos cortes de IVS identifica o peso dela. Teste central (P1h-1, protocolo 52b, pós-resultado): D_UF = peso da vaga na UF de origem − peso de toda a bolsa (10 × β), H0: D_UF ≤ zero, unilateral, com o tipo de vaga do ciclo 2 do quadro de 13/02/2026 (adendo 52c). Erro-padrão agrupado por conjunto de escolha (curso × ciclo). Adendo 52e (pós-resultado): efeito fixo do par (UF de origem, UF da vaga), comparando só vagas da mesma UF (a de origem ou outra) vistas por médicos da mesma UF de origem. Por ciclo: o mesmo modelo em cada ciclo. Por que não um logit multinomial com efeitos de vaga? Porque a pergunta é o peso de atributos da vaga que variam por candidato (distância, origem) contra a bolsa; o condicional é o modelo de escolha discreta feito para isso.</a:t>
+              <a:t>DETALHE PARA PERGUNTAS: Descritivo (doc 66, §3; figura F2 do doc 66, usada sem redesenho; auditoria 52). Só 1ªs opções na UF de origem a até 0,050 de um corte; para cada candidato, a parte das vagas (estabelecimento × curso) do mesmo curso e UF que fica no lado de bolsa maior, contra a parte das 1ªs opções que fica nele: 52,5% das vagas e 60,8% das 1ªs opções, com 1.568 candidatos nos ciclos 1–3. Em cada ciclo, as 1ªs opções ficam acima das vagas. Não é evidência à parte: sem teste e sem controlar a distância; a versão com inferência, distância e o par de UFs fixado (VL-2, só vagas perto do corte) é inconclusiva (Robustez). Pacote do corte; condicional a se candidatar.</a:t>
+            </a:r>
+          </a:p>
+          <a:p>
+            <a:r>
+              <a:rPr lang="pt-BR" dirty="0"/>
+              <a:t>Cautela na tela: Descritivo: sem teste e sem controlar a distância.</a:t>
             </a:r>
           </a:p>
         </p:txBody>
@@ -9133,13 +9138,13 @@
           <a:p>
             <a:r>
               <a:rPr lang="pt-BR" dirty="0"/>
-              <a:t>FALA (0:30): Cinco premissas. A bolsa segue a regra do IVS, sem exceção nos ciclos 1 e 2. Mas nos mesmos cortes mudam outras regras federais: medimos o pacote do corte. A independência de alternativas irrelevantes vale só em parte, mas no logit aninhado o peso da bolsa fica perto do mesmo valor. Com o par de UFs fixado, ele não diminui. E supomos que o candidato viu todas as vagas do seu curso.</a:t>
+              <a:t>FALA (0:35): Usamos um logit condicional. A escolha é discreta: o candidato escolhe uma entre as vagas abertas do seu curso. Cada candidato é comparado consigo mesmo, e o efeito fixo do par de UFs faz a comparação só entre vagas da mesma UF, vistas por médicos da mesma UF de origem. A distância, a região e o município entram como controle. A bolsa varia pela regra do IVS. O teste é β maior que zero, com erro-padrão agrupado por conjunto de escolha.</a:t>
             </a:r>
           </a:p>
           <a:p>
             <a:r>
               <a:rPr lang="pt-BR" dirty="0"/>
-              <a:t>DETALHE PARA PERGUNTAS: Bolsa por regra: o IVS 2010 oficial reproduz a faixa de todos os municípios dos ciclos 1 e 2 (368/368 e 454/454); o município não escolhe a bolsa. Pacote do corte: em 0,300 e 0,400 mudam também outras regras federais (auditoria 18); o peso da bolsa é o do pacote, não o da bolsa sozinha nem o da participação no PMM-E. IIA (independência de alternativas irrelevantes): o logit aninhado por região de saúde a rejeita em parte, e o ponto do peso da bolsa fica perto do mesmo valor (doc 57a; com o quadro de 13/02/2026, doc 57v). Localização: com o par de UFs fixado, o peso da bolsa não diminui (adendo 52e, auditoria 48); a comparação só com vagas perto do corte é inconclusiva. Conjunto de escolha: supõe que o candidato viu todas as vagas do seu curso e listou sem estratégia (a alocação é por nota). Origem: preferência revelada, medida pelo vínculo anterior no CNES; mistura família, rede e registro; não é efeito causal de mudar alguém de lugar. Pós-resultado: a hipótese e o teste D_UF foram formulados depois de ver os coeficientes; o peso da bolsa pré-registrado (P1a, sem fixar a UF) não rejeita zero (p 0,072; família de um teste, Holm = p). Tudo é condicional a se candidatar.</a:t>
+              <a:t>DETALHE PARA PERGUNTAS: Logit condicional (McFadden): cada um dos 5.421 candidatos escolhe, entre as vagas abertas do seu curso e ciclo, a de maior utilidade; o candidato é comparado consigo mesmo entre as vagas que podia escolher, e o que não varia entre vagas (dele) sai da verossimilhança. Utilidade (VL-1, adendo 52e): bolsa (linear, por R$ 1 mil) + curva contínua do IVS (spline com dobras nos cortes, sem salto) + distância + mesma região de saúde e mesmo município da origem + efeito fixo do par (UF de origem, UF da vaga) + porte, capital, estrato e vagas imediatas da vaga. Com o efeito fixo do par, o peso da bolsa vem só de vagas da mesma UF (a de origem ou outra), vistas por médicos da mesma UF de origem. Só o salto da bolsa nos cortes de IVS identifica o peso dela. UF, região, município e distância são controle e pareamento: os coeficientes deles não são interpretados. Teste: β zero; p de H0: β = zero com erro-padrão agrupado por conjunto de escolha (curso × ciclo), Holm nas três principais do adendo e, com poucos grupos, score bootstrap de Rademacher. Tipo de vaga do ciclo 2 pelo quadro de 13/02/2026 (adendo 52c). Especificação pós-resultado: o adendo 52e foi congelado antes de rodar, mas depois de ver o modelo base.</a:t>
             </a:r>
           </a:p>
         </p:txBody>
@@ -9198,19 +9203,13 @@
           <a:p>
             <a:r>
               <a:rPr lang="pt-BR" dirty="0"/>
-              <a:t>FALA (0:50): Este é o teste central. No mesmo modelo, entre duas vagas iguais no resto, inclusive na distância, a da UF de origem tem 11,0 vezes a chance de ser a 1ª opção. Toda a diferença de bolsa, de R$ 10 mil para R$ 20 mil, multiplica a chance por 1,57, e esse intervalo contém 1: sozinho, o peso da bolsa não se distingue de zero. A diferença entre os dois pesos, em log-chance, é 1,94, com p unilateral menor que 0,001. Em palavras: a origem pesa muito mais que toda a bolsa. Um cuidado: a origem é preferência revelada, não causa.</a:t>
+              <a:t>FALA (0:45): Cinco premissas. Primeiro, a bolsa segue a regra do IVS, sem exceção nos ciclos 1 e 2. Segundo, o que mantemos fixo: o próprio candidato, o par de UFs e a distância; a região de saúde e o município também entram como controle. Terceiro, nos mesmos cortes mudam outras regras federais: medimos o pacote do corte. Quarto, e precisamos ser claros: esta especificação foi escolhida depois de ver o resultado; a pré-registrada, sem fixar a UF, tem intervalo que contém 1. Quinto, supomos que o candidato viu todas as vagas do seu curso.</a:t>
             </a:r>
           </a:p>
           <a:p>
             <a:r>
               <a:rPr lang="pt-BR" dirty="0"/>
-              <a:t>DETALHE PARA PERGUNTAS: Teste central da hipótese (P1h-1, com o tipo de vaga do ciclo 2 do quadro de 13/02/2026; adendo 52c, auditoria 41). No mesmo modelo e com os mesmos 5.421 candidatos (ciclos 1–3), a vaga ficar na UF de origem pesa 2,40 [2,27; 2,52] em log-chance: multiplica a chance de ser a 1ª opção por 11,0 [9,7; 12,5]. Toda a diferença de bolsa, de R$ 10 mil para R$ 20 mil, pesa 0,45 [−0,04; 0,95]: multiplica a chance por 1,57 [0,96; 2,58], intervalo que contém 1. A diferença é 1,94 [1,48; 2,40], p unilateral &lt; 0,001 e p de Holm &lt; 0,001 (família de um teste). Como ler o coeficiente: em log-chance, exp(coeficiente) é a razão de chances; 11,0 quer dizer que, entre duas vagas iguais no resto (inclusive a distância), a da UF de origem tem 11,0 vezes a chance de ser a 1ª opção que a de outra UF; no logit condicional, é a razão entre as probabilidades de escolher uma e a outra. A conclusão resiste à imprecisão da bolsa: o limite de cima de toda a bolsa fica abaixo do limite de baixo da origem. Por ciclo, a origem pesa mais nos três (Robustez). Escolha condicional a se candidatar; a bolsa é o pacote do corte; a origem é preferência revelada, medida pelo vínculo anterior no CNES, e não causa da escolha.</a:t>
-            </a:r>
-          </a:p>
-          <a:p>
-            <a:r>
-              <a:rPr lang="pt-BR" dirty="0"/>
-              <a:t>Cautela na tela: Origem é preferência revelada, não causa.</a:t>
+              <a:t>DETALHE PARA PERGUNTAS: Bolsa por regra: o IVS 2010 oficial reproduz a faixa de todos os municípios dos ciclos 1 e 2 (368/368 e 454/454); o município não escolhe a bolsa. Mantido fixo: o candidato (logit condicional), o par (UF de origem, UF da vaga) por efeito fixo e a distância, com a mesma região de saúde e o mesmo município da origem como controles; nenhum deles é resultado. Pacote do corte: em 0,300 e 0,400 mudam também outras regras federais (auditoria 18); o peso da bolsa é o do pacote, não o da bolsa sozinha nem o da participação no PMM-E. Especificação pós-resultado (adendo 52e; auditoria 48): congelada antes de rodar, depois de ver o modelo base. A especificação pré-registrada (P1a, sem fixar a UF) dá 1,25 [0,98; 1,61], IC que contém 1 (p 0,072; família de um teste, Holm = p). IIA (independência de alternativas irrelevantes): no modelo base, o logit aninhado por região de saúde a rejeita em parte e o peso da bolsa fica perto do mesmo valor (doc 57a; doc 57v); não foi refeito com o par de UFs. Conjunto de escolha: supõe que o candidato viu todas as vagas do seu curso e listou sem estratégia (a alocação é por nota). A origem é medida pelo vínculo anterior no CNES, não pela residência. Tudo é condicional a se candidatar.</a:t>
             </a:r>
           </a:p>
         </p:txBody>
@@ -9269,19 +9268,19 @@
           <a:p>
             <a:r>
               <a:rPr lang="pt-BR" dirty="0"/>
-              <a:t>FALA (0:40): Então a bolsa não pesa? Pesa, quando comparamos vagas parecidas. Fixando o par de UFs, comparamos só vagas da mesma UF, a de origem ou outra, vistas por médicos da mesma UF de origem. Aí, R$ 5 mil a mais multiplicam a chance por 1,47 nos ciclos 1 a 3 juntos e por 1,90 no ciclo 2. Na escolha, isso vale o mesmo que 75 km a menos de distância. Duas ressalvas: é um adendo feito depois do resultado; e, na especificação pré-registrada, sem fixar a UF, o p é 0,072.</a:t>
+              <a:t>FALA (0:50): Este é o resultado principal. Comparando só vagas da mesma UF, a de origem ou outra, vistas por médicos da mesma UF de origem, a vaga com bolsa R$ 5 mil maior tem 1,47 vez a chance de ser a 1ª opção, nos ciclos 1 a 3 juntos; o intervalo vai de 1,15 a 1,89. No ciclo 2, 1,90. Em km: na escolha, R$ 5 mil a mais valem o mesmo que 75 km a menos de distância. Duas ressalvas, na tela: é uma especificação escolhida depois do resultado; e a pré-registrada, sem fixar a UF, tem intervalo que contém 1.</a:t>
             </a:r>
           </a:p>
           <a:p>
             <a:r>
               <a:rPr lang="pt-BR" dirty="0"/>
-              <a:t>DETALHE PARA PERGUNTAS: Adendo 52e (doc 57x; auditoria 48; pós-resultado): comparando só vagas da mesma UF (a de origem ou outra), vistas por médicos da mesma UF de origem (efeito fixo do par de UFs), a razão de chances da 1ª opção por +R$ 5 mil é 1,47 [1,15; 1,89] nos ciclos 1–3 (p de Holm 0,005) e 1,90 [1,30; 2,78] no ciclo 2 (p de Holm 0,003). Como ler: entre duas vagas parecidas da mesma UF, a de bolsa R$ 5 mil maior tem 1,47 vez a chance de ser a 1ª opção. No modelo base, sem fixar a UF: 1,25 [0,98; 1,61] e 1,79 [1,19; 2,68]; a especificação pré-registrada (P1a) não rejeita zero (p 0,072; família de um teste, Holm = p). Em km: dentro da mesma UF, +R$ 5 mil pesam como 75 km [28; 122] a menos de distância nos ciclos 1–3 e 117 km [56; 178] no ciclo 2; no modelo base, com o quadro corrigido, 119 km [−12; 250] e 302 km [88; 516]. Os km caem dentro da UF porque a distância pesa mais ali, não porque a bolsa pese menos. Mostra que a escolha responde à bolsa; não testa a comparação com a origem. Escolha não é expansão: o que uma vaga ganha, outra do mesmo curso perde. Com o score bootstrap para poucos grupos, o VL-1 se mantém (doc 57x). Pacote do corte.</a:t>
+              <a:t>DETALHE PARA PERGUNTAS: VL-1 (adendo 52e; doc 57x; auditoria 48; pós-resultado): comparando só vagas da mesma UF (a de origem ou outra), vistas por médicos da mesma UF de origem (efeito fixo do par de UFs), a razão de chances da 1ª opção por +R$ 5 mil é 1,47 [1,15; 1,89] nos ciclos 1–3 (p de Holm 0,005) e 1,90 [1,30; 2,78] no ciclo 2 (p de Holm 0,003). Como ler: entre duas vagas parecidas da mesma UF, a de bolsa R$ 5 mil maior tem 1,47 vez a chance de ser a 1ª opção; no logit condicional, é a razão entre as probabilidades de escolher uma e a outra. Em km: dentro da mesma UF, +R$ 5 mil pesam como 75 km [28; 122] a menos de distância nos ciclos 1–3 e 117 km [56; 178] no ciclo 2. Sem fixar a UF (modelo base; a especificação pré-registrada é a dos ciclos 1–3): 1,25 [0,98; 1,61], IC que contém 1 (p 0,072; família de um teste, Holm = p), e 1,79 [1,19; 2,68] no ciclo 2. Com o score bootstrap para poucos grupos, o VL-1 se mantém (doc 57x). Escolha não é expansão: o que uma vaga ganha, outra do mesmo curso perde. Pacote do corte; condicional a se candidatar.</a:t>
             </a:r>
           </a:p>
           <a:p>
             <a:r>
               <a:rPr lang="pt-BR" dirty="0"/>
-              <a:t>Cautela na tela: Adendo pós-resultado; pré-registrado, sem fixar a UF: p 0,072.</a:t>
+              <a:t>Cautela na tela: Adendo pós-resultado; pré-registrado, sem fixar a UF: IC contém 1.</a:t>
             </a:r>
           </a:p>
         </p:txBody>
@@ -9340,19 +9339,13 @@
           <a:p>
             <a:r>
               <a:rPr lang="pt-BR" dirty="0"/>
-              <a:t>FALA (0:40): Se mantém, à direita: a origem pesa mais que toda a bolsa em cada ciclo separado; a diferença fica acima de zero nos três, de 1,19 no ciclo 2 a 2,37 no ciclo 3. E, entre vagas da mesma UF, a bolsa continua pesando com a distância em log e com a região de saúde fixada. Não se mantém o peso da bolsa sozinho: no pré-registrado o intervalo contém 1; ele é forte só no ciclo 2, e perto do corte é inconclusivo. Por que o ciclo 2? Não sabemos.</a:t>
+              <a:t>FALA (0:40): A robustez fica sempre dentro da mesma UF. À esquerda, o peso da bolsa se mantém com a distância em log e com a região de saúde de origem no lugar da UF de origem. Só com vagas perto do corte, o intervalo contém 1: inconclusivo. À direita, ciclo a ciclo: o efeito é forte só no ciclo 2; nos ciclos 1 e 3, o intervalo contém 1. Por que o ciclo 2? Não sabemos.</a:t>
             </a:r>
           </a:p>
           <a:p>
             <a:r>
               <a:rPr lang="pt-BR" dirty="0"/>
-              <a:t>DETALHE PARA PERGUNTAS: Especificação pré-registrada (M1, ciclos 1–3, quadro corrigido): 1,25 [0,98; 1,61], IC que contém 1; é a principal do peso da bolsa, e o VL-1 é adendo. Por ciclo (o mesmo modelo): razão de chances 1,07 [0,69; 1,65] no ciclo 1, 1,79 [1,19; 2,68] no ciclo 2 e 1,00 [0,72; 1,39] no ciclo 3. A bolsa desloca a escolha com força só no ciclo 2; nos ciclos 1 e 3, os intervalos são largos, e não sabemos por quê (leituras candidatas, sem teste: informação sobre a grade, vagas por curso, parte de vagas imediatas; doc 57a). Quadro do ciclo 2: com o quadro refeito depois do resultado (19/03/2026), 1,70 [1,22; 2,37]; com o de 13/02/2026, vigente na inscrição, 1,79 (adendo 52c, auditoria 41; as demais variantes no adendo 52d, auditoria 46). Comparando vagas da mesma UF: com a distância em log, 1,45 [1,15; 1,83] (ciclo 2: 1,75 [1,23; 2,49]); com a região de saúde de origem no lugar da UF de origem, 1,49 [1,15; 1,92] (ciclo 2: 1,91 [1,33; 2,74]); só com vagas a até 0,050 de um corte, 1,28 [0,95; 1,72], p de Holm 0,103: inconclusivo. À direita, origem − toda a bolsa por ciclo: 2,34 [1,45; 3,24], 1,19 [0,51; 1,86] e 2,37 [1,75; 3,00]: a origem pesa mais nos três ciclos. O peso da bolsa sozinho depende da especificação: com o logit explodido (doc 57v) e com o spline cúbico do IVS (doc 42), o IC contém 1; origem − bolsa fica acima de zero em todas as variantes (doc 66, §7). Tudo pós-resultado e condicional a se candidatar.</a:t>
-            </a:r>
-          </a:p>
-          <a:p>
-            <a:r>
-              <a:rPr lang="pt-BR" dirty="0"/>
-              <a:t>Cautela na tela: Pré-registrado: IC contém 1.</a:t>
+              <a:t>DETALHE PARA PERGUNTAS: Todas as variantes comparam vagas da mesma UF. Ciclos 1–3 (adendo 52e; doc 57x; auditoria 48): VL-1, 1,47 [1,15; 1,89]; com a distância em log, 1,45 [1,15; 1,83] (ciclo 2: 1,75 [1,23; 2,49]); com o efeito fixo de região de saúde de origem × UF da vaga (VL-3), 1,49 [1,15; 1,92] (ciclo 2: 1,91 [1,33; 2,74]); só com vagas a até 0,050 de um corte (VL-2), 1,28 [0,95; 1,72], p de Holm 0,103: inconclusivo, a comparação local tem pouca informação. Por ciclo, com o par de UFs fixado (adendo 52g; doc 57z; pós-resultado; auditoria pendente): ciclo 1, 1,15 [0,66; 2,01], com 16 conjuntos de escolha; ciclo 2, 1,90 [1,30; 2,78]; ciclo 3, 1,25 [0,90; 1,73], com 23 conjuntos. A leitura fixada no adendo antes de rodar: forte só no ciclo 2, como na especificação base. Os km dos ciclos 1 e 3 têm IC que contém zero e não são usados. Por que o ciclo 2, não sabemos (leituras candidatas, sem teste: informação sobre a grade, vagas por curso, parte de vagas imediatas; doc 57a). Tudo pós-resultado e condicional a se candidatar; pacote do corte.</a:t>
             </a:r>
           </a:p>
         </p:txBody>
@@ -9411,13 +9404,13 @@
           <a:p>
             <a:r>
               <a:rPr lang="pt-BR" dirty="0"/>
-              <a:t>FALA (0:30): Voltando à pergunta: na escolha da vaga, a origem pesa mais que toda a bolsa? Sim, e em todos os ciclos. Segundo, entre vagas da mesma UF, a bolsa maior é preferida: ela muda qual vaga o médico escolhe. Terceiro, pela teoria da banca 1, o médico aceita a vaga se a bolsa compensa o custo do lugar; os dados sugerem que um degrau de R$ 5 mil não compensa sair da própria UF: incentivo limitado.</a:t>
+              <a:t>FALA (0:35): Voltando à pergunta: a bolsa maior aumenta a chance de a vaga ser a 1ª opção, comparando vagas da mesma UF? Sim: 1,47 vez a chance nos três ciclos juntos, e forte só no ciclo 2. Pela teoria da banca 1, o médico aceita a vaga se a bolsa compensa o custo do lugar; os dados sugerem que R$ 5 mil compensam parte desse custo, cerca de 75 km a menos. Isso vale para a escolha de quem se candidatou, não para o preenchimento.</a:t>
             </a:r>
           </a:p>
           <a:p>
             <a:r>
               <a:rPr lang="pt-BR" dirty="0"/>
-              <a:t>DETALHE PARA PERGUNTAS: No modelo da banca 1, o médico aceita a vaga se a bolsa compensa o custo do lugar. O dado: a vaga na UF de origem pesa mais que toda a diferença de bolsa (o pacote do corte); o D_UF positivo diz só isso. A leitura que os dados sugerem, sem teste direto: o custo que pesa não é o do município, que a bolsa compensa, e sim o de sair da própria UF; a origem é preferência revelada e pode carregar também família, rede e o emprego atual. Um degrau de R$ 5 mil desloca a escolha entre vagas da mesma UF, e os dados sugerem que não compensa esse custo: incentivo limitado. É coerente com não termos detectado aumento do preenchimento no corte (apêndice), mas essa ligação é interpretação, não teste (auditoria 50). Dá para afirmar: entre quem se candidatou, a vaga de bolsa maior é preferida a uma vaga parecida da mesma UF; a origem pesa mais que toda a diferença de bolsa. Não dá para afirmar: que a bolsa causa mais médicos no município; que a origem causa a escolha; que o efeito no preenchimento é zero; que a bolsa reduz o preenchimento. O contraste é o pacote do corte, não a participação no PMM-E. Próximos passos: as decisões do autor que seguem abertas (doc 05, §4.1), o ciclo 3 com a competência 202703 madura e o universo de inscritos.</a:t>
+              <a:t>DETALHE PARA PERGUNTAS: No modelo da banca 1, o médico aceita a vaga se a bolsa compensa o custo do lugar. O dado: comparando vagas da mesma UF, a vaga de bolsa maior tem mais chance de ser a 1ª opção. A leitura que os dados sugerem, sem teste direto: a bolsa compensa parte do custo do lugar, e R$ 5 mil valem cerca de 75 km a menos de distância na escolha. É interpretação, não teste (auditoria 50). Não testamos se isso aumenta o preenchimento; no corte, comparando municípios pareados na mesma UF, não detectamos aumento (apêndice). Dá para afirmar: entre quem se candidatou, a vaga de bolsa maior é preferida a uma vaga parecida da mesma UF, com força só no ciclo 2 (nos ciclos 1 e 3, separados, o IC contém 1). Não dá para afirmar: que a bolsa causa mais médicos no município; que o efeito no preenchimento é zero; que a bolsa reduz o preenchimento; que o efeito vale fora do pacote do corte. O contraste é o pacote do corte, não a participação no PMM-E. Próximos passos: a auditoria do adendo 52g, o ciclo 3 com a competência 202703 madura e o universo de inscritos.</a:t>
             </a:r>
           </a:p>
         </p:txBody>
@@ -9476,13 +9469,13 @@
           <a:p>
             <a:r>
               <a:rPr lang="pt-BR" dirty="0"/>
-              <a:t>FALA (0:40): Seis limitações e o que cada uma implica. A hipótese é pós-resultado: o resultado é exploratório e pede dados novos. A origem é preferência revelada: não é causa da escolha. Só vemos quem se candidatou: nada diz quantos médicos a bolsa atrairia. O contraste é o pacote do corte: vale para o pacote, não para os R$ 5 mil sozinhos. A bolsa pesa forte só no ciclo 2: não dá para generalizar. E a origem é o vínculo no CNES, não a residência: para quem trabalha longe de casa, é a do trabalho. Obrigado.</a:t>
+              <a:t>FALA (0:45): Seis limitações e o que cada uma implica. A especificação é pós-resultado: o resultado é exploratório e pede dados novos. Sem fixar a UF, como no pré-registrado, o intervalo contém 1. Só vemos quem se candidatou: mudar a escolha não é mudar o preenchimento. O contraste é o pacote do corte: vale para o pacote, não para os R$ 5 mil sozinhos. O efeito é forte só no ciclo 2: não dá para generalizar. E a origem é o vínculo no CNES, não a residência. Obrigado.</a:t>
             </a:r>
           </a:p>
           <a:p>
             <a:r>
               <a:rPr lang="pt-BR" dirty="0"/>
-              <a:t>DETALHE PARA PERGUNTAS: Implicações, com mais detalhe. Pós-resultado: a hipótese e o teste D_UF vieram depois dos coeficientes; o resultado é exploratório e só vira confirmatório com um protocolo congelado aplicado a dados novos (o universo de inscritos, novos ciclos). Preferência revelada: θ_UF junta família, rede, registro no conselho regional e, sobretudo, manter o emprego atual (as horas da bolsa são cumuláveis); não mede o efeito causal de mudar a origem de alguém, e a política não pode "mover a origem". Condicional a se candidatar: sem a margem extensiva, nada aqui diz quantos especialistas a mais se inscreveriam com bolsa maior; escolha não é preenchimento. Pacote do corte: nos mesmos cortes mudam outras regras federais (auditoria 18); a implicação de política vale para o pacote, não para os R$ 5 mil sozinhos. Só no ciclo 2: o peso forte da bolsa vem de um ciclo; nos ciclos 1 e 3 os IC são largos; não generalizar para o programa. Origem = vínculo no CNES: quem trabalha longe de casa aparece com a origem do trabalho; a distância "de casa" pode estar subestimada. Perguntas prováveis da banca (doc 66, §8). P1, "Vocês formularam a hipótese depois de ver os resultados?" Sim, e está na tela do slide 1; o D_UF formaliza uma diferença já visível nos IC (protocolo 52b; auditoria 31), e o VL-1 foi congelado antes de rodar (52e; auditoria 48). P2, "Se a bolsa não passa no Holm no pré-registrado, como ela muda qual vaga?" Pelo VL-1, que compara vagas da mesma UF e passa no Holm do adendo: 1,47 [1,15; 1,89], p de Holm 0,005; e pelo ciclo 2. No pré-registrado, p 0,072. O teste central da hipótese continua sendo o D_UF. P3, "Isso é a bolsa ou o pacote?" O pacote do corte: nos mesmos cortes mudam outras regras federais (auditoria 18); em 0,300 nenhum outro incentivo individual ao especialista do PMM-E muda (auditoria 35); em 0,400 fica aberta a ajuda de custo do PMMB; nos dois cortes, o serviço do município pode mudar.</a:t>
+              <a:t>DETALHE PARA PERGUNTAS: Implicações, com mais detalhe. Pós-resultado: a hipótese e a especificação com o par de UFs vieram depois dos coeficientes do modelo base; o resultado é exploratório e só vira confirmatório com um protocolo congelado aplicado a dados novos (o universo de inscritos, novos ciclos). Sem fixar a UF: a especificação pré-registrada (P1a) dá 1,25 [0,98; 1,61], IC que contém 1 (p 0,072; família de um teste, Holm = p). Condicional a se candidatar: sem a margem extensiva, nada aqui diz quantos especialistas a mais se inscreveriam com bolsa maior; escolha não é preenchimento, e o que uma vaga ganha, outra do mesmo curso perde. Pacote do corte: nos mesmos cortes mudam outras regras federais (auditoria 18); a implicação de política vale para o pacote, não para os R$ 5 mil sozinhos. Só ciclo 2: comparando vagas da mesma UF, ciclo a ciclo (adendo 52g), 1,15 [0,66; 2,01] no ciclo 1 e 1,25 [0,90; 1,73] no ciclo 3, IC que contêm 1; não generalizar para o programa. Origem = vínculo no CNES: quem trabalha longe de casa aparece com a origem do trabalho; ela só define o par de UFs que fica fixo. Perguntas prováveis da banca (doc 66, §8). P1, "Vocês formularam a hipótese depois de ver os resultados?" Sim, e está na tela do slide 1; a especificação com o par de UFs foi congelada antes de rodar (52e; auditoria 48), mas depois de ver o modelo base. P2, "Se o pré-registrado tem IC que contém 1, por que acreditar?" Porque, comparando vagas da mesma UF, o efeito é 1,47 [1,15; 1,89], p de Holm 0,005, e se mantém com o score bootstrap; mas é exploratório. P3, "Isso é a bolsa ou o pacote?" O pacote do corte: nos mesmos cortes mudam outras regras federais (auditoria 18); em 0,300 nenhum outro incentivo individual ao especialista do PMM-E muda (auditoria 35); em 0,400 fica aberta a ajuda de custo do PMMB; nos dois cortes, o serviço do município pode mudar. P4, "E a origem?" Não é a pergunta desta hipótese: a UF de origem é controle. Se insistirem: no modelo base, sem fixar a UF, o teste origem × toda a bolsa (D_UF) dá 1,94 [1,48; 2,40] em log-chance (doc 57p); não é interpretado aqui.</a:t>
             </a:r>
           </a:p>
         </p:txBody>
@@ -9541,78 +9534,13 @@
           <a:p>
             <a:r>
               <a:rPr lang="pt-BR" dirty="0"/>
-              <a:t>Antiga H1, só como motivação (adendo 48b, doc 57n, auditoria 38; adendo 48h, doc 57w, auditoria 47). Chance de a célula com vaga imediata ser preenchida na 1ª chamada (HI-1): −3,7 p.p. [−21,3; +13,9] em 0,300 e −2,3 [−24,0; +19,4] em 0,400, p de Holm 1,000; o desenho só detectaria saltos de 25,1 e 31,0 p.p. Com efeito fixo de UF e os especialistas no entorno, só nos municípios com essa medida (nessa amostra, sem controle, −0,4 e +1,8): +5,4 [−11,0; +21,8] e −4,2 [−21,1; +12,6]. Pareando municípios da mesma UF e condição de capital: +16,4 [−3,8; +36,6] com 25 pares e −6,0 [−23,2; +11,5] com 29 pares; o ponto não deve ser lido como tamanho de efeito. O sinal negativo era mais forte nos médicos alocados por município em 0,300 (HI-2): −1,13 [−2,15; −0,10], p de Holm 0,126, nunca passou no Holm; na mesma amostra, sem controle, −1,15; com efeito fixo de UF e os especialistas no entorno, −0,62 [−1,67; +0,43]: encolhe e deixa de se distinguir de zero; o que move o ponto é a UF, não o raio (auditoria 47). A HI-2 cai em tamanho parecido nos três ciclos: −1,07 [−2,88; +0,74], −0,97 [−2,48; +0,55] e −1,33 [−3,59; +0,93]. Em 0,300, o balanço falha: do lado de bolsa maior, a parte de capitais muda −29,9 p.p., a do Nordeste −47,7 p.p., e há +10,54 especialistas por 10 mil hab. no resto da região de saúde. O sinal anda junto com a UF e a localização; é limite da RDD nesse corte, não prova de mecanismo, e não mostra que a bolsa reduz o preenchimento. Médico de outra UF por vaga imediata: +0,02 [−0,01; +0,06] em 0,300 e +0,16 [+0,00; +0,35] em 0,400, inconclusivo, com poucos pares. Pacote do corte.</a:t>
+              <a:t>Antiga H1, só como motivação, e só com a comparação dentro da mesma UF (decisão do autor de 28/10/2026; adendo 48h, doc 57w, auditoria 47). Pareando municípios da mesma UF e condição de capital, a fração das células com vaga imediata preenchidas na 1ª chamada difere em +16,4 [−3,8; +36,6] p.p. em 0,300, com 25 pares, e −6,0 [−23,2; +11,5] em 0,400, com 29 pares (IC de permutação); o ponto não deve ser lido como tamanho de efeito. Não detectamos aumento; isso não quer dizer que o efeito seja zero, e não mostra que a bolsa reduz o preenchimento. Médico de outra UF por vaga imediata: +0,02 [−0,01; +0,06] em 0,300 e +0,16 [+0,00; +0,35] em 0,400, inconclusivo, com poucos pares. Pacote do corte.</a:t>
             </a:r>
           </a:p>
           <a:p>
             <a:r>
               <a:rPr lang="pt-BR" dirty="0"/>
-              <a:t>Cautela na tela: Pacote do corte; só detectaria saltos grandes.</a:t>
-            </a:r>
-          </a:p>
-        </p:txBody>
-      </p:sp>
-    </p:spTree>
-  </p:cSld>
-  <p:clrMapOvr>
-    <a:masterClrMapping/>
-  </p:clrMapOvr>
-</p:notes>
-</file>
-
-<file path=ppt/notesSlides/notesSlide35.xml><?xml version="1.0" encoding="utf-8"?>
-<p:notes xmlns:a="http://schemas.openxmlformats.org/drawingml/2006/main" xmlns:r="http://schemas.openxmlformats.org/officeDocument/2006/relationships" xmlns:p="http://schemas.openxmlformats.org/presentationml/2006/main">
-  <p:cSld>
-    <p:spTree>
-      <p:nvGrpSpPr>
-        <p:cNvPr id="1" name=""/>
-        <p:cNvGrpSpPr/>
-        <p:nvPr/>
-      </p:nvGrpSpPr>
-      <p:grpSpPr>
-        <a:xfrm>
-          <a:off x="0" y="0"/>
-          <a:ext cx="0" cy="0"/>
-          <a:chOff x="0" y="0"/>
-          <a:chExt cx="0" cy="0"/>
-        </a:xfrm>
-      </p:grpSpPr>
-      <p:sp>
-        <p:nvSpPr>
-          <p:cNvPr id="2" name="Slide Image Placeholder 1"/>
-          <p:cNvSpPr>
-            <a:spLocks noGrp="1" noRot="1" noChangeAspect="1"/>
-          </p:cNvSpPr>
-          <p:nvPr>
-            <p:ph type="sldImg"/>
-          </p:nvPr>
-        </p:nvSpPr>
-        <p:spPr/>
-      </p:sp>
-      <p:sp>
-        <p:nvSpPr>
-          <p:cNvPr id="3" name="Notes Placeholder 2"/>
-          <p:cNvSpPr>
-            <a:spLocks noGrp="1"/>
-          </p:cNvSpPr>
-          <p:nvPr>
-            <p:ph type="body" idx="1"/>
-          </p:nvPr>
-        </p:nvSpPr>
-        <p:spPr/>
-        <p:txBody>
-          <a:bodyPr/>
-          <a:lstStyle/>
-          <a:p>
-            <a:r>
-              <a:rPr lang="pt-BR" dirty="0"/>
-              <a:t>Antiga H3, fora do corpo (decisão do autor de 27/10/2026). As horas cadastradas do médico do PMM-E sobem +6,6 h/sem [+5,4; +7,8] depois da entrada, e 51,0% [48,4; 53,7] já tinham vínculo no município do posto. No município, comparando os lados do corte (protocolo 64), não se detecta diferença na oferta de especialistas (p de Holm 1,000 nos dois cortes), o que não quer dizer que ela seja igual. Associação; não é efeito da bolsa nem da participação no PMM-E. Horas cadastradas não são presença.</a:t>
-            </a:r>
-          </a:p>
-          <a:p>
-            <a:r>
-              <a:rPr lang="pt-BR" dirty="0"/>
-              <a:t>Cautela na tela: Associação; vínculo cadastrado não é presença.</a:t>
+              <a:t>Cautela na tela: Pacote do corte; poucos pares.</a:t>
             </a:r>
           </a:p>
         </p:txBody>
@@ -15543,7 +15471,7 @@
                 </a:solidFill>
                 <a:latin typeface="Montserrat"/>
               </a:rPr>
-              <a:t>Pergunta e hipótese: origem ou bolsa na escolha?</a:t>
+              <a:t>Pergunta e hipótese: a bolsa maior muda a 1ª opção?</a:t>
             </a:r>
           </a:p>
         </p:txBody>
@@ -15826,7 +15754,7 @@
                 </a:solidFill>
                 <a:latin typeface="Montserrat"/>
               </a:rPr>
-              <a:t>médico escolhe perto de onde trabalha; bolsa muda qual vaga, mas pesa menos que a origem</a:t>
+              <a:t>comparando vagas da mesma UF, a de bolsa maior tem mais chance de ser a 1ª opção</a:t>
             </a:r>
           </a:p>
         </p:txBody>
@@ -15992,7 +15920,7 @@
                 </a:solidFill>
                 <a:latin typeface="Montserrat"/>
               </a:rPr>
-              <a:t>doc 07 da banca 2 (decisão do autor de 27/10/2026); doc 65, §4.6 a §4.8 (auditoria 50); docs 57n e 57w.</a:t>
+              <a:t>doc 07 da banca 2 (decisão do autor de 28/10/2026); adendos 52e e 52g; doc 57x; auditoria 48; doc 57w (apêndice).</a:t>
             </a:r>
           </a:p>
         </p:txBody>
@@ -16831,7 +16759,7 @@
                 </a:solidFill>
                 <a:latin typeface="Montserrat"/>
               </a:rPr>
-              <a:t>Onde escolhem: perto de onde já trabalham</a:t>
+              <a:t>Onde escolhem: a maioria fica na própria UF</a:t>
             </a:r>
           </a:p>
         </p:txBody>
@@ -16996,7 +16924,7 @@
         <p:spPr>
           <a:xfrm>
             <a:off x="8778240" y="1251239"/>
-            <a:ext cx="3108960" cy="2113753"/>
+            <a:ext cx="3108960" cy="2253757"/>
           </a:xfrm>
           <a:prstGeom prst="roundRect">
             <a:avLst>
@@ -17059,8 +16987,8 @@
         </p:nvSpPr>
         <p:spPr>
           <a:xfrm>
-            <a:off x="8778240" y="3529584"/>
-            <a:ext cx="3108960" cy="2113753"/>
+            <a:off x="8778240" y="3669589"/>
+            <a:ext cx="3108960" cy="1973748"/>
           </a:xfrm>
           <a:prstGeom prst="roundRect">
             <a:avLst>
@@ -17101,7 +17029,7 @@
                 </a:solidFill>
                 <a:latin typeface="Montserrat"/>
               </a:rPr>
-              <a:t>Para a pergunta:</a:t>
+              <a:t>Por isso:</a:t>
             </a:r>
             <a:r>
               <a:rPr lang="pt-BR" sz="1600" b="0" dirty="0">
@@ -17110,7 +17038,7 @@
                 </a:solidFill>
                 <a:latin typeface="Montserrat"/>
               </a:rPr>
-              <a:t> a maioria fica perto; quanto pesa a bolsa?</a:t>
+              <a:t> comparamos só vagas da mesma UF.</a:t>
             </a:r>
           </a:p>
         </p:txBody>
@@ -17231,7 +17159,7 @@
                 </a:solidFill>
                 <a:latin typeface="Montserrat"/>
               </a:rPr>
-              <a:t>Modelo: logit condicional da 1ª opção</a:t>
+              <a:t>Descritivo: perto do corte, a bolsa maior é mais escolhida</a:t>
             </a:r>
           </a:p>
         </p:txBody>
@@ -17311,19 +17239,13 @@
               <a:t xml:space="preserve">Dados  |  </a:t>
             </a:r>
             <a:r>
-              <a:rPr lang="pt-BR" sz="1000" dirty="0">
-                <a:latin typeface="Montserrat"/>
-              </a:rPr>
-              <a:t xml:space="preserve">Análise descritiva  |  </a:t>
-            </a:r>
-            <a:r>
               <a:rPr lang="pt-BR" sz="1000" b="1" dirty="0">
                 <a:solidFill>
                   <a:srgbClr val="114719"/>
                 </a:solidFill>
                 <a:latin typeface="Montserrat"/>
               </a:rPr>
-              <a:t>Metodologia</a:t>
+              <a:t>Análise descritiva</a:t>
             </a:r>
             <a:r>
               <a:rPr lang="pt-BR" sz="1000" dirty="0">
@@ -17335,6 +17257,12 @@
               <a:rPr lang="pt-BR" sz="1000" dirty="0">
                 <a:latin typeface="Montserrat"/>
               </a:rPr>
+              <a:t xml:space="preserve">Metodologia  |  </a:t>
+            </a:r>
+            <a:r>
+              <a:rPr lang="pt-BR" sz="1000" dirty="0">
+                <a:latin typeface="Montserrat"/>
+              </a:rPr>
               <a:t xml:space="preserve">Identificação  |  </a:t>
             </a:r>
             <a:r>
@@ -17358,16 +17286,45 @@
           </a:p>
         </p:txBody>
       </p:sp>
+      <p:pic>
+        <p:nvPicPr>
+          <p:cNvPr id="101" name="Figura" descr="Descritivo: na UF de origem, a até 0,050 de um corte de IVS, a parte do lado de bolsa maior nas vagas disponíveis e nas 1ªs opções, ciclos 1–3 e por ciclo"/>
+          <p:cNvPicPr>
+            <a:picLocks noChangeAspect="1"/>
+          </p:cNvPicPr>
+          <p:nvPr/>
+        </p:nvPicPr>
+        <p:blipFill>
+          <a:blip r:embed="rId3"/>
+          <a:stretch>
+            <a:fillRect/>
+          </a:stretch>
+        </p:blipFill>
+        <p:spPr>
+          <a:xfrm>
+            <a:off x="292608" y="1015963"/>
+            <a:ext cx="8211312" cy="4180304"/>
+          </a:xfrm>
+          <a:prstGeom prst="rect">
+            <a:avLst/>
+          </a:prstGeom>
+          <a:ln w="6350">
+            <a:solidFill>
+              <a:srgbClr val="DDE7DF"/>
+            </a:solidFill>
+          </a:ln>
+        </p:spPr>
+      </p:pic>
       <p:sp>
         <p:nvSpPr>
-          <p:cNvPr id="101" name="Equação em palavras"/>
+          <p:cNvPr id="102" name="Cautela"/>
           <p:cNvSpPr/>
           <p:nvPr/>
         </p:nvSpPr>
         <p:spPr>
           <a:xfrm>
-            <a:off x="292608" y="850392"/>
-            <a:ext cx="11594592" cy="1600200"/>
+            <a:off x="292608" y="5360859"/>
+            <a:ext cx="8211312" cy="517754"/>
           </a:xfrm>
           <a:prstGeom prst="roundRect">
             <a:avLst>
@@ -17375,19 +17332,19 @@
             </a:avLst>
           </a:prstGeom>
           <a:solidFill>
-            <a:srgbClr val="114719"/>
+            <a:srgbClr val="E7F1EA"/>
           </a:solidFill>
           <a:ln>
             <a:noFill/>
           </a:ln>
         </p:spPr>
         <p:txBody>
-          <a:bodyPr wrap="square" lIns="365760" tIns="73152" rIns="365760" bIns="73152" rtlCol="0" anchor="ctr">
+          <a:bodyPr wrap="square" lIns="182880" tIns="54864" rIns="182880" bIns="54864" rtlCol="0" anchor="ctr">
             <a:noAutofit/>
           </a:bodyPr>
           <a:lstStyle/>
           <a:p>
-            <a:pPr marL="0" indent="0" algn="ctr">
+            <a:pPr marL="0" indent="0" algn="l">
               <a:lnSpc>
                 <a:spcPct val="100000"/>
               </a:lnSpc>
@@ -17400,80 +17357,27 @@
               <a:buNone/>
             </a:pPr>
             <a:r>
-              <a:rPr lang="pt-BR" sz="2800" b="0" dirty="0">
+              <a:rPr lang="pt-BR" sz="1600" b="1" dirty="0">
                 <a:solidFill>
-                  <a:srgbClr val="FFFFFF"/>
+                  <a:srgbClr val="114719"/>
                 </a:solidFill>
                 <a:latin typeface="Montserrat"/>
               </a:rPr>
-              <a:t>U = β·bolsa + γ·distância + θ·origem; P(j) = e^Uj/Σe^U</a:t>
+              <a:t>Descritivo: sem teste e sem controlar a distância.</a:t>
             </a:r>
           </a:p>
         </p:txBody>
       </p:sp>
       <p:sp>
         <p:nvSpPr>
-          <p:cNvPr id="102" name="Rótulo"/>
+          <p:cNvPr id="103" name="Linha"/>
           <p:cNvSpPr/>
           <p:nvPr/>
         </p:nvSpPr>
         <p:spPr>
           <a:xfrm>
-            <a:off x="292608" y="2724912"/>
-            <a:ext cx="2194560" cy="999744"/>
-          </a:xfrm>
-          <a:prstGeom prst="roundRect">
-            <a:avLst>
-              <a:gd name="adj" fmla="val 10000"/>
-            </a:avLst>
-          </a:prstGeom>
-          <a:solidFill>
-            <a:srgbClr val="114719"/>
-          </a:solidFill>
-          <a:ln>
-            <a:noFill/>
-          </a:ln>
-        </p:spPr>
-        <p:txBody>
-          <a:bodyPr wrap="square" lIns="73152" tIns="45720" rIns="73152" bIns="45720" rtlCol="0" anchor="ctr">
-            <a:noAutofit/>
-          </a:bodyPr>
-          <a:lstStyle/>
-          <a:p>
-            <a:pPr marL="0" indent="0" algn="ctr">
-              <a:lnSpc>
-                <a:spcPct val="100000"/>
-              </a:lnSpc>
-              <a:spcBef>
-                <a:spcPts val="0"/>
-              </a:spcBef>
-              <a:spcAft>
-                <a:spcPts val="0"/>
-              </a:spcAft>
-              <a:buNone/>
-            </a:pPr>
-            <a:r>
-              <a:rPr lang="pt-BR" sz="2000" b="1" dirty="0">
-                <a:solidFill>
-                  <a:srgbClr val="FFFFFF"/>
-                </a:solidFill>
-                <a:latin typeface="Montserrat"/>
-              </a:rPr>
-              <a:t>Por quê</a:t>
-            </a:r>
-          </a:p>
-        </p:txBody>
-      </p:sp>
-      <p:sp>
-        <p:nvSpPr>
-          <p:cNvPr id="103" name="Item"/>
-          <p:cNvSpPr/>
-          <p:nvPr/>
-        </p:nvSpPr>
-        <p:spPr>
-          <a:xfrm>
-            <a:off x="2624328" y="2724912"/>
-            <a:ext cx="9262872" cy="999744"/>
+            <a:off x="8778240" y="1015963"/>
+            <a:ext cx="3108960" cy="2349029"/>
           </a:xfrm>
           <a:prstGeom prst="roundRect">
             <a:avLst>
@@ -17490,65 +17394,12 @@
           </a:ln>
         </p:spPr>
         <p:txBody>
-          <a:bodyPr wrap="square" lIns="228600" tIns="36576" rIns="228600" bIns="36576" rtlCol="0" anchor="ctr">
+          <a:bodyPr wrap="square" lIns="182880" tIns="54864" rIns="182880" bIns="54864" rtlCol="0" anchor="ctr">
             <a:noAutofit/>
           </a:bodyPr>
           <a:lstStyle/>
           <a:p>
             <a:pPr marL="0" indent="0" algn="l">
-              <a:lnSpc>
-                <a:spcPct val="102000"/>
-              </a:lnSpc>
-              <a:spcBef>
-                <a:spcPts val="0"/>
-              </a:spcBef>
-              <a:spcAft>
-                <a:spcPts val="0"/>
-              </a:spcAft>
-              <a:buNone/>
-            </a:pPr>
-            <a:r>
-              <a:rPr lang="pt-BR" sz="2000" b="0" dirty="0">
-                <a:solidFill>
-                  <a:srgbClr val="3A3A3A"/>
-                </a:solidFill>
-                <a:latin typeface="Montserrat"/>
-              </a:rPr>
-              <a:t>escolha entre vagas; candidato comparado consigo mesmo</a:t>
-            </a:r>
-          </a:p>
-        </p:txBody>
-      </p:sp>
-      <p:sp>
-        <p:nvSpPr>
-          <p:cNvPr id="104" name="Rótulo"/>
-          <p:cNvSpPr/>
-          <p:nvPr/>
-        </p:nvSpPr>
-        <p:spPr>
-          <a:xfrm>
-            <a:off x="292608" y="3907536"/>
-            <a:ext cx="2194560" cy="999744"/>
-          </a:xfrm>
-          <a:prstGeom prst="roundRect">
-            <a:avLst>
-              <a:gd name="adj" fmla="val 10000"/>
-            </a:avLst>
-          </a:prstGeom>
-          <a:solidFill>
-            <a:srgbClr val="114719"/>
-          </a:solidFill>
-          <a:ln>
-            <a:noFill/>
-          </a:ln>
-        </p:spPr>
-        <p:txBody>
-          <a:bodyPr wrap="square" lIns="73152" tIns="45720" rIns="73152" bIns="45720" rtlCol="0" anchor="ctr">
-            <a:noAutofit/>
-          </a:bodyPr>
-          <a:lstStyle/>
-          <a:p>
-            <a:pPr marL="0" indent="0" algn="ctr">
               <a:lnSpc>
                 <a:spcPct val="100000"/>
               </a:lnSpc>
@@ -17561,27 +17412,36 @@
               <a:buNone/>
             </a:pPr>
             <a:r>
-              <a:rPr lang="pt-BR" sz="2000" b="1" dirty="0">
+              <a:rPr lang="pt-BR" sz="1600" b="1" dirty="0">
                 <a:solidFill>
-                  <a:srgbClr val="FFFFFF"/>
+                  <a:srgbClr val="114719"/>
                 </a:solidFill>
                 <a:latin typeface="Montserrat"/>
               </a:rPr>
-              <a:t>Bolsa</a:t>
+              <a:t>Bolsa maior:</a:t>
+            </a:r>
+            <a:r>
+              <a:rPr lang="pt-BR" sz="1600" b="0" dirty="0">
+                <a:solidFill>
+                  <a:srgbClr val="3A3A3A"/>
+                </a:solidFill>
+                <a:latin typeface="Montserrat"/>
+              </a:rPr>
+              <a:t> 52,5% das vagas, 60,8% das 1ªs opções.</a:t>
             </a:r>
           </a:p>
         </p:txBody>
       </p:sp>
       <p:sp>
         <p:nvSpPr>
-          <p:cNvPr id="105" name="Item"/>
+          <p:cNvPr id="104" name="Linha"/>
           <p:cNvSpPr/>
           <p:nvPr/>
         </p:nvSpPr>
         <p:spPr>
           <a:xfrm>
-            <a:off x="2624328" y="3907536"/>
-            <a:ext cx="9262872" cy="999744"/>
+            <a:off x="8778240" y="3529584"/>
+            <a:ext cx="3108960" cy="2349029"/>
           </a:xfrm>
           <a:prstGeom prst="roundRect">
             <a:avLst>
@@ -17598,65 +17458,12 @@
           </a:ln>
         </p:spPr>
         <p:txBody>
-          <a:bodyPr wrap="square" lIns="228600" tIns="36576" rIns="228600" bIns="36576" rtlCol="0" anchor="ctr">
+          <a:bodyPr wrap="square" lIns="182880" tIns="54864" rIns="182880" bIns="54864" rtlCol="0" anchor="ctr">
             <a:noAutofit/>
           </a:bodyPr>
           <a:lstStyle/>
           <a:p>
             <a:pPr marL="0" indent="0" algn="l">
-              <a:lnSpc>
-                <a:spcPct val="102000"/>
-              </a:lnSpc>
-              <a:spcBef>
-                <a:spcPts val="0"/>
-              </a:spcBef>
-              <a:spcAft>
-                <a:spcPts val="0"/>
-              </a:spcAft>
-              <a:buNone/>
-            </a:pPr>
-            <a:r>
-              <a:rPr lang="pt-BR" sz="2000" b="0" dirty="0">
-                <a:solidFill>
-                  <a:srgbClr val="3A3A3A"/>
-                </a:solidFill>
-                <a:latin typeface="Montserrat"/>
-              </a:rPr>
-              <a:t>muda pela regra do IVS</a:t>
-            </a:r>
-          </a:p>
-        </p:txBody>
-      </p:sp>
-      <p:sp>
-        <p:nvSpPr>
-          <p:cNvPr id="106" name="Rótulo"/>
-          <p:cNvSpPr/>
-          <p:nvPr/>
-        </p:nvSpPr>
-        <p:spPr>
-          <a:xfrm>
-            <a:off x="292608" y="5090160"/>
-            <a:ext cx="2194560" cy="999744"/>
-          </a:xfrm>
-          <a:prstGeom prst="roundRect">
-            <a:avLst>
-              <a:gd name="adj" fmla="val 10000"/>
-            </a:avLst>
-          </a:prstGeom>
-          <a:solidFill>
-            <a:srgbClr val="114719"/>
-          </a:solidFill>
-          <a:ln>
-            <a:noFill/>
-          </a:ln>
-        </p:spPr>
-        <p:txBody>
-          <a:bodyPr wrap="square" lIns="73152" tIns="45720" rIns="73152" bIns="45720" rtlCol="0" anchor="ctr">
-            <a:noAutofit/>
-          </a:bodyPr>
-          <a:lstStyle/>
-          <a:p>
-            <a:pPr marL="0" indent="0" algn="ctr">
               <a:lnSpc>
                 <a:spcPct val="100000"/>
               </a:lnSpc>
@@ -17669,75 +17476,29 @@
               <a:buNone/>
             </a:pPr>
             <a:r>
-              <a:rPr lang="pt-BR" sz="2000" b="1" dirty="0">
+              <a:rPr lang="pt-BR" sz="1600" b="1" dirty="0">
                 <a:solidFill>
-                  <a:srgbClr val="FFFFFF"/>
+                  <a:srgbClr val="114719"/>
                 </a:solidFill>
                 <a:latin typeface="Montserrat"/>
               </a:rPr>
-              <a:t>Teste</a:t>
-            </a:r>
-          </a:p>
-        </p:txBody>
-      </p:sp>
-      <p:sp>
-        <p:nvSpPr>
-          <p:cNvPr id="107" name="Item"/>
-          <p:cNvSpPr/>
-          <p:nvPr/>
-        </p:nvSpPr>
-        <p:spPr>
-          <a:xfrm>
-            <a:off x="2624328" y="5090160"/>
-            <a:ext cx="9262872" cy="999744"/>
-          </a:xfrm>
-          <a:prstGeom prst="roundRect">
-            <a:avLst>
-              <a:gd name="adj" fmla="val 6000"/>
-            </a:avLst>
-          </a:prstGeom>
-          <a:solidFill>
-            <a:srgbClr val="F4F8F5"/>
-          </a:solidFill>
-          <a:ln w="12700">
-            <a:solidFill>
-              <a:srgbClr val="056429"/>
-            </a:solidFill>
-          </a:ln>
-        </p:spPr>
-        <p:txBody>
-          <a:bodyPr wrap="square" lIns="228600" tIns="36576" rIns="228600" bIns="36576" rtlCol="0" anchor="ctr">
-            <a:noAutofit/>
-          </a:bodyPr>
-          <a:lstStyle/>
-          <a:p>
-            <a:pPr marL="0" indent="0" algn="l">
-              <a:lnSpc>
-                <a:spcPct val="102000"/>
-              </a:lnSpc>
-              <a:spcBef>
-                <a:spcPts val="0"/>
-              </a:spcBef>
-              <a:spcAft>
-                <a:spcPts val="0"/>
-              </a:spcAft>
-              <a:buNone/>
-            </a:pPr>
-            <a:r>
-              <a:rPr lang="pt-BR" sz="2000" b="0" dirty="0">
+              <a:t>Quem:</a:t>
+            </a:r>
+            <a:r>
+              <a:rPr lang="pt-BR" sz="1600" b="0" dirty="0">
                 <a:solidFill>
                   <a:srgbClr val="3A3A3A"/>
                 </a:solidFill>
                 <a:latin typeface="Montserrat"/>
               </a:rPr>
-              <a:t>D_UF = θ − 10β &gt; zero; cluster por conjunto</a:t>
+              <a:t> na UF de origem, a até 0,050 de um corte; 1.568 candidatos.</a:t>
             </a:r>
           </a:p>
         </p:txBody>
       </p:sp>
       <p:sp>
         <p:nvSpPr>
-          <p:cNvPr id="108" name="Fontes"/>
+          <p:cNvPr id="105" name="Fontes"/>
           <p:cNvSpPr txBox="1"/>
           <p:nvPr/>
         </p:nvSpPr>
@@ -17788,7 +17549,7 @@
                 </a:solidFill>
                 <a:latin typeface="Montserrat"/>
               </a:rPr>
-              <a:t>protocolos 52 e 52b; adendos 52c e 52e (docs/06_execucao/); docs 57a, 57i, 57p, 57x e 66 (§4).</a:t>
+              <a:t>output/rdd_bolsa/H2_sintese.csv e H2_figuras/H2_F2_mesma_uf_perto_do_corte.png (scripts/rdd_bolsa/51_sintese_H2.py; doc 66, §3; auditoria 52).</a:t>
             </a:r>
           </a:p>
         </p:txBody>
@@ -17851,7 +17612,7 @@
                 </a:solidFill>
                 <a:latin typeface="Montserrat"/>
               </a:rPr>
-              <a:t>Identificação: as premissas e o nosso caso</a:t>
+              <a:t>Modelo: logit condicional da 1ª opção</a:t>
             </a:r>
           </a:p>
         </p:txBody>
@@ -17937,6 +17698,626 @@
               <a:t xml:space="preserve">Análise descritiva  |  </a:t>
             </a:r>
             <a:r>
+              <a:rPr lang="pt-BR" sz="1000" b="1" dirty="0">
+                <a:solidFill>
+                  <a:srgbClr val="114719"/>
+                </a:solidFill>
+                <a:latin typeface="Montserrat"/>
+              </a:rPr>
+              <a:t>Metodologia</a:t>
+            </a:r>
+            <a:r>
+              <a:rPr lang="pt-BR" sz="1000" dirty="0">
+                <a:latin typeface="Montserrat"/>
+              </a:rPr>
+              <a:t xml:space="preserve">  |  </a:t>
+            </a:r>
+            <a:r>
+              <a:rPr lang="pt-BR" sz="1000" dirty="0">
+                <a:latin typeface="Montserrat"/>
+              </a:rPr>
+              <a:t xml:space="preserve">Identificação  |  </a:t>
+            </a:r>
+            <a:r>
+              <a:rPr lang="pt-BR" sz="1000" dirty="0">
+                <a:latin typeface="Montserrat"/>
+              </a:rPr>
+              <a:t xml:space="preserve">Resultados  |  </a:t>
+            </a:r>
+            <a:r>
+              <a:rPr lang="pt-BR" sz="1000" dirty="0">
+                <a:latin typeface="Montserrat"/>
+              </a:rPr>
+              <a:t xml:space="preserve">Robustez  |  </a:t>
+            </a:r>
+            <a:r>
+              <a:rPr lang="pt-BR" sz="1000" dirty="0">
+                <a:latin typeface="Montserrat"/>
+              </a:rPr>
+              <a:t xml:space="preserve">Discussão</a:t>
+            </a:r>
+          </a:p>
+        </p:txBody>
+      </p:sp>
+      <p:sp>
+        <p:nvSpPr>
+          <p:cNvPr id="101" name="Equação em palavras"/>
+          <p:cNvSpPr/>
+          <p:nvPr/>
+        </p:nvSpPr>
+        <p:spPr>
+          <a:xfrm>
+            <a:off x="292608" y="850392"/>
+            <a:ext cx="11594592" cy="1600200"/>
+          </a:xfrm>
+          <a:prstGeom prst="roundRect">
+            <a:avLst>
+              <a:gd name="adj" fmla="val 8000"/>
+            </a:avLst>
+          </a:prstGeom>
+          <a:solidFill>
+            <a:srgbClr val="114719"/>
+          </a:solidFill>
+          <a:ln>
+            <a:noFill/>
+          </a:ln>
+        </p:spPr>
+        <p:txBody>
+          <a:bodyPr wrap="square" lIns="365760" tIns="73152" rIns="365760" bIns="73152" rtlCol="0" anchor="ctr">
+            <a:noAutofit/>
+          </a:bodyPr>
+          <a:lstStyle/>
+          <a:p>
+            <a:pPr marL="0" indent="0" algn="ctr">
+              <a:lnSpc>
+                <a:spcPct val="100000"/>
+              </a:lnSpc>
+              <a:spcBef>
+                <a:spcPts val="0"/>
+              </a:spcBef>
+              <a:spcAft>
+                <a:spcPts val="0"/>
+              </a:spcAft>
+              <a:buNone/>
+            </a:pPr>
+            <a:r>
+              <a:rPr lang="pt-BR" sz="2800" b="0" dirty="0">
+                <a:solidFill>
+                  <a:srgbClr val="FFFFFF"/>
+                </a:solidFill>
+                <a:latin typeface="Montserrat"/>
+              </a:rPr>
+              <a:t>U = β·bolsa + γ·distância + EF(UF origem × UF vaga) + …; P(j) = e^Uj/Σe^U</a:t>
+            </a:r>
+          </a:p>
+        </p:txBody>
+      </p:sp>
+      <p:sp>
+        <p:nvSpPr>
+          <p:cNvPr id="102" name="Rótulo"/>
+          <p:cNvSpPr/>
+          <p:nvPr/>
+        </p:nvSpPr>
+        <p:spPr>
+          <a:xfrm>
+            <a:off x="292608" y="2724912"/>
+            <a:ext cx="2194560" cy="999744"/>
+          </a:xfrm>
+          <a:prstGeom prst="roundRect">
+            <a:avLst>
+              <a:gd name="adj" fmla="val 10000"/>
+            </a:avLst>
+          </a:prstGeom>
+          <a:solidFill>
+            <a:srgbClr val="114719"/>
+          </a:solidFill>
+          <a:ln>
+            <a:noFill/>
+          </a:ln>
+        </p:spPr>
+        <p:txBody>
+          <a:bodyPr wrap="square" lIns="73152" tIns="45720" rIns="73152" bIns="45720" rtlCol="0" anchor="ctr">
+            <a:noAutofit/>
+          </a:bodyPr>
+          <a:lstStyle/>
+          <a:p>
+            <a:pPr marL="0" indent="0" algn="ctr">
+              <a:lnSpc>
+                <a:spcPct val="100000"/>
+              </a:lnSpc>
+              <a:spcBef>
+                <a:spcPts val="0"/>
+              </a:spcBef>
+              <a:spcAft>
+                <a:spcPts val="0"/>
+              </a:spcAft>
+              <a:buNone/>
+            </a:pPr>
+            <a:r>
+              <a:rPr lang="pt-BR" sz="2000" b="1" dirty="0">
+                <a:solidFill>
+                  <a:srgbClr val="FFFFFF"/>
+                </a:solidFill>
+                <a:latin typeface="Montserrat"/>
+              </a:rPr>
+              <a:t>Por quê</a:t>
+            </a:r>
+          </a:p>
+        </p:txBody>
+      </p:sp>
+      <p:sp>
+        <p:nvSpPr>
+          <p:cNvPr id="103" name="Item"/>
+          <p:cNvSpPr/>
+          <p:nvPr/>
+        </p:nvSpPr>
+        <p:spPr>
+          <a:xfrm>
+            <a:off x="2624328" y="2724912"/>
+            <a:ext cx="9262872" cy="999744"/>
+          </a:xfrm>
+          <a:prstGeom prst="roundRect">
+            <a:avLst>
+              <a:gd name="adj" fmla="val 6000"/>
+            </a:avLst>
+          </a:prstGeom>
+          <a:solidFill>
+            <a:srgbClr val="F4F8F5"/>
+          </a:solidFill>
+          <a:ln w="12700">
+            <a:solidFill>
+              <a:srgbClr val="056429"/>
+            </a:solidFill>
+          </a:ln>
+        </p:spPr>
+        <p:txBody>
+          <a:bodyPr wrap="square" lIns="228600" tIns="36576" rIns="228600" bIns="36576" rtlCol="0" anchor="ctr">
+            <a:noAutofit/>
+          </a:bodyPr>
+          <a:lstStyle/>
+          <a:p>
+            <a:pPr marL="0" indent="0" algn="l">
+              <a:lnSpc>
+                <a:spcPct val="102000"/>
+              </a:lnSpc>
+              <a:spcBef>
+                <a:spcPts val="0"/>
+              </a:spcBef>
+              <a:spcAft>
+                <a:spcPts val="0"/>
+              </a:spcAft>
+              <a:buNone/>
+            </a:pPr>
+            <a:r>
+              <a:rPr lang="pt-BR" sz="2000" b="0" dirty="0">
+                <a:solidFill>
+                  <a:srgbClr val="3A3A3A"/>
+                </a:solidFill>
+                <a:latin typeface="Montserrat"/>
+              </a:rPr>
+              <a:t>candidato consigo mesmo, vagas da mesma UF</a:t>
+            </a:r>
+          </a:p>
+        </p:txBody>
+      </p:sp>
+      <p:sp>
+        <p:nvSpPr>
+          <p:cNvPr id="104" name="Rótulo"/>
+          <p:cNvSpPr/>
+          <p:nvPr/>
+        </p:nvSpPr>
+        <p:spPr>
+          <a:xfrm>
+            <a:off x="292608" y="3907536"/>
+            <a:ext cx="2194560" cy="999744"/>
+          </a:xfrm>
+          <a:prstGeom prst="roundRect">
+            <a:avLst>
+              <a:gd name="adj" fmla="val 10000"/>
+            </a:avLst>
+          </a:prstGeom>
+          <a:solidFill>
+            <a:srgbClr val="114719"/>
+          </a:solidFill>
+          <a:ln>
+            <a:noFill/>
+          </a:ln>
+        </p:spPr>
+        <p:txBody>
+          <a:bodyPr wrap="square" lIns="73152" tIns="45720" rIns="73152" bIns="45720" rtlCol="0" anchor="ctr">
+            <a:noAutofit/>
+          </a:bodyPr>
+          <a:lstStyle/>
+          <a:p>
+            <a:pPr marL="0" indent="0" algn="ctr">
+              <a:lnSpc>
+                <a:spcPct val="100000"/>
+              </a:lnSpc>
+              <a:spcBef>
+                <a:spcPts val="0"/>
+              </a:spcBef>
+              <a:spcAft>
+                <a:spcPts val="0"/>
+              </a:spcAft>
+              <a:buNone/>
+            </a:pPr>
+            <a:r>
+              <a:rPr lang="pt-BR" sz="2000" b="1" dirty="0">
+                <a:solidFill>
+                  <a:srgbClr val="FFFFFF"/>
+                </a:solidFill>
+                <a:latin typeface="Montserrat"/>
+              </a:rPr>
+              <a:t>Bolsa</a:t>
+            </a:r>
+          </a:p>
+        </p:txBody>
+      </p:sp>
+      <p:sp>
+        <p:nvSpPr>
+          <p:cNvPr id="105" name="Item"/>
+          <p:cNvSpPr/>
+          <p:nvPr/>
+        </p:nvSpPr>
+        <p:spPr>
+          <a:xfrm>
+            <a:off x="2624328" y="3907536"/>
+            <a:ext cx="9262872" cy="999744"/>
+          </a:xfrm>
+          <a:prstGeom prst="roundRect">
+            <a:avLst>
+              <a:gd name="adj" fmla="val 6000"/>
+            </a:avLst>
+          </a:prstGeom>
+          <a:solidFill>
+            <a:srgbClr val="F4F8F5"/>
+          </a:solidFill>
+          <a:ln w="12700">
+            <a:solidFill>
+              <a:srgbClr val="056429"/>
+            </a:solidFill>
+          </a:ln>
+        </p:spPr>
+        <p:txBody>
+          <a:bodyPr wrap="square" lIns="228600" tIns="36576" rIns="228600" bIns="36576" rtlCol="0" anchor="ctr">
+            <a:noAutofit/>
+          </a:bodyPr>
+          <a:lstStyle/>
+          <a:p>
+            <a:pPr marL="0" indent="0" algn="l">
+              <a:lnSpc>
+                <a:spcPct val="102000"/>
+              </a:lnSpc>
+              <a:spcBef>
+                <a:spcPts val="0"/>
+              </a:spcBef>
+              <a:spcAft>
+                <a:spcPts val="0"/>
+              </a:spcAft>
+              <a:buNone/>
+            </a:pPr>
+            <a:r>
+              <a:rPr lang="pt-BR" sz="2000" b="0" dirty="0">
+                <a:solidFill>
+                  <a:srgbClr val="3A3A3A"/>
+                </a:solidFill>
+                <a:latin typeface="Montserrat"/>
+              </a:rPr>
+              <a:t>regra do IVS (sharp)</a:t>
+            </a:r>
+          </a:p>
+        </p:txBody>
+      </p:sp>
+      <p:sp>
+        <p:nvSpPr>
+          <p:cNvPr id="106" name="Rótulo"/>
+          <p:cNvSpPr/>
+          <p:nvPr/>
+        </p:nvSpPr>
+        <p:spPr>
+          <a:xfrm>
+            <a:off x="292608" y="5090160"/>
+            <a:ext cx="2194560" cy="999744"/>
+          </a:xfrm>
+          <a:prstGeom prst="roundRect">
+            <a:avLst>
+              <a:gd name="adj" fmla="val 10000"/>
+            </a:avLst>
+          </a:prstGeom>
+          <a:solidFill>
+            <a:srgbClr val="114719"/>
+          </a:solidFill>
+          <a:ln>
+            <a:noFill/>
+          </a:ln>
+        </p:spPr>
+        <p:txBody>
+          <a:bodyPr wrap="square" lIns="73152" tIns="45720" rIns="73152" bIns="45720" rtlCol="0" anchor="ctr">
+            <a:noAutofit/>
+          </a:bodyPr>
+          <a:lstStyle/>
+          <a:p>
+            <a:pPr marL="0" indent="0" algn="ctr">
+              <a:lnSpc>
+                <a:spcPct val="100000"/>
+              </a:lnSpc>
+              <a:spcBef>
+                <a:spcPts val="0"/>
+              </a:spcBef>
+              <a:spcAft>
+                <a:spcPts val="0"/>
+              </a:spcAft>
+              <a:buNone/>
+            </a:pPr>
+            <a:r>
+              <a:rPr lang="pt-BR" sz="2000" b="1" dirty="0">
+                <a:solidFill>
+                  <a:srgbClr val="FFFFFF"/>
+                </a:solidFill>
+                <a:latin typeface="Montserrat"/>
+              </a:rPr>
+              <a:t>Teste</a:t>
+            </a:r>
+          </a:p>
+        </p:txBody>
+      </p:sp>
+      <p:sp>
+        <p:nvSpPr>
+          <p:cNvPr id="107" name="Item"/>
+          <p:cNvSpPr/>
+          <p:nvPr/>
+        </p:nvSpPr>
+        <p:spPr>
+          <a:xfrm>
+            <a:off x="2624328" y="5090160"/>
+            <a:ext cx="9262872" cy="999744"/>
+          </a:xfrm>
+          <a:prstGeom prst="roundRect">
+            <a:avLst>
+              <a:gd name="adj" fmla="val 6000"/>
+            </a:avLst>
+          </a:prstGeom>
+          <a:solidFill>
+            <a:srgbClr val="F4F8F5"/>
+          </a:solidFill>
+          <a:ln w="12700">
+            <a:solidFill>
+              <a:srgbClr val="056429"/>
+            </a:solidFill>
+          </a:ln>
+        </p:spPr>
+        <p:txBody>
+          <a:bodyPr wrap="square" lIns="228600" tIns="36576" rIns="228600" bIns="36576" rtlCol="0" anchor="ctr">
+            <a:noAutofit/>
+          </a:bodyPr>
+          <a:lstStyle/>
+          <a:p>
+            <a:pPr marL="0" indent="0" algn="l">
+              <a:lnSpc>
+                <a:spcPct val="102000"/>
+              </a:lnSpc>
+              <a:spcBef>
+                <a:spcPts val="0"/>
+              </a:spcBef>
+              <a:spcAft>
+                <a:spcPts val="0"/>
+              </a:spcAft>
+              <a:buNone/>
+            </a:pPr>
+            <a:r>
+              <a:rPr lang="pt-BR" sz="2000" b="0" dirty="0">
+                <a:solidFill>
+                  <a:srgbClr val="3A3A3A"/>
+                </a:solidFill>
+                <a:latin typeface="Montserrat"/>
+              </a:rPr>
+              <a:t>β &gt; zero; cluster por conjunto</a:t>
+            </a:r>
+          </a:p>
+        </p:txBody>
+      </p:sp>
+      <p:sp>
+        <p:nvSpPr>
+          <p:cNvPr id="108" name="Fontes"/>
+          <p:cNvSpPr txBox="1"/>
+          <p:nvPr/>
+        </p:nvSpPr>
+        <p:spPr>
+          <a:xfrm>
+            <a:off x="292608" y="6181344"/>
+            <a:ext cx="11594592" cy="274320"/>
+          </a:xfrm>
+          <a:prstGeom prst="rect">
+            <a:avLst/>
+          </a:prstGeom>
+          <a:noFill/>
+          <a:ln>
+            <a:noFill/>
+          </a:ln>
+        </p:spPr>
+        <p:txBody>
+          <a:bodyPr wrap="square" lIns="0" tIns="0" rIns="0" bIns="0" rtlCol="0" anchor="b">
+            <a:noAutofit/>
+          </a:bodyPr>
+          <a:lstStyle/>
+          <a:p>
+            <a:pPr marL="0" indent="0" algn="l">
+              <a:lnSpc>
+                <a:spcPct val="95000"/>
+              </a:lnSpc>
+              <a:spcBef>
+                <a:spcPts val="0"/>
+              </a:spcBef>
+              <a:spcAft>
+                <a:spcPts val="0"/>
+              </a:spcAft>
+              <a:buNone/>
+            </a:pPr>
+            <a:r>
+              <a:rPr lang="pt-BR" sz="800" b="1" dirty="0">
+                <a:solidFill>
+                  <a:srgbClr val="6B6B6B"/>
+                </a:solidFill>
+                <a:latin typeface="Montserrat"/>
+              </a:rPr>
+              <a:t>Fontes: </a:t>
+            </a:r>
+            <a:r>
+              <a:rPr lang="pt-BR" sz="800" b="0" dirty="0">
+                <a:solidFill>
+                  <a:srgbClr val="6B6B6B"/>
+                </a:solidFill>
+                <a:latin typeface="Montserrat"/>
+              </a:rPr>
+              <a:t>protocolo 52; adendos 52c e 52e (docs/06_execucao/); docs 57a, 57x e 66 (§4).</a:t>
+            </a:r>
+          </a:p>
+        </p:txBody>
+      </p:sp>
+    </p:spTree>
+  </p:cSld>
+  <p:clrMapOvr>
+    <a:masterClrMapping/>
+  </p:clrMapOvr>
+</p:sld>
+</file>
+
+<file path=ppt/slides/slide43.xml><?xml version="1.0" encoding="utf-8"?>
+<p:sld xmlns:a="http://schemas.openxmlformats.org/drawingml/2006/main" xmlns:r="http://schemas.openxmlformats.org/officeDocument/2006/relationships" xmlns:p="http://schemas.openxmlformats.org/presentationml/2006/main">
+  <p:cSld>
+    <p:spTree>
+      <p:nvGrpSpPr>
+        <p:cNvPr id="1" name=""/>
+        <p:cNvGrpSpPr/>
+        <p:nvPr/>
+      </p:nvGrpSpPr>
+      <p:grpSpPr>
+        <a:xfrm>
+          <a:off x="0" y="0"/>
+          <a:ext cx="0" cy="0"/>
+          <a:chOff x="0" y="0"/>
+          <a:chExt cx="0" cy="0"/>
+        </a:xfrm>
+      </p:grpSpPr>
+      <p:sp>
+        <p:nvSpPr>
+          <p:cNvPr id="2" name="Título"/>
+          <p:cNvSpPr>
+            <a:spLocks noGrp="1"/>
+          </p:cNvSpPr>
+          <p:nvPr>
+            <p:ph type="title"/>
+          </p:nvPr>
+        </p:nvSpPr>
+        <p:spPr/>
+        <p:txBody>
+          <a:bodyPr>
+            <a:normAutofit/>
+          </a:bodyPr>
+          <a:lstStyle/>
+          <a:p>
+            <a:pPr marL="0" indent="0" algn="l">
+              <a:lnSpc>
+                <a:spcPct val="104000"/>
+              </a:lnSpc>
+              <a:spcAft>
+                <a:spcPts val="0"/>
+              </a:spcAft>
+              <a:buNone/>
+            </a:pPr>
+            <a:r>
+              <a:rPr lang="pt-BR" sz="2400" b="1" dirty="0">
+                <a:solidFill>
+                  <a:srgbClr val="FFFFFF"/>
+                </a:solidFill>
+                <a:latin typeface="Montserrat"/>
+              </a:rPr>
+              <a:t>Identificação: as premissas e o nosso caso</a:t>
+            </a:r>
+          </a:p>
+        </p:txBody>
+      </p:sp>
+      <p:sp>
+        <p:nvSpPr>
+          <p:cNvPr id="3" name="Número da página"/>
+          <p:cNvSpPr>
+            <a:spLocks noGrp="1"/>
+          </p:cNvSpPr>
+          <p:nvPr>
+            <p:ph type="body" sz="quarter" idx="18"/>
+          </p:nvPr>
+        </p:nvSpPr>
+        <p:spPr>
+          <a:xfrm>
+            <a:off x="11706744" y="6457042"/>
+            <a:ext cx="492080" cy="400640"/>
+          </a:xfrm>
+        </p:spPr>
+        <p:txBody>
+          <a:bodyPr anchor="ctr">
+            <a:normAutofit/>
+          </a:bodyPr>
+          <a:lstStyle/>
+          <a:p>
+            <a:pPr algn="ctr"/>
+            <a:fld id="{B1A5E0C2-5F3A-4C7E-9D11-7A2E6C0F4B01}" type="slidenum">
+              <a:rPr lang="pt-BR" sz="1400" b="1">
+                <a:solidFill>
+                  <a:srgbClr val="BFBFBF"/>
+                </a:solidFill>
+                <a:latin typeface="Montserrat"/>
+              </a:rPr>
+              <a:t>‹#›</a:t>
+            </a:fld>
+            <a:endParaRPr lang="pt-BR" sz="1400" b="1">
+              <a:solidFill>
+                <a:srgbClr val="BFBFBF"/>
+              </a:solidFill>
+            </a:endParaRPr>
+          </a:p>
+        </p:txBody>
+      </p:sp>
+      <p:sp>
+        <p:nvSpPr>
+          <p:cNvPr id="4" name="Navegação do rodapé"/>
+          <p:cNvSpPr txBox="1"/>
+          <p:nvPr/>
+        </p:nvSpPr>
+        <p:spPr>
+          <a:xfrm>
+            <a:off x="196860" y="6639248"/>
+            <a:ext cx="9223026" cy="246221"/>
+          </a:xfrm>
+          <a:prstGeom prst="rect">
+            <a:avLst/>
+          </a:prstGeom>
+          <a:noFill/>
+        </p:spPr>
+        <p:txBody>
+          <a:bodyPr wrap="square" rtlCol="0">
+            <a:spAutoFit/>
+          </a:bodyPr>
+          <a:lstStyle/>
+          <a:p>
+            <a:r>
+              <a:rPr lang="pt-BR" sz="1000" dirty="0">
+                <a:latin typeface="Montserrat"/>
+              </a:rPr>
+              <a:t xml:space="preserve">Hipótese  |  </a:t>
+            </a:r>
+            <a:r>
+              <a:rPr lang="pt-BR" sz="1000" dirty="0">
+                <a:latin typeface="Montserrat"/>
+              </a:rPr>
+              <a:t xml:space="preserve">Dados  |  </a:t>
+            </a:r>
+            <a:r>
+              <a:rPr lang="pt-BR" sz="1000" dirty="0">
+                <a:latin typeface="Montserrat"/>
+              </a:rPr>
+              <a:t xml:space="preserve">Análise descritiva  |  </a:t>
+            </a:r>
+            <a:r>
               <a:rPr lang="pt-BR" sz="1000" dirty="0">
                 <a:latin typeface="Montserrat"/>
               </a:rPr>
@@ -17995,8 +18376,8 @@
             <a:tbl>
               <a:tblPr firstRow="1" bandRow="1"/>
               <a:tblGrid>
-                <a:gridCol w="4516061"/>
-                <a:gridCol w="7078531"/>
+                <a:gridCol w="4064183"/>
+                <a:gridCol w="7530409"/>
               </a:tblGrid>
               <a:tr h="854964">
                 <a:tc>
@@ -18243,7 +18624,7 @@
                           </a:solidFill>
                           <a:latin typeface="Montserrat"/>
                         </a:rPr>
-                        <a:t>Só a bolsa?</a:t>
+                        <a:t>Mantido fixo</a:t>
                       </a:r>
                     </a:p>
                   </a:txBody>
@@ -18297,7 +18678,7 @@
                           </a:solidFill>
                           <a:latin typeface="Montserrat"/>
                         </a:rPr>
-                        <a:t>não: pacote do corte</a:t>
+                        <a:t>candidato, par de UFs, distância</a:t>
                       </a:r>
                     </a:p>
                   </a:txBody>
@@ -18353,7 +18734,7 @@
                           </a:solidFill>
                           <a:latin typeface="Montserrat"/>
                         </a:rPr>
-                        <a:t>IIA</a:t>
+                        <a:t>Só a bolsa?</a:t>
                       </a:r>
                     </a:p>
                   </a:txBody>
@@ -18407,7 +18788,7 @@
                           </a:solidFill>
                           <a:latin typeface="Montserrat"/>
                         </a:rPr>
-                        <a:t>em parte; bolsa estável</a:t>
+                        <a:t>não: pacote do corte</a:t>
                       </a:r>
                     </a:p>
                   </a:txBody>
@@ -18463,7 +18844,7 @@
                           </a:solidFill>
                           <a:latin typeface="Montserrat"/>
                         </a:rPr>
-                        <a:t>Localização</a:t>
+                        <a:t>Especificação</a:t>
                       </a:r>
                     </a:p>
                   </a:txBody>
@@ -18517,7 +18898,7 @@
                           </a:solidFill>
                           <a:latin typeface="Montserrat"/>
                         </a:rPr>
-                        <a:t>par de UFs fixado</a:t>
+                        <a:t>pós-resultado (adendo 52e)</a:t>
                       </a:r>
                     </a:p>
                   </a:txBody>
@@ -18715,439 +19096,7 @@
                 </a:solidFill>
                 <a:latin typeface="Montserrat"/>
               </a:rPr>
-              <a:t>auditorias 16, 18, 41 e 48; docs 57a (M9), 57i, 57p e 57x; output/rdd_bolsa/portao_r1_ivs_oficial.json; VC_estimativas.csv.</a:t>
-            </a:r>
-          </a:p>
-        </p:txBody>
-      </p:sp>
-    </p:spTree>
-  </p:cSld>
-  <p:clrMapOvr>
-    <a:masterClrMapping/>
-  </p:clrMapOvr>
-</p:sld>
-</file>
-
-<file path=ppt/slides/slide43.xml><?xml version="1.0" encoding="utf-8"?>
-<p:sld xmlns:a="http://schemas.openxmlformats.org/drawingml/2006/main" xmlns:r="http://schemas.openxmlformats.org/officeDocument/2006/relationships" xmlns:p="http://schemas.openxmlformats.org/presentationml/2006/main">
-  <p:cSld>
-    <p:spTree>
-      <p:nvGrpSpPr>
-        <p:cNvPr id="1" name=""/>
-        <p:cNvGrpSpPr/>
-        <p:nvPr/>
-      </p:nvGrpSpPr>
-      <p:grpSpPr>
-        <a:xfrm>
-          <a:off x="0" y="0"/>
-          <a:ext cx="0" cy="0"/>
-          <a:chOff x="0" y="0"/>
-          <a:chExt cx="0" cy="0"/>
-        </a:xfrm>
-      </p:grpSpPr>
-      <p:sp>
-        <p:nvSpPr>
-          <p:cNvPr id="2" name="Título"/>
-          <p:cNvSpPr>
-            <a:spLocks noGrp="1"/>
-          </p:cNvSpPr>
-          <p:nvPr>
-            <p:ph type="title"/>
-          </p:nvPr>
-        </p:nvSpPr>
-        <p:spPr/>
-        <p:txBody>
-          <a:bodyPr>
-            <a:normAutofit/>
-          </a:bodyPr>
-          <a:lstStyle/>
-          <a:p>
-            <a:pPr marL="0" indent="0" algn="l">
-              <a:lnSpc>
-                <a:spcPct val="104000"/>
-              </a:lnSpc>
-              <a:spcAft>
-                <a:spcPts val="0"/>
-              </a:spcAft>
-              <a:buNone/>
-            </a:pPr>
-            <a:r>
-              <a:rPr lang="pt-BR" sz="2400" b="1" dirty="0">
-                <a:solidFill>
-                  <a:srgbClr val="FFFFFF"/>
-                </a:solidFill>
-                <a:latin typeface="Montserrat"/>
-              </a:rPr>
-              <a:t>Teste central: a origem pesa mais que toda a bolsa</a:t>
-            </a:r>
-          </a:p>
-        </p:txBody>
-      </p:sp>
-      <p:sp>
-        <p:nvSpPr>
-          <p:cNvPr id="3" name="Número da página"/>
-          <p:cNvSpPr>
-            <a:spLocks noGrp="1"/>
-          </p:cNvSpPr>
-          <p:nvPr>
-            <p:ph type="body" sz="quarter" idx="18"/>
-          </p:nvPr>
-        </p:nvSpPr>
-        <p:spPr>
-          <a:xfrm>
-            <a:off x="11706744" y="6457042"/>
-            <a:ext cx="492080" cy="400640"/>
-          </a:xfrm>
-        </p:spPr>
-        <p:txBody>
-          <a:bodyPr anchor="ctr">
-            <a:normAutofit/>
-          </a:bodyPr>
-          <a:lstStyle/>
-          <a:p>
-            <a:pPr algn="ctr"/>
-            <a:fld id="{B1A5E0C2-5F3A-4C7E-9D11-7A2E6C0F4B01}" type="slidenum">
-              <a:rPr lang="pt-BR" sz="1400" b="1">
-                <a:solidFill>
-                  <a:srgbClr val="BFBFBF"/>
-                </a:solidFill>
-                <a:latin typeface="Montserrat"/>
-              </a:rPr>
-              <a:t>‹#›</a:t>
-            </a:fld>
-            <a:endParaRPr lang="pt-BR" sz="1400" b="1">
-              <a:solidFill>
-                <a:srgbClr val="BFBFBF"/>
-              </a:solidFill>
-            </a:endParaRPr>
-          </a:p>
-        </p:txBody>
-      </p:sp>
-      <p:sp>
-        <p:nvSpPr>
-          <p:cNvPr id="4" name="Navegação do rodapé"/>
-          <p:cNvSpPr txBox="1"/>
-          <p:nvPr/>
-        </p:nvSpPr>
-        <p:spPr>
-          <a:xfrm>
-            <a:off x="196860" y="6639248"/>
-            <a:ext cx="9223026" cy="246221"/>
-          </a:xfrm>
-          <a:prstGeom prst="rect">
-            <a:avLst/>
-          </a:prstGeom>
-          <a:noFill/>
-        </p:spPr>
-        <p:txBody>
-          <a:bodyPr wrap="square" rtlCol="0">
-            <a:spAutoFit/>
-          </a:bodyPr>
-          <a:lstStyle/>
-          <a:p>
-            <a:r>
-              <a:rPr lang="pt-BR" sz="1000" dirty="0">
-                <a:latin typeface="Montserrat"/>
-              </a:rPr>
-              <a:t xml:space="preserve">Hipótese  |  </a:t>
-            </a:r>
-            <a:r>
-              <a:rPr lang="pt-BR" sz="1000" dirty="0">
-                <a:latin typeface="Montserrat"/>
-              </a:rPr>
-              <a:t xml:space="preserve">Dados  |  </a:t>
-            </a:r>
-            <a:r>
-              <a:rPr lang="pt-BR" sz="1000" dirty="0">
-                <a:latin typeface="Montserrat"/>
-              </a:rPr>
-              <a:t xml:space="preserve">Análise descritiva  |  </a:t>
-            </a:r>
-            <a:r>
-              <a:rPr lang="pt-BR" sz="1000" dirty="0">
-                <a:latin typeface="Montserrat"/>
-              </a:rPr>
-              <a:t xml:space="preserve">Metodologia  |  </a:t>
-            </a:r>
-            <a:r>
-              <a:rPr lang="pt-BR" sz="1000" dirty="0">
-                <a:latin typeface="Montserrat"/>
-              </a:rPr>
-              <a:t xml:space="preserve">Identificação  |  </a:t>
-            </a:r>
-            <a:r>
-              <a:rPr lang="pt-BR" sz="1000" b="1" dirty="0">
-                <a:solidFill>
-                  <a:srgbClr val="114719"/>
-                </a:solidFill>
-                <a:latin typeface="Montserrat"/>
-              </a:rPr>
-              <a:t>Resultados</a:t>
-            </a:r>
-            <a:r>
-              <a:rPr lang="pt-BR" sz="1000" dirty="0">
-                <a:latin typeface="Montserrat"/>
-              </a:rPr>
-              <a:t xml:space="preserve">  |  </a:t>
-            </a:r>
-            <a:r>
-              <a:rPr lang="pt-BR" sz="1000" dirty="0">
-                <a:latin typeface="Montserrat"/>
-              </a:rPr>
-              <a:t xml:space="preserve">Robustez  |  </a:t>
-            </a:r>
-            <a:r>
-              <a:rPr lang="pt-BR" sz="1000" dirty="0">
-                <a:latin typeface="Montserrat"/>
-              </a:rPr>
-              <a:t xml:space="preserve">Discussão</a:t>
-            </a:r>
-          </a:p>
-        </p:txBody>
-      </p:sp>
-      <p:sp>
-        <p:nvSpPr>
-          <p:cNvPr id="101" name="Linha"/>
-          <p:cNvSpPr/>
-          <p:nvPr/>
-        </p:nvSpPr>
-        <p:spPr>
-          <a:xfrm>
-            <a:off x="292608" y="4736592"/>
-            <a:ext cx="11594592" cy="420624"/>
-          </a:xfrm>
-          <a:prstGeom prst="rect">
-            <a:avLst/>
-          </a:prstGeom>
-          <a:noFill/>
-          <a:ln>
-            <a:noFill/>
-          </a:ln>
-        </p:spPr>
-        <p:txBody>
-          <a:bodyPr wrap="square" lIns="164592" tIns="18288" rIns="164592" bIns="18288" rtlCol="0" anchor="ctr">
-            <a:noAutofit/>
-          </a:bodyPr>
-          <a:lstStyle/>
-          <a:p>
-            <a:pPr marL="0" indent="0" algn="l">
-              <a:lnSpc>
-                <a:spcPct val="100000"/>
-              </a:lnSpc>
-              <a:spcBef>
-                <a:spcPts val="0"/>
-              </a:spcBef>
-              <a:spcAft>
-                <a:spcPts val="0"/>
-              </a:spcAft>
-              <a:buNone/>
-            </a:pPr>
-            <a:r>
-              <a:rPr lang="pt-BR" sz="1800" b="1" dirty="0">
-                <a:solidFill>
-                  <a:srgbClr val="114719"/>
-                </a:solidFill>
-                <a:latin typeface="Montserrat"/>
-              </a:rPr>
-              <a:t>Origem − bolsa:</a:t>
-            </a:r>
-            <a:r>
-              <a:rPr lang="pt-BR" sz="1800" b="0" dirty="0">
-                <a:solidFill>
-                  <a:srgbClr val="3A3A3A"/>
-                </a:solidFill>
-                <a:latin typeface="Montserrat"/>
-              </a:rPr>
-              <a:t> 1,94 [1,48; 2,40] em log-chance; p &lt; 0,001.</a:t>
-            </a:r>
-          </a:p>
-        </p:txBody>
-      </p:sp>
-      <p:sp>
-        <p:nvSpPr>
-          <p:cNvPr id="102" name="Linha"/>
-          <p:cNvSpPr/>
-          <p:nvPr/>
-        </p:nvSpPr>
-        <p:spPr>
-          <a:xfrm>
-            <a:off x="292608" y="5212080"/>
-            <a:ext cx="11594592" cy="420624"/>
-          </a:xfrm>
-          <a:prstGeom prst="rect">
-            <a:avLst/>
-          </a:prstGeom>
-          <a:noFill/>
-          <a:ln>
-            <a:noFill/>
-          </a:ln>
-        </p:spPr>
-        <p:txBody>
-          <a:bodyPr wrap="square" lIns="164592" tIns="18288" rIns="164592" bIns="18288" rtlCol="0" anchor="ctr">
-            <a:noAutofit/>
-          </a:bodyPr>
-          <a:lstStyle/>
-          <a:p>
-            <a:pPr marL="0" indent="0" algn="l">
-              <a:lnSpc>
-                <a:spcPct val="100000"/>
-              </a:lnSpc>
-              <a:spcBef>
-                <a:spcPts val="0"/>
-              </a:spcBef>
-              <a:spcAft>
-                <a:spcPts val="0"/>
-              </a:spcAft>
-              <a:buNone/>
-            </a:pPr>
-            <a:r>
-              <a:rPr lang="pt-BR" sz="1800" b="0" dirty="0">
-                <a:solidFill>
-                  <a:srgbClr val="3A3A3A"/>
-                </a:solidFill>
-                <a:latin typeface="Montserrat"/>
-              </a:rPr>
-              <a:t>UF de origem vs. outra UF: chance ×11,0; toda a bolsa: ×1,57 (IC contém 1).</a:t>
-            </a:r>
-          </a:p>
-        </p:txBody>
-      </p:sp>
-      <p:sp>
-        <p:nvSpPr>
-          <p:cNvPr id="103" name="Cautela"/>
-          <p:cNvSpPr/>
-          <p:nvPr/>
-        </p:nvSpPr>
-        <p:spPr>
-          <a:xfrm>
-            <a:off x="292608" y="5687568"/>
-            <a:ext cx="11594592" cy="420624"/>
-          </a:xfrm>
-          <a:prstGeom prst="roundRect">
-            <a:avLst>
-              <a:gd name="adj" fmla="val 12000"/>
-            </a:avLst>
-          </a:prstGeom>
-          <a:solidFill>
-            <a:srgbClr val="E7F1EA"/>
-          </a:solidFill>
-          <a:ln>
-            <a:noFill/>
-          </a:ln>
-        </p:spPr>
-        <p:txBody>
-          <a:bodyPr wrap="square" lIns="164592" tIns="18288" rIns="164592" bIns="18288" rtlCol="0" anchor="ctr">
-            <a:noAutofit/>
-          </a:bodyPr>
-          <a:lstStyle/>
-          <a:p>
-            <a:pPr marL="0" indent="0" algn="l">
-              <a:lnSpc>
-                <a:spcPct val="100000"/>
-              </a:lnSpc>
-              <a:spcBef>
-                <a:spcPts val="0"/>
-              </a:spcBef>
-              <a:spcAft>
-                <a:spcPts val="0"/>
-              </a:spcAft>
-              <a:buNone/>
-            </a:pPr>
-            <a:r>
-              <a:rPr lang="pt-BR" sz="1800" b="1" dirty="0">
-                <a:solidFill>
-                  <a:srgbClr val="114719"/>
-                </a:solidFill>
-                <a:latin typeface="Montserrat"/>
-              </a:rPr>
-              <a:t>Origem é preferência revelada, não causa.</a:t>
-            </a:r>
-          </a:p>
-        </p:txBody>
-      </p:sp>
-      <p:pic>
-        <p:nvPicPr>
-          <p:cNvPr id="104" name="Figura" descr="Quanto a vaga na UF de origem e toda a diferença de bolsa (R$ 10 → 20 mil) multiplicam a chance de a vaga ser a 1ª opção, com IC 95%"/>
-          <p:cNvPicPr>
-            <a:picLocks noChangeAspect="1"/>
-          </p:cNvPicPr>
-          <p:nvPr/>
-        </p:nvPicPr>
-        <p:blipFill>
-          <a:blip r:embed="rId3"/>
-          <a:stretch>
-            <a:fillRect/>
-          </a:stretch>
-        </p:blipFill>
-        <p:spPr>
-          <a:xfrm>
-            <a:off x="292608" y="939156"/>
-            <a:ext cx="11594592" cy="3534937"/>
-          </a:xfrm>
-          <a:prstGeom prst="rect">
-            <a:avLst/>
-          </a:prstGeom>
-          <a:ln w="6350">
-            <a:solidFill>
-              <a:srgbClr val="DDE7DF"/>
-            </a:solidFill>
-          </a:ln>
-        </p:spPr>
-      </p:pic>
-      <p:sp>
-        <p:nvSpPr>
-          <p:cNvPr id="105" name="Fontes"/>
-          <p:cNvSpPr txBox="1"/>
-          <p:nvPr/>
-        </p:nvSpPr>
-        <p:spPr>
-          <a:xfrm>
-            <a:off x="292608" y="6181344"/>
-            <a:ext cx="11594592" cy="274320"/>
-          </a:xfrm>
-          <a:prstGeom prst="rect">
-            <a:avLst/>
-          </a:prstGeom>
-          <a:noFill/>
-          <a:ln>
-            <a:noFill/>
-          </a:ln>
-        </p:spPr>
-        <p:txBody>
-          <a:bodyPr wrap="square" lIns="0" tIns="0" rIns="0" bIns="0" rtlCol="0" anchor="b">
-            <a:noAutofit/>
-          </a:bodyPr>
-          <a:lstStyle/>
-          <a:p>
-            <a:pPr marL="0" indent="0" algn="l">
-              <a:lnSpc>
-                <a:spcPct val="95000"/>
-              </a:lnSpc>
-              <a:spcBef>
-                <a:spcPts val="0"/>
-              </a:spcBef>
-              <a:spcAft>
-                <a:spcPts val="0"/>
-              </a:spcAft>
-              <a:buNone/>
-            </a:pPr>
-            <a:r>
-              <a:rPr lang="pt-BR" sz="800" b="1" dirty="0">
-                <a:solidFill>
-                  <a:srgbClr val="6B6B6B"/>
-                </a:solidFill>
-                <a:latin typeface="Montserrat"/>
-              </a:rPr>
-              <a:t>Fontes: </a:t>
-            </a:r>
-            <a:r>
-              <a:rPr lang="pt-BR" sz="800" b="0" dirty="0">
-                <a:solidFill>
-                  <a:srgbClr val="6B6B6B"/>
-                </a:solidFill>
-                <a:latin typeface="Montserrat"/>
-              </a:rPr>
-              <a:t>output/rdd_bolsa/VC_estimativas.csv (adendo 52c; doc 57p; auditoria 41); P1h (protocolo 52b; doc 57i; auditoria 31); output/apresentacao_banca2/curto_origem_bolsa.png.</a:t>
+              <a:t>auditorias 16, 18 e 48; adendo 52e; docs 57a, 57v e 57x; output/rdd_bolsa/portao_r1_ivs_oficial.json; VL_estimativas.csv.</a:t>
             </a:r>
           </a:p>
         </p:txBody>
@@ -19345,6 +19294,64 @@
         </p:nvSpPr>
         <p:spPr>
           <a:xfrm>
+            <a:off x="292608" y="4736592"/>
+            <a:ext cx="11594592" cy="420624"/>
+          </a:xfrm>
+          <a:prstGeom prst="rect">
+            <a:avLst/>
+          </a:prstGeom>
+          <a:noFill/>
+          <a:ln>
+            <a:noFill/>
+          </a:ln>
+        </p:spPr>
+        <p:txBody>
+          <a:bodyPr wrap="square" lIns="164592" tIns="18288" rIns="164592" bIns="18288" rtlCol="0" anchor="ctr">
+            <a:noAutofit/>
+          </a:bodyPr>
+          <a:lstStyle/>
+          <a:p>
+            <a:pPr marL="0" indent="0" algn="l">
+              <a:lnSpc>
+                <a:spcPct val="100000"/>
+              </a:lnSpc>
+              <a:spcBef>
+                <a:spcPts val="0"/>
+              </a:spcBef>
+              <a:spcAft>
+                <a:spcPts val="0"/>
+              </a:spcAft>
+              <a:buNone/>
+            </a:pPr>
+            <a:r>
+              <a:rPr lang="pt-BR" sz="1800" b="1" dirty="0">
+                <a:solidFill>
+                  <a:srgbClr val="114719"/>
+                </a:solidFill>
+                <a:latin typeface="Montserrat"/>
+              </a:rPr>
+              <a:t>Mesma UF, +R$ 5 mil:</a:t>
+            </a:r>
+            <a:r>
+              <a:rPr lang="pt-BR" sz="1800" b="0" dirty="0">
+                <a:solidFill>
+                  <a:srgbClr val="3A3A3A"/>
+                </a:solidFill>
+                <a:latin typeface="Montserrat"/>
+              </a:rPr>
+              <a:t> chance ×1,47 [1,15; 1,89]; ciclo 2: ×1,90.</a:t>
+            </a:r>
+          </a:p>
+        </p:txBody>
+      </p:sp>
+      <p:sp>
+        <p:nvSpPr>
+          <p:cNvPr id="102" name="Linha"/>
+          <p:cNvSpPr/>
+          <p:nvPr/>
+        </p:nvSpPr>
+        <p:spPr>
+          <a:xfrm>
             <a:off x="292608" y="5212080"/>
             <a:ext cx="11594592" cy="420624"/>
           </a:xfrm>
@@ -19375,20 +19382,29 @@
               <a:buNone/>
             </a:pPr>
             <a:r>
+              <a:rPr lang="pt-BR" sz="1800" b="1" dirty="0">
+                <a:solidFill>
+                  <a:srgbClr val="114719"/>
+                </a:solidFill>
+                <a:latin typeface="Montserrat"/>
+              </a:rPr>
+              <a:t>Em km:</a:t>
+            </a:r>
+            <a:r>
               <a:rPr lang="pt-BR" sz="1800" b="0" dirty="0">
                 <a:solidFill>
                   <a:srgbClr val="3A3A3A"/>
                 </a:solidFill>
                 <a:latin typeface="Montserrat"/>
               </a:rPr>
-              <a:t>Na mesma UF, +R$ 5 mil: chance ×1,47; vale 75 km a menos.</a:t>
+              <a:t> vale 75 km a menos.</a:t>
             </a:r>
           </a:p>
         </p:txBody>
       </p:sp>
       <p:sp>
         <p:nvSpPr>
-          <p:cNvPr id="102" name="Cautela"/>
+          <p:cNvPr id="103" name="Cautela"/>
           <p:cNvSpPr/>
           <p:nvPr/>
         </p:nvSpPr>
@@ -19434,14 +19450,14 @@
                 </a:solidFill>
                 <a:latin typeface="Montserrat"/>
               </a:rPr>
-              <a:t>Adendo pós-resultado; pré-registrado, sem fixar a UF: p 0,072.</a:t>
+              <a:t>Adendo pós-resultado; pré-registrado, sem fixar a UF: IC contém 1.</a:t>
             </a:r>
           </a:p>
         </p:txBody>
       </p:sp>
       <p:pic>
         <p:nvPicPr>
-          <p:cNvPr id="103" name="Figura" descr="Razão de chances da 1ª opção por +R$ 5 mil comparando vagas da mesma UF, ciclos 1–3 e ciclo 2, com o modelo pré-registrado em cinza claro"/>
+          <p:cNvPr id="104" name="Figura" descr="Razão de chances da 1ª opção por +R$ 5 mil comparando vagas da mesma UF (efeito fixo do par de UFs), ciclos 1–3 e ciclo 2, com IC 95% e os km equivalentes"/>
           <p:cNvPicPr>
             <a:picLocks noChangeAspect="1"/>
           </p:cNvPicPr>
@@ -19455,8 +19471,8 @@
         </p:blipFill>
         <p:spPr>
           <a:xfrm>
-            <a:off x="292608" y="1294731"/>
-            <a:ext cx="11594592" cy="3299274"/>
+            <a:off x="292608" y="1339782"/>
+            <a:ext cx="11594592" cy="2733684"/>
           </a:xfrm>
           <a:prstGeom prst="rect">
             <a:avLst/>
@@ -19470,7 +19486,7 @@
       </p:pic>
       <p:sp>
         <p:nvSpPr>
-          <p:cNvPr id="104" name="Fontes"/>
+          <p:cNvPr id="105" name="Fontes"/>
           <p:cNvSpPr txBox="1"/>
           <p:nvPr/>
         </p:nvSpPr>
@@ -19584,7 +19600,7 @@
                 </a:solidFill>
                 <a:latin typeface="Montserrat"/>
               </a:rPr>
-              <a:t>Robustez: o que se mantém e o que não se mantém</a:t>
+              <a:t>Robustez: sempre comparando vagas da mesma UF</a:t>
             </a:r>
           </a:p>
         </p:txBody>
@@ -19764,7 +19780,7 @@
                 </a:solidFill>
                 <a:latin typeface="Montserrat"/>
               </a:rPr>
-              <a:t> origem pesa mais que toda a bolsa nos três ciclos.</a:t>
+              <a:t> distância em log; região de saúde × UF.</a:t>
             </a:r>
           </a:p>
         </p:txBody>
@@ -19813,7 +19829,7 @@
                 </a:solidFill>
                 <a:latin typeface="Montserrat"/>
               </a:rPr>
-              <a:t>Não se mantém:</a:t>
+              <a:t>Por ciclo:</a:t>
             </a:r>
             <a:r>
               <a:rPr lang="pt-BR" sz="1800" b="0" dirty="0">
@@ -19822,14 +19838,14 @@
                 </a:solidFill>
                 <a:latin typeface="Montserrat"/>
               </a:rPr>
-              <a:t> peso da bolsa, forte só no ciclo 2; perto do corte, inconclusivo.</a:t>
+              <a:t> forte só no ciclo 2; nos ciclos 1 e 3 o IC contém 1.</a:t>
             </a:r>
           </a:p>
         </p:txBody>
       </p:sp>
       <p:sp>
         <p:nvSpPr>
-          <p:cNvPr id="103" name="Cautela"/>
+          <p:cNvPr id="103" name="Linha"/>
           <p:cNvSpPr/>
           <p:nvPr/>
         </p:nvSpPr>
@@ -19838,14 +19854,10 @@
             <a:off x="292608" y="5687568"/>
             <a:ext cx="11594592" cy="420624"/>
           </a:xfrm>
-          <a:prstGeom prst="roundRect">
-            <a:avLst>
-              <a:gd name="adj" fmla="val 12000"/>
-            </a:avLst>
+          <a:prstGeom prst="rect">
+            <a:avLst/>
           </a:prstGeom>
-          <a:solidFill>
-            <a:srgbClr val="E7F1EA"/>
-          </a:solidFill>
+          <a:noFill/>
           <a:ln>
             <a:noFill/>
           </a:ln>
@@ -19875,14 +19887,23 @@
                 </a:solidFill>
                 <a:latin typeface="Montserrat"/>
               </a:rPr>
-              <a:t>Pré-registrado: IC contém 1.</a:t>
+              <a:t>Perto do corte:</a:t>
+            </a:r>
+            <a:r>
+              <a:rPr lang="pt-BR" sz="1800" b="0" dirty="0">
+                <a:solidFill>
+                  <a:srgbClr val="3A3A3A"/>
+                </a:solidFill>
+                <a:latin typeface="Montserrat"/>
+              </a:rPr>
+              <a:t> inconclusivo.</a:t>
             </a:r>
           </a:p>
         </p:txBody>
       </p:sp>
       <p:pic>
         <p:nvPicPr>
-          <p:cNvPr id="104" name="Figura" descr="Robustez da escolha: razão de chances por +R$ 5 mil no modelo pré-registrado e por ciclo, com o quadro antigo do ciclo 2, com distância em log, com a região de saúde fixada e só perto do corte; à direita, origem menos toda a bolsa por ciclo"/>
+          <p:cNvPr id="104" name="Figura" descr="Robustez dentro da mesma UF: razão de chances da 1ª opção por +R$ 5 mil no VL-1, com a distância em log, com a região de saúde de origem × UF da vaga e só com vagas perto do corte (ciclos 1–3); à direita, o VL-1 em cada ciclo"/>
           <p:cNvPicPr>
             <a:picLocks noChangeAspect="1"/>
           </p:cNvPicPr>
@@ -19896,8 +19917,8 @@
         </p:blipFill>
         <p:spPr>
           <a:xfrm>
-            <a:off x="1633902" y="804672"/>
-            <a:ext cx="8912004" cy="3803904"/>
+            <a:off x="292608" y="821324"/>
+            <a:ext cx="11594592" cy="3770599"/>
           </a:xfrm>
           <a:prstGeom prst="rect">
             <a:avLst/>
@@ -19962,7 +19983,7 @@
                 </a:solidFill>
                 <a:latin typeface="Montserrat"/>
               </a:rPr>
-              <a:t>output/rdd_bolsa/VC_estimativas.csv (adendo 52c; doc 57p; auditoria 41); VL_estimativas.csv (adendo 52e; doc 57x; auditoria 48); doc 57v (adendo 52d; auditoria 46).</a:t>
+              <a:t>output/rdd_bolsa/VL_estimativas.csv (adendo 52e; doc 57x; auditoria 48); output/rdd_bolsa/VG_estimativas.csv (adendo 52g; doc 57z; auditoria pendente); output/apresentacao_banca2/curto_robustez_escolha.png.</a:t>
             </a:r>
           </a:p>
         </p:txBody>
@@ -20025,7 +20046,7 @@
                 </a:solidFill>
                 <a:latin typeface="Montserrat"/>
               </a:rPr>
-              <a:t>Conclusão: a origem pesa mais que toda a bolsa? Sim</a:t>
+              <a:t>Conclusão: a bolsa maior aumenta a 1ª opção? Sim</a:t>
             </a:r>
           </a:p>
         </p:txBody>
@@ -20161,7 +20182,7 @@
         <p:spPr>
           <a:xfrm>
             <a:off x="292608" y="896112"/>
-            <a:ext cx="1554480" cy="1597152"/>
+            <a:ext cx="1676400" cy="1597152"/>
           </a:xfrm>
           <a:prstGeom prst="roundRect">
             <a:avLst>
@@ -20194,13 +20215,13 @@
               <a:buNone/>
             </a:pPr>
             <a:r>
-              <a:rPr lang="pt-BR" sz="2400" b="1" dirty="0">
+              <a:rPr lang="pt-BR" sz="2000" b="1" dirty="0">
                 <a:solidFill>
                   <a:srgbClr val="FFFFFF"/>
                 </a:solidFill>
                 <a:latin typeface="Montserrat"/>
               </a:rPr>
-              <a:t>Origem</a:t>
+              <a:t>Resposta</a:t>
             </a:r>
           </a:p>
         </p:txBody>
@@ -20213,8 +20234,8 @@
         </p:nvSpPr>
         <p:spPr>
           <a:xfrm>
-            <a:off x="1984248" y="896112"/>
-            <a:ext cx="9902952" cy="1597152"/>
+            <a:off x="2106168" y="896112"/>
+            <a:ext cx="9781032" cy="1597152"/>
           </a:xfrm>
           <a:prstGeom prst="roundRect">
             <a:avLst>
@@ -20249,13 +20270,13 @@
               <a:buNone/>
             </a:pPr>
             <a:r>
-              <a:rPr lang="pt-BR" sz="2400" b="0" dirty="0">
+              <a:rPr lang="pt-BR" sz="2000" b="0" dirty="0">
                 <a:solidFill>
                   <a:srgbClr val="3A3A3A"/>
                 </a:solidFill>
                 <a:latin typeface="Montserrat"/>
               </a:rPr>
-              <a:t>pesa mais que toda a bolsa, nos três ciclos</a:t>
+              <a:t>sim, comparando vagas da mesma UF: chance ×1,47</a:t>
             </a:r>
           </a:p>
         </p:txBody>
@@ -20269,7 +20290,7 @@
         <p:spPr>
           <a:xfrm>
             <a:off x="292608" y="2694432"/>
-            <a:ext cx="1554480" cy="1597152"/>
+            <a:ext cx="1676400" cy="1597152"/>
           </a:xfrm>
           <a:prstGeom prst="roundRect">
             <a:avLst>
@@ -20302,13 +20323,13 @@
               <a:buNone/>
             </a:pPr>
             <a:r>
-              <a:rPr lang="pt-BR" sz="2400" b="1" dirty="0">
+              <a:rPr lang="pt-BR" sz="2000" b="1" dirty="0">
                 <a:solidFill>
                   <a:srgbClr val="FFFFFF"/>
                 </a:solidFill>
                 <a:latin typeface="Montserrat"/>
               </a:rPr>
-              <a:t>Bolsa</a:t>
+              <a:t>Força</a:t>
             </a:r>
           </a:p>
         </p:txBody>
@@ -20321,8 +20342,8 @@
         </p:nvSpPr>
         <p:spPr>
           <a:xfrm>
-            <a:off x="1984248" y="2694432"/>
-            <a:ext cx="9902952" cy="1597152"/>
+            <a:off x="2106168" y="2694432"/>
+            <a:ext cx="9781032" cy="1597152"/>
           </a:xfrm>
           <a:prstGeom prst="roundRect">
             <a:avLst>
@@ -20357,13 +20378,13 @@
               <a:buNone/>
             </a:pPr>
             <a:r>
-              <a:rPr lang="pt-BR" sz="2400" b="0" dirty="0">
+              <a:rPr lang="pt-BR" sz="2000" b="0" dirty="0">
                 <a:solidFill>
                   <a:srgbClr val="3A3A3A"/>
                 </a:solidFill>
                 <a:latin typeface="Montserrat"/>
               </a:rPr>
-              <a:t>muda qual vaga, na mesma UF (adendo)</a:t>
+              <a:t>forte só no ciclo 2 (×1,90)</a:t>
             </a:r>
           </a:p>
         </p:txBody>
@@ -20377,7 +20398,7 @@
         <p:spPr>
           <a:xfrm>
             <a:off x="292608" y="4492752"/>
-            <a:ext cx="1554480" cy="1597152"/>
+            <a:ext cx="1676400" cy="1597152"/>
           </a:xfrm>
           <a:prstGeom prst="roundRect">
             <a:avLst>
@@ -20410,7 +20431,7 @@
               <a:buNone/>
             </a:pPr>
             <a:r>
-              <a:rPr lang="pt-BR" sz="2400" b="1" dirty="0">
+              <a:rPr lang="pt-BR" sz="2000" b="1" dirty="0">
                 <a:solidFill>
                   <a:srgbClr val="FFFFFF"/>
                 </a:solidFill>
@@ -20429,8 +20450,8 @@
         </p:nvSpPr>
         <p:spPr>
           <a:xfrm>
-            <a:off x="1984248" y="4492752"/>
-            <a:ext cx="9902952" cy="1597152"/>
+            <a:off x="2106168" y="4492752"/>
+            <a:ext cx="9781032" cy="1597152"/>
           </a:xfrm>
           <a:prstGeom prst="roundRect">
             <a:avLst>
@@ -20465,13 +20486,13 @@
               <a:buNone/>
             </a:pPr>
             <a:r>
-              <a:rPr lang="pt-BR" sz="2400" b="0" dirty="0">
+              <a:rPr lang="pt-BR" sz="2000" b="0" dirty="0">
                 <a:solidFill>
                   <a:srgbClr val="3A3A3A"/>
                 </a:solidFill>
                 <a:latin typeface="Montserrat"/>
               </a:rPr>
-              <a:t>os dados sugerem incentivo limitado (pacote do corte)</a:t>
+              <a:t>os dados sugerem: bolsa compensa parte do custo do lugar</a:t>
             </a:r>
           </a:p>
         </p:txBody>
@@ -20529,7 +20550,7 @@
                 </a:solidFill>
                 <a:latin typeface="Montserrat"/>
               </a:rPr>
-              <a:t>modelo da banca 1; doc 07 da banca 2; docs 57i, 57p, 57x e 66 (§9 e §10); auditorias 18, 50 e 53.</a:t>
+              <a:t>modelo da banca 1; doc 07 da banca 2; docs 57x e 57z; doc 66 (§9 e §10); auditorias 18, 48, 50 e 52.</a:t>
             </a:r>
           </a:p>
         </p:txBody>
@@ -20736,8 +20757,8 @@
             <a:tbl>
               <a:tblPr firstRow="1" bandRow="1"/>
               <a:tblGrid>
-                <a:gridCol w="5723777"/>
-                <a:gridCol w="5870815"/>
+                <a:gridCol w="4956887"/>
+                <a:gridCol w="6637705"/>
               </a:tblGrid>
               <a:tr h="732826">
                 <a:tc>
@@ -20984,7 +21005,7 @@
                           </a:solidFill>
                           <a:latin typeface="Montserrat"/>
                         </a:rPr>
-                        <a:t>Preferência revelada</a:t>
+                        <a:t>Sem fixar UF</a:t>
                       </a:r>
                     </a:p>
                   </a:txBody>
@@ -21038,7 +21059,7 @@
                           </a:solidFill>
                           <a:latin typeface="Montserrat"/>
                         </a:rPr>
-                        <a:t>não é causa</a:t>
+                        <a:t>IC contém 1</a:t>
                       </a:r>
                     </a:p>
                   </a:txBody>
@@ -21148,7 +21169,7 @@
                           </a:solidFill>
                           <a:latin typeface="Montserrat"/>
                         </a:rPr>
-                        <a:t>sem margem extensiva</a:t>
+                        <a:t>escolha ≠ preenchimento</a:t>
                       </a:r>
                     </a:p>
                   </a:txBody>
@@ -21566,7 +21587,7 @@
                 </a:solidFill>
                 <a:latin typeface="Montserrat"/>
               </a:rPr>
-              <a:t>doc 66 (§0, §5 e §8); doc 07 da banca 2 (§3 e §4); auditorias 18, 50, 52 e 53.</a:t>
+              <a:t>doc 66 (§0, §5 e §8); doc 07 da banca 2 (§3 e §4); docs 57p, 57x e 57z; auditorias 18, 48, 50 e 52.</a:t>
             </a:r>
           </a:p>
         </p:txBody>
@@ -21629,7 +21650,7 @@
                 </a:solidFill>
                 <a:latin typeface="Montserrat"/>
               </a:rPr>
-              <a:t>Apêndice · O fato: sem aumento detectado no corte</a:t>
+              <a:t>Apêndice · O fato: pareando municípios da mesma UF</a:t>
             </a:r>
           </a:p>
         </p:txBody>
@@ -21791,7 +21812,7 @@
                 </a:solidFill>
                 <a:latin typeface="Montserrat"/>
               </a:rPr>
-              <a:t>O negativo em 0,300 nunca passou no Holm; anda junto com a UF.</a:t>
+              <a:t>Sem aumento detectado do preenchimento nos dois cortes.</a:t>
             </a:r>
           </a:p>
         </p:txBody>
@@ -21844,14 +21865,14 @@
                 </a:solidFill>
                 <a:latin typeface="Montserrat"/>
               </a:rPr>
-              <a:t>Pacote do corte; só detectaria saltos grandes.</a:t>
+              <a:t>Pacote do corte; poucos pares.</a:t>
             </a:r>
           </a:p>
         </p:txBody>
       </p:sp>
       <p:pic>
         <p:nvPicPr>
-          <p:cNvPr id="103" name="Figura" descr="O fato, por corte: salto do preenchimento das vagas imediatas sem controle, com efeito fixo de UF e pareando municípios da mesma UF, com IC 95%"/>
+          <p:cNvPr id="103" name="Figura" descr="O fato, por corte: diferença no preenchimento das vagas imediatas entre municípios pareados na mesma UF e condição de capital, com IC 95% de permutação"/>
           <p:cNvPicPr>
             <a:picLocks noChangeAspect="1"/>
           </p:cNvPicPr>
@@ -21865,8 +21886,8 @@
         </p:blipFill>
         <p:spPr>
           <a:xfrm>
-            <a:off x="292608" y="1082635"/>
-            <a:ext cx="11594592" cy="3723467"/>
+            <a:off x="292608" y="1577526"/>
+            <a:ext cx="11594592" cy="2733684"/>
           </a:xfrm>
           <a:prstGeom prst="rect">
             <a:avLst/>
@@ -21931,347 +21952,7 @@
                 </a:solidFill>
                 <a:latin typeface="Montserrat"/>
               </a:rPr>
-              <a:t>output/rdd_bolsa/HI_estimativas.csv (adendo 48b; doc 57n; auditoria 38); PL_estimativas.csv (adendo 48h; doc 57w; auditoria 47); output/apresentacao_banca2/curto_fato.png.</a:t>
-            </a:r>
-          </a:p>
-        </p:txBody>
-      </p:sp>
-    </p:spTree>
-  </p:cSld>
-  <p:clrMapOvr>
-    <a:masterClrMapping/>
-  </p:clrMapOvr>
-</p:sld>
-</file>
-
-<file path=ppt/slides/slide49.xml><?xml version="1.0" encoding="utf-8"?>
-<p:sld xmlns:a="http://schemas.openxmlformats.org/drawingml/2006/main" xmlns:r="http://schemas.openxmlformats.org/officeDocument/2006/relationships" xmlns:p="http://schemas.openxmlformats.org/presentationml/2006/main">
-  <p:cSld>
-    <p:spTree>
-      <p:nvGrpSpPr>
-        <p:cNvPr id="1" name=""/>
-        <p:cNvGrpSpPr/>
-        <p:nvPr/>
-      </p:nvGrpSpPr>
-      <p:grpSpPr>
-        <a:xfrm>
-          <a:off x="0" y="0"/>
-          <a:ext cx="0" cy="0"/>
-          <a:chOff x="0" y="0"/>
-          <a:chExt cx="0" cy="0"/>
-        </a:xfrm>
-      </p:grpSpPr>
-      <p:sp>
-        <p:nvSpPr>
-          <p:cNvPr id="2" name="Título"/>
-          <p:cNvSpPr>
-            <a:spLocks noGrp="1"/>
-          </p:cNvSpPr>
-          <p:nvPr>
-            <p:ph type="title"/>
-          </p:nvPr>
-        </p:nvSpPr>
-        <p:spPr/>
-        <p:txBody>
-          <a:bodyPr>
-            <a:normAutofit/>
-          </a:bodyPr>
-          <a:lstStyle/>
-          <a:p>
-            <a:pPr marL="0" indent="0" algn="l">
-              <a:lnSpc>
-                <a:spcPct val="104000"/>
-              </a:lnSpc>
-              <a:spcAft>
-                <a:spcPts val="0"/>
-              </a:spcAft>
-              <a:buNone/>
-            </a:pPr>
-            <a:r>
-              <a:rPr lang="pt-BR" sz="2400" b="1" dirty="0">
-                <a:solidFill>
-                  <a:srgbClr val="FFFFFF"/>
-                </a:solidFill>
-                <a:latin typeface="Montserrat"/>
-              </a:rPr>
-              <a:t>Apêndice · H3: oferta, numa frase</a:t>
-            </a:r>
-          </a:p>
-        </p:txBody>
-      </p:sp>
-      <p:sp>
-        <p:nvSpPr>
-          <p:cNvPr id="3" name="Número da página"/>
-          <p:cNvSpPr>
-            <a:spLocks noGrp="1"/>
-          </p:cNvSpPr>
-          <p:nvPr>
-            <p:ph type="body" sz="quarter" idx="18"/>
-          </p:nvPr>
-        </p:nvSpPr>
-        <p:spPr>
-          <a:xfrm>
-            <a:off x="11706744" y="6457042"/>
-            <a:ext cx="492080" cy="400640"/>
-          </a:xfrm>
-        </p:spPr>
-        <p:txBody>
-          <a:bodyPr anchor="ctr">
-            <a:normAutofit/>
-          </a:bodyPr>
-          <a:lstStyle/>
-          <a:p>
-            <a:pPr algn="ctr"/>
-            <a:fld id="{B1A5E0C2-5F3A-4C7E-9D11-7A2E6C0F4B01}" type="slidenum">
-              <a:rPr lang="pt-BR" sz="1400" b="1">
-                <a:solidFill>
-                  <a:srgbClr val="BFBFBF"/>
-                </a:solidFill>
-                <a:latin typeface="Montserrat"/>
-              </a:rPr>
-              <a:t>‹#›</a:t>
-            </a:fld>
-            <a:endParaRPr lang="pt-BR" sz="1400" b="1">
-              <a:solidFill>
-                <a:srgbClr val="BFBFBF"/>
-              </a:solidFill>
-            </a:endParaRPr>
-          </a:p>
-        </p:txBody>
-      </p:sp>
-      <p:sp>
-        <p:nvSpPr>
-          <p:cNvPr id="4" name="Navegação do rodapé"/>
-          <p:cNvSpPr txBox="1"/>
-          <p:nvPr/>
-        </p:nvSpPr>
-        <p:spPr>
-          <a:xfrm>
-            <a:off x="196860" y="6639248"/>
-            <a:ext cx="9223026" cy="246221"/>
-          </a:xfrm>
-          <a:prstGeom prst="rect">
-            <a:avLst/>
-          </a:prstGeom>
-          <a:noFill/>
-        </p:spPr>
-        <p:txBody>
-          <a:bodyPr wrap="square" rtlCol="0">
-            <a:spAutoFit/>
-          </a:bodyPr>
-          <a:lstStyle/>
-          <a:p>
-            <a:r>
-              <a:rPr lang="pt-BR" sz="1000" dirty="0">
-                <a:latin typeface="Montserrat"/>
-              </a:rPr>
-              <a:t xml:space="preserve">Hipótese  |  </a:t>
-            </a:r>
-            <a:r>
-              <a:rPr lang="pt-BR" sz="1000" dirty="0">
-                <a:latin typeface="Montserrat"/>
-              </a:rPr>
-              <a:t xml:space="preserve">Dados  |  </a:t>
-            </a:r>
-            <a:r>
-              <a:rPr lang="pt-BR" sz="1000" dirty="0">
-                <a:latin typeface="Montserrat"/>
-              </a:rPr>
-              <a:t xml:space="preserve">Análise descritiva  |  </a:t>
-            </a:r>
-            <a:r>
-              <a:rPr lang="pt-BR" sz="1000" dirty="0">
-                <a:latin typeface="Montserrat"/>
-              </a:rPr>
-              <a:t xml:space="preserve">Metodologia  |  </a:t>
-            </a:r>
-            <a:r>
-              <a:rPr lang="pt-BR" sz="1000" dirty="0">
-                <a:latin typeface="Montserrat"/>
-              </a:rPr>
-              <a:t xml:space="preserve">Identificação  |  </a:t>
-            </a:r>
-            <a:r>
-              <a:rPr lang="pt-BR" sz="1000" dirty="0">
-                <a:latin typeface="Montserrat"/>
-              </a:rPr>
-              <a:t xml:space="preserve">Resultados  |  </a:t>
-            </a:r>
-            <a:r>
-              <a:rPr lang="pt-BR" sz="1000" dirty="0">
-                <a:latin typeface="Montserrat"/>
-              </a:rPr>
-              <a:t xml:space="preserve">Robustez  |  </a:t>
-            </a:r>
-            <a:r>
-              <a:rPr lang="pt-BR" sz="1000" dirty="0">
-                <a:latin typeface="Montserrat"/>
-              </a:rPr>
-              <a:t xml:space="preserve">Discussão</a:t>
-            </a:r>
-          </a:p>
-        </p:txBody>
-      </p:sp>
-      <p:sp>
-        <p:nvSpPr>
-          <p:cNvPr id="101" name="Cautela"/>
-          <p:cNvSpPr/>
-          <p:nvPr/>
-        </p:nvSpPr>
-        <p:spPr>
-          <a:xfrm>
-            <a:off x="292608" y="5669280"/>
-            <a:ext cx="11594592" cy="420624"/>
-          </a:xfrm>
-          <a:prstGeom prst="roundRect">
-            <a:avLst>
-              <a:gd name="adj" fmla="val 12000"/>
-            </a:avLst>
-          </a:prstGeom>
-          <a:solidFill>
-            <a:srgbClr val="E7F1EA"/>
-          </a:solidFill>
-          <a:ln>
-            <a:noFill/>
-          </a:ln>
-        </p:spPr>
-        <p:txBody>
-          <a:bodyPr wrap="square" lIns="164592" tIns="18288" rIns="164592" bIns="18288" rtlCol="0" anchor="ctr">
-            <a:noAutofit/>
-          </a:bodyPr>
-          <a:lstStyle/>
-          <a:p>
-            <a:pPr marL="0" indent="0" algn="l">
-              <a:lnSpc>
-                <a:spcPct val="100000"/>
-              </a:lnSpc>
-              <a:spcBef>
-                <a:spcPts val="0"/>
-              </a:spcBef>
-              <a:spcAft>
-                <a:spcPts val="0"/>
-              </a:spcAft>
-              <a:buNone/>
-            </a:pPr>
-            <a:r>
-              <a:rPr lang="pt-BR" sz="1800" b="1" dirty="0">
-                <a:solidFill>
-                  <a:srgbClr val="114719"/>
-                </a:solidFill>
-                <a:latin typeface="Montserrat"/>
-              </a:rPr>
-              <a:t>Associação; vínculo cadastrado não é presença.</a:t>
-            </a:r>
-          </a:p>
-        </p:txBody>
-      </p:sp>
-      <p:sp>
-        <p:nvSpPr>
-          <p:cNvPr id="102" name="Frase"/>
-          <p:cNvSpPr/>
-          <p:nvPr/>
-        </p:nvSpPr>
-        <p:spPr>
-          <a:xfrm>
-            <a:off x="658368" y="1911096"/>
-            <a:ext cx="10863072" cy="2377440"/>
-          </a:xfrm>
-          <a:prstGeom prst="roundRect">
-            <a:avLst>
-              <a:gd name="adj" fmla="val 8000"/>
-            </a:avLst>
-          </a:prstGeom>
-          <a:solidFill>
-            <a:srgbClr val="114719"/>
-          </a:solidFill>
-          <a:ln>
-            <a:noFill/>
-          </a:ln>
-        </p:spPr>
-        <p:txBody>
-          <a:bodyPr wrap="square" lIns="411480" tIns="91440" rIns="411480" bIns="91440" rtlCol="0" anchor="ctr">
-            <a:noAutofit/>
-          </a:bodyPr>
-          <a:lstStyle/>
-          <a:p>
-            <a:pPr marL="0" indent="0" algn="ctr">
-              <a:lnSpc>
-                <a:spcPct val="100000"/>
-              </a:lnSpc>
-              <a:spcBef>
-                <a:spcPts val="0"/>
-              </a:spcBef>
-              <a:spcAft>
-                <a:spcPts val="0"/>
-              </a:spcAft>
-              <a:buNone/>
-            </a:pPr>
-            <a:r>
-              <a:rPr lang="pt-BR" sz="3000" b="0" dirty="0">
-                <a:solidFill>
-                  <a:srgbClr val="FFFFFF"/>
-                </a:solidFill>
-                <a:latin typeface="Montserrat"/>
-              </a:rPr>
-              <a:t>O médico que chega cadastra +6,6 h/sem; metade já estava lá</a:t>
-            </a:r>
-          </a:p>
-        </p:txBody>
-      </p:sp>
-      <p:sp>
-        <p:nvSpPr>
-          <p:cNvPr id="103" name="Fontes"/>
-          <p:cNvSpPr txBox="1"/>
-          <p:nvPr/>
-        </p:nvSpPr>
-        <p:spPr>
-          <a:xfrm>
-            <a:off x="292608" y="6181344"/>
-            <a:ext cx="11594592" cy="274320"/>
-          </a:xfrm>
-          <a:prstGeom prst="rect">
-            <a:avLst/>
-          </a:prstGeom>
-          <a:noFill/>
-          <a:ln>
-            <a:noFill/>
-          </a:ln>
-        </p:spPr>
-        <p:txBody>
-          <a:bodyPr wrap="square" lIns="0" tIns="0" rIns="0" bIns="0" rtlCol="0" anchor="b">
-            <a:noAutofit/>
-          </a:bodyPr>
-          <a:lstStyle/>
-          <a:p>
-            <a:pPr marL="0" indent="0" algn="l">
-              <a:lnSpc>
-                <a:spcPct val="95000"/>
-              </a:lnSpc>
-              <a:spcBef>
-                <a:spcPts val="0"/>
-              </a:spcBef>
-              <a:spcAft>
-                <a:spcPts val="0"/>
-              </a:spcAft>
-              <a:buNone/>
-            </a:pPr>
-            <a:r>
-              <a:rPr lang="pt-BR" sz="800" b="1" dirty="0">
-                <a:solidFill>
-                  <a:srgbClr val="6B6B6B"/>
-                </a:solidFill>
-                <a:latin typeface="Montserrat"/>
-              </a:rPr>
-              <a:t>Fontes: </a:t>
-            </a:r>
-            <a:r>
-              <a:rPr lang="pt-BR" sz="800" b="0" dirty="0">
-                <a:solidFill>
-                  <a:srgbClr val="6B6B6B"/>
-                </a:solidFill>
-                <a:latin typeface="Montserrat"/>
-              </a:rPr>
-              <a:t>S57_resumo.json (doc 57d); OC_estimativas.csv (protocolo 64; doc 57q; auditoria 39).</a:t>
+              <a:t>output/rdd_bolsa/PL_estimativas.csv (adendo 48h; doc 57w; auditoria 47); output/apresentacao_banca2/curto_fato_pareado.png.</a:t>
             </a:r>
           </a:p>
         </p:txBody>

--- a/output/apresentacao_banca2/deck_banca2_curto.pptx
+++ b/output/apresentacao_banca2/deck_banca2_curto.pptx
@@ -17781,13 +17781,36 @@
               <a:buNone/>
             </a:pPr>
             <a:r>
-              <a:rPr lang="pt-BR" sz="2800" b="0" dirty="0">
+              <a:rPr lang="pt-BR" sz="2600" b="0" dirty="0">
                 <a:solidFill>
                   <a:srgbClr val="FFFFFF"/>
                 </a:solidFill>
                 <a:latin typeface="Montserrat"/>
               </a:rPr>
-              <a:t>U = β·bolsa + γ·distância + EF(UF origem × UF vaga) + …; P(j) = e^Uj/Σe^U</a:t>
+              <a:t>U = β·bolsa + γ·distância + EF(UF origem × UF vaga) + …;</a:t>
+            </a:r>
+          </a:p>
+          <a:p>
+            <a:pPr marL="0" indent="0" algn="ctr">
+              <a:lnSpc>
+                <a:spcPct val="100000"/>
+              </a:lnSpc>
+              <a:spcBef>
+                <a:spcPts val="0"/>
+              </a:spcBef>
+              <a:spcAft>
+                <a:spcPts val="0"/>
+              </a:spcAft>
+              <a:buNone/>
+            </a:pPr>
+            <a:r>
+              <a:rPr lang="pt-BR" sz="2600" b="0" dirty="0">
+                <a:solidFill>
+                  <a:srgbClr val="FFFFFF"/>
+                </a:solidFill>
+                <a:latin typeface="Montserrat"/>
+              </a:rPr>
+              <a:t>P(j) = e^Uj/Σe^U</a:t>
             </a:r>
           </a:p>
         </p:txBody>

--- a/output/apresentacao_banca2/deck_banca2_curto.pptx
+++ b/output/apresentacao_banca2/deck_banca2_curto.pptx
@@ -9268,7 +9268,7 @@
           <a:p>
             <a:r>
               <a:rPr lang="pt-BR" dirty="0"/>
-              <a:t>FALA (0:50): Este é o resultado principal. Comparando só vagas da mesma UF, a de origem ou outra, vistas por médicos da mesma UF de origem, a vaga com bolsa R$ 5 mil maior tem 1,47 vez a chance de ser a 1ª opção, nos ciclos 1 a 3 juntos; o intervalo vai de 1,15 a 1,89. No ciclo 2, 1,90. Em km: na escolha, R$ 5 mil a mais valem o mesmo que 75 km a menos de distância. Duas ressalvas, na tela: é uma especificação escolhida depois do resultado; e a pré-registrada, sem fixar a UF, tem intervalo que contém 1.</a:t>
+              <a:t>FALA (0:50): Este é o resultado principal. Comparando só vagas da mesma UF, a de origem ou outra, vistas por médicos da mesma UF de origem, a vaga com bolsa R$ 5 mil maior tem 1,47 vez a chance de ser a 1ª opção, nos ciclos 1 a 3 juntos; o intervalo vai de 1,15 a 1,89. No ciclo 2, 1,90. Em palavras: entre duas vagas parecidas da mesma UF, a de bolsa maior tem cerca de uma vez e meia a chance de ser a escolhida; ou, por R$ 5 mil a mais, o médico aceita uma vaga 75 km mais longe. Duas ressalvas, na tela: é uma especificação escolhida depois do resultado; e a pré-registrada, sem fixar a UF, tem intervalo que contém 1.</a:t>
             </a:r>
           </a:p>
           <a:p>
@@ -19353,7 +19353,7 @@
                 </a:solidFill>
                 <a:latin typeface="Montserrat"/>
               </a:rPr>
-              <a:t>Mesma UF, +R$ 5 mil:</a:t>
+              <a:t>+R$ 5 mil:</a:t>
             </a:r>
             <a:r>
               <a:rPr lang="pt-BR" sz="1800" b="0" dirty="0">
@@ -19362,7 +19362,7 @@
                 </a:solidFill>
                 <a:latin typeface="Montserrat"/>
               </a:rPr>
-              <a:t> chance ×1,47 [1,15; 1,89]; ciclo 2: ×1,90.</a:t>
+              <a:t> chance ×1,47 [1,15; 1,89].</a:t>
             </a:r>
           </a:p>
         </p:txBody>
@@ -19411,7 +19411,7 @@
                 </a:solidFill>
                 <a:latin typeface="Montserrat"/>
               </a:rPr>
-              <a:t>Em km:</a:t>
+              <a:t>Leitura:</a:t>
             </a:r>
             <a:r>
               <a:rPr lang="pt-BR" sz="1800" b="0" dirty="0">
@@ -19420,7 +19420,7 @@
                 </a:solidFill>
                 <a:latin typeface="Montserrat"/>
               </a:rPr>
-              <a:t> vale 75 km a menos.</a:t>
+              <a:t> por +R$ 5 mil, o médico aceita vaga 75 km mais longe.</a:t>
             </a:r>
           </a:p>
         </p:txBody>

--- a/output/apresentacao_banca2/deck_banca2_curto.pptx
+++ b/output/apresentacao_banca2/deck_banca2_curto.pptx
@@ -9339,13 +9339,13 @@
           <a:p>
             <a:r>
               <a:rPr lang="pt-BR" dirty="0"/>
-              <a:t>FALA (0:40): A robustez fica sempre dentro da mesma UF. À esquerda, o peso da bolsa se mantém com a distância em log e com a região de saúde de origem no lugar da UF de origem. Só com vagas perto do corte, o intervalo contém 1: inconclusivo. À direita, ciclo a ciclo: o efeito é forte só no ciclo 2; nos ciclos 1 e 3, o intervalo contém 1. Por que o ciclo 2? Não sabemos.</a:t>
+              <a:t>FALA (0:40): A robustez fica sempre dentro da mesma UF. À esquerda, o peso da bolsa se mantém com a distância em log e com a região de saúde de origem no lugar da UF de origem. Com poucos grupos, o p do score bootstrap continua 0,011. Só com vagas perto do corte, o intervalo contém 1: inconclusivo. À direita, ciclo a ciclo: o efeito é forte só no ciclo 2; nos ciclos 1 e 3, o intervalo contém 1. Por que o ciclo 2? Não sabemos.</a:t>
             </a:r>
           </a:p>
           <a:p>
             <a:r>
               <a:rPr lang="pt-BR" dirty="0"/>
-              <a:t>DETALHE PARA PERGUNTAS: Todas as variantes comparam vagas da mesma UF. Ciclos 1–3 (adendo 52e; doc 57x; auditoria 48): VL-1, 1,47 [1,15; 1,89]; com a distância em log, 1,45 [1,15; 1,83] (ciclo 2: 1,75 [1,23; 2,49]); com o efeito fixo de região de saúde de origem × UF da vaga (VL-3), 1,49 [1,15; 1,92] (ciclo 2: 1,91 [1,33; 2,74]); só com vagas a até 0,050 de um corte (VL-2), 1,28 [0,95; 1,72], p de Holm 0,103: inconclusivo, a comparação local tem pouca informação. Por ciclo, com o par de UFs fixado (adendo 52g; doc 57z; pós-resultado; auditoria pendente): ciclo 1, 1,15 [0,66; 2,01], com 16 conjuntos de escolha; ciclo 2, 1,90 [1,30; 2,78]; ciclo 3, 1,25 [0,90; 1,73], com 23 conjuntos. A leitura fixada no adendo antes de rodar: forte só no ciclo 2, como na especificação base. Os km dos ciclos 1 e 3 têm IC que contém zero e não são usados. Por que o ciclo 2, não sabemos (leituras candidatas, sem teste: informação sobre a grade, vagas por curso, parte de vagas imediatas; doc 57a). Tudo pós-resultado e condicional a se candidatar; pacote do corte.</a:t>
+              <a:t>DETALHE PARA PERGUNTAS: Todas as variantes comparam vagas da mesma UF. Ciclos 1–3 (adendo 52e; doc 57x; auditoria 48): VL-1, 1,47 [1,15; 1,89]; com a distância em log, 1,45 [1,15; 1,83] (ciclo 2: 1,75 [1,23; 2,49]); com o efeito fixo de região de saúde de origem × UF da vaga (VL-3), 1,49 [1,15; 1,92] (ciclo 2: 1,91 [1,33; 2,74]); só com vagas a até 0,050 de um corte (VL-2), 1,28 [0,95; 1,72], p de Holm 0,103: inconclusivo, a comparação local tem pouca informação. Inferência com poucos clusters (conjuntos de escolha): p do score bootstrap de Rademacher 0,011 nos ciclos 1–3 e 0,004 no ciclo 2, sem ajuste (doc 57x). Por ciclo, com o par de UFs fixado (adendo 52g; doc 57z; pós-resultado; auditoria pendente): ciclo 1, 1,15 [0,66; 2,01], com 16 conjuntos de escolha; ciclo 2, 1,90 [1,30; 2,78]; ciclo 3, 1,25 [0,90; 1,73], com 23 conjuntos. A leitura fixada no adendo antes de rodar: forte só no ciclo 2, como na especificação base. Os km dos ciclos 1 e 3 têm IC que contém zero e não são usados. Por que o ciclo 2, não sabemos (leituras candidatas, sem teste: informação sobre a grade, vagas por curso, parte de vagas imediatas; doc 57a). Tudo pós-resultado e condicional a se candidatar; pacote do corte.</a:t>
             </a:r>
           </a:p>
         </p:txBody>
@@ -19803,7 +19803,7 @@
                 </a:solidFill>
                 <a:latin typeface="Montserrat"/>
               </a:rPr>
-              <a:t> distância em log; região de saúde × UF.</a:t>
+              <a:t> log da distância; região × UF; score bootstrap (p 0,011).</a:t>
             </a:r>
           </a:p>
         </p:txBody>

--- a/output/apresentacao_banca2/deck_banca2_curto.pptx
+++ b/output/apresentacao_banca2/deck_banca2_curto.pptx
@@ -20,7 +20,6 @@
     <p:sldId id="410" r:id="rId57"/>
     <p:sldId id="411" r:id="rId58"/>
     <p:sldId id="412" r:id="rId59"/>
-    <p:sldId id="413" r:id="rId60"/>
   </p:sldIdLst>
   <p:sldSz cx="12192000" cy="6858000"/>
   <p:notesSz cx="6858000" cy="9144000"/>
@@ -8801,13 +8800,13 @@
           <a:p>
             <a:r>
               <a:rPr lang="pt-BR" dirty="0"/>
-              <a:t>FALA (0:35): Nossa pergunta é simples: quando o médico especialista escolhe uma vaga do PMM-E, a bolsa maior muda qual vaga ele põe em 1ª opção? A hipótese: comparando vagas da mesma UF, a vaga de bolsa maior tem mais chance de ser a 1ª opção. A motivação vem do corte de IVS: onde a bolsa é R$ 5 mil maior, não detectamos aumento do preenchimento; então olhamos um passo antes, a escolha. Um aviso honesto, que está na tela: formulamos esta hipótese depois de ver os dados.</a:t>
+              <a:t>FALA (0:35): Nossa pergunta é simples: quando o médico especialista escolhe uma vaga do PMM-E, a bolsa maior muda qual vaga ele põe em 1ª opção? A hipótese: comparando vagas da mesma UF, a vaga de bolsa maior tem mais chance de ser a 1ª opção. A motivação: o programa paga bolsa maior onde o IVS do município é maior; queremos saber se isso muda a vaga que o médico escolhe. Um aviso honesto, que está na tela: formulamos esta hipótese depois de ver os dados.</a:t>
             </a:r>
           </a:p>
           <a:p>
             <a:r>
               <a:rPr lang="pt-BR" dirty="0"/>
-              <a:t>DETALHE PARA PERGUNTAS: Hipótese única desta versão (decisão do autor de 28/10/2026; doc 07 da banca 2): "a hipótese é simplesmente sobre o efeito bolsa → 1ª opção", com "só comparação entre municípios da mesma UF". A UF de origem, a UF da vaga, a região de saúde, o município e a distância entram só como controle e pareamento, nunca como resultado. Foi formulada depois de ver os resultados do preenchimento no corte e os coeficientes do modelo de escolha: é pós-resultado, e isso é dito aqui. Motivação: onde a bolsa é R$ 5 mil maior, não detectamos aumento do preenchimento comparando municípios pareados na mesma UF (apêndice). Ligar a hipótese a esse fato é interpretação, não teste (auditoria 50). O contraste da bolsa é o pacote do corte (a bolsa e as outras regras federais que mudam nos mesmos cortes de IVS, auditoria 18), não a participação no PMM-E nem o Agora Tem Especialistas. Tudo é condicional a se candidatar.</a:t>
+              <a:t>DETALHE PARA PERGUNTAS: Hipótese única desta versão (decisão do autor de 28/10/2026; doc 07 da banca 2): "a hipótese é simplesmente sobre o efeito bolsa → 1ª opção", com "só comparação entre municípios da mesma UF". A UF de origem, a UF da vaga, a região de saúde, o município e a distância entram só como controle e pareamento, nunca como resultado. Foi formulada depois de ver outros resultados do projeto no corte e os coeficientes do modelo de escolha: é pós-resultado, e isso é dito aqui. A leitura pela teoria da banca 1 é interpretação, não teste (auditoria 50). O contraste da bolsa é o pacote do corte (a bolsa e as outras regras federais que mudam nos mesmos cortes de IVS, auditoria 18), não a participação no PMM-E nem o Agora Tem Especialistas. Tudo é condicional a se candidatar.</a:t>
             </a:r>
           </a:p>
           <a:p>
@@ -9404,13 +9403,13 @@
           <a:p>
             <a:r>
               <a:rPr lang="pt-BR" dirty="0"/>
-              <a:t>FALA (0:35): Voltando à pergunta: a bolsa maior aumenta a chance de a vaga ser a 1ª opção, comparando vagas da mesma UF? Sim: 1,47 vez a chance nos três ciclos juntos, e forte só no ciclo 2. Pela teoria da banca 1, o médico aceita a vaga se a bolsa compensa o custo do lugar; os dados sugerem que R$ 5 mil compensam parte desse custo, cerca de 75 km a menos. Isso vale para a escolha de quem se candidatou, não para o preenchimento.</a:t>
+              <a:t>FALA (0:35): Voltando à pergunta: a bolsa maior aumenta a chance de a vaga ser a 1ª opção, comparando vagas da mesma UF? Sim: 1,47 vez a chance nos três ciclos juntos, e forte só no ciclo 2. Pela teoria da banca 1, o médico aceita a vaga se a bolsa compensa o custo do lugar; os dados sugerem que R$ 5 mil compensam parte desse custo, cerca de 75 km a menos. Isso vale para a escolha de quem se candidatou.</a:t>
             </a:r>
           </a:p>
           <a:p>
             <a:r>
               <a:rPr lang="pt-BR" dirty="0"/>
-              <a:t>DETALHE PARA PERGUNTAS: No modelo da banca 1, o médico aceita a vaga se a bolsa compensa o custo do lugar. O dado: comparando vagas da mesma UF, a vaga de bolsa maior tem mais chance de ser a 1ª opção. A leitura que os dados sugerem, sem teste direto: a bolsa compensa parte do custo do lugar, e R$ 5 mil valem cerca de 75 km a menos de distância na escolha. É interpretação, não teste (auditoria 50). Não testamos se isso aumenta o preenchimento; no corte, comparando municípios pareados na mesma UF, não detectamos aumento (apêndice). Dá para afirmar: entre quem se candidatou, a vaga de bolsa maior é preferida a uma vaga parecida da mesma UF, com força só no ciclo 2 (nos ciclos 1 e 3, separados, o IC contém 1). Não dá para afirmar: que a bolsa causa mais médicos no município; que o efeito no preenchimento é zero; que a bolsa reduz o preenchimento; que o efeito vale fora do pacote do corte. O contraste é o pacote do corte, não a participação no PMM-E. Próximos passos: a auditoria do adendo 52g, o ciclo 3 com a competência 202703 madura e o universo de inscritos.</a:t>
+              <a:t>DETALHE PARA PERGUNTAS: No modelo da banca 1, o médico aceita a vaga se a bolsa compensa o custo do lugar. O dado: comparando vagas da mesma UF, a vaga de bolsa maior tem mais chance de ser a 1ª opção. A leitura que os dados sugerem, sem teste direto: a bolsa compensa parte do custo do lugar, e R$ 5 mil valem cerca de 75 km a menos de distância na escolha. É interpretação, não teste (auditoria 50). Dá para afirmar: entre quem se candidatou, a vaga de bolsa maior é preferida a uma vaga parecida da mesma UF, com força só no ciclo 2 (nos ciclos 1 e 3, separados, o IC contém 1). Não dá para afirmar: que a bolsa causa mais médicos no município; nada sobre quem não se candidatou; que o efeito vale fora do pacote do corte. O contraste é o pacote do corte, não a participação no PMM-E. Próximos passos: a auditoria do adendo 52g, o ciclo 3 com a competência 202703 madura e o universo de inscritos.</a:t>
             </a:r>
           </a:p>
         </p:txBody>
@@ -9469,78 +9468,13 @@
           <a:p>
             <a:r>
               <a:rPr lang="pt-BR" dirty="0"/>
-              <a:t>FALA (0:45): Seis limitações e o que cada uma implica. A especificação é pós-resultado: o resultado é exploratório e pede dados novos. Sem fixar a UF, como no pré-registrado, o intervalo contém 1. Só vemos quem se candidatou: mudar a escolha não é mudar o preenchimento. O contraste é o pacote do corte: vale para o pacote, não para os R$ 5 mil sozinhos. O efeito é forte só no ciclo 2: não dá para generalizar. E a origem é o vínculo no CNES, não a residência. Obrigado.</a:t>
+              <a:t>FALA (0:45): Seis limitações e o que cada uma implica. A especificação é pós-resultado: o resultado é exploratório e pede dados novos. Sem fixar a UF, como no pré-registrado, o intervalo contém 1. Só vemos quem se candidatou: nada diz sobre quem não se inscreveu. O contraste é o pacote do corte: vale para o pacote, não para os R$ 5 mil sozinhos. O efeito é forte só no ciclo 2: não dá para generalizar. E a origem é o vínculo no CNES, não a residência. Obrigado.</a:t>
             </a:r>
           </a:p>
           <a:p>
             <a:r>
               <a:rPr lang="pt-BR" dirty="0"/>
-              <a:t>DETALHE PARA PERGUNTAS: Implicações, com mais detalhe. Pós-resultado: a hipótese e a especificação com o par de UFs vieram depois dos coeficientes do modelo base; o resultado é exploratório e só vira confirmatório com um protocolo congelado aplicado a dados novos (o universo de inscritos, novos ciclos). Sem fixar a UF: a especificação pré-registrada (P1a) dá 1,25 [0,98; 1,61], IC que contém 1 (p 0,072; família de um teste, Holm = p). Condicional a se candidatar: sem a margem extensiva, nada aqui diz quantos especialistas a mais se inscreveriam com bolsa maior; escolha não é preenchimento, e o que uma vaga ganha, outra do mesmo curso perde. Pacote do corte: nos mesmos cortes mudam outras regras federais (auditoria 18); a implicação de política vale para o pacote, não para os R$ 5 mil sozinhos. Só ciclo 2: comparando vagas da mesma UF, ciclo a ciclo (adendo 52g), 1,15 [0,66; 2,01] no ciclo 1 e 1,25 [0,90; 1,73] no ciclo 3, IC que contêm 1; não generalizar para o programa. Origem = vínculo no CNES: quem trabalha longe de casa aparece com a origem do trabalho; ela só define o par de UFs que fica fixo. Perguntas prováveis da banca (doc 66, §8). P1, "Vocês formularam a hipótese depois de ver os resultados?" Sim, e está na tela do slide 1; a especificação com o par de UFs foi congelada antes de rodar (52e; auditoria 48), mas depois de ver o modelo base. P2, "Se o pré-registrado tem IC que contém 1, por que acreditar?" Porque, comparando vagas da mesma UF, o efeito é 1,47 [1,15; 1,89], p de Holm 0,005, e se mantém com o score bootstrap; mas é exploratório. P3, "Isso é a bolsa ou o pacote?" O pacote do corte: nos mesmos cortes mudam outras regras federais (auditoria 18); em 0,300 nenhum outro incentivo individual ao especialista do PMM-E muda (auditoria 35); em 0,400 fica aberta a ajuda de custo do PMMB; nos dois cortes, o serviço do município pode mudar. P4, "E a origem?" Não é a pergunta desta hipótese: a UF de origem é controle. Se insistirem: no modelo base, sem fixar a UF, o teste origem × toda a bolsa (D_UF) dá 1,94 [1,48; 2,40] em log-chance (doc 57p); não é interpretado aqui.</a:t>
-            </a:r>
-          </a:p>
-        </p:txBody>
-      </p:sp>
-    </p:spTree>
-  </p:cSld>
-  <p:clrMapOvr>
-    <a:masterClrMapping/>
-  </p:clrMapOvr>
-</p:notes>
-</file>
-
-<file path=ppt/notesSlides/notesSlide34.xml><?xml version="1.0" encoding="utf-8"?>
-<p:notes xmlns:a="http://schemas.openxmlformats.org/drawingml/2006/main" xmlns:r="http://schemas.openxmlformats.org/officeDocument/2006/relationships" xmlns:p="http://schemas.openxmlformats.org/presentationml/2006/main">
-  <p:cSld>
-    <p:spTree>
-      <p:nvGrpSpPr>
-        <p:cNvPr id="1" name=""/>
-        <p:cNvGrpSpPr/>
-        <p:nvPr/>
-      </p:nvGrpSpPr>
-      <p:grpSpPr>
-        <a:xfrm>
-          <a:off x="0" y="0"/>
-          <a:ext cx="0" cy="0"/>
-          <a:chOff x="0" y="0"/>
-          <a:chExt cx="0" cy="0"/>
-        </a:xfrm>
-      </p:grpSpPr>
-      <p:sp>
-        <p:nvSpPr>
-          <p:cNvPr id="2" name="Slide Image Placeholder 1"/>
-          <p:cNvSpPr>
-            <a:spLocks noGrp="1" noRot="1" noChangeAspect="1"/>
-          </p:cNvSpPr>
-          <p:nvPr>
-            <p:ph type="sldImg"/>
-          </p:nvPr>
-        </p:nvSpPr>
-        <p:spPr/>
-      </p:sp>
-      <p:sp>
-        <p:nvSpPr>
-          <p:cNvPr id="3" name="Notes Placeholder 2"/>
-          <p:cNvSpPr>
-            <a:spLocks noGrp="1"/>
-          </p:cNvSpPr>
-          <p:nvPr>
-            <p:ph type="body" idx="1"/>
-          </p:nvPr>
-        </p:nvSpPr>
-        <p:spPr/>
-        <p:txBody>
-          <a:bodyPr/>
-          <a:lstStyle/>
-          <a:p>
-            <a:r>
-              <a:rPr lang="pt-BR" dirty="0"/>
-              <a:t>Antiga H1, só como motivação, e só com a comparação dentro da mesma UF (decisão do autor de 28/10/2026; adendo 48h, doc 57w, auditoria 47). Pareando municípios da mesma UF e condição de capital, a fração das células com vaga imediata preenchidas na 1ª chamada difere em +16,4 [−3,8; +36,6] p.p. em 0,300, com 25 pares, e −6,0 [−23,2; +11,5] em 0,400, com 29 pares (IC de permutação); o ponto não deve ser lido como tamanho de efeito. Não detectamos aumento; isso não quer dizer que o efeito seja zero, e não mostra que a bolsa reduz o preenchimento. Médico de outra UF por vaga imediata: +0,02 [−0,01; +0,06] em 0,300 e +0,16 [+0,00; +0,35] em 0,400, inconclusivo, com poucos pares. Pacote do corte.</a:t>
-            </a:r>
-          </a:p>
-          <a:p>
-            <a:r>
-              <a:rPr lang="pt-BR" dirty="0"/>
-              <a:t>Cautela na tela: Pacote do corte; poucos pares.</a:t>
+              <a:t>DETALHE PARA PERGUNTAS: Implicações, com mais detalhe. Pós-resultado: a hipótese e a especificação com o par de UFs vieram depois dos coeficientes do modelo base; o resultado é exploratório e só vira confirmatório com um protocolo congelado aplicado a dados novos (o universo de inscritos, novos ciclos). Sem fixar a UF: a especificação pré-registrada (P1a) dá 1,25 [0,98; 1,61], IC que contém 1 (p 0,072; família de um teste, Holm = p). Condicional a se candidatar: sem a margem extensiva, nada aqui diz quantos especialistas a mais se inscreveriam com bolsa maior; e o que uma vaga ganha na escolha, outra do mesmo curso perde. Pacote do corte: nos mesmos cortes mudam outras regras federais (auditoria 18); a implicação de política vale para o pacote, não para os R$ 5 mil sozinhos. Só ciclo 2: comparando vagas da mesma UF, ciclo a ciclo (adendo 52g), 1,15 [0,66; 2,01] no ciclo 1 e 1,25 [0,90; 1,73] no ciclo 3, IC que contêm 1; não generalizar para o programa. Origem = vínculo no CNES: quem trabalha longe de casa aparece com a origem do trabalho; ela só define o par de UFs que fica fixo. Perguntas prováveis da banca (doc 66, §8). P1, "Vocês formularam a hipótese depois de ver os resultados?" Sim, e está na tela do slide 1; a especificação com o par de UFs foi congelada antes de rodar (52e; auditoria 48), mas depois de ver o modelo base. P2, "Se o pré-registrado tem IC que contém 1, por que acreditar?" Porque, comparando vagas da mesma UF, o efeito é 1,47 [1,15; 1,89], p de Holm 0,005, e se mantém com o score bootstrap; mas é exploratório. P3, "Isso é a bolsa ou o pacote?" O pacote do corte: nos mesmos cortes mudam outras regras federais (auditoria 18); em 0,300 nenhum outro incentivo individual ao especialista do PMM-E muda (auditoria 35); em 0,400 fica aberta a ajuda de custo do PMMB; nos dois cortes, o serviço do município pode mudar. P4, "E a origem?" Não é a pergunta desta hipótese: a UF de origem é controle. Se insistirem: no modelo base, sem fixar a UF, o teste origem × toda a bolsa (D_UF) dá 1,94 [1,48; 2,40] em log-chance (doc 57p); não é interpretado aqui.</a:t>
             </a:r>
           </a:p>
         </p:txBody>
@@ -15862,7 +15796,7 @@
                 </a:solidFill>
                 <a:latin typeface="Montserrat"/>
               </a:rPr>
-              <a:t>no corte, preenchimento sem aumento detectado</a:t>
+              <a:t>a bolsa sobe com o IVS</a:t>
             </a:r>
           </a:p>
         </p:txBody>
@@ -15920,7 +15854,7 @@
                 </a:solidFill>
                 <a:latin typeface="Montserrat"/>
               </a:rPr>
-              <a:t>doc 07 da banca 2 (decisão do autor de 28/10/2026); adendos 52e e 52g; doc 57x; auditoria 48; doc 57w (apêndice).</a:t>
+              <a:t>doc 07 da banca 2 (decisão do autor de 28/10/2026); adendos 52e e 52g; doc 57x; auditoria 48.</a:t>
             </a:r>
           </a:p>
         </p:txBody>
@@ -20780,8 +20714,8 @@
             <a:tbl>
               <a:tblPr firstRow="1" bandRow="1"/>
               <a:tblGrid>
-                <a:gridCol w="4956887"/>
-                <a:gridCol w="6637705"/>
+                <a:gridCol w="5235958"/>
+                <a:gridCol w="6358634"/>
               </a:tblGrid>
               <a:tr h="732826">
                 <a:tc>
@@ -21192,7 +21126,7 @@
                           </a:solidFill>
                           <a:latin typeface="Montserrat"/>
                         </a:rPr>
-                        <a:t>escolha ≠ preenchimento</a:t>
+                        <a:t>sem margem extensiva</a:t>
                       </a:r>
                     </a:p>
                   </a:txBody>
@@ -21522,7 +21456,7 @@
                           </a:solidFill>
                           <a:latin typeface="Montserrat"/>
                         </a:rPr>
-                        <a:t>não é residência</a:t>
+                        <a:t>≠ residência</a:t>
                       </a:r>
                     </a:p>
                   </a:txBody>
@@ -21611,371 +21545,6 @@
                 <a:latin typeface="Montserrat"/>
               </a:rPr>
               <a:t>doc 66 (§0, §5 e §8); doc 07 da banca 2 (§3 e §4); docs 57p, 57x e 57z; auditorias 18, 48, 50 e 52.</a:t>
-            </a:r>
-          </a:p>
-        </p:txBody>
-      </p:sp>
-    </p:spTree>
-  </p:cSld>
-  <p:clrMapOvr>
-    <a:masterClrMapping/>
-  </p:clrMapOvr>
-</p:sld>
-</file>
-
-<file path=ppt/slides/slide48.xml><?xml version="1.0" encoding="utf-8"?>
-<p:sld xmlns:a="http://schemas.openxmlformats.org/drawingml/2006/main" xmlns:r="http://schemas.openxmlformats.org/officeDocument/2006/relationships" xmlns:p="http://schemas.openxmlformats.org/presentationml/2006/main">
-  <p:cSld>
-    <p:spTree>
-      <p:nvGrpSpPr>
-        <p:cNvPr id="1" name=""/>
-        <p:cNvGrpSpPr/>
-        <p:nvPr/>
-      </p:nvGrpSpPr>
-      <p:grpSpPr>
-        <a:xfrm>
-          <a:off x="0" y="0"/>
-          <a:ext cx="0" cy="0"/>
-          <a:chOff x="0" y="0"/>
-          <a:chExt cx="0" cy="0"/>
-        </a:xfrm>
-      </p:grpSpPr>
-      <p:sp>
-        <p:nvSpPr>
-          <p:cNvPr id="2" name="Título"/>
-          <p:cNvSpPr>
-            <a:spLocks noGrp="1"/>
-          </p:cNvSpPr>
-          <p:nvPr>
-            <p:ph type="title"/>
-          </p:nvPr>
-        </p:nvSpPr>
-        <p:spPr/>
-        <p:txBody>
-          <a:bodyPr>
-            <a:normAutofit/>
-          </a:bodyPr>
-          <a:lstStyle/>
-          <a:p>
-            <a:pPr marL="0" indent="0" algn="l">
-              <a:lnSpc>
-                <a:spcPct val="104000"/>
-              </a:lnSpc>
-              <a:spcAft>
-                <a:spcPts val="0"/>
-              </a:spcAft>
-              <a:buNone/>
-            </a:pPr>
-            <a:r>
-              <a:rPr lang="pt-BR" sz="2400" b="1" dirty="0">
-                <a:solidFill>
-                  <a:srgbClr val="FFFFFF"/>
-                </a:solidFill>
-                <a:latin typeface="Montserrat"/>
-              </a:rPr>
-              <a:t>Apêndice · O fato: pareando municípios da mesma UF</a:t>
-            </a:r>
-          </a:p>
-        </p:txBody>
-      </p:sp>
-      <p:sp>
-        <p:nvSpPr>
-          <p:cNvPr id="3" name="Número da página"/>
-          <p:cNvSpPr>
-            <a:spLocks noGrp="1"/>
-          </p:cNvSpPr>
-          <p:nvPr>
-            <p:ph type="body" sz="quarter" idx="18"/>
-          </p:nvPr>
-        </p:nvSpPr>
-        <p:spPr>
-          <a:xfrm>
-            <a:off x="11706744" y="6457042"/>
-            <a:ext cx="492080" cy="400640"/>
-          </a:xfrm>
-        </p:spPr>
-        <p:txBody>
-          <a:bodyPr anchor="ctr">
-            <a:normAutofit/>
-          </a:bodyPr>
-          <a:lstStyle/>
-          <a:p>
-            <a:pPr algn="ctr"/>
-            <a:fld id="{B1A5E0C2-5F3A-4C7E-9D11-7A2E6C0F4B01}" type="slidenum">
-              <a:rPr lang="pt-BR" sz="1400" b="1">
-                <a:solidFill>
-                  <a:srgbClr val="BFBFBF"/>
-                </a:solidFill>
-                <a:latin typeface="Montserrat"/>
-              </a:rPr>
-              <a:t>‹#›</a:t>
-            </a:fld>
-            <a:endParaRPr lang="pt-BR" sz="1400" b="1">
-              <a:solidFill>
-                <a:srgbClr val="BFBFBF"/>
-              </a:solidFill>
-            </a:endParaRPr>
-          </a:p>
-        </p:txBody>
-      </p:sp>
-      <p:sp>
-        <p:nvSpPr>
-          <p:cNvPr id="4" name="Navegação do rodapé"/>
-          <p:cNvSpPr txBox="1"/>
-          <p:nvPr/>
-        </p:nvSpPr>
-        <p:spPr>
-          <a:xfrm>
-            <a:off x="196860" y="6639248"/>
-            <a:ext cx="9223026" cy="246221"/>
-          </a:xfrm>
-          <a:prstGeom prst="rect">
-            <a:avLst/>
-          </a:prstGeom>
-          <a:noFill/>
-        </p:spPr>
-        <p:txBody>
-          <a:bodyPr wrap="square" rtlCol="0">
-            <a:spAutoFit/>
-          </a:bodyPr>
-          <a:lstStyle/>
-          <a:p>
-            <a:r>
-              <a:rPr lang="pt-BR" sz="1000" dirty="0">
-                <a:latin typeface="Montserrat"/>
-              </a:rPr>
-              <a:t xml:space="preserve">Hipótese  |  </a:t>
-            </a:r>
-            <a:r>
-              <a:rPr lang="pt-BR" sz="1000" dirty="0">
-                <a:latin typeface="Montserrat"/>
-              </a:rPr>
-              <a:t xml:space="preserve">Dados  |  </a:t>
-            </a:r>
-            <a:r>
-              <a:rPr lang="pt-BR" sz="1000" dirty="0">
-                <a:latin typeface="Montserrat"/>
-              </a:rPr>
-              <a:t xml:space="preserve">Análise descritiva  |  </a:t>
-            </a:r>
-            <a:r>
-              <a:rPr lang="pt-BR" sz="1000" dirty="0">
-                <a:latin typeface="Montserrat"/>
-              </a:rPr>
-              <a:t xml:space="preserve">Metodologia  |  </a:t>
-            </a:r>
-            <a:r>
-              <a:rPr lang="pt-BR" sz="1000" dirty="0">
-                <a:latin typeface="Montserrat"/>
-              </a:rPr>
-              <a:t xml:space="preserve">Identificação  |  </a:t>
-            </a:r>
-            <a:r>
-              <a:rPr lang="pt-BR" sz="1000" dirty="0">
-                <a:latin typeface="Montserrat"/>
-              </a:rPr>
-              <a:t xml:space="preserve">Resultados  |  </a:t>
-            </a:r>
-            <a:r>
-              <a:rPr lang="pt-BR" sz="1000" dirty="0">
-                <a:latin typeface="Montserrat"/>
-              </a:rPr>
-              <a:t xml:space="preserve">Robustez  |  </a:t>
-            </a:r>
-            <a:r>
-              <a:rPr lang="pt-BR" sz="1000" dirty="0">
-                <a:latin typeface="Montserrat"/>
-              </a:rPr>
-              <a:t xml:space="preserve">Discussão</a:t>
-            </a:r>
-          </a:p>
-        </p:txBody>
-      </p:sp>
-      <p:sp>
-        <p:nvSpPr>
-          <p:cNvPr id="101" name="Linha"/>
-          <p:cNvSpPr/>
-          <p:nvPr/>
-        </p:nvSpPr>
-        <p:spPr>
-          <a:xfrm>
-            <a:off x="292608" y="5212080"/>
-            <a:ext cx="11594592" cy="420624"/>
-          </a:xfrm>
-          <a:prstGeom prst="rect">
-            <a:avLst/>
-          </a:prstGeom>
-          <a:noFill/>
-          <a:ln>
-            <a:noFill/>
-          </a:ln>
-        </p:spPr>
-        <p:txBody>
-          <a:bodyPr wrap="square" lIns="164592" tIns="18288" rIns="164592" bIns="18288" rtlCol="0" anchor="ctr">
-            <a:noAutofit/>
-          </a:bodyPr>
-          <a:lstStyle/>
-          <a:p>
-            <a:pPr marL="0" indent="0" algn="l">
-              <a:lnSpc>
-                <a:spcPct val="100000"/>
-              </a:lnSpc>
-              <a:spcBef>
-                <a:spcPts val="0"/>
-              </a:spcBef>
-              <a:spcAft>
-                <a:spcPts val="0"/>
-              </a:spcAft>
-              <a:buNone/>
-            </a:pPr>
-            <a:r>
-              <a:rPr lang="pt-BR" sz="1800" b="0" dirty="0">
-                <a:solidFill>
-                  <a:srgbClr val="3A3A3A"/>
-                </a:solidFill>
-                <a:latin typeface="Montserrat"/>
-              </a:rPr>
-              <a:t>Sem aumento detectado do preenchimento nos dois cortes.</a:t>
-            </a:r>
-          </a:p>
-        </p:txBody>
-      </p:sp>
-      <p:sp>
-        <p:nvSpPr>
-          <p:cNvPr id="102" name="Cautela"/>
-          <p:cNvSpPr/>
-          <p:nvPr/>
-        </p:nvSpPr>
-        <p:spPr>
-          <a:xfrm>
-            <a:off x="292608" y="5687568"/>
-            <a:ext cx="11594592" cy="420624"/>
-          </a:xfrm>
-          <a:prstGeom prst="roundRect">
-            <a:avLst>
-              <a:gd name="adj" fmla="val 12000"/>
-            </a:avLst>
-          </a:prstGeom>
-          <a:solidFill>
-            <a:srgbClr val="E7F1EA"/>
-          </a:solidFill>
-          <a:ln>
-            <a:noFill/>
-          </a:ln>
-        </p:spPr>
-        <p:txBody>
-          <a:bodyPr wrap="square" lIns="164592" tIns="18288" rIns="164592" bIns="18288" rtlCol="0" anchor="ctr">
-            <a:noAutofit/>
-          </a:bodyPr>
-          <a:lstStyle/>
-          <a:p>
-            <a:pPr marL="0" indent="0" algn="l">
-              <a:lnSpc>
-                <a:spcPct val="100000"/>
-              </a:lnSpc>
-              <a:spcBef>
-                <a:spcPts val="0"/>
-              </a:spcBef>
-              <a:spcAft>
-                <a:spcPts val="0"/>
-              </a:spcAft>
-              <a:buNone/>
-            </a:pPr>
-            <a:r>
-              <a:rPr lang="pt-BR" sz="1800" b="1" dirty="0">
-                <a:solidFill>
-                  <a:srgbClr val="114719"/>
-                </a:solidFill>
-                <a:latin typeface="Montserrat"/>
-              </a:rPr>
-              <a:t>Pacote do corte; poucos pares.</a:t>
-            </a:r>
-          </a:p>
-        </p:txBody>
-      </p:sp>
-      <p:pic>
-        <p:nvPicPr>
-          <p:cNvPr id="103" name="Figura" descr="O fato, por corte: diferença no preenchimento das vagas imediatas entre municípios pareados na mesma UF e condição de capital, com IC 95% de permutação"/>
-          <p:cNvPicPr>
-            <a:picLocks noChangeAspect="1"/>
-          </p:cNvPicPr>
-          <p:nvPr/>
-        </p:nvPicPr>
-        <p:blipFill>
-          <a:blip r:embed="rId3"/>
-          <a:stretch>
-            <a:fillRect/>
-          </a:stretch>
-        </p:blipFill>
-        <p:spPr>
-          <a:xfrm>
-            <a:off x="292608" y="1577526"/>
-            <a:ext cx="11594592" cy="2733684"/>
-          </a:xfrm>
-          <a:prstGeom prst="rect">
-            <a:avLst/>
-          </a:prstGeom>
-          <a:ln w="6350">
-            <a:solidFill>
-              <a:srgbClr val="DDE7DF"/>
-            </a:solidFill>
-          </a:ln>
-        </p:spPr>
-      </p:pic>
-      <p:sp>
-        <p:nvSpPr>
-          <p:cNvPr id="104" name="Fontes"/>
-          <p:cNvSpPr txBox="1"/>
-          <p:nvPr/>
-        </p:nvSpPr>
-        <p:spPr>
-          <a:xfrm>
-            <a:off x="292608" y="6181344"/>
-            <a:ext cx="11594592" cy="274320"/>
-          </a:xfrm>
-          <a:prstGeom prst="rect">
-            <a:avLst/>
-          </a:prstGeom>
-          <a:noFill/>
-          <a:ln>
-            <a:noFill/>
-          </a:ln>
-        </p:spPr>
-        <p:txBody>
-          <a:bodyPr wrap="square" lIns="0" tIns="0" rIns="0" bIns="0" rtlCol="0" anchor="b">
-            <a:noAutofit/>
-          </a:bodyPr>
-          <a:lstStyle/>
-          <a:p>
-            <a:pPr marL="0" indent="0" algn="l">
-              <a:lnSpc>
-                <a:spcPct val="95000"/>
-              </a:lnSpc>
-              <a:spcBef>
-                <a:spcPts val="0"/>
-              </a:spcBef>
-              <a:spcAft>
-                <a:spcPts val="0"/>
-              </a:spcAft>
-              <a:buNone/>
-            </a:pPr>
-            <a:r>
-              <a:rPr lang="pt-BR" sz="800" b="1" dirty="0">
-                <a:solidFill>
-                  <a:srgbClr val="6B6B6B"/>
-                </a:solidFill>
-                <a:latin typeface="Montserrat"/>
-              </a:rPr>
-              <a:t>Fontes: </a:t>
-            </a:r>
-            <a:r>
-              <a:rPr lang="pt-BR" sz="800" b="0" dirty="0">
-                <a:solidFill>
-                  <a:srgbClr val="6B6B6B"/>
-                </a:solidFill>
-                <a:latin typeface="Montserrat"/>
-              </a:rPr>
-              <a:t>output/rdd_bolsa/PL_estimativas.csv (adendo 48h; doc 57w; auditoria 47); output/apresentacao_banca2/curto_fato_pareado.png.</a:t>
             </a:r>
           </a:p>
         </p:txBody>

--- a/output/apresentacao_banca2/deck_banca2_curto.pptx
+++ b/output/apresentacao_banca2/deck_banca2_curto.pptx
@@ -8871,13 +8871,19 @@
           <a:p>
             <a:r>
               <a:rPr lang="pt-BR" dirty="0"/>
-              <a:t>FALA (0:45): A 1ª opção de cada candidato vem dos editais do Ministério da Saúde, ciclos 1 a 3; a origem vem do CNES: o município onde ele tinha vínculo médico antes da inscrição; bolsa e vagas, dos quadros de vagas; o IVS, do Ipea; distância e UF, do IBGE. A unidade de observação é o par candidato × vaga: cada candidato aparece uma vez para cada vaga aberta do seu curso e ciclo, e a variável dependente vale 1 na sua 1ª opção. O funil, à direita, mostra quem sai em cada etapa: dos 5.714 candidatos com 1ª opção, 5.421 entram no modelo.</a:t>
+              <a:t>FALA (0:45): A 1ª opção de cada candidato vem dos editais do Ministério da Saúde, ciclos 1 a 3; a origem vem do CNES: o município onde ele tinha vínculo médico antes da inscrição; bolsa e vagas, dos quadros de vagas; o IVS, do Ipea; distância e UF, do IBGE. A unidade de observação é o par candidato × vaga: cada candidato aparece uma vez para cada vaga aberta do seu curso e ciclo, e a variável dependente vale 1 na sua 1ª opção. Atenção: é a vaga que ele marcou na inscrição; não medimos se ele foi alocado nem se entrou no município. O funil, à direita, mostra quem sai em cada etapa: dos 5.714 candidatos com 1ª opção, 5.421 entram no modelo.</a:t>
             </a:r>
           </a:p>
           <a:p>
             <a:r>
               <a:rPr lang="pt-BR" dirty="0"/>
               <a:t>DETALHE PARA PERGUNTAS: 1ª opção: listas de classificação dos editais do PMM-E (SGTES/MS), ciclos 1–3, uma linha por candidato e opção. Cada ciclo é um chamamento com quadro de vagas próprio: o ciclo 1 com quadro de 24/07/2025; o ciclo 2 com quadro de 03/02/2026, retificado em 13/02/2026 (o vigente na inscrição, de onde vem o tipo de vaga usado aqui; auditoria 36) e de novo em 19/03/2026; o ciclo 3 com quadro de 16/07/2026. Origem: o município do estabelecimento onde o candidato tinha vínculo médico no CNES antes das inscrições, ligado pelo portão G1 (CPF e nome); não é a residência. Vagas e bolsa: quadros de vagas da 1ª chamada, por célula (estabelecimento × curso), com a faixa da bolsa anunciada (adendo 52c, auditoria 41). IVS 2010 oficial: Plataforma IVS do Ipea; é a variável dos cortes. Distância entre os centroides dos municípios (malha do IBGE); UF e região de saúde (tabela oficial do TabNet). Secundárias, em cinza: porte e capital, controles do modelo. Funil (P1_resumo.json, sem recálculo): 5.714 candidatos com 1ª opção numa vaga do quadro; 5.513 ligados ao CNES; 5.425 com município de origem (vínculo médico na competência anterior à inscrição); 5.421 no modelo, depois de tirar quem tem a origem ou a 1ª opção num município sem região de saúde na tabela oficial. Unidade do modelo: 932.577 pares candidato × vaga, em 56 conjuntos de escolha (curso × ciclo), com 5.125 vagas (estabelecimento × curso). A taxa de ligação é parecida entre alocados e não alocados (G1). Dados pessoais só em memória ou em cache fora do Git.</a:t>
+            </a:r>
+          </a:p>
+          <a:p>
+            <a:r>
+              <a:rPr lang="pt-BR" dirty="0"/>
+              <a:t>Cautela na tela: y = opção marcada, não ida ao município.</a:t>
             </a:r>
           </a:p>
         </p:txBody>
@@ -9403,7 +9409,7 @@
           <a:p>
             <a:r>
               <a:rPr lang="pt-BR" dirty="0"/>
-              <a:t>FALA (0:35): Voltando à pergunta: a bolsa maior aumenta a chance de a vaga ser a 1ª opção, comparando vagas da mesma UF? Sim: 1,47 vez a chance nos três ciclos juntos, e forte só no ciclo 2. Pela teoria da banca 1, o médico aceita a vaga se a bolsa compensa o custo do lugar; os dados sugerem que R$ 5 mil compensam parte desse custo, cerca de 75 km a menos. Isso vale para a escolha de quem se candidatou.</a:t>
+              <a:t>FALA (0:35): Voltando à pergunta: a bolsa maior aumenta a chance de a vaga ser a 1ª opção, comparando vagas da mesma UF? Sim: 1,47 vez a chance nos três ciclos juntos, e forte só no ciclo 2. Pela teoria da banca 1, o médico aceita a vaga se a bolsa compensa o custo do lugar; os dados sugerem que R$ 5 mil compensam parte desse custo, cerca de 75 km a menos. Isso vale para a vaga que quem se candidatou marcou como 1ª opção, não para a entrada no município.</a:t>
             </a:r>
           </a:p>
           <a:p>
@@ -9468,13 +9474,13 @@
           <a:p>
             <a:r>
               <a:rPr lang="pt-BR" dirty="0"/>
-              <a:t>FALA (0:45): Seis limitações e o que cada uma implica. A especificação é pós-resultado: o resultado é exploratório e pede dados novos. Sem fixar a UF, como no pré-registrado, o intervalo contém 1. Só vemos quem se candidatou: nada diz sobre quem não se inscreveu. O contraste é o pacote do corte: vale para o pacote, não para os R$ 5 mil sozinhos. O efeito é forte só no ciclo 2: não dá para generalizar. E a origem é o vínculo no CNES, não a residência. Obrigado.</a:t>
+              <a:t>FALA (0:45): Seis limitações e o que cada uma implica. A especificação é pós-resultado: o resultado é exploratório e pede dados novos. Sem fixar a UF, como no pré-registrado, o intervalo contém 1. Só vemos a inscrição: quem se candidatou e o que marcou, não quem entrou no município. O contraste é o pacote do corte: vale para o pacote, não para os R$ 5 mil sozinhos. O efeito é forte só no ciclo 2: não dá para generalizar. E a origem é o vínculo no CNES, não a residência. Obrigado.</a:t>
             </a:r>
           </a:p>
           <a:p>
             <a:r>
               <a:rPr lang="pt-BR" dirty="0"/>
-              <a:t>DETALHE PARA PERGUNTAS: Implicações, com mais detalhe. Pós-resultado: a hipótese e a especificação com o par de UFs vieram depois dos coeficientes do modelo base; o resultado é exploratório e só vira confirmatório com um protocolo congelado aplicado a dados novos (o universo de inscritos, novos ciclos). Sem fixar a UF: a especificação pré-registrada (P1a) dá 1,25 [0,98; 1,61], IC que contém 1 (p 0,072; família de um teste, Holm = p). Condicional a se candidatar: sem a margem extensiva, nada aqui diz quantos especialistas a mais se inscreveriam com bolsa maior; e o que uma vaga ganha na escolha, outra do mesmo curso perde. Pacote do corte: nos mesmos cortes mudam outras regras federais (auditoria 18); a implicação de política vale para o pacote, não para os R$ 5 mil sozinhos. Só ciclo 2: comparando vagas da mesma UF, ciclo a ciclo (adendo 52g), 1,15 [0,66; 2,01] no ciclo 1 e 1,25 [0,90; 1,73] no ciclo 3, IC que contêm 1; não generalizar para o programa. Origem = vínculo no CNES: quem trabalha longe de casa aparece com a origem do trabalho; ela só define o par de UFs que fica fixo. Perguntas prováveis da banca (doc 66, §8). P1, "Vocês formularam a hipótese depois de ver os resultados?" Sim, e está na tela do slide 1; a especificação com o par de UFs foi congelada antes de rodar (52e; auditoria 48), mas depois de ver o modelo base. P2, "Se o pré-registrado tem IC que contém 1, por que acreditar?" Porque, comparando vagas da mesma UF, o efeito é 1,47 [1,15; 1,89], p de Holm 0,005, e se mantém com o score bootstrap; mas é exploratório. P3, "Isso é a bolsa ou o pacote?" O pacote do corte: nos mesmos cortes mudam outras regras federais (auditoria 18); em 0,300 nenhum outro incentivo individual ao especialista do PMM-E muda (auditoria 35); em 0,400 fica aberta a ajuda de custo do PMMB; nos dois cortes, o serviço do município pode mudar. P4, "E a origem?" Não é a pergunta desta hipótese: a UF de origem é controle. Se insistirem: no modelo base, sem fixar a UF, o teste origem × toda a bolsa (D_UF) dá 1,94 [1,48; 2,40] em log-chance (doc 57p); não é interpretado aqui.</a:t>
+              <a:t>DETALHE PARA PERGUNTAS: Implicações, com mais detalhe. Pós-resultado: a hipótese e a especificação com o par de UFs vieram depois dos coeficientes do modelo base; o resultado é exploratório e só vira confirmatório com um protocolo congelado aplicado a dados novos (o universo de inscritos, novos ciclos). Sem fixar a UF: a especificação pré-registrada (P1a) dá 1,25 [0,98; 1,61], IC que contém 1 (p 0,072; família de um teste, Holm = p). Condicional a se candidatar: sem a margem extensiva, nada aqui diz quantos especialistas a mais se inscreveriam com bolsa maior; e o que uma vaga ganha na escolha, outra do mesmo curso perde. Pacote do corte: nos mesmos cortes mudam outras regras federais (auditoria 18); a implicação de política vale para o pacote, não para os R$ 5 mil sozinhos. Só inscrição: a 1ª opção é a vaga marcada na inscrição; não medimos alocação, posse nem trabalho no município. Só ciclo 2: comparando vagas da mesma UF, ciclo a ciclo (adendo 52g), 1,15 [0,66; 2,01] no ciclo 1 e 1,25 [0,90; 1,73] no ciclo 3, IC que contêm 1; não generalizar para o programa. Origem = vínculo no CNES: quem trabalha longe de casa aparece com a origem do trabalho; ela só define o par de UFs que fica fixo. Perguntas prováveis da banca (doc 66, §8). P1, "Vocês formularam a hipótese depois de ver os resultados?" Sim, e está na tela do slide 1; a especificação com o par de UFs foi congelada antes de rodar (52e; auditoria 48), mas depois de ver o modelo base. P2, "Se o pré-registrado tem IC que contém 1, por que acreditar?" Porque, comparando vagas da mesma UF, o efeito é 1,47 [1,15; 1,89], p de Holm 0,005, e se mantém com o score bootstrap; mas é exploratório. P3, "Isso é a bolsa ou o pacote?" O pacote do corte: nos mesmos cortes mudam outras regras federais (auditoria 18); em 0,300 nenhum outro incentivo individual ao especialista do PMM-E muda (auditoria 35); em 0,400 fica aberta a ajuda de custo do PMMB; nos dois cortes, o serviço do município pode mudar. P4, "E a origem?" Não é a pergunta desta hipótese: a UF de origem é controle. Se insistirem: no modelo base, sem fixar a UF, o teste origem × toda a bolsa (D_UF) dá 1,94 [1,48; 2,40] em log-chance (doc 57p); não é interpretado aqui.</a:t>
             </a:r>
           </a:p>
         </p:txBody>
@@ -16052,6 +16058,64 @@
         </p:nvSpPr>
         <p:spPr>
           <a:xfrm>
+            <a:off x="292608" y="4736592"/>
+            <a:ext cx="11594592" cy="420624"/>
+          </a:xfrm>
+          <a:prstGeom prst="rect">
+            <a:avLst/>
+          </a:prstGeom>
+          <a:noFill/>
+          <a:ln>
+            <a:noFill/>
+          </a:ln>
+        </p:spPr>
+        <p:txBody>
+          <a:bodyPr wrap="square" lIns="164592" tIns="18288" rIns="164592" bIns="18288" rtlCol="0" anchor="ctr">
+            <a:noAutofit/>
+          </a:bodyPr>
+          <a:lstStyle/>
+          <a:p>
+            <a:pPr marL="0" indent="0" algn="l">
+              <a:lnSpc>
+                <a:spcPct val="100000"/>
+              </a:lnSpc>
+              <a:spcBef>
+                <a:spcPts val="0"/>
+              </a:spcBef>
+              <a:spcAft>
+                <a:spcPts val="0"/>
+              </a:spcAft>
+              <a:buNone/>
+            </a:pPr>
+            <a:r>
+              <a:rPr lang="pt-BR" sz="1800" b="1" dirty="0">
+                <a:solidFill>
+                  <a:srgbClr val="114719"/>
+                </a:solidFill>
+                <a:latin typeface="Montserrat"/>
+              </a:rPr>
+              <a:t>Unidade:</a:t>
+            </a:r>
+            <a:r>
+              <a:rPr lang="pt-BR" sz="1800" b="0" dirty="0">
+                <a:solidFill>
+                  <a:srgbClr val="3A3A3A"/>
+                </a:solidFill>
+                <a:latin typeface="Montserrat"/>
+              </a:rPr>
+              <a:t> candidato × vaga do seu curso e ciclo; y = 1 na 1ª opção.</a:t>
+            </a:r>
+          </a:p>
+        </p:txBody>
+      </p:sp>
+      <p:sp>
+        <p:nvSpPr>
+          <p:cNvPr id="102" name="Linha"/>
+          <p:cNvSpPr/>
+          <p:nvPr/>
+        </p:nvSpPr>
+        <p:spPr>
+          <a:xfrm>
             <a:off x="292608" y="5212080"/>
             <a:ext cx="11594592" cy="420624"/>
           </a:xfrm>
@@ -16088,7 +16152,7 @@
                 </a:solidFill>
                 <a:latin typeface="Montserrat"/>
               </a:rPr>
-              <a:t>Unidade:</a:t>
+              <a:t>No modelo:</a:t>
             </a:r>
             <a:r>
               <a:rPr lang="pt-BR" sz="1800" b="0" dirty="0">
@@ -16097,14 +16161,14 @@
                 </a:solidFill>
                 <a:latin typeface="Montserrat"/>
               </a:rPr>
-              <a:t> candidato × vaga do seu curso e ciclo; y = 1 na 1ª opção.</a:t>
+              <a:t> 5.421 candidatos e 932.577 pares candidato × vaga.</a:t>
             </a:r>
           </a:p>
         </p:txBody>
       </p:sp>
       <p:sp>
         <p:nvSpPr>
-          <p:cNvPr id="102" name="Linha"/>
+          <p:cNvPr id="103" name="Cautela"/>
           <p:cNvSpPr/>
           <p:nvPr/>
         </p:nvSpPr>
@@ -16113,10 +16177,14 @@
             <a:off x="292608" y="5687568"/>
             <a:ext cx="11594592" cy="420624"/>
           </a:xfrm>
-          <a:prstGeom prst="rect">
-            <a:avLst/>
+          <a:prstGeom prst="roundRect">
+            <a:avLst>
+              <a:gd name="adj" fmla="val 12000"/>
+            </a:avLst>
           </a:prstGeom>
-          <a:noFill/>
+          <a:solidFill>
+            <a:srgbClr val="E7F1EA"/>
+          </a:solidFill>
           <a:ln>
             <a:noFill/>
           </a:ln>
@@ -16146,23 +16214,14 @@
                 </a:solidFill>
                 <a:latin typeface="Montserrat"/>
               </a:rPr>
-              <a:t>No modelo:</a:t>
-            </a:r>
-            <a:r>
-              <a:rPr lang="pt-BR" sz="1800" b="0" dirty="0">
-                <a:solidFill>
-                  <a:srgbClr val="3A3A3A"/>
-                </a:solidFill>
-                <a:latin typeface="Montserrat"/>
-              </a:rPr>
-              <a:t> 5.421 candidatos e 932.577 pares candidato × vaga.</a:t>
+              <a:t>y = opção marcada, não ida ao município.</a:t>
             </a:r>
           </a:p>
         </p:txBody>
       </p:sp>
       <p:pic>
         <p:nvPicPr>
-          <p:cNvPr id="103" name="Figura" descr="Variáveis e fontes, à esquerda; à direita, o funil da amostra da escolha por ciclo, de quem tem 1ª opção no quadro até quem entra no modelo, com quem sai em cada etapa"/>
+          <p:cNvPr id="104" name="Figura" descr="Variáveis e fontes, à esquerda; à direita, o funil da amostra da escolha por ciclo, de quem tem 1ª opção no quadro até quem entra no modelo, com quem sai em cada etapa"/>
           <p:cNvPicPr>
             <a:picLocks noChangeAspect="1"/>
           </p:cNvPicPr>
@@ -16176,8 +16235,8 @@
         </p:blipFill>
         <p:spPr>
           <a:xfrm>
-            <a:off x="826252" y="804672"/>
-            <a:ext cx="10527304" cy="4279392"/>
+            <a:off x="1411102" y="804672"/>
+            <a:ext cx="9357604" cy="3803904"/>
           </a:xfrm>
           <a:prstGeom prst="rect">
             <a:avLst/>
@@ -16191,7 +16250,7 @@
       </p:pic>
       <p:sp>
         <p:nvSpPr>
-          <p:cNvPr id="104" name="Fontes"/>
+          <p:cNvPr id="105" name="Fontes"/>
           <p:cNvSpPr txBox="1"/>
           <p:nvPr/>
         </p:nvSpPr>
@@ -20714,8 +20773,8 @@
             <a:tbl>
               <a:tblPr firstRow="1" bandRow="1"/>
               <a:tblGrid>
-                <a:gridCol w="5235958"/>
-                <a:gridCol w="6358634"/>
+                <a:gridCol w="5405414"/>
+                <a:gridCol w="6189178"/>
               </a:tblGrid>
               <a:tr h="732826">
                 <a:tc>
@@ -21072,7 +21131,7 @@
                           </a:solidFill>
                           <a:latin typeface="Montserrat"/>
                         </a:rPr>
-                        <a:t>Só candidatos</a:t>
+                        <a:t>Só inscrição</a:t>
                       </a:r>
                     </a:p>
                   </a:txBody>
@@ -21126,7 +21185,7 @@
                           </a:solidFill>
                           <a:latin typeface="Montserrat"/>
                         </a:rPr>
-                        <a:t>sem margem extensiva</a:t>
+                        <a:t>≠ ida ao município</a:t>
                       </a:r>
                     </a:p>
                   </a:txBody>

--- a/output/apresentacao_banca2/deck_banca2_curto.pptx
+++ b/output/apresentacao_banca2/deck_banca2_curto.pptx
@@ -9344,13 +9344,13 @@
           <a:p>
             <a:r>
               <a:rPr lang="pt-BR" dirty="0"/>
-              <a:t>FALA (0:40): A robustez fica sempre dentro da mesma UF. À esquerda, o peso da bolsa se mantém com a distância em log e com a região de saúde de origem no lugar da UF de origem. Com poucos grupos, o p do score bootstrap continua 0,011. Só com vagas perto do corte, o intervalo contém 1: inconclusivo. À direita, ciclo a ciclo: o efeito é forte só no ciclo 2; nos ciclos 1 e 3, o intervalo contém 1. Por que o ciclo 2? Não sabemos.</a:t>
+              <a:t>FALA (0:40): A robustez fica sempre dentro da mesma UF. À esquerda, o peso da bolsa se mantém com a distância em log e com a região de saúde de origem no lugar da UF de origem. Com poucos grupos, o p do score bootstrap continua 0,011. Só com vagas perto do corte, comparando na mesma UF ou na mesma UF e região, o intervalo contém 1: inconclusivo. À direita, ciclo a ciclo: o efeito é forte só no ciclo 2; nos ciclos 1 e 3, o intervalo contém 1. Por que o ciclo 2? Não sabemos.</a:t>
             </a:r>
           </a:p>
           <a:p>
             <a:r>
               <a:rPr lang="pt-BR" dirty="0"/>
-              <a:t>DETALHE PARA PERGUNTAS: Todas as variantes comparam vagas da mesma UF. Ciclos 1–3 (adendo 52e; doc 57x; auditoria 48): VL-1, 1,47 [1,15; 1,89]; com a distância em log, 1,45 [1,15; 1,83] (ciclo 2: 1,75 [1,23; 2,49]); com o efeito fixo de região de saúde de origem × UF da vaga (VL-3), 1,49 [1,15; 1,92] (ciclo 2: 1,91 [1,33; 2,74]); só com vagas a até 0,050 de um corte (VL-2), 1,28 [0,95; 1,72], p de Holm 0,103: inconclusivo, a comparação local tem pouca informação. Inferência com poucos clusters (conjuntos de escolha): p do score bootstrap de Rademacher 0,011 nos ciclos 1–3 e 0,004 no ciclo 2, sem ajuste (doc 57x). Por ciclo, com o par de UFs fixado (adendo 52g; doc 57z; pós-resultado; auditoria pendente): ciclo 1, 1,15 [0,66; 2,01], com 16 conjuntos de escolha; ciclo 2, 1,90 [1,30; 2,78]; ciclo 3, 1,25 [0,90; 1,73], com 23 conjuntos. A leitura fixada no adendo antes de rodar: forte só no ciclo 2, como na especificação base. Os km dos ciclos 1 e 3 têm IC que contém zero e não são usados. Por que o ciclo 2, não sabemos (leituras candidatas, sem teste: informação sobre a grade, vagas por curso, parte de vagas imediatas; doc 57a). Tudo pós-resultado e condicional a se candidatar; pacote do corte.</a:t>
+              <a:t>DETALHE PARA PERGUNTAS: Todas as variantes comparam vagas da mesma UF. Ciclos 1–3 (adendo 52e; doc 57x; auditoria 48): VL-1, 1,47 [1,15; 1,89]; com a distância em log, 1,45 [1,15; 1,83] (ciclo 2: 1,75 [1,23; 2,49]); com o efeito fixo de região de saúde de origem × UF da vaga (VL-3), 1,49 [1,15; 1,92] (ciclo 2: 1,91 [1,33; 2,74]); só com vagas a até 0,050 de um corte (VL-2), 1,28 [0,95; 1,72], p de Holm 0,103: inconclusivo, a comparação local tem pouca informação. Perto do corte com a região de saúde de origem × UF da vaga (VL-3 sobre o VL-2): 1,28 [0,95; 1,71], também inconclusivo. No ciclo 2, perto do corte: 1,47 [1,01; 2,14] com o par de UFs e 1,49 [1,04; 2,13] com a região, IC que exclui 1. Inferência com poucos clusters (conjuntos de escolha): p do score bootstrap de Rademacher 0,011 nos ciclos 1–3 e 0,004 no ciclo 2, sem ajuste (doc 57x). Por ciclo, com o par de UFs fixado (adendo 52g; doc 57z; pós-resultado; auditoria pendente): ciclo 1, 1,15 [0,66; 2,01], com 16 conjuntos de escolha; ciclo 2, 1,90 [1,30; 2,78]; ciclo 3, 1,25 [0,90; 1,73], com 23 conjuntos. A leitura fixada no adendo antes de rodar: forte só no ciclo 2, como na especificação base. Os km dos ciclos 1 e 3 têm IC que contém zero e não são usados. Por que o ciclo 2, não sabemos (leituras candidatas, sem teste: informação sobre a grade, vagas por curso, parte de vagas imediatas; doc 57a). Tudo pós-resultado e condicional a se candidatar; pacote do corte.</a:t>
             </a:r>
           </a:p>
         </p:txBody>
@@ -19933,8 +19933,8 @@
         </p:blipFill>
         <p:spPr>
           <a:xfrm>
-            <a:off x="292608" y="821324"/>
-            <a:ext cx="11594592" cy="3770599"/>
+            <a:off x="891235" y="804672"/>
+            <a:ext cx="10397338" cy="3803904"/>
           </a:xfrm>
           <a:prstGeom prst="rect">
             <a:avLst/>

--- a/output/apresentacao_banca2/deck_banca2_curto.pptx
+++ b/output/apresentacao_banca2/deck_banca2_curto.pptx
@@ -9344,13 +9344,13 @@
           <a:p>
             <a:r>
               <a:rPr lang="pt-BR" dirty="0"/>
-              <a:t>FALA (0:40): A robustez fica sempre dentro da mesma UF. À esquerda, o peso da bolsa se mantém com a distância em log e com a região de saúde de origem no lugar da UF de origem. Com poucos grupos, o p do score bootstrap continua 0,011. Só com vagas perto do corte, comparando na mesma UF ou na mesma UF e região, o intervalo contém 1: inconclusivo. À direita, ciclo a ciclo: o efeito é forte só no ciclo 2; nos ciclos 1 e 3, o intervalo contém 1. Por que o ciclo 2? Não sabemos.</a:t>
+              <a:t>FALA (0:40): A robustez fica sempre dentro da mesma UF. À esquerda, o peso da bolsa se mantém com a distância em log e com a região de saúde de origem no lugar da UF de origem. Com poucos grupos, o p do score bootstrap continua 0,011. Separando os dois degraus, 0,300 e 0,400, o efeito aparece nos dois e não difere entre eles. Só com vagas perto do corte, comparando na mesma UF ou na mesma UF e região, o intervalo contém 1: inconclusivo. À direita, ciclo a ciclo: o efeito é forte só no ciclo 2; nos ciclos 1 e 3, o intervalo contém 1. Por que o ciclo 2? Não sabemos.</a:t>
             </a:r>
           </a:p>
           <a:p>
             <a:r>
               <a:rPr lang="pt-BR" dirty="0"/>
-              <a:t>DETALHE PARA PERGUNTAS: Todas as variantes comparam vagas da mesma UF. Ciclos 1–3 (adendo 52e; doc 57x; auditoria 48): VL-1, 1,47 [1,15; 1,89]; com a distância em log, 1,45 [1,15; 1,83] (ciclo 2: 1,75 [1,23; 2,49]); com o efeito fixo de região de saúde de origem × UF da vaga (VL-3), 1,49 [1,15; 1,92] (ciclo 2: 1,91 [1,33; 2,74]); só com vagas a até 0,050 de um corte (VL-2), 1,28 [0,95; 1,72], p de Holm 0,103: inconclusivo, a comparação local tem pouca informação. Perto do corte com a região de saúde de origem × UF da vaga (VL-3 sobre o VL-2): 1,28 [0,95; 1,71], também inconclusivo. No ciclo 2, perto do corte: 1,47 [1,01; 2,14] com o par de UFs e 1,49 [1,04; 2,13] com a região, IC que exclui 1. Inferência com poucos clusters (conjuntos de escolha): p do score bootstrap de Rademacher 0,011 nos ciclos 1–3 e 0,004 no ciclo 2, sem ajuste (doc 57x). Por ciclo, com o par de UFs fixado (adendo 52g; doc 57z; pós-resultado; auditoria pendente): ciclo 1, 1,15 [0,66; 2,01], com 16 conjuntos de escolha; ciclo 2, 1,90 [1,30; 2,78]; ciclo 3, 1,25 [0,90; 1,73], com 23 conjuntos. A leitura fixada no adendo antes de rodar: forte só no ciclo 2, como na especificação base. Os km dos ciclos 1 e 3 têm IC que contém zero e não são usados. Por que o ciclo 2, não sabemos (leituras candidatas, sem teste: informação sobre a grade, vagas por curso, parte de vagas imediatas; doc 57a). Tudo pós-resultado e condicional a se candidatar; pacote do corte.</a:t>
+              <a:t>DETALHE PARA PERGUNTAS: Todas as variantes comparam vagas da mesma UF. Ciclos 1–3 (adendo 52e; doc 57x; auditoria 48): VL-1, 1,47 [1,15; 1,89]; com a distância em log, 1,45 [1,15; 1,83] (ciclo 2: 1,75 [1,23; 2,49]); com o efeito fixo de região de saúde de origem × UF da vaga (VL-3), 1,49 [1,15; 1,92] (ciclo 2: 1,91 [1,33; 2,74]); só com vagas a até 0,050 de um corte (VL-2), 1,28 [0,95; 1,72], p de Holm 0,103: inconclusivo, a comparação local tem pouca informação. Perto do corte com a região de saúde de origem × UF da vaga (VL-3 sobre o VL-2): 1,28 [0,95; 1,71], também inconclusivo. No ciclo 2, perto do corte: 1,47 [1,01; 2,14] com o par de UFs e 1,49 [1,04; 2,13] com a região, IC que exclui 1. Por degrau, com o par de UFs fixado (adendo 52h; doc 57za; pós-resultado; auditoria pendente): 0,300, 1,41 [1,03; 1,93]; 0,400, 1,52 [1,16; 1,99]; razão entre os dois 0,93 [0,69; 1,26], p 0,633, sem diferença detectada (no ciclo 2: 1,99 e 1,84). No degrau 0,300 dos ciclos 1–3, o score bootstrap não confirma ao nível de 5%; no 0,400, confirma. Inferência com poucos clusters (conjuntos de escolha): p do score bootstrap de Rademacher 0,011 nos ciclos 1–3 e 0,004 no ciclo 2, sem ajuste (doc 57x). Por ciclo, com o par de UFs fixado (adendo 52g; doc 57z; pós-resultado; auditoria pendente): ciclo 1, 1,15 [0,66; 2,01], com 16 conjuntos de escolha; ciclo 2, 1,90 [1,30; 2,78]; ciclo 3, 1,25 [0,90; 1,73], com 23 conjuntos. A leitura fixada no adendo antes de rodar: forte só no ciclo 2, como na especificação base. Os km dos ciclos 1 e 3 têm IC que contém zero e não são usados. Por que o ciclo 2, não sabemos (leituras candidatas, sem teste: informação sobre a grade, vagas por curso, parte de vagas imediatas; doc 57a). Tudo pós-resultado e condicional a se candidatar; pacote do corte.</a:t>
             </a:r>
           </a:p>
         </p:txBody>
@@ -19796,7 +19796,7 @@
                 </a:solidFill>
                 <a:latin typeface="Montserrat"/>
               </a:rPr>
-              <a:t> log da distância; região × UF; score bootstrap (p 0,011).</a:t>
+              <a:t> log da distância; região × UF; por degrau; score bootstrap.</a:t>
             </a:r>
           </a:p>
         </p:txBody>
@@ -19933,8 +19933,8 @@
         </p:blipFill>
         <p:spPr>
           <a:xfrm>
-            <a:off x="891235" y="804672"/>
-            <a:ext cx="10397338" cy="3803904"/>
+            <a:off x="1836448" y="804672"/>
+            <a:ext cx="8506913" cy="3803904"/>
           </a:xfrm>
           <a:prstGeom prst="rect">
             <a:avLst/>
@@ -19999,7 +19999,7 @@
                 </a:solidFill>
                 <a:latin typeface="Montserrat"/>
               </a:rPr>
-              <a:t>output/rdd_bolsa/VL_estimativas.csv (adendo 52e; doc 57x; auditoria 48); output/rdd_bolsa/VG_estimativas.csv (adendo 52g; doc 57z; auditoria pendente); output/apresentacao_banca2/curto_robustez_escolha.png.</a:t>
+              <a:t>output/rdd_bolsa/VL_estimativas.csv (adendo 52e; doc 57x; auditoria 48); output/rdd_bolsa/VG_estimativas.csv (adendo 52g; doc 57z) e VK_estimativas.csv (adendo 52h; doc 57za), auditoria pendente; output/apresentacao_banca2/curto_robustez_escolha.png.</a:t>
             </a:r>
           </a:p>
         </p:txBody>
